--- a/downloads/presentations/modules/int-200.pptx
+++ b/downloads/presentations/modules/int-200.pptx
@@ -614,7 +614,8 @@
             <a:r>
               <a:rPr lang="en-US" dirty="0"/>
               <a:t>Topic Deep Dive
-Use case intake also supports portfolio management. When agencies collect use cases in a consistent format, leaders can compare proposals across programs, identify common infrastructure needs, avoid duplicative procurements, and align AI investments with strategic priorities. The intake record becomes the first governance artifact in the AI lifecycle.</a:t>
+Use case intake also supports portfolio management. When agencies collect use cases in a consistent format, leaders can compare proposals across programs, identify common infrastructure needs, avoid duplicative procurements, and align AI investments with strategic priorities. The intake record becomes the first governance artifact in the AI lifecycle.
+Application guidance: Connect the concept to public health purpose, responsible use, required safeguards, documentation, and the next action a department should take.</a:t>
             </a:r>
             <a:endParaRPr lang="en-US" dirty="0"/>
           </a:p>
@@ -705,7 +706,8 @@
               <a:t>Risks, Failure Modes, and Guardrails
 Risks and failure modes include the following:
 Informal AI experimentation with sensitive or confidential data before review.
-Tool-first proposals that do not solve a real workflow problem.</a:t>
+Tool-first proposals that do not solve a real workflow problem.
+Application guidance: Identify what could go wrong, who could be affected, what safeguards are needed, and what evidence should be reviewed before use expands.</a:t>
             </a:r>
             <a:endParaRPr lang="en-US" dirty="0"/>
           </a:p>
@@ -796,7 +798,8 @@
               <a:t>Risks, Failure Modes, and Guardrails
 Use cases moving forward without ownership, validation, or monitoring plans.
 High-risk public-facing or decision-support uses being treated as low-risk productivity tools.
-Equity, accessibility, and community impacts being considered too late.</a:t>
+Equity, accessibility, and community impacts being considered too late.
+Application guidance: Identify what could go wrong, who could be affected, what safeguards are needed, and what evidence should be reviewed before use expands.</a:t>
             </a:r>
             <a:endParaRPr lang="en-US" dirty="0"/>
           </a:p>
@@ -887,7 +890,8 @@
               <a:t>Risks, Failure Modes, and Guardrails
 Recommended guardrails include the following:
 Require a standard intake worksheet before piloting or procuring AI tools.
-Classify proposed uses by data sensitivity, automation level, public-facing impact, and decision consequence.</a:t>
+Classify proposed uses by data sensitivity, automation level, public-facing impact, and decision consequence.
+Application guidance: Identify what could go wrong, who could be affected, what safeguards are needed, and what evidence should be reviewed before use expands.</a:t>
             </a:r>
             <a:endParaRPr lang="en-US" dirty="0"/>
           </a:p>
@@ -978,7 +982,8 @@
               <a:t>Risks, Failure Modes, and Guardrails
 Route use cases to required reviewers before implementation begins.
 Document use cases that are rejected, deferred, or approved with conditions.
-Maintain a portfolio view of approved, active, paused, and retired AI uses.</a:t>
+Maintain a portfolio view of approved, active, paused, and retired AI uses.
+Application guidance: Identify what could go wrong, who could be affected, what safeguards are needed, and what evidence should be reviewed before use expands.</a:t>
             </a:r>
             <a:endParaRPr lang="en-US" dirty="0"/>
           </a:p>
@@ -1069,7 +1074,8 @@
               <a:t>Reflection Questions
 Where does this topic appear in your agency, program, or workflow?
 Which staff roles would need to understand or apply this concept before AI use is approved?
-What could go wrong if this topic is not addressed before implementation?</a:t>
+What could go wrong if this topic is not addressed before implementation?
+Application guidance: Connect the concept to public health purpose, responsible use, required safeguards, documentation, and the next action a department should take.</a:t>
             </a:r>
             <a:endParaRPr lang="en-US" dirty="0"/>
           </a:p>
@@ -1159,7 +1165,8 @@
               <a:rPr lang="en-US" dirty="0"/>
               <a:t>Reflection Questions
 What evidence would governance, leadership, or operations staff need before moving forward?
-Which policy, data, equity, privacy, security, or workflow questions remain unresolved?</a:t>
+Which policy, data, equity, privacy, security, or workflow questions remain unresolved?
+Application guidance: Connect the concept to public health purpose, responsible use, required safeguards, documentation, and the next action a department should take.</a:t>
             </a:r>
             <a:endParaRPr lang="en-US" dirty="0"/>
           </a:p>
@@ -1248,7 +1255,8 @@
             <a:r>
               <a:rPr lang="en-US" dirty="0"/>
               <a:t>Practical Exercise
-Complete a use case intake and triage worksheet for one real or realistic public health workflow. Include the problem statement, workflow, intended users, data sources, AI-supported task, output, potential benefit, risk level, required reviewers, readiness gaps, and recommendation to proceed, defer, redesign, or reject.</a:t>
+Complete a use case intake and triage worksheet for one real or realistic public health workflow. Include the problem statement, workflow, intended users, data sources, AI-supported task, output, potential benefit, risk level, required reviewers, readiness gaps, and recommendation to proceed, defer, redesign, or reject.
+Application guidance: Use the assignment to test whether you can explain the concept, apply it to a realistic public health situation, and identify what would need review before the work moves forward.</a:t>
             </a:r>
             <a:endParaRPr lang="en-US" dirty="0"/>
           </a:p>
@@ -1339,7 +1347,8 @@
               <a:t>Expected Artifact or Evidence
 Completed AI use case intake worksheet
 Risk and readiness triage decision
-List of required reviewers and next steps</a:t>
+List of required reviewers and next steps
+Application guidance: Connect the concept to public health purpose, responsible use, required safeguards, documentation, and the next action a department should take.</a:t>
             </a:r>
             <a:endParaRPr lang="en-US" dirty="0"/>
           </a:p>
@@ -1428,7 +1437,8 @@
             <a:r>
               <a:rPr lang="en-US" dirty="0"/>
               <a:t>Expected Artifact or Evidence
-Documented rationale for proceeding, deferring, redesigning, or rejecting the use case</a:t>
+Documented rationale for proceeding, deferring, redesigning, or rejecting the use case
+Application guidance: Connect the concept to public health purpose, responsible use, required safeguards, documentation, and the next action a department should take.</a:t>
             </a:r>
             <a:endParaRPr lang="en-US" dirty="0"/>
           </a:p>
@@ -1612,7 +1622,8 @@
 Completed AI use case intake worksheet
 Risk and readiness triage decision
 List of required reviewers and next steps
-Documented rationale for proceeding, deferring, redesigning, or rejecting the use case</a:t>
+Documented rationale for proceeding, deferring, redesigning, or rejecting the use case
+Application guidance: Use the assignment to test whether you can explain the concept, apply it to a realistic public health situation, and identify what would need review before the work moves forward.</a:t>
             </a:r>
             <a:endParaRPr lang="en-US" dirty="0"/>
           </a:p>
@@ -1705,7 +1716,8 @@
 2. Which proposal should usually receive higher-risk triage?
 3. What should happen when a proposed workflow problem can be solved without AI?
 4. Which item belongs in an intake worksheet?
-5. What is strong evidence of completion?</a:t>
+5. What is strong evidence of completion?
+Application guidance: Use the assignment to test whether you can explain the concept, apply it to a realistic public health situation, and identify what would need review before the work moves forward.</a:t>
             </a:r>
             <a:endParaRPr lang="en-US" dirty="0"/>
           </a:p>
@@ -1798,7 +1810,8 @@
 NIST Generative AI Profile: https://www.nist.gov/publications/artificial-intelligence-risk-management-framework-generative-artificial-intelligence
 CDC Public Health Data Strategy and Data Modernization resources: https://www.cdc.gov/public-health-data-strategy/php/about/index.html
 OWASP guidance for LLM application security
-Agency policies for privacy, cybersecurity, records, procurement, accessibility, and public communications</a:t>
+Agency policies for privacy, cybersecurity, records, procurement, accessibility, and public communications
+Application guidance: Connect the concept to public health purpose, responsible use, required safeguards, documentation, and the next action a department should take.</a:t>
             </a:r>
             <a:endParaRPr lang="en-US" dirty="0"/>
           </a:p>
@@ -1887,7 +1900,8 @@
             <a:r>
               <a:rPr lang="en-US" dirty="0"/>
               <a:t>References and Resources
-Relevant public health program SOPs, data governance documentation, and implementation plans</a:t>
+Relevant public health program SOPs, data governance documentation, and implementation plans
+Application guidance: Connect the concept to public health purpose, responsible use, required safeguards, documentation, and the next action a department should take.</a:t>
             </a:r>
             <a:endParaRPr lang="en-US" dirty="0"/>
           </a:p>
@@ -2166,7 +2180,8 @@
 Distinguish between low-risk, moderate-risk, and high-risk AI use cases based on data sensitivity, workflow impact, public-facing use, automation level, and potential harm.
 Identify when a use case should be routed to privacy, legal, IT, cybersecurity, equity, procurement, communications, or executive review.
 Recognize use cases that should not proceed because AI is unnecessary, inappropriate, unsafe, or unsupported by available data.
-Produce a use case intake and triage worksheet that can support governance review and portfolio prioritization.</a:t>
+Produce a use case intake and triage worksheet that can support governance review and portfolio prioritization.
+Application guidance: Use the assignment to test whether you can explain the concept, apply it to a realistic public health situation, and identify what would need review before the work moves forward.</a:t>
             </a:r>
             <a:endParaRPr lang="en-US" dirty="0"/>
           </a:p>
@@ -2257,7 +2272,8 @@
               <a:t>Module Overview
 AI use case intake is the structured process of receiving, describing, screening, and routing ideas for AI-supported work before a tool is purchased, piloted, or used. In public health, this step is essential because AI ideas often begin as informal suggestions to save time, summarize information, automate a task, or improve decision support. Without a common intake process, agencies may approve low-value or high-risk ideas too quickly while overlooking use cases that could improve timeliness, quality, equity, or workforce capacity.
 This module teaches learners how to describe a potential AI use case in operational terms, identify the data involved, assess the level of risk, and determine which review pathway is needed. The goal is not to turn every staff member into an AI expert. The goal is to create a practical front door so AI ideas are documented consistently and routed to the right reviewers before implementation work begins.
-A strong intake process protects both innovation and accountability. It helps agencies avoid ad hoc experimentation with sensitive data, unsupported vendor demonstrations, unclear ownership, and tools that do not fit public health authority or workflow needs. It also creates a record of what was considered, why it was prioritized or deferred, and what safeguards would be needed for the idea to proceed.</a:t>
+A strong intake process protects both innovation and accountability. It helps agencies avoid ad hoc experimentation with sensitive data, unsupported vendor demonstrations, unclear ownership, and tools that do not fit public health authority or workflow needs. It also creates a record of what was considered, why it was prioritized or deferred, and what safeguards would be needed for the idea to proceed.
+Application guidance: Connect the concept to public health purpose, responsible use, required safeguards, documentation, and the next action a department should take.</a:t>
             </a:r>
             <a:endParaRPr lang="en-US" dirty="0"/>
           </a:p>
@@ -2346,7 +2362,8 @@
             <a:r>
               <a:rPr lang="en-US" dirty="0"/>
               <a:t>Jurisdiction and Agency Policy Note
-This module provides national-level training guidance for public health agencies and partners. It is not legal advice and does not replace review by agency legal counsel, privacy officers, procurement officials, civil rights staff, records officers, or other authorized decision-makers. Requirements may vary by state, locality, territory, Tribe, agency, funding source, data-sharing agreement, emergency authority, and organizational policy. Learners should use this module to identify the issues that require review and should confirm applicable requirements before approving, procuring, deploying, or publicly communicating about AI-supported work.</a:t>
+This module provides national-level training guidance for public health agencies and partners. It is not legal advice and does not replace review by agency legal counsel, privacy officers, procurement officials, civil rights staff, records officers, or other authorized decision-makers. Requirements may vary by state, locality, territory, Tribe, agency, funding source, data-sharing agreement, emergency authority, and organizational policy. Learners should use this module to identify the issues that require review and should confirm applicable requirements before approving, procuring, deploying, or publicly communicating about AI-supported work.
+Application guidance: Translate this concept into clear decision rights, review steps, documentation expectations, and escalation paths before an AI-supported workflow is approved.</a:t>
             </a:r>
             <a:endParaRPr lang="en-US" dirty="0"/>
           </a:p>
@@ -2435,7 +2452,8 @@
             <a:r>
               <a:rPr lang="en-US" dirty="0"/>
               <a:t>Public Health Example
-A communicable disease program wants to use generative AI to summarize case investigation notes and identify missing information. Intake would document the workflow, the staff who would use the output, the source data, whether protected health information is involved, whether the output would be saved in the system of record, and whether the tool would only summarize or also recommend action. Triage would likely route the use case to privacy, legal, IT, epidemiology, equity, and governance review before any pilot begins.</a:t>
+A communicable disease program wants to use generative AI to summarize case investigation notes and identify missing information. Intake would document the workflow, the staff who would use the output, the source data, whether protected health information is involved, whether the output would be saved in the system of record, and whether the tool would only summarize or also recommend action. Triage would likely route the use case to privacy, legal, IT, epidemiology, equity, and governance review before any pilot begins.
+Application guidance: Connect the concept to public health purpose, responsible use, required safeguards, documentation, and the next action a department should take.</a:t>
             </a:r>
             <a:endParaRPr lang="en-US" dirty="0"/>
           </a:p>
@@ -2526,7 +2544,8 @@
               <a:t>Topic Deep Dive
 An effective intake process begins by defining the problem before selecting the technology. Staff should describe the current workflow, the pain point, the people affected, the desired improvement, and the reason AI is being considered. This prevents technology-first proposals that begin with a tool and then search for a public health problem to justify it. A clear problem statement also helps reviewers decide whether AI is needed or whether a simpler change, such as a template, dashboard, workflow redesign, or rules-based automation, would be safer and more appropriate.
 The next step is to identify the data and output. Reviewers need to know whether the use case involves protected health information, personally identifiable information, confidential public health records, public documents, internal policies, vendor data, community feedback, or synthetic data. They also need to know what the AI output will be: a draft, summary, classification, prediction, recommendation, score, translation, alert, or automated action. Different outputs create different risks and require different levels of review.
-Triage should evaluate both impact and readiness. Impact includes the potential effect on people, programs, public trust, legal obligations, and resource allocation. Readiness includes data quality, system integration, staff capacity, policy alignment, validation feasibility, and operational ownership. A high-impact use case with low readiness may not be rejected permanently, but it should not move into implementation until the readiness gaps are addressed.</a:t>
+Triage should evaluate both impact and readiness. Impact includes the potential effect on people, programs, public trust, legal obligations, and resource allocation. Readiness includes data quality, system integration, staff capacity, policy alignment, validation feasibility, and operational ownership. A high-impact use case with low readiness may not be rejected permanently, but it should not move into implementation until the readiness gaps are addressed.
+Application guidance: Connect the concept to public health purpose, responsible use, required safeguards, documentation, and the next action a department should take.</a:t>
             </a:r>
             <a:endParaRPr lang="en-US" dirty="0"/>
           </a:p>
@@ -3297,8 +3316,8 @@
         </p:nvSpPr>
         <p:spPr>
           <a:xfrm>
-            <a:off x="9966960" y="6537960"/>
-            <a:ext cx="1645920" cy="201168"/>
+            <a:off x="9646920" y="6537960"/>
+            <a:ext cx="1965960" cy="201168"/>
           </a:xfrm>
           <a:prstGeom prst="rect">
             <a:avLst/>
@@ -3322,7 +3341,7 @@
                 <a:ea typeface="Aptos" pitchFamily="34" charset="-122"/>
                 <a:cs typeface="Aptos" pitchFamily="34" charset="-120"/>
               </a:rPr>
-              <a:t>Â© Paula Soper</a:t>
+              <a:t>Copyright Paula Soper</a:t>
             </a:r>
             <a:endParaRPr lang="en-US" sz="800" dirty="0"/>
           </a:p>
@@ -3417,7 +3436,7 @@
         <p:spPr>
           <a:xfrm>
             <a:off x="868680" y="1508760"/>
-            <a:ext cx="6537960" cy="4160520"/>
+            <a:ext cx="6309360" cy="4160520"/>
           </a:xfrm>
           <a:prstGeom prst="rect">
             <a:avLst/>
@@ -3482,12 +3501,12 @@
         </p:nvSpPr>
         <p:spPr>
           <a:xfrm>
-            <a:off x="7909560" y="1417320"/>
-            <a:ext cx="3154680" cy="1828800"/>
+            <a:off x="7635240" y="1325880"/>
+            <a:ext cx="3474720" cy="1325880"/>
           </a:xfrm>
           <a:prstGeom prst="roundRect">
             <a:avLst>
-              <a:gd name="adj" fmla="val 6000"/>
+              <a:gd name="adj" fmla="val 8276"/>
             </a:avLst>
           </a:prstGeom>
           <a:solidFill>
@@ -3509,8 +3528,8 @@
         </p:nvSpPr>
         <p:spPr>
           <a:xfrm>
-            <a:off x="8074152" y="1563624"/>
-            <a:ext cx="2825496" cy="256032"/>
+            <a:off x="7799832" y="1472184"/>
+            <a:ext cx="3145536" cy="256032"/>
           </a:xfrm>
           <a:prstGeom prst="rect">
             <a:avLst/>
@@ -3534,7 +3553,7 @@
                 <a:ea typeface="Aptos" pitchFamily="34" charset="-122"/>
                 <a:cs typeface="Aptos" pitchFamily="34" charset="-120"/>
               </a:rPr>
-              <a:t>Key idea</a:t>
+              <a:t>Core concept</a:t>
             </a:r>
             <a:endParaRPr lang="en-US" sz="1300" dirty="0"/>
           </a:p>
@@ -3548,8 +3567,8 @@
         </p:nvSpPr>
         <p:spPr>
           <a:xfrm>
-            <a:off x="8074152" y="1920240"/>
-            <a:ext cx="2825496" cy="1188720"/>
+            <a:off x="7799832" y="1828800"/>
+            <a:ext cx="3145536" cy="685800"/>
           </a:xfrm>
           <a:prstGeom prst="rect">
             <a:avLst/>
@@ -3589,12 +3608,153 @@
         </p:nvSpPr>
         <p:spPr>
           <a:xfrm>
-            <a:off x="7909560" y="3520440"/>
-            <a:ext cx="3154680" cy="1737360"/>
+            <a:off x="7635240" y="2788920"/>
+            <a:ext cx="3474720" cy="1536192"/>
           </a:xfrm>
           <a:prstGeom prst="roundRect">
             <a:avLst>
-              <a:gd name="adj" fmla="val 6316"/>
+              <a:gd name="adj" fmla="val 7143"/>
+            </a:avLst>
+          </a:prstGeom>
+          <a:solidFill>
+            <a:srgbClr val="FFFFFF">
+              <a:alpha val="88000"/>
+            </a:srgbClr>
+          </a:solidFill>
+          <a:ln w="12700">
+            <a:solidFill>
+              <a:srgbClr val="D6E8F2"/>
+            </a:solidFill>
+            <a:prstDash val="solid"/>
+          </a:ln>
+        </p:spPr>
+      </p:sp>
+      <p:sp>
+        <p:nvSpPr>
+          <p:cNvPr id="14" name="Shape 12"/>
+          <p:cNvSpPr/>
+          <p:nvPr/>
+        </p:nvSpPr>
+        <p:spPr>
+          <a:xfrm>
+            <a:off x="8074152" y="3291840"/>
+            <a:ext cx="2596896" cy="749808"/>
+          </a:xfrm>
+          <a:prstGeom prst="rect">
+            <a:avLst/>
+          </a:prstGeom>
+          <a:solidFill>
+            <a:srgbClr val="EAF6F8"/>
+          </a:solidFill>
+          <a:ln w="12700">
+            <a:solidFill>
+              <a:srgbClr val="8ABBD8"/>
+            </a:solidFill>
+            <a:prstDash val="solid"/>
+          </a:ln>
+        </p:spPr>
+      </p:sp>
+      <p:sp>
+        <p:nvSpPr>
+          <p:cNvPr id="15" name="Shape 13"/>
+          <p:cNvSpPr/>
+          <p:nvPr/>
+        </p:nvSpPr>
+        <p:spPr>
+          <a:xfrm>
+            <a:off x="8202168" y="3721608"/>
+            <a:ext cx="2340864" cy="0"/>
+          </a:xfrm>
+          <a:prstGeom prst="line">
+            <a:avLst/>
+          </a:prstGeom>
+          <a:noFill/>
+          <a:ln w="19050">
+            <a:solidFill>
+              <a:srgbClr val="0068B7"/>
+            </a:solidFill>
+            <a:prstDash val="solid"/>
+          </a:ln>
+        </p:spPr>
+      </p:sp>
+      <p:sp>
+        <p:nvSpPr>
+          <p:cNvPr id="16" name="Shape 14"/>
+          <p:cNvSpPr/>
+          <p:nvPr/>
+        </p:nvSpPr>
+        <p:spPr>
+          <a:xfrm>
+            <a:off x="9198864" y="4206240"/>
+            <a:ext cx="347472" cy="347472"/>
+          </a:xfrm>
+          <a:prstGeom prst="ellipse">
+            <a:avLst/>
+          </a:prstGeom>
+          <a:solidFill>
+            <a:srgbClr val="2F8A28"/>
+          </a:solidFill>
+          <a:ln w="12700">
+            <a:solidFill>
+              <a:srgbClr val="2F8A28"/>
+            </a:solidFill>
+            <a:prstDash val="solid"/>
+          </a:ln>
+        </p:spPr>
+      </p:sp>
+      <p:sp>
+        <p:nvSpPr>
+          <p:cNvPr id="17" name="Text 15"/>
+          <p:cNvSpPr/>
+          <p:nvPr/>
+        </p:nvSpPr>
+        <p:spPr>
+          <a:xfrm>
+            <a:off x="7909560" y="3977640"/>
+            <a:ext cx="2926080" cy="182880"/>
+          </a:xfrm>
+          <a:prstGeom prst="rect">
+            <a:avLst/>
+          </a:prstGeom>
+          <a:noFill/>
+          <a:ln/>
+        </p:spPr>
+        <p:txBody>
+          <a:bodyPr wrap="square" lIns="0" tIns="0" rIns="0" bIns="0" rtlCol="0" anchor="ctr"/>
+          <a:lstStyle/>
+          <a:p>
+            <a:pPr algn="ctr" indent="0" marL="0">
+              <a:buNone/>
+            </a:pPr>
+            <a:r>
+              <a:rPr lang="en-US" sz="1000" dirty="0">
+                <a:solidFill>
+                  <a:srgbClr val="003A63"/>
+                </a:solidFill>
+                <a:latin typeface="Aptos" pitchFamily="34" charset="0"/>
+                <a:ea typeface="Aptos" pitchFamily="34" charset="-122"/>
+                <a:cs typeface="Aptos" pitchFamily="34" charset="-120"/>
+              </a:rPr>
+              <a:t>Concept to action</a:t>
+            </a:r>
+            <a:endParaRPr lang="en-US" sz="1000" dirty="0"/>
+          </a:p>
+        </p:txBody>
+      </p:sp>
+      <p:sp>
+        <p:nvSpPr>
+          <p:cNvPr id="18" name="Shape 16"/>
+          <p:cNvSpPr/>
+          <p:nvPr/>
+        </p:nvSpPr>
+        <p:spPr>
+          <a:xfrm>
+            <a:off x="7635240" y="4498848"/>
+            <a:ext cx="3474720" cy="1143000"/>
+          </a:xfrm>
+          <a:prstGeom prst="roundRect">
+            <a:avLst>
+              <a:gd name="adj" fmla="val 9600"/>
             </a:avLst>
           </a:prstGeom>
           <a:solidFill>
@@ -3610,14 +3770,14 @@
       </p:sp>
       <p:sp>
         <p:nvSpPr>
-          <p:cNvPr id="14" name="Text 12"/>
-          <p:cNvSpPr/>
-          <p:nvPr/>
-        </p:nvSpPr>
-        <p:spPr>
-          <a:xfrm>
-            <a:off x="8074152" y="3666744"/>
-            <a:ext cx="2825496" cy="256032"/>
+          <p:cNvPr id="19" name="Text 17"/>
+          <p:cNvSpPr/>
+          <p:nvPr/>
+        </p:nvSpPr>
+        <p:spPr>
+          <a:xfrm>
+            <a:off x="7799832" y="4645152"/>
+            <a:ext cx="3145536" cy="256032"/>
           </a:xfrm>
           <a:prstGeom prst="rect">
             <a:avLst/>
@@ -3641,7 +3801,7 @@
                 <a:ea typeface="Aptos" pitchFamily="34" charset="-122"/>
                 <a:cs typeface="Aptos" pitchFamily="34" charset="-120"/>
               </a:rPr>
-              <a:t>Use this for</a:t>
+              <a:t>Apply it</a:t>
             </a:r>
             <a:endParaRPr lang="en-US" sz="1300" dirty="0"/>
           </a:p>
@@ -3649,14 +3809,14 @@
       </p:sp>
       <p:sp>
         <p:nvSpPr>
-          <p:cNvPr id="15" name="Text 13"/>
-          <p:cNvSpPr/>
-          <p:nvPr/>
-        </p:nvSpPr>
-        <p:spPr>
-          <a:xfrm>
-            <a:off x="8074152" y="4023360"/>
-            <a:ext cx="2825496" cy="1097280"/>
+          <p:cNvPr id="20" name="Text 18"/>
+          <p:cNvSpPr/>
+          <p:nvPr/>
+        </p:nvSpPr>
+        <p:spPr>
+          <a:xfrm>
+            <a:off x="7799832" y="5001768"/>
+            <a:ext cx="3145536" cy="502920"/>
           </a:xfrm>
           <a:prstGeom prst="rect">
             <a:avLst/>
@@ -3682,7 +3842,7 @@
                 <a:ea typeface="Aptos" pitchFamily="34" charset="-122"/>
                 <a:cs typeface="Aptos" pitchFamily="34" charset="-120"/>
               </a:rPr>
-              <a:t>Connect the concept to public health decisions, safeguards, documentation, or implementation work.</a:t>
+              <a:t>Connect the concept to public health purpose, responsible use, required safeguards, documentation, and the next action a department should take.</a:t>
             </a:r>
             <a:endParaRPr lang="en-US" sz="1550" dirty="0"/>
           </a:p>
@@ -3856,8 +4016,8 @@
         </p:nvSpPr>
         <p:spPr>
           <a:xfrm>
-            <a:off x="9966960" y="6537960"/>
-            <a:ext cx="1645920" cy="201168"/>
+            <a:off x="9646920" y="6537960"/>
+            <a:ext cx="1965960" cy="201168"/>
           </a:xfrm>
           <a:prstGeom prst="rect">
             <a:avLst/>
@@ -3881,7 +4041,7 @@
                 <a:ea typeface="Aptos" pitchFamily="34" charset="-122"/>
                 <a:cs typeface="Aptos" pitchFamily="34" charset="-120"/>
               </a:rPr>
-              <a:t>Â© Paula Soper</a:t>
+              <a:t>Copyright Paula Soper</a:t>
             </a:r>
             <a:endParaRPr lang="en-US" sz="800" dirty="0"/>
           </a:p>
@@ -3928,77 +4088,13 @@
       </p:sp>
       <p:sp>
         <p:nvSpPr>
-          <p:cNvPr id="8" name="Shape 6"/>
+          <p:cNvPr id="8" name="Text 6"/>
           <p:cNvSpPr/>
           <p:nvPr/>
         </p:nvSpPr>
         <p:spPr>
           <a:xfrm>
             <a:off x="640080" y="658368"/>
-            <a:ext cx="420624" cy="420624"/>
-          </a:xfrm>
-          <a:prstGeom prst="ellipse">
-            <a:avLst/>
-          </a:prstGeom>
-          <a:solidFill>
-            <a:srgbClr val="0068B7"/>
-          </a:solidFill>
-          <a:ln w="12700">
-            <a:solidFill>
-              <a:srgbClr val="0068B7"/>
-            </a:solidFill>
-            <a:prstDash val="solid"/>
-          </a:ln>
-        </p:spPr>
-      </p:sp>
-      <p:sp>
-        <p:nvSpPr>
-          <p:cNvPr id="9" name="Text 7"/>
-          <p:cNvSpPr/>
-          <p:nvPr/>
-        </p:nvSpPr>
-        <p:spPr>
-          <a:xfrm>
-            <a:off x="640080" y="731520"/>
-            <a:ext cx="420624" cy="164592"/>
-          </a:xfrm>
-          <a:prstGeom prst="rect">
-            <a:avLst/>
-          </a:prstGeom>
-          <a:noFill/>
-          <a:ln/>
-        </p:spPr>
-        <p:txBody>
-          <a:bodyPr wrap="square" lIns="0" tIns="0" rIns="0" bIns="0" rtlCol="0" anchor="ctr"/>
-          <a:lstStyle/>
-          <a:p>
-            <a:pPr algn="ctr" indent="0" marL="0">
-              <a:buNone/>
-            </a:pPr>
-            <a:r>
-              <a:rPr lang="en-US" sz="1100" b="1" dirty="0">
-                <a:solidFill>
-                  <a:srgbClr val="FFFFFF"/>
-                </a:solidFill>
-                <a:latin typeface="Aptos" pitchFamily="34" charset="0"/>
-                <a:ea typeface="Aptos" pitchFamily="34" charset="-122"/>
-                <a:cs typeface="Aptos" pitchFamily="34" charset="-120"/>
-              </a:rPr>
-              <a:t>6</a:t>
-            </a:r>
-            <a:endParaRPr lang="en-US" sz="1100" dirty="0"/>
-          </a:p>
-        </p:txBody>
-      </p:sp>
-      <p:sp>
-        <p:nvSpPr>
-          <p:cNvPr id="10" name="Text 8"/>
-          <p:cNvSpPr/>
-          <p:nvPr/>
-        </p:nvSpPr>
-        <p:spPr>
-          <a:xfrm>
-            <a:off x="640080" y="621792"/>
             <a:ext cx="10881360" cy="713232"/>
           </a:xfrm>
           <a:prstGeom prst="rect">
@@ -4033,14 +4129,14 @@
       </p:sp>
       <p:sp>
         <p:nvSpPr>
-          <p:cNvPr id="11" name="Text 9"/>
+          <p:cNvPr id="9" name="Text 7"/>
           <p:cNvSpPr/>
           <p:nvPr/>
         </p:nvSpPr>
         <p:spPr>
           <a:xfrm>
             <a:off x="868680" y="1508760"/>
-            <a:ext cx="6537960" cy="4160520"/>
+            <a:ext cx="6309360" cy="4160520"/>
           </a:xfrm>
           <a:prstGeom prst="rect">
             <a:avLst/>
@@ -4099,18 +4195,18 @@
       </p:sp>
       <p:sp>
         <p:nvSpPr>
-          <p:cNvPr id="12" name="Shape 10"/>
-          <p:cNvSpPr/>
-          <p:nvPr/>
-        </p:nvSpPr>
-        <p:spPr>
-          <a:xfrm>
-            <a:off x="7909560" y="1417320"/>
-            <a:ext cx="3154680" cy="1828800"/>
+          <p:cNvPr id="10" name="Shape 8"/>
+          <p:cNvSpPr/>
+          <p:nvPr/>
+        </p:nvSpPr>
+        <p:spPr>
+          <a:xfrm>
+            <a:off x="7635240" y="1325880"/>
+            <a:ext cx="3474720" cy="1325880"/>
           </a:xfrm>
           <a:prstGeom prst="roundRect">
             <a:avLst>
-              <a:gd name="adj" fmla="val 6000"/>
+              <a:gd name="adj" fmla="val 8276"/>
             </a:avLst>
           </a:prstGeom>
           <a:solidFill>
@@ -4126,14 +4222,14 @@
       </p:sp>
       <p:sp>
         <p:nvSpPr>
-          <p:cNvPr id="13" name="Text 11"/>
-          <p:cNvSpPr/>
-          <p:nvPr/>
-        </p:nvSpPr>
-        <p:spPr>
-          <a:xfrm>
-            <a:off x="8074152" y="1563624"/>
-            <a:ext cx="2825496" cy="256032"/>
+          <p:cNvPr id="11" name="Text 9"/>
+          <p:cNvSpPr/>
+          <p:nvPr/>
+        </p:nvSpPr>
+        <p:spPr>
+          <a:xfrm>
+            <a:off x="7799832" y="1472184"/>
+            <a:ext cx="3145536" cy="256032"/>
           </a:xfrm>
           <a:prstGeom prst="rect">
             <a:avLst/>
@@ -4157,7 +4253,7 @@
                 <a:ea typeface="Aptos" pitchFamily="34" charset="-122"/>
                 <a:cs typeface="Aptos" pitchFamily="34" charset="-120"/>
               </a:rPr>
-              <a:t>Key idea</a:t>
+              <a:t>Risk check</a:t>
             </a:r>
             <a:endParaRPr lang="en-US" sz="1300" dirty="0"/>
           </a:p>
@@ -4165,14 +4261,14 @@
       </p:sp>
       <p:sp>
         <p:nvSpPr>
-          <p:cNvPr id="14" name="Text 12"/>
-          <p:cNvSpPr/>
-          <p:nvPr/>
-        </p:nvSpPr>
-        <p:spPr>
-          <a:xfrm>
-            <a:off x="8074152" y="1920240"/>
-            <a:ext cx="2825496" cy="1188720"/>
+          <p:cNvPr id="12" name="Text 10"/>
+          <p:cNvSpPr/>
+          <p:nvPr/>
+        </p:nvSpPr>
+        <p:spPr>
+          <a:xfrm>
+            <a:off x="7799832" y="1828800"/>
+            <a:ext cx="3145536" cy="685800"/>
           </a:xfrm>
           <a:prstGeom prst="rect">
             <a:avLst/>
@@ -4206,18 +4302,171 @@
       </p:sp>
       <p:sp>
         <p:nvSpPr>
-          <p:cNvPr id="15" name="Shape 13"/>
-          <p:cNvSpPr/>
-          <p:nvPr/>
-        </p:nvSpPr>
-        <p:spPr>
-          <a:xfrm>
-            <a:off x="7909560" y="3520440"/>
-            <a:ext cx="3154680" cy="1737360"/>
+          <p:cNvPr id="13" name="Shape 11"/>
+          <p:cNvSpPr/>
+          <p:nvPr/>
+        </p:nvSpPr>
+        <p:spPr>
+          <a:xfrm>
+            <a:off x="7635240" y="2788920"/>
+            <a:ext cx="3474720" cy="1536192"/>
           </a:xfrm>
           <a:prstGeom prst="roundRect">
             <a:avLst>
-              <a:gd name="adj" fmla="val 6316"/>
+              <a:gd name="adj" fmla="val 7143"/>
+            </a:avLst>
+          </a:prstGeom>
+          <a:solidFill>
+            <a:srgbClr val="FFFFFF">
+              <a:alpha val="88000"/>
+            </a:srgbClr>
+          </a:solidFill>
+          <a:ln w="12700">
+            <a:solidFill>
+              <a:srgbClr val="D6E8F2"/>
+            </a:solidFill>
+            <a:prstDash val="solid"/>
+          </a:ln>
+        </p:spPr>
+      </p:sp>
+      <p:sp>
+        <p:nvSpPr>
+          <p:cNvPr id="14" name="Shape 12"/>
+          <p:cNvSpPr/>
+          <p:nvPr/>
+        </p:nvSpPr>
+        <p:spPr>
+          <a:xfrm>
+            <a:off x="8046720" y="3108960"/>
+            <a:ext cx="2651760" cy="896112"/>
+          </a:xfrm>
+          <a:prstGeom prst="arc">
+            <a:avLst/>
+          </a:prstGeom>
+          <a:noFill/>
+          <a:ln w="25400">
+            <a:solidFill>
+              <a:srgbClr val="0068B7"/>
+            </a:solidFill>
+            <a:prstDash val="solid"/>
+          </a:ln>
+        </p:spPr>
+      </p:sp>
+      <p:sp>
+        <p:nvSpPr>
+          <p:cNvPr id="15" name="Text 13"/>
+          <p:cNvSpPr/>
+          <p:nvPr/>
+        </p:nvSpPr>
+        <p:spPr>
+          <a:xfrm>
+            <a:off x="7909560" y="3099816"/>
+            <a:ext cx="2926080" cy="256032"/>
+          </a:xfrm>
+          <a:prstGeom prst="rect">
+            <a:avLst/>
+          </a:prstGeom>
+          <a:noFill/>
+          <a:ln/>
+        </p:spPr>
+        <p:txBody>
+          <a:bodyPr wrap="square" lIns="0" tIns="0" rIns="0" bIns="0" rtlCol="0" anchor="ctr"/>
+          <a:lstStyle/>
+          <a:p>
+            <a:pPr algn="ctr" indent="0" marL="0">
+              <a:buNone/>
+            </a:pPr>
+            <a:r>
+              <a:rPr lang="en-US" sz="1500" b="1" dirty="0">
+                <a:solidFill>
+                  <a:srgbClr val="003A63"/>
+                </a:solidFill>
+                <a:latin typeface="Aptos" pitchFamily="34" charset="0"/>
+                <a:ea typeface="Aptos" pitchFamily="34" charset="-122"/>
+                <a:cs typeface="Aptos" pitchFamily="34" charset="-120"/>
+              </a:rPr>
+              <a:t>Risk</a:t>
+            </a:r>
+            <a:endParaRPr lang="en-US" sz="1500" dirty="0"/>
+          </a:p>
+        </p:txBody>
+      </p:sp>
+      <p:sp>
+        <p:nvSpPr>
+          <p:cNvPr id="16" name="Shape 14"/>
+          <p:cNvSpPr/>
+          <p:nvPr/>
+        </p:nvSpPr>
+        <p:spPr>
+          <a:xfrm>
+            <a:off x="8366760" y="3639312"/>
+            <a:ext cx="2011680" cy="0"/>
+          </a:xfrm>
+          <a:prstGeom prst="line">
+            <a:avLst/>
+          </a:prstGeom>
+          <a:noFill/>
+          <a:ln w="63500">
+            <a:solidFill>
+              <a:srgbClr val="2F8A28"/>
+            </a:solidFill>
+            <a:prstDash val="solid"/>
+          </a:ln>
+        </p:spPr>
+      </p:sp>
+      <p:sp>
+        <p:nvSpPr>
+          <p:cNvPr id="17" name="Text 15"/>
+          <p:cNvSpPr/>
+          <p:nvPr/>
+        </p:nvSpPr>
+        <p:spPr>
+          <a:xfrm>
+            <a:off x="7909560" y="3849624"/>
+            <a:ext cx="2926080" cy="164592"/>
+          </a:xfrm>
+          <a:prstGeom prst="rect">
+            <a:avLst/>
+          </a:prstGeom>
+          <a:noFill/>
+          <a:ln/>
+        </p:spPr>
+        <p:txBody>
+          <a:bodyPr wrap="square" lIns="0" tIns="0" rIns="0" bIns="0" rtlCol="0" anchor="ctr"/>
+          <a:lstStyle/>
+          <a:p>
+            <a:pPr algn="ctr" indent="0" marL="0">
+              <a:buNone/>
+            </a:pPr>
+            <a:r>
+              <a:rPr lang="en-US" sz="900" dirty="0">
+                <a:solidFill>
+                  <a:srgbClr val="003A63"/>
+                </a:solidFill>
+                <a:latin typeface="Aptos" pitchFamily="34" charset="0"/>
+                <a:ea typeface="Aptos" pitchFamily="34" charset="-122"/>
+                <a:cs typeface="Aptos" pitchFamily="34" charset="-120"/>
+              </a:rPr>
+              <a:t>Human review</a:t>
+            </a:r>
+            <a:endParaRPr lang="en-US" sz="900" dirty="0"/>
+          </a:p>
+        </p:txBody>
+      </p:sp>
+      <p:sp>
+        <p:nvSpPr>
+          <p:cNvPr id="18" name="Shape 16"/>
+          <p:cNvSpPr/>
+          <p:nvPr/>
+        </p:nvSpPr>
+        <p:spPr>
+          <a:xfrm>
+            <a:off x="7635240" y="4498848"/>
+            <a:ext cx="3474720" cy="1143000"/>
+          </a:xfrm>
+          <a:prstGeom prst="roundRect">
+            <a:avLst>
+              <a:gd name="adj" fmla="val 9600"/>
             </a:avLst>
           </a:prstGeom>
           <a:solidFill>
@@ -4233,14 +4482,14 @@
       </p:sp>
       <p:sp>
         <p:nvSpPr>
-          <p:cNvPr id="16" name="Text 14"/>
-          <p:cNvSpPr/>
-          <p:nvPr/>
-        </p:nvSpPr>
-        <p:spPr>
-          <a:xfrm>
-            <a:off x="8074152" y="3666744"/>
-            <a:ext cx="2825496" cy="256032"/>
+          <p:cNvPr id="19" name="Text 17"/>
+          <p:cNvSpPr/>
+          <p:nvPr/>
+        </p:nvSpPr>
+        <p:spPr>
+          <a:xfrm>
+            <a:off x="7799832" y="4645152"/>
+            <a:ext cx="3145536" cy="256032"/>
           </a:xfrm>
           <a:prstGeom prst="rect">
             <a:avLst/>
@@ -4264,7 +4513,7 @@
                 <a:ea typeface="Aptos" pitchFamily="34" charset="-122"/>
                 <a:cs typeface="Aptos" pitchFamily="34" charset="-120"/>
               </a:rPr>
-              <a:t>Use this for</a:t>
+              <a:t>Safeguard to plan</a:t>
             </a:r>
             <a:endParaRPr lang="en-US" sz="1300" dirty="0"/>
           </a:p>
@@ -4272,14 +4521,14 @@
       </p:sp>
       <p:sp>
         <p:nvSpPr>
-          <p:cNvPr id="17" name="Text 15"/>
-          <p:cNvSpPr/>
-          <p:nvPr/>
-        </p:nvSpPr>
-        <p:spPr>
-          <a:xfrm>
-            <a:off x="8074152" y="4023360"/>
-            <a:ext cx="2825496" cy="1097280"/>
+          <p:cNvPr id="20" name="Text 18"/>
+          <p:cNvSpPr/>
+          <p:nvPr/>
+        </p:nvSpPr>
+        <p:spPr>
+          <a:xfrm>
+            <a:off x="7799832" y="5001768"/>
+            <a:ext cx="3145536" cy="502920"/>
           </a:xfrm>
           <a:prstGeom prst="rect">
             <a:avLst/>
@@ -4305,7 +4554,7 @@
                 <a:ea typeface="Aptos" pitchFamily="34" charset="-122"/>
                 <a:cs typeface="Aptos" pitchFamily="34" charset="-120"/>
               </a:rPr>
-              <a:t>Connect the concept to public health decisions, safeguards, documentation, or implementation work.</a:t>
+              <a:t>Identify what could go wrong, who could be affected, what safeguards are needed, and what evidence should be reviewed before use expands.</a:t>
             </a:r>
             <a:endParaRPr lang="en-US" sz="1550" dirty="0"/>
           </a:p>
@@ -4479,8 +4728,8 @@
         </p:nvSpPr>
         <p:spPr>
           <a:xfrm>
-            <a:off x="9966960" y="6537960"/>
-            <a:ext cx="1645920" cy="201168"/>
+            <a:off x="9646920" y="6537960"/>
+            <a:ext cx="1965960" cy="201168"/>
           </a:xfrm>
           <a:prstGeom prst="rect">
             <a:avLst/>
@@ -4504,7 +4753,7 @@
                 <a:ea typeface="Aptos" pitchFamily="34" charset="-122"/>
                 <a:cs typeface="Aptos" pitchFamily="34" charset="-120"/>
               </a:rPr>
-              <a:t>Â© Paula Soper</a:t>
+              <a:t>Copyright Paula Soper</a:t>
             </a:r>
             <a:endParaRPr lang="en-US" sz="800" dirty="0"/>
           </a:p>
@@ -4599,7 +4848,7 @@
         <p:spPr>
           <a:xfrm>
             <a:off x="868680" y="1508760"/>
-            <a:ext cx="6537960" cy="4160520"/>
+            <a:ext cx="6309360" cy="4160520"/>
           </a:xfrm>
           <a:prstGeom prst="rect">
             <a:avLst/>
@@ -4664,12 +4913,12 @@
         </p:nvSpPr>
         <p:spPr>
           <a:xfrm>
-            <a:off x="7909560" y="1417320"/>
-            <a:ext cx="3154680" cy="1828800"/>
+            <a:off x="7635240" y="1325880"/>
+            <a:ext cx="3474720" cy="1325880"/>
           </a:xfrm>
           <a:prstGeom prst="roundRect">
             <a:avLst>
-              <a:gd name="adj" fmla="val 6000"/>
+              <a:gd name="adj" fmla="val 8276"/>
             </a:avLst>
           </a:prstGeom>
           <a:solidFill>
@@ -4691,8 +4940,8 @@
         </p:nvSpPr>
         <p:spPr>
           <a:xfrm>
-            <a:off x="8074152" y="1563624"/>
-            <a:ext cx="2825496" cy="256032"/>
+            <a:off x="7799832" y="1472184"/>
+            <a:ext cx="3145536" cy="256032"/>
           </a:xfrm>
           <a:prstGeom prst="rect">
             <a:avLst/>
@@ -4716,7 +4965,7 @@
                 <a:ea typeface="Aptos" pitchFamily="34" charset="-122"/>
                 <a:cs typeface="Aptos" pitchFamily="34" charset="-120"/>
               </a:rPr>
-              <a:t>Key idea</a:t>
+              <a:t>Risk check</a:t>
             </a:r>
             <a:endParaRPr lang="en-US" sz="1300" dirty="0"/>
           </a:p>
@@ -4730,8 +4979,8 @@
         </p:nvSpPr>
         <p:spPr>
           <a:xfrm>
-            <a:off x="8074152" y="1920240"/>
-            <a:ext cx="2825496" cy="1188720"/>
+            <a:off x="7799832" y="1828800"/>
+            <a:ext cx="3145536" cy="685800"/>
           </a:xfrm>
           <a:prstGeom prst="rect">
             <a:avLst/>
@@ -4771,12 +5020,165 @@
         </p:nvSpPr>
         <p:spPr>
           <a:xfrm>
-            <a:off x="7909560" y="3520440"/>
-            <a:ext cx="3154680" cy="1737360"/>
+            <a:off x="7635240" y="2788920"/>
+            <a:ext cx="3474720" cy="1536192"/>
           </a:xfrm>
           <a:prstGeom prst="roundRect">
             <a:avLst>
-              <a:gd name="adj" fmla="val 6316"/>
+              <a:gd name="adj" fmla="val 7143"/>
+            </a:avLst>
+          </a:prstGeom>
+          <a:solidFill>
+            <a:srgbClr val="FFFFFF">
+              <a:alpha val="88000"/>
+            </a:srgbClr>
+          </a:solidFill>
+          <a:ln w="12700">
+            <a:solidFill>
+              <a:srgbClr val="D6E8F2"/>
+            </a:solidFill>
+            <a:prstDash val="solid"/>
+          </a:ln>
+        </p:spPr>
+      </p:sp>
+      <p:sp>
+        <p:nvSpPr>
+          <p:cNvPr id="14" name="Shape 12"/>
+          <p:cNvSpPr/>
+          <p:nvPr/>
+        </p:nvSpPr>
+        <p:spPr>
+          <a:xfrm>
+            <a:off x="8046720" y="3108960"/>
+            <a:ext cx="2651760" cy="896112"/>
+          </a:xfrm>
+          <a:prstGeom prst="arc">
+            <a:avLst/>
+          </a:prstGeom>
+          <a:noFill/>
+          <a:ln w="25400">
+            <a:solidFill>
+              <a:srgbClr val="0068B7"/>
+            </a:solidFill>
+            <a:prstDash val="solid"/>
+          </a:ln>
+        </p:spPr>
+      </p:sp>
+      <p:sp>
+        <p:nvSpPr>
+          <p:cNvPr id="15" name="Text 13"/>
+          <p:cNvSpPr/>
+          <p:nvPr/>
+        </p:nvSpPr>
+        <p:spPr>
+          <a:xfrm>
+            <a:off x="7909560" y="3099816"/>
+            <a:ext cx="2926080" cy="256032"/>
+          </a:xfrm>
+          <a:prstGeom prst="rect">
+            <a:avLst/>
+          </a:prstGeom>
+          <a:noFill/>
+          <a:ln/>
+        </p:spPr>
+        <p:txBody>
+          <a:bodyPr wrap="square" lIns="0" tIns="0" rIns="0" bIns="0" rtlCol="0" anchor="ctr"/>
+          <a:lstStyle/>
+          <a:p>
+            <a:pPr algn="ctr" indent="0" marL="0">
+              <a:buNone/>
+            </a:pPr>
+            <a:r>
+              <a:rPr lang="en-US" sz="1500" b="1" dirty="0">
+                <a:solidFill>
+                  <a:srgbClr val="003A63"/>
+                </a:solidFill>
+                <a:latin typeface="Aptos" pitchFamily="34" charset="0"/>
+                <a:ea typeface="Aptos" pitchFamily="34" charset="-122"/>
+                <a:cs typeface="Aptos" pitchFamily="34" charset="-120"/>
+              </a:rPr>
+              <a:t>Risk</a:t>
+            </a:r>
+            <a:endParaRPr lang="en-US" sz="1500" dirty="0"/>
+          </a:p>
+        </p:txBody>
+      </p:sp>
+      <p:sp>
+        <p:nvSpPr>
+          <p:cNvPr id="16" name="Shape 14"/>
+          <p:cNvSpPr/>
+          <p:nvPr/>
+        </p:nvSpPr>
+        <p:spPr>
+          <a:xfrm>
+            <a:off x="8366760" y="3639312"/>
+            <a:ext cx="2011680" cy="0"/>
+          </a:xfrm>
+          <a:prstGeom prst="line">
+            <a:avLst/>
+          </a:prstGeom>
+          <a:noFill/>
+          <a:ln w="63500">
+            <a:solidFill>
+              <a:srgbClr val="2F8A28"/>
+            </a:solidFill>
+            <a:prstDash val="solid"/>
+          </a:ln>
+        </p:spPr>
+      </p:sp>
+      <p:sp>
+        <p:nvSpPr>
+          <p:cNvPr id="17" name="Text 15"/>
+          <p:cNvSpPr/>
+          <p:nvPr/>
+        </p:nvSpPr>
+        <p:spPr>
+          <a:xfrm>
+            <a:off x="7909560" y="3849624"/>
+            <a:ext cx="2926080" cy="164592"/>
+          </a:xfrm>
+          <a:prstGeom prst="rect">
+            <a:avLst/>
+          </a:prstGeom>
+          <a:noFill/>
+          <a:ln/>
+        </p:spPr>
+        <p:txBody>
+          <a:bodyPr wrap="square" lIns="0" tIns="0" rIns="0" bIns="0" rtlCol="0" anchor="ctr"/>
+          <a:lstStyle/>
+          <a:p>
+            <a:pPr algn="ctr" indent="0" marL="0">
+              <a:buNone/>
+            </a:pPr>
+            <a:r>
+              <a:rPr lang="en-US" sz="900" dirty="0">
+                <a:solidFill>
+                  <a:srgbClr val="003A63"/>
+                </a:solidFill>
+                <a:latin typeface="Aptos" pitchFamily="34" charset="0"/>
+                <a:ea typeface="Aptos" pitchFamily="34" charset="-122"/>
+                <a:cs typeface="Aptos" pitchFamily="34" charset="-120"/>
+              </a:rPr>
+              <a:t>Human review</a:t>
+            </a:r>
+            <a:endParaRPr lang="en-US" sz="900" dirty="0"/>
+          </a:p>
+        </p:txBody>
+      </p:sp>
+      <p:sp>
+        <p:nvSpPr>
+          <p:cNvPr id="18" name="Shape 16"/>
+          <p:cNvSpPr/>
+          <p:nvPr/>
+        </p:nvSpPr>
+        <p:spPr>
+          <a:xfrm>
+            <a:off x="7635240" y="4498848"/>
+            <a:ext cx="3474720" cy="1143000"/>
+          </a:xfrm>
+          <a:prstGeom prst="roundRect">
+            <a:avLst>
+              <a:gd name="adj" fmla="val 9600"/>
             </a:avLst>
           </a:prstGeom>
           <a:solidFill>
@@ -4792,14 +5194,14 @@
       </p:sp>
       <p:sp>
         <p:nvSpPr>
-          <p:cNvPr id="14" name="Text 12"/>
-          <p:cNvSpPr/>
-          <p:nvPr/>
-        </p:nvSpPr>
-        <p:spPr>
-          <a:xfrm>
-            <a:off x="8074152" y="3666744"/>
-            <a:ext cx="2825496" cy="256032"/>
+          <p:cNvPr id="19" name="Text 17"/>
+          <p:cNvSpPr/>
+          <p:nvPr/>
+        </p:nvSpPr>
+        <p:spPr>
+          <a:xfrm>
+            <a:off x="7799832" y="4645152"/>
+            <a:ext cx="3145536" cy="256032"/>
           </a:xfrm>
           <a:prstGeom prst="rect">
             <a:avLst/>
@@ -4823,7 +5225,7 @@
                 <a:ea typeface="Aptos" pitchFamily="34" charset="-122"/>
                 <a:cs typeface="Aptos" pitchFamily="34" charset="-120"/>
               </a:rPr>
-              <a:t>Use this for</a:t>
+              <a:t>Safeguard to plan</a:t>
             </a:r>
             <a:endParaRPr lang="en-US" sz="1300" dirty="0"/>
           </a:p>
@@ -4831,14 +5233,14 @@
       </p:sp>
       <p:sp>
         <p:nvSpPr>
-          <p:cNvPr id="15" name="Text 13"/>
-          <p:cNvSpPr/>
-          <p:nvPr/>
-        </p:nvSpPr>
-        <p:spPr>
-          <a:xfrm>
-            <a:off x="8074152" y="4023360"/>
-            <a:ext cx="2825496" cy="1097280"/>
+          <p:cNvPr id="20" name="Text 18"/>
+          <p:cNvSpPr/>
+          <p:nvPr/>
+        </p:nvSpPr>
+        <p:spPr>
+          <a:xfrm>
+            <a:off x="7799832" y="5001768"/>
+            <a:ext cx="3145536" cy="502920"/>
           </a:xfrm>
           <a:prstGeom prst="rect">
             <a:avLst/>
@@ -4864,7 +5266,7 @@
                 <a:ea typeface="Aptos" pitchFamily="34" charset="-122"/>
                 <a:cs typeface="Aptos" pitchFamily="34" charset="-120"/>
               </a:rPr>
-              <a:t>Connect the concept to public health decisions, safeguards, documentation, or implementation work.</a:t>
+              <a:t>Identify what could go wrong, who could be affected, what safeguards are needed, and what evidence should be reviewed before use expands.</a:t>
             </a:r>
             <a:endParaRPr lang="en-US" sz="1550" dirty="0"/>
           </a:p>
@@ -5038,8 +5440,8 @@
         </p:nvSpPr>
         <p:spPr>
           <a:xfrm>
-            <a:off x="9966960" y="6537960"/>
-            <a:ext cx="1645920" cy="201168"/>
+            <a:off x="9646920" y="6537960"/>
+            <a:ext cx="1965960" cy="201168"/>
           </a:xfrm>
           <a:prstGeom prst="rect">
             <a:avLst/>
@@ -5063,7 +5465,7 @@
                 <a:ea typeface="Aptos" pitchFamily="34" charset="-122"/>
                 <a:cs typeface="Aptos" pitchFamily="34" charset="-120"/>
               </a:rPr>
-              <a:t>Â© Paula Soper</a:t>
+              <a:t>Copyright Paula Soper</a:t>
             </a:r>
             <a:endParaRPr lang="en-US" sz="800" dirty="0"/>
           </a:p>
@@ -5158,7 +5560,7 @@
         <p:spPr>
           <a:xfrm>
             <a:off x="868680" y="1508760"/>
-            <a:ext cx="6537960" cy="4160520"/>
+            <a:ext cx="6309360" cy="4160520"/>
           </a:xfrm>
           <a:prstGeom prst="rect">
             <a:avLst/>
@@ -5223,12 +5625,12 @@
         </p:nvSpPr>
         <p:spPr>
           <a:xfrm>
-            <a:off x="7909560" y="1417320"/>
-            <a:ext cx="3154680" cy="1828800"/>
+            <a:off x="7635240" y="1325880"/>
+            <a:ext cx="3474720" cy="1325880"/>
           </a:xfrm>
           <a:prstGeom prst="roundRect">
             <a:avLst>
-              <a:gd name="adj" fmla="val 6000"/>
+              <a:gd name="adj" fmla="val 8276"/>
             </a:avLst>
           </a:prstGeom>
           <a:solidFill>
@@ -5250,8 +5652,8 @@
         </p:nvSpPr>
         <p:spPr>
           <a:xfrm>
-            <a:off x="8074152" y="1563624"/>
-            <a:ext cx="2825496" cy="256032"/>
+            <a:off x="7799832" y="1472184"/>
+            <a:ext cx="3145536" cy="256032"/>
           </a:xfrm>
           <a:prstGeom prst="rect">
             <a:avLst/>
@@ -5275,7 +5677,7 @@
                 <a:ea typeface="Aptos" pitchFamily="34" charset="-122"/>
                 <a:cs typeface="Aptos" pitchFamily="34" charset="-120"/>
               </a:rPr>
-              <a:t>Key idea</a:t>
+              <a:t>Risk check</a:t>
             </a:r>
             <a:endParaRPr lang="en-US" sz="1300" dirty="0"/>
           </a:p>
@@ -5289,8 +5691,8 @@
         </p:nvSpPr>
         <p:spPr>
           <a:xfrm>
-            <a:off x="8074152" y="1920240"/>
-            <a:ext cx="2825496" cy="1188720"/>
+            <a:off x="7799832" y="1828800"/>
+            <a:ext cx="3145536" cy="685800"/>
           </a:xfrm>
           <a:prstGeom prst="rect">
             <a:avLst/>
@@ -5330,12 +5732,165 @@
         </p:nvSpPr>
         <p:spPr>
           <a:xfrm>
-            <a:off x="7909560" y="3520440"/>
-            <a:ext cx="3154680" cy="1737360"/>
+            <a:off x="7635240" y="2788920"/>
+            <a:ext cx="3474720" cy="1536192"/>
           </a:xfrm>
           <a:prstGeom prst="roundRect">
             <a:avLst>
-              <a:gd name="adj" fmla="val 6316"/>
+              <a:gd name="adj" fmla="val 7143"/>
+            </a:avLst>
+          </a:prstGeom>
+          <a:solidFill>
+            <a:srgbClr val="FFFFFF">
+              <a:alpha val="88000"/>
+            </a:srgbClr>
+          </a:solidFill>
+          <a:ln w="12700">
+            <a:solidFill>
+              <a:srgbClr val="D6E8F2"/>
+            </a:solidFill>
+            <a:prstDash val="solid"/>
+          </a:ln>
+        </p:spPr>
+      </p:sp>
+      <p:sp>
+        <p:nvSpPr>
+          <p:cNvPr id="14" name="Shape 12"/>
+          <p:cNvSpPr/>
+          <p:nvPr/>
+        </p:nvSpPr>
+        <p:spPr>
+          <a:xfrm>
+            <a:off x="8046720" y="3108960"/>
+            <a:ext cx="2651760" cy="896112"/>
+          </a:xfrm>
+          <a:prstGeom prst="arc">
+            <a:avLst/>
+          </a:prstGeom>
+          <a:noFill/>
+          <a:ln w="25400">
+            <a:solidFill>
+              <a:srgbClr val="0068B7"/>
+            </a:solidFill>
+            <a:prstDash val="solid"/>
+          </a:ln>
+        </p:spPr>
+      </p:sp>
+      <p:sp>
+        <p:nvSpPr>
+          <p:cNvPr id="15" name="Text 13"/>
+          <p:cNvSpPr/>
+          <p:nvPr/>
+        </p:nvSpPr>
+        <p:spPr>
+          <a:xfrm>
+            <a:off x="7909560" y="3099816"/>
+            <a:ext cx="2926080" cy="256032"/>
+          </a:xfrm>
+          <a:prstGeom prst="rect">
+            <a:avLst/>
+          </a:prstGeom>
+          <a:noFill/>
+          <a:ln/>
+        </p:spPr>
+        <p:txBody>
+          <a:bodyPr wrap="square" lIns="0" tIns="0" rIns="0" bIns="0" rtlCol="0" anchor="ctr"/>
+          <a:lstStyle/>
+          <a:p>
+            <a:pPr algn="ctr" indent="0" marL="0">
+              <a:buNone/>
+            </a:pPr>
+            <a:r>
+              <a:rPr lang="en-US" sz="1500" b="1" dirty="0">
+                <a:solidFill>
+                  <a:srgbClr val="003A63"/>
+                </a:solidFill>
+                <a:latin typeface="Aptos" pitchFamily="34" charset="0"/>
+                <a:ea typeface="Aptos" pitchFamily="34" charset="-122"/>
+                <a:cs typeface="Aptos" pitchFamily="34" charset="-120"/>
+              </a:rPr>
+              <a:t>Risk</a:t>
+            </a:r>
+            <a:endParaRPr lang="en-US" sz="1500" dirty="0"/>
+          </a:p>
+        </p:txBody>
+      </p:sp>
+      <p:sp>
+        <p:nvSpPr>
+          <p:cNvPr id="16" name="Shape 14"/>
+          <p:cNvSpPr/>
+          <p:nvPr/>
+        </p:nvSpPr>
+        <p:spPr>
+          <a:xfrm>
+            <a:off x="8366760" y="3639312"/>
+            <a:ext cx="2011680" cy="0"/>
+          </a:xfrm>
+          <a:prstGeom prst="line">
+            <a:avLst/>
+          </a:prstGeom>
+          <a:noFill/>
+          <a:ln w="63500">
+            <a:solidFill>
+              <a:srgbClr val="2F8A28"/>
+            </a:solidFill>
+            <a:prstDash val="solid"/>
+          </a:ln>
+        </p:spPr>
+      </p:sp>
+      <p:sp>
+        <p:nvSpPr>
+          <p:cNvPr id="17" name="Text 15"/>
+          <p:cNvSpPr/>
+          <p:nvPr/>
+        </p:nvSpPr>
+        <p:spPr>
+          <a:xfrm>
+            <a:off x="7909560" y="3849624"/>
+            <a:ext cx="2926080" cy="164592"/>
+          </a:xfrm>
+          <a:prstGeom prst="rect">
+            <a:avLst/>
+          </a:prstGeom>
+          <a:noFill/>
+          <a:ln/>
+        </p:spPr>
+        <p:txBody>
+          <a:bodyPr wrap="square" lIns="0" tIns="0" rIns="0" bIns="0" rtlCol="0" anchor="ctr"/>
+          <a:lstStyle/>
+          <a:p>
+            <a:pPr algn="ctr" indent="0" marL="0">
+              <a:buNone/>
+            </a:pPr>
+            <a:r>
+              <a:rPr lang="en-US" sz="900" dirty="0">
+                <a:solidFill>
+                  <a:srgbClr val="003A63"/>
+                </a:solidFill>
+                <a:latin typeface="Aptos" pitchFamily="34" charset="0"/>
+                <a:ea typeface="Aptos" pitchFamily="34" charset="-122"/>
+                <a:cs typeface="Aptos" pitchFamily="34" charset="-120"/>
+              </a:rPr>
+              <a:t>Human review</a:t>
+            </a:r>
+            <a:endParaRPr lang="en-US" sz="900" dirty="0"/>
+          </a:p>
+        </p:txBody>
+      </p:sp>
+      <p:sp>
+        <p:nvSpPr>
+          <p:cNvPr id="18" name="Shape 16"/>
+          <p:cNvSpPr/>
+          <p:nvPr/>
+        </p:nvSpPr>
+        <p:spPr>
+          <a:xfrm>
+            <a:off x="7635240" y="4498848"/>
+            <a:ext cx="3474720" cy="1143000"/>
+          </a:xfrm>
+          <a:prstGeom prst="roundRect">
+            <a:avLst>
+              <a:gd name="adj" fmla="val 9600"/>
             </a:avLst>
           </a:prstGeom>
           <a:solidFill>
@@ -5351,14 +5906,14 @@
       </p:sp>
       <p:sp>
         <p:nvSpPr>
-          <p:cNvPr id="14" name="Text 12"/>
-          <p:cNvSpPr/>
-          <p:nvPr/>
-        </p:nvSpPr>
-        <p:spPr>
-          <a:xfrm>
-            <a:off x="8074152" y="3666744"/>
-            <a:ext cx="2825496" cy="256032"/>
+          <p:cNvPr id="19" name="Text 17"/>
+          <p:cNvSpPr/>
+          <p:nvPr/>
+        </p:nvSpPr>
+        <p:spPr>
+          <a:xfrm>
+            <a:off x="7799832" y="4645152"/>
+            <a:ext cx="3145536" cy="256032"/>
           </a:xfrm>
           <a:prstGeom prst="rect">
             <a:avLst/>
@@ -5382,7 +5937,7 @@
                 <a:ea typeface="Aptos" pitchFamily="34" charset="-122"/>
                 <a:cs typeface="Aptos" pitchFamily="34" charset="-120"/>
               </a:rPr>
-              <a:t>Use this for</a:t>
+              <a:t>Safeguard to plan</a:t>
             </a:r>
             <a:endParaRPr lang="en-US" sz="1300" dirty="0"/>
           </a:p>
@@ -5390,14 +5945,14 @@
       </p:sp>
       <p:sp>
         <p:nvSpPr>
-          <p:cNvPr id="15" name="Text 13"/>
-          <p:cNvSpPr/>
-          <p:nvPr/>
-        </p:nvSpPr>
-        <p:spPr>
-          <a:xfrm>
-            <a:off x="8074152" y="4023360"/>
-            <a:ext cx="2825496" cy="1097280"/>
+          <p:cNvPr id="20" name="Text 18"/>
+          <p:cNvSpPr/>
+          <p:nvPr/>
+        </p:nvSpPr>
+        <p:spPr>
+          <a:xfrm>
+            <a:off x="7799832" y="5001768"/>
+            <a:ext cx="3145536" cy="502920"/>
           </a:xfrm>
           <a:prstGeom prst="rect">
             <a:avLst/>
@@ -5423,7 +5978,7 @@
                 <a:ea typeface="Aptos" pitchFamily="34" charset="-122"/>
                 <a:cs typeface="Aptos" pitchFamily="34" charset="-120"/>
               </a:rPr>
-              <a:t>Connect the concept to public health decisions, safeguards, documentation, or implementation work.</a:t>
+              <a:t>Identify what could go wrong, who could be affected, what safeguards are needed, and what evidence should be reviewed before use expands.</a:t>
             </a:r>
             <a:endParaRPr lang="en-US" sz="1550" dirty="0"/>
           </a:p>
@@ -5597,8 +6152,8 @@
         </p:nvSpPr>
         <p:spPr>
           <a:xfrm>
-            <a:off x="9966960" y="6537960"/>
-            <a:ext cx="1645920" cy="201168"/>
+            <a:off x="9646920" y="6537960"/>
+            <a:ext cx="1965960" cy="201168"/>
           </a:xfrm>
           <a:prstGeom prst="rect">
             <a:avLst/>
@@ -5622,7 +6177,7 @@
                 <a:ea typeface="Aptos" pitchFamily="34" charset="-122"/>
                 <a:cs typeface="Aptos" pitchFamily="34" charset="-120"/>
               </a:rPr>
-              <a:t>Â© Paula Soper</a:t>
+              <a:t>Copyright Paula Soper</a:t>
             </a:r>
             <a:endParaRPr lang="en-US" sz="800" dirty="0"/>
           </a:p>
@@ -5717,7 +6272,7 @@
         <p:spPr>
           <a:xfrm>
             <a:off x="868680" y="1508760"/>
-            <a:ext cx="6537960" cy="4160520"/>
+            <a:ext cx="6309360" cy="4160520"/>
           </a:xfrm>
           <a:prstGeom prst="rect">
             <a:avLst/>
@@ -5782,12 +6337,12 @@
         </p:nvSpPr>
         <p:spPr>
           <a:xfrm>
-            <a:off x="7909560" y="1417320"/>
-            <a:ext cx="3154680" cy="1828800"/>
+            <a:off x="7635240" y="1325880"/>
+            <a:ext cx="3474720" cy="1325880"/>
           </a:xfrm>
           <a:prstGeom prst="roundRect">
             <a:avLst>
-              <a:gd name="adj" fmla="val 6000"/>
+              <a:gd name="adj" fmla="val 8276"/>
             </a:avLst>
           </a:prstGeom>
           <a:solidFill>
@@ -5809,8 +6364,8 @@
         </p:nvSpPr>
         <p:spPr>
           <a:xfrm>
-            <a:off x="8074152" y="1563624"/>
-            <a:ext cx="2825496" cy="256032"/>
+            <a:off x="7799832" y="1472184"/>
+            <a:ext cx="3145536" cy="256032"/>
           </a:xfrm>
           <a:prstGeom prst="rect">
             <a:avLst/>
@@ -5834,7 +6389,7 @@
                 <a:ea typeface="Aptos" pitchFamily="34" charset="-122"/>
                 <a:cs typeface="Aptos" pitchFamily="34" charset="-120"/>
               </a:rPr>
-              <a:t>Key idea</a:t>
+              <a:t>Risk check</a:t>
             </a:r>
             <a:endParaRPr lang="en-US" sz="1300" dirty="0"/>
           </a:p>
@@ -5848,8 +6403,8 @@
         </p:nvSpPr>
         <p:spPr>
           <a:xfrm>
-            <a:off x="8074152" y="1920240"/>
-            <a:ext cx="2825496" cy="1188720"/>
+            <a:off x="7799832" y="1828800"/>
+            <a:ext cx="3145536" cy="685800"/>
           </a:xfrm>
           <a:prstGeom prst="rect">
             <a:avLst/>
@@ -5889,12 +6444,165 @@
         </p:nvSpPr>
         <p:spPr>
           <a:xfrm>
-            <a:off x="7909560" y="3520440"/>
-            <a:ext cx="3154680" cy="1737360"/>
+            <a:off x="7635240" y="2788920"/>
+            <a:ext cx="3474720" cy="1536192"/>
           </a:xfrm>
           <a:prstGeom prst="roundRect">
             <a:avLst>
-              <a:gd name="adj" fmla="val 6316"/>
+              <a:gd name="adj" fmla="val 7143"/>
+            </a:avLst>
+          </a:prstGeom>
+          <a:solidFill>
+            <a:srgbClr val="FFFFFF">
+              <a:alpha val="88000"/>
+            </a:srgbClr>
+          </a:solidFill>
+          <a:ln w="12700">
+            <a:solidFill>
+              <a:srgbClr val="D6E8F2"/>
+            </a:solidFill>
+            <a:prstDash val="solid"/>
+          </a:ln>
+        </p:spPr>
+      </p:sp>
+      <p:sp>
+        <p:nvSpPr>
+          <p:cNvPr id="14" name="Shape 12"/>
+          <p:cNvSpPr/>
+          <p:nvPr/>
+        </p:nvSpPr>
+        <p:spPr>
+          <a:xfrm>
+            <a:off x="8046720" y="3108960"/>
+            <a:ext cx="2651760" cy="896112"/>
+          </a:xfrm>
+          <a:prstGeom prst="arc">
+            <a:avLst/>
+          </a:prstGeom>
+          <a:noFill/>
+          <a:ln w="25400">
+            <a:solidFill>
+              <a:srgbClr val="0068B7"/>
+            </a:solidFill>
+            <a:prstDash val="solid"/>
+          </a:ln>
+        </p:spPr>
+      </p:sp>
+      <p:sp>
+        <p:nvSpPr>
+          <p:cNvPr id="15" name="Text 13"/>
+          <p:cNvSpPr/>
+          <p:nvPr/>
+        </p:nvSpPr>
+        <p:spPr>
+          <a:xfrm>
+            <a:off x="7909560" y="3099816"/>
+            <a:ext cx="2926080" cy="256032"/>
+          </a:xfrm>
+          <a:prstGeom prst="rect">
+            <a:avLst/>
+          </a:prstGeom>
+          <a:noFill/>
+          <a:ln/>
+        </p:spPr>
+        <p:txBody>
+          <a:bodyPr wrap="square" lIns="0" tIns="0" rIns="0" bIns="0" rtlCol="0" anchor="ctr"/>
+          <a:lstStyle/>
+          <a:p>
+            <a:pPr algn="ctr" indent="0" marL="0">
+              <a:buNone/>
+            </a:pPr>
+            <a:r>
+              <a:rPr lang="en-US" sz="1500" b="1" dirty="0">
+                <a:solidFill>
+                  <a:srgbClr val="003A63"/>
+                </a:solidFill>
+                <a:latin typeface="Aptos" pitchFamily="34" charset="0"/>
+                <a:ea typeface="Aptos" pitchFamily="34" charset="-122"/>
+                <a:cs typeface="Aptos" pitchFamily="34" charset="-120"/>
+              </a:rPr>
+              <a:t>Risk</a:t>
+            </a:r>
+            <a:endParaRPr lang="en-US" sz="1500" dirty="0"/>
+          </a:p>
+        </p:txBody>
+      </p:sp>
+      <p:sp>
+        <p:nvSpPr>
+          <p:cNvPr id="16" name="Shape 14"/>
+          <p:cNvSpPr/>
+          <p:nvPr/>
+        </p:nvSpPr>
+        <p:spPr>
+          <a:xfrm>
+            <a:off x="8366760" y="3639312"/>
+            <a:ext cx="2011680" cy="0"/>
+          </a:xfrm>
+          <a:prstGeom prst="line">
+            <a:avLst/>
+          </a:prstGeom>
+          <a:noFill/>
+          <a:ln w="63500">
+            <a:solidFill>
+              <a:srgbClr val="2F8A28"/>
+            </a:solidFill>
+            <a:prstDash val="solid"/>
+          </a:ln>
+        </p:spPr>
+      </p:sp>
+      <p:sp>
+        <p:nvSpPr>
+          <p:cNvPr id="17" name="Text 15"/>
+          <p:cNvSpPr/>
+          <p:nvPr/>
+        </p:nvSpPr>
+        <p:spPr>
+          <a:xfrm>
+            <a:off x="7909560" y="3849624"/>
+            <a:ext cx="2926080" cy="164592"/>
+          </a:xfrm>
+          <a:prstGeom prst="rect">
+            <a:avLst/>
+          </a:prstGeom>
+          <a:noFill/>
+          <a:ln/>
+        </p:spPr>
+        <p:txBody>
+          <a:bodyPr wrap="square" lIns="0" tIns="0" rIns="0" bIns="0" rtlCol="0" anchor="ctr"/>
+          <a:lstStyle/>
+          <a:p>
+            <a:pPr algn="ctr" indent="0" marL="0">
+              <a:buNone/>
+            </a:pPr>
+            <a:r>
+              <a:rPr lang="en-US" sz="900" dirty="0">
+                <a:solidFill>
+                  <a:srgbClr val="003A63"/>
+                </a:solidFill>
+                <a:latin typeface="Aptos" pitchFamily="34" charset="0"/>
+                <a:ea typeface="Aptos" pitchFamily="34" charset="-122"/>
+                <a:cs typeface="Aptos" pitchFamily="34" charset="-120"/>
+              </a:rPr>
+              <a:t>Human review</a:t>
+            </a:r>
+            <a:endParaRPr lang="en-US" sz="900" dirty="0"/>
+          </a:p>
+        </p:txBody>
+      </p:sp>
+      <p:sp>
+        <p:nvSpPr>
+          <p:cNvPr id="18" name="Shape 16"/>
+          <p:cNvSpPr/>
+          <p:nvPr/>
+        </p:nvSpPr>
+        <p:spPr>
+          <a:xfrm>
+            <a:off x="7635240" y="4498848"/>
+            <a:ext cx="3474720" cy="1143000"/>
+          </a:xfrm>
+          <a:prstGeom prst="roundRect">
+            <a:avLst>
+              <a:gd name="adj" fmla="val 9600"/>
             </a:avLst>
           </a:prstGeom>
           <a:solidFill>
@@ -5910,14 +6618,14 @@
       </p:sp>
       <p:sp>
         <p:nvSpPr>
-          <p:cNvPr id="14" name="Text 12"/>
-          <p:cNvSpPr/>
-          <p:nvPr/>
-        </p:nvSpPr>
-        <p:spPr>
-          <a:xfrm>
-            <a:off x="8074152" y="3666744"/>
-            <a:ext cx="2825496" cy="256032"/>
+          <p:cNvPr id="19" name="Text 17"/>
+          <p:cNvSpPr/>
+          <p:nvPr/>
+        </p:nvSpPr>
+        <p:spPr>
+          <a:xfrm>
+            <a:off x="7799832" y="4645152"/>
+            <a:ext cx="3145536" cy="256032"/>
           </a:xfrm>
           <a:prstGeom prst="rect">
             <a:avLst/>
@@ -5941,7 +6649,7 @@
                 <a:ea typeface="Aptos" pitchFamily="34" charset="-122"/>
                 <a:cs typeface="Aptos" pitchFamily="34" charset="-120"/>
               </a:rPr>
-              <a:t>Use this for</a:t>
+              <a:t>Safeguard to plan</a:t>
             </a:r>
             <a:endParaRPr lang="en-US" sz="1300" dirty="0"/>
           </a:p>
@@ -5949,14 +6657,14 @@
       </p:sp>
       <p:sp>
         <p:nvSpPr>
-          <p:cNvPr id="15" name="Text 13"/>
-          <p:cNvSpPr/>
-          <p:nvPr/>
-        </p:nvSpPr>
-        <p:spPr>
-          <a:xfrm>
-            <a:off x="8074152" y="4023360"/>
-            <a:ext cx="2825496" cy="1097280"/>
+          <p:cNvPr id="20" name="Text 18"/>
+          <p:cNvSpPr/>
+          <p:nvPr/>
+        </p:nvSpPr>
+        <p:spPr>
+          <a:xfrm>
+            <a:off x="7799832" y="5001768"/>
+            <a:ext cx="3145536" cy="502920"/>
           </a:xfrm>
           <a:prstGeom prst="rect">
             <a:avLst/>
@@ -5982,7 +6690,7 @@
                 <a:ea typeface="Aptos" pitchFamily="34" charset="-122"/>
                 <a:cs typeface="Aptos" pitchFamily="34" charset="-120"/>
               </a:rPr>
-              <a:t>Connect the concept to public health decisions, safeguards, documentation, or implementation work.</a:t>
+              <a:t>Identify what could go wrong, who could be affected, what safeguards are needed, and what evidence should be reviewed before use expands.</a:t>
             </a:r>
             <a:endParaRPr lang="en-US" sz="1550" dirty="0"/>
           </a:p>
@@ -6156,8 +6864,8 @@
         </p:nvSpPr>
         <p:spPr>
           <a:xfrm>
-            <a:off x="9966960" y="6537960"/>
-            <a:ext cx="1645920" cy="201168"/>
+            <a:off x="9646920" y="6537960"/>
+            <a:ext cx="1965960" cy="201168"/>
           </a:xfrm>
           <a:prstGeom prst="rect">
             <a:avLst/>
@@ -6181,7 +6889,7 @@
                 <a:ea typeface="Aptos" pitchFamily="34" charset="-122"/>
                 <a:cs typeface="Aptos" pitchFamily="34" charset="-120"/>
               </a:rPr>
-              <a:t>Â© Paula Soper</a:t>
+              <a:t>Copyright Paula Soper</a:t>
             </a:r>
             <a:endParaRPr lang="en-US" sz="800" dirty="0"/>
           </a:p>
@@ -6228,77 +6936,13 @@
       </p:sp>
       <p:sp>
         <p:nvSpPr>
-          <p:cNvPr id="8" name="Shape 6"/>
+          <p:cNvPr id="8" name="Text 6"/>
           <p:cNvSpPr/>
           <p:nvPr/>
         </p:nvSpPr>
         <p:spPr>
           <a:xfrm>
             <a:off x="640080" y="658368"/>
-            <a:ext cx="420624" cy="420624"/>
-          </a:xfrm>
-          <a:prstGeom prst="ellipse">
-            <a:avLst/>
-          </a:prstGeom>
-          <a:solidFill>
-            <a:srgbClr val="0068B7"/>
-          </a:solidFill>
-          <a:ln w="12700">
-            <a:solidFill>
-              <a:srgbClr val="0068B7"/>
-            </a:solidFill>
-            <a:prstDash val="solid"/>
-          </a:ln>
-        </p:spPr>
-      </p:sp>
-      <p:sp>
-        <p:nvSpPr>
-          <p:cNvPr id="9" name="Text 7"/>
-          <p:cNvSpPr/>
-          <p:nvPr/>
-        </p:nvSpPr>
-        <p:spPr>
-          <a:xfrm>
-            <a:off x="640080" y="731520"/>
-            <a:ext cx="420624" cy="164592"/>
-          </a:xfrm>
-          <a:prstGeom prst="rect">
-            <a:avLst/>
-          </a:prstGeom>
-          <a:noFill/>
-          <a:ln/>
-        </p:spPr>
-        <p:txBody>
-          <a:bodyPr wrap="square" lIns="0" tIns="0" rIns="0" bIns="0" rtlCol="0" anchor="ctr"/>
-          <a:lstStyle/>
-          <a:p>
-            <a:pPr algn="ctr" indent="0" marL="0">
-              <a:buNone/>
-            </a:pPr>
-            <a:r>
-              <a:rPr lang="en-US" sz="1100" b="1" dirty="0">
-                <a:solidFill>
-                  <a:srgbClr val="FFFFFF"/>
-                </a:solidFill>
-                <a:latin typeface="Aptos" pitchFamily="34" charset="0"/>
-                <a:ea typeface="Aptos" pitchFamily="34" charset="-122"/>
-                <a:cs typeface="Aptos" pitchFamily="34" charset="-120"/>
-              </a:rPr>
-              <a:t>7</a:t>
-            </a:r>
-            <a:endParaRPr lang="en-US" sz="1100" dirty="0"/>
-          </a:p>
-        </p:txBody>
-      </p:sp>
-      <p:sp>
-        <p:nvSpPr>
-          <p:cNvPr id="10" name="Text 8"/>
-          <p:cNvSpPr/>
-          <p:nvPr/>
-        </p:nvSpPr>
-        <p:spPr>
-          <a:xfrm>
-            <a:off x="640080" y="621792"/>
             <a:ext cx="10881360" cy="713232"/>
           </a:xfrm>
           <a:prstGeom prst="rect">
@@ -6333,14 +6977,14 @@
       </p:sp>
       <p:sp>
         <p:nvSpPr>
-          <p:cNvPr id="11" name="Text 9"/>
+          <p:cNvPr id="9" name="Text 7"/>
           <p:cNvSpPr/>
           <p:nvPr/>
         </p:nvSpPr>
         <p:spPr>
           <a:xfrm>
             <a:off x="868680" y="1508760"/>
-            <a:ext cx="6537960" cy="4160520"/>
+            <a:ext cx="6309360" cy="4160520"/>
           </a:xfrm>
           <a:prstGeom prst="rect">
             <a:avLst/>
@@ -6399,18 +7043,18 @@
       </p:sp>
       <p:sp>
         <p:nvSpPr>
-          <p:cNvPr id="12" name="Shape 10"/>
-          <p:cNvSpPr/>
-          <p:nvPr/>
-        </p:nvSpPr>
-        <p:spPr>
-          <a:xfrm>
-            <a:off x="7909560" y="1417320"/>
-            <a:ext cx="3154680" cy="1828800"/>
+          <p:cNvPr id="10" name="Shape 8"/>
+          <p:cNvSpPr/>
+          <p:nvPr/>
+        </p:nvSpPr>
+        <p:spPr>
+          <a:xfrm>
+            <a:off x="7635240" y="1325880"/>
+            <a:ext cx="3474720" cy="1325880"/>
           </a:xfrm>
           <a:prstGeom prst="roundRect">
             <a:avLst>
-              <a:gd name="adj" fmla="val 6000"/>
+              <a:gd name="adj" fmla="val 8276"/>
             </a:avLst>
           </a:prstGeom>
           <a:solidFill>
@@ -6426,14 +7070,14 @@
       </p:sp>
       <p:sp>
         <p:nvSpPr>
-          <p:cNvPr id="13" name="Text 11"/>
-          <p:cNvSpPr/>
-          <p:nvPr/>
-        </p:nvSpPr>
-        <p:spPr>
-          <a:xfrm>
-            <a:off x="8074152" y="1563624"/>
-            <a:ext cx="2825496" cy="256032"/>
+          <p:cNvPr id="11" name="Text 9"/>
+          <p:cNvSpPr/>
+          <p:nvPr/>
+        </p:nvSpPr>
+        <p:spPr>
+          <a:xfrm>
+            <a:off x="7799832" y="1472184"/>
+            <a:ext cx="3145536" cy="256032"/>
           </a:xfrm>
           <a:prstGeom prst="rect">
             <a:avLst/>
@@ -6457,7 +7101,7 @@
                 <a:ea typeface="Aptos" pitchFamily="34" charset="-122"/>
                 <a:cs typeface="Aptos" pitchFamily="34" charset="-120"/>
               </a:rPr>
-              <a:t>Key idea</a:t>
+              <a:t>Core concept</a:t>
             </a:r>
             <a:endParaRPr lang="en-US" sz="1300" dirty="0"/>
           </a:p>
@@ -6465,14 +7109,14 @@
       </p:sp>
       <p:sp>
         <p:nvSpPr>
-          <p:cNvPr id="14" name="Text 12"/>
-          <p:cNvSpPr/>
-          <p:nvPr/>
-        </p:nvSpPr>
-        <p:spPr>
-          <a:xfrm>
-            <a:off x="8074152" y="1920240"/>
-            <a:ext cx="2825496" cy="1188720"/>
+          <p:cNvPr id="12" name="Text 10"/>
+          <p:cNvSpPr/>
+          <p:nvPr/>
+        </p:nvSpPr>
+        <p:spPr>
+          <a:xfrm>
+            <a:off x="7799832" y="1828800"/>
+            <a:ext cx="3145536" cy="685800"/>
           </a:xfrm>
           <a:prstGeom prst="rect">
             <a:avLst/>
@@ -6506,18 +7150,159 @@
       </p:sp>
       <p:sp>
         <p:nvSpPr>
-          <p:cNvPr id="15" name="Shape 13"/>
-          <p:cNvSpPr/>
-          <p:nvPr/>
-        </p:nvSpPr>
-        <p:spPr>
-          <a:xfrm>
-            <a:off x="7909560" y="3520440"/>
-            <a:ext cx="3154680" cy="1737360"/>
+          <p:cNvPr id="13" name="Shape 11"/>
+          <p:cNvSpPr/>
+          <p:nvPr/>
+        </p:nvSpPr>
+        <p:spPr>
+          <a:xfrm>
+            <a:off x="7635240" y="2788920"/>
+            <a:ext cx="3474720" cy="1536192"/>
           </a:xfrm>
           <a:prstGeom prst="roundRect">
             <a:avLst>
-              <a:gd name="adj" fmla="val 6316"/>
+              <a:gd name="adj" fmla="val 7143"/>
+            </a:avLst>
+          </a:prstGeom>
+          <a:solidFill>
+            <a:srgbClr val="FFFFFF">
+              <a:alpha val="88000"/>
+            </a:srgbClr>
+          </a:solidFill>
+          <a:ln w="12700">
+            <a:solidFill>
+              <a:srgbClr val="D6E8F2"/>
+            </a:solidFill>
+            <a:prstDash val="solid"/>
+          </a:ln>
+        </p:spPr>
+      </p:sp>
+      <p:sp>
+        <p:nvSpPr>
+          <p:cNvPr id="14" name="Shape 12"/>
+          <p:cNvSpPr/>
+          <p:nvPr/>
+        </p:nvSpPr>
+        <p:spPr>
+          <a:xfrm>
+            <a:off x="8074152" y="3291840"/>
+            <a:ext cx="2596896" cy="749808"/>
+          </a:xfrm>
+          <a:prstGeom prst="rect">
+            <a:avLst/>
+          </a:prstGeom>
+          <a:solidFill>
+            <a:srgbClr val="EAF6F8"/>
+          </a:solidFill>
+          <a:ln w="12700">
+            <a:solidFill>
+              <a:srgbClr val="8ABBD8"/>
+            </a:solidFill>
+            <a:prstDash val="solid"/>
+          </a:ln>
+        </p:spPr>
+      </p:sp>
+      <p:sp>
+        <p:nvSpPr>
+          <p:cNvPr id="15" name="Shape 13"/>
+          <p:cNvSpPr/>
+          <p:nvPr/>
+        </p:nvSpPr>
+        <p:spPr>
+          <a:xfrm>
+            <a:off x="8202168" y="3721608"/>
+            <a:ext cx="2340864" cy="0"/>
+          </a:xfrm>
+          <a:prstGeom prst="line">
+            <a:avLst/>
+          </a:prstGeom>
+          <a:noFill/>
+          <a:ln w="19050">
+            <a:solidFill>
+              <a:srgbClr val="0068B7"/>
+            </a:solidFill>
+            <a:prstDash val="solid"/>
+          </a:ln>
+        </p:spPr>
+      </p:sp>
+      <p:sp>
+        <p:nvSpPr>
+          <p:cNvPr id="16" name="Shape 14"/>
+          <p:cNvSpPr/>
+          <p:nvPr/>
+        </p:nvSpPr>
+        <p:spPr>
+          <a:xfrm>
+            <a:off x="9198864" y="4206240"/>
+            <a:ext cx="347472" cy="347472"/>
+          </a:xfrm>
+          <a:prstGeom prst="ellipse">
+            <a:avLst/>
+          </a:prstGeom>
+          <a:solidFill>
+            <a:srgbClr val="2F8A28"/>
+          </a:solidFill>
+          <a:ln w="12700">
+            <a:solidFill>
+              <a:srgbClr val="2F8A28"/>
+            </a:solidFill>
+            <a:prstDash val="solid"/>
+          </a:ln>
+        </p:spPr>
+      </p:sp>
+      <p:sp>
+        <p:nvSpPr>
+          <p:cNvPr id="17" name="Text 15"/>
+          <p:cNvSpPr/>
+          <p:nvPr/>
+        </p:nvSpPr>
+        <p:spPr>
+          <a:xfrm>
+            <a:off x="7909560" y="3977640"/>
+            <a:ext cx="2926080" cy="182880"/>
+          </a:xfrm>
+          <a:prstGeom prst="rect">
+            <a:avLst/>
+          </a:prstGeom>
+          <a:noFill/>
+          <a:ln/>
+        </p:spPr>
+        <p:txBody>
+          <a:bodyPr wrap="square" lIns="0" tIns="0" rIns="0" bIns="0" rtlCol="0" anchor="ctr"/>
+          <a:lstStyle/>
+          <a:p>
+            <a:pPr algn="ctr" indent="0" marL="0">
+              <a:buNone/>
+            </a:pPr>
+            <a:r>
+              <a:rPr lang="en-US" sz="1000" dirty="0">
+                <a:solidFill>
+                  <a:srgbClr val="003A63"/>
+                </a:solidFill>
+                <a:latin typeface="Aptos" pitchFamily="34" charset="0"/>
+                <a:ea typeface="Aptos" pitchFamily="34" charset="-122"/>
+                <a:cs typeface="Aptos" pitchFamily="34" charset="-120"/>
+              </a:rPr>
+              <a:t>Concept to action</a:t>
+            </a:r>
+            <a:endParaRPr lang="en-US" sz="1000" dirty="0"/>
+          </a:p>
+        </p:txBody>
+      </p:sp>
+      <p:sp>
+        <p:nvSpPr>
+          <p:cNvPr id="18" name="Shape 16"/>
+          <p:cNvSpPr/>
+          <p:nvPr/>
+        </p:nvSpPr>
+        <p:spPr>
+          <a:xfrm>
+            <a:off x="7635240" y="4498848"/>
+            <a:ext cx="3474720" cy="1143000"/>
+          </a:xfrm>
+          <a:prstGeom prst="roundRect">
+            <a:avLst>
+              <a:gd name="adj" fmla="val 9600"/>
             </a:avLst>
           </a:prstGeom>
           <a:solidFill>
@@ -6533,14 +7318,14 @@
       </p:sp>
       <p:sp>
         <p:nvSpPr>
-          <p:cNvPr id="16" name="Text 14"/>
-          <p:cNvSpPr/>
-          <p:nvPr/>
-        </p:nvSpPr>
-        <p:spPr>
-          <a:xfrm>
-            <a:off x="8074152" y="3666744"/>
-            <a:ext cx="2825496" cy="256032"/>
+          <p:cNvPr id="19" name="Text 17"/>
+          <p:cNvSpPr/>
+          <p:nvPr/>
+        </p:nvSpPr>
+        <p:spPr>
+          <a:xfrm>
+            <a:off x="7799832" y="4645152"/>
+            <a:ext cx="3145536" cy="256032"/>
           </a:xfrm>
           <a:prstGeom prst="rect">
             <a:avLst/>
@@ -6564,7 +7349,7 @@
                 <a:ea typeface="Aptos" pitchFamily="34" charset="-122"/>
                 <a:cs typeface="Aptos" pitchFamily="34" charset="-120"/>
               </a:rPr>
-              <a:t>Use this for</a:t>
+              <a:t>Apply it</a:t>
             </a:r>
             <a:endParaRPr lang="en-US" sz="1300" dirty="0"/>
           </a:p>
@@ -6572,14 +7357,14 @@
       </p:sp>
       <p:sp>
         <p:nvSpPr>
-          <p:cNvPr id="17" name="Text 15"/>
-          <p:cNvSpPr/>
-          <p:nvPr/>
-        </p:nvSpPr>
-        <p:spPr>
-          <a:xfrm>
-            <a:off x="8074152" y="4023360"/>
-            <a:ext cx="2825496" cy="1097280"/>
+          <p:cNvPr id="20" name="Text 18"/>
+          <p:cNvSpPr/>
+          <p:nvPr/>
+        </p:nvSpPr>
+        <p:spPr>
+          <a:xfrm>
+            <a:off x="7799832" y="5001768"/>
+            <a:ext cx="3145536" cy="502920"/>
           </a:xfrm>
           <a:prstGeom prst="rect">
             <a:avLst/>
@@ -6605,7 +7390,7 @@
                 <a:ea typeface="Aptos" pitchFamily="34" charset="-122"/>
                 <a:cs typeface="Aptos" pitchFamily="34" charset="-120"/>
               </a:rPr>
-              <a:t>Connect the concept to public health decisions, safeguards, documentation, or implementation work.</a:t>
+              <a:t>Connect the concept to public health purpose, responsible use, required safeguards, documentation, and the next action a department should take.</a:t>
             </a:r>
             <a:endParaRPr lang="en-US" sz="1550" dirty="0"/>
           </a:p>
@@ -6779,8 +7564,8 @@
         </p:nvSpPr>
         <p:spPr>
           <a:xfrm>
-            <a:off x="9966960" y="6537960"/>
-            <a:ext cx="1645920" cy="201168"/>
+            <a:off x="9646920" y="6537960"/>
+            <a:ext cx="1965960" cy="201168"/>
           </a:xfrm>
           <a:prstGeom prst="rect">
             <a:avLst/>
@@ -6804,7 +7589,7 @@
                 <a:ea typeface="Aptos" pitchFamily="34" charset="-122"/>
                 <a:cs typeface="Aptos" pitchFamily="34" charset="-120"/>
               </a:rPr>
-              <a:t>Â© Paula Soper</a:t>
+              <a:t>Copyright Paula Soper</a:t>
             </a:r>
             <a:endParaRPr lang="en-US" sz="800" dirty="0"/>
           </a:p>
@@ -6899,7 +7684,7 @@
         <p:spPr>
           <a:xfrm>
             <a:off x="868680" y="1508760"/>
-            <a:ext cx="6537960" cy="4160520"/>
+            <a:ext cx="6309360" cy="4160520"/>
           </a:xfrm>
           <a:prstGeom prst="rect">
             <a:avLst/>
@@ -6950,12 +7735,12 @@
         </p:nvSpPr>
         <p:spPr>
           <a:xfrm>
-            <a:off x="7909560" y="1417320"/>
-            <a:ext cx="3154680" cy="1828800"/>
+            <a:off x="7635240" y="1325880"/>
+            <a:ext cx="3474720" cy="1325880"/>
           </a:xfrm>
           <a:prstGeom prst="roundRect">
             <a:avLst>
-              <a:gd name="adj" fmla="val 6000"/>
+              <a:gd name="adj" fmla="val 8276"/>
             </a:avLst>
           </a:prstGeom>
           <a:solidFill>
@@ -6977,8 +7762,8 @@
         </p:nvSpPr>
         <p:spPr>
           <a:xfrm>
-            <a:off x="8074152" y="1563624"/>
-            <a:ext cx="2825496" cy="256032"/>
+            <a:off x="7799832" y="1472184"/>
+            <a:ext cx="3145536" cy="256032"/>
           </a:xfrm>
           <a:prstGeom prst="rect">
             <a:avLst/>
@@ -7002,7 +7787,7 @@
                 <a:ea typeface="Aptos" pitchFamily="34" charset="-122"/>
                 <a:cs typeface="Aptos" pitchFamily="34" charset="-120"/>
               </a:rPr>
-              <a:t>Key idea</a:t>
+              <a:t>Core concept</a:t>
             </a:r>
             <a:endParaRPr lang="en-US" sz="1300" dirty="0"/>
           </a:p>
@@ -7016,8 +7801,8 @@
         </p:nvSpPr>
         <p:spPr>
           <a:xfrm>
-            <a:off x="8074152" y="1920240"/>
-            <a:ext cx="2825496" cy="1188720"/>
+            <a:off x="7799832" y="1828800"/>
+            <a:ext cx="3145536" cy="685800"/>
           </a:xfrm>
           <a:prstGeom prst="rect">
             <a:avLst/>
@@ -7057,12 +7842,153 @@
         </p:nvSpPr>
         <p:spPr>
           <a:xfrm>
-            <a:off x="7909560" y="3520440"/>
-            <a:ext cx="3154680" cy="1737360"/>
+            <a:off x="7635240" y="2788920"/>
+            <a:ext cx="3474720" cy="1536192"/>
           </a:xfrm>
           <a:prstGeom prst="roundRect">
             <a:avLst>
-              <a:gd name="adj" fmla="val 6316"/>
+              <a:gd name="adj" fmla="val 7143"/>
+            </a:avLst>
+          </a:prstGeom>
+          <a:solidFill>
+            <a:srgbClr val="FFFFFF">
+              <a:alpha val="88000"/>
+            </a:srgbClr>
+          </a:solidFill>
+          <a:ln w="12700">
+            <a:solidFill>
+              <a:srgbClr val="D6E8F2"/>
+            </a:solidFill>
+            <a:prstDash val="solid"/>
+          </a:ln>
+        </p:spPr>
+      </p:sp>
+      <p:sp>
+        <p:nvSpPr>
+          <p:cNvPr id="14" name="Shape 12"/>
+          <p:cNvSpPr/>
+          <p:nvPr/>
+        </p:nvSpPr>
+        <p:spPr>
+          <a:xfrm>
+            <a:off x="8074152" y="3291840"/>
+            <a:ext cx="2596896" cy="749808"/>
+          </a:xfrm>
+          <a:prstGeom prst="rect">
+            <a:avLst/>
+          </a:prstGeom>
+          <a:solidFill>
+            <a:srgbClr val="EAF6F8"/>
+          </a:solidFill>
+          <a:ln w="12700">
+            <a:solidFill>
+              <a:srgbClr val="8ABBD8"/>
+            </a:solidFill>
+            <a:prstDash val="solid"/>
+          </a:ln>
+        </p:spPr>
+      </p:sp>
+      <p:sp>
+        <p:nvSpPr>
+          <p:cNvPr id="15" name="Shape 13"/>
+          <p:cNvSpPr/>
+          <p:nvPr/>
+        </p:nvSpPr>
+        <p:spPr>
+          <a:xfrm>
+            <a:off x="8202168" y="3721608"/>
+            <a:ext cx="2340864" cy="0"/>
+          </a:xfrm>
+          <a:prstGeom prst="line">
+            <a:avLst/>
+          </a:prstGeom>
+          <a:noFill/>
+          <a:ln w="19050">
+            <a:solidFill>
+              <a:srgbClr val="0068B7"/>
+            </a:solidFill>
+            <a:prstDash val="solid"/>
+          </a:ln>
+        </p:spPr>
+      </p:sp>
+      <p:sp>
+        <p:nvSpPr>
+          <p:cNvPr id="16" name="Shape 14"/>
+          <p:cNvSpPr/>
+          <p:nvPr/>
+        </p:nvSpPr>
+        <p:spPr>
+          <a:xfrm>
+            <a:off x="9198864" y="4206240"/>
+            <a:ext cx="347472" cy="347472"/>
+          </a:xfrm>
+          <a:prstGeom prst="ellipse">
+            <a:avLst/>
+          </a:prstGeom>
+          <a:solidFill>
+            <a:srgbClr val="2F8A28"/>
+          </a:solidFill>
+          <a:ln w="12700">
+            <a:solidFill>
+              <a:srgbClr val="2F8A28"/>
+            </a:solidFill>
+            <a:prstDash val="solid"/>
+          </a:ln>
+        </p:spPr>
+      </p:sp>
+      <p:sp>
+        <p:nvSpPr>
+          <p:cNvPr id="17" name="Text 15"/>
+          <p:cNvSpPr/>
+          <p:nvPr/>
+        </p:nvSpPr>
+        <p:spPr>
+          <a:xfrm>
+            <a:off x="7909560" y="3977640"/>
+            <a:ext cx="2926080" cy="182880"/>
+          </a:xfrm>
+          <a:prstGeom prst="rect">
+            <a:avLst/>
+          </a:prstGeom>
+          <a:noFill/>
+          <a:ln/>
+        </p:spPr>
+        <p:txBody>
+          <a:bodyPr wrap="square" lIns="0" tIns="0" rIns="0" bIns="0" rtlCol="0" anchor="ctr"/>
+          <a:lstStyle/>
+          <a:p>
+            <a:pPr algn="ctr" indent="0" marL="0">
+              <a:buNone/>
+            </a:pPr>
+            <a:r>
+              <a:rPr lang="en-US" sz="1000" dirty="0">
+                <a:solidFill>
+                  <a:srgbClr val="003A63"/>
+                </a:solidFill>
+                <a:latin typeface="Aptos" pitchFamily="34" charset="0"/>
+                <a:ea typeface="Aptos" pitchFamily="34" charset="-122"/>
+                <a:cs typeface="Aptos" pitchFamily="34" charset="-120"/>
+              </a:rPr>
+              <a:t>Concept to action</a:t>
+            </a:r>
+            <a:endParaRPr lang="en-US" sz="1000" dirty="0"/>
+          </a:p>
+        </p:txBody>
+      </p:sp>
+      <p:sp>
+        <p:nvSpPr>
+          <p:cNvPr id="18" name="Shape 16"/>
+          <p:cNvSpPr/>
+          <p:nvPr/>
+        </p:nvSpPr>
+        <p:spPr>
+          <a:xfrm>
+            <a:off x="7635240" y="4498848"/>
+            <a:ext cx="3474720" cy="1143000"/>
+          </a:xfrm>
+          <a:prstGeom prst="roundRect">
+            <a:avLst>
+              <a:gd name="adj" fmla="val 9600"/>
             </a:avLst>
           </a:prstGeom>
           <a:solidFill>
@@ -7078,14 +8004,14 @@
       </p:sp>
       <p:sp>
         <p:nvSpPr>
-          <p:cNvPr id="14" name="Text 12"/>
-          <p:cNvSpPr/>
-          <p:nvPr/>
-        </p:nvSpPr>
-        <p:spPr>
-          <a:xfrm>
-            <a:off x="8074152" y="3666744"/>
-            <a:ext cx="2825496" cy="256032"/>
+          <p:cNvPr id="19" name="Text 17"/>
+          <p:cNvSpPr/>
+          <p:nvPr/>
+        </p:nvSpPr>
+        <p:spPr>
+          <a:xfrm>
+            <a:off x="7799832" y="4645152"/>
+            <a:ext cx="3145536" cy="256032"/>
           </a:xfrm>
           <a:prstGeom prst="rect">
             <a:avLst/>
@@ -7109,7 +8035,7 @@
                 <a:ea typeface="Aptos" pitchFamily="34" charset="-122"/>
                 <a:cs typeface="Aptos" pitchFamily="34" charset="-120"/>
               </a:rPr>
-              <a:t>Use this for</a:t>
+              <a:t>Apply it</a:t>
             </a:r>
             <a:endParaRPr lang="en-US" sz="1300" dirty="0"/>
           </a:p>
@@ -7117,14 +8043,14 @@
       </p:sp>
       <p:sp>
         <p:nvSpPr>
-          <p:cNvPr id="15" name="Text 13"/>
-          <p:cNvSpPr/>
-          <p:nvPr/>
-        </p:nvSpPr>
-        <p:spPr>
-          <a:xfrm>
-            <a:off x="8074152" y="4023360"/>
-            <a:ext cx="2825496" cy="1097280"/>
+          <p:cNvPr id="20" name="Text 18"/>
+          <p:cNvSpPr/>
+          <p:nvPr/>
+        </p:nvSpPr>
+        <p:spPr>
+          <a:xfrm>
+            <a:off x="7799832" y="5001768"/>
+            <a:ext cx="3145536" cy="502920"/>
           </a:xfrm>
           <a:prstGeom prst="rect">
             <a:avLst/>
@@ -7150,7 +8076,7 @@
                 <a:ea typeface="Aptos" pitchFamily="34" charset="-122"/>
                 <a:cs typeface="Aptos" pitchFamily="34" charset="-120"/>
               </a:rPr>
-              <a:t>Connect the concept to public health decisions, safeguards, documentation, or implementation work.</a:t>
+              <a:t>Connect the concept to public health purpose, responsible use, required safeguards, documentation, and the next action a department should take.</a:t>
             </a:r>
             <a:endParaRPr lang="en-US" sz="1550" dirty="0"/>
           </a:p>
@@ -7324,8 +8250,8 @@
         </p:nvSpPr>
         <p:spPr>
           <a:xfrm>
-            <a:off x="9966960" y="6537960"/>
-            <a:ext cx="1645920" cy="201168"/>
+            <a:off x="9646920" y="6537960"/>
+            <a:ext cx="1965960" cy="201168"/>
           </a:xfrm>
           <a:prstGeom prst="rect">
             <a:avLst/>
@@ -7349,7 +8275,7 @@
                 <a:ea typeface="Aptos" pitchFamily="34" charset="-122"/>
                 <a:cs typeface="Aptos" pitchFamily="34" charset="-120"/>
               </a:rPr>
-              <a:t>Â© Paula Soper</a:t>
+              <a:t>Copyright Paula Soper</a:t>
             </a:r>
             <a:endParaRPr lang="en-US" sz="800" dirty="0"/>
           </a:p>
@@ -7396,77 +8322,13 @@
       </p:sp>
       <p:sp>
         <p:nvSpPr>
-          <p:cNvPr id="8" name="Shape 6"/>
+          <p:cNvPr id="8" name="Text 6"/>
           <p:cNvSpPr/>
           <p:nvPr/>
         </p:nvSpPr>
         <p:spPr>
           <a:xfrm>
             <a:off x="640080" y="658368"/>
-            <a:ext cx="420624" cy="420624"/>
-          </a:xfrm>
-          <a:prstGeom prst="ellipse">
-            <a:avLst/>
-          </a:prstGeom>
-          <a:solidFill>
-            <a:srgbClr val="0068B7"/>
-          </a:solidFill>
-          <a:ln w="12700">
-            <a:solidFill>
-              <a:srgbClr val="0068B7"/>
-            </a:solidFill>
-            <a:prstDash val="solid"/>
-          </a:ln>
-        </p:spPr>
-      </p:sp>
-      <p:sp>
-        <p:nvSpPr>
-          <p:cNvPr id="9" name="Text 7"/>
-          <p:cNvSpPr/>
-          <p:nvPr/>
-        </p:nvSpPr>
-        <p:spPr>
-          <a:xfrm>
-            <a:off x="640080" y="731520"/>
-            <a:ext cx="420624" cy="164592"/>
-          </a:xfrm>
-          <a:prstGeom prst="rect">
-            <a:avLst/>
-          </a:prstGeom>
-          <a:noFill/>
-          <a:ln/>
-        </p:spPr>
-        <p:txBody>
-          <a:bodyPr wrap="square" lIns="0" tIns="0" rIns="0" bIns="0" rtlCol="0" anchor="ctr"/>
-          <a:lstStyle/>
-          <a:p>
-            <a:pPr algn="ctr" indent="0" marL="0">
-              <a:buNone/>
-            </a:pPr>
-            <a:r>
-              <a:rPr lang="en-US" sz="1100" b="1" dirty="0">
-                <a:solidFill>
-                  <a:srgbClr val="FFFFFF"/>
-                </a:solidFill>
-                <a:latin typeface="Aptos" pitchFamily="34" charset="0"/>
-                <a:ea typeface="Aptos" pitchFamily="34" charset="-122"/>
-                <a:cs typeface="Aptos" pitchFamily="34" charset="-120"/>
-              </a:rPr>
-              <a:t>8</a:t>
-            </a:r>
-            <a:endParaRPr lang="en-US" sz="1100" dirty="0"/>
-          </a:p>
-        </p:txBody>
-      </p:sp>
-      <p:sp>
-        <p:nvSpPr>
-          <p:cNvPr id="10" name="Text 8"/>
-          <p:cNvSpPr/>
-          <p:nvPr/>
-        </p:nvSpPr>
-        <p:spPr>
-          <a:xfrm>
-            <a:off x="640080" y="621792"/>
             <a:ext cx="10881360" cy="713232"/>
           </a:xfrm>
           <a:prstGeom prst="rect">
@@ -7501,14 +8363,14 @@
       </p:sp>
       <p:sp>
         <p:nvSpPr>
-          <p:cNvPr id="11" name="Text 9"/>
+          <p:cNvPr id="9" name="Text 7"/>
           <p:cNvSpPr/>
           <p:nvPr/>
         </p:nvSpPr>
         <p:spPr>
           <a:xfrm>
             <a:off x="868680" y="1508760"/>
-            <a:ext cx="6537960" cy="4160520"/>
+            <a:ext cx="6309360" cy="4160520"/>
           </a:xfrm>
           <a:prstGeom prst="rect">
             <a:avLst/>
@@ -7553,18 +8415,18 @@
       </p:sp>
       <p:sp>
         <p:nvSpPr>
-          <p:cNvPr id="12" name="Shape 10"/>
-          <p:cNvSpPr/>
-          <p:nvPr/>
-        </p:nvSpPr>
-        <p:spPr>
-          <a:xfrm>
-            <a:off x="7909560" y="1417320"/>
-            <a:ext cx="3154680" cy="1828800"/>
+          <p:cNvPr id="10" name="Shape 8"/>
+          <p:cNvSpPr/>
+          <p:nvPr/>
+        </p:nvSpPr>
+        <p:spPr>
+          <a:xfrm>
+            <a:off x="7635240" y="1325880"/>
+            <a:ext cx="3474720" cy="1325880"/>
           </a:xfrm>
           <a:prstGeom prst="roundRect">
             <a:avLst>
-              <a:gd name="adj" fmla="val 6000"/>
+              <a:gd name="adj" fmla="val 8276"/>
             </a:avLst>
           </a:prstGeom>
           <a:solidFill>
@@ -7580,14 +8442,14 @@
       </p:sp>
       <p:sp>
         <p:nvSpPr>
-          <p:cNvPr id="13" name="Text 11"/>
-          <p:cNvSpPr/>
-          <p:nvPr/>
-        </p:nvSpPr>
-        <p:spPr>
-          <a:xfrm>
-            <a:off x="8074152" y="1563624"/>
-            <a:ext cx="2825496" cy="256032"/>
+          <p:cNvPr id="11" name="Text 9"/>
+          <p:cNvSpPr/>
+          <p:nvPr/>
+        </p:nvSpPr>
+        <p:spPr>
+          <a:xfrm>
+            <a:off x="7799832" y="1472184"/>
+            <a:ext cx="3145536" cy="256032"/>
           </a:xfrm>
           <a:prstGeom prst="rect">
             <a:avLst/>
@@ -7611,7 +8473,7 @@
                 <a:ea typeface="Aptos" pitchFamily="34" charset="-122"/>
                 <a:cs typeface="Aptos" pitchFamily="34" charset="-120"/>
               </a:rPr>
-              <a:t>Key idea</a:t>
+              <a:t>Practice focus</a:t>
             </a:r>
             <a:endParaRPr lang="en-US" sz="1300" dirty="0"/>
           </a:p>
@@ -7619,14 +8481,14 @@
       </p:sp>
       <p:sp>
         <p:nvSpPr>
-          <p:cNvPr id="14" name="Text 12"/>
-          <p:cNvSpPr/>
-          <p:nvPr/>
-        </p:nvSpPr>
-        <p:spPr>
-          <a:xfrm>
-            <a:off x="8074152" y="1920240"/>
-            <a:ext cx="2825496" cy="1188720"/>
+          <p:cNvPr id="12" name="Text 10"/>
+          <p:cNvSpPr/>
+          <p:nvPr/>
+        </p:nvSpPr>
+        <p:spPr>
+          <a:xfrm>
+            <a:off x="7799832" y="1828800"/>
+            <a:ext cx="3145536" cy="685800"/>
           </a:xfrm>
           <a:prstGeom prst="rect">
             <a:avLst/>
@@ -7660,18 +8522,159 @@
       </p:sp>
       <p:sp>
         <p:nvSpPr>
-          <p:cNvPr id="15" name="Shape 13"/>
-          <p:cNvSpPr/>
-          <p:nvPr/>
-        </p:nvSpPr>
-        <p:spPr>
-          <a:xfrm>
-            <a:off x="7909560" y="3520440"/>
-            <a:ext cx="3154680" cy="1737360"/>
+          <p:cNvPr id="13" name="Shape 11"/>
+          <p:cNvSpPr/>
+          <p:nvPr/>
+        </p:nvSpPr>
+        <p:spPr>
+          <a:xfrm>
+            <a:off x="7635240" y="2788920"/>
+            <a:ext cx="3474720" cy="1536192"/>
           </a:xfrm>
           <a:prstGeom prst="roundRect">
             <a:avLst>
-              <a:gd name="adj" fmla="val 6316"/>
+              <a:gd name="adj" fmla="val 7143"/>
+            </a:avLst>
+          </a:prstGeom>
+          <a:solidFill>
+            <a:srgbClr val="FFFFFF">
+              <a:alpha val="88000"/>
+            </a:srgbClr>
+          </a:solidFill>
+          <a:ln w="12700">
+            <a:solidFill>
+              <a:srgbClr val="D6E8F2"/>
+            </a:solidFill>
+            <a:prstDash val="solid"/>
+          </a:ln>
+        </p:spPr>
+      </p:sp>
+      <p:sp>
+        <p:nvSpPr>
+          <p:cNvPr id="14" name="Shape 12"/>
+          <p:cNvSpPr/>
+          <p:nvPr/>
+        </p:nvSpPr>
+        <p:spPr>
+          <a:xfrm>
+            <a:off x="8074152" y="3291840"/>
+            <a:ext cx="2596896" cy="749808"/>
+          </a:xfrm>
+          <a:prstGeom prst="rect">
+            <a:avLst/>
+          </a:prstGeom>
+          <a:solidFill>
+            <a:srgbClr val="EAF6F8"/>
+          </a:solidFill>
+          <a:ln w="12700">
+            <a:solidFill>
+              <a:srgbClr val="8ABBD8"/>
+            </a:solidFill>
+            <a:prstDash val="solid"/>
+          </a:ln>
+        </p:spPr>
+      </p:sp>
+      <p:sp>
+        <p:nvSpPr>
+          <p:cNvPr id="15" name="Shape 13"/>
+          <p:cNvSpPr/>
+          <p:nvPr/>
+        </p:nvSpPr>
+        <p:spPr>
+          <a:xfrm>
+            <a:off x="8202168" y="3721608"/>
+            <a:ext cx="2340864" cy="0"/>
+          </a:xfrm>
+          <a:prstGeom prst="line">
+            <a:avLst/>
+          </a:prstGeom>
+          <a:noFill/>
+          <a:ln w="19050">
+            <a:solidFill>
+              <a:srgbClr val="0068B7"/>
+            </a:solidFill>
+            <a:prstDash val="solid"/>
+          </a:ln>
+        </p:spPr>
+      </p:sp>
+      <p:sp>
+        <p:nvSpPr>
+          <p:cNvPr id="16" name="Shape 14"/>
+          <p:cNvSpPr/>
+          <p:nvPr/>
+        </p:nvSpPr>
+        <p:spPr>
+          <a:xfrm>
+            <a:off x="9198864" y="4206240"/>
+            <a:ext cx="347472" cy="347472"/>
+          </a:xfrm>
+          <a:prstGeom prst="ellipse">
+            <a:avLst/>
+          </a:prstGeom>
+          <a:solidFill>
+            <a:srgbClr val="2F8A28"/>
+          </a:solidFill>
+          <a:ln w="12700">
+            <a:solidFill>
+              <a:srgbClr val="2F8A28"/>
+            </a:solidFill>
+            <a:prstDash val="solid"/>
+          </a:ln>
+        </p:spPr>
+      </p:sp>
+      <p:sp>
+        <p:nvSpPr>
+          <p:cNvPr id="17" name="Text 15"/>
+          <p:cNvSpPr/>
+          <p:nvPr/>
+        </p:nvSpPr>
+        <p:spPr>
+          <a:xfrm>
+            <a:off x="7909560" y="3977640"/>
+            <a:ext cx="2926080" cy="182880"/>
+          </a:xfrm>
+          <a:prstGeom prst="rect">
+            <a:avLst/>
+          </a:prstGeom>
+          <a:noFill/>
+          <a:ln/>
+        </p:spPr>
+        <p:txBody>
+          <a:bodyPr wrap="square" lIns="0" tIns="0" rIns="0" bIns="0" rtlCol="0" anchor="ctr"/>
+          <a:lstStyle/>
+          <a:p>
+            <a:pPr algn="ctr" indent="0" marL="0">
+              <a:buNone/>
+            </a:pPr>
+            <a:r>
+              <a:rPr lang="en-US" sz="1000" dirty="0">
+                <a:solidFill>
+                  <a:srgbClr val="003A63"/>
+                </a:solidFill>
+                <a:latin typeface="Aptos" pitchFamily="34" charset="0"/>
+                <a:ea typeface="Aptos" pitchFamily="34" charset="-122"/>
+                <a:cs typeface="Aptos" pitchFamily="34" charset="-120"/>
+              </a:rPr>
+              <a:t>Concept to action</a:t>
+            </a:r>
+            <a:endParaRPr lang="en-US" sz="1000" dirty="0"/>
+          </a:p>
+        </p:txBody>
+      </p:sp>
+      <p:sp>
+        <p:nvSpPr>
+          <p:cNvPr id="18" name="Shape 16"/>
+          <p:cNvSpPr/>
+          <p:nvPr/>
+        </p:nvSpPr>
+        <p:spPr>
+          <a:xfrm>
+            <a:off x="7635240" y="4498848"/>
+            <a:ext cx="3474720" cy="1143000"/>
+          </a:xfrm>
+          <a:prstGeom prst="roundRect">
+            <a:avLst>
+              <a:gd name="adj" fmla="val 9600"/>
             </a:avLst>
           </a:prstGeom>
           <a:solidFill>
@@ -7687,14 +8690,14 @@
       </p:sp>
       <p:sp>
         <p:nvSpPr>
-          <p:cNvPr id="16" name="Text 14"/>
-          <p:cNvSpPr/>
-          <p:nvPr/>
-        </p:nvSpPr>
-        <p:spPr>
-          <a:xfrm>
-            <a:off x="8074152" y="3666744"/>
-            <a:ext cx="2825496" cy="256032"/>
+          <p:cNvPr id="19" name="Text 17"/>
+          <p:cNvSpPr/>
+          <p:nvPr/>
+        </p:nvSpPr>
+        <p:spPr>
+          <a:xfrm>
+            <a:off x="7799832" y="4645152"/>
+            <a:ext cx="3145536" cy="256032"/>
           </a:xfrm>
           <a:prstGeom prst="rect">
             <a:avLst/>
@@ -7718,7 +8721,7 @@
                 <a:ea typeface="Aptos" pitchFamily="34" charset="-122"/>
                 <a:cs typeface="Aptos" pitchFamily="34" charset="-120"/>
               </a:rPr>
-              <a:t>Use this for</a:t>
+              <a:t>What to produce</a:t>
             </a:r>
             <a:endParaRPr lang="en-US" sz="1300" dirty="0"/>
           </a:p>
@@ -7726,14 +8729,14 @@
       </p:sp>
       <p:sp>
         <p:nvSpPr>
-          <p:cNvPr id="17" name="Text 15"/>
-          <p:cNvSpPr/>
-          <p:nvPr/>
-        </p:nvSpPr>
-        <p:spPr>
-          <a:xfrm>
-            <a:off x="8074152" y="4023360"/>
-            <a:ext cx="2825496" cy="1097280"/>
+          <p:cNvPr id="20" name="Text 18"/>
+          <p:cNvSpPr/>
+          <p:nvPr/>
+        </p:nvSpPr>
+        <p:spPr>
+          <a:xfrm>
+            <a:off x="7799832" y="5001768"/>
+            <a:ext cx="3145536" cy="502920"/>
           </a:xfrm>
           <a:prstGeom prst="rect">
             <a:avLst/>
@@ -7759,7 +8762,7 @@
                 <a:ea typeface="Aptos" pitchFamily="34" charset="-122"/>
                 <a:cs typeface="Aptos" pitchFamily="34" charset="-120"/>
               </a:rPr>
-              <a:t>Connect the concept to public health decisions, safeguards, documentation, or implementation work.</a:t>
+              <a:t>Use the assignment to test whether you can explain the concept, apply it to a realistic public health situation, and identify what would need review before the work moves forward.</a:t>
             </a:r>
             <a:endParaRPr lang="en-US" sz="1550" dirty="0"/>
           </a:p>
@@ -7933,8 +8936,8 @@
         </p:nvSpPr>
         <p:spPr>
           <a:xfrm>
-            <a:off x="9966960" y="6537960"/>
-            <a:ext cx="1645920" cy="201168"/>
+            <a:off x="9646920" y="6537960"/>
+            <a:ext cx="1965960" cy="201168"/>
           </a:xfrm>
           <a:prstGeom prst="rect">
             <a:avLst/>
@@ -7958,7 +8961,7 @@
                 <a:ea typeface="Aptos" pitchFamily="34" charset="-122"/>
                 <a:cs typeface="Aptos" pitchFamily="34" charset="-120"/>
               </a:rPr>
-              <a:t>Â© Paula Soper</a:t>
+              <a:t>Copyright Paula Soper</a:t>
             </a:r>
             <a:endParaRPr lang="en-US" sz="800" dirty="0"/>
           </a:p>
@@ -8005,77 +9008,13 @@
       </p:sp>
       <p:sp>
         <p:nvSpPr>
-          <p:cNvPr id="8" name="Shape 6"/>
+          <p:cNvPr id="8" name="Text 6"/>
           <p:cNvSpPr/>
           <p:nvPr/>
         </p:nvSpPr>
         <p:spPr>
           <a:xfrm>
             <a:off x="640080" y="658368"/>
-            <a:ext cx="420624" cy="420624"/>
-          </a:xfrm>
-          <a:prstGeom prst="ellipse">
-            <a:avLst/>
-          </a:prstGeom>
-          <a:solidFill>
-            <a:srgbClr val="0068B7"/>
-          </a:solidFill>
-          <a:ln w="12700">
-            <a:solidFill>
-              <a:srgbClr val="0068B7"/>
-            </a:solidFill>
-            <a:prstDash val="solid"/>
-          </a:ln>
-        </p:spPr>
-      </p:sp>
-      <p:sp>
-        <p:nvSpPr>
-          <p:cNvPr id="9" name="Text 7"/>
-          <p:cNvSpPr/>
-          <p:nvPr/>
-        </p:nvSpPr>
-        <p:spPr>
-          <a:xfrm>
-            <a:off x="640080" y="731520"/>
-            <a:ext cx="420624" cy="164592"/>
-          </a:xfrm>
-          <a:prstGeom prst="rect">
-            <a:avLst/>
-          </a:prstGeom>
-          <a:noFill/>
-          <a:ln/>
-        </p:spPr>
-        <p:txBody>
-          <a:bodyPr wrap="square" lIns="0" tIns="0" rIns="0" bIns="0" rtlCol="0" anchor="ctr"/>
-          <a:lstStyle/>
-          <a:p>
-            <a:pPr algn="ctr" indent="0" marL="0">
-              <a:buNone/>
-            </a:pPr>
-            <a:r>
-              <a:rPr lang="en-US" sz="1100" b="1" dirty="0">
-                <a:solidFill>
-                  <a:srgbClr val="FFFFFF"/>
-                </a:solidFill>
-                <a:latin typeface="Aptos" pitchFamily="34" charset="0"/>
-                <a:ea typeface="Aptos" pitchFamily="34" charset="-122"/>
-                <a:cs typeface="Aptos" pitchFamily="34" charset="-120"/>
-              </a:rPr>
-              <a:t>9</a:t>
-            </a:r>
-            <a:endParaRPr lang="en-US" sz="1100" dirty="0"/>
-          </a:p>
-        </p:txBody>
-      </p:sp>
-      <p:sp>
-        <p:nvSpPr>
-          <p:cNvPr id="10" name="Text 8"/>
-          <p:cNvSpPr/>
-          <p:nvPr/>
-        </p:nvSpPr>
-        <p:spPr>
-          <a:xfrm>
-            <a:off x="640080" y="621792"/>
             <a:ext cx="10881360" cy="713232"/>
           </a:xfrm>
           <a:prstGeom prst="rect">
@@ -8110,14 +9049,14 @@
       </p:sp>
       <p:sp>
         <p:nvSpPr>
-          <p:cNvPr id="11" name="Text 9"/>
+          <p:cNvPr id="9" name="Text 7"/>
           <p:cNvSpPr/>
           <p:nvPr/>
         </p:nvSpPr>
         <p:spPr>
           <a:xfrm>
             <a:off x="868680" y="1508760"/>
-            <a:ext cx="6537960" cy="4160520"/>
+            <a:ext cx="6309360" cy="4160520"/>
           </a:xfrm>
           <a:prstGeom prst="rect">
             <a:avLst/>
@@ -8176,18 +9115,18 @@
       </p:sp>
       <p:sp>
         <p:nvSpPr>
-          <p:cNvPr id="12" name="Shape 10"/>
-          <p:cNvSpPr/>
-          <p:nvPr/>
-        </p:nvSpPr>
-        <p:spPr>
-          <a:xfrm>
-            <a:off x="7909560" y="1417320"/>
-            <a:ext cx="3154680" cy="1828800"/>
+          <p:cNvPr id="10" name="Shape 8"/>
+          <p:cNvSpPr/>
+          <p:nvPr/>
+        </p:nvSpPr>
+        <p:spPr>
+          <a:xfrm>
+            <a:off x="7635240" y="1325880"/>
+            <a:ext cx="3474720" cy="1325880"/>
           </a:xfrm>
           <a:prstGeom prst="roundRect">
             <a:avLst>
-              <a:gd name="adj" fmla="val 6000"/>
+              <a:gd name="adj" fmla="val 8276"/>
             </a:avLst>
           </a:prstGeom>
           <a:solidFill>
@@ -8203,14 +9142,14 @@
       </p:sp>
       <p:sp>
         <p:nvSpPr>
-          <p:cNvPr id="13" name="Text 11"/>
-          <p:cNvSpPr/>
-          <p:nvPr/>
-        </p:nvSpPr>
-        <p:spPr>
-          <a:xfrm>
-            <a:off x="8074152" y="1563624"/>
-            <a:ext cx="2825496" cy="256032"/>
+          <p:cNvPr id="11" name="Text 9"/>
+          <p:cNvSpPr/>
+          <p:nvPr/>
+        </p:nvSpPr>
+        <p:spPr>
+          <a:xfrm>
+            <a:off x="7799832" y="1472184"/>
+            <a:ext cx="3145536" cy="256032"/>
           </a:xfrm>
           <a:prstGeom prst="rect">
             <a:avLst/>
@@ -8234,7 +9173,7 @@
                 <a:ea typeface="Aptos" pitchFamily="34" charset="-122"/>
                 <a:cs typeface="Aptos" pitchFamily="34" charset="-120"/>
               </a:rPr>
-              <a:t>Key idea</a:t>
+              <a:t>Core concept</a:t>
             </a:r>
             <a:endParaRPr lang="en-US" sz="1300" dirty="0"/>
           </a:p>
@@ -8242,14 +9181,14 @@
       </p:sp>
       <p:sp>
         <p:nvSpPr>
-          <p:cNvPr id="14" name="Text 12"/>
-          <p:cNvSpPr/>
-          <p:nvPr/>
-        </p:nvSpPr>
-        <p:spPr>
-          <a:xfrm>
-            <a:off x="8074152" y="1920240"/>
-            <a:ext cx="2825496" cy="1188720"/>
+          <p:cNvPr id="12" name="Text 10"/>
+          <p:cNvSpPr/>
+          <p:nvPr/>
+        </p:nvSpPr>
+        <p:spPr>
+          <a:xfrm>
+            <a:off x="7799832" y="1828800"/>
+            <a:ext cx="3145536" cy="685800"/>
           </a:xfrm>
           <a:prstGeom prst="rect">
             <a:avLst/>
@@ -8283,18 +9222,159 @@
       </p:sp>
       <p:sp>
         <p:nvSpPr>
-          <p:cNvPr id="15" name="Shape 13"/>
-          <p:cNvSpPr/>
-          <p:nvPr/>
-        </p:nvSpPr>
-        <p:spPr>
-          <a:xfrm>
-            <a:off x="7909560" y="3520440"/>
-            <a:ext cx="3154680" cy="1737360"/>
+          <p:cNvPr id="13" name="Shape 11"/>
+          <p:cNvSpPr/>
+          <p:nvPr/>
+        </p:nvSpPr>
+        <p:spPr>
+          <a:xfrm>
+            <a:off x="7635240" y="2788920"/>
+            <a:ext cx="3474720" cy="1536192"/>
           </a:xfrm>
           <a:prstGeom prst="roundRect">
             <a:avLst>
-              <a:gd name="adj" fmla="val 6316"/>
+              <a:gd name="adj" fmla="val 7143"/>
+            </a:avLst>
+          </a:prstGeom>
+          <a:solidFill>
+            <a:srgbClr val="FFFFFF">
+              <a:alpha val="88000"/>
+            </a:srgbClr>
+          </a:solidFill>
+          <a:ln w="12700">
+            <a:solidFill>
+              <a:srgbClr val="D6E8F2"/>
+            </a:solidFill>
+            <a:prstDash val="solid"/>
+          </a:ln>
+        </p:spPr>
+      </p:sp>
+      <p:sp>
+        <p:nvSpPr>
+          <p:cNvPr id="14" name="Shape 12"/>
+          <p:cNvSpPr/>
+          <p:nvPr/>
+        </p:nvSpPr>
+        <p:spPr>
+          <a:xfrm>
+            <a:off x="8074152" y="3291840"/>
+            <a:ext cx="2596896" cy="749808"/>
+          </a:xfrm>
+          <a:prstGeom prst="rect">
+            <a:avLst/>
+          </a:prstGeom>
+          <a:solidFill>
+            <a:srgbClr val="EAF6F8"/>
+          </a:solidFill>
+          <a:ln w="12700">
+            <a:solidFill>
+              <a:srgbClr val="8ABBD8"/>
+            </a:solidFill>
+            <a:prstDash val="solid"/>
+          </a:ln>
+        </p:spPr>
+      </p:sp>
+      <p:sp>
+        <p:nvSpPr>
+          <p:cNvPr id="15" name="Shape 13"/>
+          <p:cNvSpPr/>
+          <p:nvPr/>
+        </p:nvSpPr>
+        <p:spPr>
+          <a:xfrm>
+            <a:off x="8202168" y="3721608"/>
+            <a:ext cx="2340864" cy="0"/>
+          </a:xfrm>
+          <a:prstGeom prst="line">
+            <a:avLst/>
+          </a:prstGeom>
+          <a:noFill/>
+          <a:ln w="19050">
+            <a:solidFill>
+              <a:srgbClr val="0068B7"/>
+            </a:solidFill>
+            <a:prstDash val="solid"/>
+          </a:ln>
+        </p:spPr>
+      </p:sp>
+      <p:sp>
+        <p:nvSpPr>
+          <p:cNvPr id="16" name="Shape 14"/>
+          <p:cNvSpPr/>
+          <p:nvPr/>
+        </p:nvSpPr>
+        <p:spPr>
+          <a:xfrm>
+            <a:off x="9198864" y="4206240"/>
+            <a:ext cx="347472" cy="347472"/>
+          </a:xfrm>
+          <a:prstGeom prst="ellipse">
+            <a:avLst/>
+          </a:prstGeom>
+          <a:solidFill>
+            <a:srgbClr val="2F8A28"/>
+          </a:solidFill>
+          <a:ln w="12700">
+            <a:solidFill>
+              <a:srgbClr val="2F8A28"/>
+            </a:solidFill>
+            <a:prstDash val="solid"/>
+          </a:ln>
+        </p:spPr>
+      </p:sp>
+      <p:sp>
+        <p:nvSpPr>
+          <p:cNvPr id="17" name="Text 15"/>
+          <p:cNvSpPr/>
+          <p:nvPr/>
+        </p:nvSpPr>
+        <p:spPr>
+          <a:xfrm>
+            <a:off x="7909560" y="3977640"/>
+            <a:ext cx="2926080" cy="182880"/>
+          </a:xfrm>
+          <a:prstGeom prst="rect">
+            <a:avLst/>
+          </a:prstGeom>
+          <a:noFill/>
+          <a:ln/>
+        </p:spPr>
+        <p:txBody>
+          <a:bodyPr wrap="square" lIns="0" tIns="0" rIns="0" bIns="0" rtlCol="0" anchor="ctr"/>
+          <a:lstStyle/>
+          <a:p>
+            <a:pPr algn="ctr" indent="0" marL="0">
+              <a:buNone/>
+            </a:pPr>
+            <a:r>
+              <a:rPr lang="en-US" sz="1000" dirty="0">
+                <a:solidFill>
+                  <a:srgbClr val="003A63"/>
+                </a:solidFill>
+                <a:latin typeface="Aptos" pitchFamily="34" charset="0"/>
+                <a:ea typeface="Aptos" pitchFamily="34" charset="-122"/>
+                <a:cs typeface="Aptos" pitchFamily="34" charset="-120"/>
+              </a:rPr>
+              <a:t>Concept to action</a:t>
+            </a:r>
+            <a:endParaRPr lang="en-US" sz="1000" dirty="0"/>
+          </a:p>
+        </p:txBody>
+      </p:sp>
+      <p:sp>
+        <p:nvSpPr>
+          <p:cNvPr id="18" name="Shape 16"/>
+          <p:cNvSpPr/>
+          <p:nvPr/>
+        </p:nvSpPr>
+        <p:spPr>
+          <a:xfrm>
+            <a:off x="7635240" y="4498848"/>
+            <a:ext cx="3474720" cy="1143000"/>
+          </a:xfrm>
+          <a:prstGeom prst="roundRect">
+            <a:avLst>
+              <a:gd name="adj" fmla="val 9600"/>
             </a:avLst>
           </a:prstGeom>
           <a:solidFill>
@@ -8310,14 +9390,14 @@
       </p:sp>
       <p:sp>
         <p:nvSpPr>
-          <p:cNvPr id="16" name="Text 14"/>
-          <p:cNvSpPr/>
-          <p:nvPr/>
-        </p:nvSpPr>
-        <p:spPr>
-          <a:xfrm>
-            <a:off x="8074152" y="3666744"/>
-            <a:ext cx="2825496" cy="256032"/>
+          <p:cNvPr id="19" name="Text 17"/>
+          <p:cNvSpPr/>
+          <p:nvPr/>
+        </p:nvSpPr>
+        <p:spPr>
+          <a:xfrm>
+            <a:off x="7799832" y="4645152"/>
+            <a:ext cx="3145536" cy="256032"/>
           </a:xfrm>
           <a:prstGeom prst="rect">
             <a:avLst/>
@@ -8341,7 +9421,7 @@
                 <a:ea typeface="Aptos" pitchFamily="34" charset="-122"/>
                 <a:cs typeface="Aptos" pitchFamily="34" charset="-120"/>
               </a:rPr>
-              <a:t>Use this for</a:t>
+              <a:t>Apply it</a:t>
             </a:r>
             <a:endParaRPr lang="en-US" sz="1300" dirty="0"/>
           </a:p>
@@ -8349,14 +9429,14 @@
       </p:sp>
       <p:sp>
         <p:nvSpPr>
-          <p:cNvPr id="17" name="Text 15"/>
-          <p:cNvSpPr/>
-          <p:nvPr/>
-        </p:nvSpPr>
-        <p:spPr>
-          <a:xfrm>
-            <a:off x="8074152" y="4023360"/>
-            <a:ext cx="2825496" cy="1097280"/>
+          <p:cNvPr id="20" name="Text 18"/>
+          <p:cNvSpPr/>
+          <p:nvPr/>
+        </p:nvSpPr>
+        <p:spPr>
+          <a:xfrm>
+            <a:off x="7799832" y="5001768"/>
+            <a:ext cx="3145536" cy="502920"/>
           </a:xfrm>
           <a:prstGeom prst="rect">
             <a:avLst/>
@@ -8382,7 +9462,7 @@
                 <a:ea typeface="Aptos" pitchFamily="34" charset="-122"/>
                 <a:cs typeface="Aptos" pitchFamily="34" charset="-120"/>
               </a:rPr>
-              <a:t>Connect the concept to public health decisions, safeguards, documentation, or implementation work.</a:t>
+              <a:t>Connect the concept to public health purpose, responsible use, required safeguards, documentation, and the next action a department should take.</a:t>
             </a:r>
             <a:endParaRPr lang="en-US" sz="1550" dirty="0"/>
           </a:p>
@@ -8556,8 +9636,8 @@
         </p:nvSpPr>
         <p:spPr>
           <a:xfrm>
-            <a:off x="9966960" y="6537960"/>
-            <a:ext cx="1645920" cy="201168"/>
+            <a:off x="9646920" y="6537960"/>
+            <a:ext cx="1965960" cy="201168"/>
           </a:xfrm>
           <a:prstGeom prst="rect">
             <a:avLst/>
@@ -8581,7 +9661,7 @@
                 <a:ea typeface="Aptos" pitchFamily="34" charset="-122"/>
                 <a:cs typeface="Aptos" pitchFamily="34" charset="-120"/>
               </a:rPr>
-              <a:t>Â© Paula Soper</a:t>
+              <a:t>Copyright Paula Soper</a:t>
             </a:r>
             <a:endParaRPr lang="en-US" sz="800" dirty="0"/>
           </a:p>
@@ -8676,7 +9756,7 @@
         <p:spPr>
           <a:xfrm>
             <a:off x="868680" y="1508760"/>
-            <a:ext cx="6537960" cy="4160520"/>
+            <a:ext cx="6309360" cy="4160520"/>
           </a:xfrm>
           <a:prstGeom prst="rect">
             <a:avLst/>
@@ -8713,12 +9793,12 @@
         </p:nvSpPr>
         <p:spPr>
           <a:xfrm>
-            <a:off x="7909560" y="1417320"/>
-            <a:ext cx="3154680" cy="1828800"/>
+            <a:off x="7635240" y="1325880"/>
+            <a:ext cx="3474720" cy="1325880"/>
           </a:xfrm>
           <a:prstGeom prst="roundRect">
             <a:avLst>
-              <a:gd name="adj" fmla="val 6000"/>
+              <a:gd name="adj" fmla="val 8276"/>
             </a:avLst>
           </a:prstGeom>
           <a:solidFill>
@@ -8740,8 +9820,8 @@
         </p:nvSpPr>
         <p:spPr>
           <a:xfrm>
-            <a:off x="8074152" y="1563624"/>
-            <a:ext cx="2825496" cy="256032"/>
+            <a:off x="7799832" y="1472184"/>
+            <a:ext cx="3145536" cy="256032"/>
           </a:xfrm>
           <a:prstGeom prst="rect">
             <a:avLst/>
@@ -8765,7 +9845,7 @@
                 <a:ea typeface="Aptos" pitchFamily="34" charset="-122"/>
                 <a:cs typeface="Aptos" pitchFamily="34" charset="-120"/>
               </a:rPr>
-              <a:t>Key idea</a:t>
+              <a:t>Core concept</a:t>
             </a:r>
             <a:endParaRPr lang="en-US" sz="1300" dirty="0"/>
           </a:p>
@@ -8779,8 +9859,8 @@
         </p:nvSpPr>
         <p:spPr>
           <a:xfrm>
-            <a:off x="8074152" y="1920240"/>
-            <a:ext cx="2825496" cy="1188720"/>
+            <a:off x="7799832" y="1828800"/>
+            <a:ext cx="3145536" cy="685800"/>
           </a:xfrm>
           <a:prstGeom prst="rect">
             <a:avLst/>
@@ -8820,12 +9900,153 @@
         </p:nvSpPr>
         <p:spPr>
           <a:xfrm>
-            <a:off x="7909560" y="3520440"/>
-            <a:ext cx="3154680" cy="1737360"/>
+            <a:off x="7635240" y="2788920"/>
+            <a:ext cx="3474720" cy="1536192"/>
           </a:xfrm>
           <a:prstGeom prst="roundRect">
             <a:avLst>
-              <a:gd name="adj" fmla="val 6316"/>
+              <a:gd name="adj" fmla="val 7143"/>
+            </a:avLst>
+          </a:prstGeom>
+          <a:solidFill>
+            <a:srgbClr val="FFFFFF">
+              <a:alpha val="88000"/>
+            </a:srgbClr>
+          </a:solidFill>
+          <a:ln w="12700">
+            <a:solidFill>
+              <a:srgbClr val="D6E8F2"/>
+            </a:solidFill>
+            <a:prstDash val="solid"/>
+          </a:ln>
+        </p:spPr>
+      </p:sp>
+      <p:sp>
+        <p:nvSpPr>
+          <p:cNvPr id="14" name="Shape 12"/>
+          <p:cNvSpPr/>
+          <p:nvPr/>
+        </p:nvSpPr>
+        <p:spPr>
+          <a:xfrm>
+            <a:off x="8074152" y="3291840"/>
+            <a:ext cx="2596896" cy="749808"/>
+          </a:xfrm>
+          <a:prstGeom prst="rect">
+            <a:avLst/>
+          </a:prstGeom>
+          <a:solidFill>
+            <a:srgbClr val="EAF6F8"/>
+          </a:solidFill>
+          <a:ln w="12700">
+            <a:solidFill>
+              <a:srgbClr val="8ABBD8"/>
+            </a:solidFill>
+            <a:prstDash val="solid"/>
+          </a:ln>
+        </p:spPr>
+      </p:sp>
+      <p:sp>
+        <p:nvSpPr>
+          <p:cNvPr id="15" name="Shape 13"/>
+          <p:cNvSpPr/>
+          <p:nvPr/>
+        </p:nvSpPr>
+        <p:spPr>
+          <a:xfrm>
+            <a:off x="8202168" y="3721608"/>
+            <a:ext cx="2340864" cy="0"/>
+          </a:xfrm>
+          <a:prstGeom prst="line">
+            <a:avLst/>
+          </a:prstGeom>
+          <a:noFill/>
+          <a:ln w="19050">
+            <a:solidFill>
+              <a:srgbClr val="0068B7"/>
+            </a:solidFill>
+            <a:prstDash val="solid"/>
+          </a:ln>
+        </p:spPr>
+      </p:sp>
+      <p:sp>
+        <p:nvSpPr>
+          <p:cNvPr id="16" name="Shape 14"/>
+          <p:cNvSpPr/>
+          <p:nvPr/>
+        </p:nvSpPr>
+        <p:spPr>
+          <a:xfrm>
+            <a:off x="9198864" y="4206240"/>
+            <a:ext cx="347472" cy="347472"/>
+          </a:xfrm>
+          <a:prstGeom prst="ellipse">
+            <a:avLst/>
+          </a:prstGeom>
+          <a:solidFill>
+            <a:srgbClr val="2F8A28"/>
+          </a:solidFill>
+          <a:ln w="12700">
+            <a:solidFill>
+              <a:srgbClr val="2F8A28"/>
+            </a:solidFill>
+            <a:prstDash val="solid"/>
+          </a:ln>
+        </p:spPr>
+      </p:sp>
+      <p:sp>
+        <p:nvSpPr>
+          <p:cNvPr id="17" name="Text 15"/>
+          <p:cNvSpPr/>
+          <p:nvPr/>
+        </p:nvSpPr>
+        <p:spPr>
+          <a:xfrm>
+            <a:off x="7909560" y="3977640"/>
+            <a:ext cx="2926080" cy="182880"/>
+          </a:xfrm>
+          <a:prstGeom prst="rect">
+            <a:avLst/>
+          </a:prstGeom>
+          <a:noFill/>
+          <a:ln/>
+        </p:spPr>
+        <p:txBody>
+          <a:bodyPr wrap="square" lIns="0" tIns="0" rIns="0" bIns="0" rtlCol="0" anchor="ctr"/>
+          <a:lstStyle/>
+          <a:p>
+            <a:pPr algn="ctr" indent="0" marL="0">
+              <a:buNone/>
+            </a:pPr>
+            <a:r>
+              <a:rPr lang="en-US" sz="1000" dirty="0">
+                <a:solidFill>
+                  <a:srgbClr val="003A63"/>
+                </a:solidFill>
+                <a:latin typeface="Aptos" pitchFamily="34" charset="0"/>
+                <a:ea typeface="Aptos" pitchFamily="34" charset="-122"/>
+                <a:cs typeface="Aptos" pitchFamily="34" charset="-120"/>
+              </a:rPr>
+              <a:t>Concept to action</a:t>
+            </a:r>
+            <a:endParaRPr lang="en-US" sz="1000" dirty="0"/>
+          </a:p>
+        </p:txBody>
+      </p:sp>
+      <p:sp>
+        <p:nvSpPr>
+          <p:cNvPr id="18" name="Shape 16"/>
+          <p:cNvSpPr/>
+          <p:nvPr/>
+        </p:nvSpPr>
+        <p:spPr>
+          <a:xfrm>
+            <a:off x="7635240" y="4498848"/>
+            <a:ext cx="3474720" cy="1143000"/>
+          </a:xfrm>
+          <a:prstGeom prst="roundRect">
+            <a:avLst>
+              <a:gd name="adj" fmla="val 9600"/>
             </a:avLst>
           </a:prstGeom>
           <a:solidFill>
@@ -8841,14 +10062,14 @@
       </p:sp>
       <p:sp>
         <p:nvSpPr>
-          <p:cNvPr id="14" name="Text 12"/>
-          <p:cNvSpPr/>
-          <p:nvPr/>
-        </p:nvSpPr>
-        <p:spPr>
-          <a:xfrm>
-            <a:off x="8074152" y="3666744"/>
-            <a:ext cx="2825496" cy="256032"/>
+          <p:cNvPr id="19" name="Text 17"/>
+          <p:cNvSpPr/>
+          <p:nvPr/>
+        </p:nvSpPr>
+        <p:spPr>
+          <a:xfrm>
+            <a:off x="7799832" y="4645152"/>
+            <a:ext cx="3145536" cy="256032"/>
           </a:xfrm>
           <a:prstGeom prst="rect">
             <a:avLst/>
@@ -8872,7 +10093,7 @@
                 <a:ea typeface="Aptos" pitchFamily="34" charset="-122"/>
                 <a:cs typeface="Aptos" pitchFamily="34" charset="-120"/>
               </a:rPr>
-              <a:t>Use this for</a:t>
+              <a:t>Apply it</a:t>
             </a:r>
             <a:endParaRPr lang="en-US" sz="1300" dirty="0"/>
           </a:p>
@@ -8880,14 +10101,14 @@
       </p:sp>
       <p:sp>
         <p:nvSpPr>
-          <p:cNvPr id="15" name="Text 13"/>
-          <p:cNvSpPr/>
-          <p:nvPr/>
-        </p:nvSpPr>
-        <p:spPr>
-          <a:xfrm>
-            <a:off x="8074152" y="4023360"/>
-            <a:ext cx="2825496" cy="1097280"/>
+          <p:cNvPr id="20" name="Text 18"/>
+          <p:cNvSpPr/>
+          <p:nvPr/>
+        </p:nvSpPr>
+        <p:spPr>
+          <a:xfrm>
+            <a:off x="7799832" y="5001768"/>
+            <a:ext cx="3145536" cy="502920"/>
           </a:xfrm>
           <a:prstGeom prst="rect">
             <a:avLst/>
@@ -8913,7 +10134,7 @@
                 <a:ea typeface="Aptos" pitchFamily="34" charset="-122"/>
                 <a:cs typeface="Aptos" pitchFamily="34" charset="-120"/>
               </a:rPr>
-              <a:t>Connect the concept to public health decisions, safeguards, documentation, or implementation work.</a:t>
+              <a:t>Connect the concept to public health purpose, responsible use, required safeguards, documentation, and the next action a department should take.</a:t>
             </a:r>
             <a:endParaRPr lang="en-US" sz="1550" dirty="0"/>
           </a:p>
@@ -9087,8 +10308,8 @@
         </p:nvSpPr>
         <p:spPr>
           <a:xfrm>
-            <a:off x="9966960" y="6537960"/>
-            <a:ext cx="1645920" cy="201168"/>
+            <a:off x="9646920" y="6537960"/>
+            <a:ext cx="1965960" cy="201168"/>
           </a:xfrm>
           <a:prstGeom prst="rect">
             <a:avLst/>
@@ -9112,7 +10333,7 @@
                 <a:ea typeface="Aptos" pitchFamily="34" charset="-122"/>
                 <a:cs typeface="Aptos" pitchFamily="34" charset="-120"/>
               </a:rPr>
-              <a:t>Â© Paula Soper</a:t>
+              <a:t>Copyright Paula Soper</a:t>
             </a:r>
             <a:endParaRPr lang="en-US" sz="800" dirty="0"/>
           </a:p>
@@ -9475,46 +10696,7 @@
       </p:sp>
       <p:sp>
         <p:nvSpPr>
-          <p:cNvPr id="15" name="Text 13"/>
-          <p:cNvSpPr/>
-          <p:nvPr/>
-        </p:nvSpPr>
-        <p:spPr>
-          <a:xfrm>
-            <a:off x="8695944" y="3941064"/>
-            <a:ext cx="201168" cy="256032"/>
-          </a:xfrm>
-          <a:prstGeom prst="rect">
-            <a:avLst/>
-          </a:prstGeom>
-          <a:noFill/>
-          <a:ln/>
-        </p:spPr>
-        <p:txBody>
-          <a:bodyPr wrap="square" lIns="0" tIns="0" rIns="0" bIns="0" rtlCol="0" anchor="ctr"/>
-          <a:lstStyle/>
-          <a:p>
-            <a:pPr algn="ctr" indent="0" marL="0">
-              <a:buNone/>
-            </a:pPr>
-            <a:r>
-              <a:rPr lang="en-US" sz="1800" b="1" dirty="0">
-                <a:solidFill>
-                  <a:srgbClr val="0068B7"/>
-                </a:solidFill>
-                <a:latin typeface="Aptos" pitchFamily="34" charset="0"/>
-                <a:ea typeface="Aptos" pitchFamily="34" charset="-122"/>
-                <a:cs typeface="Aptos" pitchFamily="34" charset="-120"/>
-              </a:rPr>
-              <a:t>â†’</a:t>
-            </a:r>
-            <a:endParaRPr lang="en-US" sz="1800" dirty="0"/>
-          </a:p>
-        </p:txBody>
-      </p:sp>
-      <p:sp>
-        <p:nvSpPr>
-          <p:cNvPr id="16" name="Shape 14"/>
+          <p:cNvPr id="15" name="Shape 13"/>
           <p:cNvSpPr/>
           <p:nvPr/>
         </p:nvSpPr>
@@ -9541,7 +10723,7 @@
       </p:sp>
       <p:sp>
         <p:nvSpPr>
-          <p:cNvPr id="17" name="Text 15"/>
+          <p:cNvPr id="16" name="Text 14"/>
           <p:cNvSpPr/>
           <p:nvPr/>
         </p:nvSpPr>
@@ -9582,46 +10764,7 @@
       </p:sp>
       <p:sp>
         <p:nvSpPr>
-          <p:cNvPr id="18" name="Text 16"/>
-          <p:cNvSpPr/>
-          <p:nvPr/>
-        </p:nvSpPr>
-        <p:spPr>
-          <a:xfrm>
-            <a:off x="9985248" y="3941064"/>
-            <a:ext cx="201168" cy="256032"/>
-          </a:xfrm>
-          <a:prstGeom prst="rect">
-            <a:avLst/>
-          </a:prstGeom>
-          <a:noFill/>
-          <a:ln/>
-        </p:spPr>
-        <p:txBody>
-          <a:bodyPr wrap="square" lIns="0" tIns="0" rIns="0" bIns="0" rtlCol="0" anchor="ctr"/>
-          <a:lstStyle/>
-          <a:p>
-            <a:pPr algn="ctr" indent="0" marL="0">
-              <a:buNone/>
-            </a:pPr>
-            <a:r>
-              <a:rPr lang="en-US" sz="1800" b="1" dirty="0">
-                <a:solidFill>
-                  <a:srgbClr val="0068B7"/>
-                </a:solidFill>
-                <a:latin typeface="Aptos" pitchFamily="34" charset="0"/>
-                <a:ea typeface="Aptos" pitchFamily="34" charset="-122"/>
-                <a:cs typeface="Aptos" pitchFamily="34" charset="-120"/>
-              </a:rPr>
-              <a:t>â†’</a:t>
-            </a:r>
-            <a:endParaRPr lang="en-US" sz="1800" dirty="0"/>
-          </a:p>
-        </p:txBody>
-      </p:sp>
-      <p:sp>
-        <p:nvSpPr>
-          <p:cNvPr id="19" name="Shape 17"/>
+          <p:cNvPr id="17" name="Shape 15"/>
           <p:cNvSpPr/>
           <p:nvPr/>
         </p:nvSpPr>
@@ -9648,7 +10791,7 @@
       </p:sp>
       <p:sp>
         <p:nvSpPr>
-          <p:cNvPr id="20" name="Text 18"/>
+          <p:cNvPr id="18" name="Text 16"/>
           <p:cNvSpPr/>
           <p:nvPr/>
         </p:nvSpPr>
@@ -9855,8 +10998,8 @@
         </p:nvSpPr>
         <p:spPr>
           <a:xfrm>
-            <a:off x="9966960" y="6537960"/>
-            <a:ext cx="1645920" cy="201168"/>
+            <a:off x="9646920" y="6537960"/>
+            <a:ext cx="1965960" cy="201168"/>
           </a:xfrm>
           <a:prstGeom prst="rect">
             <a:avLst/>
@@ -9880,7 +11023,7 @@
                 <a:ea typeface="Aptos" pitchFamily="34" charset="-122"/>
                 <a:cs typeface="Aptos" pitchFamily="34" charset="-120"/>
               </a:rPr>
-              <a:t>Â© Paula Soper</a:t>
+              <a:t>Copyright Paula Soper</a:t>
             </a:r>
             <a:endParaRPr lang="en-US" sz="800" dirty="0"/>
           </a:p>
@@ -9927,77 +11070,13 @@
       </p:sp>
       <p:sp>
         <p:nvSpPr>
-          <p:cNvPr id="8" name="Shape 6"/>
+          <p:cNvPr id="8" name="Text 6"/>
           <p:cNvSpPr/>
           <p:nvPr/>
         </p:nvSpPr>
         <p:spPr>
           <a:xfrm>
             <a:off x="640080" y="658368"/>
-            <a:ext cx="420624" cy="420624"/>
-          </a:xfrm>
-          <a:prstGeom prst="ellipse">
-            <a:avLst/>
-          </a:prstGeom>
-          <a:solidFill>
-            <a:srgbClr val="0068B7"/>
-          </a:solidFill>
-          <a:ln w="12700">
-            <a:solidFill>
-              <a:srgbClr val="0068B7"/>
-            </a:solidFill>
-            <a:prstDash val="solid"/>
-          </a:ln>
-        </p:spPr>
-      </p:sp>
-      <p:sp>
-        <p:nvSpPr>
-          <p:cNvPr id="9" name="Text 7"/>
-          <p:cNvSpPr/>
-          <p:nvPr/>
-        </p:nvSpPr>
-        <p:spPr>
-          <a:xfrm>
-            <a:off x="640080" y="731520"/>
-            <a:ext cx="420624" cy="164592"/>
-          </a:xfrm>
-          <a:prstGeom prst="rect">
-            <a:avLst/>
-          </a:prstGeom>
-          <a:noFill/>
-          <a:ln/>
-        </p:spPr>
-        <p:txBody>
-          <a:bodyPr wrap="square" lIns="0" tIns="0" rIns="0" bIns="0" rtlCol="0" anchor="ctr"/>
-          <a:lstStyle/>
-          <a:p>
-            <a:pPr algn="ctr" indent="0" marL="0">
-              <a:buNone/>
-            </a:pPr>
-            <a:r>
-              <a:rPr lang="en-US" sz="1100" b="1" dirty="0">
-                <a:solidFill>
-                  <a:srgbClr val="FFFFFF"/>
-                </a:solidFill>
-                <a:latin typeface="Aptos" pitchFamily="34" charset="0"/>
-                <a:ea typeface="Aptos" pitchFamily="34" charset="-122"/>
-                <a:cs typeface="Aptos" pitchFamily="34" charset="-120"/>
-              </a:rPr>
-              <a:t>10</a:t>
-            </a:r>
-            <a:endParaRPr lang="en-US" sz="1100" dirty="0"/>
-          </a:p>
-        </p:txBody>
-      </p:sp>
-      <p:sp>
-        <p:nvSpPr>
-          <p:cNvPr id="10" name="Text 8"/>
-          <p:cNvSpPr/>
-          <p:nvPr/>
-        </p:nvSpPr>
-        <p:spPr>
-          <a:xfrm>
-            <a:off x="640080" y="621792"/>
             <a:ext cx="10881360" cy="713232"/>
           </a:xfrm>
           <a:prstGeom prst="rect">
@@ -10032,14 +11111,14 @@
       </p:sp>
       <p:sp>
         <p:nvSpPr>
-          <p:cNvPr id="11" name="Text 9"/>
+          <p:cNvPr id="9" name="Text 7"/>
           <p:cNvSpPr/>
           <p:nvPr/>
         </p:nvSpPr>
         <p:spPr>
           <a:xfrm>
             <a:off x="868680" y="1508760"/>
-            <a:ext cx="6537960" cy="4160520"/>
+            <a:ext cx="6309360" cy="4160520"/>
           </a:xfrm>
           <a:prstGeom prst="rect">
             <a:avLst/>
@@ -10098,18 +11177,18 @@
       </p:sp>
       <p:sp>
         <p:nvSpPr>
-          <p:cNvPr id="12" name="Shape 10"/>
-          <p:cNvSpPr/>
-          <p:nvPr/>
-        </p:nvSpPr>
-        <p:spPr>
-          <a:xfrm>
-            <a:off x="7909560" y="1417320"/>
-            <a:ext cx="3154680" cy="1828800"/>
+          <p:cNvPr id="10" name="Shape 8"/>
+          <p:cNvSpPr/>
+          <p:nvPr/>
+        </p:nvSpPr>
+        <p:spPr>
+          <a:xfrm>
+            <a:off x="7635240" y="1325880"/>
+            <a:ext cx="3474720" cy="1325880"/>
           </a:xfrm>
           <a:prstGeom prst="roundRect">
             <a:avLst>
-              <a:gd name="adj" fmla="val 6000"/>
+              <a:gd name="adj" fmla="val 8276"/>
             </a:avLst>
           </a:prstGeom>
           <a:solidFill>
@@ -10125,14 +11204,14 @@
       </p:sp>
       <p:sp>
         <p:nvSpPr>
-          <p:cNvPr id="13" name="Text 11"/>
-          <p:cNvSpPr/>
-          <p:nvPr/>
-        </p:nvSpPr>
-        <p:spPr>
-          <a:xfrm>
-            <a:off x="8074152" y="1563624"/>
-            <a:ext cx="2825496" cy="256032"/>
+          <p:cNvPr id="11" name="Text 9"/>
+          <p:cNvSpPr/>
+          <p:nvPr/>
+        </p:nvSpPr>
+        <p:spPr>
+          <a:xfrm>
+            <a:off x="7799832" y="1472184"/>
+            <a:ext cx="3145536" cy="256032"/>
           </a:xfrm>
           <a:prstGeom prst="rect">
             <a:avLst/>
@@ -10156,7 +11235,7 @@
                 <a:ea typeface="Aptos" pitchFamily="34" charset="-122"/>
                 <a:cs typeface="Aptos" pitchFamily="34" charset="-120"/>
               </a:rPr>
-              <a:t>Key idea</a:t>
+              <a:t>Practice focus</a:t>
             </a:r>
             <a:endParaRPr lang="en-US" sz="1300" dirty="0"/>
           </a:p>
@@ -10164,14 +11243,14 @@
       </p:sp>
       <p:sp>
         <p:nvSpPr>
-          <p:cNvPr id="14" name="Text 12"/>
-          <p:cNvSpPr/>
-          <p:nvPr/>
-        </p:nvSpPr>
-        <p:spPr>
-          <a:xfrm>
-            <a:off x="8074152" y="1920240"/>
-            <a:ext cx="2825496" cy="1188720"/>
+          <p:cNvPr id="12" name="Text 10"/>
+          <p:cNvSpPr/>
+          <p:nvPr/>
+        </p:nvSpPr>
+        <p:spPr>
+          <a:xfrm>
+            <a:off x="7799832" y="1828800"/>
+            <a:ext cx="3145536" cy="685800"/>
           </a:xfrm>
           <a:prstGeom prst="rect">
             <a:avLst/>
@@ -10205,18 +11284,159 @@
       </p:sp>
       <p:sp>
         <p:nvSpPr>
-          <p:cNvPr id="15" name="Shape 13"/>
-          <p:cNvSpPr/>
-          <p:nvPr/>
-        </p:nvSpPr>
-        <p:spPr>
-          <a:xfrm>
-            <a:off x="7909560" y="3520440"/>
-            <a:ext cx="3154680" cy="1737360"/>
+          <p:cNvPr id="13" name="Shape 11"/>
+          <p:cNvSpPr/>
+          <p:nvPr/>
+        </p:nvSpPr>
+        <p:spPr>
+          <a:xfrm>
+            <a:off x="7635240" y="2788920"/>
+            <a:ext cx="3474720" cy="1536192"/>
           </a:xfrm>
           <a:prstGeom prst="roundRect">
             <a:avLst>
-              <a:gd name="adj" fmla="val 6316"/>
+              <a:gd name="adj" fmla="val 7143"/>
+            </a:avLst>
+          </a:prstGeom>
+          <a:solidFill>
+            <a:srgbClr val="FFFFFF">
+              <a:alpha val="88000"/>
+            </a:srgbClr>
+          </a:solidFill>
+          <a:ln w="12700">
+            <a:solidFill>
+              <a:srgbClr val="D6E8F2"/>
+            </a:solidFill>
+            <a:prstDash val="solid"/>
+          </a:ln>
+        </p:spPr>
+      </p:sp>
+      <p:sp>
+        <p:nvSpPr>
+          <p:cNvPr id="14" name="Shape 12"/>
+          <p:cNvSpPr/>
+          <p:nvPr/>
+        </p:nvSpPr>
+        <p:spPr>
+          <a:xfrm>
+            <a:off x="8074152" y="3291840"/>
+            <a:ext cx="2596896" cy="749808"/>
+          </a:xfrm>
+          <a:prstGeom prst="rect">
+            <a:avLst/>
+          </a:prstGeom>
+          <a:solidFill>
+            <a:srgbClr val="EAF6F8"/>
+          </a:solidFill>
+          <a:ln w="12700">
+            <a:solidFill>
+              <a:srgbClr val="8ABBD8"/>
+            </a:solidFill>
+            <a:prstDash val="solid"/>
+          </a:ln>
+        </p:spPr>
+      </p:sp>
+      <p:sp>
+        <p:nvSpPr>
+          <p:cNvPr id="15" name="Shape 13"/>
+          <p:cNvSpPr/>
+          <p:nvPr/>
+        </p:nvSpPr>
+        <p:spPr>
+          <a:xfrm>
+            <a:off x="8202168" y="3721608"/>
+            <a:ext cx="2340864" cy="0"/>
+          </a:xfrm>
+          <a:prstGeom prst="line">
+            <a:avLst/>
+          </a:prstGeom>
+          <a:noFill/>
+          <a:ln w="19050">
+            <a:solidFill>
+              <a:srgbClr val="0068B7"/>
+            </a:solidFill>
+            <a:prstDash val="solid"/>
+          </a:ln>
+        </p:spPr>
+      </p:sp>
+      <p:sp>
+        <p:nvSpPr>
+          <p:cNvPr id="16" name="Shape 14"/>
+          <p:cNvSpPr/>
+          <p:nvPr/>
+        </p:nvSpPr>
+        <p:spPr>
+          <a:xfrm>
+            <a:off x="9198864" y="4206240"/>
+            <a:ext cx="347472" cy="347472"/>
+          </a:xfrm>
+          <a:prstGeom prst="ellipse">
+            <a:avLst/>
+          </a:prstGeom>
+          <a:solidFill>
+            <a:srgbClr val="2F8A28"/>
+          </a:solidFill>
+          <a:ln w="12700">
+            <a:solidFill>
+              <a:srgbClr val="2F8A28"/>
+            </a:solidFill>
+            <a:prstDash val="solid"/>
+          </a:ln>
+        </p:spPr>
+      </p:sp>
+      <p:sp>
+        <p:nvSpPr>
+          <p:cNvPr id="17" name="Text 15"/>
+          <p:cNvSpPr/>
+          <p:nvPr/>
+        </p:nvSpPr>
+        <p:spPr>
+          <a:xfrm>
+            <a:off x="7909560" y="3977640"/>
+            <a:ext cx="2926080" cy="182880"/>
+          </a:xfrm>
+          <a:prstGeom prst="rect">
+            <a:avLst/>
+          </a:prstGeom>
+          <a:noFill/>
+          <a:ln/>
+        </p:spPr>
+        <p:txBody>
+          <a:bodyPr wrap="square" lIns="0" tIns="0" rIns="0" bIns="0" rtlCol="0" anchor="ctr"/>
+          <a:lstStyle/>
+          <a:p>
+            <a:pPr algn="ctr" indent="0" marL="0">
+              <a:buNone/>
+            </a:pPr>
+            <a:r>
+              <a:rPr lang="en-US" sz="1000" dirty="0">
+                <a:solidFill>
+                  <a:srgbClr val="003A63"/>
+                </a:solidFill>
+                <a:latin typeface="Aptos" pitchFamily="34" charset="0"/>
+                <a:ea typeface="Aptos" pitchFamily="34" charset="-122"/>
+                <a:cs typeface="Aptos" pitchFamily="34" charset="-120"/>
+              </a:rPr>
+              <a:t>Concept to action</a:t>
+            </a:r>
+            <a:endParaRPr lang="en-US" sz="1000" dirty="0"/>
+          </a:p>
+        </p:txBody>
+      </p:sp>
+      <p:sp>
+        <p:nvSpPr>
+          <p:cNvPr id="18" name="Shape 16"/>
+          <p:cNvSpPr/>
+          <p:nvPr/>
+        </p:nvSpPr>
+        <p:spPr>
+          <a:xfrm>
+            <a:off x="7635240" y="4498848"/>
+            <a:ext cx="3474720" cy="1143000"/>
+          </a:xfrm>
+          <a:prstGeom prst="roundRect">
+            <a:avLst>
+              <a:gd name="adj" fmla="val 9600"/>
             </a:avLst>
           </a:prstGeom>
           <a:solidFill>
@@ -10232,14 +11452,14 @@
       </p:sp>
       <p:sp>
         <p:nvSpPr>
-          <p:cNvPr id="16" name="Text 14"/>
-          <p:cNvSpPr/>
-          <p:nvPr/>
-        </p:nvSpPr>
-        <p:spPr>
-          <a:xfrm>
-            <a:off x="8074152" y="3666744"/>
-            <a:ext cx="2825496" cy="256032"/>
+          <p:cNvPr id="19" name="Text 17"/>
+          <p:cNvSpPr/>
+          <p:nvPr/>
+        </p:nvSpPr>
+        <p:spPr>
+          <a:xfrm>
+            <a:off x="7799832" y="4645152"/>
+            <a:ext cx="3145536" cy="256032"/>
           </a:xfrm>
           <a:prstGeom prst="rect">
             <a:avLst/>
@@ -10263,7 +11483,7 @@
                 <a:ea typeface="Aptos" pitchFamily="34" charset="-122"/>
                 <a:cs typeface="Aptos" pitchFamily="34" charset="-120"/>
               </a:rPr>
-              <a:t>Use this for</a:t>
+              <a:t>What to produce</a:t>
             </a:r>
             <a:endParaRPr lang="en-US" sz="1300" dirty="0"/>
           </a:p>
@@ -10271,14 +11491,14 @@
       </p:sp>
       <p:sp>
         <p:nvSpPr>
-          <p:cNvPr id="17" name="Text 15"/>
-          <p:cNvSpPr/>
-          <p:nvPr/>
-        </p:nvSpPr>
-        <p:spPr>
-          <a:xfrm>
-            <a:off x="8074152" y="4023360"/>
-            <a:ext cx="2825496" cy="1097280"/>
+          <p:cNvPr id="20" name="Text 18"/>
+          <p:cNvSpPr/>
+          <p:nvPr/>
+        </p:nvSpPr>
+        <p:spPr>
+          <a:xfrm>
+            <a:off x="7799832" y="5001768"/>
+            <a:ext cx="3145536" cy="502920"/>
           </a:xfrm>
           <a:prstGeom prst="rect">
             <a:avLst/>
@@ -10304,7 +11524,7 @@
                 <a:ea typeface="Aptos" pitchFamily="34" charset="-122"/>
                 <a:cs typeface="Aptos" pitchFamily="34" charset="-120"/>
               </a:rPr>
-              <a:t>Connect the concept to public health decisions, safeguards, documentation, or implementation work.</a:t>
+              <a:t>Use the assignment to test whether you can explain the concept, apply it to a realistic public health situation, and identify what would need review before the work moves forward.</a:t>
             </a:r>
             <a:endParaRPr lang="en-US" sz="1550" dirty="0"/>
           </a:p>
@@ -10478,8 +11698,8 @@
         </p:nvSpPr>
         <p:spPr>
           <a:xfrm>
-            <a:off x="9966960" y="6537960"/>
-            <a:ext cx="1645920" cy="201168"/>
+            <a:off x="9646920" y="6537960"/>
+            <a:ext cx="1965960" cy="201168"/>
           </a:xfrm>
           <a:prstGeom prst="rect">
             <a:avLst/>
@@ -10503,7 +11723,7 @@
                 <a:ea typeface="Aptos" pitchFamily="34" charset="-122"/>
                 <a:cs typeface="Aptos" pitchFamily="34" charset="-120"/>
               </a:rPr>
-              <a:t>Â© Paula Soper</a:t>
+              <a:t>Copyright Paula Soper</a:t>
             </a:r>
             <a:endParaRPr lang="en-US" sz="800" dirty="0"/>
           </a:p>
@@ -10550,77 +11770,13 @@
       </p:sp>
       <p:sp>
         <p:nvSpPr>
-          <p:cNvPr id="8" name="Shape 6"/>
+          <p:cNvPr id="8" name="Text 6"/>
           <p:cNvSpPr/>
           <p:nvPr/>
         </p:nvSpPr>
         <p:spPr>
           <a:xfrm>
             <a:off x="640080" y="658368"/>
-            <a:ext cx="420624" cy="420624"/>
-          </a:xfrm>
-          <a:prstGeom prst="ellipse">
-            <a:avLst/>
-          </a:prstGeom>
-          <a:solidFill>
-            <a:srgbClr val="0068B7"/>
-          </a:solidFill>
-          <a:ln w="12700">
-            <a:solidFill>
-              <a:srgbClr val="0068B7"/>
-            </a:solidFill>
-            <a:prstDash val="solid"/>
-          </a:ln>
-        </p:spPr>
-      </p:sp>
-      <p:sp>
-        <p:nvSpPr>
-          <p:cNvPr id="9" name="Text 7"/>
-          <p:cNvSpPr/>
-          <p:nvPr/>
-        </p:nvSpPr>
-        <p:spPr>
-          <a:xfrm>
-            <a:off x="640080" y="731520"/>
-            <a:ext cx="420624" cy="164592"/>
-          </a:xfrm>
-          <a:prstGeom prst="rect">
-            <a:avLst/>
-          </a:prstGeom>
-          <a:noFill/>
-          <a:ln/>
-        </p:spPr>
-        <p:txBody>
-          <a:bodyPr wrap="square" lIns="0" tIns="0" rIns="0" bIns="0" rtlCol="0" anchor="ctr"/>
-          <a:lstStyle/>
-          <a:p>
-            <a:pPr algn="ctr" indent="0" marL="0">
-              <a:buNone/>
-            </a:pPr>
-            <a:r>
-              <a:rPr lang="en-US" sz="1100" b="1" dirty="0">
-                <a:solidFill>
-                  <a:srgbClr val="FFFFFF"/>
-                </a:solidFill>
-                <a:latin typeface="Aptos" pitchFamily="34" charset="0"/>
-                <a:ea typeface="Aptos" pitchFamily="34" charset="-122"/>
-                <a:cs typeface="Aptos" pitchFamily="34" charset="-120"/>
-              </a:rPr>
-              <a:t>11</a:t>
-            </a:r>
-            <a:endParaRPr lang="en-US" sz="1100" dirty="0"/>
-          </a:p>
-        </p:txBody>
-      </p:sp>
-      <p:sp>
-        <p:nvSpPr>
-          <p:cNvPr id="10" name="Text 8"/>
-          <p:cNvSpPr/>
-          <p:nvPr/>
-        </p:nvSpPr>
-        <p:spPr>
-          <a:xfrm>
-            <a:off x="640080" y="621792"/>
             <a:ext cx="10881360" cy="713232"/>
           </a:xfrm>
           <a:prstGeom prst="rect">
@@ -10655,14 +11811,14 @@
       </p:sp>
       <p:sp>
         <p:nvSpPr>
-          <p:cNvPr id="11" name="Text 9"/>
+          <p:cNvPr id="9" name="Text 7"/>
           <p:cNvSpPr/>
           <p:nvPr/>
         </p:nvSpPr>
         <p:spPr>
           <a:xfrm>
             <a:off x="868680" y="1508760"/>
-            <a:ext cx="6537960" cy="4160520"/>
+            <a:ext cx="6309360" cy="4160520"/>
           </a:xfrm>
           <a:prstGeom prst="rect">
             <a:avLst/>
@@ -10721,18 +11877,18 @@
       </p:sp>
       <p:sp>
         <p:nvSpPr>
-          <p:cNvPr id="12" name="Shape 10"/>
-          <p:cNvSpPr/>
-          <p:nvPr/>
-        </p:nvSpPr>
-        <p:spPr>
-          <a:xfrm>
-            <a:off x="7909560" y="1417320"/>
-            <a:ext cx="3154680" cy="1828800"/>
+          <p:cNvPr id="10" name="Shape 8"/>
+          <p:cNvSpPr/>
+          <p:nvPr/>
+        </p:nvSpPr>
+        <p:spPr>
+          <a:xfrm>
+            <a:off x="7635240" y="1325880"/>
+            <a:ext cx="3474720" cy="1325880"/>
           </a:xfrm>
           <a:prstGeom prst="roundRect">
             <a:avLst>
-              <a:gd name="adj" fmla="val 6000"/>
+              <a:gd name="adj" fmla="val 8276"/>
             </a:avLst>
           </a:prstGeom>
           <a:solidFill>
@@ -10748,14 +11904,14 @@
       </p:sp>
       <p:sp>
         <p:nvSpPr>
-          <p:cNvPr id="13" name="Text 11"/>
-          <p:cNvSpPr/>
-          <p:nvPr/>
-        </p:nvSpPr>
-        <p:spPr>
-          <a:xfrm>
-            <a:off x="8074152" y="1563624"/>
-            <a:ext cx="2825496" cy="256032"/>
+          <p:cNvPr id="11" name="Text 9"/>
+          <p:cNvSpPr/>
+          <p:nvPr/>
+        </p:nvSpPr>
+        <p:spPr>
+          <a:xfrm>
+            <a:off x="7799832" y="1472184"/>
+            <a:ext cx="3145536" cy="256032"/>
           </a:xfrm>
           <a:prstGeom prst="rect">
             <a:avLst/>
@@ -10779,7 +11935,7 @@
                 <a:ea typeface="Aptos" pitchFamily="34" charset="-122"/>
                 <a:cs typeface="Aptos" pitchFamily="34" charset="-120"/>
               </a:rPr>
-              <a:t>Key idea</a:t>
+              <a:t>Practice focus</a:t>
             </a:r>
             <a:endParaRPr lang="en-US" sz="1300" dirty="0"/>
           </a:p>
@@ -10787,14 +11943,14 @@
       </p:sp>
       <p:sp>
         <p:nvSpPr>
-          <p:cNvPr id="14" name="Text 12"/>
-          <p:cNvSpPr/>
-          <p:nvPr/>
-        </p:nvSpPr>
-        <p:spPr>
-          <a:xfrm>
-            <a:off x="8074152" y="1920240"/>
-            <a:ext cx="2825496" cy="1188720"/>
+          <p:cNvPr id="12" name="Text 10"/>
+          <p:cNvSpPr/>
+          <p:nvPr/>
+        </p:nvSpPr>
+        <p:spPr>
+          <a:xfrm>
+            <a:off x="7799832" y="1828800"/>
+            <a:ext cx="3145536" cy="685800"/>
           </a:xfrm>
           <a:prstGeom prst="rect">
             <a:avLst/>
@@ -10828,18 +11984,159 @@
       </p:sp>
       <p:sp>
         <p:nvSpPr>
-          <p:cNvPr id="15" name="Shape 13"/>
-          <p:cNvSpPr/>
-          <p:nvPr/>
-        </p:nvSpPr>
-        <p:spPr>
-          <a:xfrm>
-            <a:off x="7909560" y="3520440"/>
-            <a:ext cx="3154680" cy="1737360"/>
+          <p:cNvPr id="13" name="Shape 11"/>
+          <p:cNvSpPr/>
+          <p:nvPr/>
+        </p:nvSpPr>
+        <p:spPr>
+          <a:xfrm>
+            <a:off x="7635240" y="2788920"/>
+            <a:ext cx="3474720" cy="1536192"/>
           </a:xfrm>
           <a:prstGeom prst="roundRect">
             <a:avLst>
-              <a:gd name="adj" fmla="val 6316"/>
+              <a:gd name="adj" fmla="val 7143"/>
+            </a:avLst>
+          </a:prstGeom>
+          <a:solidFill>
+            <a:srgbClr val="FFFFFF">
+              <a:alpha val="88000"/>
+            </a:srgbClr>
+          </a:solidFill>
+          <a:ln w="12700">
+            <a:solidFill>
+              <a:srgbClr val="D6E8F2"/>
+            </a:solidFill>
+            <a:prstDash val="solid"/>
+          </a:ln>
+        </p:spPr>
+      </p:sp>
+      <p:sp>
+        <p:nvSpPr>
+          <p:cNvPr id="14" name="Shape 12"/>
+          <p:cNvSpPr/>
+          <p:nvPr/>
+        </p:nvSpPr>
+        <p:spPr>
+          <a:xfrm>
+            <a:off x="8074152" y="3291840"/>
+            <a:ext cx="2596896" cy="749808"/>
+          </a:xfrm>
+          <a:prstGeom prst="rect">
+            <a:avLst/>
+          </a:prstGeom>
+          <a:solidFill>
+            <a:srgbClr val="EAF6F8"/>
+          </a:solidFill>
+          <a:ln w="12700">
+            <a:solidFill>
+              <a:srgbClr val="8ABBD8"/>
+            </a:solidFill>
+            <a:prstDash val="solid"/>
+          </a:ln>
+        </p:spPr>
+      </p:sp>
+      <p:sp>
+        <p:nvSpPr>
+          <p:cNvPr id="15" name="Shape 13"/>
+          <p:cNvSpPr/>
+          <p:nvPr/>
+        </p:nvSpPr>
+        <p:spPr>
+          <a:xfrm>
+            <a:off x="8202168" y="3721608"/>
+            <a:ext cx="2340864" cy="0"/>
+          </a:xfrm>
+          <a:prstGeom prst="line">
+            <a:avLst/>
+          </a:prstGeom>
+          <a:noFill/>
+          <a:ln w="19050">
+            <a:solidFill>
+              <a:srgbClr val="0068B7"/>
+            </a:solidFill>
+            <a:prstDash val="solid"/>
+          </a:ln>
+        </p:spPr>
+      </p:sp>
+      <p:sp>
+        <p:nvSpPr>
+          <p:cNvPr id="16" name="Shape 14"/>
+          <p:cNvSpPr/>
+          <p:nvPr/>
+        </p:nvSpPr>
+        <p:spPr>
+          <a:xfrm>
+            <a:off x="9198864" y="4206240"/>
+            <a:ext cx="347472" cy="347472"/>
+          </a:xfrm>
+          <a:prstGeom prst="ellipse">
+            <a:avLst/>
+          </a:prstGeom>
+          <a:solidFill>
+            <a:srgbClr val="2F8A28"/>
+          </a:solidFill>
+          <a:ln w="12700">
+            <a:solidFill>
+              <a:srgbClr val="2F8A28"/>
+            </a:solidFill>
+            <a:prstDash val="solid"/>
+          </a:ln>
+        </p:spPr>
+      </p:sp>
+      <p:sp>
+        <p:nvSpPr>
+          <p:cNvPr id="17" name="Text 15"/>
+          <p:cNvSpPr/>
+          <p:nvPr/>
+        </p:nvSpPr>
+        <p:spPr>
+          <a:xfrm>
+            <a:off x="7909560" y="3977640"/>
+            <a:ext cx="2926080" cy="182880"/>
+          </a:xfrm>
+          <a:prstGeom prst="rect">
+            <a:avLst/>
+          </a:prstGeom>
+          <a:noFill/>
+          <a:ln/>
+        </p:spPr>
+        <p:txBody>
+          <a:bodyPr wrap="square" lIns="0" tIns="0" rIns="0" bIns="0" rtlCol="0" anchor="ctr"/>
+          <a:lstStyle/>
+          <a:p>
+            <a:pPr algn="ctr" indent="0" marL="0">
+              <a:buNone/>
+            </a:pPr>
+            <a:r>
+              <a:rPr lang="en-US" sz="1000" dirty="0">
+                <a:solidFill>
+                  <a:srgbClr val="003A63"/>
+                </a:solidFill>
+                <a:latin typeface="Aptos" pitchFamily="34" charset="0"/>
+                <a:ea typeface="Aptos" pitchFamily="34" charset="-122"/>
+                <a:cs typeface="Aptos" pitchFamily="34" charset="-120"/>
+              </a:rPr>
+              <a:t>Concept to action</a:t>
+            </a:r>
+            <a:endParaRPr lang="en-US" sz="1000" dirty="0"/>
+          </a:p>
+        </p:txBody>
+      </p:sp>
+      <p:sp>
+        <p:nvSpPr>
+          <p:cNvPr id="18" name="Shape 16"/>
+          <p:cNvSpPr/>
+          <p:nvPr/>
+        </p:nvSpPr>
+        <p:spPr>
+          <a:xfrm>
+            <a:off x="7635240" y="4498848"/>
+            <a:ext cx="3474720" cy="1143000"/>
+          </a:xfrm>
+          <a:prstGeom prst="roundRect">
+            <a:avLst>
+              <a:gd name="adj" fmla="val 9600"/>
             </a:avLst>
           </a:prstGeom>
           <a:solidFill>
@@ -10855,14 +12152,14 @@
       </p:sp>
       <p:sp>
         <p:nvSpPr>
-          <p:cNvPr id="16" name="Text 14"/>
-          <p:cNvSpPr/>
-          <p:nvPr/>
-        </p:nvSpPr>
-        <p:spPr>
-          <a:xfrm>
-            <a:off x="8074152" y="3666744"/>
-            <a:ext cx="2825496" cy="256032"/>
+          <p:cNvPr id="19" name="Text 17"/>
+          <p:cNvSpPr/>
+          <p:nvPr/>
+        </p:nvSpPr>
+        <p:spPr>
+          <a:xfrm>
+            <a:off x="7799832" y="4645152"/>
+            <a:ext cx="3145536" cy="256032"/>
           </a:xfrm>
           <a:prstGeom prst="rect">
             <a:avLst/>
@@ -10886,7 +12183,7 @@
                 <a:ea typeface="Aptos" pitchFamily="34" charset="-122"/>
                 <a:cs typeface="Aptos" pitchFamily="34" charset="-120"/>
               </a:rPr>
-              <a:t>Use this for</a:t>
+              <a:t>What to produce</a:t>
             </a:r>
             <a:endParaRPr lang="en-US" sz="1300" dirty="0"/>
           </a:p>
@@ -10894,14 +12191,14 @@
       </p:sp>
       <p:sp>
         <p:nvSpPr>
-          <p:cNvPr id="17" name="Text 15"/>
-          <p:cNvSpPr/>
-          <p:nvPr/>
-        </p:nvSpPr>
-        <p:spPr>
-          <a:xfrm>
-            <a:off x="8074152" y="4023360"/>
-            <a:ext cx="2825496" cy="1097280"/>
+          <p:cNvPr id="20" name="Text 18"/>
+          <p:cNvSpPr/>
+          <p:nvPr/>
+        </p:nvSpPr>
+        <p:spPr>
+          <a:xfrm>
+            <a:off x="7799832" y="5001768"/>
+            <a:ext cx="3145536" cy="502920"/>
           </a:xfrm>
           <a:prstGeom prst="rect">
             <a:avLst/>
@@ -10927,7 +12224,7 @@
                 <a:ea typeface="Aptos" pitchFamily="34" charset="-122"/>
                 <a:cs typeface="Aptos" pitchFamily="34" charset="-120"/>
               </a:rPr>
-              <a:t>Connect the concept to public health decisions, safeguards, documentation, or implementation work.</a:t>
+              <a:t>Use the assignment to test whether you can explain the concept, apply it to a realistic public health situation, and identify what would need review before the work moves forward.</a:t>
             </a:r>
             <a:endParaRPr lang="en-US" sz="1550" dirty="0"/>
           </a:p>
@@ -11101,8 +12398,8 @@
         </p:nvSpPr>
         <p:spPr>
           <a:xfrm>
-            <a:off x="9966960" y="6537960"/>
-            <a:ext cx="1645920" cy="201168"/>
+            <a:off x="9646920" y="6537960"/>
+            <a:ext cx="1965960" cy="201168"/>
           </a:xfrm>
           <a:prstGeom prst="rect">
             <a:avLst/>
@@ -11126,7 +12423,7 @@
                 <a:ea typeface="Aptos" pitchFamily="34" charset="-122"/>
                 <a:cs typeface="Aptos" pitchFamily="34" charset="-120"/>
               </a:rPr>
-              <a:t>Â© Paula Soper</a:t>
+              <a:t>Copyright Paula Soper</a:t>
             </a:r>
             <a:endParaRPr lang="en-US" sz="800" dirty="0"/>
           </a:p>
@@ -11173,77 +12470,13 @@
       </p:sp>
       <p:sp>
         <p:nvSpPr>
-          <p:cNvPr id="8" name="Shape 6"/>
+          <p:cNvPr id="8" name="Text 6"/>
           <p:cNvSpPr/>
           <p:nvPr/>
         </p:nvSpPr>
         <p:spPr>
           <a:xfrm>
             <a:off x="640080" y="658368"/>
-            <a:ext cx="420624" cy="420624"/>
-          </a:xfrm>
-          <a:prstGeom prst="ellipse">
-            <a:avLst/>
-          </a:prstGeom>
-          <a:solidFill>
-            <a:srgbClr val="0068B7"/>
-          </a:solidFill>
-          <a:ln w="12700">
-            <a:solidFill>
-              <a:srgbClr val="0068B7"/>
-            </a:solidFill>
-            <a:prstDash val="solid"/>
-          </a:ln>
-        </p:spPr>
-      </p:sp>
-      <p:sp>
-        <p:nvSpPr>
-          <p:cNvPr id="9" name="Text 7"/>
-          <p:cNvSpPr/>
-          <p:nvPr/>
-        </p:nvSpPr>
-        <p:spPr>
-          <a:xfrm>
-            <a:off x="640080" y="731520"/>
-            <a:ext cx="420624" cy="164592"/>
-          </a:xfrm>
-          <a:prstGeom prst="rect">
-            <a:avLst/>
-          </a:prstGeom>
-          <a:noFill/>
-          <a:ln/>
-        </p:spPr>
-        <p:txBody>
-          <a:bodyPr wrap="square" lIns="0" tIns="0" rIns="0" bIns="0" rtlCol="0" anchor="ctr"/>
-          <a:lstStyle/>
-          <a:p>
-            <a:pPr algn="ctr" indent="0" marL="0">
-              <a:buNone/>
-            </a:pPr>
-            <a:r>
-              <a:rPr lang="en-US" sz="1100" b="1" dirty="0">
-                <a:solidFill>
-                  <a:srgbClr val="FFFFFF"/>
-                </a:solidFill>
-                <a:latin typeface="Aptos" pitchFamily="34" charset="0"/>
-                <a:ea typeface="Aptos" pitchFamily="34" charset="-122"/>
-                <a:cs typeface="Aptos" pitchFamily="34" charset="-120"/>
-              </a:rPr>
-              <a:t>12</a:t>
-            </a:r>
-            <a:endParaRPr lang="en-US" sz="1100" dirty="0"/>
-          </a:p>
-        </p:txBody>
-      </p:sp>
-      <p:sp>
-        <p:nvSpPr>
-          <p:cNvPr id="10" name="Text 8"/>
-          <p:cNvSpPr/>
-          <p:nvPr/>
-        </p:nvSpPr>
-        <p:spPr>
-          <a:xfrm>
-            <a:off x="640080" y="621792"/>
             <a:ext cx="10881360" cy="713232"/>
           </a:xfrm>
           <a:prstGeom prst="rect">
@@ -11278,14 +12511,14 @@
       </p:sp>
       <p:sp>
         <p:nvSpPr>
-          <p:cNvPr id="11" name="Text 9"/>
+          <p:cNvPr id="9" name="Text 7"/>
           <p:cNvSpPr/>
           <p:nvPr/>
         </p:nvSpPr>
         <p:spPr>
           <a:xfrm>
             <a:off x="868680" y="1508760"/>
-            <a:ext cx="6537960" cy="4160520"/>
+            <a:ext cx="6309360" cy="4160520"/>
           </a:xfrm>
           <a:prstGeom prst="rect">
             <a:avLst/>
@@ -11344,18 +12577,18 @@
       </p:sp>
       <p:sp>
         <p:nvSpPr>
-          <p:cNvPr id="12" name="Shape 10"/>
-          <p:cNvSpPr/>
-          <p:nvPr/>
-        </p:nvSpPr>
-        <p:spPr>
-          <a:xfrm>
-            <a:off x="7909560" y="1417320"/>
-            <a:ext cx="3154680" cy="1828800"/>
+          <p:cNvPr id="10" name="Shape 8"/>
+          <p:cNvSpPr/>
+          <p:nvPr/>
+        </p:nvSpPr>
+        <p:spPr>
+          <a:xfrm>
+            <a:off x="7635240" y="1325880"/>
+            <a:ext cx="3474720" cy="1325880"/>
           </a:xfrm>
           <a:prstGeom prst="roundRect">
             <a:avLst>
-              <a:gd name="adj" fmla="val 6000"/>
+              <a:gd name="adj" fmla="val 8276"/>
             </a:avLst>
           </a:prstGeom>
           <a:solidFill>
@@ -11371,14 +12604,14 @@
       </p:sp>
       <p:sp>
         <p:nvSpPr>
-          <p:cNvPr id="13" name="Text 11"/>
-          <p:cNvSpPr/>
-          <p:nvPr/>
-        </p:nvSpPr>
-        <p:spPr>
-          <a:xfrm>
-            <a:off x="8074152" y="1563624"/>
-            <a:ext cx="2825496" cy="256032"/>
+          <p:cNvPr id="11" name="Text 9"/>
+          <p:cNvSpPr/>
+          <p:nvPr/>
+        </p:nvSpPr>
+        <p:spPr>
+          <a:xfrm>
+            <a:off x="7799832" y="1472184"/>
+            <a:ext cx="3145536" cy="256032"/>
           </a:xfrm>
           <a:prstGeom prst="rect">
             <a:avLst/>
@@ -11402,7 +12635,7 @@
                 <a:ea typeface="Aptos" pitchFamily="34" charset="-122"/>
                 <a:cs typeface="Aptos" pitchFamily="34" charset="-120"/>
               </a:rPr>
-              <a:t>Key idea</a:t>
+              <a:t>Core concept</a:t>
             </a:r>
             <a:endParaRPr lang="en-US" sz="1300" dirty="0"/>
           </a:p>
@@ -11410,14 +12643,14 @@
       </p:sp>
       <p:sp>
         <p:nvSpPr>
-          <p:cNvPr id="14" name="Text 12"/>
-          <p:cNvSpPr/>
-          <p:nvPr/>
-        </p:nvSpPr>
-        <p:spPr>
-          <a:xfrm>
-            <a:off x="8074152" y="1920240"/>
-            <a:ext cx="2825496" cy="1188720"/>
+          <p:cNvPr id="12" name="Text 10"/>
+          <p:cNvSpPr/>
+          <p:nvPr/>
+        </p:nvSpPr>
+        <p:spPr>
+          <a:xfrm>
+            <a:off x="7799832" y="1828800"/>
+            <a:ext cx="3145536" cy="685800"/>
           </a:xfrm>
           <a:prstGeom prst="rect">
             <a:avLst/>
@@ -11451,18 +12684,159 @@
       </p:sp>
       <p:sp>
         <p:nvSpPr>
-          <p:cNvPr id="15" name="Shape 13"/>
-          <p:cNvSpPr/>
-          <p:nvPr/>
-        </p:nvSpPr>
-        <p:spPr>
-          <a:xfrm>
-            <a:off x="7909560" y="3520440"/>
-            <a:ext cx="3154680" cy="1737360"/>
+          <p:cNvPr id="13" name="Shape 11"/>
+          <p:cNvSpPr/>
+          <p:nvPr/>
+        </p:nvSpPr>
+        <p:spPr>
+          <a:xfrm>
+            <a:off x="7635240" y="2788920"/>
+            <a:ext cx="3474720" cy="1536192"/>
           </a:xfrm>
           <a:prstGeom prst="roundRect">
             <a:avLst>
-              <a:gd name="adj" fmla="val 6316"/>
+              <a:gd name="adj" fmla="val 7143"/>
+            </a:avLst>
+          </a:prstGeom>
+          <a:solidFill>
+            <a:srgbClr val="FFFFFF">
+              <a:alpha val="88000"/>
+            </a:srgbClr>
+          </a:solidFill>
+          <a:ln w="12700">
+            <a:solidFill>
+              <a:srgbClr val="D6E8F2"/>
+            </a:solidFill>
+            <a:prstDash val="solid"/>
+          </a:ln>
+        </p:spPr>
+      </p:sp>
+      <p:sp>
+        <p:nvSpPr>
+          <p:cNvPr id="14" name="Shape 12"/>
+          <p:cNvSpPr/>
+          <p:nvPr/>
+        </p:nvSpPr>
+        <p:spPr>
+          <a:xfrm>
+            <a:off x="8074152" y="3291840"/>
+            <a:ext cx="2596896" cy="749808"/>
+          </a:xfrm>
+          <a:prstGeom prst="rect">
+            <a:avLst/>
+          </a:prstGeom>
+          <a:solidFill>
+            <a:srgbClr val="EAF6F8"/>
+          </a:solidFill>
+          <a:ln w="12700">
+            <a:solidFill>
+              <a:srgbClr val="8ABBD8"/>
+            </a:solidFill>
+            <a:prstDash val="solid"/>
+          </a:ln>
+        </p:spPr>
+      </p:sp>
+      <p:sp>
+        <p:nvSpPr>
+          <p:cNvPr id="15" name="Shape 13"/>
+          <p:cNvSpPr/>
+          <p:nvPr/>
+        </p:nvSpPr>
+        <p:spPr>
+          <a:xfrm>
+            <a:off x="8202168" y="3721608"/>
+            <a:ext cx="2340864" cy="0"/>
+          </a:xfrm>
+          <a:prstGeom prst="line">
+            <a:avLst/>
+          </a:prstGeom>
+          <a:noFill/>
+          <a:ln w="19050">
+            <a:solidFill>
+              <a:srgbClr val="0068B7"/>
+            </a:solidFill>
+            <a:prstDash val="solid"/>
+          </a:ln>
+        </p:spPr>
+      </p:sp>
+      <p:sp>
+        <p:nvSpPr>
+          <p:cNvPr id="16" name="Shape 14"/>
+          <p:cNvSpPr/>
+          <p:nvPr/>
+        </p:nvSpPr>
+        <p:spPr>
+          <a:xfrm>
+            <a:off x="9198864" y="4206240"/>
+            <a:ext cx="347472" cy="347472"/>
+          </a:xfrm>
+          <a:prstGeom prst="ellipse">
+            <a:avLst/>
+          </a:prstGeom>
+          <a:solidFill>
+            <a:srgbClr val="2F8A28"/>
+          </a:solidFill>
+          <a:ln w="12700">
+            <a:solidFill>
+              <a:srgbClr val="2F8A28"/>
+            </a:solidFill>
+            <a:prstDash val="solid"/>
+          </a:ln>
+        </p:spPr>
+      </p:sp>
+      <p:sp>
+        <p:nvSpPr>
+          <p:cNvPr id="17" name="Text 15"/>
+          <p:cNvSpPr/>
+          <p:nvPr/>
+        </p:nvSpPr>
+        <p:spPr>
+          <a:xfrm>
+            <a:off x="7909560" y="3977640"/>
+            <a:ext cx="2926080" cy="182880"/>
+          </a:xfrm>
+          <a:prstGeom prst="rect">
+            <a:avLst/>
+          </a:prstGeom>
+          <a:noFill/>
+          <a:ln/>
+        </p:spPr>
+        <p:txBody>
+          <a:bodyPr wrap="square" lIns="0" tIns="0" rIns="0" bIns="0" rtlCol="0" anchor="ctr"/>
+          <a:lstStyle/>
+          <a:p>
+            <a:pPr algn="ctr" indent="0" marL="0">
+              <a:buNone/>
+            </a:pPr>
+            <a:r>
+              <a:rPr lang="en-US" sz="1000" dirty="0">
+                <a:solidFill>
+                  <a:srgbClr val="003A63"/>
+                </a:solidFill>
+                <a:latin typeface="Aptos" pitchFamily="34" charset="0"/>
+                <a:ea typeface="Aptos" pitchFamily="34" charset="-122"/>
+                <a:cs typeface="Aptos" pitchFamily="34" charset="-120"/>
+              </a:rPr>
+              <a:t>Concept to action</a:t>
+            </a:r>
+            <a:endParaRPr lang="en-US" sz="1000" dirty="0"/>
+          </a:p>
+        </p:txBody>
+      </p:sp>
+      <p:sp>
+        <p:nvSpPr>
+          <p:cNvPr id="18" name="Shape 16"/>
+          <p:cNvSpPr/>
+          <p:nvPr/>
+        </p:nvSpPr>
+        <p:spPr>
+          <a:xfrm>
+            <a:off x="7635240" y="4498848"/>
+            <a:ext cx="3474720" cy="1143000"/>
+          </a:xfrm>
+          <a:prstGeom prst="roundRect">
+            <a:avLst>
+              <a:gd name="adj" fmla="val 9600"/>
             </a:avLst>
           </a:prstGeom>
           <a:solidFill>
@@ -11478,14 +12852,14 @@
       </p:sp>
       <p:sp>
         <p:nvSpPr>
-          <p:cNvPr id="16" name="Text 14"/>
-          <p:cNvSpPr/>
-          <p:nvPr/>
-        </p:nvSpPr>
-        <p:spPr>
-          <a:xfrm>
-            <a:off x="8074152" y="3666744"/>
-            <a:ext cx="2825496" cy="256032"/>
+          <p:cNvPr id="19" name="Text 17"/>
+          <p:cNvSpPr/>
+          <p:nvPr/>
+        </p:nvSpPr>
+        <p:spPr>
+          <a:xfrm>
+            <a:off x="7799832" y="4645152"/>
+            <a:ext cx="3145536" cy="256032"/>
           </a:xfrm>
           <a:prstGeom prst="rect">
             <a:avLst/>
@@ -11509,7 +12883,7 @@
                 <a:ea typeface="Aptos" pitchFamily="34" charset="-122"/>
                 <a:cs typeface="Aptos" pitchFamily="34" charset="-120"/>
               </a:rPr>
-              <a:t>Use this for</a:t>
+              <a:t>Apply it</a:t>
             </a:r>
             <a:endParaRPr lang="en-US" sz="1300" dirty="0"/>
           </a:p>
@@ -11517,14 +12891,14 @@
       </p:sp>
       <p:sp>
         <p:nvSpPr>
-          <p:cNvPr id="17" name="Text 15"/>
-          <p:cNvSpPr/>
-          <p:nvPr/>
-        </p:nvSpPr>
-        <p:spPr>
-          <a:xfrm>
-            <a:off x="8074152" y="4023360"/>
-            <a:ext cx="2825496" cy="1097280"/>
+          <p:cNvPr id="20" name="Text 18"/>
+          <p:cNvSpPr/>
+          <p:nvPr/>
+        </p:nvSpPr>
+        <p:spPr>
+          <a:xfrm>
+            <a:off x="7799832" y="5001768"/>
+            <a:ext cx="3145536" cy="502920"/>
           </a:xfrm>
           <a:prstGeom prst="rect">
             <a:avLst/>
@@ -11550,7 +12924,7 @@
                 <a:ea typeface="Aptos" pitchFamily="34" charset="-122"/>
                 <a:cs typeface="Aptos" pitchFamily="34" charset="-120"/>
               </a:rPr>
-              <a:t>Connect the concept to public health decisions, safeguards, documentation, or implementation work.</a:t>
+              <a:t>Connect the concept to public health purpose, responsible use, required safeguards, documentation, and the next action a department should take.</a:t>
             </a:r>
             <a:endParaRPr lang="en-US" sz="1550" dirty="0"/>
           </a:p>
@@ -11724,8 +13098,8 @@
         </p:nvSpPr>
         <p:spPr>
           <a:xfrm>
-            <a:off x="9966960" y="6537960"/>
-            <a:ext cx="1645920" cy="201168"/>
+            <a:off x="9646920" y="6537960"/>
+            <a:ext cx="1965960" cy="201168"/>
           </a:xfrm>
           <a:prstGeom prst="rect">
             <a:avLst/>
@@ -11749,7 +13123,7 @@
                 <a:ea typeface="Aptos" pitchFamily="34" charset="-122"/>
                 <a:cs typeface="Aptos" pitchFamily="34" charset="-120"/>
               </a:rPr>
-              <a:t>Â© Paula Soper</a:t>
+              <a:t>Copyright Paula Soper</a:t>
             </a:r>
             <a:endParaRPr lang="en-US" sz="800" dirty="0"/>
           </a:p>
@@ -11844,7 +13218,7 @@
         <p:spPr>
           <a:xfrm>
             <a:off x="868680" y="1508760"/>
-            <a:ext cx="6537960" cy="4160520"/>
+            <a:ext cx="6309360" cy="4160520"/>
           </a:xfrm>
           <a:prstGeom prst="rect">
             <a:avLst/>
@@ -11881,12 +13255,12 @@
         </p:nvSpPr>
         <p:spPr>
           <a:xfrm>
-            <a:off x="7909560" y="1417320"/>
-            <a:ext cx="3154680" cy="1828800"/>
+            <a:off x="7635240" y="1325880"/>
+            <a:ext cx="3474720" cy="1325880"/>
           </a:xfrm>
           <a:prstGeom prst="roundRect">
             <a:avLst>
-              <a:gd name="adj" fmla="val 6000"/>
+              <a:gd name="adj" fmla="val 8276"/>
             </a:avLst>
           </a:prstGeom>
           <a:solidFill>
@@ -11908,8 +13282,8 @@
         </p:nvSpPr>
         <p:spPr>
           <a:xfrm>
-            <a:off x="8074152" y="1563624"/>
-            <a:ext cx="2825496" cy="256032"/>
+            <a:off x="7799832" y="1472184"/>
+            <a:ext cx="3145536" cy="256032"/>
           </a:xfrm>
           <a:prstGeom prst="rect">
             <a:avLst/>
@@ -11933,7 +13307,7 @@
                 <a:ea typeface="Aptos" pitchFamily="34" charset="-122"/>
                 <a:cs typeface="Aptos" pitchFamily="34" charset="-120"/>
               </a:rPr>
-              <a:t>Key idea</a:t>
+              <a:t>Core concept</a:t>
             </a:r>
             <a:endParaRPr lang="en-US" sz="1300" dirty="0"/>
           </a:p>
@@ -11947,8 +13321,8 @@
         </p:nvSpPr>
         <p:spPr>
           <a:xfrm>
-            <a:off x="8074152" y="1920240"/>
-            <a:ext cx="2825496" cy="1188720"/>
+            <a:off x="7799832" y="1828800"/>
+            <a:ext cx="3145536" cy="685800"/>
           </a:xfrm>
           <a:prstGeom prst="rect">
             <a:avLst/>
@@ -11988,12 +13362,153 @@
         </p:nvSpPr>
         <p:spPr>
           <a:xfrm>
-            <a:off x="7909560" y="3520440"/>
-            <a:ext cx="3154680" cy="1737360"/>
+            <a:off x="7635240" y="2788920"/>
+            <a:ext cx="3474720" cy="1536192"/>
           </a:xfrm>
           <a:prstGeom prst="roundRect">
             <a:avLst>
-              <a:gd name="adj" fmla="val 6316"/>
+              <a:gd name="adj" fmla="val 7143"/>
+            </a:avLst>
+          </a:prstGeom>
+          <a:solidFill>
+            <a:srgbClr val="FFFFFF">
+              <a:alpha val="88000"/>
+            </a:srgbClr>
+          </a:solidFill>
+          <a:ln w="12700">
+            <a:solidFill>
+              <a:srgbClr val="D6E8F2"/>
+            </a:solidFill>
+            <a:prstDash val="solid"/>
+          </a:ln>
+        </p:spPr>
+      </p:sp>
+      <p:sp>
+        <p:nvSpPr>
+          <p:cNvPr id="14" name="Shape 12"/>
+          <p:cNvSpPr/>
+          <p:nvPr/>
+        </p:nvSpPr>
+        <p:spPr>
+          <a:xfrm>
+            <a:off x="8074152" y="3291840"/>
+            <a:ext cx="2596896" cy="749808"/>
+          </a:xfrm>
+          <a:prstGeom prst="rect">
+            <a:avLst/>
+          </a:prstGeom>
+          <a:solidFill>
+            <a:srgbClr val="EAF6F8"/>
+          </a:solidFill>
+          <a:ln w="12700">
+            <a:solidFill>
+              <a:srgbClr val="8ABBD8"/>
+            </a:solidFill>
+            <a:prstDash val="solid"/>
+          </a:ln>
+        </p:spPr>
+      </p:sp>
+      <p:sp>
+        <p:nvSpPr>
+          <p:cNvPr id="15" name="Shape 13"/>
+          <p:cNvSpPr/>
+          <p:nvPr/>
+        </p:nvSpPr>
+        <p:spPr>
+          <a:xfrm>
+            <a:off x="8202168" y="3721608"/>
+            <a:ext cx="2340864" cy="0"/>
+          </a:xfrm>
+          <a:prstGeom prst="line">
+            <a:avLst/>
+          </a:prstGeom>
+          <a:noFill/>
+          <a:ln w="19050">
+            <a:solidFill>
+              <a:srgbClr val="0068B7"/>
+            </a:solidFill>
+            <a:prstDash val="solid"/>
+          </a:ln>
+        </p:spPr>
+      </p:sp>
+      <p:sp>
+        <p:nvSpPr>
+          <p:cNvPr id="16" name="Shape 14"/>
+          <p:cNvSpPr/>
+          <p:nvPr/>
+        </p:nvSpPr>
+        <p:spPr>
+          <a:xfrm>
+            <a:off x="9198864" y="4206240"/>
+            <a:ext cx="347472" cy="347472"/>
+          </a:xfrm>
+          <a:prstGeom prst="ellipse">
+            <a:avLst/>
+          </a:prstGeom>
+          <a:solidFill>
+            <a:srgbClr val="2F8A28"/>
+          </a:solidFill>
+          <a:ln w="12700">
+            <a:solidFill>
+              <a:srgbClr val="2F8A28"/>
+            </a:solidFill>
+            <a:prstDash val="solid"/>
+          </a:ln>
+        </p:spPr>
+      </p:sp>
+      <p:sp>
+        <p:nvSpPr>
+          <p:cNvPr id="17" name="Text 15"/>
+          <p:cNvSpPr/>
+          <p:nvPr/>
+        </p:nvSpPr>
+        <p:spPr>
+          <a:xfrm>
+            <a:off x="7909560" y="3977640"/>
+            <a:ext cx="2926080" cy="182880"/>
+          </a:xfrm>
+          <a:prstGeom prst="rect">
+            <a:avLst/>
+          </a:prstGeom>
+          <a:noFill/>
+          <a:ln/>
+        </p:spPr>
+        <p:txBody>
+          <a:bodyPr wrap="square" lIns="0" tIns="0" rIns="0" bIns="0" rtlCol="0" anchor="ctr"/>
+          <a:lstStyle/>
+          <a:p>
+            <a:pPr algn="ctr" indent="0" marL="0">
+              <a:buNone/>
+            </a:pPr>
+            <a:r>
+              <a:rPr lang="en-US" sz="1000" dirty="0">
+                <a:solidFill>
+                  <a:srgbClr val="003A63"/>
+                </a:solidFill>
+                <a:latin typeface="Aptos" pitchFamily="34" charset="0"/>
+                <a:ea typeface="Aptos" pitchFamily="34" charset="-122"/>
+                <a:cs typeface="Aptos" pitchFamily="34" charset="-120"/>
+              </a:rPr>
+              <a:t>Concept to action</a:t>
+            </a:r>
+            <a:endParaRPr lang="en-US" sz="1000" dirty="0"/>
+          </a:p>
+        </p:txBody>
+      </p:sp>
+      <p:sp>
+        <p:nvSpPr>
+          <p:cNvPr id="18" name="Shape 16"/>
+          <p:cNvSpPr/>
+          <p:nvPr/>
+        </p:nvSpPr>
+        <p:spPr>
+          <a:xfrm>
+            <a:off x="7635240" y="4498848"/>
+            <a:ext cx="3474720" cy="1143000"/>
+          </a:xfrm>
+          <a:prstGeom prst="roundRect">
+            <a:avLst>
+              <a:gd name="adj" fmla="val 9600"/>
             </a:avLst>
           </a:prstGeom>
           <a:solidFill>
@@ -12009,14 +13524,14 @@
       </p:sp>
       <p:sp>
         <p:nvSpPr>
-          <p:cNvPr id="14" name="Text 12"/>
-          <p:cNvSpPr/>
-          <p:nvPr/>
-        </p:nvSpPr>
-        <p:spPr>
-          <a:xfrm>
-            <a:off x="8074152" y="3666744"/>
-            <a:ext cx="2825496" cy="256032"/>
+          <p:cNvPr id="19" name="Text 17"/>
+          <p:cNvSpPr/>
+          <p:nvPr/>
+        </p:nvSpPr>
+        <p:spPr>
+          <a:xfrm>
+            <a:off x="7799832" y="4645152"/>
+            <a:ext cx="3145536" cy="256032"/>
           </a:xfrm>
           <a:prstGeom prst="rect">
             <a:avLst/>
@@ -12040,7 +13555,7 @@
                 <a:ea typeface="Aptos" pitchFamily="34" charset="-122"/>
                 <a:cs typeface="Aptos" pitchFamily="34" charset="-120"/>
               </a:rPr>
-              <a:t>Use this for</a:t>
+              <a:t>Apply it</a:t>
             </a:r>
             <a:endParaRPr lang="en-US" sz="1300" dirty="0"/>
           </a:p>
@@ -12048,14 +13563,14 @@
       </p:sp>
       <p:sp>
         <p:nvSpPr>
-          <p:cNvPr id="15" name="Text 13"/>
-          <p:cNvSpPr/>
-          <p:nvPr/>
-        </p:nvSpPr>
-        <p:spPr>
-          <a:xfrm>
-            <a:off x="8074152" y="4023360"/>
-            <a:ext cx="2825496" cy="1097280"/>
+          <p:cNvPr id="20" name="Text 18"/>
+          <p:cNvSpPr/>
+          <p:nvPr/>
+        </p:nvSpPr>
+        <p:spPr>
+          <a:xfrm>
+            <a:off x="7799832" y="5001768"/>
+            <a:ext cx="3145536" cy="502920"/>
           </a:xfrm>
           <a:prstGeom prst="rect">
             <a:avLst/>
@@ -12081,7 +13596,7 @@
                 <a:ea typeface="Aptos" pitchFamily="34" charset="-122"/>
                 <a:cs typeface="Aptos" pitchFamily="34" charset="-120"/>
               </a:rPr>
-              <a:t>Connect the concept to public health decisions, safeguards, documentation, or implementation work.</a:t>
+              <a:t>Connect the concept to public health purpose, responsible use, required safeguards, documentation, and the next action a department should take.</a:t>
             </a:r>
             <a:endParaRPr lang="en-US" sz="1550" dirty="0"/>
           </a:p>
@@ -12255,8 +13770,8 @@
         </p:nvSpPr>
         <p:spPr>
           <a:xfrm>
-            <a:off x="9966960" y="6537960"/>
-            <a:ext cx="1645920" cy="201168"/>
+            <a:off x="9646920" y="6537960"/>
+            <a:ext cx="1965960" cy="201168"/>
           </a:xfrm>
           <a:prstGeom prst="rect">
             <a:avLst/>
@@ -12280,7 +13795,7 @@
                 <a:ea typeface="Aptos" pitchFamily="34" charset="-122"/>
                 <a:cs typeface="Aptos" pitchFamily="34" charset="-120"/>
               </a:rPr>
-              <a:t>Â© Paula Soper</a:t>
+              <a:t>Copyright Paula Soper</a:t>
             </a:r>
             <a:endParaRPr lang="en-US" sz="800" dirty="0"/>
           </a:p>
@@ -12623,46 +14138,7 @@
       </p:sp>
       <p:sp>
         <p:nvSpPr>
-          <p:cNvPr id="15" name="Text 13"/>
-          <p:cNvSpPr/>
-          <p:nvPr/>
-        </p:nvSpPr>
-        <p:spPr>
-          <a:xfrm>
-            <a:off x="8817864" y="4187952"/>
-            <a:ext cx="201168" cy="256032"/>
-          </a:xfrm>
-          <a:prstGeom prst="rect">
-            <a:avLst/>
-          </a:prstGeom>
-          <a:noFill/>
-          <a:ln/>
-        </p:spPr>
-        <p:txBody>
-          <a:bodyPr wrap="square" lIns="0" tIns="0" rIns="0" bIns="0" rtlCol="0" anchor="ctr"/>
-          <a:lstStyle/>
-          <a:p>
-            <a:pPr algn="ctr" indent="0" marL="0">
-              <a:buNone/>
-            </a:pPr>
-            <a:r>
-              <a:rPr lang="en-US" sz="1800" b="1" dirty="0">
-                <a:solidFill>
-                  <a:srgbClr val="0068B7"/>
-                </a:solidFill>
-                <a:latin typeface="Aptos" pitchFamily="34" charset="0"/>
-                <a:ea typeface="Aptos" pitchFamily="34" charset="-122"/>
-                <a:cs typeface="Aptos" pitchFamily="34" charset="-120"/>
-              </a:rPr>
-              <a:t>â†’</a:t>
-            </a:r>
-            <a:endParaRPr lang="en-US" sz="1800" dirty="0"/>
-          </a:p>
-        </p:txBody>
-      </p:sp>
-      <p:sp>
-        <p:nvSpPr>
-          <p:cNvPr id="16" name="Shape 14"/>
+          <p:cNvPr id="15" name="Shape 13"/>
           <p:cNvSpPr/>
           <p:nvPr/>
         </p:nvSpPr>
@@ -12689,7 +14165,7 @@
       </p:sp>
       <p:sp>
         <p:nvSpPr>
-          <p:cNvPr id="17" name="Text 15"/>
+          <p:cNvPr id="16" name="Text 14"/>
           <p:cNvSpPr/>
           <p:nvPr/>
         </p:nvSpPr>
@@ -12730,46 +14206,7 @@
       </p:sp>
       <p:sp>
         <p:nvSpPr>
-          <p:cNvPr id="18" name="Text 16"/>
-          <p:cNvSpPr/>
-          <p:nvPr/>
-        </p:nvSpPr>
-        <p:spPr>
-          <a:xfrm>
-            <a:off x="10046208" y="4187952"/>
-            <a:ext cx="201168" cy="256032"/>
-          </a:xfrm>
-          <a:prstGeom prst="rect">
-            <a:avLst/>
-          </a:prstGeom>
-          <a:noFill/>
-          <a:ln/>
-        </p:spPr>
-        <p:txBody>
-          <a:bodyPr wrap="square" lIns="0" tIns="0" rIns="0" bIns="0" rtlCol="0" anchor="ctr"/>
-          <a:lstStyle/>
-          <a:p>
-            <a:pPr algn="ctr" indent="0" marL="0">
-              <a:buNone/>
-            </a:pPr>
-            <a:r>
-              <a:rPr lang="en-US" sz="1800" b="1" dirty="0">
-                <a:solidFill>
-                  <a:srgbClr val="0068B7"/>
-                </a:solidFill>
-                <a:latin typeface="Aptos" pitchFamily="34" charset="0"/>
-                <a:ea typeface="Aptos" pitchFamily="34" charset="-122"/>
-                <a:cs typeface="Aptos" pitchFamily="34" charset="-120"/>
-              </a:rPr>
-              <a:t>â†’</a:t>
-            </a:r>
-            <a:endParaRPr lang="en-US" sz="1800" dirty="0"/>
-          </a:p>
-        </p:txBody>
-      </p:sp>
-      <p:sp>
-        <p:nvSpPr>
-          <p:cNvPr id="19" name="Shape 17"/>
+          <p:cNvPr id="17" name="Shape 15"/>
           <p:cNvSpPr/>
           <p:nvPr/>
         </p:nvSpPr>
@@ -12796,7 +14233,7 @@
       </p:sp>
       <p:sp>
         <p:nvSpPr>
-          <p:cNvPr id="20" name="Text 18"/>
+          <p:cNvPr id="18" name="Text 16"/>
           <p:cNvSpPr/>
           <p:nvPr/>
         </p:nvSpPr>
@@ -13003,8 +14440,8 @@
         </p:nvSpPr>
         <p:spPr>
           <a:xfrm>
-            <a:off x="9966960" y="6537960"/>
-            <a:ext cx="1645920" cy="201168"/>
+            <a:off x="9646920" y="6537960"/>
+            <a:ext cx="1965960" cy="201168"/>
           </a:xfrm>
           <a:prstGeom prst="rect">
             <a:avLst/>
@@ -13028,7 +14465,7 @@
                 <a:ea typeface="Aptos" pitchFamily="34" charset="-122"/>
                 <a:cs typeface="Aptos" pitchFamily="34" charset="-120"/>
               </a:rPr>
-              <a:t>Â© Paula Soper</a:t>
+              <a:t>Copyright Paula Soper</a:t>
             </a:r>
             <a:endParaRPr lang="en-US" sz="800" dirty="0"/>
           </a:p>
@@ -13371,46 +14808,7 @@
       </p:sp>
       <p:sp>
         <p:nvSpPr>
-          <p:cNvPr id="15" name="Text 13"/>
-          <p:cNvSpPr/>
-          <p:nvPr/>
-        </p:nvSpPr>
-        <p:spPr>
-          <a:xfrm>
-            <a:off x="8817864" y="4187952"/>
-            <a:ext cx="201168" cy="256032"/>
-          </a:xfrm>
-          <a:prstGeom prst="rect">
-            <a:avLst/>
-          </a:prstGeom>
-          <a:noFill/>
-          <a:ln/>
-        </p:spPr>
-        <p:txBody>
-          <a:bodyPr wrap="square" lIns="0" tIns="0" rIns="0" bIns="0" rtlCol="0" anchor="ctr"/>
-          <a:lstStyle/>
-          <a:p>
-            <a:pPr algn="ctr" indent="0" marL="0">
-              <a:buNone/>
-            </a:pPr>
-            <a:r>
-              <a:rPr lang="en-US" sz="1800" b="1" dirty="0">
-                <a:solidFill>
-                  <a:srgbClr val="0068B7"/>
-                </a:solidFill>
-                <a:latin typeface="Aptos" pitchFamily="34" charset="0"/>
-                <a:ea typeface="Aptos" pitchFamily="34" charset="-122"/>
-                <a:cs typeface="Aptos" pitchFamily="34" charset="-120"/>
-              </a:rPr>
-              <a:t>â†’</a:t>
-            </a:r>
-            <a:endParaRPr lang="en-US" sz="1800" dirty="0"/>
-          </a:p>
-        </p:txBody>
-      </p:sp>
-      <p:sp>
-        <p:nvSpPr>
-          <p:cNvPr id="16" name="Shape 14"/>
+          <p:cNvPr id="15" name="Shape 13"/>
           <p:cNvSpPr/>
           <p:nvPr/>
         </p:nvSpPr>
@@ -13437,7 +14835,7 @@
       </p:sp>
       <p:sp>
         <p:nvSpPr>
-          <p:cNvPr id="17" name="Text 15"/>
+          <p:cNvPr id="16" name="Text 14"/>
           <p:cNvSpPr/>
           <p:nvPr/>
         </p:nvSpPr>
@@ -13478,46 +14876,7 @@
       </p:sp>
       <p:sp>
         <p:nvSpPr>
-          <p:cNvPr id="18" name="Text 16"/>
-          <p:cNvSpPr/>
-          <p:nvPr/>
-        </p:nvSpPr>
-        <p:spPr>
-          <a:xfrm>
-            <a:off x="10046208" y="4187952"/>
-            <a:ext cx="201168" cy="256032"/>
-          </a:xfrm>
-          <a:prstGeom prst="rect">
-            <a:avLst/>
-          </a:prstGeom>
-          <a:noFill/>
-          <a:ln/>
-        </p:spPr>
-        <p:txBody>
-          <a:bodyPr wrap="square" lIns="0" tIns="0" rIns="0" bIns="0" rtlCol="0" anchor="ctr"/>
-          <a:lstStyle/>
-          <a:p>
-            <a:pPr algn="ctr" indent="0" marL="0">
-              <a:buNone/>
-            </a:pPr>
-            <a:r>
-              <a:rPr lang="en-US" sz="1800" b="1" dirty="0">
-                <a:solidFill>
-                  <a:srgbClr val="0068B7"/>
-                </a:solidFill>
-                <a:latin typeface="Aptos" pitchFamily="34" charset="0"/>
-                <a:ea typeface="Aptos" pitchFamily="34" charset="-122"/>
-                <a:cs typeface="Aptos" pitchFamily="34" charset="-120"/>
-              </a:rPr>
-              <a:t>â†’</a:t>
-            </a:r>
-            <a:endParaRPr lang="en-US" sz="1800" dirty="0"/>
-          </a:p>
-        </p:txBody>
-      </p:sp>
-      <p:sp>
-        <p:nvSpPr>
-          <p:cNvPr id="19" name="Shape 17"/>
+          <p:cNvPr id="17" name="Shape 15"/>
           <p:cNvSpPr/>
           <p:nvPr/>
         </p:nvSpPr>
@@ -13544,7 +14903,7 @@
       </p:sp>
       <p:sp>
         <p:nvSpPr>
-          <p:cNvPr id="20" name="Text 18"/>
+          <p:cNvPr id="18" name="Text 16"/>
           <p:cNvSpPr/>
           <p:nvPr/>
         </p:nvSpPr>
@@ -13751,8 +15110,8 @@
         </p:nvSpPr>
         <p:spPr>
           <a:xfrm>
-            <a:off x="9966960" y="6537960"/>
-            <a:ext cx="1645920" cy="201168"/>
+            <a:off x="9646920" y="6537960"/>
+            <a:ext cx="1965960" cy="201168"/>
           </a:xfrm>
           <a:prstGeom prst="rect">
             <a:avLst/>
@@ -13776,7 +15135,7 @@
                 <a:ea typeface="Aptos" pitchFamily="34" charset="-122"/>
                 <a:cs typeface="Aptos" pitchFamily="34" charset="-120"/>
               </a:rPr>
-              <a:t>Â© Paula Soper</a:t>
+              <a:t>Copyright Paula Soper</a:t>
             </a:r>
             <a:endParaRPr lang="en-US" sz="800" dirty="0"/>
           </a:p>
@@ -13823,77 +15182,13 @@
       </p:sp>
       <p:sp>
         <p:nvSpPr>
-          <p:cNvPr id="8" name="Shape 6"/>
+          <p:cNvPr id="8" name="Text 6"/>
           <p:cNvSpPr/>
           <p:nvPr/>
         </p:nvSpPr>
         <p:spPr>
           <a:xfrm>
             <a:off x="640080" y="658368"/>
-            <a:ext cx="420624" cy="420624"/>
-          </a:xfrm>
-          <a:prstGeom prst="ellipse">
-            <a:avLst/>
-          </a:prstGeom>
-          <a:solidFill>
-            <a:srgbClr val="0068B7"/>
-          </a:solidFill>
-          <a:ln w="12700">
-            <a:solidFill>
-              <a:srgbClr val="0068B7"/>
-            </a:solidFill>
-            <a:prstDash val="solid"/>
-          </a:ln>
-        </p:spPr>
-      </p:sp>
-      <p:sp>
-        <p:nvSpPr>
-          <p:cNvPr id="9" name="Text 7"/>
-          <p:cNvSpPr/>
-          <p:nvPr/>
-        </p:nvSpPr>
-        <p:spPr>
-          <a:xfrm>
-            <a:off x="640080" y="731520"/>
-            <a:ext cx="420624" cy="164592"/>
-          </a:xfrm>
-          <a:prstGeom prst="rect">
-            <a:avLst/>
-          </a:prstGeom>
-          <a:noFill/>
-          <a:ln/>
-        </p:spPr>
-        <p:txBody>
-          <a:bodyPr wrap="square" lIns="0" tIns="0" rIns="0" bIns="0" rtlCol="0" anchor="ctr"/>
-          <a:lstStyle/>
-          <a:p>
-            <a:pPr algn="ctr" indent="0" marL="0">
-              <a:buNone/>
-            </a:pPr>
-            <a:r>
-              <a:rPr lang="en-US" sz="1100" b="1" dirty="0">
-                <a:solidFill>
-                  <a:srgbClr val="FFFFFF"/>
-                </a:solidFill>
-                <a:latin typeface="Aptos" pitchFamily="34" charset="0"/>
-                <a:ea typeface="Aptos" pitchFamily="34" charset="-122"/>
-                <a:cs typeface="Aptos" pitchFamily="34" charset="-120"/>
-              </a:rPr>
-              <a:t>1</a:t>
-            </a:r>
-            <a:endParaRPr lang="en-US" sz="1100" dirty="0"/>
-          </a:p>
-        </p:txBody>
-      </p:sp>
-      <p:sp>
-        <p:nvSpPr>
-          <p:cNvPr id="10" name="Text 8"/>
-          <p:cNvSpPr/>
-          <p:nvPr/>
-        </p:nvSpPr>
-        <p:spPr>
-          <a:xfrm>
-            <a:off x="640080" y="621792"/>
             <a:ext cx="10881360" cy="713232"/>
           </a:xfrm>
           <a:prstGeom prst="rect">
@@ -13928,14 +15223,14 @@
       </p:sp>
       <p:sp>
         <p:nvSpPr>
-          <p:cNvPr id="11" name="Text 9"/>
+          <p:cNvPr id="9" name="Text 7"/>
           <p:cNvSpPr/>
           <p:nvPr/>
         </p:nvSpPr>
         <p:spPr>
           <a:xfrm>
             <a:off x="868680" y="1508760"/>
-            <a:ext cx="6537960" cy="4160520"/>
+            <a:ext cx="6309360" cy="4160520"/>
           </a:xfrm>
           <a:prstGeom prst="rect">
             <a:avLst/>
@@ -13994,18 +15289,18 @@
       </p:sp>
       <p:sp>
         <p:nvSpPr>
-          <p:cNvPr id="12" name="Shape 10"/>
-          <p:cNvSpPr/>
-          <p:nvPr/>
-        </p:nvSpPr>
-        <p:spPr>
-          <a:xfrm>
-            <a:off x="7909560" y="1417320"/>
-            <a:ext cx="3154680" cy="1828800"/>
+          <p:cNvPr id="10" name="Shape 8"/>
+          <p:cNvSpPr/>
+          <p:nvPr/>
+        </p:nvSpPr>
+        <p:spPr>
+          <a:xfrm>
+            <a:off x="7635240" y="1325880"/>
+            <a:ext cx="3474720" cy="1325880"/>
           </a:xfrm>
           <a:prstGeom prst="roundRect">
             <a:avLst>
-              <a:gd name="adj" fmla="val 6000"/>
+              <a:gd name="adj" fmla="val 8276"/>
             </a:avLst>
           </a:prstGeom>
           <a:solidFill>
@@ -14021,14 +15316,14 @@
       </p:sp>
       <p:sp>
         <p:nvSpPr>
-          <p:cNvPr id="13" name="Text 11"/>
-          <p:cNvSpPr/>
-          <p:nvPr/>
-        </p:nvSpPr>
-        <p:spPr>
-          <a:xfrm>
-            <a:off x="8074152" y="1563624"/>
-            <a:ext cx="2825496" cy="256032"/>
+          <p:cNvPr id="11" name="Text 9"/>
+          <p:cNvSpPr/>
+          <p:nvPr/>
+        </p:nvSpPr>
+        <p:spPr>
+          <a:xfrm>
+            <a:off x="7799832" y="1472184"/>
+            <a:ext cx="3145536" cy="256032"/>
           </a:xfrm>
           <a:prstGeom prst="rect">
             <a:avLst/>
@@ -14052,7 +15347,7 @@
                 <a:ea typeface="Aptos" pitchFamily="34" charset="-122"/>
                 <a:cs typeface="Aptos" pitchFamily="34" charset="-120"/>
               </a:rPr>
-              <a:t>Key idea</a:t>
+              <a:t>Practice focus</a:t>
             </a:r>
             <a:endParaRPr lang="en-US" sz="1300" dirty="0"/>
           </a:p>
@@ -14060,14 +15355,14 @@
       </p:sp>
       <p:sp>
         <p:nvSpPr>
-          <p:cNvPr id="14" name="Text 12"/>
-          <p:cNvSpPr/>
-          <p:nvPr/>
-        </p:nvSpPr>
-        <p:spPr>
-          <a:xfrm>
-            <a:off x="8074152" y="1920240"/>
-            <a:ext cx="2825496" cy="1188720"/>
+          <p:cNvPr id="12" name="Text 10"/>
+          <p:cNvSpPr/>
+          <p:nvPr/>
+        </p:nvSpPr>
+        <p:spPr>
+          <a:xfrm>
+            <a:off x="7799832" y="1828800"/>
+            <a:ext cx="3145536" cy="685800"/>
           </a:xfrm>
           <a:prstGeom prst="rect">
             <a:avLst/>
@@ -14101,18 +15396,159 @@
       </p:sp>
       <p:sp>
         <p:nvSpPr>
-          <p:cNvPr id="15" name="Shape 13"/>
-          <p:cNvSpPr/>
-          <p:nvPr/>
-        </p:nvSpPr>
-        <p:spPr>
-          <a:xfrm>
-            <a:off x="7909560" y="3520440"/>
-            <a:ext cx="3154680" cy="1737360"/>
+          <p:cNvPr id="13" name="Shape 11"/>
+          <p:cNvSpPr/>
+          <p:nvPr/>
+        </p:nvSpPr>
+        <p:spPr>
+          <a:xfrm>
+            <a:off x="7635240" y="2788920"/>
+            <a:ext cx="3474720" cy="1536192"/>
           </a:xfrm>
           <a:prstGeom prst="roundRect">
             <a:avLst>
-              <a:gd name="adj" fmla="val 6316"/>
+              <a:gd name="adj" fmla="val 7143"/>
+            </a:avLst>
+          </a:prstGeom>
+          <a:solidFill>
+            <a:srgbClr val="FFFFFF">
+              <a:alpha val="88000"/>
+            </a:srgbClr>
+          </a:solidFill>
+          <a:ln w="12700">
+            <a:solidFill>
+              <a:srgbClr val="D6E8F2"/>
+            </a:solidFill>
+            <a:prstDash val="solid"/>
+          </a:ln>
+        </p:spPr>
+      </p:sp>
+      <p:sp>
+        <p:nvSpPr>
+          <p:cNvPr id="14" name="Shape 12"/>
+          <p:cNvSpPr/>
+          <p:nvPr/>
+        </p:nvSpPr>
+        <p:spPr>
+          <a:xfrm>
+            <a:off x="8074152" y="3291840"/>
+            <a:ext cx="2596896" cy="749808"/>
+          </a:xfrm>
+          <a:prstGeom prst="rect">
+            <a:avLst/>
+          </a:prstGeom>
+          <a:solidFill>
+            <a:srgbClr val="EAF6F8"/>
+          </a:solidFill>
+          <a:ln w="12700">
+            <a:solidFill>
+              <a:srgbClr val="8ABBD8"/>
+            </a:solidFill>
+            <a:prstDash val="solid"/>
+          </a:ln>
+        </p:spPr>
+      </p:sp>
+      <p:sp>
+        <p:nvSpPr>
+          <p:cNvPr id="15" name="Shape 13"/>
+          <p:cNvSpPr/>
+          <p:nvPr/>
+        </p:nvSpPr>
+        <p:spPr>
+          <a:xfrm>
+            <a:off x="8202168" y="3721608"/>
+            <a:ext cx="2340864" cy="0"/>
+          </a:xfrm>
+          <a:prstGeom prst="line">
+            <a:avLst/>
+          </a:prstGeom>
+          <a:noFill/>
+          <a:ln w="19050">
+            <a:solidFill>
+              <a:srgbClr val="0068B7"/>
+            </a:solidFill>
+            <a:prstDash val="solid"/>
+          </a:ln>
+        </p:spPr>
+      </p:sp>
+      <p:sp>
+        <p:nvSpPr>
+          <p:cNvPr id="16" name="Shape 14"/>
+          <p:cNvSpPr/>
+          <p:nvPr/>
+        </p:nvSpPr>
+        <p:spPr>
+          <a:xfrm>
+            <a:off x="9198864" y="4206240"/>
+            <a:ext cx="347472" cy="347472"/>
+          </a:xfrm>
+          <a:prstGeom prst="ellipse">
+            <a:avLst/>
+          </a:prstGeom>
+          <a:solidFill>
+            <a:srgbClr val="2F8A28"/>
+          </a:solidFill>
+          <a:ln w="12700">
+            <a:solidFill>
+              <a:srgbClr val="2F8A28"/>
+            </a:solidFill>
+            <a:prstDash val="solid"/>
+          </a:ln>
+        </p:spPr>
+      </p:sp>
+      <p:sp>
+        <p:nvSpPr>
+          <p:cNvPr id="17" name="Text 15"/>
+          <p:cNvSpPr/>
+          <p:nvPr/>
+        </p:nvSpPr>
+        <p:spPr>
+          <a:xfrm>
+            <a:off x="7909560" y="3977640"/>
+            <a:ext cx="2926080" cy="182880"/>
+          </a:xfrm>
+          <a:prstGeom prst="rect">
+            <a:avLst/>
+          </a:prstGeom>
+          <a:noFill/>
+          <a:ln/>
+        </p:spPr>
+        <p:txBody>
+          <a:bodyPr wrap="square" lIns="0" tIns="0" rIns="0" bIns="0" rtlCol="0" anchor="ctr"/>
+          <a:lstStyle/>
+          <a:p>
+            <a:pPr algn="ctr" indent="0" marL="0">
+              <a:buNone/>
+            </a:pPr>
+            <a:r>
+              <a:rPr lang="en-US" sz="1000" dirty="0">
+                <a:solidFill>
+                  <a:srgbClr val="003A63"/>
+                </a:solidFill>
+                <a:latin typeface="Aptos" pitchFamily="34" charset="0"/>
+                <a:ea typeface="Aptos" pitchFamily="34" charset="-122"/>
+                <a:cs typeface="Aptos" pitchFamily="34" charset="-120"/>
+              </a:rPr>
+              <a:t>Concept to action</a:t>
+            </a:r>
+            <a:endParaRPr lang="en-US" sz="1000" dirty="0"/>
+          </a:p>
+        </p:txBody>
+      </p:sp>
+      <p:sp>
+        <p:nvSpPr>
+          <p:cNvPr id="18" name="Shape 16"/>
+          <p:cNvSpPr/>
+          <p:nvPr/>
+        </p:nvSpPr>
+        <p:spPr>
+          <a:xfrm>
+            <a:off x="7635240" y="4498848"/>
+            <a:ext cx="3474720" cy="1143000"/>
+          </a:xfrm>
+          <a:prstGeom prst="roundRect">
+            <a:avLst>
+              <a:gd name="adj" fmla="val 9600"/>
             </a:avLst>
           </a:prstGeom>
           <a:solidFill>
@@ -14128,14 +15564,14 @@
       </p:sp>
       <p:sp>
         <p:nvSpPr>
-          <p:cNvPr id="16" name="Text 14"/>
-          <p:cNvSpPr/>
-          <p:nvPr/>
-        </p:nvSpPr>
-        <p:spPr>
-          <a:xfrm>
-            <a:off x="8074152" y="3666744"/>
-            <a:ext cx="2825496" cy="256032"/>
+          <p:cNvPr id="19" name="Text 17"/>
+          <p:cNvSpPr/>
+          <p:nvPr/>
+        </p:nvSpPr>
+        <p:spPr>
+          <a:xfrm>
+            <a:off x="7799832" y="4645152"/>
+            <a:ext cx="3145536" cy="256032"/>
           </a:xfrm>
           <a:prstGeom prst="rect">
             <a:avLst/>
@@ -14159,7 +15595,7 @@
                 <a:ea typeface="Aptos" pitchFamily="34" charset="-122"/>
                 <a:cs typeface="Aptos" pitchFamily="34" charset="-120"/>
               </a:rPr>
-              <a:t>Use this for</a:t>
+              <a:t>What to produce</a:t>
             </a:r>
             <a:endParaRPr lang="en-US" sz="1300" dirty="0"/>
           </a:p>
@@ -14167,14 +15603,14 @@
       </p:sp>
       <p:sp>
         <p:nvSpPr>
-          <p:cNvPr id="17" name="Text 15"/>
-          <p:cNvSpPr/>
-          <p:nvPr/>
-        </p:nvSpPr>
-        <p:spPr>
-          <a:xfrm>
-            <a:off x="8074152" y="4023360"/>
-            <a:ext cx="2825496" cy="1097280"/>
+          <p:cNvPr id="20" name="Text 18"/>
+          <p:cNvSpPr/>
+          <p:nvPr/>
+        </p:nvSpPr>
+        <p:spPr>
+          <a:xfrm>
+            <a:off x="7799832" y="5001768"/>
+            <a:ext cx="3145536" cy="502920"/>
           </a:xfrm>
           <a:prstGeom prst="rect">
             <a:avLst/>
@@ -14200,7 +15636,7 @@
                 <a:ea typeface="Aptos" pitchFamily="34" charset="-122"/>
                 <a:cs typeface="Aptos" pitchFamily="34" charset="-120"/>
               </a:rPr>
-              <a:t>Connect the concept to public health decisions, safeguards, documentation, or implementation work.</a:t>
+              <a:t>Use the assignment to test whether you can explain the concept, apply it to a realistic public health situation, and identify what would need review before the work moves forward.</a:t>
             </a:r>
             <a:endParaRPr lang="en-US" sz="1550" dirty="0"/>
           </a:p>
@@ -14374,8 +15810,8 @@
         </p:nvSpPr>
         <p:spPr>
           <a:xfrm>
-            <a:off x="9966960" y="6537960"/>
-            <a:ext cx="1645920" cy="201168"/>
+            <a:off x="9646920" y="6537960"/>
+            <a:ext cx="1965960" cy="201168"/>
           </a:xfrm>
           <a:prstGeom prst="rect">
             <a:avLst/>
@@ -14399,7 +15835,7 @@
                 <a:ea typeface="Aptos" pitchFamily="34" charset="-122"/>
                 <a:cs typeface="Aptos" pitchFamily="34" charset="-120"/>
               </a:rPr>
-              <a:t>Â© Paula Soper</a:t>
+              <a:t>Copyright Paula Soper</a:t>
             </a:r>
             <a:endParaRPr lang="en-US" sz="800" dirty="0"/>
           </a:p>
@@ -14446,77 +15882,13 @@
       </p:sp>
       <p:sp>
         <p:nvSpPr>
-          <p:cNvPr id="8" name="Shape 6"/>
+          <p:cNvPr id="8" name="Text 6"/>
           <p:cNvSpPr/>
           <p:nvPr/>
         </p:nvSpPr>
         <p:spPr>
           <a:xfrm>
             <a:off x="640080" y="658368"/>
-            <a:ext cx="420624" cy="420624"/>
-          </a:xfrm>
-          <a:prstGeom prst="ellipse">
-            <a:avLst/>
-          </a:prstGeom>
-          <a:solidFill>
-            <a:srgbClr val="0068B7"/>
-          </a:solidFill>
-          <a:ln w="12700">
-            <a:solidFill>
-              <a:srgbClr val="0068B7"/>
-            </a:solidFill>
-            <a:prstDash val="solid"/>
-          </a:ln>
-        </p:spPr>
-      </p:sp>
-      <p:sp>
-        <p:nvSpPr>
-          <p:cNvPr id="9" name="Text 7"/>
-          <p:cNvSpPr/>
-          <p:nvPr/>
-        </p:nvSpPr>
-        <p:spPr>
-          <a:xfrm>
-            <a:off x="640080" y="731520"/>
-            <a:ext cx="420624" cy="164592"/>
-          </a:xfrm>
-          <a:prstGeom prst="rect">
-            <a:avLst/>
-          </a:prstGeom>
-          <a:noFill/>
-          <a:ln/>
-        </p:spPr>
-        <p:txBody>
-          <a:bodyPr wrap="square" lIns="0" tIns="0" rIns="0" bIns="0" rtlCol="0" anchor="ctr"/>
-          <a:lstStyle/>
-          <a:p>
-            <a:pPr algn="ctr" indent="0" marL="0">
-              <a:buNone/>
-            </a:pPr>
-            <a:r>
-              <a:rPr lang="en-US" sz="1100" b="1" dirty="0">
-                <a:solidFill>
-                  <a:srgbClr val="FFFFFF"/>
-                </a:solidFill>
-                <a:latin typeface="Aptos" pitchFamily="34" charset="0"/>
-                <a:ea typeface="Aptos" pitchFamily="34" charset="-122"/>
-                <a:cs typeface="Aptos" pitchFamily="34" charset="-120"/>
-              </a:rPr>
-              <a:t>2</a:t>
-            </a:r>
-            <a:endParaRPr lang="en-US" sz="1100" dirty="0"/>
-          </a:p>
-        </p:txBody>
-      </p:sp>
-      <p:sp>
-        <p:nvSpPr>
-          <p:cNvPr id="10" name="Text 8"/>
-          <p:cNvSpPr/>
-          <p:nvPr/>
-        </p:nvSpPr>
-        <p:spPr>
-          <a:xfrm>
-            <a:off x="640080" y="621792"/>
             <a:ext cx="10881360" cy="713232"/>
           </a:xfrm>
           <a:prstGeom prst="rect">
@@ -14551,14 +15923,14 @@
       </p:sp>
       <p:sp>
         <p:nvSpPr>
-          <p:cNvPr id="11" name="Text 9"/>
+          <p:cNvPr id="9" name="Text 7"/>
           <p:cNvSpPr/>
           <p:nvPr/>
         </p:nvSpPr>
         <p:spPr>
           <a:xfrm>
             <a:off x="868680" y="1508760"/>
-            <a:ext cx="6537960" cy="4160520"/>
+            <a:ext cx="6309360" cy="4160520"/>
           </a:xfrm>
           <a:prstGeom prst="rect">
             <a:avLst/>
@@ -14617,18 +15989,18 @@
       </p:sp>
       <p:sp>
         <p:nvSpPr>
-          <p:cNvPr id="12" name="Shape 10"/>
-          <p:cNvSpPr/>
-          <p:nvPr/>
-        </p:nvSpPr>
-        <p:spPr>
-          <a:xfrm>
-            <a:off x="7909560" y="1417320"/>
-            <a:ext cx="3154680" cy="1828800"/>
+          <p:cNvPr id="10" name="Shape 8"/>
+          <p:cNvSpPr/>
+          <p:nvPr/>
+        </p:nvSpPr>
+        <p:spPr>
+          <a:xfrm>
+            <a:off x="7635240" y="1325880"/>
+            <a:ext cx="3474720" cy="1325880"/>
           </a:xfrm>
           <a:prstGeom prst="roundRect">
             <a:avLst>
-              <a:gd name="adj" fmla="val 6000"/>
+              <a:gd name="adj" fmla="val 8276"/>
             </a:avLst>
           </a:prstGeom>
           <a:solidFill>
@@ -14644,14 +16016,14 @@
       </p:sp>
       <p:sp>
         <p:nvSpPr>
-          <p:cNvPr id="13" name="Text 11"/>
-          <p:cNvSpPr/>
-          <p:nvPr/>
-        </p:nvSpPr>
-        <p:spPr>
-          <a:xfrm>
-            <a:off x="8074152" y="1563624"/>
-            <a:ext cx="2825496" cy="256032"/>
+          <p:cNvPr id="11" name="Text 9"/>
+          <p:cNvSpPr/>
+          <p:nvPr/>
+        </p:nvSpPr>
+        <p:spPr>
+          <a:xfrm>
+            <a:off x="7799832" y="1472184"/>
+            <a:ext cx="3145536" cy="256032"/>
           </a:xfrm>
           <a:prstGeom prst="rect">
             <a:avLst/>
@@ -14675,7 +16047,7 @@
                 <a:ea typeface="Aptos" pitchFamily="34" charset="-122"/>
                 <a:cs typeface="Aptos" pitchFamily="34" charset="-120"/>
               </a:rPr>
-              <a:t>Key idea</a:t>
+              <a:t>Core concept</a:t>
             </a:r>
             <a:endParaRPr lang="en-US" sz="1300" dirty="0"/>
           </a:p>
@@ -14683,14 +16055,14 @@
       </p:sp>
       <p:sp>
         <p:nvSpPr>
-          <p:cNvPr id="14" name="Text 12"/>
-          <p:cNvSpPr/>
-          <p:nvPr/>
-        </p:nvSpPr>
-        <p:spPr>
-          <a:xfrm>
-            <a:off x="8074152" y="1920240"/>
-            <a:ext cx="2825496" cy="1188720"/>
+          <p:cNvPr id="12" name="Text 10"/>
+          <p:cNvSpPr/>
+          <p:nvPr/>
+        </p:nvSpPr>
+        <p:spPr>
+          <a:xfrm>
+            <a:off x="7799832" y="1828800"/>
+            <a:ext cx="3145536" cy="685800"/>
           </a:xfrm>
           <a:prstGeom prst="rect">
             <a:avLst/>
@@ -14724,18 +16096,159 @@
       </p:sp>
       <p:sp>
         <p:nvSpPr>
-          <p:cNvPr id="15" name="Shape 13"/>
-          <p:cNvSpPr/>
-          <p:nvPr/>
-        </p:nvSpPr>
-        <p:spPr>
-          <a:xfrm>
-            <a:off x="7909560" y="3520440"/>
-            <a:ext cx="3154680" cy="1737360"/>
+          <p:cNvPr id="13" name="Shape 11"/>
+          <p:cNvSpPr/>
+          <p:nvPr/>
+        </p:nvSpPr>
+        <p:spPr>
+          <a:xfrm>
+            <a:off x="7635240" y="2788920"/>
+            <a:ext cx="3474720" cy="1536192"/>
           </a:xfrm>
           <a:prstGeom prst="roundRect">
             <a:avLst>
-              <a:gd name="adj" fmla="val 6316"/>
+              <a:gd name="adj" fmla="val 7143"/>
+            </a:avLst>
+          </a:prstGeom>
+          <a:solidFill>
+            <a:srgbClr val="FFFFFF">
+              <a:alpha val="88000"/>
+            </a:srgbClr>
+          </a:solidFill>
+          <a:ln w="12700">
+            <a:solidFill>
+              <a:srgbClr val="D6E8F2"/>
+            </a:solidFill>
+            <a:prstDash val="solid"/>
+          </a:ln>
+        </p:spPr>
+      </p:sp>
+      <p:sp>
+        <p:nvSpPr>
+          <p:cNvPr id="14" name="Shape 12"/>
+          <p:cNvSpPr/>
+          <p:nvPr/>
+        </p:nvSpPr>
+        <p:spPr>
+          <a:xfrm>
+            <a:off x="8074152" y="3291840"/>
+            <a:ext cx="2596896" cy="749808"/>
+          </a:xfrm>
+          <a:prstGeom prst="rect">
+            <a:avLst/>
+          </a:prstGeom>
+          <a:solidFill>
+            <a:srgbClr val="EAF6F8"/>
+          </a:solidFill>
+          <a:ln w="12700">
+            <a:solidFill>
+              <a:srgbClr val="8ABBD8"/>
+            </a:solidFill>
+            <a:prstDash val="solid"/>
+          </a:ln>
+        </p:spPr>
+      </p:sp>
+      <p:sp>
+        <p:nvSpPr>
+          <p:cNvPr id="15" name="Shape 13"/>
+          <p:cNvSpPr/>
+          <p:nvPr/>
+        </p:nvSpPr>
+        <p:spPr>
+          <a:xfrm>
+            <a:off x="8202168" y="3721608"/>
+            <a:ext cx="2340864" cy="0"/>
+          </a:xfrm>
+          <a:prstGeom prst="line">
+            <a:avLst/>
+          </a:prstGeom>
+          <a:noFill/>
+          <a:ln w="19050">
+            <a:solidFill>
+              <a:srgbClr val="0068B7"/>
+            </a:solidFill>
+            <a:prstDash val="solid"/>
+          </a:ln>
+        </p:spPr>
+      </p:sp>
+      <p:sp>
+        <p:nvSpPr>
+          <p:cNvPr id="16" name="Shape 14"/>
+          <p:cNvSpPr/>
+          <p:nvPr/>
+        </p:nvSpPr>
+        <p:spPr>
+          <a:xfrm>
+            <a:off x="9198864" y="4206240"/>
+            <a:ext cx="347472" cy="347472"/>
+          </a:xfrm>
+          <a:prstGeom prst="ellipse">
+            <a:avLst/>
+          </a:prstGeom>
+          <a:solidFill>
+            <a:srgbClr val="2F8A28"/>
+          </a:solidFill>
+          <a:ln w="12700">
+            <a:solidFill>
+              <a:srgbClr val="2F8A28"/>
+            </a:solidFill>
+            <a:prstDash val="solid"/>
+          </a:ln>
+        </p:spPr>
+      </p:sp>
+      <p:sp>
+        <p:nvSpPr>
+          <p:cNvPr id="17" name="Text 15"/>
+          <p:cNvSpPr/>
+          <p:nvPr/>
+        </p:nvSpPr>
+        <p:spPr>
+          <a:xfrm>
+            <a:off x="7909560" y="3977640"/>
+            <a:ext cx="2926080" cy="182880"/>
+          </a:xfrm>
+          <a:prstGeom prst="rect">
+            <a:avLst/>
+          </a:prstGeom>
+          <a:noFill/>
+          <a:ln/>
+        </p:spPr>
+        <p:txBody>
+          <a:bodyPr wrap="square" lIns="0" tIns="0" rIns="0" bIns="0" rtlCol="0" anchor="ctr"/>
+          <a:lstStyle/>
+          <a:p>
+            <a:pPr algn="ctr" indent="0" marL="0">
+              <a:buNone/>
+            </a:pPr>
+            <a:r>
+              <a:rPr lang="en-US" sz="1000" dirty="0">
+                <a:solidFill>
+                  <a:srgbClr val="003A63"/>
+                </a:solidFill>
+                <a:latin typeface="Aptos" pitchFamily="34" charset="0"/>
+                <a:ea typeface="Aptos" pitchFamily="34" charset="-122"/>
+                <a:cs typeface="Aptos" pitchFamily="34" charset="-120"/>
+              </a:rPr>
+              <a:t>Concept to action</a:t>
+            </a:r>
+            <a:endParaRPr lang="en-US" sz="1000" dirty="0"/>
+          </a:p>
+        </p:txBody>
+      </p:sp>
+      <p:sp>
+        <p:nvSpPr>
+          <p:cNvPr id="18" name="Shape 16"/>
+          <p:cNvSpPr/>
+          <p:nvPr/>
+        </p:nvSpPr>
+        <p:spPr>
+          <a:xfrm>
+            <a:off x="7635240" y="4498848"/>
+            <a:ext cx="3474720" cy="1143000"/>
+          </a:xfrm>
+          <a:prstGeom prst="roundRect">
+            <a:avLst>
+              <a:gd name="adj" fmla="val 9600"/>
             </a:avLst>
           </a:prstGeom>
           <a:solidFill>
@@ -14751,14 +16264,14 @@
       </p:sp>
       <p:sp>
         <p:nvSpPr>
-          <p:cNvPr id="16" name="Text 14"/>
-          <p:cNvSpPr/>
-          <p:nvPr/>
-        </p:nvSpPr>
-        <p:spPr>
-          <a:xfrm>
-            <a:off x="8074152" y="3666744"/>
-            <a:ext cx="2825496" cy="256032"/>
+          <p:cNvPr id="19" name="Text 17"/>
+          <p:cNvSpPr/>
+          <p:nvPr/>
+        </p:nvSpPr>
+        <p:spPr>
+          <a:xfrm>
+            <a:off x="7799832" y="4645152"/>
+            <a:ext cx="3145536" cy="256032"/>
           </a:xfrm>
           <a:prstGeom prst="rect">
             <a:avLst/>
@@ -14782,7 +16295,7 @@
                 <a:ea typeface="Aptos" pitchFamily="34" charset="-122"/>
                 <a:cs typeface="Aptos" pitchFamily="34" charset="-120"/>
               </a:rPr>
-              <a:t>Use this for</a:t>
+              <a:t>Apply it</a:t>
             </a:r>
             <a:endParaRPr lang="en-US" sz="1300" dirty="0"/>
           </a:p>
@@ -14790,14 +16303,14 @@
       </p:sp>
       <p:sp>
         <p:nvSpPr>
-          <p:cNvPr id="17" name="Text 15"/>
-          <p:cNvSpPr/>
-          <p:nvPr/>
-        </p:nvSpPr>
-        <p:spPr>
-          <a:xfrm>
-            <a:off x="8074152" y="4023360"/>
-            <a:ext cx="2825496" cy="1097280"/>
+          <p:cNvPr id="20" name="Text 18"/>
+          <p:cNvSpPr/>
+          <p:nvPr/>
+        </p:nvSpPr>
+        <p:spPr>
+          <a:xfrm>
+            <a:off x="7799832" y="5001768"/>
+            <a:ext cx="3145536" cy="502920"/>
           </a:xfrm>
           <a:prstGeom prst="rect">
             <a:avLst/>
@@ -14823,7 +16336,7 @@
                 <a:ea typeface="Aptos" pitchFamily="34" charset="-122"/>
                 <a:cs typeface="Aptos" pitchFamily="34" charset="-120"/>
               </a:rPr>
-              <a:t>Connect the concept to public health decisions, safeguards, documentation, or implementation work.</a:t>
+              <a:t>Connect the concept to public health purpose, responsible use, required safeguards, documentation, and the next action a department should take.</a:t>
             </a:r>
             <a:endParaRPr lang="en-US" sz="1550" dirty="0"/>
           </a:p>
@@ -14997,8 +16510,8 @@
         </p:nvSpPr>
         <p:spPr>
           <a:xfrm>
-            <a:off x="9966960" y="6537960"/>
-            <a:ext cx="1645920" cy="201168"/>
+            <a:off x="9646920" y="6537960"/>
+            <a:ext cx="1965960" cy="201168"/>
           </a:xfrm>
           <a:prstGeom prst="rect">
             <a:avLst/>
@@ -15022,7 +16535,7 @@
                 <a:ea typeface="Aptos" pitchFamily="34" charset="-122"/>
                 <a:cs typeface="Aptos" pitchFamily="34" charset="-120"/>
               </a:rPr>
-              <a:t>Â© Paula Soper</a:t>
+              <a:t>Copyright Paula Soper</a:t>
             </a:r>
             <a:endParaRPr lang="en-US" sz="800" dirty="0"/>
           </a:p>
@@ -15069,14 +16582,257 @@
       </p:sp>
       <p:sp>
         <p:nvSpPr>
-          <p:cNvPr id="8" name="Shape 6"/>
+          <p:cNvPr id="8" name="Text 6"/>
           <p:cNvSpPr/>
           <p:nvPr/>
         </p:nvSpPr>
         <p:spPr>
           <a:xfrm>
             <a:off x="640080" y="658368"/>
-            <a:ext cx="420624" cy="420624"/>
+            <a:ext cx="10881360" cy="713232"/>
+          </a:xfrm>
+          <a:prstGeom prst="rect">
+            <a:avLst/>
+          </a:prstGeom>
+          <a:noFill/>
+          <a:ln/>
+        </p:spPr>
+        <p:txBody>
+          <a:bodyPr wrap="square" lIns="0" tIns="0" rIns="0" bIns="0" rtlCol="0" anchor="ctr">
+            <a:normAutofit/>
+          </a:bodyPr>
+          <a:lstStyle/>
+          <a:p>
+            <a:pPr indent="0" marL="0">
+              <a:buNone/>
+            </a:pPr>
+            <a:r>
+              <a:rPr lang="en-US" sz="3400" b="1" dirty="0">
+                <a:solidFill>
+                  <a:srgbClr val="003A63"/>
+                </a:solidFill>
+                <a:latin typeface="Aptos Display" pitchFamily="34" charset="0"/>
+                <a:ea typeface="Aptos Display" pitchFamily="34" charset="-122"/>
+                <a:cs typeface="Aptos Display" pitchFamily="34" charset="-120"/>
+              </a:rPr>
+              <a:t>Jurisdiction and Agency Policy Note</a:t>
+            </a:r>
+            <a:endParaRPr lang="en-US" sz="3400" dirty="0"/>
+          </a:p>
+        </p:txBody>
+      </p:sp>
+      <p:sp>
+        <p:nvSpPr>
+          <p:cNvPr id="9" name="Text 7"/>
+          <p:cNvSpPr/>
+          <p:nvPr/>
+        </p:nvSpPr>
+        <p:spPr>
+          <a:xfrm>
+            <a:off x="868680" y="1508760"/>
+            <a:ext cx="6309360" cy="4160520"/>
+          </a:xfrm>
+          <a:prstGeom prst="rect">
+            <a:avLst/>
+          </a:prstGeom>
+          <a:noFill/>
+          <a:ln/>
+        </p:spPr>
+        <p:txBody>
+          <a:bodyPr wrap="square" lIns="635" tIns="635" rIns="635" bIns="635" rtlCol="0" anchor="t">
+            <a:normAutofit/>
+          </a:bodyPr>
+          <a:lstStyle/>
+          <a:p>
+            <a:r>
+              <a:rPr lang="en-US" sz="2100" dirty="0">
+                <a:solidFill>
+                  <a:srgbClr val="17364A"/>
+                </a:solidFill>
+                <a:latin typeface="Aptos" pitchFamily="34" charset="0"/>
+                <a:ea typeface="Aptos" pitchFamily="34" charset="-122"/>
+                <a:cs typeface="Aptos" pitchFamily="34" charset="-120"/>
+              </a:rPr>
+              <a:t>This module provides national-level training guidance for public health agencies and partners.</a:t>
+            </a:r>
+            <a:endParaRPr lang="en-US" sz="2100" dirty="0"/>
+          </a:p>
+          <a:p>
+            <a:r>
+              <a:rPr lang="en-US" sz="2100" dirty="0">
+                <a:solidFill>
+                  <a:srgbClr val="17364A"/>
+                </a:solidFill>
+                <a:latin typeface="Aptos" pitchFamily="34" charset="0"/>
+                <a:ea typeface="Aptos" pitchFamily="34" charset="-122"/>
+                <a:cs typeface="Aptos" pitchFamily="34" charset="-120"/>
+              </a:rPr>
+              <a:t>It is not legal advice and does not replace review by agency legal counsel, privacy officers,.</a:t>
+            </a:r>
+            <a:endParaRPr lang="en-US" sz="2100" dirty="0"/>
+          </a:p>
+          <a:p>
+            <a:r>
+              <a:rPr lang="en-US" sz="2100" dirty="0">
+                <a:solidFill>
+                  <a:srgbClr val="17364A"/>
+                </a:solidFill>
+                <a:latin typeface="Aptos" pitchFamily="34" charset="0"/>
+                <a:ea typeface="Aptos" pitchFamily="34" charset="-122"/>
+                <a:cs typeface="Aptos" pitchFamily="34" charset="-120"/>
+              </a:rPr>
+              <a:t>Requirements may vary by state, locality, territory, Tribe, agency, funding source, data-sharing.</a:t>
+            </a:r>
+            <a:endParaRPr lang="en-US" sz="2100" dirty="0"/>
+          </a:p>
+        </p:txBody>
+      </p:sp>
+      <p:sp>
+        <p:nvSpPr>
+          <p:cNvPr id="10" name="Shape 8"/>
+          <p:cNvSpPr/>
+          <p:nvPr/>
+        </p:nvSpPr>
+        <p:spPr>
+          <a:xfrm>
+            <a:off x="7635240" y="1325880"/>
+            <a:ext cx="3474720" cy="1325880"/>
+          </a:xfrm>
+          <a:prstGeom prst="roundRect">
+            <a:avLst>
+              <a:gd name="adj" fmla="val 8276"/>
+            </a:avLst>
+          </a:prstGeom>
+          <a:solidFill>
+            <a:srgbClr val="EEF8ED"/>
+          </a:solidFill>
+          <a:ln w="12700">
+            <a:solidFill>
+              <a:srgbClr val="B9D7E6"/>
+            </a:solidFill>
+            <a:prstDash val="solid"/>
+          </a:ln>
+        </p:spPr>
+      </p:sp>
+      <p:sp>
+        <p:nvSpPr>
+          <p:cNvPr id="11" name="Text 9"/>
+          <p:cNvSpPr/>
+          <p:nvPr/>
+        </p:nvSpPr>
+        <p:spPr>
+          <a:xfrm>
+            <a:off x="7799832" y="1472184"/>
+            <a:ext cx="3145536" cy="256032"/>
+          </a:xfrm>
+          <a:prstGeom prst="rect">
+            <a:avLst/>
+          </a:prstGeom>
+          <a:noFill/>
+          <a:ln/>
+        </p:spPr>
+        <p:txBody>
+          <a:bodyPr wrap="square" lIns="0" tIns="0" rIns="0" bIns="0" rtlCol="0" anchor="ctr"/>
+          <a:lstStyle/>
+          <a:p>
+            <a:pPr indent="0" marL="0">
+              <a:buNone/>
+            </a:pPr>
+            <a:r>
+              <a:rPr lang="en-US" sz="1300" b="1" dirty="0">
+                <a:solidFill>
+                  <a:srgbClr val="0068B7"/>
+                </a:solidFill>
+                <a:latin typeface="Aptos" pitchFamily="34" charset="0"/>
+                <a:ea typeface="Aptos" pitchFamily="34" charset="-122"/>
+                <a:cs typeface="Aptos" pitchFamily="34" charset="-120"/>
+              </a:rPr>
+              <a:t>Governance lens</a:t>
+            </a:r>
+            <a:endParaRPr lang="en-US" sz="1300" dirty="0"/>
+          </a:p>
+        </p:txBody>
+      </p:sp>
+      <p:sp>
+        <p:nvSpPr>
+          <p:cNvPr id="12" name="Text 10"/>
+          <p:cNvSpPr/>
+          <p:nvPr/>
+        </p:nvSpPr>
+        <p:spPr>
+          <a:xfrm>
+            <a:off x="7799832" y="1828800"/>
+            <a:ext cx="3145536" cy="685800"/>
+          </a:xfrm>
+          <a:prstGeom prst="rect">
+            <a:avLst/>
+          </a:prstGeom>
+          <a:noFill/>
+          <a:ln/>
+        </p:spPr>
+        <p:txBody>
+          <a:bodyPr wrap="square" lIns="0" tIns="0" rIns="0" bIns="0" rtlCol="0" anchor="t">
+            <a:normAutofit/>
+          </a:bodyPr>
+          <a:lstStyle/>
+          <a:p>
+            <a:pPr indent="0" marL="0">
+              <a:buNone/>
+            </a:pPr>
+            <a:r>
+              <a:rPr lang="en-US" sz="1550" dirty="0">
+                <a:solidFill>
+                  <a:srgbClr val="17364A"/>
+                </a:solidFill>
+                <a:latin typeface="Aptos" pitchFamily="34" charset="0"/>
+                <a:ea typeface="Aptos" pitchFamily="34" charset="-122"/>
+                <a:cs typeface="Aptos" pitchFamily="34" charset="-120"/>
+              </a:rPr>
+              <a:t>This module provides national-level training guidance for public health agencies and partners.</a:t>
+            </a:r>
+            <a:endParaRPr lang="en-US" sz="1550" dirty="0"/>
+          </a:p>
+        </p:txBody>
+      </p:sp>
+      <p:sp>
+        <p:nvSpPr>
+          <p:cNvPr id="13" name="Shape 11"/>
+          <p:cNvSpPr/>
+          <p:nvPr/>
+        </p:nvSpPr>
+        <p:spPr>
+          <a:xfrm>
+            <a:off x="7635240" y="2788920"/>
+            <a:ext cx="3474720" cy="1536192"/>
+          </a:xfrm>
+          <a:prstGeom prst="roundRect">
+            <a:avLst>
+              <a:gd name="adj" fmla="val 7143"/>
+            </a:avLst>
+          </a:prstGeom>
+          <a:solidFill>
+            <a:srgbClr val="FFFFFF">
+              <a:alpha val="88000"/>
+            </a:srgbClr>
+          </a:solidFill>
+          <a:ln w="12700">
+            <a:solidFill>
+              <a:srgbClr val="D6E8F2"/>
+            </a:solidFill>
+            <a:prstDash val="solid"/>
+          </a:ln>
+        </p:spPr>
+      </p:sp>
+      <p:sp>
+        <p:nvSpPr>
+          <p:cNvPr id="14" name="Shape 12"/>
+          <p:cNvSpPr/>
+          <p:nvPr/>
+        </p:nvSpPr>
+        <p:spPr>
+          <a:xfrm>
+            <a:off x="7891272" y="3108960"/>
+            <a:ext cx="566928" cy="566928"/>
           </a:xfrm>
           <a:prstGeom prst="ellipse">
             <a:avLst/>
@@ -15094,172 +16850,24 @@
       </p:sp>
       <p:sp>
         <p:nvSpPr>
-          <p:cNvPr id="9" name="Text 7"/>
-          <p:cNvSpPr/>
-          <p:nvPr/>
-        </p:nvSpPr>
-        <p:spPr>
-          <a:xfrm>
-            <a:off x="640080" y="731520"/>
-            <a:ext cx="420624" cy="164592"/>
-          </a:xfrm>
-          <a:prstGeom prst="rect">
-            <a:avLst/>
-          </a:prstGeom>
-          <a:noFill/>
-          <a:ln/>
-        </p:spPr>
-        <p:txBody>
-          <a:bodyPr wrap="square" lIns="0" tIns="0" rIns="0" bIns="0" rtlCol="0" anchor="ctr"/>
-          <a:lstStyle/>
-          <a:p>
-            <a:pPr algn="ctr" indent="0" marL="0">
-              <a:buNone/>
-            </a:pPr>
-            <a:r>
-              <a:rPr lang="en-US" sz="1100" b="1" dirty="0">
-                <a:solidFill>
-                  <a:srgbClr val="FFFFFF"/>
-                </a:solidFill>
-                <a:latin typeface="Aptos" pitchFamily="34" charset="0"/>
-                <a:ea typeface="Aptos" pitchFamily="34" charset="-122"/>
-                <a:cs typeface="Aptos" pitchFamily="34" charset="-120"/>
-              </a:rPr>
-              <a:t>3</a:t>
-            </a:r>
-            <a:endParaRPr lang="en-US" sz="1100" dirty="0"/>
-          </a:p>
-        </p:txBody>
-      </p:sp>
-      <p:sp>
-        <p:nvSpPr>
-          <p:cNvPr id="10" name="Text 8"/>
-          <p:cNvSpPr/>
-          <p:nvPr/>
-        </p:nvSpPr>
-        <p:spPr>
-          <a:xfrm>
-            <a:off x="640080" y="621792"/>
-            <a:ext cx="10881360" cy="713232"/>
-          </a:xfrm>
-          <a:prstGeom prst="rect">
-            <a:avLst/>
-          </a:prstGeom>
-          <a:noFill/>
-          <a:ln/>
-        </p:spPr>
-        <p:txBody>
-          <a:bodyPr wrap="square" lIns="0" tIns="0" rIns="0" bIns="0" rtlCol="0" anchor="ctr">
-            <a:normAutofit/>
-          </a:bodyPr>
-          <a:lstStyle/>
-          <a:p>
-            <a:pPr indent="0" marL="0">
-              <a:buNone/>
-            </a:pPr>
-            <a:r>
-              <a:rPr lang="en-US" sz="3400" b="1" dirty="0">
-                <a:solidFill>
-                  <a:srgbClr val="003A63"/>
-                </a:solidFill>
-                <a:latin typeface="Aptos Display" pitchFamily="34" charset="0"/>
-                <a:ea typeface="Aptos Display" pitchFamily="34" charset="-122"/>
-                <a:cs typeface="Aptos Display" pitchFamily="34" charset="-120"/>
-              </a:rPr>
-              <a:t>Jurisdiction and Agency Policy Note</a:t>
-            </a:r>
-            <a:endParaRPr lang="en-US" sz="3400" dirty="0"/>
-          </a:p>
-        </p:txBody>
-      </p:sp>
-      <p:sp>
-        <p:nvSpPr>
-          <p:cNvPr id="11" name="Text 9"/>
-          <p:cNvSpPr/>
-          <p:nvPr/>
-        </p:nvSpPr>
-        <p:spPr>
-          <a:xfrm>
-            <a:off x="868680" y="1508760"/>
-            <a:ext cx="6537960" cy="4160520"/>
-          </a:xfrm>
-          <a:prstGeom prst="rect">
-            <a:avLst/>
-          </a:prstGeom>
-          <a:noFill/>
-          <a:ln/>
-        </p:spPr>
-        <p:txBody>
-          <a:bodyPr wrap="square" lIns="635" tIns="635" rIns="635" bIns="635" rtlCol="0" anchor="t">
-            <a:normAutofit/>
-          </a:bodyPr>
-          <a:lstStyle/>
-          <a:p>
-            <a:r>
-              <a:rPr lang="en-US" sz="2100" dirty="0">
-                <a:solidFill>
-                  <a:srgbClr val="17364A"/>
-                </a:solidFill>
-                <a:latin typeface="Aptos" pitchFamily="34" charset="0"/>
-                <a:ea typeface="Aptos" pitchFamily="34" charset="-122"/>
-                <a:cs typeface="Aptos" pitchFamily="34" charset="-120"/>
-              </a:rPr>
-              <a:t>This module provides national-level training guidance for public health agencies and partners.</a:t>
-            </a:r>
-            <a:endParaRPr lang="en-US" sz="2100" dirty="0"/>
-          </a:p>
-          <a:p>
-            <a:r>
-              <a:rPr lang="en-US" sz="2100" dirty="0">
-                <a:solidFill>
-                  <a:srgbClr val="17364A"/>
-                </a:solidFill>
-                <a:latin typeface="Aptos" pitchFamily="34" charset="0"/>
-                <a:ea typeface="Aptos" pitchFamily="34" charset="-122"/>
-                <a:cs typeface="Aptos" pitchFamily="34" charset="-120"/>
-              </a:rPr>
-              <a:t>It is not legal advice and does not replace review by agency legal counsel, privacy officers,.</a:t>
-            </a:r>
-            <a:endParaRPr lang="en-US" sz="2100" dirty="0"/>
-          </a:p>
-          <a:p>
-            <a:r>
-              <a:rPr lang="en-US" sz="2100" dirty="0">
-                <a:solidFill>
-                  <a:srgbClr val="17364A"/>
-                </a:solidFill>
-                <a:latin typeface="Aptos" pitchFamily="34" charset="0"/>
-                <a:ea typeface="Aptos" pitchFamily="34" charset="-122"/>
-                <a:cs typeface="Aptos" pitchFamily="34" charset="-120"/>
-              </a:rPr>
-              <a:t>Requirements may vary by state, locality, territory, Tribe, agency, funding source, data-sharing.</a:t>
-            </a:r>
-            <a:endParaRPr lang="en-US" sz="2100" dirty="0"/>
-          </a:p>
-        </p:txBody>
-      </p:sp>
-      <p:sp>
-        <p:nvSpPr>
-          <p:cNvPr id="12" name="Shape 10"/>
-          <p:cNvSpPr/>
-          <p:nvPr/>
-        </p:nvSpPr>
-        <p:spPr>
-          <a:xfrm>
-            <a:off x="7909560" y="1417320"/>
-            <a:ext cx="3154680" cy="1828800"/>
-          </a:xfrm>
-          <a:prstGeom prst="roundRect">
-            <a:avLst>
-              <a:gd name="adj" fmla="val 6000"/>
-            </a:avLst>
+          <p:cNvPr id="15" name="Shape 13"/>
+          <p:cNvSpPr/>
+          <p:nvPr/>
+        </p:nvSpPr>
+        <p:spPr>
+          <a:xfrm>
+            <a:off x="10287000" y="3108960"/>
+            <a:ext cx="566928" cy="566928"/>
+          </a:xfrm>
+          <a:prstGeom prst="ellipse">
+            <a:avLst/>
           </a:prstGeom>
           <a:solidFill>
-            <a:srgbClr val="EEF8ED"/>
+            <a:srgbClr val="2F8A28"/>
           </a:solidFill>
           <a:ln w="12700">
             <a:solidFill>
-              <a:srgbClr val="B9D7E6"/>
+              <a:srgbClr val="2F8A28"/>
             </a:solidFill>
             <a:prstDash val="solid"/>
           </a:ln>
@@ -15267,14 +16875,108 @@
       </p:sp>
       <p:sp>
         <p:nvSpPr>
-          <p:cNvPr id="13" name="Text 11"/>
-          <p:cNvSpPr/>
-          <p:nvPr/>
-        </p:nvSpPr>
-        <p:spPr>
-          <a:xfrm>
-            <a:off x="8074152" y="1563624"/>
-            <a:ext cx="2825496" cy="256032"/>
+          <p:cNvPr id="16" name="Shape 14"/>
+          <p:cNvSpPr/>
+          <p:nvPr/>
+        </p:nvSpPr>
+        <p:spPr>
+          <a:xfrm>
+            <a:off x="9089136" y="3456432"/>
+            <a:ext cx="566928" cy="566928"/>
+          </a:xfrm>
+          <a:prstGeom prst="ellipse">
+            <a:avLst/>
+          </a:prstGeom>
+          <a:solidFill>
+            <a:srgbClr val="6A4CA3"/>
+          </a:solidFill>
+          <a:ln w="12700">
+            <a:solidFill>
+              <a:srgbClr val="6A4CA3"/>
+            </a:solidFill>
+            <a:prstDash val="solid"/>
+          </a:ln>
+        </p:spPr>
+      </p:sp>
+      <p:sp>
+        <p:nvSpPr>
+          <p:cNvPr id="17" name="Shape 15"/>
+          <p:cNvSpPr/>
+          <p:nvPr/>
+        </p:nvSpPr>
+        <p:spPr>
+          <a:xfrm>
+            <a:off x="8385048" y="3419856"/>
+            <a:ext cx="1975104" cy="0"/>
+          </a:xfrm>
+          <a:prstGeom prst="line">
+            <a:avLst/>
+          </a:prstGeom>
+          <a:noFill/>
+          <a:ln w="25400">
+            <a:solidFill>
+              <a:srgbClr val="8ABBD8"/>
+            </a:solidFill>
+            <a:prstDash val="solid"/>
+          </a:ln>
+        </p:spPr>
+      </p:sp>
+      <p:sp>
+        <p:nvSpPr>
+          <p:cNvPr id="18" name="Shape 16"/>
+          <p:cNvSpPr/>
+          <p:nvPr/>
+        </p:nvSpPr>
+        <p:spPr>
+          <a:xfrm>
+            <a:off x="8202168" y="3630168"/>
+            <a:ext cx="1170432" cy="118872"/>
+          </a:xfrm>
+          <a:prstGeom prst="line">
+            <a:avLst/>
+          </a:prstGeom>
+          <a:noFill/>
+          <a:ln w="25400">
+            <a:solidFill>
+              <a:srgbClr val="8ABBD8"/>
+            </a:solidFill>
+            <a:prstDash val="solid"/>
+          </a:ln>
+        </p:spPr>
+      </p:sp>
+      <p:sp>
+        <p:nvSpPr>
+          <p:cNvPr id="19" name="Shape 17"/>
+          <p:cNvSpPr/>
+          <p:nvPr/>
+        </p:nvSpPr>
+        <p:spPr>
+          <a:xfrm>
+            <a:off x="10543032" y="3630168"/>
+            <a:ext cx="-1170432" cy="118872"/>
+          </a:xfrm>
+          <a:prstGeom prst="line">
+            <a:avLst/>
+          </a:prstGeom>
+          <a:noFill/>
+          <a:ln w="25400">
+            <a:solidFill>
+              <a:srgbClr val="8ABBD8"/>
+            </a:solidFill>
+            <a:prstDash val="solid"/>
+          </a:ln>
+        </p:spPr>
+      </p:sp>
+      <p:sp>
+        <p:nvSpPr>
+          <p:cNvPr id="20" name="Text 18"/>
+          <p:cNvSpPr/>
+          <p:nvPr/>
+        </p:nvSpPr>
+        <p:spPr>
+          <a:xfrm>
+            <a:off x="7863840" y="4069080"/>
+            <a:ext cx="3017520" cy="164592"/>
           </a:xfrm>
           <a:prstGeom prst="rect">
             <a:avLst/>
@@ -15286,79 +16988,38 @@
           <a:bodyPr wrap="square" lIns="0" tIns="0" rIns="0" bIns="0" rtlCol="0" anchor="ctr"/>
           <a:lstStyle/>
           <a:p>
-            <a:pPr indent="0" marL="0">
-              <a:buNone/>
-            </a:pPr>
-            <a:r>
-              <a:rPr lang="en-US" sz="1300" b="1" dirty="0">
-                <a:solidFill>
-                  <a:srgbClr val="0068B7"/>
-                </a:solidFill>
-                <a:latin typeface="Aptos" pitchFamily="34" charset="0"/>
-                <a:ea typeface="Aptos" pitchFamily="34" charset="-122"/>
-                <a:cs typeface="Aptos" pitchFamily="34" charset="-120"/>
-              </a:rPr>
-              <a:t>Key idea</a:t>
-            </a:r>
-            <a:endParaRPr lang="en-US" sz="1300" dirty="0"/>
-          </a:p>
-        </p:txBody>
-      </p:sp>
-      <p:sp>
-        <p:nvSpPr>
-          <p:cNvPr id="14" name="Text 12"/>
-          <p:cNvSpPr/>
-          <p:nvPr/>
-        </p:nvSpPr>
-        <p:spPr>
-          <a:xfrm>
-            <a:off x="8074152" y="1920240"/>
-            <a:ext cx="2825496" cy="1188720"/>
-          </a:xfrm>
-          <a:prstGeom prst="rect">
-            <a:avLst/>
-          </a:prstGeom>
-          <a:noFill/>
-          <a:ln/>
-        </p:spPr>
-        <p:txBody>
-          <a:bodyPr wrap="square" lIns="0" tIns="0" rIns="0" bIns="0" rtlCol="0" anchor="t">
-            <a:normAutofit/>
-          </a:bodyPr>
-          <a:lstStyle/>
-          <a:p>
-            <a:pPr indent="0" marL="0">
-              <a:buNone/>
-            </a:pPr>
-            <a:r>
-              <a:rPr lang="en-US" sz="1550" dirty="0">
-                <a:solidFill>
-                  <a:srgbClr val="17364A"/>
-                </a:solidFill>
-                <a:latin typeface="Aptos" pitchFamily="34" charset="0"/>
-                <a:ea typeface="Aptos" pitchFamily="34" charset="-122"/>
-                <a:cs typeface="Aptos" pitchFamily="34" charset="-120"/>
-              </a:rPr>
-              <a:t>This module provides national-level training guidance for public health agencies and partners.</a:t>
-            </a:r>
-            <a:endParaRPr lang="en-US" sz="1550" dirty="0"/>
-          </a:p>
-        </p:txBody>
-      </p:sp>
-      <p:sp>
-        <p:nvSpPr>
-          <p:cNvPr id="15" name="Shape 13"/>
-          <p:cNvSpPr/>
-          <p:nvPr/>
-        </p:nvSpPr>
-        <p:spPr>
-          <a:xfrm>
-            <a:off x="7909560" y="3520440"/>
-            <a:ext cx="3154680" cy="1737360"/>
+            <a:pPr algn="ctr" indent="0" marL="0">
+              <a:buNone/>
+            </a:pPr>
+            <a:r>
+              <a:rPr lang="en-US" sz="900" b="1" dirty="0">
+                <a:solidFill>
+                  <a:srgbClr val="003A63"/>
+                </a:solidFill>
+                <a:latin typeface="Aptos" pitchFamily="34" charset="0"/>
+                <a:ea typeface="Aptos" pitchFamily="34" charset="-122"/>
+                <a:cs typeface="Aptos" pitchFamily="34" charset="-120"/>
+              </a:rPr>
+              <a:t>Decision rights</a:t>
+            </a:r>
+            <a:endParaRPr lang="en-US" sz="900" dirty="0"/>
+          </a:p>
+        </p:txBody>
+      </p:sp>
+      <p:sp>
+        <p:nvSpPr>
+          <p:cNvPr id="21" name="Shape 19"/>
+          <p:cNvSpPr/>
+          <p:nvPr/>
+        </p:nvSpPr>
+        <p:spPr>
+          <a:xfrm>
+            <a:off x="7635240" y="4498848"/>
+            <a:ext cx="3474720" cy="1143000"/>
           </a:xfrm>
           <a:prstGeom prst="roundRect">
             <a:avLst>
-              <a:gd name="adj" fmla="val 6316"/>
+              <a:gd name="adj" fmla="val 9600"/>
             </a:avLst>
           </a:prstGeom>
           <a:solidFill>
@@ -15374,14 +17035,14 @@
       </p:sp>
       <p:sp>
         <p:nvSpPr>
-          <p:cNvPr id="16" name="Text 14"/>
-          <p:cNvSpPr/>
-          <p:nvPr/>
-        </p:nvSpPr>
-        <p:spPr>
-          <a:xfrm>
-            <a:off x="8074152" y="3666744"/>
-            <a:ext cx="2825496" cy="256032"/>
+          <p:cNvPr id="22" name="Text 20"/>
+          <p:cNvSpPr/>
+          <p:nvPr/>
+        </p:nvSpPr>
+        <p:spPr>
+          <a:xfrm>
+            <a:off x="7799832" y="4645152"/>
+            <a:ext cx="3145536" cy="256032"/>
           </a:xfrm>
           <a:prstGeom prst="rect">
             <a:avLst/>
@@ -15405,7 +17066,7 @@
                 <a:ea typeface="Aptos" pitchFamily="34" charset="-122"/>
                 <a:cs typeface="Aptos" pitchFamily="34" charset="-120"/>
               </a:rPr>
-              <a:t>Use this for</a:t>
+              <a:t>What to document</a:t>
             </a:r>
             <a:endParaRPr lang="en-US" sz="1300" dirty="0"/>
           </a:p>
@@ -15413,14 +17074,14 @@
       </p:sp>
       <p:sp>
         <p:nvSpPr>
-          <p:cNvPr id="17" name="Text 15"/>
-          <p:cNvSpPr/>
-          <p:nvPr/>
-        </p:nvSpPr>
-        <p:spPr>
-          <a:xfrm>
-            <a:off x="8074152" y="4023360"/>
-            <a:ext cx="2825496" cy="1097280"/>
+          <p:cNvPr id="23" name="Text 21"/>
+          <p:cNvSpPr/>
+          <p:nvPr/>
+        </p:nvSpPr>
+        <p:spPr>
+          <a:xfrm>
+            <a:off x="7799832" y="5001768"/>
+            <a:ext cx="3145536" cy="502920"/>
           </a:xfrm>
           <a:prstGeom prst="rect">
             <a:avLst/>
@@ -15446,7 +17107,7 @@
                 <a:ea typeface="Aptos" pitchFamily="34" charset="-122"/>
                 <a:cs typeface="Aptos" pitchFamily="34" charset="-120"/>
               </a:rPr>
-              <a:t>Connect the concept to public health decisions, safeguards, documentation, or implementation work.</a:t>
+              <a:t>Translate this concept into clear decision rights, review steps, documentation expectations, and escalation paths before an AI-supported workflow is approved.</a:t>
             </a:r>
             <a:endParaRPr lang="en-US" sz="1550" dirty="0"/>
           </a:p>
@@ -15620,8 +17281,8 @@
         </p:nvSpPr>
         <p:spPr>
           <a:xfrm>
-            <a:off x="9966960" y="6537960"/>
-            <a:ext cx="1645920" cy="201168"/>
+            <a:off x="9646920" y="6537960"/>
+            <a:ext cx="1965960" cy="201168"/>
           </a:xfrm>
           <a:prstGeom prst="rect">
             <a:avLst/>
@@ -15645,7 +17306,7 @@
                 <a:ea typeface="Aptos" pitchFamily="34" charset="-122"/>
                 <a:cs typeface="Aptos" pitchFamily="34" charset="-120"/>
               </a:rPr>
-              <a:t>Â© Paula Soper</a:t>
+              <a:t>Copyright Paula Soper</a:t>
             </a:r>
             <a:endParaRPr lang="en-US" sz="800" dirty="0"/>
           </a:p>
@@ -15692,77 +17353,13 @@
       </p:sp>
       <p:sp>
         <p:nvSpPr>
-          <p:cNvPr id="8" name="Shape 6"/>
+          <p:cNvPr id="8" name="Text 6"/>
           <p:cNvSpPr/>
           <p:nvPr/>
         </p:nvSpPr>
         <p:spPr>
           <a:xfrm>
             <a:off x="640080" y="658368"/>
-            <a:ext cx="420624" cy="420624"/>
-          </a:xfrm>
-          <a:prstGeom prst="ellipse">
-            <a:avLst/>
-          </a:prstGeom>
-          <a:solidFill>
-            <a:srgbClr val="0068B7"/>
-          </a:solidFill>
-          <a:ln w="12700">
-            <a:solidFill>
-              <a:srgbClr val="0068B7"/>
-            </a:solidFill>
-            <a:prstDash val="solid"/>
-          </a:ln>
-        </p:spPr>
-      </p:sp>
-      <p:sp>
-        <p:nvSpPr>
-          <p:cNvPr id="9" name="Text 7"/>
-          <p:cNvSpPr/>
-          <p:nvPr/>
-        </p:nvSpPr>
-        <p:spPr>
-          <a:xfrm>
-            <a:off x="640080" y="731520"/>
-            <a:ext cx="420624" cy="164592"/>
-          </a:xfrm>
-          <a:prstGeom prst="rect">
-            <a:avLst/>
-          </a:prstGeom>
-          <a:noFill/>
-          <a:ln/>
-        </p:spPr>
-        <p:txBody>
-          <a:bodyPr wrap="square" lIns="0" tIns="0" rIns="0" bIns="0" rtlCol="0" anchor="ctr"/>
-          <a:lstStyle/>
-          <a:p>
-            <a:pPr algn="ctr" indent="0" marL="0">
-              <a:buNone/>
-            </a:pPr>
-            <a:r>
-              <a:rPr lang="en-US" sz="1100" b="1" dirty="0">
-                <a:solidFill>
-                  <a:srgbClr val="FFFFFF"/>
-                </a:solidFill>
-                <a:latin typeface="Aptos" pitchFamily="34" charset="0"/>
-                <a:ea typeface="Aptos" pitchFamily="34" charset="-122"/>
-                <a:cs typeface="Aptos" pitchFamily="34" charset="-120"/>
-              </a:rPr>
-              <a:t>4</a:t>
-            </a:r>
-            <a:endParaRPr lang="en-US" sz="1100" dirty="0"/>
-          </a:p>
-        </p:txBody>
-      </p:sp>
-      <p:sp>
-        <p:nvSpPr>
-          <p:cNvPr id="10" name="Text 8"/>
-          <p:cNvSpPr/>
-          <p:nvPr/>
-        </p:nvSpPr>
-        <p:spPr>
-          <a:xfrm>
-            <a:off x="640080" y="621792"/>
             <a:ext cx="10881360" cy="713232"/>
           </a:xfrm>
           <a:prstGeom prst="rect">
@@ -15797,14 +17394,14 @@
       </p:sp>
       <p:sp>
         <p:nvSpPr>
-          <p:cNvPr id="11" name="Text 9"/>
+          <p:cNvPr id="9" name="Text 7"/>
           <p:cNvSpPr/>
           <p:nvPr/>
         </p:nvSpPr>
         <p:spPr>
           <a:xfrm>
             <a:off x="868680" y="1508760"/>
-            <a:ext cx="6537960" cy="4160520"/>
+            <a:ext cx="6309360" cy="4160520"/>
           </a:xfrm>
           <a:prstGeom prst="rect">
             <a:avLst/>
@@ -15863,18 +17460,18 @@
       </p:sp>
       <p:sp>
         <p:nvSpPr>
-          <p:cNvPr id="12" name="Shape 10"/>
-          <p:cNvSpPr/>
-          <p:nvPr/>
-        </p:nvSpPr>
-        <p:spPr>
-          <a:xfrm>
-            <a:off x="7909560" y="1417320"/>
-            <a:ext cx="3154680" cy="1828800"/>
+          <p:cNvPr id="10" name="Shape 8"/>
+          <p:cNvSpPr/>
+          <p:nvPr/>
+        </p:nvSpPr>
+        <p:spPr>
+          <a:xfrm>
+            <a:off x="7635240" y="1325880"/>
+            <a:ext cx="3474720" cy="1325880"/>
           </a:xfrm>
           <a:prstGeom prst="roundRect">
             <a:avLst>
-              <a:gd name="adj" fmla="val 6000"/>
+              <a:gd name="adj" fmla="val 8276"/>
             </a:avLst>
           </a:prstGeom>
           <a:solidFill>
@@ -15890,14 +17487,14 @@
       </p:sp>
       <p:sp>
         <p:nvSpPr>
-          <p:cNvPr id="13" name="Text 11"/>
-          <p:cNvSpPr/>
-          <p:nvPr/>
-        </p:nvSpPr>
-        <p:spPr>
-          <a:xfrm>
-            <a:off x="8074152" y="1563624"/>
-            <a:ext cx="2825496" cy="256032"/>
+          <p:cNvPr id="11" name="Text 9"/>
+          <p:cNvSpPr/>
+          <p:nvPr/>
+        </p:nvSpPr>
+        <p:spPr>
+          <a:xfrm>
+            <a:off x="7799832" y="1472184"/>
+            <a:ext cx="3145536" cy="256032"/>
           </a:xfrm>
           <a:prstGeom prst="rect">
             <a:avLst/>
@@ -15921,7 +17518,7 @@
                 <a:ea typeface="Aptos" pitchFamily="34" charset="-122"/>
                 <a:cs typeface="Aptos" pitchFamily="34" charset="-120"/>
               </a:rPr>
-              <a:t>Key idea</a:t>
+              <a:t>Core concept</a:t>
             </a:r>
             <a:endParaRPr lang="en-US" sz="1300" dirty="0"/>
           </a:p>
@@ -15929,14 +17526,14 @@
       </p:sp>
       <p:sp>
         <p:nvSpPr>
-          <p:cNvPr id="14" name="Text 12"/>
-          <p:cNvSpPr/>
-          <p:nvPr/>
-        </p:nvSpPr>
-        <p:spPr>
-          <a:xfrm>
-            <a:off x="8074152" y="1920240"/>
-            <a:ext cx="2825496" cy="1188720"/>
+          <p:cNvPr id="12" name="Text 10"/>
+          <p:cNvSpPr/>
+          <p:nvPr/>
+        </p:nvSpPr>
+        <p:spPr>
+          <a:xfrm>
+            <a:off x="7799832" y="1828800"/>
+            <a:ext cx="3145536" cy="685800"/>
           </a:xfrm>
           <a:prstGeom prst="rect">
             <a:avLst/>
@@ -15970,18 +17567,159 @@
       </p:sp>
       <p:sp>
         <p:nvSpPr>
-          <p:cNvPr id="15" name="Shape 13"/>
-          <p:cNvSpPr/>
-          <p:nvPr/>
-        </p:nvSpPr>
-        <p:spPr>
-          <a:xfrm>
-            <a:off x="7909560" y="3520440"/>
-            <a:ext cx="3154680" cy="1737360"/>
+          <p:cNvPr id="13" name="Shape 11"/>
+          <p:cNvSpPr/>
+          <p:nvPr/>
+        </p:nvSpPr>
+        <p:spPr>
+          <a:xfrm>
+            <a:off x="7635240" y="2788920"/>
+            <a:ext cx="3474720" cy="1536192"/>
           </a:xfrm>
           <a:prstGeom prst="roundRect">
             <a:avLst>
-              <a:gd name="adj" fmla="val 6316"/>
+              <a:gd name="adj" fmla="val 7143"/>
+            </a:avLst>
+          </a:prstGeom>
+          <a:solidFill>
+            <a:srgbClr val="FFFFFF">
+              <a:alpha val="88000"/>
+            </a:srgbClr>
+          </a:solidFill>
+          <a:ln w="12700">
+            <a:solidFill>
+              <a:srgbClr val="D6E8F2"/>
+            </a:solidFill>
+            <a:prstDash val="solid"/>
+          </a:ln>
+        </p:spPr>
+      </p:sp>
+      <p:sp>
+        <p:nvSpPr>
+          <p:cNvPr id="14" name="Shape 12"/>
+          <p:cNvSpPr/>
+          <p:nvPr/>
+        </p:nvSpPr>
+        <p:spPr>
+          <a:xfrm>
+            <a:off x="8074152" y="3291840"/>
+            <a:ext cx="2596896" cy="749808"/>
+          </a:xfrm>
+          <a:prstGeom prst="rect">
+            <a:avLst/>
+          </a:prstGeom>
+          <a:solidFill>
+            <a:srgbClr val="EAF6F8"/>
+          </a:solidFill>
+          <a:ln w="12700">
+            <a:solidFill>
+              <a:srgbClr val="8ABBD8"/>
+            </a:solidFill>
+            <a:prstDash val="solid"/>
+          </a:ln>
+        </p:spPr>
+      </p:sp>
+      <p:sp>
+        <p:nvSpPr>
+          <p:cNvPr id="15" name="Shape 13"/>
+          <p:cNvSpPr/>
+          <p:nvPr/>
+        </p:nvSpPr>
+        <p:spPr>
+          <a:xfrm>
+            <a:off x="8202168" y="3721608"/>
+            <a:ext cx="2340864" cy="0"/>
+          </a:xfrm>
+          <a:prstGeom prst="line">
+            <a:avLst/>
+          </a:prstGeom>
+          <a:noFill/>
+          <a:ln w="19050">
+            <a:solidFill>
+              <a:srgbClr val="0068B7"/>
+            </a:solidFill>
+            <a:prstDash val="solid"/>
+          </a:ln>
+        </p:spPr>
+      </p:sp>
+      <p:sp>
+        <p:nvSpPr>
+          <p:cNvPr id="16" name="Shape 14"/>
+          <p:cNvSpPr/>
+          <p:nvPr/>
+        </p:nvSpPr>
+        <p:spPr>
+          <a:xfrm>
+            <a:off x="9198864" y="4206240"/>
+            <a:ext cx="347472" cy="347472"/>
+          </a:xfrm>
+          <a:prstGeom prst="ellipse">
+            <a:avLst/>
+          </a:prstGeom>
+          <a:solidFill>
+            <a:srgbClr val="2F8A28"/>
+          </a:solidFill>
+          <a:ln w="12700">
+            <a:solidFill>
+              <a:srgbClr val="2F8A28"/>
+            </a:solidFill>
+            <a:prstDash val="solid"/>
+          </a:ln>
+        </p:spPr>
+      </p:sp>
+      <p:sp>
+        <p:nvSpPr>
+          <p:cNvPr id="17" name="Text 15"/>
+          <p:cNvSpPr/>
+          <p:nvPr/>
+        </p:nvSpPr>
+        <p:spPr>
+          <a:xfrm>
+            <a:off x="7909560" y="3977640"/>
+            <a:ext cx="2926080" cy="182880"/>
+          </a:xfrm>
+          <a:prstGeom prst="rect">
+            <a:avLst/>
+          </a:prstGeom>
+          <a:noFill/>
+          <a:ln/>
+        </p:spPr>
+        <p:txBody>
+          <a:bodyPr wrap="square" lIns="0" tIns="0" rIns="0" bIns="0" rtlCol="0" anchor="ctr"/>
+          <a:lstStyle/>
+          <a:p>
+            <a:pPr algn="ctr" indent="0" marL="0">
+              <a:buNone/>
+            </a:pPr>
+            <a:r>
+              <a:rPr lang="en-US" sz="1000" dirty="0">
+                <a:solidFill>
+                  <a:srgbClr val="003A63"/>
+                </a:solidFill>
+                <a:latin typeface="Aptos" pitchFamily="34" charset="0"/>
+                <a:ea typeface="Aptos" pitchFamily="34" charset="-122"/>
+                <a:cs typeface="Aptos" pitchFamily="34" charset="-120"/>
+              </a:rPr>
+              <a:t>Concept to action</a:t>
+            </a:r>
+            <a:endParaRPr lang="en-US" sz="1000" dirty="0"/>
+          </a:p>
+        </p:txBody>
+      </p:sp>
+      <p:sp>
+        <p:nvSpPr>
+          <p:cNvPr id="18" name="Shape 16"/>
+          <p:cNvSpPr/>
+          <p:nvPr/>
+        </p:nvSpPr>
+        <p:spPr>
+          <a:xfrm>
+            <a:off x="7635240" y="4498848"/>
+            <a:ext cx="3474720" cy="1143000"/>
+          </a:xfrm>
+          <a:prstGeom prst="roundRect">
+            <a:avLst>
+              <a:gd name="adj" fmla="val 9600"/>
             </a:avLst>
           </a:prstGeom>
           <a:solidFill>
@@ -15997,14 +17735,14 @@
       </p:sp>
       <p:sp>
         <p:nvSpPr>
-          <p:cNvPr id="16" name="Text 14"/>
-          <p:cNvSpPr/>
-          <p:nvPr/>
-        </p:nvSpPr>
-        <p:spPr>
-          <a:xfrm>
-            <a:off x="8074152" y="3666744"/>
-            <a:ext cx="2825496" cy="256032"/>
+          <p:cNvPr id="19" name="Text 17"/>
+          <p:cNvSpPr/>
+          <p:nvPr/>
+        </p:nvSpPr>
+        <p:spPr>
+          <a:xfrm>
+            <a:off x="7799832" y="4645152"/>
+            <a:ext cx="3145536" cy="256032"/>
           </a:xfrm>
           <a:prstGeom prst="rect">
             <a:avLst/>
@@ -16028,7 +17766,7 @@
                 <a:ea typeface="Aptos" pitchFamily="34" charset="-122"/>
                 <a:cs typeface="Aptos" pitchFamily="34" charset="-120"/>
               </a:rPr>
-              <a:t>Use this for</a:t>
+              <a:t>Apply it</a:t>
             </a:r>
             <a:endParaRPr lang="en-US" sz="1300" dirty="0"/>
           </a:p>
@@ -16036,14 +17774,14 @@
       </p:sp>
       <p:sp>
         <p:nvSpPr>
-          <p:cNvPr id="17" name="Text 15"/>
-          <p:cNvSpPr/>
-          <p:nvPr/>
-        </p:nvSpPr>
-        <p:spPr>
-          <a:xfrm>
-            <a:off x="8074152" y="4023360"/>
-            <a:ext cx="2825496" cy="1097280"/>
+          <p:cNvPr id="20" name="Text 18"/>
+          <p:cNvSpPr/>
+          <p:nvPr/>
+        </p:nvSpPr>
+        <p:spPr>
+          <a:xfrm>
+            <a:off x="7799832" y="5001768"/>
+            <a:ext cx="3145536" cy="502920"/>
           </a:xfrm>
           <a:prstGeom prst="rect">
             <a:avLst/>
@@ -16069,7 +17807,7 @@
                 <a:ea typeface="Aptos" pitchFamily="34" charset="-122"/>
                 <a:cs typeface="Aptos" pitchFamily="34" charset="-120"/>
               </a:rPr>
-              <a:t>Connect the concept to public health decisions, safeguards, documentation, or implementation work.</a:t>
+              <a:t>Connect the concept to public health purpose, responsible use, required safeguards, documentation, and the next action a department should take.</a:t>
             </a:r>
             <a:endParaRPr lang="en-US" sz="1550" dirty="0"/>
           </a:p>
@@ -16243,8 +17981,8 @@
         </p:nvSpPr>
         <p:spPr>
           <a:xfrm>
-            <a:off x="9966960" y="6537960"/>
-            <a:ext cx="1645920" cy="201168"/>
+            <a:off x="9646920" y="6537960"/>
+            <a:ext cx="1965960" cy="201168"/>
           </a:xfrm>
           <a:prstGeom prst="rect">
             <a:avLst/>
@@ -16268,7 +18006,7 @@
                 <a:ea typeface="Aptos" pitchFamily="34" charset="-122"/>
                 <a:cs typeface="Aptos" pitchFamily="34" charset="-120"/>
               </a:rPr>
-              <a:t>Â© Paula Soper</a:t>
+              <a:t>Copyright Paula Soper</a:t>
             </a:r>
             <a:endParaRPr lang="en-US" sz="800" dirty="0"/>
           </a:p>
@@ -16315,77 +18053,13 @@
       </p:sp>
       <p:sp>
         <p:nvSpPr>
-          <p:cNvPr id="8" name="Shape 6"/>
+          <p:cNvPr id="8" name="Text 6"/>
           <p:cNvSpPr/>
           <p:nvPr/>
         </p:nvSpPr>
         <p:spPr>
           <a:xfrm>
             <a:off x="640080" y="658368"/>
-            <a:ext cx="420624" cy="420624"/>
-          </a:xfrm>
-          <a:prstGeom prst="ellipse">
-            <a:avLst/>
-          </a:prstGeom>
-          <a:solidFill>
-            <a:srgbClr val="0068B7"/>
-          </a:solidFill>
-          <a:ln w="12700">
-            <a:solidFill>
-              <a:srgbClr val="0068B7"/>
-            </a:solidFill>
-            <a:prstDash val="solid"/>
-          </a:ln>
-        </p:spPr>
-      </p:sp>
-      <p:sp>
-        <p:nvSpPr>
-          <p:cNvPr id="9" name="Text 7"/>
-          <p:cNvSpPr/>
-          <p:nvPr/>
-        </p:nvSpPr>
-        <p:spPr>
-          <a:xfrm>
-            <a:off x="640080" y="731520"/>
-            <a:ext cx="420624" cy="164592"/>
-          </a:xfrm>
-          <a:prstGeom prst="rect">
-            <a:avLst/>
-          </a:prstGeom>
-          <a:noFill/>
-          <a:ln/>
-        </p:spPr>
-        <p:txBody>
-          <a:bodyPr wrap="square" lIns="0" tIns="0" rIns="0" bIns="0" rtlCol="0" anchor="ctr"/>
-          <a:lstStyle/>
-          <a:p>
-            <a:pPr algn="ctr" indent="0" marL="0">
-              <a:buNone/>
-            </a:pPr>
-            <a:r>
-              <a:rPr lang="en-US" sz="1100" b="1" dirty="0">
-                <a:solidFill>
-                  <a:srgbClr val="FFFFFF"/>
-                </a:solidFill>
-                <a:latin typeface="Aptos" pitchFamily="34" charset="0"/>
-                <a:ea typeface="Aptos" pitchFamily="34" charset="-122"/>
-                <a:cs typeface="Aptos" pitchFamily="34" charset="-120"/>
-              </a:rPr>
-              <a:t>5</a:t>
-            </a:r>
-            <a:endParaRPr lang="en-US" sz="1100" dirty="0"/>
-          </a:p>
-        </p:txBody>
-      </p:sp>
-      <p:sp>
-        <p:nvSpPr>
-          <p:cNvPr id="10" name="Text 8"/>
-          <p:cNvSpPr/>
-          <p:nvPr/>
-        </p:nvSpPr>
-        <p:spPr>
-          <a:xfrm>
-            <a:off x="640080" y="621792"/>
             <a:ext cx="10881360" cy="713232"/>
           </a:xfrm>
           <a:prstGeom prst="rect">
@@ -16420,14 +18094,14 @@
       </p:sp>
       <p:sp>
         <p:nvSpPr>
-          <p:cNvPr id="11" name="Text 9"/>
+          <p:cNvPr id="9" name="Text 7"/>
           <p:cNvSpPr/>
           <p:nvPr/>
         </p:nvSpPr>
         <p:spPr>
           <a:xfrm>
             <a:off x="868680" y="1508760"/>
-            <a:ext cx="6537960" cy="4160520"/>
+            <a:ext cx="6309360" cy="4160520"/>
           </a:xfrm>
           <a:prstGeom prst="rect">
             <a:avLst/>
@@ -16486,18 +18160,18 @@
       </p:sp>
       <p:sp>
         <p:nvSpPr>
-          <p:cNvPr id="12" name="Shape 10"/>
-          <p:cNvSpPr/>
-          <p:nvPr/>
-        </p:nvSpPr>
-        <p:spPr>
-          <a:xfrm>
-            <a:off x="7909560" y="1417320"/>
-            <a:ext cx="3154680" cy="1828800"/>
+          <p:cNvPr id="10" name="Shape 8"/>
+          <p:cNvSpPr/>
+          <p:nvPr/>
+        </p:nvSpPr>
+        <p:spPr>
+          <a:xfrm>
+            <a:off x="7635240" y="1325880"/>
+            <a:ext cx="3474720" cy="1325880"/>
           </a:xfrm>
           <a:prstGeom prst="roundRect">
             <a:avLst>
-              <a:gd name="adj" fmla="val 6000"/>
+              <a:gd name="adj" fmla="val 8276"/>
             </a:avLst>
           </a:prstGeom>
           <a:solidFill>
@@ -16513,14 +18187,14 @@
       </p:sp>
       <p:sp>
         <p:nvSpPr>
-          <p:cNvPr id="13" name="Text 11"/>
-          <p:cNvSpPr/>
-          <p:nvPr/>
-        </p:nvSpPr>
-        <p:spPr>
-          <a:xfrm>
-            <a:off x="8074152" y="1563624"/>
-            <a:ext cx="2825496" cy="256032"/>
+          <p:cNvPr id="11" name="Text 9"/>
+          <p:cNvSpPr/>
+          <p:nvPr/>
+        </p:nvSpPr>
+        <p:spPr>
+          <a:xfrm>
+            <a:off x="7799832" y="1472184"/>
+            <a:ext cx="3145536" cy="256032"/>
           </a:xfrm>
           <a:prstGeom prst="rect">
             <a:avLst/>
@@ -16544,7 +18218,7 @@
                 <a:ea typeface="Aptos" pitchFamily="34" charset="-122"/>
                 <a:cs typeface="Aptos" pitchFamily="34" charset="-120"/>
               </a:rPr>
-              <a:t>Key idea</a:t>
+              <a:t>Core concept</a:t>
             </a:r>
             <a:endParaRPr lang="en-US" sz="1300" dirty="0"/>
           </a:p>
@@ -16552,14 +18226,14 @@
       </p:sp>
       <p:sp>
         <p:nvSpPr>
-          <p:cNvPr id="14" name="Text 12"/>
-          <p:cNvSpPr/>
-          <p:nvPr/>
-        </p:nvSpPr>
-        <p:spPr>
-          <a:xfrm>
-            <a:off x="8074152" y="1920240"/>
-            <a:ext cx="2825496" cy="1188720"/>
+          <p:cNvPr id="12" name="Text 10"/>
+          <p:cNvSpPr/>
+          <p:nvPr/>
+        </p:nvSpPr>
+        <p:spPr>
+          <a:xfrm>
+            <a:off x="7799832" y="1828800"/>
+            <a:ext cx="3145536" cy="685800"/>
           </a:xfrm>
           <a:prstGeom prst="rect">
             <a:avLst/>
@@ -16593,18 +18267,159 @@
       </p:sp>
       <p:sp>
         <p:nvSpPr>
-          <p:cNvPr id="15" name="Shape 13"/>
-          <p:cNvSpPr/>
-          <p:nvPr/>
-        </p:nvSpPr>
-        <p:spPr>
-          <a:xfrm>
-            <a:off x="7909560" y="3520440"/>
-            <a:ext cx="3154680" cy="1737360"/>
+          <p:cNvPr id="13" name="Shape 11"/>
+          <p:cNvSpPr/>
+          <p:nvPr/>
+        </p:nvSpPr>
+        <p:spPr>
+          <a:xfrm>
+            <a:off x="7635240" y="2788920"/>
+            <a:ext cx="3474720" cy="1536192"/>
           </a:xfrm>
           <a:prstGeom prst="roundRect">
             <a:avLst>
-              <a:gd name="adj" fmla="val 6316"/>
+              <a:gd name="adj" fmla="val 7143"/>
+            </a:avLst>
+          </a:prstGeom>
+          <a:solidFill>
+            <a:srgbClr val="FFFFFF">
+              <a:alpha val="88000"/>
+            </a:srgbClr>
+          </a:solidFill>
+          <a:ln w="12700">
+            <a:solidFill>
+              <a:srgbClr val="D6E8F2"/>
+            </a:solidFill>
+            <a:prstDash val="solid"/>
+          </a:ln>
+        </p:spPr>
+      </p:sp>
+      <p:sp>
+        <p:nvSpPr>
+          <p:cNvPr id="14" name="Shape 12"/>
+          <p:cNvSpPr/>
+          <p:nvPr/>
+        </p:nvSpPr>
+        <p:spPr>
+          <a:xfrm>
+            <a:off x="8074152" y="3291840"/>
+            <a:ext cx="2596896" cy="749808"/>
+          </a:xfrm>
+          <a:prstGeom prst="rect">
+            <a:avLst/>
+          </a:prstGeom>
+          <a:solidFill>
+            <a:srgbClr val="EAF6F8"/>
+          </a:solidFill>
+          <a:ln w="12700">
+            <a:solidFill>
+              <a:srgbClr val="8ABBD8"/>
+            </a:solidFill>
+            <a:prstDash val="solid"/>
+          </a:ln>
+        </p:spPr>
+      </p:sp>
+      <p:sp>
+        <p:nvSpPr>
+          <p:cNvPr id="15" name="Shape 13"/>
+          <p:cNvSpPr/>
+          <p:nvPr/>
+        </p:nvSpPr>
+        <p:spPr>
+          <a:xfrm>
+            <a:off x="8202168" y="3721608"/>
+            <a:ext cx="2340864" cy="0"/>
+          </a:xfrm>
+          <a:prstGeom prst="line">
+            <a:avLst/>
+          </a:prstGeom>
+          <a:noFill/>
+          <a:ln w="19050">
+            <a:solidFill>
+              <a:srgbClr val="0068B7"/>
+            </a:solidFill>
+            <a:prstDash val="solid"/>
+          </a:ln>
+        </p:spPr>
+      </p:sp>
+      <p:sp>
+        <p:nvSpPr>
+          <p:cNvPr id="16" name="Shape 14"/>
+          <p:cNvSpPr/>
+          <p:nvPr/>
+        </p:nvSpPr>
+        <p:spPr>
+          <a:xfrm>
+            <a:off x="9198864" y="4206240"/>
+            <a:ext cx="347472" cy="347472"/>
+          </a:xfrm>
+          <a:prstGeom prst="ellipse">
+            <a:avLst/>
+          </a:prstGeom>
+          <a:solidFill>
+            <a:srgbClr val="2F8A28"/>
+          </a:solidFill>
+          <a:ln w="12700">
+            <a:solidFill>
+              <a:srgbClr val="2F8A28"/>
+            </a:solidFill>
+            <a:prstDash val="solid"/>
+          </a:ln>
+        </p:spPr>
+      </p:sp>
+      <p:sp>
+        <p:nvSpPr>
+          <p:cNvPr id="17" name="Text 15"/>
+          <p:cNvSpPr/>
+          <p:nvPr/>
+        </p:nvSpPr>
+        <p:spPr>
+          <a:xfrm>
+            <a:off x="7909560" y="3977640"/>
+            <a:ext cx="2926080" cy="182880"/>
+          </a:xfrm>
+          <a:prstGeom prst="rect">
+            <a:avLst/>
+          </a:prstGeom>
+          <a:noFill/>
+          <a:ln/>
+        </p:spPr>
+        <p:txBody>
+          <a:bodyPr wrap="square" lIns="0" tIns="0" rIns="0" bIns="0" rtlCol="0" anchor="ctr"/>
+          <a:lstStyle/>
+          <a:p>
+            <a:pPr algn="ctr" indent="0" marL="0">
+              <a:buNone/>
+            </a:pPr>
+            <a:r>
+              <a:rPr lang="en-US" sz="1000" dirty="0">
+                <a:solidFill>
+                  <a:srgbClr val="003A63"/>
+                </a:solidFill>
+                <a:latin typeface="Aptos" pitchFamily="34" charset="0"/>
+                <a:ea typeface="Aptos" pitchFamily="34" charset="-122"/>
+                <a:cs typeface="Aptos" pitchFamily="34" charset="-120"/>
+              </a:rPr>
+              <a:t>Concept to action</a:t>
+            </a:r>
+            <a:endParaRPr lang="en-US" sz="1000" dirty="0"/>
+          </a:p>
+        </p:txBody>
+      </p:sp>
+      <p:sp>
+        <p:nvSpPr>
+          <p:cNvPr id="18" name="Shape 16"/>
+          <p:cNvSpPr/>
+          <p:nvPr/>
+        </p:nvSpPr>
+        <p:spPr>
+          <a:xfrm>
+            <a:off x="7635240" y="4498848"/>
+            <a:ext cx="3474720" cy="1143000"/>
+          </a:xfrm>
+          <a:prstGeom prst="roundRect">
+            <a:avLst>
+              <a:gd name="adj" fmla="val 9600"/>
             </a:avLst>
           </a:prstGeom>
           <a:solidFill>
@@ -16620,14 +18435,14 @@
       </p:sp>
       <p:sp>
         <p:nvSpPr>
-          <p:cNvPr id="16" name="Text 14"/>
-          <p:cNvSpPr/>
-          <p:nvPr/>
-        </p:nvSpPr>
-        <p:spPr>
-          <a:xfrm>
-            <a:off x="8074152" y="3666744"/>
-            <a:ext cx="2825496" cy="256032"/>
+          <p:cNvPr id="19" name="Text 17"/>
+          <p:cNvSpPr/>
+          <p:nvPr/>
+        </p:nvSpPr>
+        <p:spPr>
+          <a:xfrm>
+            <a:off x="7799832" y="4645152"/>
+            <a:ext cx="3145536" cy="256032"/>
           </a:xfrm>
           <a:prstGeom prst="rect">
             <a:avLst/>
@@ -16651,7 +18466,7 @@
                 <a:ea typeface="Aptos" pitchFamily="34" charset="-122"/>
                 <a:cs typeface="Aptos" pitchFamily="34" charset="-120"/>
               </a:rPr>
-              <a:t>Use this for</a:t>
+              <a:t>Apply it</a:t>
             </a:r>
             <a:endParaRPr lang="en-US" sz="1300" dirty="0"/>
           </a:p>
@@ -16659,14 +18474,14 @@
       </p:sp>
       <p:sp>
         <p:nvSpPr>
-          <p:cNvPr id="17" name="Text 15"/>
-          <p:cNvSpPr/>
-          <p:nvPr/>
-        </p:nvSpPr>
-        <p:spPr>
-          <a:xfrm>
-            <a:off x="8074152" y="4023360"/>
-            <a:ext cx="2825496" cy="1097280"/>
+          <p:cNvPr id="20" name="Text 18"/>
+          <p:cNvSpPr/>
+          <p:nvPr/>
+        </p:nvSpPr>
+        <p:spPr>
+          <a:xfrm>
+            <a:off x="7799832" y="5001768"/>
+            <a:ext cx="3145536" cy="502920"/>
           </a:xfrm>
           <a:prstGeom prst="rect">
             <a:avLst/>
@@ -16692,7 +18507,7 @@
                 <a:ea typeface="Aptos" pitchFamily="34" charset="-122"/>
                 <a:cs typeface="Aptos" pitchFamily="34" charset="-120"/>
               </a:rPr>
-              <a:t>Connect the concept to public health decisions, safeguards, documentation, or implementation work.</a:t>
+              <a:t>Connect the concept to public health purpose, responsible use, required safeguards, documentation, and the next action a department should take.</a:t>
             </a:r>
             <a:endParaRPr lang="en-US" sz="1550" dirty="0"/>
           </a:p>

--- a/downloads/presentations/modules/int-200.pptx
+++ b/downloads/presentations/modules/int-200.pptx
@@ -3617,13 +3617,11 @@
             </a:avLst>
           </a:prstGeom>
           <a:solidFill>
-            <a:srgbClr val="FFFFFF">
-              <a:alpha val="88000"/>
-            </a:srgbClr>
+            <a:srgbClr val="FFFFFF"/>
           </a:solidFill>
           <a:ln w="12700">
             <a:solidFill>
-              <a:srgbClr val="D6E8F2"/>
+              <a:srgbClr val="B9D7E6"/>
             </a:solidFill>
             <a:prstDash val="solid"/>
           </a:ln>
@@ -3631,119 +3629,112 @@
       </p:sp>
       <p:sp>
         <p:nvSpPr>
-          <p:cNvPr id="14" name="Shape 12"/>
-          <p:cNvSpPr/>
-          <p:nvPr/>
-        </p:nvSpPr>
-        <p:spPr>
-          <a:xfrm>
-            <a:off x="8074152" y="3291840"/>
-            <a:ext cx="2596896" cy="749808"/>
-          </a:xfrm>
-          <a:prstGeom prst="rect">
-            <a:avLst/>
-          </a:prstGeom>
-          <a:solidFill>
-            <a:srgbClr val="EAF6F8"/>
-          </a:solidFill>
-          <a:ln w="12700">
-            <a:solidFill>
-              <a:srgbClr val="8ABBD8"/>
-            </a:solidFill>
-            <a:prstDash val="solid"/>
-          </a:ln>
-        </p:spPr>
-      </p:sp>
-      <p:sp>
-        <p:nvSpPr>
-          <p:cNvPr id="15" name="Shape 13"/>
-          <p:cNvSpPr/>
-          <p:nvPr/>
-        </p:nvSpPr>
-        <p:spPr>
-          <a:xfrm>
-            <a:off x="8202168" y="3721608"/>
-            <a:ext cx="2340864" cy="0"/>
-          </a:xfrm>
-          <a:prstGeom prst="line">
-            <a:avLst/>
-          </a:prstGeom>
-          <a:noFill/>
-          <a:ln w="19050">
-            <a:solidFill>
-              <a:srgbClr val="0068B7"/>
-            </a:solidFill>
-            <a:prstDash val="solid"/>
-          </a:ln>
-        </p:spPr>
+          <p:cNvPr id="14" name="Text 12"/>
+          <p:cNvSpPr/>
+          <p:nvPr/>
+        </p:nvSpPr>
+        <p:spPr>
+          <a:xfrm>
+            <a:off x="7799832" y="2935224"/>
+            <a:ext cx="3145536" cy="256032"/>
+          </a:xfrm>
+          <a:prstGeom prst="rect">
+            <a:avLst/>
+          </a:prstGeom>
+          <a:noFill/>
+          <a:ln/>
+        </p:spPr>
+        <p:txBody>
+          <a:bodyPr wrap="square" lIns="0" tIns="0" rIns="0" bIns="0" rtlCol="0" anchor="ctr"/>
+          <a:lstStyle/>
+          <a:p>
+            <a:pPr indent="0" marL="0">
+              <a:buNone/>
+            </a:pPr>
+            <a:r>
+              <a:rPr lang="en-US" sz="1300" b="1" dirty="0">
+                <a:solidFill>
+                  <a:srgbClr val="0068B7"/>
+                </a:solidFill>
+                <a:latin typeface="Aptos" pitchFamily="34" charset="0"/>
+                <a:ea typeface="Aptos" pitchFamily="34" charset="-122"/>
+                <a:cs typeface="Aptos" pitchFamily="34" charset="-120"/>
+              </a:rPr>
+              <a:t>Concept checkpoints</a:t>
+            </a:r>
+            <a:endParaRPr lang="en-US" sz="1300" dirty="0"/>
+          </a:p>
+        </p:txBody>
+      </p:sp>
+      <p:sp>
+        <p:nvSpPr>
+          <p:cNvPr id="15" name="Text 13"/>
+          <p:cNvSpPr/>
+          <p:nvPr/>
+        </p:nvSpPr>
+        <p:spPr>
+          <a:xfrm>
+            <a:off x="7818120" y="3300984"/>
+            <a:ext cx="3090672" cy="877824"/>
+          </a:xfrm>
+          <a:prstGeom prst="rect">
+            <a:avLst/>
+          </a:prstGeom>
+          <a:noFill/>
+          <a:ln/>
+        </p:spPr>
+        <p:txBody>
+          <a:bodyPr wrap="square" lIns="254" tIns="254" rIns="254" bIns="254" rtlCol="0" anchor="t">
+            <a:normAutofit/>
+          </a:bodyPr>
+          <a:lstStyle/>
+          <a:p>
+            <a:r>
+              <a:rPr lang="en-US" sz="1380" dirty="0">
+                <a:solidFill>
+                  <a:srgbClr val="17364A"/>
+                </a:solidFill>
+                <a:latin typeface="Aptos" pitchFamily="34" charset="0"/>
+                <a:ea typeface="Aptos" pitchFamily="34" charset="-122"/>
+                <a:cs typeface="Aptos" pitchFamily="34" charset="-120"/>
+              </a:rPr>
+              <a:t>Use case intake also supports portfolio management.</a:t>
+            </a:r>
+            <a:endParaRPr lang="en-US" sz="1380" dirty="0"/>
+          </a:p>
+          <a:p>
+            <a:r>
+              <a:rPr lang="en-US" sz="1380" dirty="0">
+                <a:solidFill>
+                  <a:srgbClr val="17364A"/>
+                </a:solidFill>
+                <a:latin typeface="Aptos" pitchFamily="34" charset="0"/>
+                <a:ea typeface="Aptos" pitchFamily="34" charset="-122"/>
+                <a:cs typeface="Aptos" pitchFamily="34" charset="-120"/>
+              </a:rPr>
+              <a:t>When agencies collect use cases in a consistent format, leaders can compare proposals.</a:t>
+            </a:r>
+            <a:endParaRPr lang="en-US" sz="1380" dirty="0"/>
+          </a:p>
+          <a:p>
+            <a:r>
+              <a:rPr lang="en-US" sz="1380" dirty="0">
+                <a:solidFill>
+                  <a:srgbClr val="17364A"/>
+                </a:solidFill>
+                <a:latin typeface="Aptos" pitchFamily="34" charset="0"/>
+                <a:ea typeface="Aptos" pitchFamily="34" charset="-122"/>
+                <a:cs typeface="Aptos" pitchFamily="34" charset="-120"/>
+              </a:rPr>
+              <a:t>The intake record becomes the first governance artifact in the AI lifecycle.</a:t>
+            </a:r>
+            <a:endParaRPr lang="en-US" sz="1380" dirty="0"/>
+          </a:p>
+        </p:txBody>
       </p:sp>
       <p:sp>
         <p:nvSpPr>
           <p:cNvPr id="16" name="Shape 14"/>
-          <p:cNvSpPr/>
-          <p:nvPr/>
-        </p:nvSpPr>
-        <p:spPr>
-          <a:xfrm>
-            <a:off x="9198864" y="4206240"/>
-            <a:ext cx="347472" cy="347472"/>
-          </a:xfrm>
-          <a:prstGeom prst="ellipse">
-            <a:avLst/>
-          </a:prstGeom>
-          <a:solidFill>
-            <a:srgbClr val="2F8A28"/>
-          </a:solidFill>
-          <a:ln w="12700">
-            <a:solidFill>
-              <a:srgbClr val="2F8A28"/>
-            </a:solidFill>
-            <a:prstDash val="solid"/>
-          </a:ln>
-        </p:spPr>
-      </p:sp>
-      <p:sp>
-        <p:nvSpPr>
-          <p:cNvPr id="17" name="Text 15"/>
-          <p:cNvSpPr/>
-          <p:nvPr/>
-        </p:nvSpPr>
-        <p:spPr>
-          <a:xfrm>
-            <a:off x="7909560" y="3977640"/>
-            <a:ext cx="2926080" cy="182880"/>
-          </a:xfrm>
-          <a:prstGeom prst="rect">
-            <a:avLst/>
-          </a:prstGeom>
-          <a:noFill/>
-          <a:ln/>
-        </p:spPr>
-        <p:txBody>
-          <a:bodyPr wrap="square" lIns="0" tIns="0" rIns="0" bIns="0" rtlCol="0" anchor="ctr"/>
-          <a:lstStyle/>
-          <a:p>
-            <a:pPr algn="ctr" indent="0" marL="0">
-              <a:buNone/>
-            </a:pPr>
-            <a:r>
-              <a:rPr lang="en-US" sz="1000" dirty="0">
-                <a:solidFill>
-                  <a:srgbClr val="003A63"/>
-                </a:solidFill>
-                <a:latin typeface="Aptos" pitchFamily="34" charset="0"/>
-                <a:ea typeface="Aptos" pitchFamily="34" charset="-122"/>
-                <a:cs typeface="Aptos" pitchFamily="34" charset="-120"/>
-              </a:rPr>
-              <a:t>Concept to action</a:t>
-            </a:r>
-            <a:endParaRPr lang="en-US" sz="1000" dirty="0"/>
-          </a:p>
-        </p:txBody>
-      </p:sp>
-      <p:sp>
-        <p:nvSpPr>
-          <p:cNvPr id="18" name="Shape 16"/>
           <p:cNvSpPr/>
           <p:nvPr/>
         </p:nvSpPr>
@@ -3770,7 +3761,7 @@
       </p:sp>
       <p:sp>
         <p:nvSpPr>
-          <p:cNvPr id="19" name="Text 17"/>
+          <p:cNvPr id="17" name="Text 15"/>
           <p:cNvSpPr/>
           <p:nvPr/>
         </p:nvSpPr>
@@ -3809,7 +3800,7 @@
       </p:sp>
       <p:sp>
         <p:nvSpPr>
-          <p:cNvPr id="20" name="Text 18"/>
+          <p:cNvPr id="18" name="Text 16"/>
           <p:cNvSpPr/>
           <p:nvPr/>
         </p:nvSpPr>
@@ -4317,13 +4308,11 @@
             </a:avLst>
           </a:prstGeom>
           <a:solidFill>
-            <a:srgbClr val="FFFFFF">
-              <a:alpha val="88000"/>
-            </a:srgbClr>
+            <a:srgbClr val="FFFFFF"/>
           </a:solidFill>
           <a:ln w="12700">
             <a:solidFill>
-              <a:srgbClr val="D6E8F2"/>
+              <a:srgbClr val="B9D7E6"/>
             </a:solidFill>
             <a:prstDash val="solid"/>
           </a:ln>
@@ -4331,26 +4320,42 @@
       </p:sp>
       <p:sp>
         <p:nvSpPr>
-          <p:cNvPr id="14" name="Shape 12"/>
-          <p:cNvSpPr/>
-          <p:nvPr/>
-        </p:nvSpPr>
-        <p:spPr>
-          <a:xfrm>
-            <a:off x="8046720" y="3108960"/>
-            <a:ext cx="2651760" cy="896112"/>
-          </a:xfrm>
-          <a:prstGeom prst="arc">
-            <a:avLst/>
-          </a:prstGeom>
-          <a:noFill/>
-          <a:ln w="25400">
-            <a:solidFill>
-              <a:srgbClr val="0068B7"/>
-            </a:solidFill>
-            <a:prstDash val="solid"/>
-          </a:ln>
-        </p:spPr>
+          <p:cNvPr id="14" name="Text 12"/>
+          <p:cNvSpPr/>
+          <p:nvPr/>
+        </p:nvSpPr>
+        <p:spPr>
+          <a:xfrm>
+            <a:off x="7799832" y="2935224"/>
+            <a:ext cx="3145536" cy="256032"/>
+          </a:xfrm>
+          <a:prstGeom prst="rect">
+            <a:avLst/>
+          </a:prstGeom>
+          <a:noFill/>
+          <a:ln/>
+        </p:spPr>
+        <p:txBody>
+          <a:bodyPr wrap="square" lIns="0" tIns="0" rIns="0" bIns="0" rtlCol="0" anchor="ctr"/>
+          <a:lstStyle/>
+          <a:p>
+            <a:pPr indent="0" marL="0">
+              <a:buNone/>
+            </a:pPr>
+            <a:r>
+              <a:rPr lang="en-US" sz="1300" b="1" dirty="0">
+                <a:solidFill>
+                  <a:srgbClr val="0068B7"/>
+                </a:solidFill>
+                <a:latin typeface="Aptos" pitchFamily="34" charset="0"/>
+                <a:ea typeface="Aptos" pitchFamily="34" charset="-122"/>
+                <a:cs typeface="Aptos" pitchFamily="34" charset="-120"/>
+              </a:rPr>
+              <a:t>Concept checkpoints</a:t>
+            </a:r>
+            <a:endParaRPr lang="en-US" sz="1300" dirty="0"/>
+          </a:p>
+        </p:txBody>
       </p:sp>
       <p:sp>
         <p:nvSpPr>
@@ -4360,102 +4365,67 @@
         </p:nvSpPr>
         <p:spPr>
           <a:xfrm>
-            <a:off x="7909560" y="3099816"/>
-            <a:ext cx="2926080" cy="256032"/>
-          </a:xfrm>
-          <a:prstGeom prst="rect">
-            <a:avLst/>
-          </a:prstGeom>
-          <a:noFill/>
-          <a:ln/>
-        </p:spPr>
-        <p:txBody>
-          <a:bodyPr wrap="square" lIns="0" tIns="0" rIns="0" bIns="0" rtlCol="0" anchor="ctr"/>
-          <a:lstStyle/>
-          <a:p>
-            <a:pPr algn="ctr" indent="0" marL="0">
-              <a:buNone/>
-            </a:pPr>
-            <a:r>
-              <a:rPr lang="en-US" sz="1500" b="1" dirty="0">
-                <a:solidFill>
-                  <a:srgbClr val="003A63"/>
-                </a:solidFill>
-                <a:latin typeface="Aptos" pitchFamily="34" charset="0"/>
-                <a:ea typeface="Aptos" pitchFamily="34" charset="-122"/>
-                <a:cs typeface="Aptos" pitchFamily="34" charset="-120"/>
-              </a:rPr>
-              <a:t>Risk</a:t>
-            </a:r>
-            <a:endParaRPr lang="en-US" sz="1500" dirty="0"/>
+            <a:off x="7818120" y="3300984"/>
+            <a:ext cx="3090672" cy="877824"/>
+          </a:xfrm>
+          <a:prstGeom prst="rect">
+            <a:avLst/>
+          </a:prstGeom>
+          <a:noFill/>
+          <a:ln/>
+        </p:spPr>
+        <p:txBody>
+          <a:bodyPr wrap="square" lIns="254" tIns="254" rIns="254" bIns="254" rtlCol="0" anchor="t">
+            <a:normAutofit/>
+          </a:bodyPr>
+          <a:lstStyle/>
+          <a:p>
+            <a:r>
+              <a:rPr lang="en-US" sz="1380" dirty="0">
+                <a:solidFill>
+                  <a:srgbClr val="17364A"/>
+                </a:solidFill>
+                <a:latin typeface="Aptos" pitchFamily="34" charset="0"/>
+                <a:ea typeface="Aptos" pitchFamily="34" charset="-122"/>
+                <a:cs typeface="Aptos" pitchFamily="34" charset="-120"/>
+              </a:rPr>
+              <a:t>Risks and failure modes include the following:</a:t>
+            </a:r>
+            <a:endParaRPr lang="en-US" sz="1380" dirty="0"/>
+          </a:p>
+          <a:p>
+            <a:r>
+              <a:rPr lang="en-US" sz="1380" dirty="0">
+                <a:solidFill>
+                  <a:srgbClr val="17364A"/>
+                </a:solidFill>
+                <a:latin typeface="Aptos" pitchFamily="34" charset="0"/>
+                <a:ea typeface="Aptos" pitchFamily="34" charset="-122"/>
+                <a:cs typeface="Aptos" pitchFamily="34" charset="-120"/>
+              </a:rPr>
+              <a:t>Informal AI experimentation with sensitive or confidential data before review.</a:t>
+            </a:r>
+            <a:endParaRPr lang="en-US" sz="1380" dirty="0"/>
+          </a:p>
+          <a:p>
+            <a:r>
+              <a:rPr lang="en-US" sz="1380" dirty="0">
+                <a:solidFill>
+                  <a:srgbClr val="17364A"/>
+                </a:solidFill>
+                <a:latin typeface="Aptos" pitchFamily="34" charset="0"/>
+                <a:ea typeface="Aptos" pitchFamily="34" charset="-122"/>
+                <a:cs typeface="Aptos" pitchFamily="34" charset="-120"/>
+              </a:rPr>
+              <a:t>Tool-first proposals that do not solve a real workflow problem.</a:t>
+            </a:r>
+            <a:endParaRPr lang="en-US" sz="1380" dirty="0"/>
           </a:p>
         </p:txBody>
       </p:sp>
       <p:sp>
         <p:nvSpPr>
           <p:cNvPr id="16" name="Shape 14"/>
-          <p:cNvSpPr/>
-          <p:nvPr/>
-        </p:nvSpPr>
-        <p:spPr>
-          <a:xfrm>
-            <a:off x="8366760" y="3639312"/>
-            <a:ext cx="2011680" cy="0"/>
-          </a:xfrm>
-          <a:prstGeom prst="line">
-            <a:avLst/>
-          </a:prstGeom>
-          <a:noFill/>
-          <a:ln w="63500">
-            <a:solidFill>
-              <a:srgbClr val="2F8A28"/>
-            </a:solidFill>
-            <a:prstDash val="solid"/>
-          </a:ln>
-        </p:spPr>
-      </p:sp>
-      <p:sp>
-        <p:nvSpPr>
-          <p:cNvPr id="17" name="Text 15"/>
-          <p:cNvSpPr/>
-          <p:nvPr/>
-        </p:nvSpPr>
-        <p:spPr>
-          <a:xfrm>
-            <a:off x="7909560" y="3849624"/>
-            <a:ext cx="2926080" cy="164592"/>
-          </a:xfrm>
-          <a:prstGeom prst="rect">
-            <a:avLst/>
-          </a:prstGeom>
-          <a:noFill/>
-          <a:ln/>
-        </p:spPr>
-        <p:txBody>
-          <a:bodyPr wrap="square" lIns="0" tIns="0" rIns="0" bIns="0" rtlCol="0" anchor="ctr"/>
-          <a:lstStyle/>
-          <a:p>
-            <a:pPr algn="ctr" indent="0" marL="0">
-              <a:buNone/>
-            </a:pPr>
-            <a:r>
-              <a:rPr lang="en-US" sz="900" dirty="0">
-                <a:solidFill>
-                  <a:srgbClr val="003A63"/>
-                </a:solidFill>
-                <a:latin typeface="Aptos" pitchFamily="34" charset="0"/>
-                <a:ea typeface="Aptos" pitchFamily="34" charset="-122"/>
-                <a:cs typeface="Aptos" pitchFamily="34" charset="-120"/>
-              </a:rPr>
-              <a:t>Human review</a:t>
-            </a:r>
-            <a:endParaRPr lang="en-US" sz="900" dirty="0"/>
-          </a:p>
-        </p:txBody>
-      </p:sp>
-      <p:sp>
-        <p:nvSpPr>
-          <p:cNvPr id="18" name="Shape 16"/>
           <p:cNvSpPr/>
           <p:nvPr/>
         </p:nvSpPr>
@@ -4482,7 +4452,7 @@
       </p:sp>
       <p:sp>
         <p:nvSpPr>
-          <p:cNvPr id="19" name="Text 17"/>
+          <p:cNvPr id="17" name="Text 15"/>
           <p:cNvSpPr/>
           <p:nvPr/>
         </p:nvSpPr>
@@ -4521,7 +4491,7 @@
       </p:sp>
       <p:sp>
         <p:nvSpPr>
-          <p:cNvPr id="20" name="Text 18"/>
+          <p:cNvPr id="18" name="Text 16"/>
           <p:cNvSpPr/>
           <p:nvPr/>
         </p:nvSpPr>
@@ -5029,13 +4999,11 @@
             </a:avLst>
           </a:prstGeom>
           <a:solidFill>
-            <a:srgbClr val="FFFFFF">
-              <a:alpha val="88000"/>
-            </a:srgbClr>
+            <a:srgbClr val="FFFFFF"/>
           </a:solidFill>
           <a:ln w="12700">
             <a:solidFill>
-              <a:srgbClr val="D6E8F2"/>
+              <a:srgbClr val="B9D7E6"/>
             </a:solidFill>
             <a:prstDash val="solid"/>
           </a:ln>
@@ -5043,26 +5011,42 @@
       </p:sp>
       <p:sp>
         <p:nvSpPr>
-          <p:cNvPr id="14" name="Shape 12"/>
-          <p:cNvSpPr/>
-          <p:nvPr/>
-        </p:nvSpPr>
-        <p:spPr>
-          <a:xfrm>
-            <a:off x="8046720" y="3108960"/>
-            <a:ext cx="2651760" cy="896112"/>
-          </a:xfrm>
-          <a:prstGeom prst="arc">
-            <a:avLst/>
-          </a:prstGeom>
-          <a:noFill/>
-          <a:ln w="25400">
-            <a:solidFill>
-              <a:srgbClr val="0068B7"/>
-            </a:solidFill>
-            <a:prstDash val="solid"/>
-          </a:ln>
-        </p:spPr>
+          <p:cNvPr id="14" name="Text 12"/>
+          <p:cNvSpPr/>
+          <p:nvPr/>
+        </p:nvSpPr>
+        <p:spPr>
+          <a:xfrm>
+            <a:off x="7799832" y="2935224"/>
+            <a:ext cx="3145536" cy="256032"/>
+          </a:xfrm>
+          <a:prstGeom prst="rect">
+            <a:avLst/>
+          </a:prstGeom>
+          <a:noFill/>
+          <a:ln/>
+        </p:spPr>
+        <p:txBody>
+          <a:bodyPr wrap="square" lIns="0" tIns="0" rIns="0" bIns="0" rtlCol="0" anchor="ctr"/>
+          <a:lstStyle/>
+          <a:p>
+            <a:pPr indent="0" marL="0">
+              <a:buNone/>
+            </a:pPr>
+            <a:r>
+              <a:rPr lang="en-US" sz="1300" b="1" dirty="0">
+                <a:solidFill>
+                  <a:srgbClr val="0068B7"/>
+                </a:solidFill>
+                <a:latin typeface="Aptos" pitchFamily="34" charset="0"/>
+                <a:ea typeface="Aptos" pitchFamily="34" charset="-122"/>
+                <a:cs typeface="Aptos" pitchFamily="34" charset="-120"/>
+              </a:rPr>
+              <a:t>Concept checkpoints</a:t>
+            </a:r>
+            <a:endParaRPr lang="en-US" sz="1300" dirty="0"/>
+          </a:p>
+        </p:txBody>
       </p:sp>
       <p:sp>
         <p:nvSpPr>
@@ -5072,102 +5056,67 @@
         </p:nvSpPr>
         <p:spPr>
           <a:xfrm>
-            <a:off x="7909560" y="3099816"/>
-            <a:ext cx="2926080" cy="256032"/>
-          </a:xfrm>
-          <a:prstGeom prst="rect">
-            <a:avLst/>
-          </a:prstGeom>
-          <a:noFill/>
-          <a:ln/>
-        </p:spPr>
-        <p:txBody>
-          <a:bodyPr wrap="square" lIns="0" tIns="0" rIns="0" bIns="0" rtlCol="0" anchor="ctr"/>
-          <a:lstStyle/>
-          <a:p>
-            <a:pPr algn="ctr" indent="0" marL="0">
-              <a:buNone/>
-            </a:pPr>
-            <a:r>
-              <a:rPr lang="en-US" sz="1500" b="1" dirty="0">
-                <a:solidFill>
-                  <a:srgbClr val="003A63"/>
-                </a:solidFill>
-                <a:latin typeface="Aptos" pitchFamily="34" charset="0"/>
-                <a:ea typeface="Aptos" pitchFamily="34" charset="-122"/>
-                <a:cs typeface="Aptos" pitchFamily="34" charset="-120"/>
-              </a:rPr>
-              <a:t>Risk</a:t>
-            </a:r>
-            <a:endParaRPr lang="en-US" sz="1500" dirty="0"/>
+            <a:off x="7818120" y="3300984"/>
+            <a:ext cx="3090672" cy="877824"/>
+          </a:xfrm>
+          <a:prstGeom prst="rect">
+            <a:avLst/>
+          </a:prstGeom>
+          <a:noFill/>
+          <a:ln/>
+        </p:spPr>
+        <p:txBody>
+          <a:bodyPr wrap="square" lIns="254" tIns="254" rIns="254" bIns="254" rtlCol="0" anchor="t">
+            <a:normAutofit/>
+          </a:bodyPr>
+          <a:lstStyle/>
+          <a:p>
+            <a:r>
+              <a:rPr lang="en-US" sz="1380" dirty="0">
+                <a:solidFill>
+                  <a:srgbClr val="17364A"/>
+                </a:solidFill>
+                <a:latin typeface="Aptos" pitchFamily="34" charset="0"/>
+                <a:ea typeface="Aptos" pitchFamily="34" charset="-122"/>
+                <a:cs typeface="Aptos" pitchFamily="34" charset="-120"/>
+              </a:rPr>
+              <a:t>Use cases moving forward without ownership, validation, or monitoring plans.</a:t>
+            </a:r>
+            <a:endParaRPr lang="en-US" sz="1380" dirty="0"/>
+          </a:p>
+          <a:p>
+            <a:r>
+              <a:rPr lang="en-US" sz="1380" dirty="0">
+                <a:solidFill>
+                  <a:srgbClr val="17364A"/>
+                </a:solidFill>
+                <a:latin typeface="Aptos" pitchFamily="34" charset="0"/>
+                <a:ea typeface="Aptos" pitchFamily="34" charset="-122"/>
+                <a:cs typeface="Aptos" pitchFamily="34" charset="-120"/>
+              </a:rPr>
+              <a:t>High-risk public-facing or decision-support uses being treated as low-risk productivity.</a:t>
+            </a:r>
+            <a:endParaRPr lang="en-US" sz="1380" dirty="0"/>
+          </a:p>
+          <a:p>
+            <a:r>
+              <a:rPr lang="en-US" sz="1380" dirty="0">
+                <a:solidFill>
+                  <a:srgbClr val="17364A"/>
+                </a:solidFill>
+                <a:latin typeface="Aptos" pitchFamily="34" charset="0"/>
+                <a:ea typeface="Aptos" pitchFamily="34" charset="-122"/>
+                <a:cs typeface="Aptos" pitchFamily="34" charset="-120"/>
+              </a:rPr>
+              <a:t>Equity, accessibility, and community impacts being considered too late.</a:t>
+            </a:r>
+            <a:endParaRPr lang="en-US" sz="1380" dirty="0"/>
           </a:p>
         </p:txBody>
       </p:sp>
       <p:sp>
         <p:nvSpPr>
           <p:cNvPr id="16" name="Shape 14"/>
-          <p:cNvSpPr/>
-          <p:nvPr/>
-        </p:nvSpPr>
-        <p:spPr>
-          <a:xfrm>
-            <a:off x="8366760" y="3639312"/>
-            <a:ext cx="2011680" cy="0"/>
-          </a:xfrm>
-          <a:prstGeom prst="line">
-            <a:avLst/>
-          </a:prstGeom>
-          <a:noFill/>
-          <a:ln w="63500">
-            <a:solidFill>
-              <a:srgbClr val="2F8A28"/>
-            </a:solidFill>
-            <a:prstDash val="solid"/>
-          </a:ln>
-        </p:spPr>
-      </p:sp>
-      <p:sp>
-        <p:nvSpPr>
-          <p:cNvPr id="17" name="Text 15"/>
-          <p:cNvSpPr/>
-          <p:nvPr/>
-        </p:nvSpPr>
-        <p:spPr>
-          <a:xfrm>
-            <a:off x="7909560" y="3849624"/>
-            <a:ext cx="2926080" cy="164592"/>
-          </a:xfrm>
-          <a:prstGeom prst="rect">
-            <a:avLst/>
-          </a:prstGeom>
-          <a:noFill/>
-          <a:ln/>
-        </p:spPr>
-        <p:txBody>
-          <a:bodyPr wrap="square" lIns="0" tIns="0" rIns="0" bIns="0" rtlCol="0" anchor="ctr"/>
-          <a:lstStyle/>
-          <a:p>
-            <a:pPr algn="ctr" indent="0" marL="0">
-              <a:buNone/>
-            </a:pPr>
-            <a:r>
-              <a:rPr lang="en-US" sz="900" dirty="0">
-                <a:solidFill>
-                  <a:srgbClr val="003A63"/>
-                </a:solidFill>
-                <a:latin typeface="Aptos" pitchFamily="34" charset="0"/>
-                <a:ea typeface="Aptos" pitchFamily="34" charset="-122"/>
-                <a:cs typeface="Aptos" pitchFamily="34" charset="-120"/>
-              </a:rPr>
-              <a:t>Human review</a:t>
-            </a:r>
-            <a:endParaRPr lang="en-US" sz="900" dirty="0"/>
-          </a:p>
-        </p:txBody>
-      </p:sp>
-      <p:sp>
-        <p:nvSpPr>
-          <p:cNvPr id="18" name="Shape 16"/>
           <p:cNvSpPr/>
           <p:nvPr/>
         </p:nvSpPr>
@@ -5194,7 +5143,7 @@
       </p:sp>
       <p:sp>
         <p:nvSpPr>
-          <p:cNvPr id="19" name="Text 17"/>
+          <p:cNvPr id="17" name="Text 15"/>
           <p:cNvSpPr/>
           <p:nvPr/>
         </p:nvSpPr>
@@ -5233,7 +5182,7 @@
       </p:sp>
       <p:sp>
         <p:nvSpPr>
-          <p:cNvPr id="20" name="Text 18"/>
+          <p:cNvPr id="18" name="Text 16"/>
           <p:cNvSpPr/>
           <p:nvPr/>
         </p:nvSpPr>
@@ -5741,13 +5690,11 @@
             </a:avLst>
           </a:prstGeom>
           <a:solidFill>
-            <a:srgbClr val="FFFFFF">
-              <a:alpha val="88000"/>
-            </a:srgbClr>
+            <a:srgbClr val="FFFFFF"/>
           </a:solidFill>
           <a:ln w="12700">
             <a:solidFill>
-              <a:srgbClr val="D6E8F2"/>
+              <a:srgbClr val="B9D7E6"/>
             </a:solidFill>
             <a:prstDash val="solid"/>
           </a:ln>
@@ -5755,26 +5702,42 @@
       </p:sp>
       <p:sp>
         <p:nvSpPr>
-          <p:cNvPr id="14" name="Shape 12"/>
-          <p:cNvSpPr/>
-          <p:nvPr/>
-        </p:nvSpPr>
-        <p:spPr>
-          <a:xfrm>
-            <a:off x="8046720" y="3108960"/>
-            <a:ext cx="2651760" cy="896112"/>
-          </a:xfrm>
-          <a:prstGeom prst="arc">
-            <a:avLst/>
-          </a:prstGeom>
-          <a:noFill/>
-          <a:ln w="25400">
-            <a:solidFill>
-              <a:srgbClr val="0068B7"/>
-            </a:solidFill>
-            <a:prstDash val="solid"/>
-          </a:ln>
-        </p:spPr>
+          <p:cNvPr id="14" name="Text 12"/>
+          <p:cNvSpPr/>
+          <p:nvPr/>
+        </p:nvSpPr>
+        <p:spPr>
+          <a:xfrm>
+            <a:off x="7799832" y="2935224"/>
+            <a:ext cx="3145536" cy="256032"/>
+          </a:xfrm>
+          <a:prstGeom prst="rect">
+            <a:avLst/>
+          </a:prstGeom>
+          <a:noFill/>
+          <a:ln/>
+        </p:spPr>
+        <p:txBody>
+          <a:bodyPr wrap="square" lIns="0" tIns="0" rIns="0" bIns="0" rtlCol="0" anchor="ctr"/>
+          <a:lstStyle/>
+          <a:p>
+            <a:pPr indent="0" marL="0">
+              <a:buNone/>
+            </a:pPr>
+            <a:r>
+              <a:rPr lang="en-US" sz="1300" b="1" dirty="0">
+                <a:solidFill>
+                  <a:srgbClr val="0068B7"/>
+                </a:solidFill>
+                <a:latin typeface="Aptos" pitchFamily="34" charset="0"/>
+                <a:ea typeface="Aptos" pitchFamily="34" charset="-122"/>
+                <a:cs typeface="Aptos" pitchFamily="34" charset="-120"/>
+              </a:rPr>
+              <a:t>Concept checkpoints</a:t>
+            </a:r>
+            <a:endParaRPr lang="en-US" sz="1300" dirty="0"/>
+          </a:p>
+        </p:txBody>
       </p:sp>
       <p:sp>
         <p:nvSpPr>
@@ -5784,102 +5747,67 @@
         </p:nvSpPr>
         <p:spPr>
           <a:xfrm>
-            <a:off x="7909560" y="3099816"/>
-            <a:ext cx="2926080" cy="256032"/>
-          </a:xfrm>
-          <a:prstGeom prst="rect">
-            <a:avLst/>
-          </a:prstGeom>
-          <a:noFill/>
-          <a:ln/>
-        </p:spPr>
-        <p:txBody>
-          <a:bodyPr wrap="square" lIns="0" tIns="0" rIns="0" bIns="0" rtlCol="0" anchor="ctr"/>
-          <a:lstStyle/>
-          <a:p>
-            <a:pPr algn="ctr" indent="0" marL="0">
-              <a:buNone/>
-            </a:pPr>
-            <a:r>
-              <a:rPr lang="en-US" sz="1500" b="1" dirty="0">
-                <a:solidFill>
-                  <a:srgbClr val="003A63"/>
-                </a:solidFill>
-                <a:latin typeface="Aptos" pitchFamily="34" charset="0"/>
-                <a:ea typeface="Aptos" pitchFamily="34" charset="-122"/>
-                <a:cs typeface="Aptos" pitchFamily="34" charset="-120"/>
-              </a:rPr>
-              <a:t>Risk</a:t>
-            </a:r>
-            <a:endParaRPr lang="en-US" sz="1500" dirty="0"/>
+            <a:off x="7818120" y="3300984"/>
+            <a:ext cx="3090672" cy="877824"/>
+          </a:xfrm>
+          <a:prstGeom prst="rect">
+            <a:avLst/>
+          </a:prstGeom>
+          <a:noFill/>
+          <a:ln/>
+        </p:spPr>
+        <p:txBody>
+          <a:bodyPr wrap="square" lIns="254" tIns="254" rIns="254" bIns="254" rtlCol="0" anchor="t">
+            <a:normAutofit/>
+          </a:bodyPr>
+          <a:lstStyle/>
+          <a:p>
+            <a:r>
+              <a:rPr lang="en-US" sz="1380" dirty="0">
+                <a:solidFill>
+                  <a:srgbClr val="17364A"/>
+                </a:solidFill>
+                <a:latin typeface="Aptos" pitchFamily="34" charset="0"/>
+                <a:ea typeface="Aptos" pitchFamily="34" charset="-122"/>
+                <a:cs typeface="Aptos" pitchFamily="34" charset="-120"/>
+              </a:rPr>
+              <a:t>Recommended guardrails include the following:</a:t>
+            </a:r>
+            <a:endParaRPr lang="en-US" sz="1380" dirty="0"/>
+          </a:p>
+          <a:p>
+            <a:r>
+              <a:rPr lang="en-US" sz="1380" dirty="0">
+                <a:solidFill>
+                  <a:srgbClr val="17364A"/>
+                </a:solidFill>
+                <a:latin typeface="Aptos" pitchFamily="34" charset="0"/>
+                <a:ea typeface="Aptos" pitchFamily="34" charset="-122"/>
+                <a:cs typeface="Aptos" pitchFamily="34" charset="-120"/>
+              </a:rPr>
+              <a:t>Require a standard intake worksheet before piloting or procuring AI tools.</a:t>
+            </a:r>
+            <a:endParaRPr lang="en-US" sz="1380" dirty="0"/>
+          </a:p>
+          <a:p>
+            <a:r>
+              <a:rPr lang="en-US" sz="1380" dirty="0">
+                <a:solidFill>
+                  <a:srgbClr val="17364A"/>
+                </a:solidFill>
+                <a:latin typeface="Aptos" pitchFamily="34" charset="0"/>
+                <a:ea typeface="Aptos" pitchFamily="34" charset="-122"/>
+                <a:cs typeface="Aptos" pitchFamily="34" charset="-120"/>
+              </a:rPr>
+              <a:t>Classify proposed uses by data sensitivity, automation level, public-facing impact, and.</a:t>
+            </a:r>
+            <a:endParaRPr lang="en-US" sz="1380" dirty="0"/>
           </a:p>
         </p:txBody>
       </p:sp>
       <p:sp>
         <p:nvSpPr>
           <p:cNvPr id="16" name="Shape 14"/>
-          <p:cNvSpPr/>
-          <p:nvPr/>
-        </p:nvSpPr>
-        <p:spPr>
-          <a:xfrm>
-            <a:off x="8366760" y="3639312"/>
-            <a:ext cx="2011680" cy="0"/>
-          </a:xfrm>
-          <a:prstGeom prst="line">
-            <a:avLst/>
-          </a:prstGeom>
-          <a:noFill/>
-          <a:ln w="63500">
-            <a:solidFill>
-              <a:srgbClr val="2F8A28"/>
-            </a:solidFill>
-            <a:prstDash val="solid"/>
-          </a:ln>
-        </p:spPr>
-      </p:sp>
-      <p:sp>
-        <p:nvSpPr>
-          <p:cNvPr id="17" name="Text 15"/>
-          <p:cNvSpPr/>
-          <p:nvPr/>
-        </p:nvSpPr>
-        <p:spPr>
-          <a:xfrm>
-            <a:off x="7909560" y="3849624"/>
-            <a:ext cx="2926080" cy="164592"/>
-          </a:xfrm>
-          <a:prstGeom prst="rect">
-            <a:avLst/>
-          </a:prstGeom>
-          <a:noFill/>
-          <a:ln/>
-        </p:spPr>
-        <p:txBody>
-          <a:bodyPr wrap="square" lIns="0" tIns="0" rIns="0" bIns="0" rtlCol="0" anchor="ctr"/>
-          <a:lstStyle/>
-          <a:p>
-            <a:pPr algn="ctr" indent="0" marL="0">
-              <a:buNone/>
-            </a:pPr>
-            <a:r>
-              <a:rPr lang="en-US" sz="900" dirty="0">
-                <a:solidFill>
-                  <a:srgbClr val="003A63"/>
-                </a:solidFill>
-                <a:latin typeface="Aptos" pitchFamily="34" charset="0"/>
-                <a:ea typeface="Aptos" pitchFamily="34" charset="-122"/>
-                <a:cs typeface="Aptos" pitchFamily="34" charset="-120"/>
-              </a:rPr>
-              <a:t>Human review</a:t>
-            </a:r>
-            <a:endParaRPr lang="en-US" sz="900" dirty="0"/>
-          </a:p>
-        </p:txBody>
-      </p:sp>
-      <p:sp>
-        <p:nvSpPr>
-          <p:cNvPr id="18" name="Shape 16"/>
           <p:cNvSpPr/>
           <p:nvPr/>
         </p:nvSpPr>
@@ -5906,7 +5834,7 @@
       </p:sp>
       <p:sp>
         <p:nvSpPr>
-          <p:cNvPr id="19" name="Text 17"/>
+          <p:cNvPr id="17" name="Text 15"/>
           <p:cNvSpPr/>
           <p:nvPr/>
         </p:nvSpPr>
@@ -5945,7 +5873,7 @@
       </p:sp>
       <p:sp>
         <p:nvSpPr>
-          <p:cNvPr id="20" name="Text 18"/>
+          <p:cNvPr id="18" name="Text 16"/>
           <p:cNvSpPr/>
           <p:nvPr/>
         </p:nvSpPr>
@@ -6453,13 +6381,11 @@
             </a:avLst>
           </a:prstGeom>
           <a:solidFill>
-            <a:srgbClr val="FFFFFF">
-              <a:alpha val="88000"/>
-            </a:srgbClr>
+            <a:srgbClr val="FFFFFF"/>
           </a:solidFill>
           <a:ln w="12700">
             <a:solidFill>
-              <a:srgbClr val="D6E8F2"/>
+              <a:srgbClr val="B9D7E6"/>
             </a:solidFill>
             <a:prstDash val="solid"/>
           </a:ln>
@@ -6467,26 +6393,42 @@
       </p:sp>
       <p:sp>
         <p:nvSpPr>
-          <p:cNvPr id="14" name="Shape 12"/>
-          <p:cNvSpPr/>
-          <p:nvPr/>
-        </p:nvSpPr>
-        <p:spPr>
-          <a:xfrm>
-            <a:off x="8046720" y="3108960"/>
-            <a:ext cx="2651760" cy="896112"/>
-          </a:xfrm>
-          <a:prstGeom prst="arc">
-            <a:avLst/>
-          </a:prstGeom>
-          <a:noFill/>
-          <a:ln w="25400">
-            <a:solidFill>
-              <a:srgbClr val="0068B7"/>
-            </a:solidFill>
-            <a:prstDash val="solid"/>
-          </a:ln>
-        </p:spPr>
+          <p:cNvPr id="14" name="Text 12"/>
+          <p:cNvSpPr/>
+          <p:nvPr/>
+        </p:nvSpPr>
+        <p:spPr>
+          <a:xfrm>
+            <a:off x="7799832" y="2935224"/>
+            <a:ext cx="3145536" cy="256032"/>
+          </a:xfrm>
+          <a:prstGeom prst="rect">
+            <a:avLst/>
+          </a:prstGeom>
+          <a:noFill/>
+          <a:ln/>
+        </p:spPr>
+        <p:txBody>
+          <a:bodyPr wrap="square" lIns="0" tIns="0" rIns="0" bIns="0" rtlCol="0" anchor="ctr"/>
+          <a:lstStyle/>
+          <a:p>
+            <a:pPr indent="0" marL="0">
+              <a:buNone/>
+            </a:pPr>
+            <a:r>
+              <a:rPr lang="en-US" sz="1300" b="1" dirty="0">
+                <a:solidFill>
+                  <a:srgbClr val="0068B7"/>
+                </a:solidFill>
+                <a:latin typeface="Aptos" pitchFamily="34" charset="0"/>
+                <a:ea typeface="Aptos" pitchFamily="34" charset="-122"/>
+                <a:cs typeface="Aptos" pitchFamily="34" charset="-120"/>
+              </a:rPr>
+              <a:t>Concept checkpoints</a:t>
+            </a:r>
+            <a:endParaRPr lang="en-US" sz="1300" dirty="0"/>
+          </a:p>
+        </p:txBody>
       </p:sp>
       <p:sp>
         <p:nvSpPr>
@@ -6496,102 +6438,67 @@
         </p:nvSpPr>
         <p:spPr>
           <a:xfrm>
-            <a:off x="7909560" y="3099816"/>
-            <a:ext cx="2926080" cy="256032"/>
-          </a:xfrm>
-          <a:prstGeom prst="rect">
-            <a:avLst/>
-          </a:prstGeom>
-          <a:noFill/>
-          <a:ln/>
-        </p:spPr>
-        <p:txBody>
-          <a:bodyPr wrap="square" lIns="0" tIns="0" rIns="0" bIns="0" rtlCol="0" anchor="ctr"/>
-          <a:lstStyle/>
-          <a:p>
-            <a:pPr algn="ctr" indent="0" marL="0">
-              <a:buNone/>
-            </a:pPr>
-            <a:r>
-              <a:rPr lang="en-US" sz="1500" b="1" dirty="0">
-                <a:solidFill>
-                  <a:srgbClr val="003A63"/>
-                </a:solidFill>
-                <a:latin typeface="Aptos" pitchFamily="34" charset="0"/>
-                <a:ea typeface="Aptos" pitchFamily="34" charset="-122"/>
-                <a:cs typeface="Aptos" pitchFamily="34" charset="-120"/>
-              </a:rPr>
-              <a:t>Risk</a:t>
-            </a:r>
-            <a:endParaRPr lang="en-US" sz="1500" dirty="0"/>
+            <a:off x="7818120" y="3300984"/>
+            <a:ext cx="3090672" cy="877824"/>
+          </a:xfrm>
+          <a:prstGeom prst="rect">
+            <a:avLst/>
+          </a:prstGeom>
+          <a:noFill/>
+          <a:ln/>
+        </p:spPr>
+        <p:txBody>
+          <a:bodyPr wrap="square" lIns="254" tIns="254" rIns="254" bIns="254" rtlCol="0" anchor="t">
+            <a:normAutofit/>
+          </a:bodyPr>
+          <a:lstStyle/>
+          <a:p>
+            <a:r>
+              <a:rPr lang="en-US" sz="1380" dirty="0">
+                <a:solidFill>
+                  <a:srgbClr val="17364A"/>
+                </a:solidFill>
+                <a:latin typeface="Aptos" pitchFamily="34" charset="0"/>
+                <a:ea typeface="Aptos" pitchFamily="34" charset="-122"/>
+                <a:cs typeface="Aptos" pitchFamily="34" charset="-120"/>
+              </a:rPr>
+              <a:t>Route use cases to required reviewers before implementation begins.</a:t>
+            </a:r>
+            <a:endParaRPr lang="en-US" sz="1380" dirty="0"/>
+          </a:p>
+          <a:p>
+            <a:r>
+              <a:rPr lang="en-US" sz="1380" dirty="0">
+                <a:solidFill>
+                  <a:srgbClr val="17364A"/>
+                </a:solidFill>
+                <a:latin typeface="Aptos" pitchFamily="34" charset="0"/>
+                <a:ea typeface="Aptos" pitchFamily="34" charset="-122"/>
+                <a:cs typeface="Aptos" pitchFamily="34" charset="-120"/>
+              </a:rPr>
+              <a:t>Document use cases that are rejected, deferred, or approved with conditions.</a:t>
+            </a:r>
+            <a:endParaRPr lang="en-US" sz="1380" dirty="0"/>
+          </a:p>
+          <a:p>
+            <a:r>
+              <a:rPr lang="en-US" sz="1380" dirty="0">
+                <a:solidFill>
+                  <a:srgbClr val="17364A"/>
+                </a:solidFill>
+                <a:latin typeface="Aptos" pitchFamily="34" charset="0"/>
+                <a:ea typeface="Aptos" pitchFamily="34" charset="-122"/>
+                <a:cs typeface="Aptos" pitchFamily="34" charset="-120"/>
+              </a:rPr>
+              <a:t>Maintain a portfolio view of approved, active, paused, and retired AI uses.</a:t>
+            </a:r>
+            <a:endParaRPr lang="en-US" sz="1380" dirty="0"/>
           </a:p>
         </p:txBody>
       </p:sp>
       <p:sp>
         <p:nvSpPr>
           <p:cNvPr id="16" name="Shape 14"/>
-          <p:cNvSpPr/>
-          <p:nvPr/>
-        </p:nvSpPr>
-        <p:spPr>
-          <a:xfrm>
-            <a:off x="8366760" y="3639312"/>
-            <a:ext cx="2011680" cy="0"/>
-          </a:xfrm>
-          <a:prstGeom prst="line">
-            <a:avLst/>
-          </a:prstGeom>
-          <a:noFill/>
-          <a:ln w="63500">
-            <a:solidFill>
-              <a:srgbClr val="2F8A28"/>
-            </a:solidFill>
-            <a:prstDash val="solid"/>
-          </a:ln>
-        </p:spPr>
-      </p:sp>
-      <p:sp>
-        <p:nvSpPr>
-          <p:cNvPr id="17" name="Text 15"/>
-          <p:cNvSpPr/>
-          <p:nvPr/>
-        </p:nvSpPr>
-        <p:spPr>
-          <a:xfrm>
-            <a:off x="7909560" y="3849624"/>
-            <a:ext cx="2926080" cy="164592"/>
-          </a:xfrm>
-          <a:prstGeom prst="rect">
-            <a:avLst/>
-          </a:prstGeom>
-          <a:noFill/>
-          <a:ln/>
-        </p:spPr>
-        <p:txBody>
-          <a:bodyPr wrap="square" lIns="0" tIns="0" rIns="0" bIns="0" rtlCol="0" anchor="ctr"/>
-          <a:lstStyle/>
-          <a:p>
-            <a:pPr algn="ctr" indent="0" marL="0">
-              <a:buNone/>
-            </a:pPr>
-            <a:r>
-              <a:rPr lang="en-US" sz="900" dirty="0">
-                <a:solidFill>
-                  <a:srgbClr val="003A63"/>
-                </a:solidFill>
-                <a:latin typeface="Aptos" pitchFamily="34" charset="0"/>
-                <a:ea typeface="Aptos" pitchFamily="34" charset="-122"/>
-                <a:cs typeface="Aptos" pitchFamily="34" charset="-120"/>
-              </a:rPr>
-              <a:t>Human review</a:t>
-            </a:r>
-            <a:endParaRPr lang="en-US" sz="900" dirty="0"/>
-          </a:p>
-        </p:txBody>
-      </p:sp>
-      <p:sp>
-        <p:nvSpPr>
-          <p:cNvPr id="18" name="Shape 16"/>
           <p:cNvSpPr/>
           <p:nvPr/>
         </p:nvSpPr>
@@ -6618,7 +6525,7 @@
       </p:sp>
       <p:sp>
         <p:nvSpPr>
-          <p:cNvPr id="19" name="Text 17"/>
+          <p:cNvPr id="17" name="Text 15"/>
           <p:cNvSpPr/>
           <p:nvPr/>
         </p:nvSpPr>
@@ -6657,7 +6564,7 @@
       </p:sp>
       <p:sp>
         <p:nvSpPr>
-          <p:cNvPr id="20" name="Text 18"/>
+          <p:cNvPr id="18" name="Text 16"/>
           <p:cNvSpPr/>
           <p:nvPr/>
         </p:nvSpPr>
@@ -7165,13 +7072,11 @@
             </a:avLst>
           </a:prstGeom>
           <a:solidFill>
-            <a:srgbClr val="FFFFFF">
-              <a:alpha val="88000"/>
-            </a:srgbClr>
+            <a:srgbClr val="FFFFFF"/>
           </a:solidFill>
           <a:ln w="12700">
             <a:solidFill>
-              <a:srgbClr val="D6E8F2"/>
+              <a:srgbClr val="B9D7E6"/>
             </a:solidFill>
             <a:prstDash val="solid"/>
           </a:ln>
@@ -7179,119 +7084,112 @@
       </p:sp>
       <p:sp>
         <p:nvSpPr>
-          <p:cNvPr id="14" name="Shape 12"/>
-          <p:cNvSpPr/>
-          <p:nvPr/>
-        </p:nvSpPr>
-        <p:spPr>
-          <a:xfrm>
-            <a:off x="8074152" y="3291840"/>
-            <a:ext cx="2596896" cy="749808"/>
-          </a:xfrm>
-          <a:prstGeom prst="rect">
-            <a:avLst/>
-          </a:prstGeom>
-          <a:solidFill>
-            <a:srgbClr val="EAF6F8"/>
-          </a:solidFill>
-          <a:ln w="12700">
-            <a:solidFill>
-              <a:srgbClr val="8ABBD8"/>
-            </a:solidFill>
-            <a:prstDash val="solid"/>
-          </a:ln>
-        </p:spPr>
-      </p:sp>
-      <p:sp>
-        <p:nvSpPr>
-          <p:cNvPr id="15" name="Shape 13"/>
-          <p:cNvSpPr/>
-          <p:nvPr/>
-        </p:nvSpPr>
-        <p:spPr>
-          <a:xfrm>
-            <a:off x="8202168" y="3721608"/>
-            <a:ext cx="2340864" cy="0"/>
-          </a:xfrm>
-          <a:prstGeom prst="line">
-            <a:avLst/>
-          </a:prstGeom>
-          <a:noFill/>
-          <a:ln w="19050">
-            <a:solidFill>
-              <a:srgbClr val="0068B7"/>
-            </a:solidFill>
-            <a:prstDash val="solid"/>
-          </a:ln>
-        </p:spPr>
+          <p:cNvPr id="14" name="Text 12"/>
+          <p:cNvSpPr/>
+          <p:nvPr/>
+        </p:nvSpPr>
+        <p:spPr>
+          <a:xfrm>
+            <a:off x="7799832" y="2935224"/>
+            <a:ext cx="3145536" cy="256032"/>
+          </a:xfrm>
+          <a:prstGeom prst="rect">
+            <a:avLst/>
+          </a:prstGeom>
+          <a:noFill/>
+          <a:ln/>
+        </p:spPr>
+        <p:txBody>
+          <a:bodyPr wrap="square" lIns="0" tIns="0" rIns="0" bIns="0" rtlCol="0" anchor="ctr"/>
+          <a:lstStyle/>
+          <a:p>
+            <a:pPr indent="0" marL="0">
+              <a:buNone/>
+            </a:pPr>
+            <a:r>
+              <a:rPr lang="en-US" sz="1300" b="1" dirty="0">
+                <a:solidFill>
+                  <a:srgbClr val="0068B7"/>
+                </a:solidFill>
+                <a:latin typeface="Aptos" pitchFamily="34" charset="0"/>
+                <a:ea typeface="Aptos" pitchFamily="34" charset="-122"/>
+                <a:cs typeface="Aptos" pitchFamily="34" charset="-120"/>
+              </a:rPr>
+              <a:t>Concept checkpoints</a:t>
+            </a:r>
+            <a:endParaRPr lang="en-US" sz="1300" dirty="0"/>
+          </a:p>
+        </p:txBody>
+      </p:sp>
+      <p:sp>
+        <p:nvSpPr>
+          <p:cNvPr id="15" name="Text 13"/>
+          <p:cNvSpPr/>
+          <p:nvPr/>
+        </p:nvSpPr>
+        <p:spPr>
+          <a:xfrm>
+            <a:off x="7818120" y="3300984"/>
+            <a:ext cx="3090672" cy="877824"/>
+          </a:xfrm>
+          <a:prstGeom prst="rect">
+            <a:avLst/>
+          </a:prstGeom>
+          <a:noFill/>
+          <a:ln/>
+        </p:spPr>
+        <p:txBody>
+          <a:bodyPr wrap="square" lIns="254" tIns="254" rIns="254" bIns="254" rtlCol="0" anchor="t">
+            <a:normAutofit/>
+          </a:bodyPr>
+          <a:lstStyle/>
+          <a:p>
+            <a:r>
+              <a:rPr lang="en-US" sz="1380" dirty="0">
+                <a:solidFill>
+                  <a:srgbClr val="17364A"/>
+                </a:solidFill>
+                <a:latin typeface="Aptos" pitchFamily="34" charset="0"/>
+                <a:ea typeface="Aptos" pitchFamily="34" charset="-122"/>
+                <a:cs typeface="Aptos" pitchFamily="34" charset="-120"/>
+              </a:rPr>
+              <a:t>Where does this topic appear in your agency, program, or workflow?</a:t>
+            </a:r>
+            <a:endParaRPr lang="en-US" sz="1380" dirty="0"/>
+          </a:p>
+          <a:p>
+            <a:r>
+              <a:rPr lang="en-US" sz="1380" dirty="0">
+                <a:solidFill>
+                  <a:srgbClr val="17364A"/>
+                </a:solidFill>
+                <a:latin typeface="Aptos" pitchFamily="34" charset="0"/>
+                <a:ea typeface="Aptos" pitchFamily="34" charset="-122"/>
+                <a:cs typeface="Aptos" pitchFamily="34" charset="-120"/>
+              </a:rPr>
+              <a:t>Which staff roles would need to understand or apply this concept before AI use is approved?</a:t>
+            </a:r>
+            <a:endParaRPr lang="en-US" sz="1380" dirty="0"/>
+          </a:p>
+          <a:p>
+            <a:r>
+              <a:rPr lang="en-US" sz="1380" dirty="0">
+                <a:solidFill>
+                  <a:srgbClr val="17364A"/>
+                </a:solidFill>
+                <a:latin typeface="Aptos" pitchFamily="34" charset="0"/>
+                <a:ea typeface="Aptos" pitchFamily="34" charset="-122"/>
+                <a:cs typeface="Aptos" pitchFamily="34" charset="-120"/>
+              </a:rPr>
+              <a:t>What could go wrong if this topic is not addressed before implementation?</a:t>
+            </a:r>
+            <a:endParaRPr lang="en-US" sz="1380" dirty="0"/>
+          </a:p>
+        </p:txBody>
       </p:sp>
       <p:sp>
         <p:nvSpPr>
           <p:cNvPr id="16" name="Shape 14"/>
-          <p:cNvSpPr/>
-          <p:nvPr/>
-        </p:nvSpPr>
-        <p:spPr>
-          <a:xfrm>
-            <a:off x="9198864" y="4206240"/>
-            <a:ext cx="347472" cy="347472"/>
-          </a:xfrm>
-          <a:prstGeom prst="ellipse">
-            <a:avLst/>
-          </a:prstGeom>
-          <a:solidFill>
-            <a:srgbClr val="2F8A28"/>
-          </a:solidFill>
-          <a:ln w="12700">
-            <a:solidFill>
-              <a:srgbClr val="2F8A28"/>
-            </a:solidFill>
-            <a:prstDash val="solid"/>
-          </a:ln>
-        </p:spPr>
-      </p:sp>
-      <p:sp>
-        <p:nvSpPr>
-          <p:cNvPr id="17" name="Text 15"/>
-          <p:cNvSpPr/>
-          <p:nvPr/>
-        </p:nvSpPr>
-        <p:spPr>
-          <a:xfrm>
-            <a:off x="7909560" y="3977640"/>
-            <a:ext cx="2926080" cy="182880"/>
-          </a:xfrm>
-          <a:prstGeom prst="rect">
-            <a:avLst/>
-          </a:prstGeom>
-          <a:noFill/>
-          <a:ln/>
-        </p:spPr>
-        <p:txBody>
-          <a:bodyPr wrap="square" lIns="0" tIns="0" rIns="0" bIns="0" rtlCol="0" anchor="ctr"/>
-          <a:lstStyle/>
-          <a:p>
-            <a:pPr algn="ctr" indent="0" marL="0">
-              <a:buNone/>
-            </a:pPr>
-            <a:r>
-              <a:rPr lang="en-US" sz="1000" dirty="0">
-                <a:solidFill>
-                  <a:srgbClr val="003A63"/>
-                </a:solidFill>
-                <a:latin typeface="Aptos" pitchFamily="34" charset="0"/>
-                <a:ea typeface="Aptos" pitchFamily="34" charset="-122"/>
-                <a:cs typeface="Aptos" pitchFamily="34" charset="-120"/>
-              </a:rPr>
-              <a:t>Concept to action</a:t>
-            </a:r>
-            <a:endParaRPr lang="en-US" sz="1000" dirty="0"/>
-          </a:p>
-        </p:txBody>
-      </p:sp>
-      <p:sp>
-        <p:nvSpPr>
-          <p:cNvPr id="18" name="Shape 16"/>
           <p:cNvSpPr/>
           <p:nvPr/>
         </p:nvSpPr>
@@ -7318,7 +7216,7 @@
       </p:sp>
       <p:sp>
         <p:nvSpPr>
-          <p:cNvPr id="19" name="Text 17"/>
+          <p:cNvPr id="17" name="Text 15"/>
           <p:cNvSpPr/>
           <p:nvPr/>
         </p:nvSpPr>
@@ -7357,7 +7255,7 @@
       </p:sp>
       <p:sp>
         <p:nvSpPr>
-          <p:cNvPr id="20" name="Text 18"/>
+          <p:cNvPr id="18" name="Text 16"/>
           <p:cNvSpPr/>
           <p:nvPr/>
         </p:nvSpPr>
@@ -7851,13 +7749,11 @@
             </a:avLst>
           </a:prstGeom>
           <a:solidFill>
-            <a:srgbClr val="FFFFFF">
-              <a:alpha val="88000"/>
-            </a:srgbClr>
+            <a:srgbClr val="FFFFFF"/>
           </a:solidFill>
           <a:ln w="12700">
             <a:solidFill>
-              <a:srgbClr val="D6E8F2"/>
+              <a:srgbClr val="B9D7E6"/>
             </a:solidFill>
             <a:prstDash val="solid"/>
           </a:ln>
@@ -7865,119 +7761,98 @@
       </p:sp>
       <p:sp>
         <p:nvSpPr>
-          <p:cNvPr id="14" name="Shape 12"/>
-          <p:cNvSpPr/>
-          <p:nvPr/>
-        </p:nvSpPr>
-        <p:spPr>
-          <a:xfrm>
-            <a:off x="8074152" y="3291840"/>
-            <a:ext cx="2596896" cy="749808"/>
-          </a:xfrm>
-          <a:prstGeom prst="rect">
-            <a:avLst/>
-          </a:prstGeom>
-          <a:solidFill>
-            <a:srgbClr val="EAF6F8"/>
-          </a:solidFill>
-          <a:ln w="12700">
-            <a:solidFill>
-              <a:srgbClr val="8ABBD8"/>
-            </a:solidFill>
-            <a:prstDash val="solid"/>
-          </a:ln>
-        </p:spPr>
-      </p:sp>
-      <p:sp>
-        <p:nvSpPr>
-          <p:cNvPr id="15" name="Shape 13"/>
-          <p:cNvSpPr/>
-          <p:nvPr/>
-        </p:nvSpPr>
-        <p:spPr>
-          <a:xfrm>
-            <a:off x="8202168" y="3721608"/>
-            <a:ext cx="2340864" cy="0"/>
-          </a:xfrm>
-          <a:prstGeom prst="line">
-            <a:avLst/>
-          </a:prstGeom>
-          <a:noFill/>
-          <a:ln w="19050">
-            <a:solidFill>
-              <a:srgbClr val="0068B7"/>
-            </a:solidFill>
-            <a:prstDash val="solid"/>
-          </a:ln>
-        </p:spPr>
+          <p:cNvPr id="14" name="Text 12"/>
+          <p:cNvSpPr/>
+          <p:nvPr/>
+        </p:nvSpPr>
+        <p:spPr>
+          <a:xfrm>
+            <a:off x="7799832" y="2935224"/>
+            <a:ext cx="3145536" cy="256032"/>
+          </a:xfrm>
+          <a:prstGeom prst="rect">
+            <a:avLst/>
+          </a:prstGeom>
+          <a:noFill/>
+          <a:ln/>
+        </p:spPr>
+        <p:txBody>
+          <a:bodyPr wrap="square" lIns="0" tIns="0" rIns="0" bIns="0" rtlCol="0" anchor="ctr"/>
+          <a:lstStyle/>
+          <a:p>
+            <a:pPr indent="0" marL="0">
+              <a:buNone/>
+            </a:pPr>
+            <a:r>
+              <a:rPr lang="en-US" sz="1300" b="1" dirty="0">
+                <a:solidFill>
+                  <a:srgbClr val="0068B7"/>
+                </a:solidFill>
+                <a:latin typeface="Aptos" pitchFamily="34" charset="0"/>
+                <a:ea typeface="Aptos" pitchFamily="34" charset="-122"/>
+                <a:cs typeface="Aptos" pitchFamily="34" charset="-120"/>
+              </a:rPr>
+              <a:t>Concept checkpoints</a:t>
+            </a:r>
+            <a:endParaRPr lang="en-US" sz="1300" dirty="0"/>
+          </a:p>
+        </p:txBody>
+      </p:sp>
+      <p:sp>
+        <p:nvSpPr>
+          <p:cNvPr id="15" name="Text 13"/>
+          <p:cNvSpPr/>
+          <p:nvPr/>
+        </p:nvSpPr>
+        <p:spPr>
+          <a:xfrm>
+            <a:off x="7818120" y="3300984"/>
+            <a:ext cx="3090672" cy="877824"/>
+          </a:xfrm>
+          <a:prstGeom prst="rect">
+            <a:avLst/>
+          </a:prstGeom>
+          <a:noFill/>
+          <a:ln/>
+        </p:spPr>
+        <p:txBody>
+          <a:bodyPr wrap="square" lIns="254" tIns="254" rIns="254" bIns="254" rtlCol="0" anchor="t">
+            <a:normAutofit/>
+          </a:bodyPr>
+          <a:lstStyle/>
+          <a:p>
+            <a:r>
+              <a:rPr lang="en-US" sz="1380" dirty="0">
+                <a:solidFill>
+                  <a:srgbClr val="17364A"/>
+                </a:solidFill>
+                <a:latin typeface="Aptos" pitchFamily="34" charset="0"/>
+                <a:ea typeface="Aptos" pitchFamily="34" charset="-122"/>
+                <a:cs typeface="Aptos" pitchFamily="34" charset="-120"/>
+              </a:rPr>
+              <a:t>What evidence would governance, leadership, or operations staff need before moving forward?</a:t>
+            </a:r>
+            <a:endParaRPr lang="en-US" sz="1380" dirty="0"/>
+          </a:p>
+          <a:p>
+            <a:r>
+              <a:rPr lang="en-US" sz="1380" dirty="0">
+                <a:solidFill>
+                  <a:srgbClr val="17364A"/>
+                </a:solidFill>
+                <a:latin typeface="Aptos" pitchFamily="34" charset="0"/>
+                <a:ea typeface="Aptos" pitchFamily="34" charset="-122"/>
+                <a:cs typeface="Aptos" pitchFamily="34" charset="-120"/>
+              </a:rPr>
+              <a:t>Which policy, data, equity, privacy, security, or workflow questions remain unresolved?</a:t>
+            </a:r>
+            <a:endParaRPr lang="en-US" sz="1380" dirty="0"/>
+          </a:p>
+        </p:txBody>
       </p:sp>
       <p:sp>
         <p:nvSpPr>
           <p:cNvPr id="16" name="Shape 14"/>
-          <p:cNvSpPr/>
-          <p:nvPr/>
-        </p:nvSpPr>
-        <p:spPr>
-          <a:xfrm>
-            <a:off x="9198864" y="4206240"/>
-            <a:ext cx="347472" cy="347472"/>
-          </a:xfrm>
-          <a:prstGeom prst="ellipse">
-            <a:avLst/>
-          </a:prstGeom>
-          <a:solidFill>
-            <a:srgbClr val="2F8A28"/>
-          </a:solidFill>
-          <a:ln w="12700">
-            <a:solidFill>
-              <a:srgbClr val="2F8A28"/>
-            </a:solidFill>
-            <a:prstDash val="solid"/>
-          </a:ln>
-        </p:spPr>
-      </p:sp>
-      <p:sp>
-        <p:nvSpPr>
-          <p:cNvPr id="17" name="Text 15"/>
-          <p:cNvSpPr/>
-          <p:nvPr/>
-        </p:nvSpPr>
-        <p:spPr>
-          <a:xfrm>
-            <a:off x="7909560" y="3977640"/>
-            <a:ext cx="2926080" cy="182880"/>
-          </a:xfrm>
-          <a:prstGeom prst="rect">
-            <a:avLst/>
-          </a:prstGeom>
-          <a:noFill/>
-          <a:ln/>
-        </p:spPr>
-        <p:txBody>
-          <a:bodyPr wrap="square" lIns="0" tIns="0" rIns="0" bIns="0" rtlCol="0" anchor="ctr"/>
-          <a:lstStyle/>
-          <a:p>
-            <a:pPr algn="ctr" indent="0" marL="0">
-              <a:buNone/>
-            </a:pPr>
-            <a:r>
-              <a:rPr lang="en-US" sz="1000" dirty="0">
-                <a:solidFill>
-                  <a:srgbClr val="003A63"/>
-                </a:solidFill>
-                <a:latin typeface="Aptos" pitchFamily="34" charset="0"/>
-                <a:ea typeface="Aptos" pitchFamily="34" charset="-122"/>
-                <a:cs typeface="Aptos" pitchFamily="34" charset="-120"/>
-              </a:rPr>
-              <a:t>Concept to action</a:t>
-            </a:r>
-            <a:endParaRPr lang="en-US" sz="1000" dirty="0"/>
-          </a:p>
-        </p:txBody>
-      </p:sp>
-      <p:sp>
-        <p:nvSpPr>
-          <p:cNvPr id="18" name="Shape 16"/>
           <p:cNvSpPr/>
           <p:nvPr/>
         </p:nvSpPr>
@@ -8004,7 +7879,7 @@
       </p:sp>
       <p:sp>
         <p:nvSpPr>
-          <p:cNvPr id="19" name="Text 17"/>
+          <p:cNvPr id="17" name="Text 15"/>
           <p:cNvSpPr/>
           <p:nvPr/>
         </p:nvSpPr>
@@ -8043,7 +7918,7 @@
       </p:sp>
       <p:sp>
         <p:nvSpPr>
-          <p:cNvPr id="20" name="Text 18"/>
+          <p:cNvPr id="18" name="Text 16"/>
           <p:cNvSpPr/>
           <p:nvPr/>
         </p:nvSpPr>
@@ -8537,13 +8412,11 @@
             </a:avLst>
           </a:prstGeom>
           <a:solidFill>
-            <a:srgbClr val="FFFFFF">
-              <a:alpha val="88000"/>
-            </a:srgbClr>
+            <a:srgbClr val="FFFFFF"/>
           </a:solidFill>
           <a:ln w="12700">
             <a:solidFill>
-              <a:srgbClr val="D6E8F2"/>
+              <a:srgbClr val="B9D7E6"/>
             </a:solidFill>
             <a:prstDash val="solid"/>
           </a:ln>
@@ -8551,119 +8424,98 @@
       </p:sp>
       <p:sp>
         <p:nvSpPr>
-          <p:cNvPr id="14" name="Shape 12"/>
-          <p:cNvSpPr/>
-          <p:nvPr/>
-        </p:nvSpPr>
-        <p:spPr>
-          <a:xfrm>
-            <a:off x="8074152" y="3291840"/>
-            <a:ext cx="2596896" cy="749808"/>
-          </a:xfrm>
-          <a:prstGeom prst="rect">
-            <a:avLst/>
-          </a:prstGeom>
-          <a:solidFill>
-            <a:srgbClr val="EAF6F8"/>
-          </a:solidFill>
-          <a:ln w="12700">
-            <a:solidFill>
-              <a:srgbClr val="8ABBD8"/>
-            </a:solidFill>
-            <a:prstDash val="solid"/>
-          </a:ln>
-        </p:spPr>
-      </p:sp>
-      <p:sp>
-        <p:nvSpPr>
-          <p:cNvPr id="15" name="Shape 13"/>
-          <p:cNvSpPr/>
-          <p:nvPr/>
-        </p:nvSpPr>
-        <p:spPr>
-          <a:xfrm>
-            <a:off x="8202168" y="3721608"/>
-            <a:ext cx="2340864" cy="0"/>
-          </a:xfrm>
-          <a:prstGeom prst="line">
-            <a:avLst/>
-          </a:prstGeom>
-          <a:noFill/>
-          <a:ln w="19050">
-            <a:solidFill>
-              <a:srgbClr val="0068B7"/>
-            </a:solidFill>
-            <a:prstDash val="solid"/>
-          </a:ln>
-        </p:spPr>
+          <p:cNvPr id="14" name="Text 12"/>
+          <p:cNvSpPr/>
+          <p:nvPr/>
+        </p:nvSpPr>
+        <p:spPr>
+          <a:xfrm>
+            <a:off x="7799832" y="2935224"/>
+            <a:ext cx="3145536" cy="256032"/>
+          </a:xfrm>
+          <a:prstGeom prst="rect">
+            <a:avLst/>
+          </a:prstGeom>
+          <a:noFill/>
+          <a:ln/>
+        </p:spPr>
+        <p:txBody>
+          <a:bodyPr wrap="square" lIns="0" tIns="0" rIns="0" bIns="0" rtlCol="0" anchor="ctr"/>
+          <a:lstStyle/>
+          <a:p>
+            <a:pPr indent="0" marL="0">
+              <a:buNone/>
+            </a:pPr>
+            <a:r>
+              <a:rPr lang="en-US" sz="1300" b="1" dirty="0">
+                <a:solidFill>
+                  <a:srgbClr val="0068B7"/>
+                </a:solidFill>
+                <a:latin typeface="Aptos" pitchFamily="34" charset="0"/>
+                <a:ea typeface="Aptos" pitchFamily="34" charset="-122"/>
+                <a:cs typeface="Aptos" pitchFamily="34" charset="-120"/>
+              </a:rPr>
+              <a:t>Concept checkpoints</a:t>
+            </a:r>
+            <a:endParaRPr lang="en-US" sz="1300" dirty="0"/>
+          </a:p>
+        </p:txBody>
+      </p:sp>
+      <p:sp>
+        <p:nvSpPr>
+          <p:cNvPr id="15" name="Text 13"/>
+          <p:cNvSpPr/>
+          <p:nvPr/>
+        </p:nvSpPr>
+        <p:spPr>
+          <a:xfrm>
+            <a:off x="7818120" y="3300984"/>
+            <a:ext cx="3090672" cy="877824"/>
+          </a:xfrm>
+          <a:prstGeom prst="rect">
+            <a:avLst/>
+          </a:prstGeom>
+          <a:noFill/>
+          <a:ln/>
+        </p:spPr>
+        <p:txBody>
+          <a:bodyPr wrap="square" lIns="254" tIns="254" rIns="254" bIns="254" rtlCol="0" anchor="t">
+            <a:normAutofit/>
+          </a:bodyPr>
+          <a:lstStyle/>
+          <a:p>
+            <a:r>
+              <a:rPr lang="en-US" sz="1380" dirty="0">
+                <a:solidFill>
+                  <a:srgbClr val="17364A"/>
+                </a:solidFill>
+                <a:latin typeface="Aptos" pitchFamily="34" charset="0"/>
+                <a:ea typeface="Aptos" pitchFamily="34" charset="-122"/>
+                <a:cs typeface="Aptos" pitchFamily="34" charset="-120"/>
+              </a:rPr>
+              <a:t>Complete a use case intake and triage worksheet for one real or realistic public health.</a:t>
+            </a:r>
+            <a:endParaRPr lang="en-US" sz="1380" dirty="0"/>
+          </a:p>
+          <a:p>
+            <a:r>
+              <a:rPr lang="en-US" sz="1380" dirty="0">
+                <a:solidFill>
+                  <a:srgbClr val="17364A"/>
+                </a:solidFill>
+                <a:latin typeface="Aptos" pitchFamily="34" charset="0"/>
+                <a:ea typeface="Aptos" pitchFamily="34" charset="-122"/>
+                <a:cs typeface="Aptos" pitchFamily="34" charset="-120"/>
+              </a:rPr>
+              <a:t>Include the problem statement, workflow, intended users, data sources, AI-supported task,.</a:t>
+            </a:r>
+            <a:endParaRPr lang="en-US" sz="1380" dirty="0"/>
+          </a:p>
+        </p:txBody>
       </p:sp>
       <p:sp>
         <p:nvSpPr>
           <p:cNvPr id="16" name="Shape 14"/>
-          <p:cNvSpPr/>
-          <p:nvPr/>
-        </p:nvSpPr>
-        <p:spPr>
-          <a:xfrm>
-            <a:off x="9198864" y="4206240"/>
-            <a:ext cx="347472" cy="347472"/>
-          </a:xfrm>
-          <a:prstGeom prst="ellipse">
-            <a:avLst/>
-          </a:prstGeom>
-          <a:solidFill>
-            <a:srgbClr val="2F8A28"/>
-          </a:solidFill>
-          <a:ln w="12700">
-            <a:solidFill>
-              <a:srgbClr val="2F8A28"/>
-            </a:solidFill>
-            <a:prstDash val="solid"/>
-          </a:ln>
-        </p:spPr>
-      </p:sp>
-      <p:sp>
-        <p:nvSpPr>
-          <p:cNvPr id="17" name="Text 15"/>
-          <p:cNvSpPr/>
-          <p:nvPr/>
-        </p:nvSpPr>
-        <p:spPr>
-          <a:xfrm>
-            <a:off x="7909560" y="3977640"/>
-            <a:ext cx="2926080" cy="182880"/>
-          </a:xfrm>
-          <a:prstGeom prst="rect">
-            <a:avLst/>
-          </a:prstGeom>
-          <a:noFill/>
-          <a:ln/>
-        </p:spPr>
-        <p:txBody>
-          <a:bodyPr wrap="square" lIns="0" tIns="0" rIns="0" bIns="0" rtlCol="0" anchor="ctr"/>
-          <a:lstStyle/>
-          <a:p>
-            <a:pPr algn="ctr" indent="0" marL="0">
-              <a:buNone/>
-            </a:pPr>
-            <a:r>
-              <a:rPr lang="en-US" sz="1000" dirty="0">
-                <a:solidFill>
-                  <a:srgbClr val="003A63"/>
-                </a:solidFill>
-                <a:latin typeface="Aptos" pitchFamily="34" charset="0"/>
-                <a:ea typeface="Aptos" pitchFamily="34" charset="-122"/>
-                <a:cs typeface="Aptos" pitchFamily="34" charset="-120"/>
-              </a:rPr>
-              <a:t>Concept to action</a:t>
-            </a:r>
-            <a:endParaRPr lang="en-US" sz="1000" dirty="0"/>
-          </a:p>
-        </p:txBody>
-      </p:sp>
-      <p:sp>
-        <p:nvSpPr>
-          <p:cNvPr id="18" name="Shape 16"/>
           <p:cNvSpPr/>
           <p:nvPr/>
         </p:nvSpPr>
@@ -8690,7 +8542,7 @@
       </p:sp>
       <p:sp>
         <p:nvSpPr>
-          <p:cNvPr id="19" name="Text 17"/>
+          <p:cNvPr id="17" name="Text 15"/>
           <p:cNvSpPr/>
           <p:nvPr/>
         </p:nvSpPr>
@@ -8729,7 +8581,7 @@
       </p:sp>
       <p:sp>
         <p:nvSpPr>
-          <p:cNvPr id="20" name="Text 18"/>
+          <p:cNvPr id="18" name="Text 16"/>
           <p:cNvSpPr/>
           <p:nvPr/>
         </p:nvSpPr>
@@ -9237,13 +9089,11 @@
             </a:avLst>
           </a:prstGeom>
           <a:solidFill>
-            <a:srgbClr val="FFFFFF">
-              <a:alpha val="88000"/>
-            </a:srgbClr>
+            <a:srgbClr val="FFFFFF"/>
           </a:solidFill>
           <a:ln w="12700">
             <a:solidFill>
-              <a:srgbClr val="D6E8F2"/>
+              <a:srgbClr val="B9D7E6"/>
             </a:solidFill>
             <a:prstDash val="solid"/>
           </a:ln>
@@ -9251,119 +9101,112 @@
       </p:sp>
       <p:sp>
         <p:nvSpPr>
-          <p:cNvPr id="14" name="Shape 12"/>
-          <p:cNvSpPr/>
-          <p:nvPr/>
-        </p:nvSpPr>
-        <p:spPr>
-          <a:xfrm>
-            <a:off x="8074152" y="3291840"/>
-            <a:ext cx="2596896" cy="749808"/>
-          </a:xfrm>
-          <a:prstGeom prst="rect">
-            <a:avLst/>
-          </a:prstGeom>
-          <a:solidFill>
-            <a:srgbClr val="EAF6F8"/>
-          </a:solidFill>
-          <a:ln w="12700">
-            <a:solidFill>
-              <a:srgbClr val="8ABBD8"/>
-            </a:solidFill>
-            <a:prstDash val="solid"/>
-          </a:ln>
-        </p:spPr>
-      </p:sp>
-      <p:sp>
-        <p:nvSpPr>
-          <p:cNvPr id="15" name="Shape 13"/>
-          <p:cNvSpPr/>
-          <p:nvPr/>
-        </p:nvSpPr>
-        <p:spPr>
-          <a:xfrm>
-            <a:off x="8202168" y="3721608"/>
-            <a:ext cx="2340864" cy="0"/>
-          </a:xfrm>
-          <a:prstGeom prst="line">
-            <a:avLst/>
-          </a:prstGeom>
-          <a:noFill/>
-          <a:ln w="19050">
-            <a:solidFill>
-              <a:srgbClr val="0068B7"/>
-            </a:solidFill>
-            <a:prstDash val="solid"/>
-          </a:ln>
-        </p:spPr>
+          <p:cNvPr id="14" name="Text 12"/>
+          <p:cNvSpPr/>
+          <p:nvPr/>
+        </p:nvSpPr>
+        <p:spPr>
+          <a:xfrm>
+            <a:off x="7799832" y="2935224"/>
+            <a:ext cx="3145536" cy="256032"/>
+          </a:xfrm>
+          <a:prstGeom prst="rect">
+            <a:avLst/>
+          </a:prstGeom>
+          <a:noFill/>
+          <a:ln/>
+        </p:spPr>
+        <p:txBody>
+          <a:bodyPr wrap="square" lIns="0" tIns="0" rIns="0" bIns="0" rtlCol="0" anchor="ctr"/>
+          <a:lstStyle/>
+          <a:p>
+            <a:pPr indent="0" marL="0">
+              <a:buNone/>
+            </a:pPr>
+            <a:r>
+              <a:rPr lang="en-US" sz="1300" b="1" dirty="0">
+                <a:solidFill>
+                  <a:srgbClr val="0068B7"/>
+                </a:solidFill>
+                <a:latin typeface="Aptos" pitchFamily="34" charset="0"/>
+                <a:ea typeface="Aptos" pitchFamily="34" charset="-122"/>
+                <a:cs typeface="Aptos" pitchFamily="34" charset="-120"/>
+              </a:rPr>
+              <a:t>Concept checkpoints</a:t>
+            </a:r>
+            <a:endParaRPr lang="en-US" sz="1300" dirty="0"/>
+          </a:p>
+        </p:txBody>
+      </p:sp>
+      <p:sp>
+        <p:nvSpPr>
+          <p:cNvPr id="15" name="Text 13"/>
+          <p:cNvSpPr/>
+          <p:nvPr/>
+        </p:nvSpPr>
+        <p:spPr>
+          <a:xfrm>
+            <a:off x="7818120" y="3300984"/>
+            <a:ext cx="3090672" cy="877824"/>
+          </a:xfrm>
+          <a:prstGeom prst="rect">
+            <a:avLst/>
+          </a:prstGeom>
+          <a:noFill/>
+          <a:ln/>
+        </p:spPr>
+        <p:txBody>
+          <a:bodyPr wrap="square" lIns="254" tIns="254" rIns="254" bIns="254" rtlCol="0" anchor="t">
+            <a:normAutofit/>
+          </a:bodyPr>
+          <a:lstStyle/>
+          <a:p>
+            <a:r>
+              <a:rPr lang="en-US" sz="1380" dirty="0">
+                <a:solidFill>
+                  <a:srgbClr val="17364A"/>
+                </a:solidFill>
+                <a:latin typeface="Aptos" pitchFamily="34" charset="0"/>
+                <a:ea typeface="Aptos" pitchFamily="34" charset="-122"/>
+                <a:cs typeface="Aptos" pitchFamily="34" charset="-120"/>
+              </a:rPr>
+              <a:t>Completed AI use case intake worksheet</a:t>
+            </a:r>
+            <a:endParaRPr lang="en-US" sz="1380" dirty="0"/>
+          </a:p>
+          <a:p>
+            <a:r>
+              <a:rPr lang="en-US" sz="1380" dirty="0">
+                <a:solidFill>
+                  <a:srgbClr val="17364A"/>
+                </a:solidFill>
+                <a:latin typeface="Aptos" pitchFamily="34" charset="0"/>
+                <a:ea typeface="Aptos" pitchFamily="34" charset="-122"/>
+                <a:cs typeface="Aptos" pitchFamily="34" charset="-120"/>
+              </a:rPr>
+              <a:t>Risk and readiness triage decision</a:t>
+            </a:r>
+            <a:endParaRPr lang="en-US" sz="1380" dirty="0"/>
+          </a:p>
+          <a:p>
+            <a:r>
+              <a:rPr lang="en-US" sz="1380" dirty="0">
+                <a:solidFill>
+                  <a:srgbClr val="17364A"/>
+                </a:solidFill>
+                <a:latin typeface="Aptos" pitchFamily="34" charset="0"/>
+                <a:ea typeface="Aptos" pitchFamily="34" charset="-122"/>
+                <a:cs typeface="Aptos" pitchFamily="34" charset="-120"/>
+              </a:rPr>
+              <a:t>List of required reviewers and next steps</a:t>
+            </a:r>
+            <a:endParaRPr lang="en-US" sz="1380" dirty="0"/>
+          </a:p>
+        </p:txBody>
       </p:sp>
       <p:sp>
         <p:nvSpPr>
           <p:cNvPr id="16" name="Shape 14"/>
-          <p:cNvSpPr/>
-          <p:nvPr/>
-        </p:nvSpPr>
-        <p:spPr>
-          <a:xfrm>
-            <a:off x="9198864" y="4206240"/>
-            <a:ext cx="347472" cy="347472"/>
-          </a:xfrm>
-          <a:prstGeom prst="ellipse">
-            <a:avLst/>
-          </a:prstGeom>
-          <a:solidFill>
-            <a:srgbClr val="2F8A28"/>
-          </a:solidFill>
-          <a:ln w="12700">
-            <a:solidFill>
-              <a:srgbClr val="2F8A28"/>
-            </a:solidFill>
-            <a:prstDash val="solid"/>
-          </a:ln>
-        </p:spPr>
-      </p:sp>
-      <p:sp>
-        <p:nvSpPr>
-          <p:cNvPr id="17" name="Text 15"/>
-          <p:cNvSpPr/>
-          <p:nvPr/>
-        </p:nvSpPr>
-        <p:spPr>
-          <a:xfrm>
-            <a:off x="7909560" y="3977640"/>
-            <a:ext cx="2926080" cy="182880"/>
-          </a:xfrm>
-          <a:prstGeom prst="rect">
-            <a:avLst/>
-          </a:prstGeom>
-          <a:noFill/>
-          <a:ln/>
-        </p:spPr>
-        <p:txBody>
-          <a:bodyPr wrap="square" lIns="0" tIns="0" rIns="0" bIns="0" rtlCol="0" anchor="ctr"/>
-          <a:lstStyle/>
-          <a:p>
-            <a:pPr algn="ctr" indent="0" marL="0">
-              <a:buNone/>
-            </a:pPr>
-            <a:r>
-              <a:rPr lang="en-US" sz="1000" dirty="0">
-                <a:solidFill>
-                  <a:srgbClr val="003A63"/>
-                </a:solidFill>
-                <a:latin typeface="Aptos" pitchFamily="34" charset="0"/>
-                <a:ea typeface="Aptos" pitchFamily="34" charset="-122"/>
-                <a:cs typeface="Aptos" pitchFamily="34" charset="-120"/>
-              </a:rPr>
-              <a:t>Concept to action</a:t>
-            </a:r>
-            <a:endParaRPr lang="en-US" sz="1000" dirty="0"/>
-          </a:p>
-        </p:txBody>
-      </p:sp>
-      <p:sp>
-        <p:nvSpPr>
-          <p:cNvPr id="18" name="Shape 16"/>
           <p:cNvSpPr/>
           <p:nvPr/>
         </p:nvSpPr>
@@ -9390,7 +9233,7 @@
       </p:sp>
       <p:sp>
         <p:nvSpPr>
-          <p:cNvPr id="19" name="Text 17"/>
+          <p:cNvPr id="17" name="Text 15"/>
           <p:cNvSpPr/>
           <p:nvPr/>
         </p:nvSpPr>
@@ -9429,7 +9272,7 @@
       </p:sp>
       <p:sp>
         <p:nvSpPr>
-          <p:cNvPr id="20" name="Text 18"/>
+          <p:cNvPr id="18" name="Text 16"/>
           <p:cNvSpPr/>
           <p:nvPr/>
         </p:nvSpPr>
@@ -9909,13 +9752,11 @@
             </a:avLst>
           </a:prstGeom>
           <a:solidFill>
-            <a:srgbClr val="FFFFFF">
-              <a:alpha val="88000"/>
-            </a:srgbClr>
+            <a:srgbClr val="FFFFFF"/>
           </a:solidFill>
           <a:ln w="12700">
             <a:solidFill>
-              <a:srgbClr val="D6E8F2"/>
+              <a:srgbClr val="B9D7E6"/>
             </a:solidFill>
             <a:prstDash val="solid"/>
           </a:ln>
@@ -9923,119 +9764,84 @@
       </p:sp>
       <p:sp>
         <p:nvSpPr>
-          <p:cNvPr id="14" name="Shape 12"/>
-          <p:cNvSpPr/>
-          <p:nvPr/>
-        </p:nvSpPr>
-        <p:spPr>
-          <a:xfrm>
-            <a:off x="8074152" y="3291840"/>
-            <a:ext cx="2596896" cy="749808"/>
-          </a:xfrm>
-          <a:prstGeom prst="rect">
-            <a:avLst/>
-          </a:prstGeom>
-          <a:solidFill>
-            <a:srgbClr val="EAF6F8"/>
-          </a:solidFill>
-          <a:ln w="12700">
-            <a:solidFill>
-              <a:srgbClr val="8ABBD8"/>
-            </a:solidFill>
-            <a:prstDash val="solid"/>
-          </a:ln>
-        </p:spPr>
-      </p:sp>
-      <p:sp>
-        <p:nvSpPr>
-          <p:cNvPr id="15" name="Shape 13"/>
-          <p:cNvSpPr/>
-          <p:nvPr/>
-        </p:nvSpPr>
-        <p:spPr>
-          <a:xfrm>
-            <a:off x="8202168" y="3721608"/>
-            <a:ext cx="2340864" cy="0"/>
-          </a:xfrm>
-          <a:prstGeom prst="line">
-            <a:avLst/>
-          </a:prstGeom>
-          <a:noFill/>
-          <a:ln w="19050">
-            <a:solidFill>
-              <a:srgbClr val="0068B7"/>
-            </a:solidFill>
-            <a:prstDash val="solid"/>
-          </a:ln>
-        </p:spPr>
+          <p:cNvPr id="14" name="Text 12"/>
+          <p:cNvSpPr/>
+          <p:nvPr/>
+        </p:nvSpPr>
+        <p:spPr>
+          <a:xfrm>
+            <a:off x="7799832" y="2935224"/>
+            <a:ext cx="3145536" cy="256032"/>
+          </a:xfrm>
+          <a:prstGeom prst="rect">
+            <a:avLst/>
+          </a:prstGeom>
+          <a:noFill/>
+          <a:ln/>
+        </p:spPr>
+        <p:txBody>
+          <a:bodyPr wrap="square" lIns="0" tIns="0" rIns="0" bIns="0" rtlCol="0" anchor="ctr"/>
+          <a:lstStyle/>
+          <a:p>
+            <a:pPr indent="0" marL="0">
+              <a:buNone/>
+            </a:pPr>
+            <a:r>
+              <a:rPr lang="en-US" sz="1300" b="1" dirty="0">
+                <a:solidFill>
+                  <a:srgbClr val="0068B7"/>
+                </a:solidFill>
+                <a:latin typeface="Aptos" pitchFamily="34" charset="0"/>
+                <a:ea typeface="Aptos" pitchFamily="34" charset="-122"/>
+                <a:cs typeface="Aptos" pitchFamily="34" charset="-120"/>
+              </a:rPr>
+              <a:t>Concept checkpoints</a:t>
+            </a:r>
+            <a:endParaRPr lang="en-US" sz="1300" dirty="0"/>
+          </a:p>
+        </p:txBody>
+      </p:sp>
+      <p:sp>
+        <p:nvSpPr>
+          <p:cNvPr id="15" name="Text 13"/>
+          <p:cNvSpPr/>
+          <p:nvPr/>
+        </p:nvSpPr>
+        <p:spPr>
+          <a:xfrm>
+            <a:off x="7818120" y="3300984"/>
+            <a:ext cx="3090672" cy="877824"/>
+          </a:xfrm>
+          <a:prstGeom prst="rect">
+            <a:avLst/>
+          </a:prstGeom>
+          <a:noFill/>
+          <a:ln/>
+        </p:spPr>
+        <p:txBody>
+          <a:bodyPr wrap="square" lIns="254" tIns="254" rIns="254" bIns="254" rtlCol="0" anchor="t">
+            <a:normAutofit/>
+          </a:bodyPr>
+          <a:lstStyle/>
+          <a:p>
+            <a:r>
+              <a:rPr lang="en-US" sz="1380" dirty="0">
+                <a:solidFill>
+                  <a:srgbClr val="17364A"/>
+                </a:solidFill>
+                <a:latin typeface="Aptos" pitchFamily="34" charset="0"/>
+                <a:ea typeface="Aptos" pitchFamily="34" charset="-122"/>
+                <a:cs typeface="Aptos" pitchFamily="34" charset="-120"/>
+              </a:rPr>
+              <a:t>Documented rationale for proceeding, deferring, redesigning, or rejecting the use case</a:t>
+            </a:r>
+            <a:endParaRPr lang="en-US" sz="1380" dirty="0"/>
+          </a:p>
+        </p:txBody>
       </p:sp>
       <p:sp>
         <p:nvSpPr>
           <p:cNvPr id="16" name="Shape 14"/>
-          <p:cNvSpPr/>
-          <p:nvPr/>
-        </p:nvSpPr>
-        <p:spPr>
-          <a:xfrm>
-            <a:off x="9198864" y="4206240"/>
-            <a:ext cx="347472" cy="347472"/>
-          </a:xfrm>
-          <a:prstGeom prst="ellipse">
-            <a:avLst/>
-          </a:prstGeom>
-          <a:solidFill>
-            <a:srgbClr val="2F8A28"/>
-          </a:solidFill>
-          <a:ln w="12700">
-            <a:solidFill>
-              <a:srgbClr val="2F8A28"/>
-            </a:solidFill>
-            <a:prstDash val="solid"/>
-          </a:ln>
-        </p:spPr>
-      </p:sp>
-      <p:sp>
-        <p:nvSpPr>
-          <p:cNvPr id="17" name="Text 15"/>
-          <p:cNvSpPr/>
-          <p:nvPr/>
-        </p:nvSpPr>
-        <p:spPr>
-          <a:xfrm>
-            <a:off x="7909560" y="3977640"/>
-            <a:ext cx="2926080" cy="182880"/>
-          </a:xfrm>
-          <a:prstGeom prst="rect">
-            <a:avLst/>
-          </a:prstGeom>
-          <a:noFill/>
-          <a:ln/>
-        </p:spPr>
-        <p:txBody>
-          <a:bodyPr wrap="square" lIns="0" tIns="0" rIns="0" bIns="0" rtlCol="0" anchor="ctr"/>
-          <a:lstStyle/>
-          <a:p>
-            <a:pPr algn="ctr" indent="0" marL="0">
-              <a:buNone/>
-            </a:pPr>
-            <a:r>
-              <a:rPr lang="en-US" sz="1000" dirty="0">
-                <a:solidFill>
-                  <a:srgbClr val="003A63"/>
-                </a:solidFill>
-                <a:latin typeface="Aptos" pitchFamily="34" charset="0"/>
-                <a:ea typeface="Aptos" pitchFamily="34" charset="-122"/>
-                <a:cs typeface="Aptos" pitchFamily="34" charset="-120"/>
-              </a:rPr>
-              <a:t>Concept to action</a:t>
-            </a:r>
-            <a:endParaRPr lang="en-US" sz="1000" dirty="0"/>
-          </a:p>
-        </p:txBody>
-      </p:sp>
-      <p:sp>
-        <p:nvSpPr>
-          <p:cNvPr id="18" name="Shape 16"/>
           <p:cNvSpPr/>
           <p:nvPr/>
         </p:nvSpPr>
@@ -10062,7 +9868,7 @@
       </p:sp>
       <p:sp>
         <p:nvSpPr>
-          <p:cNvPr id="19" name="Text 17"/>
+          <p:cNvPr id="17" name="Text 15"/>
           <p:cNvSpPr/>
           <p:nvPr/>
         </p:nvSpPr>
@@ -10101,7 +9907,7 @@
       </p:sp>
       <p:sp>
         <p:nvSpPr>
-          <p:cNvPr id="20" name="Text 18"/>
+          <p:cNvPr id="18" name="Text 16"/>
           <p:cNvSpPr/>
           <p:nvPr/>
         </p:nvSpPr>
@@ -10634,20 +10440,20 @@
         </p:nvSpPr>
         <p:spPr>
           <a:xfrm>
-            <a:off x="7635240" y="3730752"/>
-            <a:ext cx="1033272" cy="749808"/>
+            <a:off x="7909560" y="3675888"/>
+            <a:ext cx="3154680" cy="1691640"/>
           </a:xfrm>
           <a:prstGeom prst="roundRect">
             <a:avLst>
-              <a:gd name="adj" fmla="val 14634"/>
+              <a:gd name="adj" fmla="val 6486"/>
             </a:avLst>
           </a:prstGeom>
           <a:solidFill>
-            <a:srgbClr val="0068B7"/>
+            <a:srgbClr val="FFFFFF"/>
           </a:solidFill>
           <a:ln w="12700">
             <a:solidFill>
-              <a:srgbClr val="0068B7"/>
+              <a:srgbClr val="B9D7E6"/>
             </a:solidFill>
             <a:prstDash val="solid"/>
           </a:ln>
@@ -10661,172 +10467,100 @@
         </p:nvSpPr>
         <p:spPr>
           <a:xfrm>
-            <a:off x="7708392" y="3922776"/>
-            <a:ext cx="886968" cy="310896"/>
-          </a:xfrm>
-          <a:prstGeom prst="rect">
-            <a:avLst/>
-          </a:prstGeom>
-          <a:noFill/>
-          <a:ln/>
-        </p:spPr>
-        <p:txBody>
-          <a:bodyPr wrap="square" lIns="0" tIns="0" rIns="0" bIns="0" rtlCol="0" anchor="ctr">
+            <a:off x="8074152" y="3822192"/>
+            <a:ext cx="2825496" cy="256032"/>
+          </a:xfrm>
+          <a:prstGeom prst="rect">
+            <a:avLst/>
+          </a:prstGeom>
+          <a:noFill/>
+          <a:ln/>
+        </p:spPr>
+        <p:txBody>
+          <a:bodyPr wrap="square" lIns="0" tIns="0" rIns="0" bIns="0" rtlCol="0" anchor="ctr"/>
+          <a:lstStyle/>
+          <a:p>
+            <a:pPr indent="0" marL="0">
+              <a:buNone/>
+            </a:pPr>
+            <a:r>
+              <a:rPr lang="en-US" sz="1300" b="1" dirty="0">
+                <a:solidFill>
+                  <a:srgbClr val="0068B7"/>
+                </a:solidFill>
+                <a:latin typeface="Aptos" pitchFamily="34" charset="0"/>
+                <a:ea typeface="Aptos" pitchFamily="34" charset="-122"/>
+                <a:cs typeface="Aptos" pitchFamily="34" charset="-120"/>
+              </a:rPr>
+              <a:t>Learning sequence</a:t>
+            </a:r>
+            <a:endParaRPr lang="en-US" sz="1300" dirty="0"/>
+          </a:p>
+        </p:txBody>
+      </p:sp>
+      <p:sp>
+        <p:nvSpPr>
+          <p:cNvPr id="15" name="Text 13"/>
+          <p:cNvSpPr/>
+          <p:nvPr/>
+        </p:nvSpPr>
+        <p:spPr>
+          <a:xfrm>
+            <a:off x="8092440" y="4187952"/>
+            <a:ext cx="2770632" cy="1033272"/>
+          </a:xfrm>
+          <a:prstGeom prst="rect">
+            <a:avLst/>
+          </a:prstGeom>
+          <a:noFill/>
+          <a:ln/>
+        </p:spPr>
+        <p:txBody>
+          <a:bodyPr wrap="square" lIns="254" tIns="254" rIns="254" bIns="254" rtlCol="0" anchor="t">
             <a:normAutofit/>
           </a:bodyPr>
           <a:lstStyle/>
           <a:p>
-            <a:pPr algn="ctr" indent="0" marL="0">
-              <a:buNone/>
-            </a:pPr>
-            <a:r>
-              <a:rPr lang="en-US" sz="1500" b="1" dirty="0">
-                <a:solidFill>
-                  <a:srgbClr val="FFFFFF"/>
-                </a:solidFill>
-                <a:latin typeface="Aptos" pitchFamily="34" charset="0"/>
-                <a:ea typeface="Aptos" pitchFamily="34" charset="-122"/>
-                <a:cs typeface="Aptos" pitchFamily="34" charset="-120"/>
-              </a:rPr>
-              <a:t>Learn</a:t>
-            </a:r>
-            <a:endParaRPr lang="en-US" sz="1500" dirty="0"/>
-          </a:p>
-        </p:txBody>
-      </p:sp>
-      <p:sp>
-        <p:nvSpPr>
-          <p:cNvPr id="15" name="Shape 13"/>
-          <p:cNvSpPr/>
-          <p:nvPr/>
-        </p:nvSpPr>
-        <p:spPr>
-          <a:xfrm>
-            <a:off x="8924544" y="3730752"/>
-            <a:ext cx="1033272" cy="749808"/>
-          </a:xfrm>
-          <a:prstGeom prst="roundRect">
-            <a:avLst>
-              <a:gd name="adj" fmla="val 14634"/>
-            </a:avLst>
-          </a:prstGeom>
-          <a:solidFill>
-            <a:srgbClr val="2F8A28"/>
-          </a:solidFill>
-          <a:ln w="12700">
-            <a:solidFill>
-              <a:srgbClr val="2F8A28"/>
-            </a:solidFill>
-            <a:prstDash val="solid"/>
-          </a:ln>
-        </p:spPr>
-      </p:sp>
-      <p:sp>
-        <p:nvSpPr>
-          <p:cNvPr id="16" name="Text 14"/>
-          <p:cNvSpPr/>
-          <p:nvPr/>
-        </p:nvSpPr>
-        <p:spPr>
-          <a:xfrm>
-            <a:off x="8997696" y="3922776"/>
-            <a:ext cx="886968" cy="310896"/>
-          </a:xfrm>
-          <a:prstGeom prst="rect">
-            <a:avLst/>
-          </a:prstGeom>
-          <a:noFill/>
-          <a:ln/>
-        </p:spPr>
-        <p:txBody>
-          <a:bodyPr wrap="square" lIns="0" tIns="0" rIns="0" bIns="0" rtlCol="0" anchor="ctr">
-            <a:normAutofit/>
-          </a:bodyPr>
-          <a:lstStyle/>
-          <a:p>
-            <a:pPr algn="ctr" indent="0" marL="0">
-              <a:buNone/>
-            </a:pPr>
-            <a:r>
-              <a:rPr lang="en-US" sz="1500" b="1" dirty="0">
-                <a:solidFill>
-                  <a:srgbClr val="FFFFFF"/>
-                </a:solidFill>
-                <a:latin typeface="Aptos" pitchFamily="34" charset="0"/>
-                <a:ea typeface="Aptos" pitchFamily="34" charset="-122"/>
-                <a:cs typeface="Aptos" pitchFamily="34" charset="-120"/>
-              </a:rPr>
-              <a:t>Apply</a:t>
-            </a:r>
-            <a:endParaRPr lang="en-US" sz="1500" dirty="0"/>
-          </a:p>
-        </p:txBody>
-      </p:sp>
-      <p:sp>
-        <p:nvSpPr>
-          <p:cNvPr id="17" name="Shape 15"/>
-          <p:cNvSpPr/>
-          <p:nvPr/>
-        </p:nvSpPr>
-        <p:spPr>
-          <a:xfrm>
-            <a:off x="10213848" y="3730752"/>
-            <a:ext cx="1033272" cy="749808"/>
-          </a:xfrm>
-          <a:prstGeom prst="roundRect">
-            <a:avLst>
-              <a:gd name="adj" fmla="val 14634"/>
-            </a:avLst>
-          </a:prstGeom>
-          <a:solidFill>
-            <a:srgbClr val="6A4CA3"/>
-          </a:solidFill>
-          <a:ln w="12700">
-            <a:solidFill>
-              <a:srgbClr val="6A4CA3"/>
-            </a:solidFill>
-            <a:prstDash val="solid"/>
-          </a:ln>
-        </p:spPr>
-      </p:sp>
-      <p:sp>
-        <p:nvSpPr>
-          <p:cNvPr id="18" name="Text 16"/>
-          <p:cNvSpPr/>
-          <p:nvPr/>
-        </p:nvSpPr>
-        <p:spPr>
-          <a:xfrm>
-            <a:off x="10287000" y="3922776"/>
-            <a:ext cx="886968" cy="310896"/>
-          </a:xfrm>
-          <a:prstGeom prst="rect">
-            <a:avLst/>
-          </a:prstGeom>
-          <a:noFill/>
-          <a:ln/>
-        </p:spPr>
-        <p:txBody>
-          <a:bodyPr wrap="square" lIns="0" tIns="0" rIns="0" bIns="0" rtlCol="0" anchor="ctr">
-            <a:normAutofit/>
-          </a:bodyPr>
-          <a:lstStyle/>
-          <a:p>
-            <a:pPr algn="ctr" indent="0" marL="0">
-              <a:buNone/>
-            </a:pPr>
-            <a:r>
-              <a:rPr lang="en-US" sz="1500" b="1" dirty="0">
-                <a:solidFill>
-                  <a:srgbClr val="FFFFFF"/>
-                </a:solidFill>
-                <a:latin typeface="Aptos" pitchFamily="34" charset="0"/>
-                <a:ea typeface="Aptos" pitchFamily="34" charset="-122"/>
-                <a:cs typeface="Aptos" pitchFamily="34" charset="-120"/>
-              </a:rPr>
-              <a:t>Document</a:t>
-            </a:r>
-            <a:endParaRPr lang="en-US" sz="1500" dirty="0"/>
+            <a:r>
+              <a:rPr lang="en-US" sz="1380" dirty="0">
+                <a:solidFill>
+                  <a:srgbClr val="17364A"/>
+                </a:solidFill>
+                <a:latin typeface="Aptos" pitchFamily="34" charset="0"/>
+                <a:ea typeface="Aptos" pitchFamily="34" charset="-122"/>
+                <a:cs typeface="Aptos" pitchFamily="34" charset="-120"/>
+              </a:rPr>
+              <a:t>Read the module for shared vocabulary and context.</a:t>
+            </a:r>
+            <a:endParaRPr lang="en-US" sz="1380" dirty="0"/>
+          </a:p>
+          <a:p>
+            <a:r>
+              <a:rPr lang="en-US" sz="1380" dirty="0">
+                <a:solidFill>
+                  <a:srgbClr val="17364A"/>
+                </a:solidFill>
+                <a:latin typeface="Aptos" pitchFamily="34" charset="0"/>
+                <a:ea typeface="Aptos" pitchFamily="34" charset="-122"/>
+                <a:cs typeface="Aptos" pitchFamily="34" charset="-120"/>
+              </a:rPr>
+              <a:t>Complete the practical exercise to apply the concept.</a:t>
+            </a:r>
+            <a:endParaRPr lang="en-US" sz="1380" dirty="0"/>
+          </a:p>
+          <a:p>
+            <a:r>
+              <a:rPr lang="en-US" sz="1380" dirty="0">
+                <a:solidFill>
+                  <a:srgbClr val="17364A"/>
+                </a:solidFill>
+                <a:latin typeface="Aptos" pitchFamily="34" charset="0"/>
+                <a:ea typeface="Aptos" pitchFamily="34" charset="-122"/>
+                <a:cs typeface="Aptos" pitchFamily="34" charset="-120"/>
+              </a:rPr>
+              <a:t>Use the notes and references for deeper review.</a:t>
+            </a:r>
+            <a:endParaRPr lang="en-US" sz="1380" dirty="0"/>
           </a:p>
         </p:txBody>
       </p:sp>
@@ -11299,13 +11033,11 @@
             </a:avLst>
           </a:prstGeom>
           <a:solidFill>
-            <a:srgbClr val="FFFFFF">
-              <a:alpha val="88000"/>
-            </a:srgbClr>
+            <a:srgbClr val="FFFFFF"/>
           </a:solidFill>
           <a:ln w="12700">
             <a:solidFill>
-              <a:srgbClr val="D6E8F2"/>
+              <a:srgbClr val="B9D7E6"/>
             </a:solidFill>
             <a:prstDash val="solid"/>
           </a:ln>
@@ -11313,119 +11045,112 @@
       </p:sp>
       <p:sp>
         <p:nvSpPr>
-          <p:cNvPr id="14" name="Shape 12"/>
-          <p:cNvSpPr/>
-          <p:nvPr/>
-        </p:nvSpPr>
-        <p:spPr>
-          <a:xfrm>
-            <a:off x="8074152" y="3291840"/>
-            <a:ext cx="2596896" cy="749808"/>
-          </a:xfrm>
-          <a:prstGeom prst="rect">
-            <a:avLst/>
-          </a:prstGeom>
-          <a:solidFill>
-            <a:srgbClr val="EAF6F8"/>
-          </a:solidFill>
-          <a:ln w="12700">
-            <a:solidFill>
-              <a:srgbClr val="8ABBD8"/>
-            </a:solidFill>
-            <a:prstDash val="solid"/>
-          </a:ln>
-        </p:spPr>
-      </p:sp>
-      <p:sp>
-        <p:nvSpPr>
-          <p:cNvPr id="15" name="Shape 13"/>
-          <p:cNvSpPr/>
-          <p:nvPr/>
-        </p:nvSpPr>
-        <p:spPr>
-          <a:xfrm>
-            <a:off x="8202168" y="3721608"/>
-            <a:ext cx="2340864" cy="0"/>
-          </a:xfrm>
-          <a:prstGeom prst="line">
-            <a:avLst/>
-          </a:prstGeom>
-          <a:noFill/>
-          <a:ln w="19050">
-            <a:solidFill>
-              <a:srgbClr val="0068B7"/>
-            </a:solidFill>
-            <a:prstDash val="solid"/>
-          </a:ln>
-        </p:spPr>
+          <p:cNvPr id="14" name="Text 12"/>
+          <p:cNvSpPr/>
+          <p:nvPr/>
+        </p:nvSpPr>
+        <p:spPr>
+          <a:xfrm>
+            <a:off x="7799832" y="2935224"/>
+            <a:ext cx="3145536" cy="256032"/>
+          </a:xfrm>
+          <a:prstGeom prst="rect">
+            <a:avLst/>
+          </a:prstGeom>
+          <a:noFill/>
+          <a:ln/>
+        </p:spPr>
+        <p:txBody>
+          <a:bodyPr wrap="square" lIns="0" tIns="0" rIns="0" bIns="0" rtlCol="0" anchor="ctr"/>
+          <a:lstStyle/>
+          <a:p>
+            <a:pPr indent="0" marL="0">
+              <a:buNone/>
+            </a:pPr>
+            <a:r>
+              <a:rPr lang="en-US" sz="1300" b="1" dirty="0">
+                <a:solidFill>
+                  <a:srgbClr val="0068B7"/>
+                </a:solidFill>
+                <a:latin typeface="Aptos" pitchFamily="34" charset="0"/>
+                <a:ea typeface="Aptos" pitchFamily="34" charset="-122"/>
+                <a:cs typeface="Aptos" pitchFamily="34" charset="-120"/>
+              </a:rPr>
+              <a:t>Concept checkpoints</a:t>
+            </a:r>
+            <a:endParaRPr lang="en-US" sz="1300" dirty="0"/>
+          </a:p>
+        </p:txBody>
+      </p:sp>
+      <p:sp>
+        <p:nvSpPr>
+          <p:cNvPr id="15" name="Text 13"/>
+          <p:cNvSpPr/>
+          <p:nvPr/>
+        </p:nvSpPr>
+        <p:spPr>
+          <a:xfrm>
+            <a:off x="7818120" y="3300984"/>
+            <a:ext cx="3090672" cy="877824"/>
+          </a:xfrm>
+          <a:prstGeom prst="rect">
+            <a:avLst/>
+          </a:prstGeom>
+          <a:noFill/>
+          <a:ln/>
+        </p:spPr>
+        <p:txBody>
+          <a:bodyPr wrap="square" lIns="254" tIns="254" rIns="254" bIns="254" rtlCol="0" anchor="t">
+            <a:normAutofit/>
+          </a:bodyPr>
+          <a:lstStyle/>
+          <a:p>
+            <a:r>
+              <a:rPr lang="en-US" sz="1380" dirty="0">
+                <a:solidFill>
+                  <a:srgbClr val="17364A"/>
+                </a:solidFill>
+                <a:latin typeface="Aptos" pitchFamily="34" charset="0"/>
+                <a:ea typeface="Aptos" pitchFamily="34" charset="-122"/>
+                <a:cs typeface="Aptos" pitchFamily="34" charset="-120"/>
+              </a:rPr>
+              <a:t>Completed AI use case intake worksheet</a:t>
+            </a:r>
+            <a:endParaRPr lang="en-US" sz="1380" dirty="0"/>
+          </a:p>
+          <a:p>
+            <a:r>
+              <a:rPr lang="en-US" sz="1380" dirty="0">
+                <a:solidFill>
+                  <a:srgbClr val="17364A"/>
+                </a:solidFill>
+                <a:latin typeface="Aptos" pitchFamily="34" charset="0"/>
+                <a:ea typeface="Aptos" pitchFamily="34" charset="-122"/>
+                <a:cs typeface="Aptos" pitchFamily="34" charset="-120"/>
+              </a:rPr>
+              <a:t>Risk and readiness triage decision</a:t>
+            </a:r>
+            <a:endParaRPr lang="en-US" sz="1380" dirty="0"/>
+          </a:p>
+          <a:p>
+            <a:r>
+              <a:rPr lang="en-US" sz="1380" dirty="0">
+                <a:solidFill>
+                  <a:srgbClr val="17364A"/>
+                </a:solidFill>
+                <a:latin typeface="Aptos" pitchFamily="34" charset="0"/>
+                <a:ea typeface="Aptos" pitchFamily="34" charset="-122"/>
+                <a:cs typeface="Aptos" pitchFamily="34" charset="-120"/>
+              </a:rPr>
+              <a:t>List of required reviewers and next steps</a:t>
+            </a:r>
+            <a:endParaRPr lang="en-US" sz="1380" dirty="0"/>
+          </a:p>
+        </p:txBody>
       </p:sp>
       <p:sp>
         <p:nvSpPr>
           <p:cNvPr id="16" name="Shape 14"/>
-          <p:cNvSpPr/>
-          <p:nvPr/>
-        </p:nvSpPr>
-        <p:spPr>
-          <a:xfrm>
-            <a:off x="9198864" y="4206240"/>
-            <a:ext cx="347472" cy="347472"/>
-          </a:xfrm>
-          <a:prstGeom prst="ellipse">
-            <a:avLst/>
-          </a:prstGeom>
-          <a:solidFill>
-            <a:srgbClr val="2F8A28"/>
-          </a:solidFill>
-          <a:ln w="12700">
-            <a:solidFill>
-              <a:srgbClr val="2F8A28"/>
-            </a:solidFill>
-            <a:prstDash val="solid"/>
-          </a:ln>
-        </p:spPr>
-      </p:sp>
-      <p:sp>
-        <p:nvSpPr>
-          <p:cNvPr id="17" name="Text 15"/>
-          <p:cNvSpPr/>
-          <p:nvPr/>
-        </p:nvSpPr>
-        <p:spPr>
-          <a:xfrm>
-            <a:off x="7909560" y="3977640"/>
-            <a:ext cx="2926080" cy="182880"/>
-          </a:xfrm>
-          <a:prstGeom prst="rect">
-            <a:avLst/>
-          </a:prstGeom>
-          <a:noFill/>
-          <a:ln/>
-        </p:spPr>
-        <p:txBody>
-          <a:bodyPr wrap="square" lIns="0" tIns="0" rIns="0" bIns="0" rtlCol="0" anchor="ctr"/>
-          <a:lstStyle/>
-          <a:p>
-            <a:pPr algn="ctr" indent="0" marL="0">
-              <a:buNone/>
-            </a:pPr>
-            <a:r>
-              <a:rPr lang="en-US" sz="1000" dirty="0">
-                <a:solidFill>
-                  <a:srgbClr val="003A63"/>
-                </a:solidFill>
-                <a:latin typeface="Aptos" pitchFamily="34" charset="0"/>
-                <a:ea typeface="Aptos" pitchFamily="34" charset="-122"/>
-                <a:cs typeface="Aptos" pitchFamily="34" charset="-120"/>
-              </a:rPr>
-              <a:t>Concept to action</a:t>
-            </a:r>
-            <a:endParaRPr lang="en-US" sz="1000" dirty="0"/>
-          </a:p>
-        </p:txBody>
-      </p:sp>
-      <p:sp>
-        <p:nvSpPr>
-          <p:cNvPr id="18" name="Shape 16"/>
           <p:cNvSpPr/>
           <p:nvPr/>
         </p:nvSpPr>
@@ -11452,7 +11177,7 @@
       </p:sp>
       <p:sp>
         <p:nvSpPr>
-          <p:cNvPr id="19" name="Text 17"/>
+          <p:cNvPr id="17" name="Text 15"/>
           <p:cNvSpPr/>
           <p:nvPr/>
         </p:nvSpPr>
@@ -11491,7 +11216,7 @@
       </p:sp>
       <p:sp>
         <p:nvSpPr>
-          <p:cNvPr id="20" name="Text 18"/>
+          <p:cNvPr id="18" name="Text 16"/>
           <p:cNvSpPr/>
           <p:nvPr/>
         </p:nvSpPr>
@@ -11999,13 +11724,11 @@
             </a:avLst>
           </a:prstGeom>
           <a:solidFill>
-            <a:srgbClr val="FFFFFF">
-              <a:alpha val="88000"/>
-            </a:srgbClr>
+            <a:srgbClr val="FFFFFF"/>
           </a:solidFill>
           <a:ln w="12700">
             <a:solidFill>
-              <a:srgbClr val="D6E8F2"/>
+              <a:srgbClr val="B9D7E6"/>
             </a:solidFill>
             <a:prstDash val="solid"/>
           </a:ln>
@@ -12013,119 +11736,112 @@
       </p:sp>
       <p:sp>
         <p:nvSpPr>
-          <p:cNvPr id="14" name="Shape 12"/>
-          <p:cNvSpPr/>
-          <p:nvPr/>
-        </p:nvSpPr>
-        <p:spPr>
-          <a:xfrm>
-            <a:off x="8074152" y="3291840"/>
-            <a:ext cx="2596896" cy="749808"/>
-          </a:xfrm>
-          <a:prstGeom prst="rect">
-            <a:avLst/>
-          </a:prstGeom>
-          <a:solidFill>
-            <a:srgbClr val="EAF6F8"/>
-          </a:solidFill>
-          <a:ln w="12700">
-            <a:solidFill>
-              <a:srgbClr val="8ABBD8"/>
-            </a:solidFill>
-            <a:prstDash val="solid"/>
-          </a:ln>
-        </p:spPr>
-      </p:sp>
-      <p:sp>
-        <p:nvSpPr>
-          <p:cNvPr id="15" name="Shape 13"/>
-          <p:cNvSpPr/>
-          <p:nvPr/>
-        </p:nvSpPr>
-        <p:spPr>
-          <a:xfrm>
-            <a:off x="8202168" y="3721608"/>
-            <a:ext cx="2340864" cy="0"/>
-          </a:xfrm>
-          <a:prstGeom prst="line">
-            <a:avLst/>
-          </a:prstGeom>
-          <a:noFill/>
-          <a:ln w="19050">
-            <a:solidFill>
-              <a:srgbClr val="0068B7"/>
-            </a:solidFill>
-            <a:prstDash val="solid"/>
-          </a:ln>
-        </p:spPr>
+          <p:cNvPr id="14" name="Text 12"/>
+          <p:cNvSpPr/>
+          <p:nvPr/>
+        </p:nvSpPr>
+        <p:spPr>
+          <a:xfrm>
+            <a:off x="7799832" y="2935224"/>
+            <a:ext cx="3145536" cy="256032"/>
+          </a:xfrm>
+          <a:prstGeom prst="rect">
+            <a:avLst/>
+          </a:prstGeom>
+          <a:noFill/>
+          <a:ln/>
+        </p:spPr>
+        <p:txBody>
+          <a:bodyPr wrap="square" lIns="0" tIns="0" rIns="0" bIns="0" rtlCol="0" anchor="ctr"/>
+          <a:lstStyle/>
+          <a:p>
+            <a:pPr indent="0" marL="0">
+              <a:buNone/>
+            </a:pPr>
+            <a:r>
+              <a:rPr lang="en-US" sz="1300" b="1" dirty="0">
+                <a:solidFill>
+                  <a:srgbClr val="0068B7"/>
+                </a:solidFill>
+                <a:latin typeface="Aptos" pitchFamily="34" charset="0"/>
+                <a:ea typeface="Aptos" pitchFamily="34" charset="-122"/>
+                <a:cs typeface="Aptos" pitchFamily="34" charset="-120"/>
+              </a:rPr>
+              <a:t>Concept checkpoints</a:t>
+            </a:r>
+            <a:endParaRPr lang="en-US" sz="1300" dirty="0"/>
+          </a:p>
+        </p:txBody>
+      </p:sp>
+      <p:sp>
+        <p:nvSpPr>
+          <p:cNvPr id="15" name="Text 13"/>
+          <p:cNvSpPr/>
+          <p:nvPr/>
+        </p:nvSpPr>
+        <p:spPr>
+          <a:xfrm>
+            <a:off x="7818120" y="3300984"/>
+            <a:ext cx="3090672" cy="877824"/>
+          </a:xfrm>
+          <a:prstGeom prst="rect">
+            <a:avLst/>
+          </a:prstGeom>
+          <a:noFill/>
+          <a:ln/>
+        </p:spPr>
+        <p:txBody>
+          <a:bodyPr wrap="square" lIns="254" tIns="254" rIns="254" bIns="254" rtlCol="0" anchor="t">
+            <a:normAutofit/>
+          </a:bodyPr>
+          <a:lstStyle/>
+          <a:p>
+            <a:r>
+              <a:rPr lang="en-US" sz="1380" dirty="0">
+                <a:solidFill>
+                  <a:srgbClr val="17364A"/>
+                </a:solidFill>
+                <a:latin typeface="Aptos" pitchFamily="34" charset="0"/>
+                <a:ea typeface="Aptos" pitchFamily="34" charset="-122"/>
+                <a:cs typeface="Aptos" pitchFamily="34" charset="-120"/>
+              </a:rPr>
+              <a:t>1.</a:t>
+            </a:r>
+            <a:endParaRPr lang="en-US" sz="1380" dirty="0"/>
+          </a:p>
+          <a:p>
+            <a:r>
+              <a:rPr lang="en-US" sz="1380" dirty="0">
+                <a:solidFill>
+                  <a:srgbClr val="17364A"/>
+                </a:solidFill>
+                <a:latin typeface="Aptos" pitchFamily="34" charset="0"/>
+                <a:ea typeface="Aptos" pitchFamily="34" charset="-122"/>
+                <a:cs typeface="Aptos" pitchFamily="34" charset="-120"/>
+              </a:rPr>
+              <a:t>What is the main purpose of AI use case intake?</a:t>
+            </a:r>
+            <a:endParaRPr lang="en-US" sz="1380" dirty="0"/>
+          </a:p>
+          <a:p>
+            <a:r>
+              <a:rPr lang="en-US" sz="1380" dirty="0">
+                <a:solidFill>
+                  <a:srgbClr val="17364A"/>
+                </a:solidFill>
+                <a:latin typeface="Aptos" pitchFamily="34" charset="0"/>
+                <a:ea typeface="Aptos" pitchFamily="34" charset="-122"/>
+                <a:cs typeface="Aptos" pitchFamily="34" charset="-120"/>
+              </a:rPr>
+              <a:t>2.</a:t>
+            </a:r>
+            <a:endParaRPr lang="en-US" sz="1380" dirty="0"/>
+          </a:p>
+        </p:txBody>
       </p:sp>
       <p:sp>
         <p:nvSpPr>
           <p:cNvPr id="16" name="Shape 14"/>
-          <p:cNvSpPr/>
-          <p:nvPr/>
-        </p:nvSpPr>
-        <p:spPr>
-          <a:xfrm>
-            <a:off x="9198864" y="4206240"/>
-            <a:ext cx="347472" cy="347472"/>
-          </a:xfrm>
-          <a:prstGeom prst="ellipse">
-            <a:avLst/>
-          </a:prstGeom>
-          <a:solidFill>
-            <a:srgbClr val="2F8A28"/>
-          </a:solidFill>
-          <a:ln w="12700">
-            <a:solidFill>
-              <a:srgbClr val="2F8A28"/>
-            </a:solidFill>
-            <a:prstDash val="solid"/>
-          </a:ln>
-        </p:spPr>
-      </p:sp>
-      <p:sp>
-        <p:nvSpPr>
-          <p:cNvPr id="17" name="Text 15"/>
-          <p:cNvSpPr/>
-          <p:nvPr/>
-        </p:nvSpPr>
-        <p:spPr>
-          <a:xfrm>
-            <a:off x="7909560" y="3977640"/>
-            <a:ext cx="2926080" cy="182880"/>
-          </a:xfrm>
-          <a:prstGeom prst="rect">
-            <a:avLst/>
-          </a:prstGeom>
-          <a:noFill/>
-          <a:ln/>
-        </p:spPr>
-        <p:txBody>
-          <a:bodyPr wrap="square" lIns="0" tIns="0" rIns="0" bIns="0" rtlCol="0" anchor="ctr"/>
-          <a:lstStyle/>
-          <a:p>
-            <a:pPr algn="ctr" indent="0" marL="0">
-              <a:buNone/>
-            </a:pPr>
-            <a:r>
-              <a:rPr lang="en-US" sz="1000" dirty="0">
-                <a:solidFill>
-                  <a:srgbClr val="003A63"/>
-                </a:solidFill>
-                <a:latin typeface="Aptos" pitchFamily="34" charset="0"/>
-                <a:ea typeface="Aptos" pitchFamily="34" charset="-122"/>
-                <a:cs typeface="Aptos" pitchFamily="34" charset="-120"/>
-              </a:rPr>
-              <a:t>Concept to action</a:t>
-            </a:r>
-            <a:endParaRPr lang="en-US" sz="1000" dirty="0"/>
-          </a:p>
-        </p:txBody>
-      </p:sp>
-      <p:sp>
-        <p:nvSpPr>
-          <p:cNvPr id="18" name="Shape 16"/>
           <p:cNvSpPr/>
           <p:nvPr/>
         </p:nvSpPr>
@@ -12152,7 +11868,7 @@
       </p:sp>
       <p:sp>
         <p:nvSpPr>
-          <p:cNvPr id="19" name="Text 17"/>
+          <p:cNvPr id="17" name="Text 15"/>
           <p:cNvSpPr/>
           <p:nvPr/>
         </p:nvSpPr>
@@ -12191,7 +11907,7 @@
       </p:sp>
       <p:sp>
         <p:nvSpPr>
-          <p:cNvPr id="20" name="Text 18"/>
+          <p:cNvPr id="18" name="Text 16"/>
           <p:cNvSpPr/>
           <p:nvPr/>
         </p:nvSpPr>
@@ -12699,13 +12415,11 @@
             </a:avLst>
           </a:prstGeom>
           <a:solidFill>
-            <a:srgbClr val="FFFFFF">
-              <a:alpha val="88000"/>
-            </a:srgbClr>
+            <a:srgbClr val="FFFFFF"/>
           </a:solidFill>
           <a:ln w="12700">
             <a:solidFill>
-              <a:srgbClr val="D6E8F2"/>
+              <a:srgbClr val="B9D7E6"/>
             </a:solidFill>
             <a:prstDash val="solid"/>
           </a:ln>
@@ -12713,119 +12427,112 @@
       </p:sp>
       <p:sp>
         <p:nvSpPr>
-          <p:cNvPr id="14" name="Shape 12"/>
-          <p:cNvSpPr/>
-          <p:nvPr/>
-        </p:nvSpPr>
-        <p:spPr>
-          <a:xfrm>
-            <a:off x="8074152" y="3291840"/>
-            <a:ext cx="2596896" cy="749808"/>
-          </a:xfrm>
-          <a:prstGeom prst="rect">
-            <a:avLst/>
-          </a:prstGeom>
-          <a:solidFill>
-            <a:srgbClr val="EAF6F8"/>
-          </a:solidFill>
-          <a:ln w="12700">
-            <a:solidFill>
-              <a:srgbClr val="8ABBD8"/>
-            </a:solidFill>
-            <a:prstDash val="solid"/>
-          </a:ln>
-        </p:spPr>
-      </p:sp>
-      <p:sp>
-        <p:nvSpPr>
-          <p:cNvPr id="15" name="Shape 13"/>
-          <p:cNvSpPr/>
-          <p:nvPr/>
-        </p:nvSpPr>
-        <p:spPr>
-          <a:xfrm>
-            <a:off x="8202168" y="3721608"/>
-            <a:ext cx="2340864" cy="0"/>
-          </a:xfrm>
-          <a:prstGeom prst="line">
-            <a:avLst/>
-          </a:prstGeom>
-          <a:noFill/>
-          <a:ln w="19050">
-            <a:solidFill>
-              <a:srgbClr val="0068B7"/>
-            </a:solidFill>
-            <a:prstDash val="solid"/>
-          </a:ln>
-        </p:spPr>
+          <p:cNvPr id="14" name="Text 12"/>
+          <p:cNvSpPr/>
+          <p:nvPr/>
+        </p:nvSpPr>
+        <p:spPr>
+          <a:xfrm>
+            <a:off x="7799832" y="2935224"/>
+            <a:ext cx="3145536" cy="256032"/>
+          </a:xfrm>
+          <a:prstGeom prst="rect">
+            <a:avLst/>
+          </a:prstGeom>
+          <a:noFill/>
+          <a:ln/>
+        </p:spPr>
+        <p:txBody>
+          <a:bodyPr wrap="square" lIns="0" tIns="0" rIns="0" bIns="0" rtlCol="0" anchor="ctr"/>
+          <a:lstStyle/>
+          <a:p>
+            <a:pPr indent="0" marL="0">
+              <a:buNone/>
+            </a:pPr>
+            <a:r>
+              <a:rPr lang="en-US" sz="1300" b="1" dirty="0">
+                <a:solidFill>
+                  <a:srgbClr val="0068B7"/>
+                </a:solidFill>
+                <a:latin typeface="Aptos" pitchFamily="34" charset="0"/>
+                <a:ea typeface="Aptos" pitchFamily="34" charset="-122"/>
+                <a:cs typeface="Aptos" pitchFamily="34" charset="-120"/>
+              </a:rPr>
+              <a:t>Concept checkpoints</a:t>
+            </a:r>
+            <a:endParaRPr lang="en-US" sz="1300" dirty="0"/>
+          </a:p>
+        </p:txBody>
+      </p:sp>
+      <p:sp>
+        <p:nvSpPr>
+          <p:cNvPr id="15" name="Text 13"/>
+          <p:cNvSpPr/>
+          <p:nvPr/>
+        </p:nvSpPr>
+        <p:spPr>
+          <a:xfrm>
+            <a:off x="7818120" y="3300984"/>
+            <a:ext cx="3090672" cy="877824"/>
+          </a:xfrm>
+          <a:prstGeom prst="rect">
+            <a:avLst/>
+          </a:prstGeom>
+          <a:noFill/>
+          <a:ln/>
+        </p:spPr>
+        <p:txBody>
+          <a:bodyPr wrap="square" lIns="254" tIns="254" rIns="254" bIns="254" rtlCol="0" anchor="t">
+            <a:normAutofit/>
+          </a:bodyPr>
+          <a:lstStyle/>
+          <a:p>
+            <a:r>
+              <a:rPr lang="en-US" sz="1380" dirty="0">
+                <a:solidFill>
+                  <a:srgbClr val="17364A"/>
+                </a:solidFill>
+                <a:latin typeface="Aptos" pitchFamily="34" charset="0"/>
+                <a:ea typeface="Aptos" pitchFamily="34" charset="-122"/>
+                <a:cs typeface="Aptos" pitchFamily="34" charset="-120"/>
+              </a:rPr>
+              <a:t>NIST Artificial Intelligence Risk Management Framework:.</a:t>
+            </a:r>
+            <a:endParaRPr lang="en-US" sz="1380" dirty="0"/>
+          </a:p>
+          <a:p>
+            <a:r>
+              <a:rPr lang="en-US" sz="1380" dirty="0">
+                <a:solidFill>
+                  <a:srgbClr val="17364A"/>
+                </a:solidFill>
+                <a:latin typeface="Aptos" pitchFamily="34" charset="0"/>
+                <a:ea typeface="Aptos" pitchFamily="34" charset="-122"/>
+                <a:cs typeface="Aptos" pitchFamily="34" charset="-120"/>
+              </a:rPr>
+              <a:t>OWASP guidance for LLM application security</a:t>
+            </a:r>
+            <a:endParaRPr lang="en-US" sz="1380" dirty="0"/>
+          </a:p>
+          <a:p>
+            <a:r>
+              <a:rPr lang="en-US" sz="1380" dirty="0">
+                <a:solidFill>
+                  <a:srgbClr val="17364A"/>
+                </a:solidFill>
+                <a:latin typeface="Aptos" pitchFamily="34" charset="0"/>
+                <a:ea typeface="Aptos" pitchFamily="34" charset="-122"/>
+                <a:cs typeface="Aptos" pitchFamily="34" charset="-120"/>
+              </a:rPr>
+              <a:t>Agency policies for privacy, cybersecurity, records, procurement, accessibility, and.</a:t>
+            </a:r>
+            <a:endParaRPr lang="en-US" sz="1380" dirty="0"/>
+          </a:p>
+        </p:txBody>
       </p:sp>
       <p:sp>
         <p:nvSpPr>
           <p:cNvPr id="16" name="Shape 14"/>
-          <p:cNvSpPr/>
-          <p:nvPr/>
-        </p:nvSpPr>
-        <p:spPr>
-          <a:xfrm>
-            <a:off x="9198864" y="4206240"/>
-            <a:ext cx="347472" cy="347472"/>
-          </a:xfrm>
-          <a:prstGeom prst="ellipse">
-            <a:avLst/>
-          </a:prstGeom>
-          <a:solidFill>
-            <a:srgbClr val="2F8A28"/>
-          </a:solidFill>
-          <a:ln w="12700">
-            <a:solidFill>
-              <a:srgbClr val="2F8A28"/>
-            </a:solidFill>
-            <a:prstDash val="solid"/>
-          </a:ln>
-        </p:spPr>
-      </p:sp>
-      <p:sp>
-        <p:nvSpPr>
-          <p:cNvPr id="17" name="Text 15"/>
-          <p:cNvSpPr/>
-          <p:nvPr/>
-        </p:nvSpPr>
-        <p:spPr>
-          <a:xfrm>
-            <a:off x="7909560" y="3977640"/>
-            <a:ext cx="2926080" cy="182880"/>
-          </a:xfrm>
-          <a:prstGeom prst="rect">
-            <a:avLst/>
-          </a:prstGeom>
-          <a:noFill/>
-          <a:ln/>
-        </p:spPr>
-        <p:txBody>
-          <a:bodyPr wrap="square" lIns="0" tIns="0" rIns="0" bIns="0" rtlCol="0" anchor="ctr"/>
-          <a:lstStyle/>
-          <a:p>
-            <a:pPr algn="ctr" indent="0" marL="0">
-              <a:buNone/>
-            </a:pPr>
-            <a:r>
-              <a:rPr lang="en-US" sz="1000" dirty="0">
-                <a:solidFill>
-                  <a:srgbClr val="003A63"/>
-                </a:solidFill>
-                <a:latin typeface="Aptos" pitchFamily="34" charset="0"/>
-                <a:ea typeface="Aptos" pitchFamily="34" charset="-122"/>
-                <a:cs typeface="Aptos" pitchFamily="34" charset="-120"/>
-              </a:rPr>
-              <a:t>Concept to action</a:t>
-            </a:r>
-            <a:endParaRPr lang="en-US" sz="1000" dirty="0"/>
-          </a:p>
-        </p:txBody>
-      </p:sp>
-      <p:sp>
-        <p:nvSpPr>
-          <p:cNvPr id="18" name="Shape 16"/>
           <p:cNvSpPr/>
           <p:nvPr/>
         </p:nvSpPr>
@@ -12852,7 +12559,7 @@
       </p:sp>
       <p:sp>
         <p:nvSpPr>
-          <p:cNvPr id="19" name="Text 17"/>
+          <p:cNvPr id="17" name="Text 15"/>
           <p:cNvSpPr/>
           <p:nvPr/>
         </p:nvSpPr>
@@ -12891,7 +12598,7 @@
       </p:sp>
       <p:sp>
         <p:nvSpPr>
-          <p:cNvPr id="20" name="Text 18"/>
+          <p:cNvPr id="18" name="Text 16"/>
           <p:cNvSpPr/>
           <p:nvPr/>
         </p:nvSpPr>
@@ -13371,13 +13078,11 @@
             </a:avLst>
           </a:prstGeom>
           <a:solidFill>
-            <a:srgbClr val="FFFFFF">
-              <a:alpha val="88000"/>
-            </a:srgbClr>
+            <a:srgbClr val="FFFFFF"/>
           </a:solidFill>
           <a:ln w="12700">
             <a:solidFill>
-              <a:srgbClr val="D6E8F2"/>
+              <a:srgbClr val="B9D7E6"/>
             </a:solidFill>
             <a:prstDash val="solid"/>
           </a:ln>
@@ -13385,119 +13090,84 @@
       </p:sp>
       <p:sp>
         <p:nvSpPr>
-          <p:cNvPr id="14" name="Shape 12"/>
-          <p:cNvSpPr/>
-          <p:nvPr/>
-        </p:nvSpPr>
-        <p:spPr>
-          <a:xfrm>
-            <a:off x="8074152" y="3291840"/>
-            <a:ext cx="2596896" cy="749808"/>
-          </a:xfrm>
-          <a:prstGeom prst="rect">
-            <a:avLst/>
-          </a:prstGeom>
-          <a:solidFill>
-            <a:srgbClr val="EAF6F8"/>
-          </a:solidFill>
-          <a:ln w="12700">
-            <a:solidFill>
-              <a:srgbClr val="8ABBD8"/>
-            </a:solidFill>
-            <a:prstDash val="solid"/>
-          </a:ln>
-        </p:spPr>
-      </p:sp>
-      <p:sp>
-        <p:nvSpPr>
-          <p:cNvPr id="15" name="Shape 13"/>
-          <p:cNvSpPr/>
-          <p:nvPr/>
-        </p:nvSpPr>
-        <p:spPr>
-          <a:xfrm>
-            <a:off x="8202168" y="3721608"/>
-            <a:ext cx="2340864" cy="0"/>
-          </a:xfrm>
-          <a:prstGeom prst="line">
-            <a:avLst/>
-          </a:prstGeom>
-          <a:noFill/>
-          <a:ln w="19050">
-            <a:solidFill>
-              <a:srgbClr val="0068B7"/>
-            </a:solidFill>
-            <a:prstDash val="solid"/>
-          </a:ln>
-        </p:spPr>
+          <p:cNvPr id="14" name="Text 12"/>
+          <p:cNvSpPr/>
+          <p:nvPr/>
+        </p:nvSpPr>
+        <p:spPr>
+          <a:xfrm>
+            <a:off x="7799832" y="2935224"/>
+            <a:ext cx="3145536" cy="256032"/>
+          </a:xfrm>
+          <a:prstGeom prst="rect">
+            <a:avLst/>
+          </a:prstGeom>
+          <a:noFill/>
+          <a:ln/>
+        </p:spPr>
+        <p:txBody>
+          <a:bodyPr wrap="square" lIns="0" tIns="0" rIns="0" bIns="0" rtlCol="0" anchor="ctr"/>
+          <a:lstStyle/>
+          <a:p>
+            <a:pPr indent="0" marL="0">
+              <a:buNone/>
+            </a:pPr>
+            <a:r>
+              <a:rPr lang="en-US" sz="1300" b="1" dirty="0">
+                <a:solidFill>
+                  <a:srgbClr val="0068B7"/>
+                </a:solidFill>
+                <a:latin typeface="Aptos" pitchFamily="34" charset="0"/>
+                <a:ea typeface="Aptos" pitchFamily="34" charset="-122"/>
+                <a:cs typeface="Aptos" pitchFamily="34" charset="-120"/>
+              </a:rPr>
+              <a:t>Concept checkpoints</a:t>
+            </a:r>
+            <a:endParaRPr lang="en-US" sz="1300" dirty="0"/>
+          </a:p>
+        </p:txBody>
+      </p:sp>
+      <p:sp>
+        <p:nvSpPr>
+          <p:cNvPr id="15" name="Text 13"/>
+          <p:cNvSpPr/>
+          <p:nvPr/>
+        </p:nvSpPr>
+        <p:spPr>
+          <a:xfrm>
+            <a:off x="7818120" y="3300984"/>
+            <a:ext cx="3090672" cy="877824"/>
+          </a:xfrm>
+          <a:prstGeom prst="rect">
+            <a:avLst/>
+          </a:prstGeom>
+          <a:noFill/>
+          <a:ln/>
+        </p:spPr>
+        <p:txBody>
+          <a:bodyPr wrap="square" lIns="254" tIns="254" rIns="254" bIns="254" rtlCol="0" anchor="t">
+            <a:normAutofit/>
+          </a:bodyPr>
+          <a:lstStyle/>
+          <a:p>
+            <a:r>
+              <a:rPr lang="en-US" sz="1380" dirty="0">
+                <a:solidFill>
+                  <a:srgbClr val="17364A"/>
+                </a:solidFill>
+                <a:latin typeface="Aptos" pitchFamily="34" charset="0"/>
+                <a:ea typeface="Aptos" pitchFamily="34" charset="-122"/>
+                <a:cs typeface="Aptos" pitchFamily="34" charset="-120"/>
+              </a:rPr>
+              <a:t>Relevant public health program SOPs, data governance documentation, and implementation plans</a:t>
+            </a:r>
+            <a:endParaRPr lang="en-US" sz="1380" dirty="0"/>
+          </a:p>
+        </p:txBody>
       </p:sp>
       <p:sp>
         <p:nvSpPr>
           <p:cNvPr id="16" name="Shape 14"/>
-          <p:cNvSpPr/>
-          <p:nvPr/>
-        </p:nvSpPr>
-        <p:spPr>
-          <a:xfrm>
-            <a:off x="9198864" y="4206240"/>
-            <a:ext cx="347472" cy="347472"/>
-          </a:xfrm>
-          <a:prstGeom prst="ellipse">
-            <a:avLst/>
-          </a:prstGeom>
-          <a:solidFill>
-            <a:srgbClr val="2F8A28"/>
-          </a:solidFill>
-          <a:ln w="12700">
-            <a:solidFill>
-              <a:srgbClr val="2F8A28"/>
-            </a:solidFill>
-            <a:prstDash val="solid"/>
-          </a:ln>
-        </p:spPr>
-      </p:sp>
-      <p:sp>
-        <p:nvSpPr>
-          <p:cNvPr id="17" name="Text 15"/>
-          <p:cNvSpPr/>
-          <p:nvPr/>
-        </p:nvSpPr>
-        <p:spPr>
-          <a:xfrm>
-            <a:off x="7909560" y="3977640"/>
-            <a:ext cx="2926080" cy="182880"/>
-          </a:xfrm>
-          <a:prstGeom prst="rect">
-            <a:avLst/>
-          </a:prstGeom>
-          <a:noFill/>
-          <a:ln/>
-        </p:spPr>
-        <p:txBody>
-          <a:bodyPr wrap="square" lIns="0" tIns="0" rIns="0" bIns="0" rtlCol="0" anchor="ctr"/>
-          <a:lstStyle/>
-          <a:p>
-            <a:pPr algn="ctr" indent="0" marL="0">
-              <a:buNone/>
-            </a:pPr>
-            <a:r>
-              <a:rPr lang="en-US" sz="1000" dirty="0">
-                <a:solidFill>
-                  <a:srgbClr val="003A63"/>
-                </a:solidFill>
-                <a:latin typeface="Aptos" pitchFamily="34" charset="0"/>
-                <a:ea typeface="Aptos" pitchFamily="34" charset="-122"/>
-                <a:cs typeface="Aptos" pitchFamily="34" charset="-120"/>
-              </a:rPr>
-              <a:t>Concept to action</a:t>
-            </a:r>
-            <a:endParaRPr lang="en-US" sz="1000" dirty="0"/>
-          </a:p>
-        </p:txBody>
-      </p:sp>
-      <p:sp>
-        <p:nvSpPr>
-          <p:cNvPr id="18" name="Shape 16"/>
           <p:cNvSpPr/>
           <p:nvPr/>
         </p:nvSpPr>
@@ -13524,7 +13194,7 @@
       </p:sp>
       <p:sp>
         <p:nvSpPr>
-          <p:cNvPr id="19" name="Text 17"/>
+          <p:cNvPr id="17" name="Text 15"/>
           <p:cNvSpPr/>
           <p:nvPr/>
         </p:nvSpPr>
@@ -13563,7 +13233,7 @@
       </p:sp>
       <p:sp>
         <p:nvSpPr>
-          <p:cNvPr id="20" name="Text 18"/>
+          <p:cNvPr id="18" name="Text 16"/>
           <p:cNvSpPr/>
           <p:nvPr/>
         </p:nvSpPr>
@@ -14076,20 +13746,20 @@
         </p:nvSpPr>
         <p:spPr>
           <a:xfrm>
-            <a:off x="7818120" y="3977640"/>
-            <a:ext cx="972312" cy="749808"/>
+            <a:off x="8046720" y="3794760"/>
+            <a:ext cx="3063240" cy="1600200"/>
           </a:xfrm>
           <a:prstGeom prst="roundRect">
             <a:avLst>
-              <a:gd name="adj" fmla="val 14634"/>
+              <a:gd name="adj" fmla="val 6857"/>
             </a:avLst>
           </a:prstGeom>
           <a:solidFill>
-            <a:srgbClr val="0068B7"/>
+            <a:srgbClr val="FFFFFF"/>
           </a:solidFill>
           <a:ln w="12700">
             <a:solidFill>
-              <a:srgbClr val="0068B7"/>
+              <a:srgbClr val="B9D7E6"/>
             </a:solidFill>
             <a:prstDash val="solid"/>
           </a:ln>
@@ -14103,172 +13773,100 @@
         </p:nvSpPr>
         <p:spPr>
           <a:xfrm>
-            <a:off x="7891272" y="4169664"/>
-            <a:ext cx="826008" cy="310896"/>
-          </a:xfrm>
-          <a:prstGeom prst="rect">
-            <a:avLst/>
-          </a:prstGeom>
-          <a:noFill/>
-          <a:ln/>
-        </p:spPr>
-        <p:txBody>
-          <a:bodyPr wrap="square" lIns="0" tIns="0" rIns="0" bIns="0" rtlCol="0" anchor="ctr">
+            <a:off x="8211312" y="3941064"/>
+            <a:ext cx="2734056" cy="256032"/>
+          </a:xfrm>
+          <a:prstGeom prst="rect">
+            <a:avLst/>
+          </a:prstGeom>
+          <a:noFill/>
+          <a:ln/>
+        </p:spPr>
+        <p:txBody>
+          <a:bodyPr wrap="square" lIns="0" tIns="0" rIns="0" bIns="0" rtlCol="0" anchor="ctr"/>
+          <a:lstStyle/>
+          <a:p>
+            <a:pPr indent="0" marL="0">
+              <a:buNone/>
+            </a:pPr>
+            <a:r>
+              <a:rPr lang="en-US" sz="1300" b="1" dirty="0">
+                <a:solidFill>
+                  <a:srgbClr val="0068B7"/>
+                </a:solidFill>
+                <a:latin typeface="Aptos" pitchFamily="34" charset="0"/>
+                <a:ea typeface="Aptos" pitchFamily="34" charset="-122"/>
+                <a:cs typeface="Aptos" pitchFamily="34" charset="-120"/>
+              </a:rPr>
+              <a:t>Use the play links to</a:t>
+            </a:r>
+            <a:endParaRPr lang="en-US" sz="1300" dirty="0"/>
+          </a:p>
+        </p:txBody>
+      </p:sp>
+      <p:sp>
+        <p:nvSpPr>
+          <p:cNvPr id="15" name="Text 13"/>
+          <p:cNvSpPr/>
+          <p:nvPr/>
+        </p:nvSpPr>
+        <p:spPr>
+          <a:xfrm>
+            <a:off x="8229600" y="4306824"/>
+            <a:ext cx="2679192" cy="941832"/>
+          </a:xfrm>
+          <a:prstGeom prst="rect">
+            <a:avLst/>
+          </a:prstGeom>
+          <a:noFill/>
+          <a:ln/>
+        </p:spPr>
+        <p:txBody>
+          <a:bodyPr wrap="square" lIns="254" tIns="254" rIns="254" bIns="254" rtlCol="0" anchor="t">
             <a:normAutofit/>
           </a:bodyPr>
           <a:lstStyle/>
           <a:p>
-            <a:pPr algn="ctr" indent="0" marL="0">
-              <a:buNone/>
-            </a:pPr>
-            <a:r>
-              <a:rPr lang="en-US" sz="1500" b="1" dirty="0">
-                <a:solidFill>
-                  <a:srgbClr val="FFFFFF"/>
-                </a:solidFill>
-                <a:latin typeface="Aptos" pitchFamily="34" charset="0"/>
-                <a:ea typeface="Aptos" pitchFamily="34" charset="-122"/>
-                <a:cs typeface="Aptos" pitchFamily="34" charset="-120"/>
-              </a:rPr>
-              <a:t>Lesson</a:t>
-            </a:r>
-            <a:endParaRPr lang="en-US" sz="1500" dirty="0"/>
-          </a:p>
-        </p:txBody>
-      </p:sp>
-      <p:sp>
-        <p:nvSpPr>
-          <p:cNvPr id="15" name="Shape 13"/>
-          <p:cNvSpPr/>
-          <p:nvPr/>
-        </p:nvSpPr>
-        <p:spPr>
-          <a:xfrm>
-            <a:off x="9046464" y="3977640"/>
-            <a:ext cx="972312" cy="749808"/>
-          </a:xfrm>
-          <a:prstGeom prst="roundRect">
-            <a:avLst>
-              <a:gd name="adj" fmla="val 14634"/>
-            </a:avLst>
-          </a:prstGeom>
-          <a:solidFill>
-            <a:srgbClr val="2F8A28"/>
-          </a:solidFill>
-          <a:ln w="12700">
-            <a:solidFill>
-              <a:srgbClr val="2F8A28"/>
-            </a:solidFill>
-            <a:prstDash val="solid"/>
-          </a:ln>
-        </p:spPr>
-      </p:sp>
-      <p:sp>
-        <p:nvSpPr>
-          <p:cNvPr id="16" name="Text 14"/>
-          <p:cNvSpPr/>
-          <p:nvPr/>
-        </p:nvSpPr>
-        <p:spPr>
-          <a:xfrm>
-            <a:off x="9119616" y="4169664"/>
-            <a:ext cx="826008" cy="310896"/>
-          </a:xfrm>
-          <a:prstGeom prst="rect">
-            <a:avLst/>
-          </a:prstGeom>
-          <a:noFill/>
-          <a:ln/>
-        </p:spPr>
-        <p:txBody>
-          <a:bodyPr wrap="square" lIns="0" tIns="0" rIns="0" bIns="0" rtlCol="0" anchor="ctr">
-            <a:normAutofit/>
-          </a:bodyPr>
-          <a:lstStyle/>
-          <a:p>
-            <a:pPr algn="ctr" indent="0" marL="0">
-              <a:buNone/>
-            </a:pPr>
-            <a:r>
-              <a:rPr lang="en-US" sz="1500" b="1" dirty="0">
-                <a:solidFill>
-                  <a:srgbClr val="FFFFFF"/>
-                </a:solidFill>
-                <a:latin typeface="Aptos" pitchFamily="34" charset="0"/>
-                <a:ea typeface="Aptos" pitchFamily="34" charset="-122"/>
-                <a:cs typeface="Aptos" pitchFamily="34" charset="-120"/>
-              </a:rPr>
-              <a:t>Plays</a:t>
-            </a:r>
-            <a:endParaRPr lang="en-US" sz="1500" dirty="0"/>
-          </a:p>
-        </p:txBody>
-      </p:sp>
-      <p:sp>
-        <p:nvSpPr>
-          <p:cNvPr id="17" name="Shape 15"/>
-          <p:cNvSpPr/>
-          <p:nvPr/>
-        </p:nvSpPr>
-        <p:spPr>
-          <a:xfrm>
-            <a:off x="10274808" y="3977640"/>
-            <a:ext cx="972312" cy="749808"/>
-          </a:xfrm>
-          <a:prstGeom prst="roundRect">
-            <a:avLst>
-              <a:gd name="adj" fmla="val 14634"/>
-            </a:avLst>
-          </a:prstGeom>
-          <a:solidFill>
-            <a:srgbClr val="6A4CA3"/>
-          </a:solidFill>
-          <a:ln w="12700">
-            <a:solidFill>
-              <a:srgbClr val="6A4CA3"/>
-            </a:solidFill>
-            <a:prstDash val="solid"/>
-          </a:ln>
-        </p:spPr>
-      </p:sp>
-      <p:sp>
-        <p:nvSpPr>
-          <p:cNvPr id="18" name="Text 16"/>
-          <p:cNvSpPr/>
-          <p:nvPr/>
-        </p:nvSpPr>
-        <p:spPr>
-          <a:xfrm>
-            <a:off x="10347960" y="4169664"/>
-            <a:ext cx="826008" cy="310896"/>
-          </a:xfrm>
-          <a:prstGeom prst="rect">
-            <a:avLst/>
-          </a:prstGeom>
-          <a:noFill/>
-          <a:ln/>
-        </p:spPr>
-        <p:txBody>
-          <a:bodyPr wrap="square" lIns="0" tIns="0" rIns="0" bIns="0" rtlCol="0" anchor="ctr">
-            <a:normAutofit/>
-          </a:bodyPr>
-          <a:lstStyle/>
-          <a:p>
-            <a:pPr algn="ctr" indent="0" marL="0">
-              <a:buNone/>
-            </a:pPr>
-            <a:r>
-              <a:rPr lang="en-US" sz="1500" b="1" dirty="0">
-                <a:solidFill>
-                  <a:srgbClr val="FFFFFF"/>
-                </a:solidFill>
-                <a:latin typeface="Aptos" pitchFamily="34" charset="0"/>
-                <a:ea typeface="Aptos" pitchFamily="34" charset="-122"/>
-                <a:cs typeface="Aptos" pitchFamily="34" charset="-120"/>
-              </a:rPr>
-              <a:t>Action</a:t>
-            </a:r>
-            <a:endParaRPr lang="en-US" sz="1500" dirty="0"/>
+            <a:r>
+              <a:rPr lang="en-US" sz="1380" dirty="0">
+                <a:solidFill>
+                  <a:srgbClr val="17364A"/>
+                </a:solidFill>
+                <a:latin typeface="Aptos" pitchFamily="34" charset="0"/>
+                <a:ea typeface="Aptos" pitchFamily="34" charset="-122"/>
+                <a:cs typeface="Aptos" pitchFamily="34" charset="-120"/>
+              </a:rPr>
+              <a:t>Locate the decision point in the playbook sequence.</a:t>
+            </a:r>
+            <a:endParaRPr lang="en-US" sz="1380" dirty="0"/>
+          </a:p>
+          <a:p>
+            <a:r>
+              <a:rPr lang="en-US" sz="1380" dirty="0">
+                <a:solidFill>
+                  <a:srgbClr val="17364A"/>
+                </a:solidFill>
+                <a:latin typeface="Aptos" pitchFamily="34" charset="0"/>
+                <a:ea typeface="Aptos" pitchFamily="34" charset="-122"/>
+                <a:cs typeface="Aptos" pitchFamily="34" charset="-120"/>
+              </a:rPr>
+              <a:t>Identify who should participate in the work.</a:t>
+            </a:r>
+            <a:endParaRPr lang="en-US" sz="1380" dirty="0"/>
+          </a:p>
+          <a:p>
+            <a:r>
+              <a:rPr lang="en-US" sz="1380" dirty="0">
+                <a:solidFill>
+                  <a:srgbClr val="17364A"/>
+                </a:solidFill>
+                <a:latin typeface="Aptos" pitchFamily="34" charset="0"/>
+                <a:ea typeface="Aptos" pitchFamily="34" charset="-122"/>
+                <a:cs typeface="Aptos" pitchFamily="34" charset="-120"/>
+              </a:rPr>
+              <a:t>Document the review, approval, or implementation step.</a:t>
+            </a:r>
+            <a:endParaRPr lang="en-US" sz="1380" dirty="0"/>
           </a:p>
         </p:txBody>
       </p:sp>
@@ -14746,20 +14344,20 @@
         </p:nvSpPr>
         <p:spPr>
           <a:xfrm>
-            <a:off x="7818120" y="3977640"/>
-            <a:ext cx="972312" cy="749808"/>
+            <a:off x="8046720" y="3794760"/>
+            <a:ext cx="3063240" cy="1600200"/>
           </a:xfrm>
           <a:prstGeom prst="roundRect">
             <a:avLst>
-              <a:gd name="adj" fmla="val 14634"/>
+              <a:gd name="adj" fmla="val 6857"/>
             </a:avLst>
           </a:prstGeom>
           <a:solidFill>
-            <a:srgbClr val="0068B7"/>
+            <a:srgbClr val="FFFFFF"/>
           </a:solidFill>
           <a:ln w="12700">
             <a:solidFill>
-              <a:srgbClr val="0068B7"/>
+              <a:srgbClr val="B9D7E6"/>
             </a:solidFill>
             <a:prstDash val="solid"/>
           </a:ln>
@@ -14773,172 +14371,100 @@
         </p:nvSpPr>
         <p:spPr>
           <a:xfrm>
-            <a:off x="7891272" y="4169664"/>
-            <a:ext cx="826008" cy="310896"/>
-          </a:xfrm>
-          <a:prstGeom prst="rect">
-            <a:avLst/>
-          </a:prstGeom>
-          <a:noFill/>
-          <a:ln/>
-        </p:spPr>
-        <p:txBody>
-          <a:bodyPr wrap="square" lIns="0" tIns="0" rIns="0" bIns="0" rtlCol="0" anchor="ctr">
+            <a:off x="8211312" y="3941064"/>
+            <a:ext cx="2734056" cy="256032"/>
+          </a:xfrm>
+          <a:prstGeom prst="rect">
+            <a:avLst/>
+          </a:prstGeom>
+          <a:noFill/>
+          <a:ln/>
+        </p:spPr>
+        <p:txBody>
+          <a:bodyPr wrap="square" lIns="0" tIns="0" rIns="0" bIns="0" rtlCol="0" anchor="ctr"/>
+          <a:lstStyle/>
+          <a:p>
+            <a:pPr indent="0" marL="0">
+              <a:buNone/>
+            </a:pPr>
+            <a:r>
+              <a:rPr lang="en-US" sz="1300" b="1" dirty="0">
+                <a:solidFill>
+                  <a:srgbClr val="0068B7"/>
+                </a:solidFill>
+                <a:latin typeface="Aptos" pitchFamily="34" charset="0"/>
+                <a:ea typeface="Aptos" pitchFamily="34" charset="-122"/>
+                <a:cs typeface="Aptos" pitchFamily="34" charset="-120"/>
+              </a:rPr>
+              <a:t>Tool selection cues</a:t>
+            </a:r>
+            <a:endParaRPr lang="en-US" sz="1300" dirty="0"/>
+          </a:p>
+        </p:txBody>
+      </p:sp>
+      <p:sp>
+        <p:nvSpPr>
+          <p:cNvPr id="15" name="Text 13"/>
+          <p:cNvSpPr/>
+          <p:nvPr/>
+        </p:nvSpPr>
+        <p:spPr>
+          <a:xfrm>
+            <a:off x="8229600" y="4306824"/>
+            <a:ext cx="2679192" cy="941832"/>
+          </a:xfrm>
+          <a:prstGeom prst="rect">
+            <a:avLst/>
+          </a:prstGeom>
+          <a:noFill/>
+          <a:ln/>
+        </p:spPr>
+        <p:txBody>
+          <a:bodyPr wrap="square" lIns="254" tIns="254" rIns="254" bIns="254" rtlCol="0" anchor="t">
             <a:normAutofit/>
           </a:bodyPr>
           <a:lstStyle/>
           <a:p>
-            <a:pPr algn="ctr" indent="0" marL="0">
-              <a:buNone/>
-            </a:pPr>
-            <a:r>
-              <a:rPr lang="en-US" sz="1500" b="1" dirty="0">
-                <a:solidFill>
-                  <a:srgbClr val="FFFFFF"/>
-                </a:solidFill>
-                <a:latin typeface="Aptos" pitchFamily="34" charset="0"/>
-                <a:ea typeface="Aptos" pitchFamily="34" charset="-122"/>
-                <a:cs typeface="Aptos" pitchFamily="34" charset="-120"/>
-              </a:rPr>
-              <a:t>Concept</a:t>
-            </a:r>
-            <a:endParaRPr lang="en-US" sz="1500" dirty="0"/>
-          </a:p>
-        </p:txBody>
-      </p:sp>
-      <p:sp>
-        <p:nvSpPr>
-          <p:cNvPr id="15" name="Shape 13"/>
-          <p:cNvSpPr/>
-          <p:nvPr/>
-        </p:nvSpPr>
-        <p:spPr>
-          <a:xfrm>
-            <a:off x="9046464" y="3977640"/>
-            <a:ext cx="972312" cy="749808"/>
-          </a:xfrm>
-          <a:prstGeom prst="roundRect">
-            <a:avLst>
-              <a:gd name="adj" fmla="val 14634"/>
-            </a:avLst>
-          </a:prstGeom>
-          <a:solidFill>
-            <a:srgbClr val="2F8A28"/>
-          </a:solidFill>
-          <a:ln w="12700">
-            <a:solidFill>
-              <a:srgbClr val="2F8A28"/>
-            </a:solidFill>
-            <a:prstDash val="solid"/>
-          </a:ln>
-        </p:spPr>
-      </p:sp>
-      <p:sp>
-        <p:nvSpPr>
-          <p:cNvPr id="16" name="Text 14"/>
-          <p:cNvSpPr/>
-          <p:nvPr/>
-        </p:nvSpPr>
-        <p:spPr>
-          <a:xfrm>
-            <a:off x="9119616" y="4169664"/>
-            <a:ext cx="826008" cy="310896"/>
-          </a:xfrm>
-          <a:prstGeom prst="rect">
-            <a:avLst/>
-          </a:prstGeom>
-          <a:noFill/>
-          <a:ln/>
-        </p:spPr>
-        <p:txBody>
-          <a:bodyPr wrap="square" lIns="0" tIns="0" rIns="0" bIns="0" rtlCol="0" anchor="ctr">
-            <a:normAutofit/>
-          </a:bodyPr>
-          <a:lstStyle/>
-          <a:p>
-            <a:pPr algn="ctr" indent="0" marL="0">
-              <a:buNone/>
-            </a:pPr>
-            <a:r>
-              <a:rPr lang="en-US" sz="1500" b="1" dirty="0">
-                <a:solidFill>
-                  <a:srgbClr val="FFFFFF"/>
-                </a:solidFill>
-                <a:latin typeface="Aptos" pitchFamily="34" charset="0"/>
-                <a:ea typeface="Aptos" pitchFamily="34" charset="-122"/>
-                <a:cs typeface="Aptos" pitchFamily="34" charset="-120"/>
-              </a:rPr>
-              <a:t>Tool</a:t>
-            </a:r>
-            <a:endParaRPr lang="en-US" sz="1500" dirty="0"/>
-          </a:p>
-        </p:txBody>
-      </p:sp>
-      <p:sp>
-        <p:nvSpPr>
-          <p:cNvPr id="17" name="Shape 15"/>
-          <p:cNvSpPr/>
-          <p:nvPr/>
-        </p:nvSpPr>
-        <p:spPr>
-          <a:xfrm>
-            <a:off x="10274808" y="3977640"/>
-            <a:ext cx="972312" cy="749808"/>
-          </a:xfrm>
-          <a:prstGeom prst="roundRect">
-            <a:avLst>
-              <a:gd name="adj" fmla="val 14634"/>
-            </a:avLst>
-          </a:prstGeom>
-          <a:solidFill>
-            <a:srgbClr val="D69A2D"/>
-          </a:solidFill>
-          <a:ln w="12700">
-            <a:solidFill>
-              <a:srgbClr val="D69A2D"/>
-            </a:solidFill>
-            <a:prstDash val="solid"/>
-          </a:ln>
-        </p:spPr>
-      </p:sp>
-      <p:sp>
-        <p:nvSpPr>
-          <p:cNvPr id="18" name="Text 16"/>
-          <p:cNvSpPr/>
-          <p:nvPr/>
-        </p:nvSpPr>
-        <p:spPr>
-          <a:xfrm>
-            <a:off x="10347960" y="4169664"/>
-            <a:ext cx="826008" cy="310896"/>
-          </a:xfrm>
-          <a:prstGeom prst="rect">
-            <a:avLst/>
-          </a:prstGeom>
-          <a:noFill/>
-          <a:ln/>
-        </p:spPr>
-        <p:txBody>
-          <a:bodyPr wrap="square" lIns="0" tIns="0" rIns="0" bIns="0" rtlCol="0" anchor="ctr">
-            <a:normAutofit/>
-          </a:bodyPr>
-          <a:lstStyle/>
-          <a:p>
-            <a:pPr algn="ctr" indent="0" marL="0">
-              <a:buNone/>
-            </a:pPr>
-            <a:r>
-              <a:rPr lang="en-US" sz="1500" b="1" dirty="0">
-                <a:solidFill>
-                  <a:srgbClr val="FFFFFF"/>
-                </a:solidFill>
-                <a:latin typeface="Aptos" pitchFamily="34" charset="0"/>
-                <a:ea typeface="Aptos" pitchFamily="34" charset="-122"/>
-                <a:cs typeface="Aptos" pitchFamily="34" charset="-120"/>
-              </a:rPr>
-              <a:t>Artifact</a:t>
-            </a:r>
-            <a:endParaRPr lang="en-US" sz="1500" dirty="0"/>
+            <a:r>
+              <a:rPr lang="en-US" sz="1380" dirty="0">
+                <a:solidFill>
+                  <a:srgbClr val="17364A"/>
+                </a:solidFill>
+                <a:latin typeface="Aptos" pitchFamily="34" charset="0"/>
+                <a:ea typeface="Aptos" pitchFamily="34" charset="-122"/>
+                <a:cs typeface="Aptos" pitchFamily="34" charset="-120"/>
+              </a:rPr>
+              <a:t>Use a tool when no comparable local process exists.</a:t>
+            </a:r>
+            <a:endParaRPr lang="en-US" sz="1380" dirty="0"/>
+          </a:p>
+          <a:p>
+            <a:r>
+              <a:rPr lang="en-US" sz="1380" dirty="0">
+                <a:solidFill>
+                  <a:srgbClr val="17364A"/>
+                </a:solidFill>
+                <a:latin typeface="Aptos" pitchFamily="34" charset="0"/>
+                <a:ea typeface="Aptos" pitchFamily="34" charset="-122"/>
+                <a:cs typeface="Aptos" pitchFamily="34" charset="-120"/>
+              </a:rPr>
+              <a:t>Adapt existing department templates when they already fit the purpose.</a:t>
+            </a:r>
+            <a:endParaRPr lang="en-US" sz="1380" dirty="0"/>
+          </a:p>
+          <a:p>
+            <a:r>
+              <a:rPr lang="en-US" sz="1380" dirty="0">
+                <a:solidFill>
+                  <a:srgbClr val="17364A"/>
+                </a:solidFill>
+                <a:latin typeface="Aptos" pitchFamily="34" charset="0"/>
+                <a:ea typeface="Aptos" pitchFamily="34" charset="-122"/>
+                <a:cs typeface="Aptos" pitchFamily="34" charset="-120"/>
+              </a:rPr>
+              <a:t>Save the completed artifact as evidence of the decision.</a:t>
+            </a:r>
+            <a:endParaRPr lang="en-US" sz="1380" dirty="0"/>
           </a:p>
         </p:txBody>
       </p:sp>
@@ -15411,13 +14937,11 @@
             </a:avLst>
           </a:prstGeom>
           <a:solidFill>
-            <a:srgbClr val="FFFFFF">
-              <a:alpha val="88000"/>
-            </a:srgbClr>
+            <a:srgbClr val="FFFFFF"/>
           </a:solidFill>
           <a:ln w="12700">
             <a:solidFill>
-              <a:srgbClr val="D6E8F2"/>
+              <a:srgbClr val="B9D7E6"/>
             </a:solidFill>
             <a:prstDash val="solid"/>
           </a:ln>
@@ -15425,119 +14949,112 @@
       </p:sp>
       <p:sp>
         <p:nvSpPr>
-          <p:cNvPr id="14" name="Shape 12"/>
-          <p:cNvSpPr/>
-          <p:nvPr/>
-        </p:nvSpPr>
-        <p:spPr>
-          <a:xfrm>
-            <a:off x="8074152" y="3291840"/>
-            <a:ext cx="2596896" cy="749808"/>
-          </a:xfrm>
-          <a:prstGeom prst="rect">
-            <a:avLst/>
-          </a:prstGeom>
-          <a:solidFill>
-            <a:srgbClr val="EAF6F8"/>
-          </a:solidFill>
-          <a:ln w="12700">
-            <a:solidFill>
-              <a:srgbClr val="8ABBD8"/>
-            </a:solidFill>
-            <a:prstDash val="solid"/>
-          </a:ln>
-        </p:spPr>
-      </p:sp>
-      <p:sp>
-        <p:nvSpPr>
-          <p:cNvPr id="15" name="Shape 13"/>
-          <p:cNvSpPr/>
-          <p:nvPr/>
-        </p:nvSpPr>
-        <p:spPr>
-          <a:xfrm>
-            <a:off x="8202168" y="3721608"/>
-            <a:ext cx="2340864" cy="0"/>
-          </a:xfrm>
-          <a:prstGeom prst="line">
-            <a:avLst/>
-          </a:prstGeom>
-          <a:noFill/>
-          <a:ln w="19050">
-            <a:solidFill>
-              <a:srgbClr val="0068B7"/>
-            </a:solidFill>
-            <a:prstDash val="solid"/>
-          </a:ln>
-        </p:spPr>
+          <p:cNvPr id="14" name="Text 12"/>
+          <p:cNvSpPr/>
+          <p:nvPr/>
+        </p:nvSpPr>
+        <p:spPr>
+          <a:xfrm>
+            <a:off x="7799832" y="2935224"/>
+            <a:ext cx="3145536" cy="256032"/>
+          </a:xfrm>
+          <a:prstGeom prst="rect">
+            <a:avLst/>
+          </a:prstGeom>
+          <a:noFill/>
+          <a:ln/>
+        </p:spPr>
+        <p:txBody>
+          <a:bodyPr wrap="square" lIns="0" tIns="0" rIns="0" bIns="0" rtlCol="0" anchor="ctr"/>
+          <a:lstStyle/>
+          <a:p>
+            <a:pPr indent="0" marL="0">
+              <a:buNone/>
+            </a:pPr>
+            <a:r>
+              <a:rPr lang="en-US" sz="1300" b="1" dirty="0">
+                <a:solidFill>
+                  <a:srgbClr val="0068B7"/>
+                </a:solidFill>
+                <a:latin typeface="Aptos" pitchFamily="34" charset="0"/>
+                <a:ea typeface="Aptos" pitchFamily="34" charset="-122"/>
+                <a:cs typeface="Aptos" pitchFamily="34" charset="-120"/>
+              </a:rPr>
+              <a:t>Concept checkpoints</a:t>
+            </a:r>
+            <a:endParaRPr lang="en-US" sz="1300" dirty="0"/>
+          </a:p>
+        </p:txBody>
+      </p:sp>
+      <p:sp>
+        <p:nvSpPr>
+          <p:cNvPr id="15" name="Text 13"/>
+          <p:cNvSpPr/>
+          <p:nvPr/>
+        </p:nvSpPr>
+        <p:spPr>
+          <a:xfrm>
+            <a:off x="7818120" y="3300984"/>
+            <a:ext cx="3090672" cy="877824"/>
+          </a:xfrm>
+          <a:prstGeom prst="rect">
+            <a:avLst/>
+          </a:prstGeom>
+          <a:noFill/>
+          <a:ln/>
+        </p:spPr>
+        <p:txBody>
+          <a:bodyPr wrap="square" lIns="254" tIns="254" rIns="254" bIns="254" rtlCol="0" anchor="t">
+            <a:normAutofit/>
+          </a:bodyPr>
+          <a:lstStyle/>
+          <a:p>
+            <a:r>
+              <a:rPr lang="en-US" sz="1380" dirty="0">
+                <a:solidFill>
+                  <a:srgbClr val="17364A"/>
+                </a:solidFill>
+                <a:latin typeface="Aptos" pitchFamily="34" charset="0"/>
+                <a:ea typeface="Aptos" pitchFamily="34" charset="-122"/>
+                <a:cs typeface="Aptos" pitchFamily="34" charset="-120"/>
+              </a:rPr>
+              <a:t>Describe an AI use case in plain language using the public health workflow, users, data,.</a:t>
+            </a:r>
+            <a:endParaRPr lang="en-US" sz="1380" dirty="0"/>
+          </a:p>
+          <a:p>
+            <a:r>
+              <a:rPr lang="en-US" sz="1380" dirty="0">
+                <a:solidFill>
+                  <a:srgbClr val="17364A"/>
+                </a:solidFill>
+                <a:latin typeface="Aptos" pitchFamily="34" charset="0"/>
+                <a:ea typeface="Aptos" pitchFamily="34" charset="-122"/>
+                <a:cs typeface="Aptos" pitchFamily="34" charset="-120"/>
+              </a:rPr>
+              <a:t>Distinguish between low-risk, moderate-risk, and high-risk AI use cases based on data.</a:t>
+            </a:r>
+            <a:endParaRPr lang="en-US" sz="1380" dirty="0"/>
+          </a:p>
+          <a:p>
+            <a:r>
+              <a:rPr lang="en-US" sz="1380" dirty="0">
+                <a:solidFill>
+                  <a:srgbClr val="17364A"/>
+                </a:solidFill>
+                <a:latin typeface="Aptos" pitchFamily="34" charset="0"/>
+                <a:ea typeface="Aptos" pitchFamily="34" charset="-122"/>
+                <a:cs typeface="Aptos" pitchFamily="34" charset="-120"/>
+              </a:rPr>
+              <a:t>Identify when a use case should be routed to privacy, legal, IT, cybersecurity, equity,.</a:t>
+            </a:r>
+            <a:endParaRPr lang="en-US" sz="1380" dirty="0"/>
+          </a:p>
+        </p:txBody>
       </p:sp>
       <p:sp>
         <p:nvSpPr>
           <p:cNvPr id="16" name="Shape 14"/>
-          <p:cNvSpPr/>
-          <p:nvPr/>
-        </p:nvSpPr>
-        <p:spPr>
-          <a:xfrm>
-            <a:off x="9198864" y="4206240"/>
-            <a:ext cx="347472" cy="347472"/>
-          </a:xfrm>
-          <a:prstGeom prst="ellipse">
-            <a:avLst/>
-          </a:prstGeom>
-          <a:solidFill>
-            <a:srgbClr val="2F8A28"/>
-          </a:solidFill>
-          <a:ln w="12700">
-            <a:solidFill>
-              <a:srgbClr val="2F8A28"/>
-            </a:solidFill>
-            <a:prstDash val="solid"/>
-          </a:ln>
-        </p:spPr>
-      </p:sp>
-      <p:sp>
-        <p:nvSpPr>
-          <p:cNvPr id="17" name="Text 15"/>
-          <p:cNvSpPr/>
-          <p:nvPr/>
-        </p:nvSpPr>
-        <p:spPr>
-          <a:xfrm>
-            <a:off x="7909560" y="3977640"/>
-            <a:ext cx="2926080" cy="182880"/>
-          </a:xfrm>
-          <a:prstGeom prst="rect">
-            <a:avLst/>
-          </a:prstGeom>
-          <a:noFill/>
-          <a:ln/>
-        </p:spPr>
-        <p:txBody>
-          <a:bodyPr wrap="square" lIns="0" tIns="0" rIns="0" bIns="0" rtlCol="0" anchor="ctr"/>
-          <a:lstStyle/>
-          <a:p>
-            <a:pPr algn="ctr" indent="0" marL="0">
-              <a:buNone/>
-            </a:pPr>
-            <a:r>
-              <a:rPr lang="en-US" sz="1000" dirty="0">
-                <a:solidFill>
-                  <a:srgbClr val="003A63"/>
-                </a:solidFill>
-                <a:latin typeface="Aptos" pitchFamily="34" charset="0"/>
-                <a:ea typeface="Aptos" pitchFamily="34" charset="-122"/>
-                <a:cs typeface="Aptos" pitchFamily="34" charset="-120"/>
-              </a:rPr>
-              <a:t>Concept to action</a:t>
-            </a:r>
-            <a:endParaRPr lang="en-US" sz="1000" dirty="0"/>
-          </a:p>
-        </p:txBody>
-      </p:sp>
-      <p:sp>
-        <p:nvSpPr>
-          <p:cNvPr id="18" name="Shape 16"/>
           <p:cNvSpPr/>
           <p:nvPr/>
         </p:nvSpPr>
@@ -15564,7 +15081,7 @@
       </p:sp>
       <p:sp>
         <p:nvSpPr>
-          <p:cNvPr id="19" name="Text 17"/>
+          <p:cNvPr id="17" name="Text 15"/>
           <p:cNvSpPr/>
           <p:nvPr/>
         </p:nvSpPr>
@@ -15603,7 +15120,7 @@
       </p:sp>
       <p:sp>
         <p:nvSpPr>
-          <p:cNvPr id="20" name="Text 18"/>
+          <p:cNvPr id="18" name="Text 16"/>
           <p:cNvSpPr/>
           <p:nvPr/>
         </p:nvSpPr>
@@ -16111,13 +15628,11 @@
             </a:avLst>
           </a:prstGeom>
           <a:solidFill>
-            <a:srgbClr val="FFFFFF">
-              <a:alpha val="88000"/>
-            </a:srgbClr>
+            <a:srgbClr val="FFFFFF"/>
           </a:solidFill>
           <a:ln w="12700">
             <a:solidFill>
-              <a:srgbClr val="D6E8F2"/>
+              <a:srgbClr val="B9D7E6"/>
             </a:solidFill>
             <a:prstDash val="solid"/>
           </a:ln>
@@ -16125,119 +15640,112 @@
       </p:sp>
       <p:sp>
         <p:nvSpPr>
-          <p:cNvPr id="14" name="Shape 12"/>
-          <p:cNvSpPr/>
-          <p:nvPr/>
-        </p:nvSpPr>
-        <p:spPr>
-          <a:xfrm>
-            <a:off x="8074152" y="3291840"/>
-            <a:ext cx="2596896" cy="749808"/>
-          </a:xfrm>
-          <a:prstGeom prst="rect">
-            <a:avLst/>
-          </a:prstGeom>
-          <a:solidFill>
-            <a:srgbClr val="EAF6F8"/>
-          </a:solidFill>
-          <a:ln w="12700">
-            <a:solidFill>
-              <a:srgbClr val="8ABBD8"/>
-            </a:solidFill>
-            <a:prstDash val="solid"/>
-          </a:ln>
-        </p:spPr>
-      </p:sp>
-      <p:sp>
-        <p:nvSpPr>
-          <p:cNvPr id="15" name="Shape 13"/>
-          <p:cNvSpPr/>
-          <p:nvPr/>
-        </p:nvSpPr>
-        <p:spPr>
-          <a:xfrm>
-            <a:off x="8202168" y="3721608"/>
-            <a:ext cx="2340864" cy="0"/>
-          </a:xfrm>
-          <a:prstGeom prst="line">
-            <a:avLst/>
-          </a:prstGeom>
-          <a:noFill/>
-          <a:ln w="19050">
-            <a:solidFill>
-              <a:srgbClr val="0068B7"/>
-            </a:solidFill>
-            <a:prstDash val="solid"/>
-          </a:ln>
-        </p:spPr>
+          <p:cNvPr id="14" name="Text 12"/>
+          <p:cNvSpPr/>
+          <p:nvPr/>
+        </p:nvSpPr>
+        <p:spPr>
+          <a:xfrm>
+            <a:off x="7799832" y="2935224"/>
+            <a:ext cx="3145536" cy="256032"/>
+          </a:xfrm>
+          <a:prstGeom prst="rect">
+            <a:avLst/>
+          </a:prstGeom>
+          <a:noFill/>
+          <a:ln/>
+        </p:spPr>
+        <p:txBody>
+          <a:bodyPr wrap="square" lIns="0" tIns="0" rIns="0" bIns="0" rtlCol="0" anchor="ctr"/>
+          <a:lstStyle/>
+          <a:p>
+            <a:pPr indent="0" marL="0">
+              <a:buNone/>
+            </a:pPr>
+            <a:r>
+              <a:rPr lang="en-US" sz="1300" b="1" dirty="0">
+                <a:solidFill>
+                  <a:srgbClr val="0068B7"/>
+                </a:solidFill>
+                <a:latin typeface="Aptos" pitchFamily="34" charset="0"/>
+                <a:ea typeface="Aptos" pitchFamily="34" charset="-122"/>
+                <a:cs typeface="Aptos" pitchFamily="34" charset="-120"/>
+              </a:rPr>
+              <a:t>Concept checkpoints</a:t>
+            </a:r>
+            <a:endParaRPr lang="en-US" sz="1300" dirty="0"/>
+          </a:p>
+        </p:txBody>
+      </p:sp>
+      <p:sp>
+        <p:nvSpPr>
+          <p:cNvPr id="15" name="Text 13"/>
+          <p:cNvSpPr/>
+          <p:nvPr/>
+        </p:nvSpPr>
+        <p:spPr>
+          <a:xfrm>
+            <a:off x="7818120" y="3300984"/>
+            <a:ext cx="3090672" cy="877824"/>
+          </a:xfrm>
+          <a:prstGeom prst="rect">
+            <a:avLst/>
+          </a:prstGeom>
+          <a:noFill/>
+          <a:ln/>
+        </p:spPr>
+        <p:txBody>
+          <a:bodyPr wrap="square" lIns="254" tIns="254" rIns="254" bIns="254" rtlCol="0" anchor="t">
+            <a:normAutofit/>
+          </a:bodyPr>
+          <a:lstStyle/>
+          <a:p>
+            <a:r>
+              <a:rPr lang="en-US" sz="1380" dirty="0">
+                <a:solidFill>
+                  <a:srgbClr val="17364A"/>
+                </a:solidFill>
+                <a:latin typeface="Aptos" pitchFamily="34" charset="0"/>
+                <a:ea typeface="Aptos" pitchFamily="34" charset="-122"/>
+                <a:cs typeface="Aptos" pitchFamily="34" charset="-120"/>
+              </a:rPr>
+              <a:t>AI use case intake is the structured process of receiving, describing, screening, and.</a:t>
+            </a:r>
+            <a:endParaRPr lang="en-US" sz="1380" dirty="0"/>
+          </a:p>
+          <a:p>
+            <a:r>
+              <a:rPr lang="en-US" sz="1380" dirty="0">
+                <a:solidFill>
+                  <a:srgbClr val="17364A"/>
+                </a:solidFill>
+                <a:latin typeface="Aptos" pitchFamily="34" charset="0"/>
+                <a:ea typeface="Aptos" pitchFamily="34" charset="-122"/>
+                <a:cs typeface="Aptos" pitchFamily="34" charset="-120"/>
+              </a:rPr>
+              <a:t>In public health, this step is essential because AI ideas often begin as informal.</a:t>
+            </a:r>
+            <a:endParaRPr lang="en-US" sz="1380" dirty="0"/>
+          </a:p>
+          <a:p>
+            <a:r>
+              <a:rPr lang="en-US" sz="1380" dirty="0">
+                <a:solidFill>
+                  <a:srgbClr val="17364A"/>
+                </a:solidFill>
+                <a:latin typeface="Aptos" pitchFamily="34" charset="0"/>
+                <a:ea typeface="Aptos" pitchFamily="34" charset="-122"/>
+                <a:cs typeface="Aptos" pitchFamily="34" charset="-120"/>
+              </a:rPr>
+              <a:t>Without a common intake process, agencies may approve low-value or high-risk ideas too.</a:t>
+            </a:r>
+            <a:endParaRPr lang="en-US" sz="1380" dirty="0"/>
+          </a:p>
+        </p:txBody>
       </p:sp>
       <p:sp>
         <p:nvSpPr>
           <p:cNvPr id="16" name="Shape 14"/>
-          <p:cNvSpPr/>
-          <p:nvPr/>
-        </p:nvSpPr>
-        <p:spPr>
-          <a:xfrm>
-            <a:off x="9198864" y="4206240"/>
-            <a:ext cx="347472" cy="347472"/>
-          </a:xfrm>
-          <a:prstGeom prst="ellipse">
-            <a:avLst/>
-          </a:prstGeom>
-          <a:solidFill>
-            <a:srgbClr val="2F8A28"/>
-          </a:solidFill>
-          <a:ln w="12700">
-            <a:solidFill>
-              <a:srgbClr val="2F8A28"/>
-            </a:solidFill>
-            <a:prstDash val="solid"/>
-          </a:ln>
-        </p:spPr>
-      </p:sp>
-      <p:sp>
-        <p:nvSpPr>
-          <p:cNvPr id="17" name="Text 15"/>
-          <p:cNvSpPr/>
-          <p:nvPr/>
-        </p:nvSpPr>
-        <p:spPr>
-          <a:xfrm>
-            <a:off x="7909560" y="3977640"/>
-            <a:ext cx="2926080" cy="182880"/>
-          </a:xfrm>
-          <a:prstGeom prst="rect">
-            <a:avLst/>
-          </a:prstGeom>
-          <a:noFill/>
-          <a:ln/>
-        </p:spPr>
-        <p:txBody>
-          <a:bodyPr wrap="square" lIns="0" tIns="0" rIns="0" bIns="0" rtlCol="0" anchor="ctr"/>
-          <a:lstStyle/>
-          <a:p>
-            <a:pPr algn="ctr" indent="0" marL="0">
-              <a:buNone/>
-            </a:pPr>
-            <a:r>
-              <a:rPr lang="en-US" sz="1000" dirty="0">
-                <a:solidFill>
-                  <a:srgbClr val="003A63"/>
-                </a:solidFill>
-                <a:latin typeface="Aptos" pitchFamily="34" charset="0"/>
-                <a:ea typeface="Aptos" pitchFamily="34" charset="-122"/>
-                <a:cs typeface="Aptos" pitchFamily="34" charset="-120"/>
-              </a:rPr>
-              <a:t>Concept to action</a:t>
-            </a:r>
-            <a:endParaRPr lang="en-US" sz="1000" dirty="0"/>
-          </a:p>
-        </p:txBody>
-      </p:sp>
-      <p:sp>
-        <p:nvSpPr>
-          <p:cNvPr id="18" name="Shape 16"/>
           <p:cNvSpPr/>
           <p:nvPr/>
         </p:nvSpPr>
@@ -16264,7 +15772,7 @@
       </p:sp>
       <p:sp>
         <p:nvSpPr>
-          <p:cNvPr id="19" name="Text 17"/>
+          <p:cNvPr id="17" name="Text 15"/>
           <p:cNvSpPr/>
           <p:nvPr/>
         </p:nvSpPr>
@@ -16303,7 +15811,7 @@
       </p:sp>
       <p:sp>
         <p:nvSpPr>
-          <p:cNvPr id="20" name="Text 18"/>
+          <p:cNvPr id="18" name="Text 16"/>
           <p:cNvSpPr/>
           <p:nvPr/>
         </p:nvSpPr>
@@ -16811,13 +16319,11 @@
             </a:avLst>
           </a:prstGeom>
           <a:solidFill>
-            <a:srgbClr val="FFFFFF">
-              <a:alpha val="88000"/>
-            </a:srgbClr>
+            <a:srgbClr val="FFFFFF"/>
           </a:solidFill>
           <a:ln w="12700">
             <a:solidFill>
-              <a:srgbClr val="D6E8F2"/>
+              <a:srgbClr val="B9D7E6"/>
             </a:solidFill>
             <a:prstDash val="solid"/>
           </a:ln>
@@ -16825,190 +16331,112 @@
       </p:sp>
       <p:sp>
         <p:nvSpPr>
-          <p:cNvPr id="14" name="Shape 12"/>
-          <p:cNvSpPr/>
-          <p:nvPr/>
-        </p:nvSpPr>
-        <p:spPr>
-          <a:xfrm>
-            <a:off x="7891272" y="3108960"/>
-            <a:ext cx="566928" cy="566928"/>
-          </a:xfrm>
-          <a:prstGeom prst="ellipse">
-            <a:avLst/>
-          </a:prstGeom>
-          <a:solidFill>
-            <a:srgbClr val="0068B7"/>
-          </a:solidFill>
-          <a:ln w="12700">
-            <a:solidFill>
-              <a:srgbClr val="0068B7"/>
-            </a:solidFill>
-            <a:prstDash val="solid"/>
-          </a:ln>
-        </p:spPr>
-      </p:sp>
-      <p:sp>
-        <p:nvSpPr>
-          <p:cNvPr id="15" name="Shape 13"/>
-          <p:cNvSpPr/>
-          <p:nvPr/>
-        </p:nvSpPr>
-        <p:spPr>
-          <a:xfrm>
-            <a:off x="10287000" y="3108960"/>
-            <a:ext cx="566928" cy="566928"/>
-          </a:xfrm>
-          <a:prstGeom prst="ellipse">
-            <a:avLst/>
-          </a:prstGeom>
-          <a:solidFill>
-            <a:srgbClr val="2F8A28"/>
-          </a:solidFill>
-          <a:ln w="12700">
-            <a:solidFill>
-              <a:srgbClr val="2F8A28"/>
-            </a:solidFill>
-            <a:prstDash val="solid"/>
-          </a:ln>
-        </p:spPr>
+          <p:cNvPr id="14" name="Text 12"/>
+          <p:cNvSpPr/>
+          <p:nvPr/>
+        </p:nvSpPr>
+        <p:spPr>
+          <a:xfrm>
+            <a:off x="7799832" y="2935224"/>
+            <a:ext cx="3145536" cy="256032"/>
+          </a:xfrm>
+          <a:prstGeom prst="rect">
+            <a:avLst/>
+          </a:prstGeom>
+          <a:noFill/>
+          <a:ln/>
+        </p:spPr>
+        <p:txBody>
+          <a:bodyPr wrap="square" lIns="0" tIns="0" rIns="0" bIns="0" rtlCol="0" anchor="ctr"/>
+          <a:lstStyle/>
+          <a:p>
+            <a:pPr indent="0" marL="0">
+              <a:buNone/>
+            </a:pPr>
+            <a:r>
+              <a:rPr lang="en-US" sz="1300" b="1" dirty="0">
+                <a:solidFill>
+                  <a:srgbClr val="0068B7"/>
+                </a:solidFill>
+                <a:latin typeface="Aptos" pitchFamily="34" charset="0"/>
+                <a:ea typeface="Aptos" pitchFamily="34" charset="-122"/>
+                <a:cs typeface="Aptos" pitchFamily="34" charset="-120"/>
+              </a:rPr>
+              <a:t>Concept checkpoints</a:t>
+            </a:r>
+            <a:endParaRPr lang="en-US" sz="1300" dirty="0"/>
+          </a:p>
+        </p:txBody>
+      </p:sp>
+      <p:sp>
+        <p:nvSpPr>
+          <p:cNvPr id="15" name="Text 13"/>
+          <p:cNvSpPr/>
+          <p:nvPr/>
+        </p:nvSpPr>
+        <p:spPr>
+          <a:xfrm>
+            <a:off x="7818120" y="3300984"/>
+            <a:ext cx="3090672" cy="877824"/>
+          </a:xfrm>
+          <a:prstGeom prst="rect">
+            <a:avLst/>
+          </a:prstGeom>
+          <a:noFill/>
+          <a:ln/>
+        </p:spPr>
+        <p:txBody>
+          <a:bodyPr wrap="square" lIns="254" tIns="254" rIns="254" bIns="254" rtlCol="0" anchor="t">
+            <a:normAutofit/>
+          </a:bodyPr>
+          <a:lstStyle/>
+          <a:p>
+            <a:r>
+              <a:rPr lang="en-US" sz="1380" dirty="0">
+                <a:solidFill>
+                  <a:srgbClr val="17364A"/>
+                </a:solidFill>
+                <a:latin typeface="Aptos" pitchFamily="34" charset="0"/>
+                <a:ea typeface="Aptos" pitchFamily="34" charset="-122"/>
+                <a:cs typeface="Aptos" pitchFamily="34" charset="-120"/>
+              </a:rPr>
+              <a:t>It is not legal advice and does not replace review by agency legal counsel, privacy.</a:t>
+            </a:r>
+            <a:endParaRPr lang="en-US" sz="1380" dirty="0"/>
+          </a:p>
+          <a:p>
+            <a:r>
+              <a:rPr lang="en-US" sz="1380" dirty="0">
+                <a:solidFill>
+                  <a:srgbClr val="17364A"/>
+                </a:solidFill>
+                <a:latin typeface="Aptos" pitchFamily="34" charset="0"/>
+                <a:ea typeface="Aptos" pitchFamily="34" charset="-122"/>
+                <a:cs typeface="Aptos" pitchFamily="34" charset="-120"/>
+              </a:rPr>
+              <a:t>Requirements may vary by state, locality, territory, Tribe, agency, funding source,.</a:t>
+            </a:r>
+            <a:endParaRPr lang="en-US" sz="1380" dirty="0"/>
+          </a:p>
+          <a:p>
+            <a:r>
+              <a:rPr lang="en-US" sz="1380" dirty="0">
+                <a:solidFill>
+                  <a:srgbClr val="17364A"/>
+                </a:solidFill>
+                <a:latin typeface="Aptos" pitchFamily="34" charset="0"/>
+                <a:ea typeface="Aptos" pitchFamily="34" charset="-122"/>
+                <a:cs typeface="Aptos" pitchFamily="34" charset="-120"/>
+              </a:rPr>
+              <a:t>Learners should use this module to identify the issues that require review and should.</a:t>
+            </a:r>
+            <a:endParaRPr lang="en-US" sz="1380" dirty="0"/>
+          </a:p>
+        </p:txBody>
       </p:sp>
       <p:sp>
         <p:nvSpPr>
           <p:cNvPr id="16" name="Shape 14"/>
-          <p:cNvSpPr/>
-          <p:nvPr/>
-        </p:nvSpPr>
-        <p:spPr>
-          <a:xfrm>
-            <a:off x="9089136" y="3456432"/>
-            <a:ext cx="566928" cy="566928"/>
-          </a:xfrm>
-          <a:prstGeom prst="ellipse">
-            <a:avLst/>
-          </a:prstGeom>
-          <a:solidFill>
-            <a:srgbClr val="6A4CA3"/>
-          </a:solidFill>
-          <a:ln w="12700">
-            <a:solidFill>
-              <a:srgbClr val="6A4CA3"/>
-            </a:solidFill>
-            <a:prstDash val="solid"/>
-          </a:ln>
-        </p:spPr>
-      </p:sp>
-      <p:sp>
-        <p:nvSpPr>
-          <p:cNvPr id="17" name="Shape 15"/>
-          <p:cNvSpPr/>
-          <p:nvPr/>
-        </p:nvSpPr>
-        <p:spPr>
-          <a:xfrm>
-            <a:off x="8385048" y="3419856"/>
-            <a:ext cx="1975104" cy="0"/>
-          </a:xfrm>
-          <a:prstGeom prst="line">
-            <a:avLst/>
-          </a:prstGeom>
-          <a:noFill/>
-          <a:ln w="25400">
-            <a:solidFill>
-              <a:srgbClr val="8ABBD8"/>
-            </a:solidFill>
-            <a:prstDash val="solid"/>
-          </a:ln>
-        </p:spPr>
-      </p:sp>
-      <p:sp>
-        <p:nvSpPr>
-          <p:cNvPr id="18" name="Shape 16"/>
-          <p:cNvSpPr/>
-          <p:nvPr/>
-        </p:nvSpPr>
-        <p:spPr>
-          <a:xfrm>
-            <a:off x="8202168" y="3630168"/>
-            <a:ext cx="1170432" cy="118872"/>
-          </a:xfrm>
-          <a:prstGeom prst="line">
-            <a:avLst/>
-          </a:prstGeom>
-          <a:noFill/>
-          <a:ln w="25400">
-            <a:solidFill>
-              <a:srgbClr val="8ABBD8"/>
-            </a:solidFill>
-            <a:prstDash val="solid"/>
-          </a:ln>
-        </p:spPr>
-      </p:sp>
-      <p:sp>
-        <p:nvSpPr>
-          <p:cNvPr id="19" name="Shape 17"/>
-          <p:cNvSpPr/>
-          <p:nvPr/>
-        </p:nvSpPr>
-        <p:spPr>
-          <a:xfrm>
-            <a:off x="10543032" y="3630168"/>
-            <a:ext cx="-1170432" cy="118872"/>
-          </a:xfrm>
-          <a:prstGeom prst="line">
-            <a:avLst/>
-          </a:prstGeom>
-          <a:noFill/>
-          <a:ln w="25400">
-            <a:solidFill>
-              <a:srgbClr val="8ABBD8"/>
-            </a:solidFill>
-            <a:prstDash val="solid"/>
-          </a:ln>
-        </p:spPr>
-      </p:sp>
-      <p:sp>
-        <p:nvSpPr>
-          <p:cNvPr id="20" name="Text 18"/>
-          <p:cNvSpPr/>
-          <p:nvPr/>
-        </p:nvSpPr>
-        <p:spPr>
-          <a:xfrm>
-            <a:off x="7863840" y="4069080"/>
-            <a:ext cx="3017520" cy="164592"/>
-          </a:xfrm>
-          <a:prstGeom prst="rect">
-            <a:avLst/>
-          </a:prstGeom>
-          <a:noFill/>
-          <a:ln/>
-        </p:spPr>
-        <p:txBody>
-          <a:bodyPr wrap="square" lIns="0" tIns="0" rIns="0" bIns="0" rtlCol="0" anchor="ctr"/>
-          <a:lstStyle/>
-          <a:p>
-            <a:pPr algn="ctr" indent="0" marL="0">
-              <a:buNone/>
-            </a:pPr>
-            <a:r>
-              <a:rPr lang="en-US" sz="900" b="1" dirty="0">
-                <a:solidFill>
-                  <a:srgbClr val="003A63"/>
-                </a:solidFill>
-                <a:latin typeface="Aptos" pitchFamily="34" charset="0"/>
-                <a:ea typeface="Aptos" pitchFamily="34" charset="-122"/>
-                <a:cs typeface="Aptos" pitchFamily="34" charset="-120"/>
-              </a:rPr>
-              <a:t>Decision rights</a:t>
-            </a:r>
-            <a:endParaRPr lang="en-US" sz="900" dirty="0"/>
-          </a:p>
-        </p:txBody>
-      </p:sp>
-      <p:sp>
-        <p:nvSpPr>
-          <p:cNvPr id="21" name="Shape 19"/>
           <p:cNvSpPr/>
           <p:nvPr/>
         </p:nvSpPr>
@@ -17035,7 +16463,7 @@
       </p:sp>
       <p:sp>
         <p:nvSpPr>
-          <p:cNvPr id="22" name="Text 20"/>
+          <p:cNvPr id="17" name="Text 15"/>
           <p:cNvSpPr/>
           <p:nvPr/>
         </p:nvSpPr>
@@ -17074,7 +16502,7 @@
       </p:sp>
       <p:sp>
         <p:nvSpPr>
-          <p:cNvPr id="23" name="Text 21"/>
+          <p:cNvPr id="18" name="Text 16"/>
           <p:cNvSpPr/>
           <p:nvPr/>
         </p:nvSpPr>
@@ -17582,13 +17010,11 @@
             </a:avLst>
           </a:prstGeom>
           <a:solidFill>
-            <a:srgbClr val="FFFFFF">
-              <a:alpha val="88000"/>
-            </a:srgbClr>
+            <a:srgbClr val="FFFFFF"/>
           </a:solidFill>
           <a:ln w="12700">
             <a:solidFill>
-              <a:srgbClr val="D6E8F2"/>
+              <a:srgbClr val="B9D7E6"/>
             </a:solidFill>
             <a:prstDash val="solid"/>
           </a:ln>
@@ -17596,119 +17022,112 @@
       </p:sp>
       <p:sp>
         <p:nvSpPr>
-          <p:cNvPr id="14" name="Shape 12"/>
-          <p:cNvSpPr/>
-          <p:nvPr/>
-        </p:nvSpPr>
-        <p:spPr>
-          <a:xfrm>
-            <a:off x="8074152" y="3291840"/>
-            <a:ext cx="2596896" cy="749808"/>
-          </a:xfrm>
-          <a:prstGeom prst="rect">
-            <a:avLst/>
-          </a:prstGeom>
-          <a:solidFill>
-            <a:srgbClr val="EAF6F8"/>
-          </a:solidFill>
-          <a:ln w="12700">
-            <a:solidFill>
-              <a:srgbClr val="8ABBD8"/>
-            </a:solidFill>
-            <a:prstDash val="solid"/>
-          </a:ln>
-        </p:spPr>
-      </p:sp>
-      <p:sp>
-        <p:nvSpPr>
-          <p:cNvPr id="15" name="Shape 13"/>
-          <p:cNvSpPr/>
-          <p:nvPr/>
-        </p:nvSpPr>
-        <p:spPr>
-          <a:xfrm>
-            <a:off x="8202168" y="3721608"/>
-            <a:ext cx="2340864" cy="0"/>
-          </a:xfrm>
-          <a:prstGeom prst="line">
-            <a:avLst/>
-          </a:prstGeom>
-          <a:noFill/>
-          <a:ln w="19050">
-            <a:solidFill>
-              <a:srgbClr val="0068B7"/>
-            </a:solidFill>
-            <a:prstDash val="solid"/>
-          </a:ln>
-        </p:spPr>
+          <p:cNvPr id="14" name="Text 12"/>
+          <p:cNvSpPr/>
+          <p:nvPr/>
+        </p:nvSpPr>
+        <p:spPr>
+          <a:xfrm>
+            <a:off x="7799832" y="2935224"/>
+            <a:ext cx="3145536" cy="256032"/>
+          </a:xfrm>
+          <a:prstGeom prst="rect">
+            <a:avLst/>
+          </a:prstGeom>
+          <a:noFill/>
+          <a:ln/>
+        </p:spPr>
+        <p:txBody>
+          <a:bodyPr wrap="square" lIns="0" tIns="0" rIns="0" bIns="0" rtlCol="0" anchor="ctr"/>
+          <a:lstStyle/>
+          <a:p>
+            <a:pPr indent="0" marL="0">
+              <a:buNone/>
+            </a:pPr>
+            <a:r>
+              <a:rPr lang="en-US" sz="1300" b="1" dirty="0">
+                <a:solidFill>
+                  <a:srgbClr val="0068B7"/>
+                </a:solidFill>
+                <a:latin typeface="Aptos" pitchFamily="34" charset="0"/>
+                <a:ea typeface="Aptos" pitchFamily="34" charset="-122"/>
+                <a:cs typeface="Aptos" pitchFamily="34" charset="-120"/>
+              </a:rPr>
+              <a:t>Concept checkpoints</a:t>
+            </a:r>
+            <a:endParaRPr lang="en-US" sz="1300" dirty="0"/>
+          </a:p>
+        </p:txBody>
+      </p:sp>
+      <p:sp>
+        <p:nvSpPr>
+          <p:cNvPr id="15" name="Text 13"/>
+          <p:cNvSpPr/>
+          <p:nvPr/>
+        </p:nvSpPr>
+        <p:spPr>
+          <a:xfrm>
+            <a:off x="7818120" y="3300984"/>
+            <a:ext cx="3090672" cy="877824"/>
+          </a:xfrm>
+          <a:prstGeom prst="rect">
+            <a:avLst/>
+          </a:prstGeom>
+          <a:noFill/>
+          <a:ln/>
+        </p:spPr>
+        <p:txBody>
+          <a:bodyPr wrap="square" lIns="254" tIns="254" rIns="254" bIns="254" rtlCol="0" anchor="t">
+            <a:normAutofit/>
+          </a:bodyPr>
+          <a:lstStyle/>
+          <a:p>
+            <a:r>
+              <a:rPr lang="en-US" sz="1380" dirty="0">
+                <a:solidFill>
+                  <a:srgbClr val="17364A"/>
+                </a:solidFill>
+                <a:latin typeface="Aptos" pitchFamily="34" charset="0"/>
+                <a:ea typeface="Aptos" pitchFamily="34" charset="-122"/>
+                <a:cs typeface="Aptos" pitchFamily="34" charset="-120"/>
+              </a:rPr>
+              <a:t>A communicable disease program wants to use generative AI to summarize case investigation.</a:t>
+            </a:r>
+            <a:endParaRPr lang="en-US" sz="1380" dirty="0"/>
+          </a:p>
+          <a:p>
+            <a:r>
+              <a:rPr lang="en-US" sz="1380" dirty="0">
+                <a:solidFill>
+                  <a:srgbClr val="17364A"/>
+                </a:solidFill>
+                <a:latin typeface="Aptos" pitchFamily="34" charset="0"/>
+                <a:ea typeface="Aptos" pitchFamily="34" charset="-122"/>
+                <a:cs typeface="Aptos" pitchFamily="34" charset="-120"/>
+              </a:rPr>
+              <a:t>Intake would document the workflow, the staff who would use the output, the source data,.</a:t>
+            </a:r>
+            <a:endParaRPr lang="en-US" sz="1380" dirty="0"/>
+          </a:p>
+          <a:p>
+            <a:r>
+              <a:rPr lang="en-US" sz="1380" dirty="0">
+                <a:solidFill>
+                  <a:srgbClr val="17364A"/>
+                </a:solidFill>
+                <a:latin typeface="Aptos" pitchFamily="34" charset="0"/>
+                <a:ea typeface="Aptos" pitchFamily="34" charset="-122"/>
+                <a:cs typeface="Aptos" pitchFamily="34" charset="-120"/>
+              </a:rPr>
+              <a:t>Triage would likely route the use case to privacy, legal, IT, epidemiology, equity, and.</a:t>
+            </a:r>
+            <a:endParaRPr lang="en-US" sz="1380" dirty="0"/>
+          </a:p>
+        </p:txBody>
       </p:sp>
       <p:sp>
         <p:nvSpPr>
           <p:cNvPr id="16" name="Shape 14"/>
-          <p:cNvSpPr/>
-          <p:nvPr/>
-        </p:nvSpPr>
-        <p:spPr>
-          <a:xfrm>
-            <a:off x="9198864" y="4206240"/>
-            <a:ext cx="347472" cy="347472"/>
-          </a:xfrm>
-          <a:prstGeom prst="ellipse">
-            <a:avLst/>
-          </a:prstGeom>
-          <a:solidFill>
-            <a:srgbClr val="2F8A28"/>
-          </a:solidFill>
-          <a:ln w="12700">
-            <a:solidFill>
-              <a:srgbClr val="2F8A28"/>
-            </a:solidFill>
-            <a:prstDash val="solid"/>
-          </a:ln>
-        </p:spPr>
-      </p:sp>
-      <p:sp>
-        <p:nvSpPr>
-          <p:cNvPr id="17" name="Text 15"/>
-          <p:cNvSpPr/>
-          <p:nvPr/>
-        </p:nvSpPr>
-        <p:spPr>
-          <a:xfrm>
-            <a:off x="7909560" y="3977640"/>
-            <a:ext cx="2926080" cy="182880"/>
-          </a:xfrm>
-          <a:prstGeom prst="rect">
-            <a:avLst/>
-          </a:prstGeom>
-          <a:noFill/>
-          <a:ln/>
-        </p:spPr>
-        <p:txBody>
-          <a:bodyPr wrap="square" lIns="0" tIns="0" rIns="0" bIns="0" rtlCol="0" anchor="ctr"/>
-          <a:lstStyle/>
-          <a:p>
-            <a:pPr algn="ctr" indent="0" marL="0">
-              <a:buNone/>
-            </a:pPr>
-            <a:r>
-              <a:rPr lang="en-US" sz="1000" dirty="0">
-                <a:solidFill>
-                  <a:srgbClr val="003A63"/>
-                </a:solidFill>
-                <a:latin typeface="Aptos" pitchFamily="34" charset="0"/>
-                <a:ea typeface="Aptos" pitchFamily="34" charset="-122"/>
-                <a:cs typeface="Aptos" pitchFamily="34" charset="-120"/>
-              </a:rPr>
-              <a:t>Concept to action</a:t>
-            </a:r>
-            <a:endParaRPr lang="en-US" sz="1000" dirty="0"/>
-          </a:p>
-        </p:txBody>
-      </p:sp>
-      <p:sp>
-        <p:nvSpPr>
-          <p:cNvPr id="18" name="Shape 16"/>
           <p:cNvSpPr/>
           <p:nvPr/>
         </p:nvSpPr>
@@ -17735,7 +17154,7 @@
       </p:sp>
       <p:sp>
         <p:nvSpPr>
-          <p:cNvPr id="19" name="Text 17"/>
+          <p:cNvPr id="17" name="Text 15"/>
           <p:cNvSpPr/>
           <p:nvPr/>
         </p:nvSpPr>
@@ -17774,7 +17193,7 @@
       </p:sp>
       <p:sp>
         <p:nvSpPr>
-          <p:cNvPr id="20" name="Text 18"/>
+          <p:cNvPr id="18" name="Text 16"/>
           <p:cNvSpPr/>
           <p:nvPr/>
         </p:nvSpPr>
@@ -18282,13 +17701,11 @@
             </a:avLst>
           </a:prstGeom>
           <a:solidFill>
-            <a:srgbClr val="FFFFFF">
-              <a:alpha val="88000"/>
-            </a:srgbClr>
+            <a:srgbClr val="FFFFFF"/>
           </a:solidFill>
           <a:ln w="12700">
             <a:solidFill>
-              <a:srgbClr val="D6E8F2"/>
+              <a:srgbClr val="B9D7E6"/>
             </a:solidFill>
             <a:prstDash val="solid"/>
           </a:ln>
@@ -18296,119 +17713,112 @@
       </p:sp>
       <p:sp>
         <p:nvSpPr>
-          <p:cNvPr id="14" name="Shape 12"/>
-          <p:cNvSpPr/>
-          <p:nvPr/>
-        </p:nvSpPr>
-        <p:spPr>
-          <a:xfrm>
-            <a:off x="8074152" y="3291840"/>
-            <a:ext cx="2596896" cy="749808"/>
-          </a:xfrm>
-          <a:prstGeom prst="rect">
-            <a:avLst/>
-          </a:prstGeom>
-          <a:solidFill>
-            <a:srgbClr val="EAF6F8"/>
-          </a:solidFill>
-          <a:ln w="12700">
-            <a:solidFill>
-              <a:srgbClr val="8ABBD8"/>
-            </a:solidFill>
-            <a:prstDash val="solid"/>
-          </a:ln>
-        </p:spPr>
-      </p:sp>
-      <p:sp>
-        <p:nvSpPr>
-          <p:cNvPr id="15" name="Shape 13"/>
-          <p:cNvSpPr/>
-          <p:nvPr/>
-        </p:nvSpPr>
-        <p:spPr>
-          <a:xfrm>
-            <a:off x="8202168" y="3721608"/>
-            <a:ext cx="2340864" cy="0"/>
-          </a:xfrm>
-          <a:prstGeom prst="line">
-            <a:avLst/>
-          </a:prstGeom>
-          <a:noFill/>
-          <a:ln w="19050">
-            <a:solidFill>
-              <a:srgbClr val="0068B7"/>
-            </a:solidFill>
-            <a:prstDash val="solid"/>
-          </a:ln>
-        </p:spPr>
+          <p:cNvPr id="14" name="Text 12"/>
+          <p:cNvSpPr/>
+          <p:nvPr/>
+        </p:nvSpPr>
+        <p:spPr>
+          <a:xfrm>
+            <a:off x="7799832" y="2935224"/>
+            <a:ext cx="3145536" cy="256032"/>
+          </a:xfrm>
+          <a:prstGeom prst="rect">
+            <a:avLst/>
+          </a:prstGeom>
+          <a:noFill/>
+          <a:ln/>
+        </p:spPr>
+        <p:txBody>
+          <a:bodyPr wrap="square" lIns="0" tIns="0" rIns="0" bIns="0" rtlCol="0" anchor="ctr"/>
+          <a:lstStyle/>
+          <a:p>
+            <a:pPr indent="0" marL="0">
+              <a:buNone/>
+            </a:pPr>
+            <a:r>
+              <a:rPr lang="en-US" sz="1300" b="1" dirty="0">
+                <a:solidFill>
+                  <a:srgbClr val="0068B7"/>
+                </a:solidFill>
+                <a:latin typeface="Aptos" pitchFamily="34" charset="0"/>
+                <a:ea typeface="Aptos" pitchFamily="34" charset="-122"/>
+                <a:cs typeface="Aptos" pitchFamily="34" charset="-120"/>
+              </a:rPr>
+              <a:t>Concept checkpoints</a:t>
+            </a:r>
+            <a:endParaRPr lang="en-US" sz="1300" dirty="0"/>
+          </a:p>
+        </p:txBody>
+      </p:sp>
+      <p:sp>
+        <p:nvSpPr>
+          <p:cNvPr id="15" name="Text 13"/>
+          <p:cNvSpPr/>
+          <p:nvPr/>
+        </p:nvSpPr>
+        <p:spPr>
+          <a:xfrm>
+            <a:off x="7818120" y="3300984"/>
+            <a:ext cx="3090672" cy="877824"/>
+          </a:xfrm>
+          <a:prstGeom prst="rect">
+            <a:avLst/>
+          </a:prstGeom>
+          <a:noFill/>
+          <a:ln/>
+        </p:spPr>
+        <p:txBody>
+          <a:bodyPr wrap="square" lIns="254" tIns="254" rIns="254" bIns="254" rtlCol="0" anchor="t">
+            <a:normAutofit/>
+          </a:bodyPr>
+          <a:lstStyle/>
+          <a:p>
+            <a:r>
+              <a:rPr lang="en-US" sz="1380" dirty="0">
+                <a:solidFill>
+                  <a:srgbClr val="17364A"/>
+                </a:solidFill>
+                <a:latin typeface="Aptos" pitchFamily="34" charset="0"/>
+                <a:ea typeface="Aptos" pitchFamily="34" charset="-122"/>
+                <a:cs typeface="Aptos" pitchFamily="34" charset="-120"/>
+              </a:rPr>
+              <a:t>Staff should describe the current workflow, the pain point, the people affected, the.</a:t>
+            </a:r>
+            <a:endParaRPr lang="en-US" sz="1380" dirty="0"/>
+          </a:p>
+          <a:p>
+            <a:r>
+              <a:rPr lang="en-US" sz="1380" dirty="0">
+                <a:solidFill>
+                  <a:srgbClr val="17364A"/>
+                </a:solidFill>
+                <a:latin typeface="Aptos" pitchFamily="34" charset="0"/>
+                <a:ea typeface="Aptos" pitchFamily="34" charset="-122"/>
+                <a:cs typeface="Aptos" pitchFamily="34" charset="-120"/>
+              </a:rPr>
+              <a:t>This prevents technology-first proposals that begin with a tool and then search for a.</a:t>
+            </a:r>
+            <a:endParaRPr lang="en-US" sz="1380" dirty="0"/>
+          </a:p>
+          <a:p>
+            <a:r>
+              <a:rPr lang="en-US" sz="1380" dirty="0">
+                <a:solidFill>
+                  <a:srgbClr val="17364A"/>
+                </a:solidFill>
+                <a:latin typeface="Aptos" pitchFamily="34" charset="0"/>
+                <a:ea typeface="Aptos" pitchFamily="34" charset="-122"/>
+                <a:cs typeface="Aptos" pitchFamily="34" charset="-120"/>
+              </a:rPr>
+              <a:t>A clear problem statement also helps reviewers decide whether AI is needed or whether a.</a:t>
+            </a:r>
+            <a:endParaRPr lang="en-US" sz="1380" dirty="0"/>
+          </a:p>
+        </p:txBody>
       </p:sp>
       <p:sp>
         <p:nvSpPr>
           <p:cNvPr id="16" name="Shape 14"/>
-          <p:cNvSpPr/>
-          <p:nvPr/>
-        </p:nvSpPr>
-        <p:spPr>
-          <a:xfrm>
-            <a:off x="9198864" y="4206240"/>
-            <a:ext cx="347472" cy="347472"/>
-          </a:xfrm>
-          <a:prstGeom prst="ellipse">
-            <a:avLst/>
-          </a:prstGeom>
-          <a:solidFill>
-            <a:srgbClr val="2F8A28"/>
-          </a:solidFill>
-          <a:ln w="12700">
-            <a:solidFill>
-              <a:srgbClr val="2F8A28"/>
-            </a:solidFill>
-            <a:prstDash val="solid"/>
-          </a:ln>
-        </p:spPr>
-      </p:sp>
-      <p:sp>
-        <p:nvSpPr>
-          <p:cNvPr id="17" name="Text 15"/>
-          <p:cNvSpPr/>
-          <p:nvPr/>
-        </p:nvSpPr>
-        <p:spPr>
-          <a:xfrm>
-            <a:off x="7909560" y="3977640"/>
-            <a:ext cx="2926080" cy="182880"/>
-          </a:xfrm>
-          <a:prstGeom prst="rect">
-            <a:avLst/>
-          </a:prstGeom>
-          <a:noFill/>
-          <a:ln/>
-        </p:spPr>
-        <p:txBody>
-          <a:bodyPr wrap="square" lIns="0" tIns="0" rIns="0" bIns="0" rtlCol="0" anchor="ctr"/>
-          <a:lstStyle/>
-          <a:p>
-            <a:pPr algn="ctr" indent="0" marL="0">
-              <a:buNone/>
-            </a:pPr>
-            <a:r>
-              <a:rPr lang="en-US" sz="1000" dirty="0">
-                <a:solidFill>
-                  <a:srgbClr val="003A63"/>
-                </a:solidFill>
-                <a:latin typeface="Aptos" pitchFamily="34" charset="0"/>
-                <a:ea typeface="Aptos" pitchFamily="34" charset="-122"/>
-                <a:cs typeface="Aptos" pitchFamily="34" charset="-120"/>
-              </a:rPr>
-              <a:t>Concept to action</a:t>
-            </a:r>
-            <a:endParaRPr lang="en-US" sz="1000" dirty="0"/>
-          </a:p>
-        </p:txBody>
-      </p:sp>
-      <p:sp>
-        <p:nvSpPr>
-          <p:cNvPr id="18" name="Shape 16"/>
           <p:cNvSpPr/>
           <p:nvPr/>
         </p:nvSpPr>
@@ -18435,7 +17845,7 @@
       </p:sp>
       <p:sp>
         <p:nvSpPr>
-          <p:cNvPr id="19" name="Text 17"/>
+          <p:cNvPr id="17" name="Text 15"/>
           <p:cNvSpPr/>
           <p:nvPr/>
         </p:nvSpPr>
@@ -18474,7 +17884,7 @@
       </p:sp>
       <p:sp>
         <p:nvSpPr>
-          <p:cNvPr id="20" name="Text 18"/>
+          <p:cNvPr id="18" name="Text 16"/>
           <p:cNvSpPr/>
           <p:nvPr/>
         </p:nvSpPr>

--- a/downloads/presentations/modules/int-200.pptx
+++ b/downloads/presentations/modules/int-200.pptx
@@ -3445,49 +3445,58 @@
           <a:ln/>
         </p:spPr>
         <p:txBody>
-          <a:bodyPr wrap="square" lIns="635" tIns="635" rIns="635" bIns="635" rtlCol="0" anchor="t">
+          <a:bodyPr wrap="square" lIns="1016" tIns="1016" rIns="1016" bIns="1016" rtlCol="0" anchor="t">
             <a:normAutofit/>
           </a:bodyPr>
           <a:lstStyle/>
           <a:p>
+            <a:pPr indent="0" marL="0">
+              <a:buNone/>
+            </a:pPr>
             <a:r>
               <a:rPr lang="en-US" sz="2100" dirty="0">
                 <a:solidFill>
-                  <a:srgbClr val="17364A"/>
-                </a:solidFill>
-                <a:latin typeface="Aptos" pitchFamily="34" charset="0"/>
-                <a:ea typeface="Aptos" pitchFamily="34" charset="-122"/>
-                <a:cs typeface="Aptos" pitchFamily="34" charset="-120"/>
-              </a:rPr>
-              <a:t>Use case intake also supports portfolio management.</a:t>
+                  <a:srgbClr val="003A63"/>
+                </a:solidFill>
+                <a:latin typeface="Aptos" pitchFamily="34" charset="0"/>
+                <a:ea typeface="Aptos" pitchFamily="34" charset="-122"/>
+                <a:cs typeface="Aptos" pitchFamily="34" charset="-120"/>
+              </a:rPr>
+              <a:t>• Use case intake also supports portfolio management.</a:t>
             </a:r>
             <a:endParaRPr lang="en-US" sz="2100" dirty="0"/>
           </a:p>
           <a:p>
+            <a:pPr indent="0" marL="0">
+              <a:buNone/>
+            </a:pPr>
             <a:r>
               <a:rPr lang="en-US" sz="2100" dirty="0">
                 <a:solidFill>
-                  <a:srgbClr val="17364A"/>
-                </a:solidFill>
-                <a:latin typeface="Aptos" pitchFamily="34" charset="0"/>
-                <a:ea typeface="Aptos" pitchFamily="34" charset="-122"/>
-                <a:cs typeface="Aptos" pitchFamily="34" charset="-120"/>
-              </a:rPr>
-              <a:t>When agencies collect use cases in a consistent format, leaders can compare proposals across programs,.</a:t>
+                  <a:srgbClr val="003A63"/>
+                </a:solidFill>
+                <a:latin typeface="Aptos" pitchFamily="34" charset="0"/>
+                <a:ea typeface="Aptos" pitchFamily="34" charset="-122"/>
+                <a:cs typeface="Aptos" pitchFamily="34" charset="-120"/>
+              </a:rPr>
+              <a:t>• When agencies collect use cases in a consistent format, leaders can compare proposals across.</a:t>
             </a:r>
             <a:endParaRPr lang="en-US" sz="2100" dirty="0"/>
           </a:p>
           <a:p>
+            <a:pPr indent="0" marL="0">
+              <a:buNone/>
+            </a:pPr>
             <a:r>
               <a:rPr lang="en-US" sz="2100" dirty="0">
                 <a:solidFill>
-                  <a:srgbClr val="17364A"/>
-                </a:solidFill>
-                <a:latin typeface="Aptos" pitchFamily="34" charset="0"/>
-                <a:ea typeface="Aptos" pitchFamily="34" charset="-122"/>
-                <a:cs typeface="Aptos" pitchFamily="34" charset="-120"/>
-              </a:rPr>
-              <a:t>The intake record becomes the first governance artifact in the AI lifecycle.</a:t>
+                  <a:srgbClr val="003A63"/>
+                </a:solidFill>
+                <a:latin typeface="Aptos" pitchFamily="34" charset="0"/>
+                <a:ea typeface="Aptos" pitchFamily="34" charset="-122"/>
+                <a:cs typeface="Aptos" pitchFamily="34" charset="-120"/>
+              </a:rPr>
+              <a:t>• The intake record becomes the first governance artifact in the AI lifecycle.</a:t>
             </a:r>
             <a:endParaRPr lang="en-US" sz="2100" dirty="0"/>
           </a:p>
@@ -3567,17 +3576,17 @@
         </p:nvSpPr>
         <p:spPr>
           <a:xfrm>
-            <a:off x="7799832" y="1828800"/>
-            <a:ext cx="3145536" cy="685800"/>
-          </a:xfrm>
-          <a:prstGeom prst="rect">
-            <a:avLst/>
-          </a:prstGeom>
-          <a:noFill/>
-          <a:ln/>
-        </p:spPr>
-        <p:txBody>
-          <a:bodyPr wrap="square" lIns="0" tIns="0" rIns="0" bIns="0" rtlCol="0" anchor="t">
+            <a:off x="7799832" y="1801368"/>
+            <a:ext cx="3145536" cy="758952"/>
+          </a:xfrm>
+          <a:prstGeom prst="rect">
+            <a:avLst/>
+          </a:prstGeom>
+          <a:noFill/>
+          <a:ln/>
+        </p:spPr>
+        <p:txBody>
+          <a:bodyPr wrap="square" lIns="254" tIns="254" rIns="254" bIns="254" rtlCol="0" anchor="t">
             <a:normAutofit/>
           </a:bodyPr>
           <a:lstStyle/>
@@ -3586,7 +3595,7 @@
               <a:buNone/>
             </a:pPr>
             <a:r>
-              <a:rPr lang="en-US" sz="1550" dirty="0">
+              <a:rPr lang="en-US" sz="1320" dirty="0">
                 <a:solidFill>
                   <a:srgbClr val="17364A"/>
                 </a:solidFill>
@@ -3596,7 +3605,7 @@
               </a:rPr>
               <a:t>Use case intake also supports portfolio management.</a:t>
             </a:r>
-            <a:endParaRPr lang="en-US" sz="1550" dirty="0"/>
+            <a:endParaRPr lang="en-US" sz="1320" dirty="0"/>
           </a:p>
         </p:txBody>
       </p:sp>
@@ -3684,13 +3693,16 @@
           <a:ln/>
         </p:spPr>
         <p:txBody>
-          <a:bodyPr wrap="square" lIns="254" tIns="254" rIns="254" bIns="254" rtlCol="0" anchor="t">
+          <a:bodyPr wrap="square" lIns="508" tIns="508" rIns="508" bIns="508" rtlCol="0" anchor="t">
             <a:normAutofit/>
           </a:bodyPr>
           <a:lstStyle/>
           <a:p>
-            <a:r>
-              <a:rPr lang="en-US" sz="1380" dirty="0">
+            <a:pPr indent="0" marL="0">
+              <a:buNone/>
+            </a:pPr>
+            <a:r>
+              <a:rPr lang="en-US" sz="1220" dirty="0">
                 <a:solidFill>
                   <a:srgbClr val="17364A"/>
                 </a:solidFill>
@@ -3700,11 +3712,14 @@
               </a:rPr>
               <a:t>Use case intake also supports portfolio management.</a:t>
             </a:r>
-            <a:endParaRPr lang="en-US" sz="1380" dirty="0"/>
-          </a:p>
-          <a:p>
-            <a:r>
-              <a:rPr lang="en-US" sz="1380" dirty="0">
+            <a:endParaRPr lang="en-US" sz="1220" dirty="0"/>
+          </a:p>
+          <a:p>
+            <a:pPr indent="0" marL="0">
+              <a:buNone/>
+            </a:pPr>
+            <a:r>
+              <a:rPr lang="en-US" sz="1220" dirty="0">
                 <a:solidFill>
                   <a:srgbClr val="17364A"/>
                 </a:solidFill>
@@ -3712,13 +3727,16 @@
                 <a:ea typeface="Aptos" pitchFamily="34" charset="-122"/>
                 <a:cs typeface="Aptos" pitchFamily="34" charset="-120"/>
               </a:rPr>
-              <a:t>When agencies collect use cases in a consistent format, leaders can compare proposals.</a:t>
-            </a:r>
-            <a:endParaRPr lang="en-US" sz="1380" dirty="0"/>
-          </a:p>
-          <a:p>
-            <a:r>
-              <a:rPr lang="en-US" sz="1380" dirty="0">
+              <a:t>When agencies collect use cases in a consistent format, leaders.</a:t>
+            </a:r>
+            <a:endParaRPr lang="en-US" sz="1220" dirty="0"/>
+          </a:p>
+          <a:p>
+            <a:pPr indent="0" marL="0">
+              <a:buNone/>
+            </a:pPr>
+            <a:r>
+              <a:rPr lang="en-US" sz="1220" dirty="0">
                 <a:solidFill>
                   <a:srgbClr val="17364A"/>
                 </a:solidFill>
@@ -3726,9 +3744,9 @@
                 <a:ea typeface="Aptos" pitchFamily="34" charset="-122"/>
                 <a:cs typeface="Aptos" pitchFamily="34" charset="-120"/>
               </a:rPr>
-              <a:t>The intake record becomes the first governance artifact in the AI lifecycle.</a:t>
-            </a:r>
-            <a:endParaRPr lang="en-US" sz="1380" dirty="0"/>
+              <a:t>The intake record becomes the first governance artifact in the AI.</a:t>
+            </a:r>
+            <a:endParaRPr lang="en-US" sz="1220" dirty="0"/>
           </a:p>
         </p:txBody>
       </p:sp>
@@ -3806,17 +3824,17 @@
         </p:nvSpPr>
         <p:spPr>
           <a:xfrm>
-            <a:off x="7799832" y="5001768"/>
-            <a:ext cx="3145536" cy="502920"/>
-          </a:xfrm>
-          <a:prstGeom prst="rect">
-            <a:avLst/>
-          </a:prstGeom>
-          <a:noFill/>
-          <a:ln/>
-        </p:spPr>
-        <p:txBody>
-          <a:bodyPr wrap="square" lIns="0" tIns="0" rIns="0" bIns="0" rtlCol="0" anchor="t">
+            <a:off x="7799832" y="4974336"/>
+            <a:ext cx="3145536" cy="576072"/>
+          </a:xfrm>
+          <a:prstGeom prst="rect">
+            <a:avLst/>
+          </a:prstGeom>
+          <a:noFill/>
+          <a:ln/>
+        </p:spPr>
+        <p:txBody>
+          <a:bodyPr wrap="square" lIns="254" tIns="254" rIns="254" bIns="254" rtlCol="0" anchor="t">
             <a:normAutofit/>
           </a:bodyPr>
           <a:lstStyle/>
@@ -3825,7 +3843,7 @@
               <a:buNone/>
             </a:pPr>
             <a:r>
-              <a:rPr lang="en-US" sz="1550" dirty="0">
+              <a:rPr lang="en-US" sz="1320" dirty="0">
                 <a:solidFill>
                   <a:srgbClr val="17364A"/>
                 </a:solidFill>
@@ -3833,9 +3851,9 @@
                 <a:ea typeface="Aptos" pitchFamily="34" charset="-122"/>
                 <a:cs typeface="Aptos" pitchFamily="34" charset="-120"/>
               </a:rPr>
-              <a:t>Connect the concept to public health purpose, responsible use, required safeguards, documentation, and the next action a department should take.</a:t>
-            </a:r>
-            <a:endParaRPr lang="en-US" sz="1550" dirty="0"/>
+              <a:t>Connect the concept to public health purpose, responsible use, required safeguards, documentation, and the next action a.</a:t>
+            </a:r>
+            <a:endParaRPr lang="en-US" sz="1320" dirty="0"/>
           </a:p>
         </p:txBody>
       </p:sp>
@@ -4136,49 +4154,58 @@
           <a:ln/>
         </p:spPr>
         <p:txBody>
-          <a:bodyPr wrap="square" lIns="635" tIns="635" rIns="635" bIns="635" rtlCol="0" anchor="t">
+          <a:bodyPr wrap="square" lIns="1016" tIns="1016" rIns="1016" bIns="1016" rtlCol="0" anchor="t">
             <a:normAutofit/>
           </a:bodyPr>
           <a:lstStyle/>
           <a:p>
+            <a:pPr indent="0" marL="0">
+              <a:buNone/>
+            </a:pPr>
             <a:r>
               <a:rPr lang="en-US" sz="2100" dirty="0">
                 <a:solidFill>
-                  <a:srgbClr val="17364A"/>
-                </a:solidFill>
-                <a:latin typeface="Aptos" pitchFamily="34" charset="0"/>
-                <a:ea typeface="Aptos" pitchFamily="34" charset="-122"/>
-                <a:cs typeface="Aptos" pitchFamily="34" charset="-120"/>
-              </a:rPr>
-              <a:t>Risks and failure modes include the following:</a:t>
+                  <a:srgbClr val="003A63"/>
+                </a:solidFill>
+                <a:latin typeface="Aptos" pitchFamily="34" charset="0"/>
+                <a:ea typeface="Aptos" pitchFamily="34" charset="-122"/>
+                <a:cs typeface="Aptos" pitchFamily="34" charset="-120"/>
+              </a:rPr>
+              <a:t>• Risks and failure modes include the following:</a:t>
             </a:r>
             <a:endParaRPr lang="en-US" sz="2100" dirty="0"/>
           </a:p>
           <a:p>
+            <a:pPr indent="0" marL="0">
+              <a:buNone/>
+            </a:pPr>
             <a:r>
               <a:rPr lang="en-US" sz="2100" dirty="0">
                 <a:solidFill>
-                  <a:srgbClr val="17364A"/>
-                </a:solidFill>
-                <a:latin typeface="Aptos" pitchFamily="34" charset="0"/>
-                <a:ea typeface="Aptos" pitchFamily="34" charset="-122"/>
-                <a:cs typeface="Aptos" pitchFamily="34" charset="-120"/>
-              </a:rPr>
-              <a:t>Informal AI experimentation with sensitive or confidential data before review.</a:t>
+                  <a:srgbClr val="003A63"/>
+                </a:solidFill>
+                <a:latin typeface="Aptos" pitchFamily="34" charset="0"/>
+                <a:ea typeface="Aptos" pitchFamily="34" charset="-122"/>
+                <a:cs typeface="Aptos" pitchFamily="34" charset="-120"/>
+              </a:rPr>
+              <a:t>• Informal AI experimentation with sensitive or confidential data before review.</a:t>
             </a:r>
             <a:endParaRPr lang="en-US" sz="2100" dirty="0"/>
           </a:p>
           <a:p>
+            <a:pPr indent="0" marL="0">
+              <a:buNone/>
+            </a:pPr>
             <a:r>
               <a:rPr lang="en-US" sz="2100" dirty="0">
                 <a:solidFill>
-                  <a:srgbClr val="17364A"/>
-                </a:solidFill>
-                <a:latin typeface="Aptos" pitchFamily="34" charset="0"/>
-                <a:ea typeface="Aptos" pitchFamily="34" charset="-122"/>
-                <a:cs typeface="Aptos" pitchFamily="34" charset="-120"/>
-              </a:rPr>
-              <a:t>Tool-first proposals that do not solve a real workflow problem.</a:t>
+                  <a:srgbClr val="003A63"/>
+                </a:solidFill>
+                <a:latin typeface="Aptos" pitchFamily="34" charset="0"/>
+                <a:ea typeface="Aptos" pitchFamily="34" charset="-122"/>
+                <a:cs typeface="Aptos" pitchFamily="34" charset="-120"/>
+              </a:rPr>
+              <a:t>• Tool-first proposals that do not solve a real workflow problem.</a:t>
             </a:r>
             <a:endParaRPr lang="en-US" sz="2100" dirty="0"/>
           </a:p>
@@ -4258,17 +4285,17 @@
         </p:nvSpPr>
         <p:spPr>
           <a:xfrm>
-            <a:off x="7799832" y="1828800"/>
-            <a:ext cx="3145536" cy="685800"/>
-          </a:xfrm>
-          <a:prstGeom prst="rect">
-            <a:avLst/>
-          </a:prstGeom>
-          <a:noFill/>
-          <a:ln/>
-        </p:spPr>
-        <p:txBody>
-          <a:bodyPr wrap="square" lIns="0" tIns="0" rIns="0" bIns="0" rtlCol="0" anchor="t">
+            <a:off x="7799832" y="1801368"/>
+            <a:ext cx="3145536" cy="758952"/>
+          </a:xfrm>
+          <a:prstGeom prst="rect">
+            <a:avLst/>
+          </a:prstGeom>
+          <a:noFill/>
+          <a:ln/>
+        </p:spPr>
+        <p:txBody>
+          <a:bodyPr wrap="square" lIns="254" tIns="254" rIns="254" bIns="254" rtlCol="0" anchor="t">
             <a:normAutofit/>
           </a:bodyPr>
           <a:lstStyle/>
@@ -4277,7 +4304,7 @@
               <a:buNone/>
             </a:pPr>
             <a:r>
-              <a:rPr lang="en-US" sz="1550" dirty="0">
+              <a:rPr lang="en-US" sz="1320" dirty="0">
                 <a:solidFill>
                   <a:srgbClr val="17364A"/>
                 </a:solidFill>
@@ -4287,7 +4314,7 @@
               </a:rPr>
               <a:t>Risks and failure modes include the following:</a:t>
             </a:r>
-            <a:endParaRPr lang="en-US" sz="1550" dirty="0"/>
+            <a:endParaRPr lang="en-US" sz="1320" dirty="0"/>
           </a:p>
         </p:txBody>
       </p:sp>
@@ -4375,13 +4402,16 @@
           <a:ln/>
         </p:spPr>
         <p:txBody>
-          <a:bodyPr wrap="square" lIns="254" tIns="254" rIns="254" bIns="254" rtlCol="0" anchor="t">
+          <a:bodyPr wrap="square" lIns="508" tIns="508" rIns="508" bIns="508" rtlCol="0" anchor="t">
             <a:normAutofit/>
           </a:bodyPr>
           <a:lstStyle/>
           <a:p>
-            <a:r>
-              <a:rPr lang="en-US" sz="1380" dirty="0">
+            <a:pPr indent="0" marL="0">
+              <a:buNone/>
+            </a:pPr>
+            <a:r>
+              <a:rPr lang="en-US" sz="1220" dirty="0">
                 <a:solidFill>
                   <a:srgbClr val="17364A"/>
                 </a:solidFill>
@@ -4391,11 +4421,14 @@
               </a:rPr>
               <a:t>Risks and failure modes include the following:</a:t>
             </a:r>
-            <a:endParaRPr lang="en-US" sz="1380" dirty="0"/>
-          </a:p>
-          <a:p>
-            <a:r>
-              <a:rPr lang="en-US" sz="1380" dirty="0">
+            <a:endParaRPr lang="en-US" sz="1220" dirty="0"/>
+          </a:p>
+          <a:p>
+            <a:pPr indent="0" marL="0">
+              <a:buNone/>
+            </a:pPr>
+            <a:r>
+              <a:rPr lang="en-US" sz="1220" dirty="0">
                 <a:solidFill>
                   <a:srgbClr val="17364A"/>
                 </a:solidFill>
@@ -4403,13 +4436,16 @@
                 <a:ea typeface="Aptos" pitchFamily="34" charset="-122"/>
                 <a:cs typeface="Aptos" pitchFamily="34" charset="-120"/>
               </a:rPr>
-              <a:t>Informal AI experimentation with sensitive or confidential data before review.</a:t>
-            </a:r>
-            <a:endParaRPr lang="en-US" sz="1380" dirty="0"/>
-          </a:p>
-          <a:p>
-            <a:r>
-              <a:rPr lang="en-US" sz="1380" dirty="0">
+              <a:t>Informal AI experimentation with sensitive or confidential data.</a:t>
+            </a:r>
+            <a:endParaRPr lang="en-US" sz="1220" dirty="0"/>
+          </a:p>
+          <a:p>
+            <a:pPr indent="0" marL="0">
+              <a:buNone/>
+            </a:pPr>
+            <a:r>
+              <a:rPr lang="en-US" sz="1220" dirty="0">
                 <a:solidFill>
                   <a:srgbClr val="17364A"/>
                 </a:solidFill>
@@ -4419,7 +4455,7 @@
               </a:rPr>
               <a:t>Tool-first proposals that do not solve a real workflow problem.</a:t>
             </a:r>
-            <a:endParaRPr lang="en-US" sz="1380" dirty="0"/>
+            <a:endParaRPr lang="en-US" sz="1220" dirty="0"/>
           </a:p>
         </p:txBody>
       </p:sp>
@@ -4497,17 +4533,17 @@
         </p:nvSpPr>
         <p:spPr>
           <a:xfrm>
-            <a:off x="7799832" y="5001768"/>
-            <a:ext cx="3145536" cy="502920"/>
-          </a:xfrm>
-          <a:prstGeom prst="rect">
-            <a:avLst/>
-          </a:prstGeom>
-          <a:noFill/>
-          <a:ln/>
-        </p:spPr>
-        <p:txBody>
-          <a:bodyPr wrap="square" lIns="0" tIns="0" rIns="0" bIns="0" rtlCol="0" anchor="t">
+            <a:off x="7799832" y="4974336"/>
+            <a:ext cx="3145536" cy="576072"/>
+          </a:xfrm>
+          <a:prstGeom prst="rect">
+            <a:avLst/>
+          </a:prstGeom>
+          <a:noFill/>
+          <a:ln/>
+        </p:spPr>
+        <p:txBody>
+          <a:bodyPr wrap="square" lIns="254" tIns="254" rIns="254" bIns="254" rtlCol="0" anchor="t">
             <a:normAutofit/>
           </a:bodyPr>
           <a:lstStyle/>
@@ -4516,7 +4552,7 @@
               <a:buNone/>
             </a:pPr>
             <a:r>
-              <a:rPr lang="en-US" sz="1550" dirty="0">
+              <a:rPr lang="en-US" sz="1320" dirty="0">
                 <a:solidFill>
                   <a:srgbClr val="17364A"/>
                 </a:solidFill>
@@ -4524,9 +4560,9 @@
                 <a:ea typeface="Aptos" pitchFamily="34" charset="-122"/>
                 <a:cs typeface="Aptos" pitchFamily="34" charset="-120"/>
               </a:rPr>
-              <a:t>Identify what could go wrong, who could be affected, what safeguards are needed, and what evidence should be reviewed before use expands.</a:t>
-            </a:r>
-            <a:endParaRPr lang="en-US" sz="1550" dirty="0"/>
+              <a:t>Identify what could go wrong, who could be affected, what safeguards are needed, and what evidence should be reviewed.</a:t>
+            </a:r>
+            <a:endParaRPr lang="en-US" sz="1320" dirty="0"/>
           </a:p>
         </p:txBody>
       </p:sp>
@@ -4827,49 +4863,58 @@
           <a:ln/>
         </p:spPr>
         <p:txBody>
-          <a:bodyPr wrap="square" lIns="635" tIns="635" rIns="635" bIns="635" rtlCol="0" anchor="t">
+          <a:bodyPr wrap="square" lIns="1016" tIns="1016" rIns="1016" bIns="1016" rtlCol="0" anchor="t">
             <a:normAutofit/>
           </a:bodyPr>
           <a:lstStyle/>
           <a:p>
+            <a:pPr indent="0" marL="0">
+              <a:buNone/>
+            </a:pPr>
             <a:r>
               <a:rPr lang="en-US" sz="2100" dirty="0">
                 <a:solidFill>
-                  <a:srgbClr val="17364A"/>
-                </a:solidFill>
-                <a:latin typeface="Aptos" pitchFamily="34" charset="0"/>
-                <a:ea typeface="Aptos" pitchFamily="34" charset="-122"/>
-                <a:cs typeface="Aptos" pitchFamily="34" charset="-120"/>
-              </a:rPr>
-              <a:t>Use cases moving forward without ownership, validation, or monitoring plans.</a:t>
+                  <a:srgbClr val="003A63"/>
+                </a:solidFill>
+                <a:latin typeface="Aptos" pitchFamily="34" charset="0"/>
+                <a:ea typeface="Aptos" pitchFamily="34" charset="-122"/>
+                <a:cs typeface="Aptos" pitchFamily="34" charset="-120"/>
+              </a:rPr>
+              <a:t>• Use cases moving forward without ownership, validation, or monitoring plans.</a:t>
             </a:r>
             <a:endParaRPr lang="en-US" sz="2100" dirty="0"/>
           </a:p>
           <a:p>
+            <a:pPr indent="0" marL="0">
+              <a:buNone/>
+            </a:pPr>
             <a:r>
               <a:rPr lang="en-US" sz="2100" dirty="0">
                 <a:solidFill>
-                  <a:srgbClr val="17364A"/>
-                </a:solidFill>
-                <a:latin typeface="Aptos" pitchFamily="34" charset="0"/>
-                <a:ea typeface="Aptos" pitchFamily="34" charset="-122"/>
-                <a:cs typeface="Aptos" pitchFamily="34" charset="-120"/>
-              </a:rPr>
-              <a:t>High-risk public-facing or decision-support uses being treated as low-risk productivity tools.</a:t>
+                  <a:srgbClr val="003A63"/>
+                </a:solidFill>
+                <a:latin typeface="Aptos" pitchFamily="34" charset="0"/>
+                <a:ea typeface="Aptos" pitchFamily="34" charset="-122"/>
+                <a:cs typeface="Aptos" pitchFamily="34" charset="-120"/>
+              </a:rPr>
+              <a:t>• High-risk public-facing or decision-support uses being treated as low-risk productivity tools.</a:t>
             </a:r>
             <a:endParaRPr lang="en-US" sz="2100" dirty="0"/>
           </a:p>
           <a:p>
+            <a:pPr indent="0" marL="0">
+              <a:buNone/>
+            </a:pPr>
             <a:r>
               <a:rPr lang="en-US" sz="2100" dirty="0">
                 <a:solidFill>
-                  <a:srgbClr val="17364A"/>
-                </a:solidFill>
-                <a:latin typeface="Aptos" pitchFamily="34" charset="0"/>
-                <a:ea typeface="Aptos" pitchFamily="34" charset="-122"/>
-                <a:cs typeface="Aptos" pitchFamily="34" charset="-120"/>
-              </a:rPr>
-              <a:t>Equity, accessibility, and community impacts being considered too late.</a:t>
+                  <a:srgbClr val="003A63"/>
+                </a:solidFill>
+                <a:latin typeface="Aptos" pitchFamily="34" charset="0"/>
+                <a:ea typeface="Aptos" pitchFamily="34" charset="-122"/>
+                <a:cs typeface="Aptos" pitchFamily="34" charset="-120"/>
+              </a:rPr>
+              <a:t>• Equity, accessibility, and community impacts being considered too late.</a:t>
             </a:r>
             <a:endParaRPr lang="en-US" sz="2100" dirty="0"/>
           </a:p>
@@ -4949,17 +4994,17 @@
         </p:nvSpPr>
         <p:spPr>
           <a:xfrm>
-            <a:off x="7799832" y="1828800"/>
-            <a:ext cx="3145536" cy="685800"/>
-          </a:xfrm>
-          <a:prstGeom prst="rect">
-            <a:avLst/>
-          </a:prstGeom>
-          <a:noFill/>
-          <a:ln/>
-        </p:spPr>
-        <p:txBody>
-          <a:bodyPr wrap="square" lIns="0" tIns="0" rIns="0" bIns="0" rtlCol="0" anchor="t">
+            <a:off x="7799832" y="1801368"/>
+            <a:ext cx="3145536" cy="758952"/>
+          </a:xfrm>
+          <a:prstGeom prst="rect">
+            <a:avLst/>
+          </a:prstGeom>
+          <a:noFill/>
+          <a:ln/>
+        </p:spPr>
+        <p:txBody>
+          <a:bodyPr wrap="square" lIns="254" tIns="254" rIns="254" bIns="254" rtlCol="0" anchor="t">
             <a:normAutofit/>
           </a:bodyPr>
           <a:lstStyle/>
@@ -4968,7 +5013,7 @@
               <a:buNone/>
             </a:pPr>
             <a:r>
-              <a:rPr lang="en-US" sz="1550" dirty="0">
+              <a:rPr lang="en-US" sz="1320" dirty="0">
                 <a:solidFill>
                   <a:srgbClr val="17364A"/>
                 </a:solidFill>
@@ -4978,7 +5023,7 @@
               </a:rPr>
               <a:t>Use cases moving forward without ownership, validation, or monitoring plans.</a:t>
             </a:r>
-            <a:endParaRPr lang="en-US" sz="1550" dirty="0"/>
+            <a:endParaRPr lang="en-US" sz="1320" dirty="0"/>
           </a:p>
         </p:txBody>
       </p:sp>
@@ -5066,13 +5111,16 @@
           <a:ln/>
         </p:spPr>
         <p:txBody>
-          <a:bodyPr wrap="square" lIns="254" tIns="254" rIns="254" bIns="254" rtlCol="0" anchor="t">
+          <a:bodyPr wrap="square" lIns="508" tIns="508" rIns="508" bIns="508" rtlCol="0" anchor="t">
             <a:normAutofit/>
           </a:bodyPr>
           <a:lstStyle/>
           <a:p>
-            <a:r>
-              <a:rPr lang="en-US" sz="1380" dirty="0">
+            <a:pPr indent="0" marL="0">
+              <a:buNone/>
+            </a:pPr>
+            <a:r>
+              <a:rPr lang="en-US" sz="1220" dirty="0">
                 <a:solidFill>
                   <a:srgbClr val="17364A"/>
                 </a:solidFill>
@@ -5080,13 +5128,16 @@
                 <a:ea typeface="Aptos" pitchFamily="34" charset="-122"/>
                 <a:cs typeface="Aptos" pitchFamily="34" charset="-120"/>
               </a:rPr>
-              <a:t>Use cases moving forward without ownership, validation, or monitoring plans.</a:t>
-            </a:r>
-            <a:endParaRPr lang="en-US" sz="1380" dirty="0"/>
-          </a:p>
-          <a:p>
-            <a:r>
-              <a:rPr lang="en-US" sz="1380" dirty="0">
+              <a:t>Use cases moving forward without ownership, validation, or.</a:t>
+            </a:r>
+            <a:endParaRPr lang="en-US" sz="1220" dirty="0"/>
+          </a:p>
+          <a:p>
+            <a:pPr indent="0" marL="0">
+              <a:buNone/>
+            </a:pPr>
+            <a:r>
+              <a:rPr lang="en-US" sz="1220" dirty="0">
                 <a:solidFill>
                   <a:srgbClr val="17364A"/>
                 </a:solidFill>
@@ -5094,13 +5145,16 @@
                 <a:ea typeface="Aptos" pitchFamily="34" charset="-122"/>
                 <a:cs typeface="Aptos" pitchFamily="34" charset="-120"/>
               </a:rPr>
-              <a:t>High-risk public-facing or decision-support uses being treated as low-risk productivity.</a:t>
-            </a:r>
-            <a:endParaRPr lang="en-US" sz="1380" dirty="0"/>
-          </a:p>
-          <a:p>
-            <a:r>
-              <a:rPr lang="en-US" sz="1380" dirty="0">
+              <a:t>High-risk public-facing or decision-support uses being treated as.</a:t>
+            </a:r>
+            <a:endParaRPr lang="en-US" sz="1220" dirty="0"/>
+          </a:p>
+          <a:p>
+            <a:pPr indent="0" marL="0">
+              <a:buNone/>
+            </a:pPr>
+            <a:r>
+              <a:rPr lang="en-US" sz="1220" dirty="0">
                 <a:solidFill>
                   <a:srgbClr val="17364A"/>
                 </a:solidFill>
@@ -5108,9 +5162,9 @@
                 <a:ea typeface="Aptos" pitchFamily="34" charset="-122"/>
                 <a:cs typeface="Aptos" pitchFamily="34" charset="-120"/>
               </a:rPr>
-              <a:t>Equity, accessibility, and community impacts being considered too late.</a:t>
-            </a:r>
-            <a:endParaRPr lang="en-US" sz="1380" dirty="0"/>
+              <a:t>Equity, accessibility, and community impacts being considered too.</a:t>
+            </a:r>
+            <a:endParaRPr lang="en-US" sz="1220" dirty="0"/>
           </a:p>
         </p:txBody>
       </p:sp>
@@ -5188,17 +5242,17 @@
         </p:nvSpPr>
         <p:spPr>
           <a:xfrm>
-            <a:off x="7799832" y="5001768"/>
-            <a:ext cx="3145536" cy="502920"/>
-          </a:xfrm>
-          <a:prstGeom prst="rect">
-            <a:avLst/>
-          </a:prstGeom>
-          <a:noFill/>
-          <a:ln/>
-        </p:spPr>
-        <p:txBody>
-          <a:bodyPr wrap="square" lIns="0" tIns="0" rIns="0" bIns="0" rtlCol="0" anchor="t">
+            <a:off x="7799832" y="4974336"/>
+            <a:ext cx="3145536" cy="576072"/>
+          </a:xfrm>
+          <a:prstGeom prst="rect">
+            <a:avLst/>
+          </a:prstGeom>
+          <a:noFill/>
+          <a:ln/>
+        </p:spPr>
+        <p:txBody>
+          <a:bodyPr wrap="square" lIns="254" tIns="254" rIns="254" bIns="254" rtlCol="0" anchor="t">
             <a:normAutofit/>
           </a:bodyPr>
           <a:lstStyle/>
@@ -5207,7 +5261,7 @@
               <a:buNone/>
             </a:pPr>
             <a:r>
-              <a:rPr lang="en-US" sz="1550" dirty="0">
+              <a:rPr lang="en-US" sz="1320" dirty="0">
                 <a:solidFill>
                   <a:srgbClr val="17364A"/>
                 </a:solidFill>
@@ -5215,9 +5269,9 @@
                 <a:ea typeface="Aptos" pitchFamily="34" charset="-122"/>
                 <a:cs typeface="Aptos" pitchFamily="34" charset="-120"/>
               </a:rPr>
-              <a:t>Identify what could go wrong, who could be affected, what safeguards are needed, and what evidence should be reviewed before use expands.</a:t>
-            </a:r>
-            <a:endParaRPr lang="en-US" sz="1550" dirty="0"/>
+              <a:t>Identify what could go wrong, who could be affected, what safeguards are needed, and what evidence should be reviewed.</a:t>
+            </a:r>
+            <a:endParaRPr lang="en-US" sz="1320" dirty="0"/>
           </a:p>
         </p:txBody>
       </p:sp>
@@ -5518,49 +5572,58 @@
           <a:ln/>
         </p:spPr>
         <p:txBody>
-          <a:bodyPr wrap="square" lIns="635" tIns="635" rIns="635" bIns="635" rtlCol="0" anchor="t">
+          <a:bodyPr wrap="square" lIns="1016" tIns="1016" rIns="1016" bIns="1016" rtlCol="0" anchor="t">
             <a:normAutofit/>
           </a:bodyPr>
           <a:lstStyle/>
           <a:p>
+            <a:pPr indent="0" marL="0">
+              <a:buNone/>
+            </a:pPr>
             <a:r>
               <a:rPr lang="en-US" sz="2100" dirty="0">
                 <a:solidFill>
-                  <a:srgbClr val="17364A"/>
-                </a:solidFill>
-                <a:latin typeface="Aptos" pitchFamily="34" charset="0"/>
-                <a:ea typeface="Aptos" pitchFamily="34" charset="-122"/>
-                <a:cs typeface="Aptos" pitchFamily="34" charset="-120"/>
-              </a:rPr>
-              <a:t>Recommended guardrails include the following:</a:t>
+                  <a:srgbClr val="003A63"/>
+                </a:solidFill>
+                <a:latin typeface="Aptos" pitchFamily="34" charset="0"/>
+                <a:ea typeface="Aptos" pitchFamily="34" charset="-122"/>
+                <a:cs typeface="Aptos" pitchFamily="34" charset="-120"/>
+              </a:rPr>
+              <a:t>• Recommended guardrails include the following:</a:t>
             </a:r>
             <a:endParaRPr lang="en-US" sz="2100" dirty="0"/>
           </a:p>
           <a:p>
+            <a:pPr indent="0" marL="0">
+              <a:buNone/>
+            </a:pPr>
             <a:r>
               <a:rPr lang="en-US" sz="2100" dirty="0">
                 <a:solidFill>
-                  <a:srgbClr val="17364A"/>
-                </a:solidFill>
-                <a:latin typeface="Aptos" pitchFamily="34" charset="0"/>
-                <a:ea typeface="Aptos" pitchFamily="34" charset="-122"/>
-                <a:cs typeface="Aptos" pitchFamily="34" charset="-120"/>
-              </a:rPr>
-              <a:t>Require a standard intake worksheet before piloting or procuring AI tools.</a:t>
+                  <a:srgbClr val="003A63"/>
+                </a:solidFill>
+                <a:latin typeface="Aptos" pitchFamily="34" charset="0"/>
+                <a:ea typeface="Aptos" pitchFamily="34" charset="-122"/>
+                <a:cs typeface="Aptos" pitchFamily="34" charset="-120"/>
+              </a:rPr>
+              <a:t>• Require a standard intake worksheet before piloting or procuring AI tools.</a:t>
             </a:r>
             <a:endParaRPr lang="en-US" sz="2100" dirty="0"/>
           </a:p>
           <a:p>
+            <a:pPr indent="0" marL="0">
+              <a:buNone/>
+            </a:pPr>
             <a:r>
               <a:rPr lang="en-US" sz="2100" dirty="0">
                 <a:solidFill>
-                  <a:srgbClr val="17364A"/>
-                </a:solidFill>
-                <a:latin typeface="Aptos" pitchFamily="34" charset="0"/>
-                <a:ea typeface="Aptos" pitchFamily="34" charset="-122"/>
-                <a:cs typeface="Aptos" pitchFamily="34" charset="-120"/>
-              </a:rPr>
-              <a:t>Classify proposed uses by data sensitivity, automation level, public-facing impact, and decision.</a:t>
+                  <a:srgbClr val="003A63"/>
+                </a:solidFill>
+                <a:latin typeface="Aptos" pitchFamily="34" charset="0"/>
+                <a:ea typeface="Aptos" pitchFamily="34" charset="-122"/>
+                <a:cs typeface="Aptos" pitchFamily="34" charset="-120"/>
+              </a:rPr>
+              <a:t>• Classify proposed uses by data sensitivity, automation level, public-facing impact, and.</a:t>
             </a:r>
             <a:endParaRPr lang="en-US" sz="2100" dirty="0"/>
           </a:p>
@@ -5640,17 +5703,17 @@
         </p:nvSpPr>
         <p:spPr>
           <a:xfrm>
-            <a:off x="7799832" y="1828800"/>
-            <a:ext cx="3145536" cy="685800"/>
-          </a:xfrm>
-          <a:prstGeom prst="rect">
-            <a:avLst/>
-          </a:prstGeom>
-          <a:noFill/>
-          <a:ln/>
-        </p:spPr>
-        <p:txBody>
-          <a:bodyPr wrap="square" lIns="0" tIns="0" rIns="0" bIns="0" rtlCol="0" anchor="t">
+            <a:off x="7799832" y="1801368"/>
+            <a:ext cx="3145536" cy="758952"/>
+          </a:xfrm>
+          <a:prstGeom prst="rect">
+            <a:avLst/>
+          </a:prstGeom>
+          <a:noFill/>
+          <a:ln/>
+        </p:spPr>
+        <p:txBody>
+          <a:bodyPr wrap="square" lIns="254" tIns="254" rIns="254" bIns="254" rtlCol="0" anchor="t">
             <a:normAutofit/>
           </a:bodyPr>
           <a:lstStyle/>
@@ -5659,7 +5722,7 @@
               <a:buNone/>
             </a:pPr>
             <a:r>
-              <a:rPr lang="en-US" sz="1550" dirty="0">
+              <a:rPr lang="en-US" sz="1320" dirty="0">
                 <a:solidFill>
                   <a:srgbClr val="17364A"/>
                 </a:solidFill>
@@ -5669,7 +5732,7 @@
               </a:rPr>
               <a:t>Recommended guardrails include the following:</a:t>
             </a:r>
-            <a:endParaRPr lang="en-US" sz="1550" dirty="0"/>
+            <a:endParaRPr lang="en-US" sz="1320" dirty="0"/>
           </a:p>
         </p:txBody>
       </p:sp>
@@ -5757,13 +5820,16 @@
           <a:ln/>
         </p:spPr>
         <p:txBody>
-          <a:bodyPr wrap="square" lIns="254" tIns="254" rIns="254" bIns="254" rtlCol="0" anchor="t">
+          <a:bodyPr wrap="square" lIns="508" tIns="508" rIns="508" bIns="508" rtlCol="0" anchor="t">
             <a:normAutofit/>
           </a:bodyPr>
           <a:lstStyle/>
           <a:p>
-            <a:r>
-              <a:rPr lang="en-US" sz="1380" dirty="0">
+            <a:pPr indent="0" marL="0">
+              <a:buNone/>
+            </a:pPr>
+            <a:r>
+              <a:rPr lang="en-US" sz="1220" dirty="0">
                 <a:solidFill>
                   <a:srgbClr val="17364A"/>
                 </a:solidFill>
@@ -5773,11 +5839,14 @@
               </a:rPr>
               <a:t>Recommended guardrails include the following:</a:t>
             </a:r>
-            <a:endParaRPr lang="en-US" sz="1380" dirty="0"/>
-          </a:p>
-          <a:p>
-            <a:r>
-              <a:rPr lang="en-US" sz="1380" dirty="0">
+            <a:endParaRPr lang="en-US" sz="1220" dirty="0"/>
+          </a:p>
+          <a:p>
+            <a:pPr indent="0" marL="0">
+              <a:buNone/>
+            </a:pPr>
+            <a:r>
+              <a:rPr lang="en-US" sz="1220" dirty="0">
                 <a:solidFill>
                   <a:srgbClr val="17364A"/>
                 </a:solidFill>
@@ -5785,13 +5854,16 @@
                 <a:ea typeface="Aptos" pitchFamily="34" charset="-122"/>
                 <a:cs typeface="Aptos" pitchFamily="34" charset="-120"/>
               </a:rPr>
-              <a:t>Require a standard intake worksheet before piloting or procuring AI tools.</a:t>
-            </a:r>
-            <a:endParaRPr lang="en-US" sz="1380" dirty="0"/>
-          </a:p>
-          <a:p>
-            <a:r>
-              <a:rPr lang="en-US" sz="1380" dirty="0">
+              <a:t>Require a standard intake worksheet before piloting or procuring.</a:t>
+            </a:r>
+            <a:endParaRPr lang="en-US" sz="1220" dirty="0"/>
+          </a:p>
+          <a:p>
+            <a:pPr indent="0" marL="0">
+              <a:buNone/>
+            </a:pPr>
+            <a:r>
+              <a:rPr lang="en-US" sz="1220" dirty="0">
                 <a:solidFill>
                   <a:srgbClr val="17364A"/>
                 </a:solidFill>
@@ -5799,9 +5871,9 @@
                 <a:ea typeface="Aptos" pitchFamily="34" charset="-122"/>
                 <a:cs typeface="Aptos" pitchFamily="34" charset="-120"/>
               </a:rPr>
-              <a:t>Classify proposed uses by data sensitivity, automation level, public-facing impact, and.</a:t>
-            </a:r>
-            <a:endParaRPr lang="en-US" sz="1380" dirty="0"/>
+              <a:t>Classify proposed uses by data sensitivity, automation level,.</a:t>
+            </a:r>
+            <a:endParaRPr lang="en-US" sz="1220" dirty="0"/>
           </a:p>
         </p:txBody>
       </p:sp>
@@ -5879,17 +5951,17 @@
         </p:nvSpPr>
         <p:spPr>
           <a:xfrm>
-            <a:off x="7799832" y="5001768"/>
-            <a:ext cx="3145536" cy="502920"/>
-          </a:xfrm>
-          <a:prstGeom prst="rect">
-            <a:avLst/>
-          </a:prstGeom>
-          <a:noFill/>
-          <a:ln/>
-        </p:spPr>
-        <p:txBody>
-          <a:bodyPr wrap="square" lIns="0" tIns="0" rIns="0" bIns="0" rtlCol="0" anchor="t">
+            <a:off x="7799832" y="4974336"/>
+            <a:ext cx="3145536" cy="576072"/>
+          </a:xfrm>
+          <a:prstGeom prst="rect">
+            <a:avLst/>
+          </a:prstGeom>
+          <a:noFill/>
+          <a:ln/>
+        </p:spPr>
+        <p:txBody>
+          <a:bodyPr wrap="square" lIns="254" tIns="254" rIns="254" bIns="254" rtlCol="0" anchor="t">
             <a:normAutofit/>
           </a:bodyPr>
           <a:lstStyle/>
@@ -5898,7 +5970,7 @@
               <a:buNone/>
             </a:pPr>
             <a:r>
-              <a:rPr lang="en-US" sz="1550" dirty="0">
+              <a:rPr lang="en-US" sz="1320" dirty="0">
                 <a:solidFill>
                   <a:srgbClr val="17364A"/>
                 </a:solidFill>
@@ -5906,9 +5978,9 @@
                 <a:ea typeface="Aptos" pitchFamily="34" charset="-122"/>
                 <a:cs typeface="Aptos" pitchFamily="34" charset="-120"/>
               </a:rPr>
-              <a:t>Identify what could go wrong, who could be affected, what safeguards are needed, and what evidence should be reviewed before use expands.</a:t>
-            </a:r>
-            <a:endParaRPr lang="en-US" sz="1550" dirty="0"/>
+              <a:t>Identify what could go wrong, who could be affected, what safeguards are needed, and what evidence should be reviewed.</a:t>
+            </a:r>
+            <a:endParaRPr lang="en-US" sz="1320" dirty="0"/>
           </a:p>
         </p:txBody>
       </p:sp>
@@ -6209,49 +6281,58 @@
           <a:ln/>
         </p:spPr>
         <p:txBody>
-          <a:bodyPr wrap="square" lIns="635" tIns="635" rIns="635" bIns="635" rtlCol="0" anchor="t">
+          <a:bodyPr wrap="square" lIns="1016" tIns="1016" rIns="1016" bIns="1016" rtlCol="0" anchor="t">
             <a:normAutofit/>
           </a:bodyPr>
           <a:lstStyle/>
           <a:p>
+            <a:pPr indent="0" marL="0">
+              <a:buNone/>
+            </a:pPr>
             <a:r>
               <a:rPr lang="en-US" sz="2100" dirty="0">
                 <a:solidFill>
-                  <a:srgbClr val="17364A"/>
-                </a:solidFill>
-                <a:latin typeface="Aptos" pitchFamily="34" charset="0"/>
-                <a:ea typeface="Aptos" pitchFamily="34" charset="-122"/>
-                <a:cs typeface="Aptos" pitchFamily="34" charset="-120"/>
-              </a:rPr>
-              <a:t>Route use cases to required reviewers before implementation begins.</a:t>
+                  <a:srgbClr val="003A63"/>
+                </a:solidFill>
+                <a:latin typeface="Aptos" pitchFamily="34" charset="0"/>
+                <a:ea typeface="Aptos" pitchFamily="34" charset="-122"/>
+                <a:cs typeface="Aptos" pitchFamily="34" charset="-120"/>
+              </a:rPr>
+              <a:t>• Route use cases to required reviewers before implementation begins.</a:t>
             </a:r>
             <a:endParaRPr lang="en-US" sz="2100" dirty="0"/>
           </a:p>
           <a:p>
+            <a:pPr indent="0" marL="0">
+              <a:buNone/>
+            </a:pPr>
             <a:r>
               <a:rPr lang="en-US" sz="2100" dirty="0">
                 <a:solidFill>
-                  <a:srgbClr val="17364A"/>
-                </a:solidFill>
-                <a:latin typeface="Aptos" pitchFamily="34" charset="0"/>
-                <a:ea typeface="Aptos" pitchFamily="34" charset="-122"/>
-                <a:cs typeface="Aptos" pitchFamily="34" charset="-120"/>
-              </a:rPr>
-              <a:t>Document use cases that are rejected, deferred, or approved with conditions.</a:t>
+                  <a:srgbClr val="003A63"/>
+                </a:solidFill>
+                <a:latin typeface="Aptos" pitchFamily="34" charset="0"/>
+                <a:ea typeface="Aptos" pitchFamily="34" charset="-122"/>
+                <a:cs typeface="Aptos" pitchFamily="34" charset="-120"/>
+              </a:rPr>
+              <a:t>• Document use cases that are rejected, deferred, or approved with conditions.</a:t>
             </a:r>
             <a:endParaRPr lang="en-US" sz="2100" dirty="0"/>
           </a:p>
           <a:p>
+            <a:pPr indent="0" marL="0">
+              <a:buNone/>
+            </a:pPr>
             <a:r>
               <a:rPr lang="en-US" sz="2100" dirty="0">
                 <a:solidFill>
-                  <a:srgbClr val="17364A"/>
-                </a:solidFill>
-                <a:latin typeface="Aptos" pitchFamily="34" charset="0"/>
-                <a:ea typeface="Aptos" pitchFamily="34" charset="-122"/>
-                <a:cs typeface="Aptos" pitchFamily="34" charset="-120"/>
-              </a:rPr>
-              <a:t>Maintain a portfolio view of approved, active, paused, and retired AI uses.</a:t>
+                  <a:srgbClr val="003A63"/>
+                </a:solidFill>
+                <a:latin typeface="Aptos" pitchFamily="34" charset="0"/>
+                <a:ea typeface="Aptos" pitchFamily="34" charset="-122"/>
+                <a:cs typeface="Aptos" pitchFamily="34" charset="-120"/>
+              </a:rPr>
+              <a:t>• Maintain a portfolio view of approved, active, paused, and retired AI uses.</a:t>
             </a:r>
             <a:endParaRPr lang="en-US" sz="2100" dirty="0"/>
           </a:p>
@@ -6331,17 +6412,17 @@
         </p:nvSpPr>
         <p:spPr>
           <a:xfrm>
-            <a:off x="7799832" y="1828800"/>
-            <a:ext cx="3145536" cy="685800"/>
-          </a:xfrm>
-          <a:prstGeom prst="rect">
-            <a:avLst/>
-          </a:prstGeom>
-          <a:noFill/>
-          <a:ln/>
-        </p:spPr>
-        <p:txBody>
-          <a:bodyPr wrap="square" lIns="0" tIns="0" rIns="0" bIns="0" rtlCol="0" anchor="t">
+            <a:off x="7799832" y="1801368"/>
+            <a:ext cx="3145536" cy="758952"/>
+          </a:xfrm>
+          <a:prstGeom prst="rect">
+            <a:avLst/>
+          </a:prstGeom>
+          <a:noFill/>
+          <a:ln/>
+        </p:spPr>
+        <p:txBody>
+          <a:bodyPr wrap="square" lIns="254" tIns="254" rIns="254" bIns="254" rtlCol="0" anchor="t">
             <a:normAutofit/>
           </a:bodyPr>
           <a:lstStyle/>
@@ -6350,7 +6431,7 @@
               <a:buNone/>
             </a:pPr>
             <a:r>
-              <a:rPr lang="en-US" sz="1550" dirty="0">
+              <a:rPr lang="en-US" sz="1320" dirty="0">
                 <a:solidFill>
                   <a:srgbClr val="17364A"/>
                 </a:solidFill>
@@ -6360,7 +6441,7 @@
               </a:rPr>
               <a:t>Route use cases to required reviewers before implementation begins.</a:t>
             </a:r>
-            <a:endParaRPr lang="en-US" sz="1550" dirty="0"/>
+            <a:endParaRPr lang="en-US" sz="1320" dirty="0"/>
           </a:p>
         </p:txBody>
       </p:sp>
@@ -6448,13 +6529,16 @@
           <a:ln/>
         </p:spPr>
         <p:txBody>
-          <a:bodyPr wrap="square" lIns="254" tIns="254" rIns="254" bIns="254" rtlCol="0" anchor="t">
+          <a:bodyPr wrap="square" lIns="508" tIns="508" rIns="508" bIns="508" rtlCol="0" anchor="t">
             <a:normAutofit/>
           </a:bodyPr>
           <a:lstStyle/>
           <a:p>
-            <a:r>
-              <a:rPr lang="en-US" sz="1380" dirty="0">
+            <a:pPr indent="0" marL="0">
+              <a:buNone/>
+            </a:pPr>
+            <a:r>
+              <a:rPr lang="en-US" sz="1220" dirty="0">
                 <a:solidFill>
                   <a:srgbClr val="17364A"/>
                 </a:solidFill>
@@ -6464,11 +6548,14 @@
               </a:rPr>
               <a:t>Route use cases to required reviewers before implementation begins.</a:t>
             </a:r>
-            <a:endParaRPr lang="en-US" sz="1380" dirty="0"/>
-          </a:p>
-          <a:p>
-            <a:r>
-              <a:rPr lang="en-US" sz="1380" dirty="0">
+            <a:endParaRPr lang="en-US" sz="1220" dirty="0"/>
+          </a:p>
+          <a:p>
+            <a:pPr indent="0" marL="0">
+              <a:buNone/>
+            </a:pPr>
+            <a:r>
+              <a:rPr lang="en-US" sz="1220" dirty="0">
                 <a:solidFill>
                   <a:srgbClr val="17364A"/>
                 </a:solidFill>
@@ -6476,13 +6563,16 @@
                 <a:ea typeface="Aptos" pitchFamily="34" charset="-122"/>
                 <a:cs typeface="Aptos" pitchFamily="34" charset="-120"/>
               </a:rPr>
-              <a:t>Document use cases that are rejected, deferred, or approved with conditions.</a:t>
-            </a:r>
-            <a:endParaRPr lang="en-US" sz="1380" dirty="0"/>
-          </a:p>
-          <a:p>
-            <a:r>
-              <a:rPr lang="en-US" sz="1380" dirty="0">
+              <a:t>Document use cases that are rejected, deferred, or approved with.</a:t>
+            </a:r>
+            <a:endParaRPr lang="en-US" sz="1220" dirty="0"/>
+          </a:p>
+          <a:p>
+            <a:pPr indent="0" marL="0">
+              <a:buNone/>
+            </a:pPr>
+            <a:r>
+              <a:rPr lang="en-US" sz="1220" dirty="0">
                 <a:solidFill>
                   <a:srgbClr val="17364A"/>
                 </a:solidFill>
@@ -6490,9 +6580,9 @@
                 <a:ea typeface="Aptos" pitchFamily="34" charset="-122"/>
                 <a:cs typeface="Aptos" pitchFamily="34" charset="-120"/>
               </a:rPr>
-              <a:t>Maintain a portfolio view of approved, active, paused, and retired AI uses.</a:t>
-            </a:r>
-            <a:endParaRPr lang="en-US" sz="1380" dirty="0"/>
+              <a:t>Maintain a portfolio view of approved, active, paused, and retired.</a:t>
+            </a:r>
+            <a:endParaRPr lang="en-US" sz="1220" dirty="0"/>
           </a:p>
         </p:txBody>
       </p:sp>
@@ -6570,17 +6660,17 @@
         </p:nvSpPr>
         <p:spPr>
           <a:xfrm>
-            <a:off x="7799832" y="5001768"/>
-            <a:ext cx="3145536" cy="502920"/>
-          </a:xfrm>
-          <a:prstGeom prst="rect">
-            <a:avLst/>
-          </a:prstGeom>
-          <a:noFill/>
-          <a:ln/>
-        </p:spPr>
-        <p:txBody>
-          <a:bodyPr wrap="square" lIns="0" tIns="0" rIns="0" bIns="0" rtlCol="0" anchor="t">
+            <a:off x="7799832" y="4974336"/>
+            <a:ext cx="3145536" cy="576072"/>
+          </a:xfrm>
+          <a:prstGeom prst="rect">
+            <a:avLst/>
+          </a:prstGeom>
+          <a:noFill/>
+          <a:ln/>
+        </p:spPr>
+        <p:txBody>
+          <a:bodyPr wrap="square" lIns="254" tIns="254" rIns="254" bIns="254" rtlCol="0" anchor="t">
             <a:normAutofit/>
           </a:bodyPr>
           <a:lstStyle/>
@@ -6589,7 +6679,7 @@
               <a:buNone/>
             </a:pPr>
             <a:r>
-              <a:rPr lang="en-US" sz="1550" dirty="0">
+              <a:rPr lang="en-US" sz="1320" dirty="0">
                 <a:solidFill>
                   <a:srgbClr val="17364A"/>
                 </a:solidFill>
@@ -6597,9 +6687,9 @@
                 <a:ea typeface="Aptos" pitchFamily="34" charset="-122"/>
                 <a:cs typeface="Aptos" pitchFamily="34" charset="-120"/>
               </a:rPr>
-              <a:t>Identify what could go wrong, who could be affected, what safeguards are needed, and what evidence should be reviewed before use expands.</a:t>
-            </a:r>
-            <a:endParaRPr lang="en-US" sz="1550" dirty="0"/>
+              <a:t>Identify what could go wrong, who could be affected, what safeguards are needed, and what evidence should be reviewed.</a:t>
+            </a:r>
+            <a:endParaRPr lang="en-US" sz="1320" dirty="0"/>
           </a:p>
         </p:txBody>
       </p:sp>
@@ -6900,49 +6990,58 @@
           <a:ln/>
         </p:spPr>
         <p:txBody>
-          <a:bodyPr wrap="square" lIns="635" tIns="635" rIns="635" bIns="635" rtlCol="0" anchor="t">
+          <a:bodyPr wrap="square" lIns="1016" tIns="1016" rIns="1016" bIns="1016" rtlCol="0" anchor="t">
             <a:normAutofit/>
           </a:bodyPr>
           <a:lstStyle/>
           <a:p>
+            <a:pPr indent="0" marL="0">
+              <a:buNone/>
+            </a:pPr>
             <a:r>
               <a:rPr lang="en-US" sz="2100" dirty="0">
                 <a:solidFill>
-                  <a:srgbClr val="17364A"/>
-                </a:solidFill>
-                <a:latin typeface="Aptos" pitchFamily="34" charset="0"/>
-                <a:ea typeface="Aptos" pitchFamily="34" charset="-122"/>
-                <a:cs typeface="Aptos" pitchFamily="34" charset="-120"/>
-              </a:rPr>
-              <a:t>Where does this topic appear in your agency, program, or workflow?</a:t>
+                  <a:srgbClr val="003A63"/>
+                </a:solidFill>
+                <a:latin typeface="Aptos" pitchFamily="34" charset="0"/>
+                <a:ea typeface="Aptos" pitchFamily="34" charset="-122"/>
+                <a:cs typeface="Aptos" pitchFamily="34" charset="-120"/>
+              </a:rPr>
+              <a:t>• Where does this topic appear in your agency, program, or workflow?</a:t>
             </a:r>
             <a:endParaRPr lang="en-US" sz="2100" dirty="0"/>
           </a:p>
           <a:p>
+            <a:pPr indent="0" marL="0">
+              <a:buNone/>
+            </a:pPr>
             <a:r>
               <a:rPr lang="en-US" sz="2100" dirty="0">
                 <a:solidFill>
-                  <a:srgbClr val="17364A"/>
-                </a:solidFill>
-                <a:latin typeface="Aptos" pitchFamily="34" charset="0"/>
-                <a:ea typeface="Aptos" pitchFamily="34" charset="-122"/>
-                <a:cs typeface="Aptos" pitchFamily="34" charset="-120"/>
-              </a:rPr>
-              <a:t>Which staff roles would need to understand or apply this concept before AI use is approved?</a:t>
+                  <a:srgbClr val="003A63"/>
+                </a:solidFill>
+                <a:latin typeface="Aptos" pitchFamily="34" charset="0"/>
+                <a:ea typeface="Aptos" pitchFamily="34" charset="-122"/>
+                <a:cs typeface="Aptos" pitchFamily="34" charset="-120"/>
+              </a:rPr>
+              <a:t>• Which staff roles would need to understand or apply this concept before AI use is approved?</a:t>
             </a:r>
             <a:endParaRPr lang="en-US" sz="2100" dirty="0"/>
           </a:p>
           <a:p>
+            <a:pPr indent="0" marL="0">
+              <a:buNone/>
+            </a:pPr>
             <a:r>
               <a:rPr lang="en-US" sz="2100" dirty="0">
                 <a:solidFill>
-                  <a:srgbClr val="17364A"/>
-                </a:solidFill>
-                <a:latin typeface="Aptos" pitchFamily="34" charset="0"/>
-                <a:ea typeface="Aptos" pitchFamily="34" charset="-122"/>
-                <a:cs typeface="Aptos" pitchFamily="34" charset="-120"/>
-              </a:rPr>
-              <a:t>What could go wrong if this topic is not addressed before implementation?</a:t>
+                  <a:srgbClr val="003A63"/>
+                </a:solidFill>
+                <a:latin typeface="Aptos" pitchFamily="34" charset="0"/>
+                <a:ea typeface="Aptos" pitchFamily="34" charset="-122"/>
+                <a:cs typeface="Aptos" pitchFamily="34" charset="-120"/>
+              </a:rPr>
+              <a:t>• What could go wrong if this topic is not addressed before implementation?</a:t>
             </a:r>
             <a:endParaRPr lang="en-US" sz="2100" dirty="0"/>
           </a:p>
@@ -7022,17 +7121,17 @@
         </p:nvSpPr>
         <p:spPr>
           <a:xfrm>
-            <a:off x="7799832" y="1828800"/>
-            <a:ext cx="3145536" cy="685800"/>
-          </a:xfrm>
-          <a:prstGeom prst="rect">
-            <a:avLst/>
-          </a:prstGeom>
-          <a:noFill/>
-          <a:ln/>
-        </p:spPr>
-        <p:txBody>
-          <a:bodyPr wrap="square" lIns="0" tIns="0" rIns="0" bIns="0" rtlCol="0" anchor="t">
+            <a:off x="7799832" y="1801368"/>
+            <a:ext cx="3145536" cy="758952"/>
+          </a:xfrm>
+          <a:prstGeom prst="rect">
+            <a:avLst/>
+          </a:prstGeom>
+          <a:noFill/>
+          <a:ln/>
+        </p:spPr>
+        <p:txBody>
+          <a:bodyPr wrap="square" lIns="254" tIns="254" rIns="254" bIns="254" rtlCol="0" anchor="t">
             <a:normAutofit/>
           </a:bodyPr>
           <a:lstStyle/>
@@ -7041,7 +7140,7 @@
               <a:buNone/>
             </a:pPr>
             <a:r>
-              <a:rPr lang="en-US" sz="1550" dirty="0">
+              <a:rPr lang="en-US" sz="1320" dirty="0">
                 <a:solidFill>
                   <a:srgbClr val="17364A"/>
                 </a:solidFill>
@@ -7051,7 +7150,7 @@
               </a:rPr>
               <a:t>Where does this topic appear in your agency, program, or workflow?</a:t>
             </a:r>
-            <a:endParaRPr lang="en-US" sz="1550" dirty="0"/>
+            <a:endParaRPr lang="en-US" sz="1320" dirty="0"/>
           </a:p>
         </p:txBody>
       </p:sp>
@@ -7139,13 +7238,16 @@
           <a:ln/>
         </p:spPr>
         <p:txBody>
-          <a:bodyPr wrap="square" lIns="254" tIns="254" rIns="254" bIns="254" rtlCol="0" anchor="t">
+          <a:bodyPr wrap="square" lIns="508" tIns="508" rIns="508" bIns="508" rtlCol="0" anchor="t">
             <a:normAutofit/>
           </a:bodyPr>
           <a:lstStyle/>
           <a:p>
-            <a:r>
-              <a:rPr lang="en-US" sz="1380" dirty="0">
+            <a:pPr indent="0" marL="0">
+              <a:buNone/>
+            </a:pPr>
+            <a:r>
+              <a:rPr lang="en-US" sz="1220" dirty="0">
                 <a:solidFill>
                   <a:srgbClr val="17364A"/>
                 </a:solidFill>
@@ -7155,11 +7257,14 @@
               </a:rPr>
               <a:t>Where does this topic appear in your agency, program, or workflow?</a:t>
             </a:r>
-            <a:endParaRPr lang="en-US" sz="1380" dirty="0"/>
-          </a:p>
-          <a:p>
-            <a:r>
-              <a:rPr lang="en-US" sz="1380" dirty="0">
+            <a:endParaRPr lang="en-US" sz="1220" dirty="0"/>
+          </a:p>
+          <a:p>
+            <a:pPr indent="0" marL="0">
+              <a:buNone/>
+            </a:pPr>
+            <a:r>
+              <a:rPr lang="en-US" sz="1220" dirty="0">
                 <a:solidFill>
                   <a:srgbClr val="17364A"/>
                 </a:solidFill>
@@ -7167,13 +7272,16 @@
                 <a:ea typeface="Aptos" pitchFamily="34" charset="-122"/>
                 <a:cs typeface="Aptos" pitchFamily="34" charset="-120"/>
               </a:rPr>
-              <a:t>Which staff roles would need to understand or apply this concept before AI use is approved?</a:t>
-            </a:r>
-            <a:endParaRPr lang="en-US" sz="1380" dirty="0"/>
-          </a:p>
-          <a:p>
-            <a:r>
-              <a:rPr lang="en-US" sz="1380" dirty="0">
+              <a:t>Which staff roles would need to understand or apply this concept.</a:t>
+            </a:r>
+            <a:endParaRPr lang="en-US" sz="1220" dirty="0"/>
+          </a:p>
+          <a:p>
+            <a:pPr indent="0" marL="0">
+              <a:buNone/>
+            </a:pPr>
+            <a:r>
+              <a:rPr lang="en-US" sz="1220" dirty="0">
                 <a:solidFill>
                   <a:srgbClr val="17364A"/>
                 </a:solidFill>
@@ -7181,9 +7289,9 @@
                 <a:ea typeface="Aptos" pitchFamily="34" charset="-122"/>
                 <a:cs typeface="Aptos" pitchFamily="34" charset="-120"/>
               </a:rPr>
-              <a:t>What could go wrong if this topic is not addressed before implementation?</a:t>
-            </a:r>
-            <a:endParaRPr lang="en-US" sz="1380" dirty="0"/>
+              <a:t>What could go wrong if this topic is not addressed before.</a:t>
+            </a:r>
+            <a:endParaRPr lang="en-US" sz="1220" dirty="0"/>
           </a:p>
         </p:txBody>
       </p:sp>
@@ -7261,17 +7369,17 @@
         </p:nvSpPr>
         <p:spPr>
           <a:xfrm>
-            <a:off x="7799832" y="5001768"/>
-            <a:ext cx="3145536" cy="502920"/>
-          </a:xfrm>
-          <a:prstGeom prst="rect">
-            <a:avLst/>
-          </a:prstGeom>
-          <a:noFill/>
-          <a:ln/>
-        </p:spPr>
-        <p:txBody>
-          <a:bodyPr wrap="square" lIns="0" tIns="0" rIns="0" bIns="0" rtlCol="0" anchor="t">
+            <a:off x="7799832" y="4974336"/>
+            <a:ext cx="3145536" cy="576072"/>
+          </a:xfrm>
+          <a:prstGeom prst="rect">
+            <a:avLst/>
+          </a:prstGeom>
+          <a:noFill/>
+          <a:ln/>
+        </p:spPr>
+        <p:txBody>
+          <a:bodyPr wrap="square" lIns="254" tIns="254" rIns="254" bIns="254" rtlCol="0" anchor="t">
             <a:normAutofit/>
           </a:bodyPr>
           <a:lstStyle/>
@@ -7280,7 +7388,7 @@
               <a:buNone/>
             </a:pPr>
             <a:r>
-              <a:rPr lang="en-US" sz="1550" dirty="0">
+              <a:rPr lang="en-US" sz="1320" dirty="0">
                 <a:solidFill>
                   <a:srgbClr val="17364A"/>
                 </a:solidFill>
@@ -7288,9 +7396,9 @@
                 <a:ea typeface="Aptos" pitchFamily="34" charset="-122"/>
                 <a:cs typeface="Aptos" pitchFamily="34" charset="-120"/>
               </a:rPr>
-              <a:t>Connect the concept to public health purpose, responsible use, required safeguards, documentation, and the next action a department should take.</a:t>
-            </a:r>
-            <a:endParaRPr lang="en-US" sz="1550" dirty="0"/>
+              <a:t>Connect the concept to public health purpose, responsible use, required safeguards, documentation, and the next action a.</a:t>
+            </a:r>
+            <a:endParaRPr lang="en-US" sz="1320" dirty="0"/>
           </a:p>
         </p:txBody>
       </p:sp>
@@ -7591,35 +7699,41 @@
           <a:ln/>
         </p:spPr>
         <p:txBody>
-          <a:bodyPr wrap="square" lIns="635" tIns="635" rIns="635" bIns="635" rtlCol="0" anchor="t">
+          <a:bodyPr wrap="square" lIns="1016" tIns="1016" rIns="1016" bIns="1016" rtlCol="0" anchor="t">
             <a:normAutofit/>
           </a:bodyPr>
           <a:lstStyle/>
           <a:p>
+            <a:pPr indent="0" marL="0">
+              <a:buNone/>
+            </a:pPr>
             <a:r>
               <a:rPr lang="en-US" sz="2100" dirty="0">
                 <a:solidFill>
-                  <a:srgbClr val="17364A"/>
-                </a:solidFill>
-                <a:latin typeface="Aptos" pitchFamily="34" charset="0"/>
-                <a:ea typeface="Aptos" pitchFamily="34" charset="-122"/>
-                <a:cs typeface="Aptos" pitchFamily="34" charset="-120"/>
-              </a:rPr>
-              <a:t>What evidence would governance, leadership, or operations staff need before moving forward?</a:t>
+                  <a:srgbClr val="003A63"/>
+                </a:solidFill>
+                <a:latin typeface="Aptos" pitchFamily="34" charset="0"/>
+                <a:ea typeface="Aptos" pitchFamily="34" charset="-122"/>
+                <a:cs typeface="Aptos" pitchFamily="34" charset="-120"/>
+              </a:rPr>
+              <a:t>• What evidence would governance, leadership, or operations staff need before moving forward?</a:t>
             </a:r>
             <a:endParaRPr lang="en-US" sz="2100" dirty="0"/>
           </a:p>
           <a:p>
+            <a:pPr indent="0" marL="0">
+              <a:buNone/>
+            </a:pPr>
             <a:r>
               <a:rPr lang="en-US" sz="2100" dirty="0">
                 <a:solidFill>
-                  <a:srgbClr val="17364A"/>
-                </a:solidFill>
-                <a:latin typeface="Aptos" pitchFamily="34" charset="0"/>
-                <a:ea typeface="Aptos" pitchFamily="34" charset="-122"/>
-                <a:cs typeface="Aptos" pitchFamily="34" charset="-120"/>
-              </a:rPr>
-              <a:t>Which policy, data, equity, privacy, security, or workflow questions remain unresolved?</a:t>
+                  <a:srgbClr val="003A63"/>
+                </a:solidFill>
+                <a:latin typeface="Aptos" pitchFamily="34" charset="0"/>
+                <a:ea typeface="Aptos" pitchFamily="34" charset="-122"/>
+                <a:cs typeface="Aptos" pitchFamily="34" charset="-120"/>
+              </a:rPr>
+              <a:t>• Which policy, data, equity, privacy, security, or workflow questions remain unresolved?</a:t>
             </a:r>
             <a:endParaRPr lang="en-US" sz="2100" dirty="0"/>
           </a:p>
@@ -7699,17 +7813,17 @@
         </p:nvSpPr>
         <p:spPr>
           <a:xfrm>
-            <a:off x="7799832" y="1828800"/>
-            <a:ext cx="3145536" cy="685800"/>
-          </a:xfrm>
-          <a:prstGeom prst="rect">
-            <a:avLst/>
-          </a:prstGeom>
-          <a:noFill/>
-          <a:ln/>
-        </p:spPr>
-        <p:txBody>
-          <a:bodyPr wrap="square" lIns="0" tIns="0" rIns="0" bIns="0" rtlCol="0" anchor="t">
+            <a:off x="7799832" y="1801368"/>
+            <a:ext cx="3145536" cy="758952"/>
+          </a:xfrm>
+          <a:prstGeom prst="rect">
+            <a:avLst/>
+          </a:prstGeom>
+          <a:noFill/>
+          <a:ln/>
+        </p:spPr>
+        <p:txBody>
+          <a:bodyPr wrap="square" lIns="254" tIns="254" rIns="254" bIns="254" rtlCol="0" anchor="t">
             <a:normAutofit/>
           </a:bodyPr>
           <a:lstStyle/>
@@ -7718,7 +7832,7 @@
               <a:buNone/>
             </a:pPr>
             <a:r>
-              <a:rPr lang="en-US" sz="1550" dirty="0">
+              <a:rPr lang="en-US" sz="1320" dirty="0">
                 <a:solidFill>
                   <a:srgbClr val="17364A"/>
                 </a:solidFill>
@@ -7728,7 +7842,7 @@
               </a:rPr>
               <a:t>What evidence would governance, leadership, or operations staff need before moving forward?</a:t>
             </a:r>
-            <a:endParaRPr lang="en-US" sz="1550" dirty="0"/>
+            <a:endParaRPr lang="en-US" sz="1320" dirty="0"/>
           </a:p>
         </p:txBody>
       </p:sp>
@@ -7816,13 +7930,16 @@
           <a:ln/>
         </p:spPr>
         <p:txBody>
-          <a:bodyPr wrap="square" lIns="254" tIns="254" rIns="254" bIns="254" rtlCol="0" anchor="t">
+          <a:bodyPr wrap="square" lIns="508" tIns="508" rIns="508" bIns="508" rtlCol="0" anchor="t">
             <a:normAutofit/>
           </a:bodyPr>
           <a:lstStyle/>
           <a:p>
-            <a:r>
-              <a:rPr lang="en-US" sz="1380" dirty="0">
+            <a:pPr indent="0" marL="0">
+              <a:buNone/>
+            </a:pPr>
+            <a:r>
+              <a:rPr lang="en-US" sz="1220" dirty="0">
                 <a:solidFill>
                   <a:srgbClr val="17364A"/>
                 </a:solidFill>
@@ -7830,13 +7947,16 @@
                 <a:ea typeface="Aptos" pitchFamily="34" charset="-122"/>
                 <a:cs typeface="Aptos" pitchFamily="34" charset="-120"/>
               </a:rPr>
-              <a:t>What evidence would governance, leadership, or operations staff need before moving forward?</a:t>
-            </a:r>
-            <a:endParaRPr lang="en-US" sz="1380" dirty="0"/>
-          </a:p>
-          <a:p>
-            <a:r>
-              <a:rPr lang="en-US" sz="1380" dirty="0">
+              <a:t>What evidence would governance, leadership, or operations staff.</a:t>
+            </a:r>
+            <a:endParaRPr lang="en-US" sz="1220" dirty="0"/>
+          </a:p>
+          <a:p>
+            <a:pPr indent="0" marL="0">
+              <a:buNone/>
+            </a:pPr>
+            <a:r>
+              <a:rPr lang="en-US" sz="1220" dirty="0">
                 <a:solidFill>
                   <a:srgbClr val="17364A"/>
                 </a:solidFill>
@@ -7844,9 +7964,9 @@
                 <a:ea typeface="Aptos" pitchFamily="34" charset="-122"/>
                 <a:cs typeface="Aptos" pitchFamily="34" charset="-120"/>
               </a:rPr>
-              <a:t>Which policy, data, equity, privacy, security, or workflow questions remain unresolved?</a:t>
-            </a:r>
-            <a:endParaRPr lang="en-US" sz="1380" dirty="0"/>
+              <a:t>Which policy, data, equity, privacy, security, or workflow.</a:t>
+            </a:r>
+            <a:endParaRPr lang="en-US" sz="1220" dirty="0"/>
           </a:p>
         </p:txBody>
       </p:sp>
@@ -7924,17 +8044,17 @@
         </p:nvSpPr>
         <p:spPr>
           <a:xfrm>
-            <a:off x="7799832" y="5001768"/>
-            <a:ext cx="3145536" cy="502920"/>
-          </a:xfrm>
-          <a:prstGeom prst="rect">
-            <a:avLst/>
-          </a:prstGeom>
-          <a:noFill/>
-          <a:ln/>
-        </p:spPr>
-        <p:txBody>
-          <a:bodyPr wrap="square" lIns="0" tIns="0" rIns="0" bIns="0" rtlCol="0" anchor="t">
+            <a:off x="7799832" y="4974336"/>
+            <a:ext cx="3145536" cy="576072"/>
+          </a:xfrm>
+          <a:prstGeom prst="rect">
+            <a:avLst/>
+          </a:prstGeom>
+          <a:noFill/>
+          <a:ln/>
+        </p:spPr>
+        <p:txBody>
+          <a:bodyPr wrap="square" lIns="254" tIns="254" rIns="254" bIns="254" rtlCol="0" anchor="t">
             <a:normAutofit/>
           </a:bodyPr>
           <a:lstStyle/>
@@ -7943,7 +8063,7 @@
               <a:buNone/>
             </a:pPr>
             <a:r>
-              <a:rPr lang="en-US" sz="1550" dirty="0">
+              <a:rPr lang="en-US" sz="1320" dirty="0">
                 <a:solidFill>
                   <a:srgbClr val="17364A"/>
                 </a:solidFill>
@@ -7951,9 +8071,9 @@
                 <a:ea typeface="Aptos" pitchFamily="34" charset="-122"/>
                 <a:cs typeface="Aptos" pitchFamily="34" charset="-120"/>
               </a:rPr>
-              <a:t>Connect the concept to public health purpose, responsible use, required safeguards, documentation, and the next action a department should take.</a:t>
-            </a:r>
-            <a:endParaRPr lang="en-US" sz="1550" dirty="0"/>
+              <a:t>Connect the concept to public health purpose, responsible use, required safeguards, documentation, and the next action a.</a:t>
+            </a:r>
+            <a:endParaRPr lang="en-US" sz="1320" dirty="0"/>
           </a:p>
         </p:txBody>
       </p:sp>
@@ -8254,35 +8374,41 @@
           <a:ln/>
         </p:spPr>
         <p:txBody>
-          <a:bodyPr wrap="square" lIns="635" tIns="635" rIns="635" bIns="635" rtlCol="0" anchor="t">
+          <a:bodyPr wrap="square" lIns="1016" tIns="1016" rIns="1016" bIns="1016" rtlCol="0" anchor="t">
             <a:normAutofit/>
           </a:bodyPr>
           <a:lstStyle/>
           <a:p>
+            <a:pPr indent="0" marL="0">
+              <a:buNone/>
+            </a:pPr>
             <a:r>
               <a:rPr lang="en-US" sz="2100" dirty="0">
                 <a:solidFill>
-                  <a:srgbClr val="17364A"/>
-                </a:solidFill>
-                <a:latin typeface="Aptos" pitchFamily="34" charset="0"/>
-                <a:ea typeface="Aptos" pitchFamily="34" charset="-122"/>
-                <a:cs typeface="Aptos" pitchFamily="34" charset="-120"/>
-              </a:rPr>
-              <a:t>Complete a use case intake and triage worksheet for one real or realistic public health workflow.</a:t>
+                  <a:srgbClr val="003A63"/>
+                </a:solidFill>
+                <a:latin typeface="Aptos" pitchFamily="34" charset="0"/>
+                <a:ea typeface="Aptos" pitchFamily="34" charset="-122"/>
+                <a:cs typeface="Aptos" pitchFamily="34" charset="-120"/>
+              </a:rPr>
+              <a:t>• Complete a use case intake and triage worksheet for one real or realistic public health.</a:t>
             </a:r>
             <a:endParaRPr lang="en-US" sz="2100" dirty="0"/>
           </a:p>
           <a:p>
+            <a:pPr indent="0" marL="0">
+              <a:buNone/>
+            </a:pPr>
             <a:r>
               <a:rPr lang="en-US" sz="2100" dirty="0">
                 <a:solidFill>
-                  <a:srgbClr val="17364A"/>
-                </a:solidFill>
-                <a:latin typeface="Aptos" pitchFamily="34" charset="0"/>
-                <a:ea typeface="Aptos" pitchFamily="34" charset="-122"/>
-                <a:cs typeface="Aptos" pitchFamily="34" charset="-120"/>
-              </a:rPr>
-              <a:t>Include the problem statement, workflow, intended users, data sources, AI-supported task, output,.</a:t>
+                  <a:srgbClr val="003A63"/>
+                </a:solidFill>
+                <a:latin typeface="Aptos" pitchFamily="34" charset="0"/>
+                <a:ea typeface="Aptos" pitchFamily="34" charset="-122"/>
+                <a:cs typeface="Aptos" pitchFamily="34" charset="-120"/>
+              </a:rPr>
+              <a:t>• Include the problem statement, workflow, intended users, data sources, AI-supported task,.</a:t>
             </a:r>
             <a:endParaRPr lang="en-US" sz="2100" dirty="0"/>
           </a:p>
@@ -8362,17 +8488,17 @@
         </p:nvSpPr>
         <p:spPr>
           <a:xfrm>
-            <a:off x="7799832" y="1828800"/>
-            <a:ext cx="3145536" cy="685800"/>
-          </a:xfrm>
-          <a:prstGeom prst="rect">
-            <a:avLst/>
-          </a:prstGeom>
-          <a:noFill/>
-          <a:ln/>
-        </p:spPr>
-        <p:txBody>
-          <a:bodyPr wrap="square" lIns="0" tIns="0" rIns="0" bIns="0" rtlCol="0" anchor="t">
+            <a:off x="7799832" y="1801368"/>
+            <a:ext cx="3145536" cy="758952"/>
+          </a:xfrm>
+          <a:prstGeom prst="rect">
+            <a:avLst/>
+          </a:prstGeom>
+          <a:noFill/>
+          <a:ln/>
+        </p:spPr>
+        <p:txBody>
+          <a:bodyPr wrap="square" lIns="254" tIns="254" rIns="254" bIns="254" rtlCol="0" anchor="t">
             <a:normAutofit/>
           </a:bodyPr>
           <a:lstStyle/>
@@ -8381,7 +8507,7 @@
               <a:buNone/>
             </a:pPr>
             <a:r>
-              <a:rPr lang="en-US" sz="1550" dirty="0">
+              <a:rPr lang="en-US" sz="1320" dirty="0">
                 <a:solidFill>
                   <a:srgbClr val="17364A"/>
                 </a:solidFill>
@@ -8391,7 +8517,7 @@
               </a:rPr>
               <a:t>Complete a use case intake and triage worksheet for one real or realistic public health workflow.</a:t>
             </a:r>
-            <a:endParaRPr lang="en-US" sz="1550" dirty="0"/>
+            <a:endParaRPr lang="en-US" sz="1320" dirty="0"/>
           </a:p>
         </p:txBody>
       </p:sp>
@@ -8479,13 +8605,16 @@
           <a:ln/>
         </p:spPr>
         <p:txBody>
-          <a:bodyPr wrap="square" lIns="254" tIns="254" rIns="254" bIns="254" rtlCol="0" anchor="t">
+          <a:bodyPr wrap="square" lIns="508" tIns="508" rIns="508" bIns="508" rtlCol="0" anchor="t">
             <a:normAutofit/>
           </a:bodyPr>
           <a:lstStyle/>
           <a:p>
-            <a:r>
-              <a:rPr lang="en-US" sz="1380" dirty="0">
+            <a:pPr indent="0" marL="0">
+              <a:buNone/>
+            </a:pPr>
+            <a:r>
+              <a:rPr lang="en-US" sz="1220" dirty="0">
                 <a:solidFill>
                   <a:srgbClr val="17364A"/>
                 </a:solidFill>
@@ -8493,13 +8622,16 @@
                 <a:ea typeface="Aptos" pitchFamily="34" charset="-122"/>
                 <a:cs typeface="Aptos" pitchFamily="34" charset="-120"/>
               </a:rPr>
-              <a:t>Complete a use case intake and triage worksheet for one real or realistic public health.</a:t>
-            </a:r>
-            <a:endParaRPr lang="en-US" sz="1380" dirty="0"/>
-          </a:p>
-          <a:p>
-            <a:r>
-              <a:rPr lang="en-US" sz="1380" dirty="0">
+              <a:t>Complete a use case intake and triage worksheet for one real or.</a:t>
+            </a:r>
+            <a:endParaRPr lang="en-US" sz="1220" dirty="0"/>
+          </a:p>
+          <a:p>
+            <a:pPr indent="0" marL="0">
+              <a:buNone/>
+            </a:pPr>
+            <a:r>
+              <a:rPr lang="en-US" sz="1220" dirty="0">
                 <a:solidFill>
                   <a:srgbClr val="17364A"/>
                 </a:solidFill>
@@ -8507,9 +8639,9 @@
                 <a:ea typeface="Aptos" pitchFamily="34" charset="-122"/>
                 <a:cs typeface="Aptos" pitchFamily="34" charset="-120"/>
               </a:rPr>
-              <a:t>Include the problem statement, workflow, intended users, data sources, AI-supported task,.</a:t>
-            </a:r>
-            <a:endParaRPr lang="en-US" sz="1380" dirty="0"/>
+              <a:t>Include the problem statement, workflow, intended users, data.</a:t>
+            </a:r>
+            <a:endParaRPr lang="en-US" sz="1220" dirty="0"/>
           </a:p>
         </p:txBody>
       </p:sp>
@@ -8587,17 +8719,17 @@
         </p:nvSpPr>
         <p:spPr>
           <a:xfrm>
-            <a:off x="7799832" y="5001768"/>
-            <a:ext cx="3145536" cy="502920"/>
-          </a:xfrm>
-          <a:prstGeom prst="rect">
-            <a:avLst/>
-          </a:prstGeom>
-          <a:noFill/>
-          <a:ln/>
-        </p:spPr>
-        <p:txBody>
-          <a:bodyPr wrap="square" lIns="0" tIns="0" rIns="0" bIns="0" rtlCol="0" anchor="t">
+            <a:off x="7799832" y="4974336"/>
+            <a:ext cx="3145536" cy="576072"/>
+          </a:xfrm>
+          <a:prstGeom prst="rect">
+            <a:avLst/>
+          </a:prstGeom>
+          <a:noFill/>
+          <a:ln/>
+        </p:spPr>
+        <p:txBody>
+          <a:bodyPr wrap="square" lIns="254" tIns="254" rIns="254" bIns="254" rtlCol="0" anchor="t">
             <a:normAutofit/>
           </a:bodyPr>
           <a:lstStyle/>
@@ -8606,7 +8738,7 @@
               <a:buNone/>
             </a:pPr>
             <a:r>
-              <a:rPr lang="en-US" sz="1550" dirty="0">
+              <a:rPr lang="en-US" sz="1320" dirty="0">
                 <a:solidFill>
                   <a:srgbClr val="17364A"/>
                 </a:solidFill>
@@ -8614,9 +8746,9 @@
                 <a:ea typeface="Aptos" pitchFamily="34" charset="-122"/>
                 <a:cs typeface="Aptos" pitchFamily="34" charset="-120"/>
               </a:rPr>
-              <a:t>Use the assignment to test whether you can explain the concept, apply it to a realistic public health situation, and identify what would need review before the work moves forward.</a:t>
-            </a:r>
-            <a:endParaRPr lang="en-US" sz="1550" dirty="0"/>
+              <a:t>Use the assignment to test whether you can explain the concept, apply it to a realistic public health situation, and.</a:t>
+            </a:r>
+            <a:endParaRPr lang="en-US" sz="1320" dirty="0"/>
           </a:p>
         </p:txBody>
       </p:sp>
@@ -8917,49 +9049,58 @@
           <a:ln/>
         </p:spPr>
         <p:txBody>
-          <a:bodyPr wrap="square" lIns="635" tIns="635" rIns="635" bIns="635" rtlCol="0" anchor="t">
+          <a:bodyPr wrap="square" lIns="1016" tIns="1016" rIns="1016" bIns="1016" rtlCol="0" anchor="t">
             <a:normAutofit/>
           </a:bodyPr>
           <a:lstStyle/>
           <a:p>
+            <a:pPr indent="0" marL="0">
+              <a:buNone/>
+            </a:pPr>
             <a:r>
               <a:rPr lang="en-US" sz="2100" dirty="0">
                 <a:solidFill>
-                  <a:srgbClr val="17364A"/>
-                </a:solidFill>
-                <a:latin typeface="Aptos" pitchFamily="34" charset="0"/>
-                <a:ea typeface="Aptos" pitchFamily="34" charset="-122"/>
-                <a:cs typeface="Aptos" pitchFamily="34" charset="-120"/>
-              </a:rPr>
-              <a:t>Completed AI use case intake worksheet</a:t>
+                  <a:srgbClr val="003A63"/>
+                </a:solidFill>
+                <a:latin typeface="Aptos" pitchFamily="34" charset="0"/>
+                <a:ea typeface="Aptos" pitchFamily="34" charset="-122"/>
+                <a:cs typeface="Aptos" pitchFamily="34" charset="-120"/>
+              </a:rPr>
+              <a:t>• Completed AI use case intake worksheet</a:t>
             </a:r>
             <a:endParaRPr lang="en-US" sz="2100" dirty="0"/>
           </a:p>
           <a:p>
+            <a:pPr indent="0" marL="0">
+              <a:buNone/>
+            </a:pPr>
             <a:r>
               <a:rPr lang="en-US" sz="2100" dirty="0">
                 <a:solidFill>
-                  <a:srgbClr val="17364A"/>
-                </a:solidFill>
-                <a:latin typeface="Aptos" pitchFamily="34" charset="0"/>
-                <a:ea typeface="Aptos" pitchFamily="34" charset="-122"/>
-                <a:cs typeface="Aptos" pitchFamily="34" charset="-120"/>
-              </a:rPr>
-              <a:t>Risk and readiness triage decision</a:t>
+                  <a:srgbClr val="003A63"/>
+                </a:solidFill>
+                <a:latin typeface="Aptos" pitchFamily="34" charset="0"/>
+                <a:ea typeface="Aptos" pitchFamily="34" charset="-122"/>
+                <a:cs typeface="Aptos" pitchFamily="34" charset="-120"/>
+              </a:rPr>
+              <a:t>• Risk and readiness triage decision</a:t>
             </a:r>
             <a:endParaRPr lang="en-US" sz="2100" dirty="0"/>
           </a:p>
           <a:p>
+            <a:pPr indent="0" marL="0">
+              <a:buNone/>
+            </a:pPr>
             <a:r>
               <a:rPr lang="en-US" sz="2100" dirty="0">
                 <a:solidFill>
-                  <a:srgbClr val="17364A"/>
-                </a:solidFill>
-                <a:latin typeface="Aptos" pitchFamily="34" charset="0"/>
-                <a:ea typeface="Aptos" pitchFamily="34" charset="-122"/>
-                <a:cs typeface="Aptos" pitchFamily="34" charset="-120"/>
-              </a:rPr>
-              <a:t>List of required reviewers and next steps</a:t>
+                  <a:srgbClr val="003A63"/>
+                </a:solidFill>
+                <a:latin typeface="Aptos" pitchFamily="34" charset="0"/>
+                <a:ea typeface="Aptos" pitchFamily="34" charset="-122"/>
+                <a:cs typeface="Aptos" pitchFamily="34" charset="-120"/>
+              </a:rPr>
+              <a:t>• List of required reviewers and next steps</a:t>
             </a:r>
             <a:endParaRPr lang="en-US" sz="2100" dirty="0"/>
           </a:p>
@@ -9039,17 +9180,17 @@
         </p:nvSpPr>
         <p:spPr>
           <a:xfrm>
-            <a:off x="7799832" y="1828800"/>
-            <a:ext cx="3145536" cy="685800"/>
-          </a:xfrm>
-          <a:prstGeom prst="rect">
-            <a:avLst/>
-          </a:prstGeom>
-          <a:noFill/>
-          <a:ln/>
-        </p:spPr>
-        <p:txBody>
-          <a:bodyPr wrap="square" lIns="0" tIns="0" rIns="0" bIns="0" rtlCol="0" anchor="t">
+            <a:off x="7799832" y="1801368"/>
+            <a:ext cx="3145536" cy="758952"/>
+          </a:xfrm>
+          <a:prstGeom prst="rect">
+            <a:avLst/>
+          </a:prstGeom>
+          <a:noFill/>
+          <a:ln/>
+        </p:spPr>
+        <p:txBody>
+          <a:bodyPr wrap="square" lIns="254" tIns="254" rIns="254" bIns="254" rtlCol="0" anchor="t">
             <a:normAutofit/>
           </a:bodyPr>
           <a:lstStyle/>
@@ -9058,7 +9199,7 @@
               <a:buNone/>
             </a:pPr>
             <a:r>
-              <a:rPr lang="en-US" sz="1550" dirty="0">
+              <a:rPr lang="en-US" sz="1320" dirty="0">
                 <a:solidFill>
                   <a:srgbClr val="17364A"/>
                 </a:solidFill>
@@ -9068,7 +9209,7 @@
               </a:rPr>
               <a:t>Completed AI use case intake worksheet</a:t>
             </a:r>
-            <a:endParaRPr lang="en-US" sz="1550" dirty="0"/>
+            <a:endParaRPr lang="en-US" sz="1320" dirty="0"/>
           </a:p>
         </p:txBody>
       </p:sp>
@@ -9156,13 +9297,16 @@
           <a:ln/>
         </p:spPr>
         <p:txBody>
-          <a:bodyPr wrap="square" lIns="254" tIns="254" rIns="254" bIns="254" rtlCol="0" anchor="t">
+          <a:bodyPr wrap="square" lIns="508" tIns="508" rIns="508" bIns="508" rtlCol="0" anchor="t">
             <a:normAutofit/>
           </a:bodyPr>
           <a:lstStyle/>
           <a:p>
-            <a:r>
-              <a:rPr lang="en-US" sz="1380" dirty="0">
+            <a:pPr indent="0" marL="0">
+              <a:buNone/>
+            </a:pPr>
+            <a:r>
+              <a:rPr lang="en-US" sz="1220" dirty="0">
                 <a:solidFill>
                   <a:srgbClr val="17364A"/>
                 </a:solidFill>
@@ -9172,11 +9316,14 @@
               </a:rPr>
               <a:t>Completed AI use case intake worksheet</a:t>
             </a:r>
-            <a:endParaRPr lang="en-US" sz="1380" dirty="0"/>
-          </a:p>
-          <a:p>
-            <a:r>
-              <a:rPr lang="en-US" sz="1380" dirty="0">
+            <a:endParaRPr lang="en-US" sz="1220" dirty="0"/>
+          </a:p>
+          <a:p>
+            <a:pPr indent="0" marL="0">
+              <a:buNone/>
+            </a:pPr>
+            <a:r>
+              <a:rPr lang="en-US" sz="1220" dirty="0">
                 <a:solidFill>
                   <a:srgbClr val="17364A"/>
                 </a:solidFill>
@@ -9186,11 +9333,14 @@
               </a:rPr>
               <a:t>Risk and readiness triage decision</a:t>
             </a:r>
-            <a:endParaRPr lang="en-US" sz="1380" dirty="0"/>
-          </a:p>
-          <a:p>
-            <a:r>
-              <a:rPr lang="en-US" sz="1380" dirty="0">
+            <a:endParaRPr lang="en-US" sz="1220" dirty="0"/>
+          </a:p>
+          <a:p>
+            <a:pPr indent="0" marL="0">
+              <a:buNone/>
+            </a:pPr>
+            <a:r>
+              <a:rPr lang="en-US" sz="1220" dirty="0">
                 <a:solidFill>
                   <a:srgbClr val="17364A"/>
                 </a:solidFill>
@@ -9200,7 +9350,7 @@
               </a:rPr>
               <a:t>List of required reviewers and next steps</a:t>
             </a:r>
-            <a:endParaRPr lang="en-US" sz="1380" dirty="0"/>
+            <a:endParaRPr lang="en-US" sz="1220" dirty="0"/>
           </a:p>
         </p:txBody>
       </p:sp>
@@ -9278,17 +9428,17 @@
         </p:nvSpPr>
         <p:spPr>
           <a:xfrm>
-            <a:off x="7799832" y="5001768"/>
-            <a:ext cx="3145536" cy="502920"/>
-          </a:xfrm>
-          <a:prstGeom prst="rect">
-            <a:avLst/>
-          </a:prstGeom>
-          <a:noFill/>
-          <a:ln/>
-        </p:spPr>
-        <p:txBody>
-          <a:bodyPr wrap="square" lIns="0" tIns="0" rIns="0" bIns="0" rtlCol="0" anchor="t">
+            <a:off x="7799832" y="4974336"/>
+            <a:ext cx="3145536" cy="576072"/>
+          </a:xfrm>
+          <a:prstGeom prst="rect">
+            <a:avLst/>
+          </a:prstGeom>
+          <a:noFill/>
+          <a:ln/>
+        </p:spPr>
+        <p:txBody>
+          <a:bodyPr wrap="square" lIns="254" tIns="254" rIns="254" bIns="254" rtlCol="0" anchor="t">
             <a:normAutofit/>
           </a:bodyPr>
           <a:lstStyle/>
@@ -9297,7 +9447,7 @@
               <a:buNone/>
             </a:pPr>
             <a:r>
-              <a:rPr lang="en-US" sz="1550" dirty="0">
+              <a:rPr lang="en-US" sz="1320" dirty="0">
                 <a:solidFill>
                   <a:srgbClr val="17364A"/>
                 </a:solidFill>
@@ -9305,9 +9455,9 @@
                 <a:ea typeface="Aptos" pitchFamily="34" charset="-122"/>
                 <a:cs typeface="Aptos" pitchFamily="34" charset="-120"/>
               </a:rPr>
-              <a:t>Connect the concept to public health purpose, responsible use, required safeguards, documentation, and the next action a department should take.</a:t>
-            </a:r>
-            <a:endParaRPr lang="en-US" sz="1550" dirty="0"/>
+              <a:t>Connect the concept to public health purpose, responsible use, required safeguards, documentation, and the next action a.</a:t>
+            </a:r>
+            <a:endParaRPr lang="en-US" sz="1320" dirty="0"/>
           </a:p>
         </p:txBody>
       </p:sp>
@@ -9608,21 +9758,24 @@
           <a:ln/>
         </p:spPr>
         <p:txBody>
-          <a:bodyPr wrap="square" lIns="635" tIns="635" rIns="635" bIns="635" rtlCol="0" anchor="t">
+          <a:bodyPr wrap="square" lIns="1016" tIns="1016" rIns="1016" bIns="1016" rtlCol="0" anchor="t">
             <a:normAutofit/>
           </a:bodyPr>
           <a:lstStyle/>
           <a:p>
+            <a:pPr indent="0" marL="0">
+              <a:buNone/>
+            </a:pPr>
             <a:r>
               <a:rPr lang="en-US" sz="2100" dirty="0">
                 <a:solidFill>
-                  <a:srgbClr val="17364A"/>
-                </a:solidFill>
-                <a:latin typeface="Aptos" pitchFamily="34" charset="0"/>
-                <a:ea typeface="Aptos" pitchFamily="34" charset="-122"/>
-                <a:cs typeface="Aptos" pitchFamily="34" charset="-120"/>
-              </a:rPr>
-              <a:t>Documented rationale for proceeding, deferring, redesigning, or rejecting the use case</a:t>
+                  <a:srgbClr val="003A63"/>
+                </a:solidFill>
+                <a:latin typeface="Aptos" pitchFamily="34" charset="0"/>
+                <a:ea typeface="Aptos" pitchFamily="34" charset="-122"/>
+                <a:cs typeface="Aptos" pitchFamily="34" charset="-120"/>
+              </a:rPr>
+              <a:t>• Documented rationale for proceeding, deferring, redesigning, or rejecting the use case</a:t>
             </a:r>
             <a:endParaRPr lang="en-US" sz="2100" dirty="0"/>
           </a:p>
@@ -9702,17 +9855,17 @@
         </p:nvSpPr>
         <p:spPr>
           <a:xfrm>
-            <a:off x="7799832" y="1828800"/>
-            <a:ext cx="3145536" cy="685800"/>
-          </a:xfrm>
-          <a:prstGeom prst="rect">
-            <a:avLst/>
-          </a:prstGeom>
-          <a:noFill/>
-          <a:ln/>
-        </p:spPr>
-        <p:txBody>
-          <a:bodyPr wrap="square" lIns="0" tIns="0" rIns="0" bIns="0" rtlCol="0" anchor="t">
+            <a:off x="7799832" y="1801368"/>
+            <a:ext cx="3145536" cy="758952"/>
+          </a:xfrm>
+          <a:prstGeom prst="rect">
+            <a:avLst/>
+          </a:prstGeom>
+          <a:noFill/>
+          <a:ln/>
+        </p:spPr>
+        <p:txBody>
+          <a:bodyPr wrap="square" lIns="254" tIns="254" rIns="254" bIns="254" rtlCol="0" anchor="t">
             <a:normAutofit/>
           </a:bodyPr>
           <a:lstStyle/>
@@ -9721,7 +9874,7 @@
               <a:buNone/>
             </a:pPr>
             <a:r>
-              <a:rPr lang="en-US" sz="1550" dirty="0">
+              <a:rPr lang="en-US" sz="1320" dirty="0">
                 <a:solidFill>
                   <a:srgbClr val="17364A"/>
                 </a:solidFill>
@@ -9731,7 +9884,7 @@
               </a:rPr>
               <a:t>Documented rationale for proceeding, deferring, redesigning, or rejecting the use case</a:t>
             </a:r>
-            <a:endParaRPr lang="en-US" sz="1550" dirty="0"/>
+            <a:endParaRPr lang="en-US" sz="1320" dirty="0"/>
           </a:p>
         </p:txBody>
       </p:sp>
@@ -9819,13 +9972,16 @@
           <a:ln/>
         </p:spPr>
         <p:txBody>
-          <a:bodyPr wrap="square" lIns="254" tIns="254" rIns="254" bIns="254" rtlCol="0" anchor="t">
+          <a:bodyPr wrap="square" lIns="508" tIns="508" rIns="508" bIns="508" rtlCol="0" anchor="t">
             <a:normAutofit/>
           </a:bodyPr>
           <a:lstStyle/>
           <a:p>
-            <a:r>
-              <a:rPr lang="en-US" sz="1380" dirty="0">
+            <a:pPr indent="0" marL="0">
+              <a:buNone/>
+            </a:pPr>
+            <a:r>
+              <a:rPr lang="en-US" sz="1220" dirty="0">
                 <a:solidFill>
                   <a:srgbClr val="17364A"/>
                 </a:solidFill>
@@ -9833,9 +9989,9 @@
                 <a:ea typeface="Aptos" pitchFamily="34" charset="-122"/>
                 <a:cs typeface="Aptos" pitchFamily="34" charset="-120"/>
               </a:rPr>
-              <a:t>Documented rationale for proceeding, deferring, redesigning, or rejecting the use case</a:t>
-            </a:r>
-            <a:endParaRPr lang="en-US" sz="1380" dirty="0"/>
+              <a:t>Documented rationale for proceeding, deferring, redesigning, or.</a:t>
+            </a:r>
+            <a:endParaRPr lang="en-US" sz="1220" dirty="0"/>
           </a:p>
         </p:txBody>
       </p:sp>
@@ -9913,17 +10069,17 @@
         </p:nvSpPr>
         <p:spPr>
           <a:xfrm>
-            <a:off x="7799832" y="5001768"/>
-            <a:ext cx="3145536" cy="502920"/>
-          </a:xfrm>
-          <a:prstGeom prst="rect">
-            <a:avLst/>
-          </a:prstGeom>
-          <a:noFill/>
-          <a:ln/>
-        </p:spPr>
-        <p:txBody>
-          <a:bodyPr wrap="square" lIns="0" tIns="0" rIns="0" bIns="0" rtlCol="0" anchor="t">
+            <a:off x="7799832" y="4974336"/>
+            <a:ext cx="3145536" cy="576072"/>
+          </a:xfrm>
+          <a:prstGeom prst="rect">
+            <a:avLst/>
+          </a:prstGeom>
+          <a:noFill/>
+          <a:ln/>
+        </p:spPr>
+        <p:txBody>
+          <a:bodyPr wrap="square" lIns="254" tIns="254" rIns="254" bIns="254" rtlCol="0" anchor="t">
             <a:normAutofit/>
           </a:bodyPr>
           <a:lstStyle/>
@@ -9932,7 +10088,7 @@
               <a:buNone/>
             </a:pPr>
             <a:r>
-              <a:rPr lang="en-US" sz="1550" dirty="0">
+              <a:rPr lang="en-US" sz="1320" dirty="0">
                 <a:solidFill>
                   <a:srgbClr val="17364A"/>
                 </a:solidFill>
@@ -9940,9 +10096,9 @@
                 <a:ea typeface="Aptos" pitchFamily="34" charset="-122"/>
                 <a:cs typeface="Aptos" pitchFamily="34" charset="-120"/>
               </a:rPr>
-              <a:t>Connect the concept to public health purpose, responsible use, required safeguards, documentation, and the next action a department should take.</a:t>
-            </a:r>
-            <a:endParaRPr lang="en-US" sz="1550" dirty="0"/>
+              <a:t>Connect the concept to public health purpose, responsible use, required safeguards, documentation, and the next action a.</a:t>
+            </a:r>
+            <a:endParaRPr lang="en-US" sz="1320" dirty="0"/>
           </a:p>
         </p:txBody>
       </p:sp>
@@ -10243,49 +10399,58 @@
           <a:ln/>
         </p:spPr>
         <p:txBody>
-          <a:bodyPr wrap="square" lIns="635" tIns="635" rIns="635" bIns="635" rtlCol="0" anchor="t">
+          <a:bodyPr wrap="square" lIns="1016" tIns="1016" rIns="1016" bIns="1016" rtlCol="0" anchor="t">
             <a:normAutofit/>
           </a:bodyPr>
           <a:lstStyle/>
           <a:p>
+            <a:pPr indent="0" marL="0">
+              <a:buNone/>
+            </a:pPr>
             <a:r>
               <a:rPr lang="en-US" sz="2100" dirty="0">
                 <a:solidFill>
-                  <a:srgbClr val="17364A"/>
-                </a:solidFill>
-                <a:latin typeface="Aptos" pitchFamily="34" charset="0"/>
-                <a:ea typeface="Aptos" pitchFamily="34" charset="-122"/>
-                <a:cs typeface="Aptos" pitchFamily="34" charset="-120"/>
-              </a:rPr>
-              <a:t>AI use case intake is the structured process of receiving, describing, screening, and routing ideas for.</a:t>
+                  <a:srgbClr val="003A63"/>
+                </a:solidFill>
+                <a:latin typeface="Aptos" pitchFamily="34" charset="0"/>
+                <a:ea typeface="Aptos" pitchFamily="34" charset="-122"/>
+                <a:cs typeface="Aptos" pitchFamily="34" charset="-120"/>
+              </a:rPr>
+              <a:t>• AI use case intake is the structured process of receiving, describing, screening, and routing.</a:t>
             </a:r>
             <a:endParaRPr lang="en-US" sz="2100" dirty="0"/>
           </a:p>
           <a:p>
+            <a:pPr indent="0" marL="0">
+              <a:buNone/>
+            </a:pPr>
             <a:r>
               <a:rPr lang="en-US" sz="2100" dirty="0">
                 <a:solidFill>
-                  <a:srgbClr val="17364A"/>
-                </a:solidFill>
-                <a:latin typeface="Aptos" pitchFamily="34" charset="0"/>
-                <a:ea typeface="Aptos" pitchFamily="34" charset="-122"/>
-                <a:cs typeface="Aptos" pitchFamily="34" charset="-120"/>
-              </a:rPr>
-              <a:t>In public health, this step is essential because AI ideas often begin as informal suggestions to save time,.</a:t>
+                  <a:srgbClr val="003A63"/>
+                </a:solidFill>
+                <a:latin typeface="Aptos" pitchFamily="34" charset="0"/>
+                <a:ea typeface="Aptos" pitchFamily="34" charset="-122"/>
+                <a:cs typeface="Aptos" pitchFamily="34" charset="-120"/>
+              </a:rPr>
+              <a:t>• In public health, this step is essential because AI ideas often begin as informal suggestions.</a:t>
             </a:r>
             <a:endParaRPr lang="en-US" sz="2100" dirty="0"/>
           </a:p>
           <a:p>
+            <a:pPr indent="0" marL="0">
+              <a:buNone/>
+            </a:pPr>
             <a:r>
               <a:rPr lang="en-US" sz="2100" dirty="0">
                 <a:solidFill>
-                  <a:srgbClr val="17364A"/>
-                </a:solidFill>
-                <a:latin typeface="Aptos" pitchFamily="34" charset="0"/>
-                <a:ea typeface="Aptos" pitchFamily="34" charset="-122"/>
-                <a:cs typeface="Aptos" pitchFamily="34" charset="-120"/>
-              </a:rPr>
-              <a:t>Without a common intake process, agencies may approve low-value or high-risk ideas too quickly while overlooking.</a:t>
+                  <a:srgbClr val="003A63"/>
+                </a:solidFill>
+                <a:latin typeface="Aptos" pitchFamily="34" charset="0"/>
+                <a:ea typeface="Aptos" pitchFamily="34" charset="-122"/>
+                <a:cs typeface="Aptos" pitchFamily="34" charset="-120"/>
+              </a:rPr>
+              <a:t>• Without a common intake process, agencies may approve low-value or high-risk ideas too quickly.</a:t>
             </a:r>
             <a:endParaRPr lang="en-US" sz="2100" dirty="0"/>
           </a:p>
@@ -10365,17 +10530,17 @@
         </p:nvSpPr>
         <p:spPr>
           <a:xfrm>
-            <a:off x="8074152" y="1920240"/>
-            <a:ext cx="2825496" cy="1280160"/>
-          </a:xfrm>
-          <a:prstGeom prst="rect">
-            <a:avLst/>
-          </a:prstGeom>
-          <a:noFill/>
-          <a:ln/>
-        </p:spPr>
-        <p:txBody>
-          <a:bodyPr wrap="square" lIns="0" tIns="0" rIns="0" bIns="0" rtlCol="0" anchor="t">
+            <a:off x="8074152" y="1892808"/>
+            <a:ext cx="2825496" cy="1353312"/>
+          </a:xfrm>
+          <a:prstGeom prst="rect">
+            <a:avLst/>
+          </a:prstGeom>
+          <a:noFill/>
+          <a:ln/>
+        </p:spPr>
+        <p:txBody>
+          <a:bodyPr wrap="square" lIns="254" tIns="254" rIns="254" bIns="254" rtlCol="0" anchor="t">
             <a:normAutofit/>
           </a:bodyPr>
           <a:lstStyle/>
@@ -10384,7 +10549,7 @@
               <a:buNone/>
             </a:pPr>
             <a:r>
-              <a:rPr lang="en-US" sz="1550" dirty="0">
+              <a:rPr lang="en-US" sz="1320" dirty="0">
                 <a:solidFill>
                   <a:srgbClr val="17364A"/>
                 </a:solidFill>
@@ -10392,43 +10557,9 @@
                 <a:ea typeface="Aptos" pitchFamily="34" charset="-122"/>
                 <a:cs typeface="Aptos" pitchFamily="34" charset="-120"/>
               </a:rPr>
-              <a:t>Level: applied/foundational</a:t>
-            </a:r>
-            <a:endParaRPr lang="en-US" sz="1550" dirty="0"/>
-          </a:p>
-          <a:p>
-            <a:pPr indent="0" marL="0">
-              <a:buNone/>
-            </a:pPr>
-            <a:r>
-              <a:rPr lang="en-US" sz="1550" dirty="0">
-                <a:solidFill>
-                  <a:srgbClr val="17364A"/>
-                </a:solidFill>
-                <a:latin typeface="Aptos" pitchFamily="34" charset="0"/>
-                <a:ea typeface="Aptos" pitchFamily="34" charset="-122"/>
-                <a:cs typeface="Aptos" pitchFamily="34" charset="-120"/>
-              </a:rPr>
-              <a:t>Primary track: Shared Foundational / Introductory Course</a:t>
-            </a:r>
-            <a:endParaRPr lang="en-US" sz="1550" dirty="0"/>
-          </a:p>
-          <a:p>
-            <a:pPr indent="0" marL="0">
-              <a:buNone/>
-            </a:pPr>
-            <a:r>
-              <a:rPr lang="en-US" sz="1550" dirty="0">
-                <a:solidFill>
-                  <a:srgbClr val="17364A"/>
-                </a:solidFill>
-                <a:latin typeface="Aptos" pitchFamily="34" charset="0"/>
-                <a:ea typeface="Aptos" pitchFamily="34" charset="-122"/>
-                <a:cs typeface="Aptos" pitchFamily="34" charset="-120"/>
-              </a:rPr>
-              <a:t>Appears in tracks: shared-foundational, governance-and-security, program-management, public-health-executive-leadership</a:t>
-            </a:r>
-            <a:endParaRPr lang="en-US" sz="1550" dirty="0"/>
+              <a:t>Level: applied/foundational Primary track: Shared Foundational / Introductory Course Appears in tracks:.</a:t>
+            </a:r>
+            <a:endParaRPr lang="en-US" sz="1320" dirty="0"/>
           </a:p>
         </p:txBody>
       </p:sp>
@@ -10516,13 +10647,16 @@
           <a:ln/>
         </p:spPr>
         <p:txBody>
-          <a:bodyPr wrap="square" lIns="254" tIns="254" rIns="254" bIns="254" rtlCol="0" anchor="t">
+          <a:bodyPr wrap="square" lIns="508" tIns="508" rIns="508" bIns="508" rtlCol="0" anchor="t">
             <a:normAutofit/>
           </a:bodyPr>
           <a:lstStyle/>
           <a:p>
-            <a:r>
-              <a:rPr lang="en-US" sz="1380" dirty="0">
+            <a:pPr indent="0" marL="0">
+              <a:buNone/>
+            </a:pPr>
+            <a:r>
+              <a:rPr lang="en-US" sz="1220" dirty="0">
                 <a:solidFill>
                   <a:srgbClr val="17364A"/>
                 </a:solidFill>
@@ -10532,11 +10666,14 @@
               </a:rPr>
               <a:t>Read the module for shared vocabulary and context.</a:t>
             </a:r>
-            <a:endParaRPr lang="en-US" sz="1380" dirty="0"/>
-          </a:p>
-          <a:p>
-            <a:r>
-              <a:rPr lang="en-US" sz="1380" dirty="0">
+            <a:endParaRPr lang="en-US" sz="1220" dirty="0"/>
+          </a:p>
+          <a:p>
+            <a:pPr indent="0" marL="0">
+              <a:buNone/>
+            </a:pPr>
+            <a:r>
+              <a:rPr lang="en-US" sz="1220" dirty="0">
                 <a:solidFill>
                   <a:srgbClr val="17364A"/>
                 </a:solidFill>
@@ -10546,11 +10683,14 @@
               </a:rPr>
               <a:t>Complete the practical exercise to apply the concept.</a:t>
             </a:r>
-            <a:endParaRPr lang="en-US" sz="1380" dirty="0"/>
-          </a:p>
-          <a:p>
-            <a:r>
-              <a:rPr lang="en-US" sz="1380" dirty="0">
+            <a:endParaRPr lang="en-US" sz="1220" dirty="0"/>
+          </a:p>
+          <a:p>
+            <a:pPr indent="0" marL="0">
+              <a:buNone/>
+            </a:pPr>
+            <a:r>
+              <a:rPr lang="en-US" sz="1220" dirty="0">
                 <a:solidFill>
                   <a:srgbClr val="17364A"/>
                 </a:solidFill>
@@ -10560,7 +10700,7 @@
               </a:rPr>
               <a:t>Use the notes and references for deeper review.</a:t>
             </a:r>
-            <a:endParaRPr lang="en-US" sz="1380" dirty="0"/>
+            <a:endParaRPr lang="en-US" sz="1220" dirty="0"/>
           </a:p>
         </p:txBody>
       </p:sp>
@@ -10861,49 +11001,58 @@
           <a:ln/>
         </p:spPr>
         <p:txBody>
-          <a:bodyPr wrap="square" lIns="635" tIns="635" rIns="635" bIns="635" rtlCol="0" anchor="t">
+          <a:bodyPr wrap="square" lIns="1016" tIns="1016" rIns="1016" bIns="1016" rtlCol="0" anchor="t">
             <a:normAutofit/>
           </a:bodyPr>
           <a:lstStyle/>
           <a:p>
+            <a:pPr indent="0" marL="0">
+              <a:buNone/>
+            </a:pPr>
             <a:r>
               <a:rPr lang="en-US" sz="2100" dirty="0">
                 <a:solidFill>
-                  <a:srgbClr val="17364A"/>
-                </a:solidFill>
-                <a:latin typeface="Aptos" pitchFamily="34" charset="0"/>
-                <a:ea typeface="Aptos" pitchFamily="34" charset="-122"/>
-                <a:cs typeface="Aptos" pitchFamily="34" charset="-120"/>
-              </a:rPr>
-              <a:t>Completed AI use case intake worksheet</a:t>
+                  <a:srgbClr val="003A63"/>
+                </a:solidFill>
+                <a:latin typeface="Aptos" pitchFamily="34" charset="0"/>
+                <a:ea typeface="Aptos" pitchFamily="34" charset="-122"/>
+                <a:cs typeface="Aptos" pitchFamily="34" charset="-120"/>
+              </a:rPr>
+              <a:t>• Completed AI use case intake worksheet</a:t>
             </a:r>
             <a:endParaRPr lang="en-US" sz="2100" dirty="0"/>
           </a:p>
           <a:p>
+            <a:pPr indent="0" marL="0">
+              <a:buNone/>
+            </a:pPr>
             <a:r>
               <a:rPr lang="en-US" sz="2100" dirty="0">
                 <a:solidFill>
-                  <a:srgbClr val="17364A"/>
-                </a:solidFill>
-                <a:latin typeface="Aptos" pitchFamily="34" charset="0"/>
-                <a:ea typeface="Aptos" pitchFamily="34" charset="-122"/>
-                <a:cs typeface="Aptos" pitchFamily="34" charset="-120"/>
-              </a:rPr>
-              <a:t>Risk and readiness triage decision</a:t>
+                  <a:srgbClr val="003A63"/>
+                </a:solidFill>
+                <a:latin typeface="Aptos" pitchFamily="34" charset="0"/>
+                <a:ea typeface="Aptos" pitchFamily="34" charset="-122"/>
+                <a:cs typeface="Aptos" pitchFamily="34" charset="-120"/>
+              </a:rPr>
+              <a:t>• Risk and readiness triage decision</a:t>
             </a:r>
             <a:endParaRPr lang="en-US" sz="2100" dirty="0"/>
           </a:p>
           <a:p>
+            <a:pPr indent="0" marL="0">
+              <a:buNone/>
+            </a:pPr>
             <a:r>
               <a:rPr lang="en-US" sz="2100" dirty="0">
                 <a:solidFill>
-                  <a:srgbClr val="17364A"/>
-                </a:solidFill>
-                <a:latin typeface="Aptos" pitchFamily="34" charset="0"/>
-                <a:ea typeface="Aptos" pitchFamily="34" charset="-122"/>
-                <a:cs typeface="Aptos" pitchFamily="34" charset="-120"/>
-              </a:rPr>
-              <a:t>List of required reviewers and next steps</a:t>
+                  <a:srgbClr val="003A63"/>
+                </a:solidFill>
+                <a:latin typeface="Aptos" pitchFamily="34" charset="0"/>
+                <a:ea typeface="Aptos" pitchFamily="34" charset="-122"/>
+                <a:cs typeface="Aptos" pitchFamily="34" charset="-120"/>
+              </a:rPr>
+              <a:t>• List of required reviewers and next steps</a:t>
             </a:r>
             <a:endParaRPr lang="en-US" sz="2100" dirty="0"/>
           </a:p>
@@ -10983,17 +11132,17 @@
         </p:nvSpPr>
         <p:spPr>
           <a:xfrm>
-            <a:off x="7799832" y="1828800"/>
-            <a:ext cx="3145536" cy="685800"/>
-          </a:xfrm>
-          <a:prstGeom prst="rect">
-            <a:avLst/>
-          </a:prstGeom>
-          <a:noFill/>
-          <a:ln/>
-        </p:spPr>
-        <p:txBody>
-          <a:bodyPr wrap="square" lIns="0" tIns="0" rIns="0" bIns="0" rtlCol="0" anchor="t">
+            <a:off x="7799832" y="1801368"/>
+            <a:ext cx="3145536" cy="758952"/>
+          </a:xfrm>
+          <a:prstGeom prst="rect">
+            <a:avLst/>
+          </a:prstGeom>
+          <a:noFill/>
+          <a:ln/>
+        </p:spPr>
+        <p:txBody>
+          <a:bodyPr wrap="square" lIns="254" tIns="254" rIns="254" bIns="254" rtlCol="0" anchor="t">
             <a:normAutofit/>
           </a:bodyPr>
           <a:lstStyle/>
@@ -11002,7 +11151,7 @@
               <a:buNone/>
             </a:pPr>
             <a:r>
-              <a:rPr lang="en-US" sz="1550" dirty="0">
+              <a:rPr lang="en-US" sz="1320" dirty="0">
                 <a:solidFill>
                   <a:srgbClr val="17364A"/>
                 </a:solidFill>
@@ -11012,7 +11161,7 @@
               </a:rPr>
               <a:t>Completed AI use case intake worksheet</a:t>
             </a:r>
-            <a:endParaRPr lang="en-US" sz="1550" dirty="0"/>
+            <a:endParaRPr lang="en-US" sz="1320" dirty="0"/>
           </a:p>
         </p:txBody>
       </p:sp>
@@ -11100,13 +11249,16 @@
           <a:ln/>
         </p:spPr>
         <p:txBody>
-          <a:bodyPr wrap="square" lIns="254" tIns="254" rIns="254" bIns="254" rtlCol="0" anchor="t">
+          <a:bodyPr wrap="square" lIns="508" tIns="508" rIns="508" bIns="508" rtlCol="0" anchor="t">
             <a:normAutofit/>
           </a:bodyPr>
           <a:lstStyle/>
           <a:p>
-            <a:r>
-              <a:rPr lang="en-US" sz="1380" dirty="0">
+            <a:pPr indent="0" marL="0">
+              <a:buNone/>
+            </a:pPr>
+            <a:r>
+              <a:rPr lang="en-US" sz="1220" dirty="0">
                 <a:solidFill>
                   <a:srgbClr val="17364A"/>
                 </a:solidFill>
@@ -11116,11 +11268,14 @@
               </a:rPr>
               <a:t>Completed AI use case intake worksheet</a:t>
             </a:r>
-            <a:endParaRPr lang="en-US" sz="1380" dirty="0"/>
-          </a:p>
-          <a:p>
-            <a:r>
-              <a:rPr lang="en-US" sz="1380" dirty="0">
+            <a:endParaRPr lang="en-US" sz="1220" dirty="0"/>
+          </a:p>
+          <a:p>
+            <a:pPr indent="0" marL="0">
+              <a:buNone/>
+            </a:pPr>
+            <a:r>
+              <a:rPr lang="en-US" sz="1220" dirty="0">
                 <a:solidFill>
                   <a:srgbClr val="17364A"/>
                 </a:solidFill>
@@ -11130,11 +11285,14 @@
               </a:rPr>
               <a:t>Risk and readiness triage decision</a:t>
             </a:r>
-            <a:endParaRPr lang="en-US" sz="1380" dirty="0"/>
-          </a:p>
-          <a:p>
-            <a:r>
-              <a:rPr lang="en-US" sz="1380" dirty="0">
+            <a:endParaRPr lang="en-US" sz="1220" dirty="0"/>
+          </a:p>
+          <a:p>
+            <a:pPr indent="0" marL="0">
+              <a:buNone/>
+            </a:pPr>
+            <a:r>
+              <a:rPr lang="en-US" sz="1220" dirty="0">
                 <a:solidFill>
                   <a:srgbClr val="17364A"/>
                 </a:solidFill>
@@ -11144,7 +11302,7 @@
               </a:rPr>
               <a:t>List of required reviewers and next steps</a:t>
             </a:r>
-            <a:endParaRPr lang="en-US" sz="1380" dirty="0"/>
+            <a:endParaRPr lang="en-US" sz="1220" dirty="0"/>
           </a:p>
         </p:txBody>
       </p:sp>
@@ -11222,17 +11380,17 @@
         </p:nvSpPr>
         <p:spPr>
           <a:xfrm>
-            <a:off x="7799832" y="5001768"/>
-            <a:ext cx="3145536" cy="502920"/>
-          </a:xfrm>
-          <a:prstGeom prst="rect">
-            <a:avLst/>
-          </a:prstGeom>
-          <a:noFill/>
-          <a:ln/>
-        </p:spPr>
-        <p:txBody>
-          <a:bodyPr wrap="square" lIns="0" tIns="0" rIns="0" bIns="0" rtlCol="0" anchor="t">
+            <a:off x="7799832" y="4974336"/>
+            <a:ext cx="3145536" cy="576072"/>
+          </a:xfrm>
+          <a:prstGeom prst="rect">
+            <a:avLst/>
+          </a:prstGeom>
+          <a:noFill/>
+          <a:ln/>
+        </p:spPr>
+        <p:txBody>
+          <a:bodyPr wrap="square" lIns="254" tIns="254" rIns="254" bIns="254" rtlCol="0" anchor="t">
             <a:normAutofit/>
           </a:bodyPr>
           <a:lstStyle/>
@@ -11241,7 +11399,7 @@
               <a:buNone/>
             </a:pPr>
             <a:r>
-              <a:rPr lang="en-US" sz="1550" dirty="0">
+              <a:rPr lang="en-US" sz="1320" dirty="0">
                 <a:solidFill>
                   <a:srgbClr val="17364A"/>
                 </a:solidFill>
@@ -11249,9 +11407,9 @@
                 <a:ea typeface="Aptos" pitchFamily="34" charset="-122"/>
                 <a:cs typeface="Aptos" pitchFamily="34" charset="-120"/>
               </a:rPr>
-              <a:t>Use the assignment to test whether you can explain the concept, apply it to a realistic public health situation, and identify what would need review before the work moves forward.</a:t>
-            </a:r>
-            <a:endParaRPr lang="en-US" sz="1550" dirty="0"/>
+              <a:t>Use the assignment to test whether you can explain the concept, apply it to a realistic public health situation, and.</a:t>
+            </a:r>
+            <a:endParaRPr lang="en-US" sz="1320" dirty="0"/>
           </a:p>
         </p:txBody>
       </p:sp>
@@ -11552,49 +11710,58 @@
           <a:ln/>
         </p:spPr>
         <p:txBody>
-          <a:bodyPr wrap="square" lIns="635" tIns="635" rIns="635" bIns="635" rtlCol="0" anchor="t">
+          <a:bodyPr wrap="square" lIns="1016" tIns="1016" rIns="1016" bIns="1016" rtlCol="0" anchor="t">
             <a:normAutofit/>
           </a:bodyPr>
           <a:lstStyle/>
           <a:p>
+            <a:pPr indent="0" marL="0">
+              <a:buNone/>
+            </a:pPr>
             <a:r>
               <a:rPr lang="en-US" sz="2100" dirty="0">
                 <a:solidFill>
-                  <a:srgbClr val="17364A"/>
-                </a:solidFill>
-                <a:latin typeface="Aptos" pitchFamily="34" charset="0"/>
-                <a:ea typeface="Aptos" pitchFamily="34" charset="-122"/>
-                <a:cs typeface="Aptos" pitchFamily="34" charset="-120"/>
-              </a:rPr>
-              <a:t>1. What is the main purpose of AI use case intake?</a:t>
+                  <a:srgbClr val="003A63"/>
+                </a:solidFill>
+                <a:latin typeface="Aptos" pitchFamily="34" charset="0"/>
+                <a:ea typeface="Aptos" pitchFamily="34" charset="-122"/>
+                <a:cs typeface="Aptos" pitchFamily="34" charset="-120"/>
+              </a:rPr>
+              <a:t>• 1. What is the main purpose of AI use case intake?</a:t>
             </a:r>
             <a:endParaRPr lang="en-US" sz="2100" dirty="0"/>
           </a:p>
           <a:p>
+            <a:pPr indent="0" marL="0">
+              <a:buNone/>
+            </a:pPr>
             <a:r>
               <a:rPr lang="en-US" sz="2100" dirty="0">
                 <a:solidFill>
-                  <a:srgbClr val="17364A"/>
-                </a:solidFill>
-                <a:latin typeface="Aptos" pitchFamily="34" charset="0"/>
-                <a:ea typeface="Aptos" pitchFamily="34" charset="-122"/>
-                <a:cs typeface="Aptos" pitchFamily="34" charset="-120"/>
-              </a:rPr>
-              <a:t>2. Which proposal should usually receive higher-risk triage?</a:t>
+                  <a:srgbClr val="003A63"/>
+                </a:solidFill>
+                <a:latin typeface="Aptos" pitchFamily="34" charset="0"/>
+                <a:ea typeface="Aptos" pitchFamily="34" charset="-122"/>
+                <a:cs typeface="Aptos" pitchFamily="34" charset="-120"/>
+              </a:rPr>
+              <a:t>• 2. Which proposal should usually receive higher-risk triage?</a:t>
             </a:r>
             <a:endParaRPr lang="en-US" sz="2100" dirty="0"/>
           </a:p>
           <a:p>
+            <a:pPr indent="0" marL="0">
+              <a:buNone/>
+            </a:pPr>
             <a:r>
               <a:rPr lang="en-US" sz="2100" dirty="0">
                 <a:solidFill>
-                  <a:srgbClr val="17364A"/>
-                </a:solidFill>
-                <a:latin typeface="Aptos" pitchFamily="34" charset="0"/>
-                <a:ea typeface="Aptos" pitchFamily="34" charset="-122"/>
-                <a:cs typeface="Aptos" pitchFamily="34" charset="-120"/>
-              </a:rPr>
-              <a:t>3. What should happen when a proposed workflow problem can be solved without AI?</a:t>
+                  <a:srgbClr val="003A63"/>
+                </a:solidFill>
+                <a:latin typeface="Aptos" pitchFamily="34" charset="0"/>
+                <a:ea typeface="Aptos" pitchFamily="34" charset="-122"/>
+                <a:cs typeface="Aptos" pitchFamily="34" charset="-120"/>
+              </a:rPr>
+              <a:t>• 3. What should happen when a proposed workflow problem can be solved without AI?</a:t>
             </a:r>
             <a:endParaRPr lang="en-US" sz="2100" dirty="0"/>
           </a:p>
@@ -11674,17 +11841,17 @@
         </p:nvSpPr>
         <p:spPr>
           <a:xfrm>
-            <a:off x="7799832" y="1828800"/>
-            <a:ext cx="3145536" cy="685800"/>
-          </a:xfrm>
-          <a:prstGeom prst="rect">
-            <a:avLst/>
-          </a:prstGeom>
-          <a:noFill/>
-          <a:ln/>
-        </p:spPr>
-        <p:txBody>
-          <a:bodyPr wrap="square" lIns="0" tIns="0" rIns="0" bIns="0" rtlCol="0" anchor="t">
+            <a:off x="7799832" y="1801368"/>
+            <a:ext cx="3145536" cy="758952"/>
+          </a:xfrm>
+          <a:prstGeom prst="rect">
+            <a:avLst/>
+          </a:prstGeom>
+          <a:noFill/>
+          <a:ln/>
+        </p:spPr>
+        <p:txBody>
+          <a:bodyPr wrap="square" lIns="254" tIns="254" rIns="254" bIns="254" rtlCol="0" anchor="t">
             <a:normAutofit/>
           </a:bodyPr>
           <a:lstStyle/>
@@ -11693,7 +11860,7 @@
               <a:buNone/>
             </a:pPr>
             <a:r>
-              <a:rPr lang="en-US" sz="1550" dirty="0">
+              <a:rPr lang="en-US" sz="1320" dirty="0">
                 <a:solidFill>
                   <a:srgbClr val="17364A"/>
                 </a:solidFill>
@@ -11703,7 +11870,7 @@
               </a:rPr>
               <a:t>1. What is the main purpose of AI use case intake?</a:t>
             </a:r>
-            <a:endParaRPr lang="en-US" sz="1550" dirty="0"/>
+            <a:endParaRPr lang="en-US" sz="1320" dirty="0"/>
           </a:p>
         </p:txBody>
       </p:sp>
@@ -11791,13 +11958,16 @@
           <a:ln/>
         </p:spPr>
         <p:txBody>
-          <a:bodyPr wrap="square" lIns="254" tIns="254" rIns="254" bIns="254" rtlCol="0" anchor="t">
+          <a:bodyPr wrap="square" lIns="508" tIns="508" rIns="508" bIns="508" rtlCol="0" anchor="t">
             <a:normAutofit/>
           </a:bodyPr>
           <a:lstStyle/>
           <a:p>
-            <a:r>
-              <a:rPr lang="en-US" sz="1380" dirty="0">
+            <a:pPr indent="0" marL="0">
+              <a:buNone/>
+            </a:pPr>
+            <a:r>
+              <a:rPr lang="en-US" sz="1220" dirty="0">
                 <a:solidFill>
                   <a:srgbClr val="17364A"/>
                 </a:solidFill>
@@ -11807,11 +11977,14 @@
               </a:rPr>
               <a:t>1.</a:t>
             </a:r>
-            <a:endParaRPr lang="en-US" sz="1380" dirty="0"/>
-          </a:p>
-          <a:p>
-            <a:r>
-              <a:rPr lang="en-US" sz="1380" dirty="0">
+            <a:endParaRPr lang="en-US" sz="1220" dirty="0"/>
+          </a:p>
+          <a:p>
+            <a:pPr indent="0" marL="0">
+              <a:buNone/>
+            </a:pPr>
+            <a:r>
+              <a:rPr lang="en-US" sz="1220" dirty="0">
                 <a:solidFill>
                   <a:srgbClr val="17364A"/>
                 </a:solidFill>
@@ -11821,11 +11994,14 @@
               </a:rPr>
               <a:t>What is the main purpose of AI use case intake?</a:t>
             </a:r>
-            <a:endParaRPr lang="en-US" sz="1380" dirty="0"/>
-          </a:p>
-          <a:p>
-            <a:r>
-              <a:rPr lang="en-US" sz="1380" dirty="0">
+            <a:endParaRPr lang="en-US" sz="1220" dirty="0"/>
+          </a:p>
+          <a:p>
+            <a:pPr indent="0" marL="0">
+              <a:buNone/>
+            </a:pPr>
+            <a:r>
+              <a:rPr lang="en-US" sz="1220" dirty="0">
                 <a:solidFill>
                   <a:srgbClr val="17364A"/>
                 </a:solidFill>
@@ -11835,7 +12011,7 @@
               </a:rPr>
               <a:t>2.</a:t>
             </a:r>
-            <a:endParaRPr lang="en-US" sz="1380" dirty="0"/>
+            <a:endParaRPr lang="en-US" sz="1220" dirty="0"/>
           </a:p>
         </p:txBody>
       </p:sp>
@@ -11913,17 +12089,17 @@
         </p:nvSpPr>
         <p:spPr>
           <a:xfrm>
-            <a:off x="7799832" y="5001768"/>
-            <a:ext cx="3145536" cy="502920"/>
-          </a:xfrm>
-          <a:prstGeom prst="rect">
-            <a:avLst/>
-          </a:prstGeom>
-          <a:noFill/>
-          <a:ln/>
-        </p:spPr>
-        <p:txBody>
-          <a:bodyPr wrap="square" lIns="0" tIns="0" rIns="0" bIns="0" rtlCol="0" anchor="t">
+            <a:off x="7799832" y="4974336"/>
+            <a:ext cx="3145536" cy="576072"/>
+          </a:xfrm>
+          <a:prstGeom prst="rect">
+            <a:avLst/>
+          </a:prstGeom>
+          <a:noFill/>
+          <a:ln/>
+        </p:spPr>
+        <p:txBody>
+          <a:bodyPr wrap="square" lIns="254" tIns="254" rIns="254" bIns="254" rtlCol="0" anchor="t">
             <a:normAutofit/>
           </a:bodyPr>
           <a:lstStyle/>
@@ -11932,7 +12108,7 @@
               <a:buNone/>
             </a:pPr>
             <a:r>
-              <a:rPr lang="en-US" sz="1550" dirty="0">
+              <a:rPr lang="en-US" sz="1320" dirty="0">
                 <a:solidFill>
                   <a:srgbClr val="17364A"/>
                 </a:solidFill>
@@ -11940,9 +12116,9 @@
                 <a:ea typeface="Aptos" pitchFamily="34" charset="-122"/>
                 <a:cs typeface="Aptos" pitchFamily="34" charset="-120"/>
               </a:rPr>
-              <a:t>Use the assignment to test whether you can explain the concept, apply it to a realistic public health situation, and identify what would need review before the work moves forward.</a:t>
-            </a:r>
-            <a:endParaRPr lang="en-US" sz="1550" dirty="0"/>
+              <a:t>Use the assignment to test whether you can explain the concept, apply it to a realistic public health situation, and.</a:t>
+            </a:r>
+            <a:endParaRPr lang="en-US" sz="1320" dirty="0"/>
           </a:p>
         </p:txBody>
       </p:sp>
@@ -12243,49 +12419,58 @@
           <a:ln/>
         </p:spPr>
         <p:txBody>
-          <a:bodyPr wrap="square" lIns="635" tIns="635" rIns="635" bIns="635" rtlCol="0" anchor="t">
+          <a:bodyPr wrap="square" lIns="1016" tIns="1016" rIns="1016" bIns="1016" rtlCol="0" anchor="t">
             <a:normAutofit/>
           </a:bodyPr>
           <a:lstStyle/>
           <a:p>
+            <a:pPr indent="0" marL="0">
+              <a:buNone/>
+            </a:pPr>
             <a:r>
               <a:rPr lang="en-US" sz="2100" dirty="0">
                 <a:solidFill>
-                  <a:srgbClr val="17364A"/>
-                </a:solidFill>
-                <a:latin typeface="Aptos" pitchFamily="34" charset="0"/>
-                <a:ea typeface="Aptos" pitchFamily="34" charset="-122"/>
-                <a:cs typeface="Aptos" pitchFamily="34" charset="-120"/>
-              </a:rPr>
-              <a:t>NIST Artificial Intelligence Risk Management Framework:.</a:t>
+                  <a:srgbClr val="003A63"/>
+                </a:solidFill>
+                <a:latin typeface="Aptos" pitchFamily="34" charset="0"/>
+                <a:ea typeface="Aptos" pitchFamily="34" charset="-122"/>
+                <a:cs typeface="Aptos" pitchFamily="34" charset="-120"/>
+              </a:rPr>
+              <a:t>• NIST Artificial Intelligence Risk Management Framework:.</a:t>
             </a:r>
             <a:endParaRPr lang="en-US" sz="2100" dirty="0"/>
           </a:p>
           <a:p>
+            <a:pPr indent="0" marL="0">
+              <a:buNone/>
+            </a:pPr>
             <a:r>
               <a:rPr lang="en-US" sz="2100" dirty="0">
                 <a:solidFill>
-                  <a:srgbClr val="17364A"/>
-                </a:solidFill>
-                <a:latin typeface="Aptos" pitchFamily="34" charset="0"/>
-                <a:ea typeface="Aptos" pitchFamily="34" charset="-122"/>
-                <a:cs typeface="Aptos" pitchFamily="34" charset="-120"/>
-              </a:rPr>
-              <a:t>NIST Generative AI Profile:.</a:t>
+                  <a:srgbClr val="003A63"/>
+                </a:solidFill>
+                <a:latin typeface="Aptos" pitchFamily="34" charset="0"/>
+                <a:ea typeface="Aptos" pitchFamily="34" charset="-122"/>
+                <a:cs typeface="Aptos" pitchFamily="34" charset="-120"/>
+              </a:rPr>
+              <a:t>• NIST Generative AI Profile:.</a:t>
             </a:r>
             <a:endParaRPr lang="en-US" sz="2100" dirty="0"/>
           </a:p>
           <a:p>
+            <a:pPr indent="0" marL="0">
+              <a:buNone/>
+            </a:pPr>
             <a:r>
               <a:rPr lang="en-US" sz="2100" dirty="0">
                 <a:solidFill>
-                  <a:srgbClr val="17364A"/>
-                </a:solidFill>
-                <a:latin typeface="Aptos" pitchFamily="34" charset="0"/>
-                <a:ea typeface="Aptos" pitchFamily="34" charset="-122"/>
-                <a:cs typeface="Aptos" pitchFamily="34" charset="-120"/>
-              </a:rPr>
-              <a:t>CDC Public Health Data Strategy and Data Modernization resources:.</a:t>
+                  <a:srgbClr val="003A63"/>
+                </a:solidFill>
+                <a:latin typeface="Aptos" pitchFamily="34" charset="0"/>
+                <a:ea typeface="Aptos" pitchFamily="34" charset="-122"/>
+                <a:cs typeface="Aptos" pitchFamily="34" charset="-120"/>
+              </a:rPr>
+              <a:t>• CDC Public Health Data Strategy and Data Modernization resources:.</a:t>
             </a:r>
             <a:endParaRPr lang="en-US" sz="2100" dirty="0"/>
           </a:p>
@@ -12365,17 +12550,17 @@
         </p:nvSpPr>
         <p:spPr>
           <a:xfrm>
-            <a:off x="7799832" y="1828800"/>
-            <a:ext cx="3145536" cy="685800"/>
-          </a:xfrm>
-          <a:prstGeom prst="rect">
-            <a:avLst/>
-          </a:prstGeom>
-          <a:noFill/>
-          <a:ln/>
-        </p:spPr>
-        <p:txBody>
-          <a:bodyPr wrap="square" lIns="0" tIns="0" rIns="0" bIns="0" rtlCol="0" anchor="t">
+            <a:off x="7799832" y="1801368"/>
+            <a:ext cx="3145536" cy="758952"/>
+          </a:xfrm>
+          <a:prstGeom prst="rect">
+            <a:avLst/>
+          </a:prstGeom>
+          <a:noFill/>
+          <a:ln/>
+        </p:spPr>
+        <p:txBody>
+          <a:bodyPr wrap="square" lIns="254" tIns="254" rIns="254" bIns="254" rtlCol="0" anchor="t">
             <a:normAutofit/>
           </a:bodyPr>
           <a:lstStyle/>
@@ -12384,7 +12569,7 @@
               <a:buNone/>
             </a:pPr>
             <a:r>
-              <a:rPr lang="en-US" sz="1550" dirty="0">
+              <a:rPr lang="en-US" sz="1320" dirty="0">
                 <a:solidFill>
                   <a:srgbClr val="17364A"/>
                 </a:solidFill>
@@ -12394,7 +12579,7 @@
               </a:rPr>
               <a:t>NIST Artificial Intelligence Risk Management Framework:.</a:t>
             </a:r>
-            <a:endParaRPr lang="en-US" sz="1550" dirty="0"/>
+            <a:endParaRPr lang="en-US" sz="1320" dirty="0"/>
           </a:p>
         </p:txBody>
       </p:sp>
@@ -12482,13 +12667,16 @@
           <a:ln/>
         </p:spPr>
         <p:txBody>
-          <a:bodyPr wrap="square" lIns="254" tIns="254" rIns="254" bIns="254" rtlCol="0" anchor="t">
+          <a:bodyPr wrap="square" lIns="508" tIns="508" rIns="508" bIns="508" rtlCol="0" anchor="t">
             <a:normAutofit/>
           </a:bodyPr>
           <a:lstStyle/>
           <a:p>
-            <a:r>
-              <a:rPr lang="en-US" sz="1380" dirty="0">
+            <a:pPr indent="0" marL="0">
+              <a:buNone/>
+            </a:pPr>
+            <a:r>
+              <a:rPr lang="en-US" sz="1220" dirty="0">
                 <a:solidFill>
                   <a:srgbClr val="17364A"/>
                 </a:solidFill>
@@ -12498,11 +12686,14 @@
               </a:rPr>
               <a:t>NIST Artificial Intelligence Risk Management Framework:.</a:t>
             </a:r>
-            <a:endParaRPr lang="en-US" sz="1380" dirty="0"/>
-          </a:p>
-          <a:p>
-            <a:r>
-              <a:rPr lang="en-US" sz="1380" dirty="0">
+            <a:endParaRPr lang="en-US" sz="1220" dirty="0"/>
+          </a:p>
+          <a:p>
+            <a:pPr indent="0" marL="0">
+              <a:buNone/>
+            </a:pPr>
+            <a:r>
+              <a:rPr lang="en-US" sz="1220" dirty="0">
                 <a:solidFill>
                   <a:srgbClr val="17364A"/>
                 </a:solidFill>
@@ -12512,11 +12703,14 @@
               </a:rPr>
               <a:t>OWASP guidance for LLM application security</a:t>
             </a:r>
-            <a:endParaRPr lang="en-US" sz="1380" dirty="0"/>
-          </a:p>
-          <a:p>
-            <a:r>
-              <a:rPr lang="en-US" sz="1380" dirty="0">
+            <a:endParaRPr lang="en-US" sz="1220" dirty="0"/>
+          </a:p>
+          <a:p>
+            <a:pPr indent="0" marL="0">
+              <a:buNone/>
+            </a:pPr>
+            <a:r>
+              <a:rPr lang="en-US" sz="1220" dirty="0">
                 <a:solidFill>
                   <a:srgbClr val="17364A"/>
                 </a:solidFill>
@@ -12524,9 +12718,9 @@
                 <a:ea typeface="Aptos" pitchFamily="34" charset="-122"/>
                 <a:cs typeface="Aptos" pitchFamily="34" charset="-120"/>
               </a:rPr>
-              <a:t>Agency policies for privacy, cybersecurity, records, procurement, accessibility, and.</a:t>
-            </a:r>
-            <a:endParaRPr lang="en-US" sz="1380" dirty="0"/>
+              <a:t>Agency policies for privacy, cybersecurity, records, procurement,.</a:t>
+            </a:r>
+            <a:endParaRPr lang="en-US" sz="1220" dirty="0"/>
           </a:p>
         </p:txBody>
       </p:sp>
@@ -12604,17 +12798,17 @@
         </p:nvSpPr>
         <p:spPr>
           <a:xfrm>
-            <a:off x="7799832" y="5001768"/>
-            <a:ext cx="3145536" cy="502920"/>
-          </a:xfrm>
-          <a:prstGeom prst="rect">
-            <a:avLst/>
-          </a:prstGeom>
-          <a:noFill/>
-          <a:ln/>
-        </p:spPr>
-        <p:txBody>
-          <a:bodyPr wrap="square" lIns="0" tIns="0" rIns="0" bIns="0" rtlCol="0" anchor="t">
+            <a:off x="7799832" y="4974336"/>
+            <a:ext cx="3145536" cy="576072"/>
+          </a:xfrm>
+          <a:prstGeom prst="rect">
+            <a:avLst/>
+          </a:prstGeom>
+          <a:noFill/>
+          <a:ln/>
+        </p:spPr>
+        <p:txBody>
+          <a:bodyPr wrap="square" lIns="254" tIns="254" rIns="254" bIns="254" rtlCol="0" anchor="t">
             <a:normAutofit/>
           </a:bodyPr>
           <a:lstStyle/>
@@ -12623,7 +12817,7 @@
               <a:buNone/>
             </a:pPr>
             <a:r>
-              <a:rPr lang="en-US" sz="1550" dirty="0">
+              <a:rPr lang="en-US" sz="1320" dirty="0">
                 <a:solidFill>
                   <a:srgbClr val="17364A"/>
                 </a:solidFill>
@@ -12631,9 +12825,9 @@
                 <a:ea typeface="Aptos" pitchFamily="34" charset="-122"/>
                 <a:cs typeface="Aptos" pitchFamily="34" charset="-120"/>
               </a:rPr>
-              <a:t>Connect the concept to public health purpose, responsible use, required safeguards, documentation, and the next action a department should take.</a:t>
-            </a:r>
-            <a:endParaRPr lang="en-US" sz="1550" dirty="0"/>
+              <a:t>Connect the concept to public health purpose, responsible use, required safeguards, documentation, and the next action a.</a:t>
+            </a:r>
+            <a:endParaRPr lang="en-US" sz="1320" dirty="0"/>
           </a:p>
         </p:txBody>
       </p:sp>
@@ -12934,21 +13128,24 @@
           <a:ln/>
         </p:spPr>
         <p:txBody>
-          <a:bodyPr wrap="square" lIns="635" tIns="635" rIns="635" bIns="635" rtlCol="0" anchor="t">
+          <a:bodyPr wrap="square" lIns="1016" tIns="1016" rIns="1016" bIns="1016" rtlCol="0" anchor="t">
             <a:normAutofit/>
           </a:bodyPr>
           <a:lstStyle/>
           <a:p>
+            <a:pPr indent="0" marL="0">
+              <a:buNone/>
+            </a:pPr>
             <a:r>
               <a:rPr lang="en-US" sz="2100" dirty="0">
                 <a:solidFill>
-                  <a:srgbClr val="17364A"/>
-                </a:solidFill>
-                <a:latin typeface="Aptos" pitchFamily="34" charset="0"/>
-                <a:ea typeface="Aptos" pitchFamily="34" charset="-122"/>
-                <a:cs typeface="Aptos" pitchFamily="34" charset="-120"/>
-              </a:rPr>
-              <a:t>Relevant public health program SOPs, data governance documentation, and implementation plans</a:t>
+                  <a:srgbClr val="003A63"/>
+                </a:solidFill>
+                <a:latin typeface="Aptos" pitchFamily="34" charset="0"/>
+                <a:ea typeface="Aptos" pitchFamily="34" charset="-122"/>
+                <a:cs typeface="Aptos" pitchFamily="34" charset="-120"/>
+              </a:rPr>
+              <a:t>• Relevant public health program SOPs, data governance documentation, and implementation plans</a:t>
             </a:r>
             <a:endParaRPr lang="en-US" sz="2100" dirty="0"/>
           </a:p>
@@ -13028,17 +13225,17 @@
         </p:nvSpPr>
         <p:spPr>
           <a:xfrm>
-            <a:off x="7799832" y="1828800"/>
-            <a:ext cx="3145536" cy="685800"/>
-          </a:xfrm>
-          <a:prstGeom prst="rect">
-            <a:avLst/>
-          </a:prstGeom>
-          <a:noFill/>
-          <a:ln/>
-        </p:spPr>
-        <p:txBody>
-          <a:bodyPr wrap="square" lIns="0" tIns="0" rIns="0" bIns="0" rtlCol="0" anchor="t">
+            <a:off x="7799832" y="1801368"/>
+            <a:ext cx="3145536" cy="758952"/>
+          </a:xfrm>
+          <a:prstGeom prst="rect">
+            <a:avLst/>
+          </a:prstGeom>
+          <a:noFill/>
+          <a:ln/>
+        </p:spPr>
+        <p:txBody>
+          <a:bodyPr wrap="square" lIns="254" tIns="254" rIns="254" bIns="254" rtlCol="0" anchor="t">
             <a:normAutofit/>
           </a:bodyPr>
           <a:lstStyle/>
@@ -13047,7 +13244,7 @@
               <a:buNone/>
             </a:pPr>
             <a:r>
-              <a:rPr lang="en-US" sz="1550" dirty="0">
+              <a:rPr lang="en-US" sz="1320" dirty="0">
                 <a:solidFill>
                   <a:srgbClr val="17364A"/>
                 </a:solidFill>
@@ -13057,7 +13254,7 @@
               </a:rPr>
               <a:t>Relevant public health program SOPs, data governance documentation, and implementation plans</a:t>
             </a:r>
-            <a:endParaRPr lang="en-US" sz="1550" dirty="0"/>
+            <a:endParaRPr lang="en-US" sz="1320" dirty="0"/>
           </a:p>
         </p:txBody>
       </p:sp>
@@ -13145,13 +13342,16 @@
           <a:ln/>
         </p:spPr>
         <p:txBody>
-          <a:bodyPr wrap="square" lIns="254" tIns="254" rIns="254" bIns="254" rtlCol="0" anchor="t">
+          <a:bodyPr wrap="square" lIns="508" tIns="508" rIns="508" bIns="508" rtlCol="0" anchor="t">
             <a:normAutofit/>
           </a:bodyPr>
           <a:lstStyle/>
           <a:p>
-            <a:r>
-              <a:rPr lang="en-US" sz="1380" dirty="0">
+            <a:pPr indent="0" marL="0">
+              <a:buNone/>
+            </a:pPr>
+            <a:r>
+              <a:rPr lang="en-US" sz="1220" dirty="0">
                 <a:solidFill>
                   <a:srgbClr val="17364A"/>
                 </a:solidFill>
@@ -13159,9 +13359,9 @@
                 <a:ea typeface="Aptos" pitchFamily="34" charset="-122"/>
                 <a:cs typeface="Aptos" pitchFamily="34" charset="-120"/>
               </a:rPr>
-              <a:t>Relevant public health program SOPs, data governance documentation, and implementation plans</a:t>
-            </a:r>
-            <a:endParaRPr lang="en-US" sz="1380" dirty="0"/>
+              <a:t>Relevant public health program SOPs, data governance.</a:t>
+            </a:r>
+            <a:endParaRPr lang="en-US" sz="1220" dirty="0"/>
           </a:p>
         </p:txBody>
       </p:sp>
@@ -13239,17 +13439,17 @@
         </p:nvSpPr>
         <p:spPr>
           <a:xfrm>
-            <a:off x="7799832" y="5001768"/>
-            <a:ext cx="3145536" cy="502920"/>
-          </a:xfrm>
-          <a:prstGeom prst="rect">
-            <a:avLst/>
-          </a:prstGeom>
-          <a:noFill/>
-          <a:ln/>
-        </p:spPr>
-        <p:txBody>
-          <a:bodyPr wrap="square" lIns="0" tIns="0" rIns="0" bIns="0" rtlCol="0" anchor="t">
+            <a:off x="7799832" y="4974336"/>
+            <a:ext cx="3145536" cy="576072"/>
+          </a:xfrm>
+          <a:prstGeom prst="rect">
+            <a:avLst/>
+          </a:prstGeom>
+          <a:noFill/>
+          <a:ln/>
+        </p:spPr>
+        <p:txBody>
+          <a:bodyPr wrap="square" lIns="254" tIns="254" rIns="254" bIns="254" rtlCol="0" anchor="t">
             <a:normAutofit/>
           </a:bodyPr>
           <a:lstStyle/>
@@ -13258,7 +13458,7 @@
               <a:buNone/>
             </a:pPr>
             <a:r>
-              <a:rPr lang="en-US" sz="1550" dirty="0">
+              <a:rPr lang="en-US" sz="1320" dirty="0">
                 <a:solidFill>
                   <a:srgbClr val="17364A"/>
                 </a:solidFill>
@@ -13266,9 +13466,9 @@
                 <a:ea typeface="Aptos" pitchFamily="34" charset="-122"/>
                 <a:cs typeface="Aptos" pitchFamily="34" charset="-120"/>
               </a:rPr>
-              <a:t>Connect the concept to public health purpose, responsible use, required safeguards, documentation, and the next action a department should take.</a:t>
-            </a:r>
-            <a:endParaRPr lang="en-US" sz="1550" dirty="0"/>
+              <a:t>Connect the concept to public health purpose, responsible use, required safeguards, documentation, and the next action a.</a:t>
+            </a:r>
+            <a:endParaRPr lang="en-US" sz="1320" dirty="0"/>
           </a:p>
         </p:txBody>
       </p:sp>
@@ -13569,63 +13769,75 @@
           <a:ln/>
         </p:spPr>
         <p:txBody>
-          <a:bodyPr wrap="square" lIns="635" tIns="635" rIns="635" bIns="635" rtlCol="0" anchor="t">
+          <a:bodyPr wrap="square" lIns="1016" tIns="1016" rIns="1016" bIns="1016" rtlCol="0" anchor="t">
             <a:normAutofit/>
           </a:bodyPr>
           <a:lstStyle/>
           <a:p>
+            <a:pPr indent="0" marL="0">
+              <a:buNone/>
+            </a:pPr>
             <a:r>
               <a:rPr lang="en-US" sz="1900" dirty="0">
                 <a:solidFill>
-                  <a:srgbClr val="17364A"/>
-                </a:solidFill>
-                <a:latin typeface="Aptos" pitchFamily="34" charset="0"/>
-                <a:ea typeface="Aptos" pitchFamily="34" charset="-122"/>
-                <a:cs typeface="Aptos" pitchFamily="34" charset="-120"/>
-              </a:rPr>
-              <a:t>Play 7: Prioritize Use Cases - This lesson informs Play 7 by helping learners connect the lesson topic to.</a:t>
+                  <a:srgbClr val="003A63"/>
+                </a:solidFill>
+                <a:latin typeface="Aptos" pitchFamily="34" charset="0"/>
+                <a:ea typeface="Aptos" pitchFamily="34" charset="-122"/>
+                <a:cs typeface="Aptos" pitchFamily="34" charset="-120"/>
+              </a:rPr>
+              <a:t>• Play 7: Prioritize Use Cases - This lesson informs Play 7 by helping learners connect the.</a:t>
             </a:r>
             <a:endParaRPr lang="en-US" sz="1900" dirty="0"/>
           </a:p>
           <a:p>
+            <a:pPr indent="0" marL="0">
+              <a:buNone/>
+            </a:pPr>
             <a:r>
               <a:rPr lang="en-US" sz="1900" dirty="0">
                 <a:solidFill>
-                  <a:srgbClr val="17364A"/>
-                </a:solidFill>
-                <a:latin typeface="Aptos" pitchFamily="34" charset="0"/>
-                <a:ea typeface="Aptos" pitchFamily="34" charset="-122"/>
-                <a:cs typeface="Aptos" pitchFamily="34" charset="-120"/>
-              </a:rPr>
-              <a:t>Play 11: Build and Deploy AI Solutions - This lesson informs Play 11 by helping learners connect the lesson.</a:t>
+                  <a:srgbClr val="003A63"/>
+                </a:solidFill>
+                <a:latin typeface="Aptos" pitchFamily="34" charset="0"/>
+                <a:ea typeface="Aptos" pitchFamily="34" charset="-122"/>
+                <a:cs typeface="Aptos" pitchFamily="34" charset="-120"/>
+              </a:rPr>
+              <a:t>• Play 11: Build and Deploy AI Solutions - This lesson informs Play 11 by helping learners.</a:t>
             </a:r>
             <a:endParaRPr lang="en-US" sz="1900" dirty="0"/>
           </a:p>
           <a:p>
+            <a:pPr indent="0" marL="0">
+              <a:buNone/>
+            </a:pPr>
             <a:r>
               <a:rPr lang="en-US" sz="1900" dirty="0">
                 <a:solidFill>
-                  <a:srgbClr val="17364A"/>
-                </a:solidFill>
-                <a:latin typeface="Aptos" pitchFamily="34" charset="0"/>
-                <a:ea typeface="Aptos" pitchFamily="34" charset="-122"/>
-                <a:cs typeface="Aptos" pitchFamily="34" charset="-120"/>
-              </a:rPr>
-              <a:t>Play 3: Establish AI Governance - This lesson informs Play 3 by helping learners connect the lesson topic to.</a:t>
+                  <a:srgbClr val="003A63"/>
+                </a:solidFill>
+                <a:latin typeface="Aptos" pitchFamily="34" charset="0"/>
+                <a:ea typeface="Aptos" pitchFamily="34" charset="-122"/>
+                <a:cs typeface="Aptos" pitchFamily="34" charset="-120"/>
+              </a:rPr>
+              <a:t>• Play 3: Establish AI Governance - This lesson informs Play 3 by helping learners connect the.</a:t>
             </a:r>
             <a:endParaRPr lang="en-US" sz="1900" dirty="0"/>
           </a:p>
           <a:p>
+            <a:pPr indent="0" marL="0">
+              <a:buNone/>
+            </a:pPr>
             <a:r>
               <a:rPr lang="en-US" sz="1900" dirty="0">
                 <a:solidFill>
-                  <a:srgbClr val="17364A"/>
-                </a:solidFill>
-                <a:latin typeface="Aptos" pitchFamily="34" charset="0"/>
-                <a:ea typeface="Aptos" pitchFamily="34" charset="-122"/>
-                <a:cs typeface="Aptos" pitchFamily="34" charset="-120"/>
-              </a:rPr>
-              <a:t>Play 1: Vision &amp; Guardrails - This lesson informs Play 1 by helping learners connect the lesson topic to.</a:t>
+                  <a:srgbClr val="003A63"/>
+                </a:solidFill>
+                <a:latin typeface="Aptos" pitchFamily="34" charset="0"/>
+                <a:ea typeface="Aptos" pitchFamily="34" charset="-122"/>
+                <a:cs typeface="Aptos" pitchFamily="34" charset="-120"/>
+              </a:rPr>
+              <a:t>• Play 1: Vision &amp; Guardrails - This lesson informs Play 1 by helping learners connect the.</a:t>
             </a:r>
             <a:endParaRPr lang="en-US" sz="1900" dirty="0"/>
           </a:p>
@@ -13705,17 +13917,17 @@
         </p:nvSpPr>
         <p:spPr>
           <a:xfrm>
-            <a:off x="8211312" y="1920240"/>
-            <a:ext cx="2734056" cy="1463040"/>
-          </a:xfrm>
-          <a:prstGeom prst="rect">
-            <a:avLst/>
-          </a:prstGeom>
-          <a:noFill/>
-          <a:ln/>
-        </p:spPr>
-        <p:txBody>
-          <a:bodyPr wrap="square" lIns="0" tIns="0" rIns="0" bIns="0" rtlCol="0" anchor="t">
+            <a:off x="8211312" y="1892808"/>
+            <a:ext cx="2734056" cy="1536192"/>
+          </a:xfrm>
+          <a:prstGeom prst="rect">
+            <a:avLst/>
+          </a:prstGeom>
+          <a:noFill/>
+          <a:ln/>
+        </p:spPr>
+        <p:txBody>
+          <a:bodyPr wrap="square" lIns="254" tIns="254" rIns="254" bIns="254" rtlCol="0" anchor="t">
             <a:normAutofit/>
           </a:bodyPr>
           <a:lstStyle/>
@@ -13724,7 +13936,7 @@
               <a:buNone/>
             </a:pPr>
             <a:r>
-              <a:rPr lang="en-US" sz="1550" dirty="0">
+              <a:rPr lang="en-US" sz="1320" dirty="0">
                 <a:solidFill>
                   <a:srgbClr val="17364A"/>
                 </a:solidFill>
@@ -13732,9 +13944,9 @@
                 <a:ea typeface="Aptos" pitchFamily="34" charset="-122"/>
                 <a:cs typeface="Aptos" pitchFamily="34" charset="-120"/>
               </a:rPr>
-              <a:t>Use the related plays to identify decisions, participants, timing, approvals, and documentation needed for responsible implementation.</a:t>
-            </a:r>
-            <a:endParaRPr lang="en-US" sz="1550" dirty="0"/>
+              <a:t>Use the related plays to identify decisions, participants, timing, approvals, and documentation needed for responsible.</a:t>
+            </a:r>
+            <a:endParaRPr lang="en-US" sz="1320" dirty="0"/>
           </a:p>
         </p:txBody>
       </p:sp>
@@ -13822,13 +14034,16 @@
           <a:ln/>
         </p:spPr>
         <p:txBody>
-          <a:bodyPr wrap="square" lIns="254" tIns="254" rIns="254" bIns="254" rtlCol="0" anchor="t">
+          <a:bodyPr wrap="square" lIns="508" tIns="508" rIns="508" bIns="508" rtlCol="0" anchor="t">
             <a:normAutofit/>
           </a:bodyPr>
           <a:lstStyle/>
           <a:p>
-            <a:r>
-              <a:rPr lang="en-US" sz="1380" dirty="0">
+            <a:pPr indent="0" marL="0">
+              <a:buNone/>
+            </a:pPr>
+            <a:r>
+              <a:rPr lang="en-US" sz="1220" dirty="0">
                 <a:solidFill>
                   <a:srgbClr val="17364A"/>
                 </a:solidFill>
@@ -13838,11 +14053,14 @@
               </a:rPr>
               <a:t>Locate the decision point in the playbook sequence.</a:t>
             </a:r>
-            <a:endParaRPr lang="en-US" sz="1380" dirty="0"/>
-          </a:p>
-          <a:p>
-            <a:r>
-              <a:rPr lang="en-US" sz="1380" dirty="0">
+            <a:endParaRPr lang="en-US" sz="1220" dirty="0"/>
+          </a:p>
+          <a:p>
+            <a:pPr indent="0" marL="0">
+              <a:buNone/>
+            </a:pPr>
+            <a:r>
+              <a:rPr lang="en-US" sz="1220" dirty="0">
                 <a:solidFill>
                   <a:srgbClr val="17364A"/>
                 </a:solidFill>
@@ -13852,11 +14070,14 @@
               </a:rPr>
               <a:t>Identify who should participate in the work.</a:t>
             </a:r>
-            <a:endParaRPr lang="en-US" sz="1380" dirty="0"/>
-          </a:p>
-          <a:p>
-            <a:r>
-              <a:rPr lang="en-US" sz="1380" dirty="0">
+            <a:endParaRPr lang="en-US" sz="1220" dirty="0"/>
+          </a:p>
+          <a:p>
+            <a:pPr indent="0" marL="0">
+              <a:buNone/>
+            </a:pPr>
+            <a:r>
+              <a:rPr lang="en-US" sz="1220" dirty="0">
                 <a:solidFill>
                   <a:srgbClr val="17364A"/>
                 </a:solidFill>
@@ -13866,7 +14087,7 @@
               </a:rPr>
               <a:t>Document the review, approval, or implementation step.</a:t>
             </a:r>
-            <a:endParaRPr lang="en-US" sz="1380" dirty="0"/>
+            <a:endParaRPr lang="en-US" sz="1220" dirty="0"/>
           </a:p>
         </p:txBody>
       </p:sp>
@@ -14167,63 +14388,75 @@
           <a:ln/>
         </p:spPr>
         <p:txBody>
-          <a:bodyPr wrap="square" lIns="635" tIns="635" rIns="635" bIns="635" rtlCol="0" anchor="t">
+          <a:bodyPr wrap="square" lIns="1016" tIns="1016" rIns="1016" bIns="1016" rtlCol="0" anchor="t">
             <a:normAutofit/>
           </a:bodyPr>
           <a:lstStyle/>
           <a:p>
+            <a:pPr indent="0" marL="0">
+              <a:buNone/>
+            </a:pPr>
             <a:r>
               <a:rPr lang="en-US" sz="1850" dirty="0">
                 <a:solidFill>
-                  <a:srgbClr val="17364A"/>
-                </a:solidFill>
-                <a:latin typeface="Aptos" pitchFamily="34" charset="0"/>
-                <a:ea typeface="Aptos" pitchFamily="34" charset="-122"/>
-                <a:cs typeface="Aptos" pitchFamily="34" charset="-120"/>
-              </a:rPr>
-              <a:t>Tool 3: Equity Impact Assessment Checklist (Checklist) - Use this tool to complete or strengthen the.</a:t>
+                  <a:srgbClr val="003A63"/>
+                </a:solidFill>
+                <a:latin typeface="Aptos" pitchFamily="34" charset="0"/>
+                <a:ea typeface="Aptos" pitchFamily="34" charset="-122"/>
+                <a:cs typeface="Aptos" pitchFamily="34" charset="-120"/>
+              </a:rPr>
+              <a:t>• Tool 3: Equity Impact Assessment Checklist (Checklist) - Use this tool to complete or.</a:t>
             </a:r>
             <a:endParaRPr lang="en-US" sz="1850" dirty="0"/>
           </a:p>
           <a:p>
+            <a:pPr indent="0" marL="0">
+              <a:buNone/>
+            </a:pPr>
             <a:r>
               <a:rPr lang="en-US" sz="1850" dirty="0">
                 <a:solidFill>
-                  <a:srgbClr val="17364A"/>
-                </a:solidFill>
-                <a:latin typeface="Aptos" pitchFamily="34" charset="0"/>
-                <a:ea typeface="Aptos" pitchFamily="34" charset="-122"/>
-                <a:cs typeface="Aptos" pitchFamily="34" charset="-120"/>
-              </a:rPr>
-              <a:t>Tool 31: Use Case Scoring &amp; Prioritization Matrix (Matrix) - Use this tool to complete or strengthen the.</a:t>
+                  <a:srgbClr val="003A63"/>
+                </a:solidFill>
+                <a:latin typeface="Aptos" pitchFamily="34" charset="0"/>
+                <a:ea typeface="Aptos" pitchFamily="34" charset="-122"/>
+                <a:cs typeface="Aptos" pitchFamily="34" charset="-120"/>
+              </a:rPr>
+              <a:t>• Tool 31: Use Case Scoring &amp; Prioritization Matrix (Matrix) - Use this tool to complete or.</a:t>
             </a:r>
             <a:endParaRPr lang="en-US" sz="1850" dirty="0"/>
           </a:p>
           <a:p>
+            <a:pPr indent="0" marL="0">
+              <a:buNone/>
+            </a:pPr>
             <a:r>
               <a:rPr lang="en-US" sz="1850" dirty="0">
                 <a:solidFill>
-                  <a:srgbClr val="17364A"/>
-                </a:solidFill>
-                <a:latin typeface="Aptos" pitchFamily="34" charset="0"/>
-                <a:ea typeface="Aptos" pitchFamily="34" charset="-122"/>
-                <a:cs typeface="Aptos" pitchFamily="34" charset="-120"/>
-              </a:rPr>
-              <a:t>Tool 49: AI Use Case Intake and Triage Worksheet (Worksheet) - Use this tool to complete or strengthen the.</a:t>
+                  <a:srgbClr val="003A63"/>
+                </a:solidFill>
+                <a:latin typeface="Aptos" pitchFamily="34" charset="0"/>
+                <a:ea typeface="Aptos" pitchFamily="34" charset="-122"/>
+                <a:cs typeface="Aptos" pitchFamily="34" charset="-120"/>
+              </a:rPr>
+              <a:t>• Tool 49: AI Use Case Intake and Triage Worksheet (Worksheet) - Use this tool to complete or.</a:t>
             </a:r>
             <a:endParaRPr lang="en-US" sz="1850" dirty="0"/>
           </a:p>
           <a:p>
+            <a:pPr indent="0" marL="0">
+              <a:buNone/>
+            </a:pPr>
             <a:r>
               <a:rPr lang="en-US" sz="1850" dirty="0">
                 <a:solidFill>
-                  <a:srgbClr val="17364A"/>
-                </a:solidFill>
-                <a:latin typeface="Aptos" pitchFamily="34" charset="0"/>
-                <a:ea typeface="Aptos" pitchFamily="34" charset="-122"/>
-                <a:cs typeface="Aptos" pitchFamily="34" charset="-120"/>
-              </a:rPr>
-              <a:t>Tool 4: AI Policy Landscape Scan (Worksheet) - Use AI Policy Landscape Scan to translate this lesson into a.</a:t>
+                  <a:srgbClr val="003A63"/>
+                </a:solidFill>
+                <a:latin typeface="Aptos" pitchFamily="34" charset="0"/>
+                <a:ea typeface="Aptos" pitchFamily="34" charset="-122"/>
+                <a:cs typeface="Aptos" pitchFamily="34" charset="-120"/>
+              </a:rPr>
+              <a:t>• Tool 4: AI Policy Landscape Scan (Worksheet) - Use AI Policy Landscape Scan to translate this.</a:t>
             </a:r>
             <a:endParaRPr lang="en-US" sz="1850" dirty="0"/>
           </a:p>
@@ -14303,17 +14536,17 @@
         </p:nvSpPr>
         <p:spPr>
           <a:xfrm>
-            <a:off x="8211312" y="1920240"/>
-            <a:ext cx="2734056" cy="1463040"/>
-          </a:xfrm>
-          <a:prstGeom prst="rect">
-            <a:avLst/>
-          </a:prstGeom>
-          <a:noFill/>
-          <a:ln/>
-        </p:spPr>
-        <p:txBody>
-          <a:bodyPr wrap="square" lIns="0" tIns="0" rIns="0" bIns="0" rtlCol="0" anchor="t">
+            <a:off x="8211312" y="1892808"/>
+            <a:ext cx="2734056" cy="1536192"/>
+          </a:xfrm>
+          <a:prstGeom prst="rect">
+            <a:avLst/>
+          </a:prstGeom>
+          <a:noFill/>
+          <a:ln/>
+        </p:spPr>
+        <p:txBody>
+          <a:bodyPr wrap="square" lIns="254" tIns="254" rIns="254" bIns="254" rtlCol="0" anchor="t">
             <a:normAutofit/>
           </a:bodyPr>
           <a:lstStyle/>
@@ -14322,7 +14555,7 @@
               <a:buNone/>
             </a:pPr>
             <a:r>
-              <a:rPr lang="en-US" sz="1550" dirty="0">
+              <a:rPr lang="en-US" sz="1320" dirty="0">
                 <a:solidFill>
                   <a:srgbClr val="17364A"/>
                 </a:solidFill>
@@ -14330,9 +14563,9 @@
                 <a:ea typeface="Aptos" pitchFamily="34" charset="-122"/>
                 <a:cs typeface="Aptos" pitchFamily="34" charset="-120"/>
               </a:rPr>
-              <a:t>Use linked tools when your department needs a structured worksheet, template, checklist, review process, or documentation artifact.</a:t>
-            </a:r>
-            <a:endParaRPr lang="en-US" sz="1550" dirty="0"/>
+              <a:t>Use linked tools when your department needs a structured worksheet, template, checklist, review process, or.</a:t>
+            </a:r>
+            <a:endParaRPr lang="en-US" sz="1320" dirty="0"/>
           </a:p>
         </p:txBody>
       </p:sp>
@@ -14420,13 +14653,16 @@
           <a:ln/>
         </p:spPr>
         <p:txBody>
-          <a:bodyPr wrap="square" lIns="254" tIns="254" rIns="254" bIns="254" rtlCol="0" anchor="t">
+          <a:bodyPr wrap="square" lIns="508" tIns="508" rIns="508" bIns="508" rtlCol="0" anchor="t">
             <a:normAutofit/>
           </a:bodyPr>
           <a:lstStyle/>
           <a:p>
-            <a:r>
-              <a:rPr lang="en-US" sz="1380" dirty="0">
+            <a:pPr indent="0" marL="0">
+              <a:buNone/>
+            </a:pPr>
+            <a:r>
+              <a:rPr lang="en-US" sz="1220" dirty="0">
                 <a:solidFill>
                   <a:srgbClr val="17364A"/>
                 </a:solidFill>
@@ -14436,11 +14672,14 @@
               </a:rPr>
               <a:t>Use a tool when no comparable local process exists.</a:t>
             </a:r>
-            <a:endParaRPr lang="en-US" sz="1380" dirty="0"/>
-          </a:p>
-          <a:p>
-            <a:r>
-              <a:rPr lang="en-US" sz="1380" dirty="0">
+            <a:endParaRPr lang="en-US" sz="1220" dirty="0"/>
+          </a:p>
+          <a:p>
+            <a:pPr indent="0" marL="0">
+              <a:buNone/>
+            </a:pPr>
+            <a:r>
+              <a:rPr lang="en-US" sz="1220" dirty="0">
                 <a:solidFill>
                   <a:srgbClr val="17364A"/>
                 </a:solidFill>
@@ -14448,13 +14687,16 @@
                 <a:ea typeface="Aptos" pitchFamily="34" charset="-122"/>
                 <a:cs typeface="Aptos" pitchFamily="34" charset="-120"/>
               </a:rPr>
-              <a:t>Adapt existing department templates when they already fit the purpose.</a:t>
-            </a:r>
-            <a:endParaRPr lang="en-US" sz="1380" dirty="0"/>
-          </a:p>
-          <a:p>
-            <a:r>
-              <a:rPr lang="en-US" sz="1380" dirty="0">
+              <a:t>Adapt existing department templates when they already fit the.</a:t>
+            </a:r>
+            <a:endParaRPr lang="en-US" sz="1220" dirty="0"/>
+          </a:p>
+          <a:p>
+            <a:pPr indent="0" marL="0">
+              <a:buNone/>
+            </a:pPr>
+            <a:r>
+              <a:rPr lang="en-US" sz="1220" dirty="0">
                 <a:solidFill>
                   <a:srgbClr val="17364A"/>
                 </a:solidFill>
@@ -14464,7 +14706,7 @@
               </a:rPr>
               <a:t>Save the completed artifact as evidence of the decision.</a:t>
             </a:r>
-            <a:endParaRPr lang="en-US" sz="1380" dirty="0"/>
+            <a:endParaRPr lang="en-US" sz="1220" dirty="0"/>
           </a:p>
         </p:txBody>
       </p:sp>
@@ -14765,49 +15007,58 @@
           <a:ln/>
         </p:spPr>
         <p:txBody>
-          <a:bodyPr wrap="square" lIns="635" tIns="635" rIns="635" bIns="635" rtlCol="0" anchor="t">
+          <a:bodyPr wrap="square" lIns="1016" tIns="1016" rIns="1016" bIns="1016" rtlCol="0" anchor="t">
             <a:normAutofit/>
           </a:bodyPr>
           <a:lstStyle/>
           <a:p>
+            <a:pPr indent="0" marL="0">
+              <a:buNone/>
+            </a:pPr>
             <a:r>
               <a:rPr lang="en-US" sz="2100" dirty="0">
                 <a:solidFill>
-                  <a:srgbClr val="17364A"/>
-                </a:solidFill>
-                <a:latin typeface="Aptos" pitchFamily="34" charset="0"/>
-                <a:ea typeface="Aptos" pitchFamily="34" charset="-122"/>
-                <a:cs typeface="Aptos" pitchFamily="34" charset="-120"/>
-              </a:rPr>
-              <a:t>Describe an AI use case in plain language using the public health workflow, users, data, intended.</a:t>
+                  <a:srgbClr val="003A63"/>
+                </a:solidFill>
+                <a:latin typeface="Aptos" pitchFamily="34" charset="0"/>
+                <a:ea typeface="Aptos" pitchFamily="34" charset="-122"/>
+                <a:cs typeface="Aptos" pitchFamily="34" charset="-120"/>
+              </a:rPr>
+              <a:t>• Describe an AI use case in plain language using the public health workflow, users, data,.</a:t>
             </a:r>
             <a:endParaRPr lang="en-US" sz="2100" dirty="0"/>
           </a:p>
           <a:p>
+            <a:pPr indent="0" marL="0">
+              <a:buNone/>
+            </a:pPr>
             <a:r>
               <a:rPr lang="en-US" sz="2100" dirty="0">
                 <a:solidFill>
-                  <a:srgbClr val="17364A"/>
-                </a:solidFill>
-                <a:latin typeface="Aptos" pitchFamily="34" charset="0"/>
-                <a:ea typeface="Aptos" pitchFamily="34" charset="-122"/>
-                <a:cs typeface="Aptos" pitchFamily="34" charset="-120"/>
-              </a:rPr>
-              <a:t>Distinguish between low-risk, moderate-risk, and high-risk AI use cases based on data sensitivity,.</a:t>
+                  <a:srgbClr val="003A63"/>
+                </a:solidFill>
+                <a:latin typeface="Aptos" pitchFamily="34" charset="0"/>
+                <a:ea typeface="Aptos" pitchFamily="34" charset="-122"/>
+                <a:cs typeface="Aptos" pitchFamily="34" charset="-120"/>
+              </a:rPr>
+              <a:t>• Distinguish between low-risk, moderate-risk, and high-risk AI use cases based on data.</a:t>
             </a:r>
             <a:endParaRPr lang="en-US" sz="2100" dirty="0"/>
           </a:p>
           <a:p>
+            <a:pPr indent="0" marL="0">
+              <a:buNone/>
+            </a:pPr>
             <a:r>
               <a:rPr lang="en-US" sz="2100" dirty="0">
                 <a:solidFill>
-                  <a:srgbClr val="17364A"/>
-                </a:solidFill>
-                <a:latin typeface="Aptos" pitchFamily="34" charset="0"/>
-                <a:ea typeface="Aptos" pitchFamily="34" charset="-122"/>
-                <a:cs typeface="Aptos" pitchFamily="34" charset="-120"/>
-              </a:rPr>
-              <a:t>Identify when a use case should be routed to privacy, legal, IT, cybersecurity, equity, procurement,.</a:t>
+                  <a:srgbClr val="003A63"/>
+                </a:solidFill>
+                <a:latin typeface="Aptos" pitchFamily="34" charset="0"/>
+                <a:ea typeface="Aptos" pitchFamily="34" charset="-122"/>
+                <a:cs typeface="Aptos" pitchFamily="34" charset="-120"/>
+              </a:rPr>
+              <a:t>• Identify when a use case should be routed to privacy, legal, IT, cybersecurity, equity,.</a:t>
             </a:r>
             <a:endParaRPr lang="en-US" sz="2100" dirty="0"/>
           </a:p>
@@ -14887,17 +15138,17 @@
         </p:nvSpPr>
         <p:spPr>
           <a:xfrm>
-            <a:off x="7799832" y="1828800"/>
-            <a:ext cx="3145536" cy="685800"/>
-          </a:xfrm>
-          <a:prstGeom prst="rect">
-            <a:avLst/>
-          </a:prstGeom>
-          <a:noFill/>
-          <a:ln/>
-        </p:spPr>
-        <p:txBody>
-          <a:bodyPr wrap="square" lIns="0" tIns="0" rIns="0" bIns="0" rtlCol="0" anchor="t">
+            <a:off x="7799832" y="1801368"/>
+            <a:ext cx="3145536" cy="758952"/>
+          </a:xfrm>
+          <a:prstGeom prst="rect">
+            <a:avLst/>
+          </a:prstGeom>
+          <a:noFill/>
+          <a:ln/>
+        </p:spPr>
+        <p:txBody>
+          <a:bodyPr wrap="square" lIns="254" tIns="254" rIns="254" bIns="254" rtlCol="0" anchor="t">
             <a:normAutofit/>
           </a:bodyPr>
           <a:lstStyle/>
@@ -14906,7 +15157,7 @@
               <a:buNone/>
             </a:pPr>
             <a:r>
-              <a:rPr lang="en-US" sz="1550" dirty="0">
+              <a:rPr lang="en-US" sz="1320" dirty="0">
                 <a:solidFill>
                   <a:srgbClr val="17364A"/>
                 </a:solidFill>
@@ -14916,7 +15167,7 @@
               </a:rPr>
               <a:t>Describe an AI use case in plain language using the public health workflow, users, data, intended.</a:t>
             </a:r>
-            <a:endParaRPr lang="en-US" sz="1550" dirty="0"/>
+            <a:endParaRPr lang="en-US" sz="1320" dirty="0"/>
           </a:p>
         </p:txBody>
       </p:sp>
@@ -15004,13 +15255,16 @@
           <a:ln/>
         </p:spPr>
         <p:txBody>
-          <a:bodyPr wrap="square" lIns="254" tIns="254" rIns="254" bIns="254" rtlCol="0" anchor="t">
+          <a:bodyPr wrap="square" lIns="508" tIns="508" rIns="508" bIns="508" rtlCol="0" anchor="t">
             <a:normAutofit/>
           </a:bodyPr>
           <a:lstStyle/>
           <a:p>
-            <a:r>
-              <a:rPr lang="en-US" sz="1380" dirty="0">
+            <a:pPr indent="0" marL="0">
+              <a:buNone/>
+            </a:pPr>
+            <a:r>
+              <a:rPr lang="en-US" sz="1220" dirty="0">
                 <a:solidFill>
                   <a:srgbClr val="17364A"/>
                 </a:solidFill>
@@ -15018,13 +15272,16 @@
                 <a:ea typeface="Aptos" pitchFamily="34" charset="-122"/>
                 <a:cs typeface="Aptos" pitchFamily="34" charset="-120"/>
               </a:rPr>
-              <a:t>Describe an AI use case in plain language using the public health workflow, users, data,.</a:t>
-            </a:r>
-            <a:endParaRPr lang="en-US" sz="1380" dirty="0"/>
-          </a:p>
-          <a:p>
-            <a:r>
-              <a:rPr lang="en-US" sz="1380" dirty="0">
+              <a:t>Describe an AI use case in plain language using the public health.</a:t>
+            </a:r>
+            <a:endParaRPr lang="en-US" sz="1220" dirty="0"/>
+          </a:p>
+          <a:p>
+            <a:pPr indent="0" marL="0">
+              <a:buNone/>
+            </a:pPr>
+            <a:r>
+              <a:rPr lang="en-US" sz="1220" dirty="0">
                 <a:solidFill>
                   <a:srgbClr val="17364A"/>
                 </a:solidFill>
@@ -15032,13 +15289,16 @@
                 <a:ea typeface="Aptos" pitchFamily="34" charset="-122"/>
                 <a:cs typeface="Aptos" pitchFamily="34" charset="-120"/>
               </a:rPr>
-              <a:t>Distinguish between low-risk, moderate-risk, and high-risk AI use cases based on data.</a:t>
-            </a:r>
-            <a:endParaRPr lang="en-US" sz="1380" dirty="0"/>
-          </a:p>
-          <a:p>
-            <a:r>
-              <a:rPr lang="en-US" sz="1380" dirty="0">
+              <a:t>Distinguish between low-risk, moderate-risk, and high-risk AI use.</a:t>
+            </a:r>
+            <a:endParaRPr lang="en-US" sz="1220" dirty="0"/>
+          </a:p>
+          <a:p>
+            <a:pPr indent="0" marL="0">
+              <a:buNone/>
+            </a:pPr>
+            <a:r>
+              <a:rPr lang="en-US" sz="1220" dirty="0">
                 <a:solidFill>
                   <a:srgbClr val="17364A"/>
                 </a:solidFill>
@@ -15046,9 +15306,9 @@
                 <a:ea typeface="Aptos" pitchFamily="34" charset="-122"/>
                 <a:cs typeface="Aptos" pitchFamily="34" charset="-120"/>
               </a:rPr>
-              <a:t>Identify when a use case should be routed to privacy, legal, IT, cybersecurity, equity,.</a:t>
-            </a:r>
-            <a:endParaRPr lang="en-US" sz="1380" dirty="0"/>
+              <a:t>Identify when a use case should be routed to privacy, legal, IT,.</a:t>
+            </a:r>
+            <a:endParaRPr lang="en-US" sz="1220" dirty="0"/>
           </a:p>
         </p:txBody>
       </p:sp>
@@ -15126,17 +15386,17 @@
         </p:nvSpPr>
         <p:spPr>
           <a:xfrm>
-            <a:off x="7799832" y="5001768"/>
-            <a:ext cx="3145536" cy="502920"/>
-          </a:xfrm>
-          <a:prstGeom prst="rect">
-            <a:avLst/>
-          </a:prstGeom>
-          <a:noFill/>
-          <a:ln/>
-        </p:spPr>
-        <p:txBody>
-          <a:bodyPr wrap="square" lIns="0" tIns="0" rIns="0" bIns="0" rtlCol="0" anchor="t">
+            <a:off x="7799832" y="4974336"/>
+            <a:ext cx="3145536" cy="576072"/>
+          </a:xfrm>
+          <a:prstGeom prst="rect">
+            <a:avLst/>
+          </a:prstGeom>
+          <a:noFill/>
+          <a:ln/>
+        </p:spPr>
+        <p:txBody>
+          <a:bodyPr wrap="square" lIns="254" tIns="254" rIns="254" bIns="254" rtlCol="0" anchor="t">
             <a:normAutofit/>
           </a:bodyPr>
           <a:lstStyle/>
@@ -15145,7 +15405,7 @@
               <a:buNone/>
             </a:pPr>
             <a:r>
-              <a:rPr lang="en-US" sz="1550" dirty="0">
+              <a:rPr lang="en-US" sz="1320" dirty="0">
                 <a:solidFill>
                   <a:srgbClr val="17364A"/>
                 </a:solidFill>
@@ -15153,9 +15413,9 @@
                 <a:ea typeface="Aptos" pitchFamily="34" charset="-122"/>
                 <a:cs typeface="Aptos" pitchFamily="34" charset="-120"/>
               </a:rPr>
-              <a:t>Use the assignment to test whether you can explain the concept, apply it to a realistic public health situation, and identify what would need review before the work moves forward.</a:t>
-            </a:r>
-            <a:endParaRPr lang="en-US" sz="1550" dirty="0"/>
+              <a:t>Use the assignment to test whether you can explain the concept, apply it to a realistic public health situation, and.</a:t>
+            </a:r>
+            <a:endParaRPr lang="en-US" sz="1320" dirty="0"/>
           </a:p>
         </p:txBody>
       </p:sp>
@@ -15456,49 +15716,58 @@
           <a:ln/>
         </p:spPr>
         <p:txBody>
-          <a:bodyPr wrap="square" lIns="635" tIns="635" rIns="635" bIns="635" rtlCol="0" anchor="t">
+          <a:bodyPr wrap="square" lIns="1016" tIns="1016" rIns="1016" bIns="1016" rtlCol="0" anchor="t">
             <a:normAutofit/>
           </a:bodyPr>
           <a:lstStyle/>
           <a:p>
+            <a:pPr indent="0" marL="0">
+              <a:buNone/>
+            </a:pPr>
             <a:r>
               <a:rPr lang="en-US" sz="2100" dirty="0">
                 <a:solidFill>
-                  <a:srgbClr val="17364A"/>
-                </a:solidFill>
-                <a:latin typeface="Aptos" pitchFamily="34" charset="0"/>
-                <a:ea typeface="Aptos" pitchFamily="34" charset="-122"/>
-                <a:cs typeface="Aptos" pitchFamily="34" charset="-120"/>
-              </a:rPr>
-              <a:t>AI use case intake is the structured process of receiving, describing, screening, and routing ideas for.</a:t>
+                  <a:srgbClr val="003A63"/>
+                </a:solidFill>
+                <a:latin typeface="Aptos" pitchFamily="34" charset="0"/>
+                <a:ea typeface="Aptos" pitchFamily="34" charset="-122"/>
+                <a:cs typeface="Aptos" pitchFamily="34" charset="-120"/>
+              </a:rPr>
+              <a:t>• AI use case intake is the structured process of receiving, describing, screening, and routing.</a:t>
             </a:r>
             <a:endParaRPr lang="en-US" sz="2100" dirty="0"/>
           </a:p>
           <a:p>
+            <a:pPr indent="0" marL="0">
+              <a:buNone/>
+            </a:pPr>
             <a:r>
               <a:rPr lang="en-US" sz="2100" dirty="0">
                 <a:solidFill>
-                  <a:srgbClr val="17364A"/>
-                </a:solidFill>
-                <a:latin typeface="Aptos" pitchFamily="34" charset="0"/>
-                <a:ea typeface="Aptos" pitchFamily="34" charset="-122"/>
-                <a:cs typeface="Aptos" pitchFamily="34" charset="-120"/>
-              </a:rPr>
-              <a:t>In public health, this step is essential because AI ideas often begin as informal suggestions to save.</a:t>
+                  <a:srgbClr val="003A63"/>
+                </a:solidFill>
+                <a:latin typeface="Aptos" pitchFamily="34" charset="0"/>
+                <a:ea typeface="Aptos" pitchFamily="34" charset="-122"/>
+                <a:cs typeface="Aptos" pitchFamily="34" charset="-120"/>
+              </a:rPr>
+              <a:t>• In public health, this step is essential because AI ideas often begin as informal suggestions.</a:t>
             </a:r>
             <a:endParaRPr lang="en-US" sz="2100" dirty="0"/>
           </a:p>
           <a:p>
+            <a:pPr indent="0" marL="0">
+              <a:buNone/>
+            </a:pPr>
             <a:r>
               <a:rPr lang="en-US" sz="2100" dirty="0">
                 <a:solidFill>
-                  <a:srgbClr val="17364A"/>
-                </a:solidFill>
-                <a:latin typeface="Aptos" pitchFamily="34" charset="0"/>
-                <a:ea typeface="Aptos" pitchFamily="34" charset="-122"/>
-                <a:cs typeface="Aptos" pitchFamily="34" charset="-120"/>
-              </a:rPr>
-              <a:t>Without a common intake process, agencies may approve low-value or high-risk ideas too quickly while.</a:t>
+                  <a:srgbClr val="003A63"/>
+                </a:solidFill>
+                <a:latin typeface="Aptos" pitchFamily="34" charset="0"/>
+                <a:ea typeface="Aptos" pitchFamily="34" charset="-122"/>
+                <a:cs typeface="Aptos" pitchFamily="34" charset="-120"/>
+              </a:rPr>
+              <a:t>• Without a common intake process, agencies may approve low-value or high-risk ideas too quickly.</a:t>
             </a:r>
             <a:endParaRPr lang="en-US" sz="2100" dirty="0"/>
           </a:p>
@@ -15578,17 +15847,17 @@
         </p:nvSpPr>
         <p:spPr>
           <a:xfrm>
-            <a:off x="7799832" y="1828800"/>
-            <a:ext cx="3145536" cy="685800"/>
-          </a:xfrm>
-          <a:prstGeom prst="rect">
-            <a:avLst/>
-          </a:prstGeom>
-          <a:noFill/>
-          <a:ln/>
-        </p:spPr>
-        <p:txBody>
-          <a:bodyPr wrap="square" lIns="0" tIns="0" rIns="0" bIns="0" rtlCol="0" anchor="t">
+            <a:off x="7799832" y="1801368"/>
+            <a:ext cx="3145536" cy="758952"/>
+          </a:xfrm>
+          <a:prstGeom prst="rect">
+            <a:avLst/>
+          </a:prstGeom>
+          <a:noFill/>
+          <a:ln/>
+        </p:spPr>
+        <p:txBody>
+          <a:bodyPr wrap="square" lIns="254" tIns="254" rIns="254" bIns="254" rtlCol="0" anchor="t">
             <a:normAutofit/>
           </a:bodyPr>
           <a:lstStyle/>
@@ -15597,7 +15866,7 @@
               <a:buNone/>
             </a:pPr>
             <a:r>
-              <a:rPr lang="en-US" sz="1550" dirty="0">
+              <a:rPr lang="en-US" sz="1320" dirty="0">
                 <a:solidFill>
                   <a:srgbClr val="17364A"/>
                 </a:solidFill>
@@ -15607,7 +15876,7 @@
               </a:rPr>
               <a:t>AI use case intake is the structured process of receiving, describing, screening, and routing ideas for.</a:t>
             </a:r>
-            <a:endParaRPr lang="en-US" sz="1550" dirty="0"/>
+            <a:endParaRPr lang="en-US" sz="1320" dirty="0"/>
           </a:p>
         </p:txBody>
       </p:sp>
@@ -15695,13 +15964,16 @@
           <a:ln/>
         </p:spPr>
         <p:txBody>
-          <a:bodyPr wrap="square" lIns="254" tIns="254" rIns="254" bIns="254" rtlCol="0" anchor="t">
+          <a:bodyPr wrap="square" lIns="508" tIns="508" rIns="508" bIns="508" rtlCol="0" anchor="t">
             <a:normAutofit/>
           </a:bodyPr>
           <a:lstStyle/>
           <a:p>
-            <a:r>
-              <a:rPr lang="en-US" sz="1380" dirty="0">
+            <a:pPr indent="0" marL="0">
+              <a:buNone/>
+            </a:pPr>
+            <a:r>
+              <a:rPr lang="en-US" sz="1220" dirty="0">
                 <a:solidFill>
                   <a:srgbClr val="17364A"/>
                 </a:solidFill>
@@ -15709,13 +15981,16 @@
                 <a:ea typeface="Aptos" pitchFamily="34" charset="-122"/>
                 <a:cs typeface="Aptos" pitchFamily="34" charset="-120"/>
               </a:rPr>
-              <a:t>AI use case intake is the structured process of receiving, describing, screening, and.</a:t>
-            </a:r>
-            <a:endParaRPr lang="en-US" sz="1380" dirty="0"/>
-          </a:p>
-          <a:p>
-            <a:r>
-              <a:rPr lang="en-US" sz="1380" dirty="0">
+              <a:t>AI use case intake is the structured process of receiving,.</a:t>
+            </a:r>
+            <a:endParaRPr lang="en-US" sz="1220" dirty="0"/>
+          </a:p>
+          <a:p>
+            <a:pPr indent="0" marL="0">
+              <a:buNone/>
+            </a:pPr>
+            <a:r>
+              <a:rPr lang="en-US" sz="1220" dirty="0">
                 <a:solidFill>
                   <a:srgbClr val="17364A"/>
                 </a:solidFill>
@@ -15723,13 +15998,16 @@
                 <a:ea typeface="Aptos" pitchFamily="34" charset="-122"/>
                 <a:cs typeface="Aptos" pitchFamily="34" charset="-120"/>
               </a:rPr>
-              <a:t>In public health, this step is essential because AI ideas often begin as informal.</a:t>
-            </a:r>
-            <a:endParaRPr lang="en-US" sz="1380" dirty="0"/>
-          </a:p>
-          <a:p>
-            <a:r>
-              <a:rPr lang="en-US" sz="1380" dirty="0">
+              <a:t>In public health, this step is essential because AI ideas often.</a:t>
+            </a:r>
+            <a:endParaRPr lang="en-US" sz="1220" dirty="0"/>
+          </a:p>
+          <a:p>
+            <a:pPr indent="0" marL="0">
+              <a:buNone/>
+            </a:pPr>
+            <a:r>
+              <a:rPr lang="en-US" sz="1220" dirty="0">
                 <a:solidFill>
                   <a:srgbClr val="17364A"/>
                 </a:solidFill>
@@ -15737,9 +16015,9 @@
                 <a:ea typeface="Aptos" pitchFamily="34" charset="-122"/>
                 <a:cs typeface="Aptos" pitchFamily="34" charset="-120"/>
               </a:rPr>
-              <a:t>Without a common intake process, agencies may approve low-value or high-risk ideas too.</a:t>
-            </a:r>
-            <a:endParaRPr lang="en-US" sz="1380" dirty="0"/>
+              <a:t>Without a common intake process, agencies may approve low-value or.</a:t>
+            </a:r>
+            <a:endParaRPr lang="en-US" sz="1220" dirty="0"/>
           </a:p>
         </p:txBody>
       </p:sp>
@@ -15817,17 +16095,17 @@
         </p:nvSpPr>
         <p:spPr>
           <a:xfrm>
-            <a:off x="7799832" y="5001768"/>
-            <a:ext cx="3145536" cy="502920"/>
-          </a:xfrm>
-          <a:prstGeom prst="rect">
-            <a:avLst/>
-          </a:prstGeom>
-          <a:noFill/>
-          <a:ln/>
-        </p:spPr>
-        <p:txBody>
-          <a:bodyPr wrap="square" lIns="0" tIns="0" rIns="0" bIns="0" rtlCol="0" anchor="t">
+            <a:off x="7799832" y="4974336"/>
+            <a:ext cx="3145536" cy="576072"/>
+          </a:xfrm>
+          <a:prstGeom prst="rect">
+            <a:avLst/>
+          </a:prstGeom>
+          <a:noFill/>
+          <a:ln/>
+        </p:spPr>
+        <p:txBody>
+          <a:bodyPr wrap="square" lIns="254" tIns="254" rIns="254" bIns="254" rtlCol="0" anchor="t">
             <a:normAutofit/>
           </a:bodyPr>
           <a:lstStyle/>
@@ -15836,7 +16114,7 @@
               <a:buNone/>
             </a:pPr>
             <a:r>
-              <a:rPr lang="en-US" sz="1550" dirty="0">
+              <a:rPr lang="en-US" sz="1320" dirty="0">
                 <a:solidFill>
                   <a:srgbClr val="17364A"/>
                 </a:solidFill>
@@ -15844,9 +16122,9 @@
                 <a:ea typeface="Aptos" pitchFamily="34" charset="-122"/>
                 <a:cs typeface="Aptos" pitchFamily="34" charset="-120"/>
               </a:rPr>
-              <a:t>Connect the concept to public health purpose, responsible use, required safeguards, documentation, and the next action a department should take.</a:t>
-            </a:r>
-            <a:endParaRPr lang="en-US" sz="1550" dirty="0"/>
+              <a:t>Connect the concept to public health purpose, responsible use, required safeguards, documentation, and the next action a.</a:t>
+            </a:r>
+            <a:endParaRPr lang="en-US" sz="1320" dirty="0"/>
           </a:p>
         </p:txBody>
       </p:sp>
@@ -16147,49 +16425,58 @@
           <a:ln/>
         </p:spPr>
         <p:txBody>
-          <a:bodyPr wrap="square" lIns="635" tIns="635" rIns="635" bIns="635" rtlCol="0" anchor="t">
+          <a:bodyPr wrap="square" lIns="1016" tIns="1016" rIns="1016" bIns="1016" rtlCol="0" anchor="t">
             <a:normAutofit/>
           </a:bodyPr>
           <a:lstStyle/>
           <a:p>
+            <a:pPr indent="0" marL="0">
+              <a:buNone/>
+            </a:pPr>
             <a:r>
               <a:rPr lang="en-US" sz="2100" dirty="0">
                 <a:solidFill>
-                  <a:srgbClr val="17364A"/>
-                </a:solidFill>
-                <a:latin typeface="Aptos" pitchFamily="34" charset="0"/>
-                <a:ea typeface="Aptos" pitchFamily="34" charset="-122"/>
-                <a:cs typeface="Aptos" pitchFamily="34" charset="-120"/>
-              </a:rPr>
-              <a:t>This module provides national-level training guidance for public health agencies and partners.</a:t>
+                  <a:srgbClr val="003A63"/>
+                </a:solidFill>
+                <a:latin typeface="Aptos" pitchFamily="34" charset="0"/>
+                <a:ea typeface="Aptos" pitchFamily="34" charset="-122"/>
+                <a:cs typeface="Aptos" pitchFamily="34" charset="-120"/>
+              </a:rPr>
+              <a:t>• This module provides national-level training guidance for public health agencies and partners.</a:t>
             </a:r>
             <a:endParaRPr lang="en-US" sz="2100" dirty="0"/>
           </a:p>
           <a:p>
+            <a:pPr indent="0" marL="0">
+              <a:buNone/>
+            </a:pPr>
             <a:r>
               <a:rPr lang="en-US" sz="2100" dirty="0">
                 <a:solidFill>
-                  <a:srgbClr val="17364A"/>
-                </a:solidFill>
-                <a:latin typeface="Aptos" pitchFamily="34" charset="0"/>
-                <a:ea typeface="Aptos" pitchFamily="34" charset="-122"/>
-                <a:cs typeface="Aptos" pitchFamily="34" charset="-120"/>
-              </a:rPr>
-              <a:t>It is not legal advice and does not replace review by agency legal counsel, privacy officers,.</a:t>
+                  <a:srgbClr val="003A63"/>
+                </a:solidFill>
+                <a:latin typeface="Aptos" pitchFamily="34" charset="0"/>
+                <a:ea typeface="Aptos" pitchFamily="34" charset="-122"/>
+                <a:cs typeface="Aptos" pitchFamily="34" charset="-120"/>
+              </a:rPr>
+              <a:t>• It is not legal advice and does not replace review by agency legal counsel, privacy officers,.</a:t>
             </a:r>
             <a:endParaRPr lang="en-US" sz="2100" dirty="0"/>
           </a:p>
           <a:p>
+            <a:pPr indent="0" marL="0">
+              <a:buNone/>
+            </a:pPr>
             <a:r>
               <a:rPr lang="en-US" sz="2100" dirty="0">
                 <a:solidFill>
-                  <a:srgbClr val="17364A"/>
-                </a:solidFill>
-                <a:latin typeface="Aptos" pitchFamily="34" charset="0"/>
-                <a:ea typeface="Aptos" pitchFamily="34" charset="-122"/>
-                <a:cs typeface="Aptos" pitchFamily="34" charset="-120"/>
-              </a:rPr>
-              <a:t>Requirements may vary by state, locality, territory, Tribe, agency, funding source, data-sharing.</a:t>
+                  <a:srgbClr val="003A63"/>
+                </a:solidFill>
+                <a:latin typeface="Aptos" pitchFamily="34" charset="0"/>
+                <a:ea typeface="Aptos" pitchFamily="34" charset="-122"/>
+                <a:cs typeface="Aptos" pitchFamily="34" charset="-120"/>
+              </a:rPr>
+              <a:t>• Requirements may vary by state, locality, territory, Tribe, agency, funding source,.</a:t>
             </a:r>
             <a:endParaRPr lang="en-US" sz="2100" dirty="0"/>
           </a:p>
@@ -16269,17 +16556,17 @@
         </p:nvSpPr>
         <p:spPr>
           <a:xfrm>
-            <a:off x="7799832" y="1828800"/>
-            <a:ext cx="3145536" cy="685800"/>
-          </a:xfrm>
-          <a:prstGeom prst="rect">
-            <a:avLst/>
-          </a:prstGeom>
-          <a:noFill/>
-          <a:ln/>
-        </p:spPr>
-        <p:txBody>
-          <a:bodyPr wrap="square" lIns="0" tIns="0" rIns="0" bIns="0" rtlCol="0" anchor="t">
+            <a:off x="7799832" y="1801368"/>
+            <a:ext cx="3145536" cy="758952"/>
+          </a:xfrm>
+          <a:prstGeom prst="rect">
+            <a:avLst/>
+          </a:prstGeom>
+          <a:noFill/>
+          <a:ln/>
+        </p:spPr>
+        <p:txBody>
+          <a:bodyPr wrap="square" lIns="254" tIns="254" rIns="254" bIns="254" rtlCol="0" anchor="t">
             <a:normAutofit/>
           </a:bodyPr>
           <a:lstStyle/>
@@ -16288,7 +16575,7 @@
               <a:buNone/>
             </a:pPr>
             <a:r>
-              <a:rPr lang="en-US" sz="1550" dirty="0">
+              <a:rPr lang="en-US" sz="1320" dirty="0">
                 <a:solidFill>
                   <a:srgbClr val="17364A"/>
                 </a:solidFill>
@@ -16298,7 +16585,7 @@
               </a:rPr>
               <a:t>This module provides national-level training guidance for public health agencies and partners.</a:t>
             </a:r>
-            <a:endParaRPr lang="en-US" sz="1550" dirty="0"/>
+            <a:endParaRPr lang="en-US" sz="1320" dirty="0"/>
           </a:p>
         </p:txBody>
       </p:sp>
@@ -16386,13 +16673,16 @@
           <a:ln/>
         </p:spPr>
         <p:txBody>
-          <a:bodyPr wrap="square" lIns="254" tIns="254" rIns="254" bIns="254" rtlCol="0" anchor="t">
+          <a:bodyPr wrap="square" lIns="508" tIns="508" rIns="508" bIns="508" rtlCol="0" anchor="t">
             <a:normAutofit/>
           </a:bodyPr>
           <a:lstStyle/>
           <a:p>
-            <a:r>
-              <a:rPr lang="en-US" sz="1380" dirty="0">
+            <a:pPr indent="0" marL="0">
+              <a:buNone/>
+            </a:pPr>
+            <a:r>
+              <a:rPr lang="en-US" sz="1220" dirty="0">
                 <a:solidFill>
                   <a:srgbClr val="17364A"/>
                 </a:solidFill>
@@ -16400,13 +16690,16 @@
                 <a:ea typeface="Aptos" pitchFamily="34" charset="-122"/>
                 <a:cs typeface="Aptos" pitchFamily="34" charset="-120"/>
               </a:rPr>
-              <a:t>It is not legal advice and does not replace review by agency legal counsel, privacy.</a:t>
-            </a:r>
-            <a:endParaRPr lang="en-US" sz="1380" dirty="0"/>
-          </a:p>
-          <a:p>
-            <a:r>
-              <a:rPr lang="en-US" sz="1380" dirty="0">
+              <a:t>It is not legal advice and does not replace review by agency legal.</a:t>
+            </a:r>
+            <a:endParaRPr lang="en-US" sz="1220" dirty="0"/>
+          </a:p>
+          <a:p>
+            <a:pPr indent="0" marL="0">
+              <a:buNone/>
+            </a:pPr>
+            <a:r>
+              <a:rPr lang="en-US" sz="1220" dirty="0">
                 <a:solidFill>
                   <a:srgbClr val="17364A"/>
                 </a:solidFill>
@@ -16414,13 +16707,16 @@
                 <a:ea typeface="Aptos" pitchFamily="34" charset="-122"/>
                 <a:cs typeface="Aptos" pitchFamily="34" charset="-120"/>
               </a:rPr>
-              <a:t>Requirements may vary by state, locality, territory, Tribe, agency, funding source,.</a:t>
-            </a:r>
-            <a:endParaRPr lang="en-US" sz="1380" dirty="0"/>
-          </a:p>
-          <a:p>
-            <a:r>
-              <a:rPr lang="en-US" sz="1380" dirty="0">
+              <a:t>Requirements may vary by state, locality, territory, Tribe,.</a:t>
+            </a:r>
+            <a:endParaRPr lang="en-US" sz="1220" dirty="0"/>
+          </a:p>
+          <a:p>
+            <a:pPr indent="0" marL="0">
+              <a:buNone/>
+            </a:pPr>
+            <a:r>
+              <a:rPr lang="en-US" sz="1220" dirty="0">
                 <a:solidFill>
                   <a:srgbClr val="17364A"/>
                 </a:solidFill>
@@ -16428,9 +16724,9 @@
                 <a:ea typeface="Aptos" pitchFamily="34" charset="-122"/>
                 <a:cs typeface="Aptos" pitchFamily="34" charset="-120"/>
               </a:rPr>
-              <a:t>Learners should use this module to identify the issues that require review and should.</a:t>
-            </a:r>
-            <a:endParaRPr lang="en-US" sz="1380" dirty="0"/>
+              <a:t>Learners should use this module to identify the issues that.</a:t>
+            </a:r>
+            <a:endParaRPr lang="en-US" sz="1220" dirty="0"/>
           </a:p>
         </p:txBody>
       </p:sp>
@@ -16508,17 +16804,17 @@
         </p:nvSpPr>
         <p:spPr>
           <a:xfrm>
-            <a:off x="7799832" y="5001768"/>
-            <a:ext cx="3145536" cy="502920"/>
-          </a:xfrm>
-          <a:prstGeom prst="rect">
-            <a:avLst/>
-          </a:prstGeom>
-          <a:noFill/>
-          <a:ln/>
-        </p:spPr>
-        <p:txBody>
-          <a:bodyPr wrap="square" lIns="0" tIns="0" rIns="0" bIns="0" rtlCol="0" anchor="t">
+            <a:off x="7799832" y="4974336"/>
+            <a:ext cx="3145536" cy="576072"/>
+          </a:xfrm>
+          <a:prstGeom prst="rect">
+            <a:avLst/>
+          </a:prstGeom>
+          <a:noFill/>
+          <a:ln/>
+        </p:spPr>
+        <p:txBody>
+          <a:bodyPr wrap="square" lIns="254" tIns="254" rIns="254" bIns="254" rtlCol="0" anchor="t">
             <a:normAutofit/>
           </a:bodyPr>
           <a:lstStyle/>
@@ -16527,7 +16823,7 @@
               <a:buNone/>
             </a:pPr>
             <a:r>
-              <a:rPr lang="en-US" sz="1550" dirty="0">
+              <a:rPr lang="en-US" sz="1320" dirty="0">
                 <a:solidFill>
                   <a:srgbClr val="17364A"/>
                 </a:solidFill>
@@ -16535,9 +16831,9 @@
                 <a:ea typeface="Aptos" pitchFamily="34" charset="-122"/>
                 <a:cs typeface="Aptos" pitchFamily="34" charset="-120"/>
               </a:rPr>
-              <a:t>Translate this concept into clear decision rights, review steps, documentation expectations, and escalation paths before an AI-supported workflow is approved.</a:t>
-            </a:r>
-            <a:endParaRPr lang="en-US" sz="1550" dirty="0"/>
+              <a:t>Translate this concept into clear decision rights, review steps, documentation expectations, and escalation paths before.</a:t>
+            </a:r>
+            <a:endParaRPr lang="en-US" sz="1320" dirty="0"/>
           </a:p>
         </p:txBody>
       </p:sp>
@@ -16838,49 +17134,58 @@
           <a:ln/>
         </p:spPr>
         <p:txBody>
-          <a:bodyPr wrap="square" lIns="635" tIns="635" rIns="635" bIns="635" rtlCol="0" anchor="t">
+          <a:bodyPr wrap="square" lIns="1016" tIns="1016" rIns="1016" bIns="1016" rtlCol="0" anchor="t">
             <a:normAutofit/>
           </a:bodyPr>
           <a:lstStyle/>
           <a:p>
+            <a:pPr indent="0" marL="0">
+              <a:buNone/>
+            </a:pPr>
             <a:r>
               <a:rPr lang="en-US" sz="2100" dirty="0">
                 <a:solidFill>
-                  <a:srgbClr val="17364A"/>
-                </a:solidFill>
-                <a:latin typeface="Aptos" pitchFamily="34" charset="0"/>
-                <a:ea typeface="Aptos" pitchFamily="34" charset="-122"/>
-                <a:cs typeface="Aptos" pitchFamily="34" charset="-120"/>
-              </a:rPr>
-              <a:t>A communicable disease program wants to use generative AI to summarize case investigation notes and.</a:t>
+                  <a:srgbClr val="003A63"/>
+                </a:solidFill>
+                <a:latin typeface="Aptos" pitchFamily="34" charset="0"/>
+                <a:ea typeface="Aptos" pitchFamily="34" charset="-122"/>
+                <a:cs typeface="Aptos" pitchFamily="34" charset="-120"/>
+              </a:rPr>
+              <a:t>• A communicable disease program wants to use generative AI to summarize case investigation.</a:t>
             </a:r>
             <a:endParaRPr lang="en-US" sz="2100" dirty="0"/>
           </a:p>
           <a:p>
+            <a:pPr indent="0" marL="0">
+              <a:buNone/>
+            </a:pPr>
             <a:r>
               <a:rPr lang="en-US" sz="2100" dirty="0">
                 <a:solidFill>
-                  <a:srgbClr val="17364A"/>
-                </a:solidFill>
-                <a:latin typeface="Aptos" pitchFamily="34" charset="0"/>
-                <a:ea typeface="Aptos" pitchFamily="34" charset="-122"/>
-                <a:cs typeface="Aptos" pitchFamily="34" charset="-120"/>
-              </a:rPr>
-              <a:t>Intake would document the workflow, the staff who would use the output, the source data, whether.</a:t>
+                  <a:srgbClr val="003A63"/>
+                </a:solidFill>
+                <a:latin typeface="Aptos" pitchFamily="34" charset="0"/>
+                <a:ea typeface="Aptos" pitchFamily="34" charset="-122"/>
+                <a:cs typeface="Aptos" pitchFamily="34" charset="-120"/>
+              </a:rPr>
+              <a:t>• Intake would document the workflow, the staff who would use the output, the source data,.</a:t>
             </a:r>
             <a:endParaRPr lang="en-US" sz="2100" dirty="0"/>
           </a:p>
           <a:p>
+            <a:pPr indent="0" marL="0">
+              <a:buNone/>
+            </a:pPr>
             <a:r>
               <a:rPr lang="en-US" sz="2100" dirty="0">
                 <a:solidFill>
-                  <a:srgbClr val="17364A"/>
-                </a:solidFill>
-                <a:latin typeface="Aptos" pitchFamily="34" charset="0"/>
-                <a:ea typeface="Aptos" pitchFamily="34" charset="-122"/>
-                <a:cs typeface="Aptos" pitchFamily="34" charset="-120"/>
-              </a:rPr>
-              <a:t>Triage would likely route the use case to privacy, legal, IT, epidemiology, equity, and governance.</a:t>
+                  <a:srgbClr val="003A63"/>
+                </a:solidFill>
+                <a:latin typeface="Aptos" pitchFamily="34" charset="0"/>
+                <a:ea typeface="Aptos" pitchFamily="34" charset="-122"/>
+                <a:cs typeface="Aptos" pitchFamily="34" charset="-120"/>
+              </a:rPr>
+              <a:t>• Triage would likely route the use case to privacy, legal, IT, epidemiology, equity, and.</a:t>
             </a:r>
             <a:endParaRPr lang="en-US" sz="2100" dirty="0"/>
           </a:p>
@@ -16960,17 +17265,17 @@
         </p:nvSpPr>
         <p:spPr>
           <a:xfrm>
-            <a:off x="7799832" y="1828800"/>
-            <a:ext cx="3145536" cy="685800"/>
-          </a:xfrm>
-          <a:prstGeom prst="rect">
-            <a:avLst/>
-          </a:prstGeom>
-          <a:noFill/>
-          <a:ln/>
-        </p:spPr>
-        <p:txBody>
-          <a:bodyPr wrap="square" lIns="0" tIns="0" rIns="0" bIns="0" rtlCol="0" anchor="t">
+            <a:off x="7799832" y="1801368"/>
+            <a:ext cx="3145536" cy="758952"/>
+          </a:xfrm>
+          <a:prstGeom prst="rect">
+            <a:avLst/>
+          </a:prstGeom>
+          <a:noFill/>
+          <a:ln/>
+        </p:spPr>
+        <p:txBody>
+          <a:bodyPr wrap="square" lIns="254" tIns="254" rIns="254" bIns="254" rtlCol="0" anchor="t">
             <a:normAutofit/>
           </a:bodyPr>
           <a:lstStyle/>
@@ -16979,7 +17284,7 @@
               <a:buNone/>
             </a:pPr>
             <a:r>
-              <a:rPr lang="en-US" sz="1550" dirty="0">
+              <a:rPr lang="en-US" sz="1320" dirty="0">
                 <a:solidFill>
                   <a:srgbClr val="17364A"/>
                 </a:solidFill>
@@ -16989,7 +17294,7 @@
               </a:rPr>
               <a:t>A communicable disease program wants to use generative AI to summarize case investigation notes and.</a:t>
             </a:r>
-            <a:endParaRPr lang="en-US" sz="1550" dirty="0"/>
+            <a:endParaRPr lang="en-US" sz="1320" dirty="0"/>
           </a:p>
         </p:txBody>
       </p:sp>
@@ -17077,13 +17382,16 @@
           <a:ln/>
         </p:spPr>
         <p:txBody>
-          <a:bodyPr wrap="square" lIns="254" tIns="254" rIns="254" bIns="254" rtlCol="0" anchor="t">
+          <a:bodyPr wrap="square" lIns="508" tIns="508" rIns="508" bIns="508" rtlCol="0" anchor="t">
             <a:normAutofit/>
           </a:bodyPr>
           <a:lstStyle/>
           <a:p>
-            <a:r>
-              <a:rPr lang="en-US" sz="1380" dirty="0">
+            <a:pPr indent="0" marL="0">
+              <a:buNone/>
+            </a:pPr>
+            <a:r>
+              <a:rPr lang="en-US" sz="1220" dirty="0">
                 <a:solidFill>
                   <a:srgbClr val="17364A"/>
                 </a:solidFill>
@@ -17091,13 +17399,16 @@
                 <a:ea typeface="Aptos" pitchFamily="34" charset="-122"/>
                 <a:cs typeface="Aptos" pitchFamily="34" charset="-120"/>
               </a:rPr>
-              <a:t>A communicable disease program wants to use generative AI to summarize case investigation.</a:t>
-            </a:r>
-            <a:endParaRPr lang="en-US" sz="1380" dirty="0"/>
-          </a:p>
-          <a:p>
-            <a:r>
-              <a:rPr lang="en-US" sz="1380" dirty="0">
+              <a:t>A communicable disease program wants to use generative AI to.</a:t>
+            </a:r>
+            <a:endParaRPr lang="en-US" sz="1220" dirty="0"/>
+          </a:p>
+          <a:p>
+            <a:pPr indent="0" marL="0">
+              <a:buNone/>
+            </a:pPr>
+            <a:r>
+              <a:rPr lang="en-US" sz="1220" dirty="0">
                 <a:solidFill>
                   <a:srgbClr val="17364A"/>
                 </a:solidFill>
@@ -17105,13 +17416,16 @@
                 <a:ea typeface="Aptos" pitchFamily="34" charset="-122"/>
                 <a:cs typeface="Aptos" pitchFamily="34" charset="-120"/>
               </a:rPr>
-              <a:t>Intake would document the workflow, the staff who would use the output, the source data,.</a:t>
-            </a:r>
-            <a:endParaRPr lang="en-US" sz="1380" dirty="0"/>
-          </a:p>
-          <a:p>
-            <a:r>
-              <a:rPr lang="en-US" sz="1380" dirty="0">
+              <a:t>Intake would document the workflow, the staff who would use the.</a:t>
+            </a:r>
+            <a:endParaRPr lang="en-US" sz="1220" dirty="0"/>
+          </a:p>
+          <a:p>
+            <a:pPr indent="0" marL="0">
+              <a:buNone/>
+            </a:pPr>
+            <a:r>
+              <a:rPr lang="en-US" sz="1220" dirty="0">
                 <a:solidFill>
                   <a:srgbClr val="17364A"/>
                 </a:solidFill>
@@ -17119,9 +17433,9 @@
                 <a:ea typeface="Aptos" pitchFamily="34" charset="-122"/>
                 <a:cs typeface="Aptos" pitchFamily="34" charset="-120"/>
               </a:rPr>
-              <a:t>Triage would likely route the use case to privacy, legal, IT, epidemiology, equity, and.</a:t>
-            </a:r>
-            <a:endParaRPr lang="en-US" sz="1380" dirty="0"/>
+              <a:t>Triage would likely route the use case to privacy, legal, IT,.</a:t>
+            </a:r>
+            <a:endParaRPr lang="en-US" sz="1220" dirty="0"/>
           </a:p>
         </p:txBody>
       </p:sp>
@@ -17199,17 +17513,17 @@
         </p:nvSpPr>
         <p:spPr>
           <a:xfrm>
-            <a:off x="7799832" y="5001768"/>
-            <a:ext cx="3145536" cy="502920"/>
-          </a:xfrm>
-          <a:prstGeom prst="rect">
-            <a:avLst/>
-          </a:prstGeom>
-          <a:noFill/>
-          <a:ln/>
-        </p:spPr>
-        <p:txBody>
-          <a:bodyPr wrap="square" lIns="0" tIns="0" rIns="0" bIns="0" rtlCol="0" anchor="t">
+            <a:off x="7799832" y="4974336"/>
+            <a:ext cx="3145536" cy="576072"/>
+          </a:xfrm>
+          <a:prstGeom prst="rect">
+            <a:avLst/>
+          </a:prstGeom>
+          <a:noFill/>
+          <a:ln/>
+        </p:spPr>
+        <p:txBody>
+          <a:bodyPr wrap="square" lIns="254" tIns="254" rIns="254" bIns="254" rtlCol="0" anchor="t">
             <a:normAutofit/>
           </a:bodyPr>
           <a:lstStyle/>
@@ -17218,7 +17532,7 @@
               <a:buNone/>
             </a:pPr>
             <a:r>
-              <a:rPr lang="en-US" sz="1550" dirty="0">
+              <a:rPr lang="en-US" sz="1320" dirty="0">
                 <a:solidFill>
                   <a:srgbClr val="17364A"/>
                 </a:solidFill>
@@ -17226,9 +17540,9 @@
                 <a:ea typeface="Aptos" pitchFamily="34" charset="-122"/>
                 <a:cs typeface="Aptos" pitchFamily="34" charset="-120"/>
               </a:rPr>
-              <a:t>Connect the concept to public health purpose, responsible use, required safeguards, documentation, and the next action a department should take.</a:t>
-            </a:r>
-            <a:endParaRPr lang="en-US" sz="1550" dirty="0"/>
+              <a:t>Connect the concept to public health purpose, responsible use, required safeguards, documentation, and the next action a.</a:t>
+            </a:r>
+            <a:endParaRPr lang="en-US" sz="1320" dirty="0"/>
           </a:p>
         </p:txBody>
       </p:sp>
@@ -17529,49 +17843,58 @@
           <a:ln/>
         </p:spPr>
         <p:txBody>
-          <a:bodyPr wrap="square" lIns="635" tIns="635" rIns="635" bIns="635" rtlCol="0" anchor="t">
+          <a:bodyPr wrap="square" lIns="1016" tIns="1016" rIns="1016" bIns="1016" rtlCol="0" anchor="t">
             <a:normAutofit/>
           </a:bodyPr>
           <a:lstStyle/>
           <a:p>
+            <a:pPr indent="0" marL="0">
+              <a:buNone/>
+            </a:pPr>
             <a:r>
               <a:rPr lang="en-US" sz="2100" dirty="0">
                 <a:solidFill>
-                  <a:srgbClr val="17364A"/>
-                </a:solidFill>
-                <a:latin typeface="Aptos" pitchFamily="34" charset="0"/>
-                <a:ea typeface="Aptos" pitchFamily="34" charset="-122"/>
-                <a:cs typeface="Aptos" pitchFamily="34" charset="-120"/>
-              </a:rPr>
-              <a:t>An effective intake process begins by defining the problem before selecting the technology.</a:t>
+                  <a:srgbClr val="003A63"/>
+                </a:solidFill>
+                <a:latin typeface="Aptos" pitchFamily="34" charset="0"/>
+                <a:ea typeface="Aptos" pitchFamily="34" charset="-122"/>
+                <a:cs typeface="Aptos" pitchFamily="34" charset="-120"/>
+              </a:rPr>
+              <a:t>• An effective intake process begins by defining the problem before selecting the technology.</a:t>
             </a:r>
             <a:endParaRPr lang="en-US" sz="2100" dirty="0"/>
           </a:p>
           <a:p>
+            <a:pPr indent="0" marL="0">
+              <a:buNone/>
+            </a:pPr>
             <a:r>
               <a:rPr lang="en-US" sz="2100" dirty="0">
                 <a:solidFill>
-                  <a:srgbClr val="17364A"/>
-                </a:solidFill>
-                <a:latin typeface="Aptos" pitchFamily="34" charset="0"/>
-                <a:ea typeface="Aptos" pitchFamily="34" charset="-122"/>
-                <a:cs typeface="Aptos" pitchFamily="34" charset="-120"/>
-              </a:rPr>
-              <a:t>Staff should describe the current workflow, the pain point, the people affected, the desired.</a:t>
+                  <a:srgbClr val="003A63"/>
+                </a:solidFill>
+                <a:latin typeface="Aptos" pitchFamily="34" charset="0"/>
+                <a:ea typeface="Aptos" pitchFamily="34" charset="-122"/>
+                <a:cs typeface="Aptos" pitchFamily="34" charset="-120"/>
+              </a:rPr>
+              <a:t>• Staff should describe the current workflow, the pain point, the people affected, the desired.</a:t>
             </a:r>
             <a:endParaRPr lang="en-US" sz="2100" dirty="0"/>
           </a:p>
           <a:p>
+            <a:pPr indent="0" marL="0">
+              <a:buNone/>
+            </a:pPr>
             <a:r>
               <a:rPr lang="en-US" sz="2100" dirty="0">
                 <a:solidFill>
-                  <a:srgbClr val="17364A"/>
-                </a:solidFill>
-                <a:latin typeface="Aptos" pitchFamily="34" charset="0"/>
-                <a:ea typeface="Aptos" pitchFamily="34" charset="-122"/>
-                <a:cs typeface="Aptos" pitchFamily="34" charset="-120"/>
-              </a:rPr>
-              <a:t>This prevents technology-first proposals that begin with a tool and then search for a public health.</a:t>
+                  <a:srgbClr val="003A63"/>
+                </a:solidFill>
+                <a:latin typeface="Aptos" pitchFamily="34" charset="0"/>
+                <a:ea typeface="Aptos" pitchFamily="34" charset="-122"/>
+                <a:cs typeface="Aptos" pitchFamily="34" charset="-120"/>
+              </a:rPr>
+              <a:t>• This prevents technology-first proposals that begin with a tool and then search for a public.</a:t>
             </a:r>
             <a:endParaRPr lang="en-US" sz="2100" dirty="0"/>
           </a:p>
@@ -17651,17 +17974,17 @@
         </p:nvSpPr>
         <p:spPr>
           <a:xfrm>
-            <a:off x="7799832" y="1828800"/>
-            <a:ext cx="3145536" cy="685800"/>
-          </a:xfrm>
-          <a:prstGeom prst="rect">
-            <a:avLst/>
-          </a:prstGeom>
-          <a:noFill/>
-          <a:ln/>
-        </p:spPr>
-        <p:txBody>
-          <a:bodyPr wrap="square" lIns="0" tIns="0" rIns="0" bIns="0" rtlCol="0" anchor="t">
+            <a:off x="7799832" y="1801368"/>
+            <a:ext cx="3145536" cy="758952"/>
+          </a:xfrm>
+          <a:prstGeom prst="rect">
+            <a:avLst/>
+          </a:prstGeom>
+          <a:noFill/>
+          <a:ln/>
+        </p:spPr>
+        <p:txBody>
+          <a:bodyPr wrap="square" lIns="254" tIns="254" rIns="254" bIns="254" rtlCol="0" anchor="t">
             <a:normAutofit/>
           </a:bodyPr>
           <a:lstStyle/>
@@ -17670,7 +17993,7 @@
               <a:buNone/>
             </a:pPr>
             <a:r>
-              <a:rPr lang="en-US" sz="1550" dirty="0">
+              <a:rPr lang="en-US" sz="1320" dirty="0">
                 <a:solidFill>
                   <a:srgbClr val="17364A"/>
                 </a:solidFill>
@@ -17680,7 +18003,7 @@
               </a:rPr>
               <a:t>An effective intake process begins by defining the problem before selecting the technology.</a:t>
             </a:r>
-            <a:endParaRPr lang="en-US" sz="1550" dirty="0"/>
+            <a:endParaRPr lang="en-US" sz="1320" dirty="0"/>
           </a:p>
         </p:txBody>
       </p:sp>
@@ -17768,13 +18091,16 @@
           <a:ln/>
         </p:spPr>
         <p:txBody>
-          <a:bodyPr wrap="square" lIns="254" tIns="254" rIns="254" bIns="254" rtlCol="0" anchor="t">
+          <a:bodyPr wrap="square" lIns="508" tIns="508" rIns="508" bIns="508" rtlCol="0" anchor="t">
             <a:normAutofit/>
           </a:bodyPr>
           <a:lstStyle/>
           <a:p>
-            <a:r>
-              <a:rPr lang="en-US" sz="1380" dirty="0">
+            <a:pPr indent="0" marL="0">
+              <a:buNone/>
+            </a:pPr>
+            <a:r>
+              <a:rPr lang="en-US" sz="1220" dirty="0">
                 <a:solidFill>
                   <a:srgbClr val="17364A"/>
                 </a:solidFill>
@@ -17782,13 +18108,16 @@
                 <a:ea typeface="Aptos" pitchFamily="34" charset="-122"/>
                 <a:cs typeface="Aptos" pitchFamily="34" charset="-120"/>
               </a:rPr>
-              <a:t>Staff should describe the current workflow, the pain point, the people affected, the.</a:t>
-            </a:r>
-            <a:endParaRPr lang="en-US" sz="1380" dirty="0"/>
-          </a:p>
-          <a:p>
-            <a:r>
-              <a:rPr lang="en-US" sz="1380" dirty="0">
+              <a:t>Staff should describe the current workflow, the pain point, the.</a:t>
+            </a:r>
+            <a:endParaRPr lang="en-US" sz="1220" dirty="0"/>
+          </a:p>
+          <a:p>
+            <a:pPr indent="0" marL="0">
+              <a:buNone/>
+            </a:pPr>
+            <a:r>
+              <a:rPr lang="en-US" sz="1220" dirty="0">
                 <a:solidFill>
                   <a:srgbClr val="17364A"/>
                 </a:solidFill>
@@ -17796,13 +18125,16 @@
                 <a:ea typeface="Aptos" pitchFamily="34" charset="-122"/>
                 <a:cs typeface="Aptos" pitchFamily="34" charset="-120"/>
               </a:rPr>
-              <a:t>This prevents technology-first proposals that begin with a tool and then search for a.</a:t>
-            </a:r>
-            <a:endParaRPr lang="en-US" sz="1380" dirty="0"/>
-          </a:p>
-          <a:p>
-            <a:r>
-              <a:rPr lang="en-US" sz="1380" dirty="0">
+              <a:t>This prevents technology-first proposals that begin with a tool.</a:t>
+            </a:r>
+            <a:endParaRPr lang="en-US" sz="1220" dirty="0"/>
+          </a:p>
+          <a:p>
+            <a:pPr indent="0" marL="0">
+              <a:buNone/>
+            </a:pPr>
+            <a:r>
+              <a:rPr lang="en-US" sz="1220" dirty="0">
                 <a:solidFill>
                   <a:srgbClr val="17364A"/>
                 </a:solidFill>
@@ -17810,9 +18142,9 @@
                 <a:ea typeface="Aptos" pitchFamily="34" charset="-122"/>
                 <a:cs typeface="Aptos" pitchFamily="34" charset="-120"/>
               </a:rPr>
-              <a:t>A clear problem statement also helps reviewers decide whether AI is needed or whether a.</a:t>
-            </a:r>
-            <a:endParaRPr lang="en-US" sz="1380" dirty="0"/>
+              <a:t>A clear problem statement also helps reviewers decide whether AI.</a:t>
+            </a:r>
+            <a:endParaRPr lang="en-US" sz="1220" dirty="0"/>
           </a:p>
         </p:txBody>
       </p:sp>
@@ -17890,17 +18222,17 @@
         </p:nvSpPr>
         <p:spPr>
           <a:xfrm>
-            <a:off x="7799832" y="5001768"/>
-            <a:ext cx="3145536" cy="502920"/>
-          </a:xfrm>
-          <a:prstGeom prst="rect">
-            <a:avLst/>
-          </a:prstGeom>
-          <a:noFill/>
-          <a:ln/>
-        </p:spPr>
-        <p:txBody>
-          <a:bodyPr wrap="square" lIns="0" tIns="0" rIns="0" bIns="0" rtlCol="0" anchor="t">
+            <a:off x="7799832" y="4974336"/>
+            <a:ext cx="3145536" cy="576072"/>
+          </a:xfrm>
+          <a:prstGeom prst="rect">
+            <a:avLst/>
+          </a:prstGeom>
+          <a:noFill/>
+          <a:ln/>
+        </p:spPr>
+        <p:txBody>
+          <a:bodyPr wrap="square" lIns="254" tIns="254" rIns="254" bIns="254" rtlCol="0" anchor="t">
             <a:normAutofit/>
           </a:bodyPr>
           <a:lstStyle/>
@@ -17909,7 +18241,7 @@
               <a:buNone/>
             </a:pPr>
             <a:r>
-              <a:rPr lang="en-US" sz="1550" dirty="0">
+              <a:rPr lang="en-US" sz="1320" dirty="0">
                 <a:solidFill>
                   <a:srgbClr val="17364A"/>
                 </a:solidFill>
@@ -17917,9 +18249,9 @@
                 <a:ea typeface="Aptos" pitchFamily="34" charset="-122"/>
                 <a:cs typeface="Aptos" pitchFamily="34" charset="-120"/>
               </a:rPr>
-              <a:t>Connect the concept to public health purpose, responsible use, required safeguards, documentation, and the next action a department should take.</a:t>
-            </a:r>
-            <a:endParaRPr lang="en-US" sz="1550" dirty="0"/>
+              <a:t>Connect the concept to public health purpose, responsible use, required safeguards, documentation, and the next action a.</a:t>
+            </a:r>
+            <a:endParaRPr lang="en-US" sz="1320" dirty="0"/>
           </a:p>
         </p:txBody>
       </p:sp>

--- a/downloads/presentations/modules/int-200.pptx
+++ b/downloads/presentations/modules/int-200.pptx
@@ -3511,11 +3511,11 @@
         <p:spPr>
           <a:xfrm>
             <a:off x="7635240" y="1325880"/>
-            <a:ext cx="3474720" cy="1325880"/>
+            <a:ext cx="3474720" cy="1207008"/>
           </a:xfrm>
           <a:prstGeom prst="roundRect">
             <a:avLst>
-              <a:gd name="adj" fmla="val 8276"/>
+              <a:gd name="adj" fmla="val 9091"/>
             </a:avLst>
           </a:prstGeom>
           <a:solidFill>
@@ -3577,7 +3577,7 @@
         <p:spPr>
           <a:xfrm>
             <a:off x="7799832" y="1801368"/>
-            <a:ext cx="3145536" cy="758952"/>
+            <a:ext cx="3145536" cy="640080"/>
           </a:xfrm>
           <a:prstGeom prst="rect">
             <a:avLst/>
@@ -3617,12 +3617,12 @@
         </p:nvSpPr>
         <p:spPr>
           <a:xfrm>
-            <a:off x="7635240" y="2788920"/>
-            <a:ext cx="3474720" cy="1536192"/>
+            <a:off x="7635240" y="2670048"/>
+            <a:ext cx="3474720" cy="1377086"/>
           </a:xfrm>
           <a:prstGeom prst="roundRect">
             <a:avLst>
-              <a:gd name="adj" fmla="val 7143"/>
+              <a:gd name="adj" fmla="val 7968"/>
             </a:avLst>
           </a:prstGeom>
           <a:solidFill>
@@ -3644,7 +3644,7 @@
         </p:nvSpPr>
         <p:spPr>
           <a:xfrm>
-            <a:off x="7799832" y="2935224"/>
+            <a:off x="7799832" y="2816352"/>
             <a:ext cx="3145536" cy="256032"/>
           </a:xfrm>
           <a:prstGeom prst="rect">
@@ -3683,8 +3683,8 @@
         </p:nvSpPr>
         <p:spPr>
           <a:xfrm>
-            <a:off x="7818120" y="3300984"/>
-            <a:ext cx="3090672" cy="877824"/>
+            <a:off x="7818120" y="3182112"/>
+            <a:ext cx="3090672" cy="718718"/>
           </a:xfrm>
           <a:prstGeom prst="rect">
             <a:avLst/>
@@ -3758,12 +3758,12 @@
         </p:nvSpPr>
         <p:spPr>
           <a:xfrm>
-            <a:off x="7635240" y="4498848"/>
-            <a:ext cx="3474720" cy="1143000"/>
+            <a:off x="7635240" y="4184294"/>
+            <a:ext cx="3474720" cy="1466698"/>
           </a:xfrm>
           <a:prstGeom prst="roundRect">
             <a:avLst>
-              <a:gd name="adj" fmla="val 9600"/>
+              <a:gd name="adj" fmla="val 7481"/>
             </a:avLst>
           </a:prstGeom>
           <a:solidFill>
@@ -3785,7 +3785,7 @@
         </p:nvSpPr>
         <p:spPr>
           <a:xfrm>
-            <a:off x="7799832" y="4645152"/>
+            <a:off x="7799832" y="4330598"/>
             <a:ext cx="3145536" cy="256032"/>
           </a:xfrm>
           <a:prstGeom prst="rect">
@@ -3824,8 +3824,8 @@
         </p:nvSpPr>
         <p:spPr>
           <a:xfrm>
-            <a:off x="7799832" y="4974336"/>
-            <a:ext cx="3145536" cy="576072"/>
+            <a:off x="7799832" y="4659782"/>
+            <a:ext cx="3145536" cy="899770"/>
           </a:xfrm>
           <a:prstGeom prst="rect">
             <a:avLst/>
@@ -3851,7 +3851,7 @@
                 <a:ea typeface="Aptos" pitchFamily="34" charset="-122"/>
                 <a:cs typeface="Aptos" pitchFamily="34" charset="-120"/>
               </a:rPr>
-              <a:t>Connect the concept to public health purpose, responsible use, required safeguards, documentation, and the next action a.</a:t>
+              <a:t>Connect the concept to public health purpose, responsible use, required safeguards, documentation, and the next action a department should take.</a:t>
             </a:r>
             <a:endParaRPr lang="en-US" sz="1320" dirty="0"/>
           </a:p>
@@ -4220,11 +4220,11 @@
         <p:spPr>
           <a:xfrm>
             <a:off x="7635240" y="1325880"/>
-            <a:ext cx="3474720" cy="1325880"/>
+            <a:ext cx="3474720" cy="1207008"/>
           </a:xfrm>
           <a:prstGeom prst="roundRect">
             <a:avLst>
-              <a:gd name="adj" fmla="val 8276"/>
+              <a:gd name="adj" fmla="val 9091"/>
             </a:avLst>
           </a:prstGeom>
           <a:solidFill>
@@ -4286,7 +4286,7 @@
         <p:spPr>
           <a:xfrm>
             <a:off x="7799832" y="1801368"/>
-            <a:ext cx="3145536" cy="758952"/>
+            <a:ext cx="3145536" cy="640080"/>
           </a:xfrm>
           <a:prstGeom prst="rect">
             <a:avLst/>
@@ -4326,7 +4326,7 @@
         </p:nvSpPr>
         <p:spPr>
           <a:xfrm>
-            <a:off x="7635240" y="2788920"/>
+            <a:off x="7635240" y="2670048"/>
             <a:ext cx="3474720" cy="1536192"/>
           </a:xfrm>
           <a:prstGeom prst="roundRect">
@@ -4353,8 +4353,8 @@
         </p:nvSpPr>
         <p:spPr>
           <a:xfrm>
-            <a:off x="7799832" y="2935224"/>
-            <a:ext cx="3145536" cy="256032"/>
+            <a:off x="7799832" y="2798064"/>
+            <a:ext cx="3145536" cy="237744"/>
           </a:xfrm>
           <a:prstGeom prst="rect">
             <a:avLst/>
@@ -4370,7 +4370,7 @@
               <a:buNone/>
             </a:pPr>
             <a:r>
-              <a:rPr lang="en-US" sz="1300" b="1" dirty="0">
+              <a:rPr lang="en-US" sz="1250" b="1" dirty="0">
                 <a:solidFill>
                   <a:srgbClr val="0068B7"/>
                 </a:solidFill>
@@ -4378,101 +4378,317 @@
                 <a:ea typeface="Aptos" pitchFamily="34" charset="-122"/>
                 <a:cs typeface="Aptos" pitchFamily="34" charset="-120"/>
               </a:rPr>
-              <a:t>Concept checkpoints</a:t>
-            </a:r>
-            <a:endParaRPr lang="en-US" sz="1300" dirty="0"/>
-          </a:p>
-        </p:txBody>
-      </p:sp>
-      <p:sp>
-        <p:nvSpPr>
-          <p:cNvPr id="15" name="Text 13"/>
-          <p:cNvSpPr/>
-          <p:nvPr/>
-        </p:nvSpPr>
-        <p:spPr>
-          <a:xfrm>
-            <a:off x="7818120" y="3300984"/>
-            <a:ext cx="3090672" cy="877824"/>
-          </a:xfrm>
-          <a:prstGeom prst="rect">
-            <a:avLst/>
-          </a:prstGeom>
-          <a:noFill/>
-          <a:ln/>
-        </p:spPr>
-        <p:txBody>
-          <a:bodyPr wrap="square" lIns="508" tIns="508" rIns="508" bIns="508" rtlCol="0" anchor="t">
+              <a:t>Risk control loop</a:t>
+            </a:r>
+            <a:endParaRPr lang="en-US" sz="1250" dirty="0"/>
+          </a:p>
+        </p:txBody>
+      </p:sp>
+      <p:sp>
+        <p:nvSpPr>
+          <p:cNvPr id="15" name="Shape 13"/>
+          <p:cNvSpPr/>
+          <p:nvPr/>
+        </p:nvSpPr>
+        <p:spPr>
+          <a:xfrm>
+            <a:off x="8763000" y="3351276"/>
+            <a:ext cx="164592" cy="0"/>
+          </a:xfrm>
+          <a:prstGeom prst="line">
+            <a:avLst/>
+          </a:prstGeom>
+          <a:noFill/>
+          <a:ln w="15240">
+            <a:solidFill>
+              <a:srgbClr val="8ABBD8"/>
+            </a:solidFill>
+            <a:prstDash val="solid"/>
+          </a:ln>
+        </p:spPr>
+      </p:sp>
+      <p:sp>
+        <p:nvSpPr>
+          <p:cNvPr id="16" name="Shape 14"/>
+          <p:cNvSpPr/>
+          <p:nvPr/>
+        </p:nvSpPr>
+        <p:spPr>
+          <a:xfrm>
+            <a:off x="7872984" y="3200400"/>
+            <a:ext cx="890016" cy="301752"/>
+          </a:xfrm>
+          <a:prstGeom prst="roundRect">
+            <a:avLst>
+              <a:gd name="adj" fmla="val 24242"/>
+            </a:avLst>
+          </a:prstGeom>
+          <a:solidFill>
+            <a:srgbClr val="0068B7"/>
+          </a:solidFill>
+          <a:ln w="12700">
+            <a:solidFill>
+              <a:srgbClr val="0068B7"/>
+            </a:solidFill>
+            <a:prstDash val="solid"/>
+          </a:ln>
+        </p:spPr>
+      </p:sp>
+      <p:sp>
+        <p:nvSpPr>
+          <p:cNvPr id="17" name="Text 15"/>
+          <p:cNvSpPr/>
+          <p:nvPr/>
+        </p:nvSpPr>
+        <p:spPr>
+          <a:xfrm>
+            <a:off x="7909560" y="3273552"/>
+            <a:ext cx="816864" cy="146304"/>
+          </a:xfrm>
+          <a:prstGeom prst="rect">
+            <a:avLst/>
+          </a:prstGeom>
+          <a:noFill/>
+          <a:ln/>
+        </p:spPr>
+        <p:txBody>
+          <a:bodyPr wrap="square" lIns="0" tIns="0" rIns="0" bIns="0" rtlCol="0" anchor="ctr">
             <a:normAutofit/>
           </a:bodyPr>
           <a:lstStyle/>
           <a:p>
-            <a:pPr indent="0" marL="0">
-              <a:buNone/>
-            </a:pPr>
-            <a:r>
-              <a:rPr lang="en-US" sz="1220" dirty="0">
-                <a:solidFill>
-                  <a:srgbClr val="17364A"/>
-                </a:solidFill>
-                <a:latin typeface="Aptos" pitchFamily="34" charset="0"/>
-                <a:ea typeface="Aptos" pitchFamily="34" charset="-122"/>
-                <a:cs typeface="Aptos" pitchFamily="34" charset="-120"/>
-              </a:rPr>
-              <a:t>Risks and failure modes include the following:</a:t>
-            </a:r>
-            <a:endParaRPr lang="en-US" sz="1220" dirty="0"/>
-          </a:p>
-          <a:p>
-            <a:pPr indent="0" marL="0">
-              <a:buNone/>
-            </a:pPr>
-            <a:r>
-              <a:rPr lang="en-US" sz="1220" dirty="0">
-                <a:solidFill>
-                  <a:srgbClr val="17364A"/>
-                </a:solidFill>
-                <a:latin typeface="Aptos" pitchFamily="34" charset="0"/>
-                <a:ea typeface="Aptos" pitchFamily="34" charset="-122"/>
-                <a:cs typeface="Aptos" pitchFamily="34" charset="-120"/>
-              </a:rPr>
-              <a:t>Informal AI experimentation with sensitive or confidential data.</a:t>
-            </a:r>
-            <a:endParaRPr lang="en-US" sz="1220" dirty="0"/>
-          </a:p>
-          <a:p>
-            <a:pPr indent="0" marL="0">
-              <a:buNone/>
-            </a:pPr>
-            <a:r>
-              <a:rPr lang="en-US" sz="1220" dirty="0">
-                <a:solidFill>
-                  <a:srgbClr val="17364A"/>
-                </a:solidFill>
-                <a:latin typeface="Aptos" pitchFamily="34" charset="0"/>
-                <a:ea typeface="Aptos" pitchFamily="34" charset="-122"/>
-                <a:cs typeface="Aptos" pitchFamily="34" charset="-120"/>
-              </a:rPr>
-              <a:t>Tool-first proposals that do not solve a real workflow problem.</a:t>
-            </a:r>
-            <a:endParaRPr lang="en-US" sz="1220" dirty="0"/>
-          </a:p>
-        </p:txBody>
-      </p:sp>
-      <p:sp>
-        <p:nvSpPr>
-          <p:cNvPr id="16" name="Shape 14"/>
-          <p:cNvSpPr/>
-          <p:nvPr/>
-        </p:nvSpPr>
-        <p:spPr>
-          <a:xfrm>
-            <a:off x="7635240" y="4498848"/>
-            <a:ext cx="3474720" cy="1143000"/>
+            <a:pPr algn="ctr" indent="0" marL="0">
+              <a:buNone/>
+            </a:pPr>
+            <a:r>
+              <a:rPr lang="en-US" sz="880" b="1" dirty="0">
+                <a:solidFill>
+                  <a:srgbClr val="FFFFFF"/>
+                </a:solidFill>
+                <a:latin typeface="Aptos" pitchFamily="34" charset="0"/>
+                <a:ea typeface="Aptos" pitchFamily="34" charset="-122"/>
+                <a:cs typeface="Aptos" pitchFamily="34" charset="-120"/>
+              </a:rPr>
+              <a:t>Identify</a:t>
+            </a:r>
+            <a:endParaRPr lang="en-US" sz="880" dirty="0"/>
+          </a:p>
+        </p:txBody>
+      </p:sp>
+      <p:sp>
+        <p:nvSpPr>
+          <p:cNvPr id="18" name="Shape 16"/>
+          <p:cNvSpPr/>
+          <p:nvPr/>
+        </p:nvSpPr>
+        <p:spPr>
+          <a:xfrm>
+            <a:off x="9817608" y="3351276"/>
+            <a:ext cx="164592" cy="0"/>
+          </a:xfrm>
+          <a:prstGeom prst="line">
+            <a:avLst/>
+          </a:prstGeom>
+          <a:noFill/>
+          <a:ln w="15240">
+            <a:solidFill>
+              <a:srgbClr val="8ABBD8"/>
+            </a:solidFill>
+            <a:prstDash val="solid"/>
+          </a:ln>
+        </p:spPr>
+      </p:sp>
+      <p:sp>
+        <p:nvSpPr>
+          <p:cNvPr id="19" name="Shape 17"/>
+          <p:cNvSpPr/>
+          <p:nvPr/>
+        </p:nvSpPr>
+        <p:spPr>
+          <a:xfrm>
+            <a:off x="8927592" y="3200400"/>
+            <a:ext cx="890016" cy="301752"/>
           </a:xfrm>
           <a:prstGeom prst="roundRect">
             <a:avLst>
-              <a:gd name="adj" fmla="val 9600"/>
+              <a:gd name="adj" fmla="val 24242"/>
+            </a:avLst>
+          </a:prstGeom>
+          <a:solidFill>
+            <a:srgbClr val="2F8A28"/>
+          </a:solidFill>
+          <a:ln w="12700">
+            <a:solidFill>
+              <a:srgbClr val="2F8A28"/>
+            </a:solidFill>
+            <a:prstDash val="solid"/>
+          </a:ln>
+        </p:spPr>
+      </p:sp>
+      <p:sp>
+        <p:nvSpPr>
+          <p:cNvPr id="20" name="Text 18"/>
+          <p:cNvSpPr/>
+          <p:nvPr/>
+        </p:nvSpPr>
+        <p:spPr>
+          <a:xfrm>
+            <a:off x="8964168" y="3273552"/>
+            <a:ext cx="816864" cy="146304"/>
+          </a:xfrm>
+          <a:prstGeom prst="rect">
+            <a:avLst/>
+          </a:prstGeom>
+          <a:noFill/>
+          <a:ln/>
+        </p:spPr>
+        <p:txBody>
+          <a:bodyPr wrap="square" lIns="0" tIns="0" rIns="0" bIns="0" rtlCol="0" anchor="ctr">
+            <a:normAutofit/>
+          </a:bodyPr>
+          <a:lstStyle/>
+          <a:p>
+            <a:pPr algn="ctr" indent="0" marL="0">
+              <a:buNone/>
+            </a:pPr>
+            <a:r>
+              <a:rPr lang="en-US" sz="880" b="1" dirty="0">
+                <a:solidFill>
+                  <a:srgbClr val="FFFFFF"/>
+                </a:solidFill>
+                <a:latin typeface="Aptos" pitchFamily="34" charset="0"/>
+                <a:ea typeface="Aptos" pitchFamily="34" charset="-122"/>
+                <a:cs typeface="Aptos" pitchFamily="34" charset="-120"/>
+              </a:rPr>
+              <a:t>Control</a:t>
+            </a:r>
+            <a:endParaRPr lang="en-US" sz="880" dirty="0"/>
+          </a:p>
+        </p:txBody>
+      </p:sp>
+      <p:sp>
+        <p:nvSpPr>
+          <p:cNvPr id="21" name="Shape 19"/>
+          <p:cNvSpPr/>
+          <p:nvPr/>
+        </p:nvSpPr>
+        <p:spPr>
+          <a:xfrm>
+            <a:off x="9982200" y="3200400"/>
+            <a:ext cx="890016" cy="301752"/>
+          </a:xfrm>
+          <a:prstGeom prst="roundRect">
+            <a:avLst>
+              <a:gd name="adj" fmla="val 24242"/>
+            </a:avLst>
+          </a:prstGeom>
+          <a:solidFill>
+            <a:srgbClr val="6A4CA3"/>
+          </a:solidFill>
+          <a:ln w="12700">
+            <a:solidFill>
+              <a:srgbClr val="6A4CA3"/>
+            </a:solidFill>
+            <a:prstDash val="solid"/>
+          </a:ln>
+        </p:spPr>
+      </p:sp>
+      <p:sp>
+        <p:nvSpPr>
+          <p:cNvPr id="22" name="Text 20"/>
+          <p:cNvSpPr/>
+          <p:nvPr/>
+        </p:nvSpPr>
+        <p:spPr>
+          <a:xfrm>
+            <a:off x="10018776" y="3273552"/>
+            <a:ext cx="816864" cy="146304"/>
+          </a:xfrm>
+          <a:prstGeom prst="rect">
+            <a:avLst/>
+          </a:prstGeom>
+          <a:noFill/>
+          <a:ln/>
+        </p:spPr>
+        <p:txBody>
+          <a:bodyPr wrap="square" lIns="0" tIns="0" rIns="0" bIns="0" rtlCol="0" anchor="ctr">
+            <a:normAutofit/>
+          </a:bodyPr>
+          <a:lstStyle/>
+          <a:p>
+            <a:pPr algn="ctr" indent="0" marL="0">
+              <a:buNone/>
+            </a:pPr>
+            <a:r>
+              <a:rPr lang="en-US" sz="880" b="1" dirty="0">
+                <a:solidFill>
+                  <a:srgbClr val="FFFFFF"/>
+                </a:solidFill>
+                <a:latin typeface="Aptos" pitchFamily="34" charset="0"/>
+                <a:ea typeface="Aptos" pitchFamily="34" charset="-122"/>
+                <a:cs typeface="Aptos" pitchFamily="34" charset="-120"/>
+              </a:rPr>
+              <a:t>Monitor</a:t>
+            </a:r>
+            <a:endParaRPr lang="en-US" sz="880" dirty="0"/>
+          </a:p>
+        </p:txBody>
+      </p:sp>
+      <p:sp>
+        <p:nvSpPr>
+          <p:cNvPr id="23" name="Text 21"/>
+          <p:cNvSpPr/>
+          <p:nvPr/>
+        </p:nvSpPr>
+        <p:spPr>
+          <a:xfrm>
+            <a:off x="7854696" y="3694176"/>
+            <a:ext cx="3035808" cy="365760"/>
+          </a:xfrm>
+          <a:prstGeom prst="rect">
+            <a:avLst/>
+          </a:prstGeom>
+          <a:noFill/>
+          <a:ln/>
+        </p:spPr>
+        <p:txBody>
+          <a:bodyPr wrap="square" lIns="254" tIns="254" rIns="254" bIns="254" rtlCol="0" anchor="t">
+            <a:normAutofit/>
+          </a:bodyPr>
+          <a:lstStyle/>
+          <a:p>
+            <a:pPr indent="0" marL="0">
+              <a:buNone/>
+            </a:pPr>
+            <a:r>
+              <a:rPr lang="en-US" sz="1120" dirty="0">
+                <a:solidFill>
+                  <a:srgbClr val="17364A"/>
+                </a:solidFill>
+                <a:latin typeface="Aptos" pitchFamily="34" charset="0"/>
+                <a:ea typeface="Aptos" pitchFamily="34" charset="-122"/>
+                <a:cs typeface="Aptos" pitchFamily="34" charset="-120"/>
+              </a:rPr>
+              <a:t>Responsible use depends on finding risks early, applying safeguards, and watching for drift or harm over time.</a:t>
+            </a:r>
+            <a:endParaRPr lang="en-US" sz="1120" dirty="0"/>
+          </a:p>
+        </p:txBody>
+      </p:sp>
+      <p:sp>
+        <p:nvSpPr>
+          <p:cNvPr id="24" name="Shape 22"/>
+          <p:cNvSpPr/>
+          <p:nvPr/>
+        </p:nvSpPr>
+        <p:spPr>
+          <a:xfrm>
+            <a:off x="7635240" y="4343400"/>
+            <a:ext cx="3474720" cy="1255471"/>
+          </a:xfrm>
+          <a:prstGeom prst="roundRect">
+            <a:avLst>
+              <a:gd name="adj" fmla="val 8740"/>
             </a:avLst>
           </a:prstGeom>
           <a:solidFill>
@@ -4488,13 +4704,13 @@
       </p:sp>
       <p:sp>
         <p:nvSpPr>
-          <p:cNvPr id="17" name="Text 15"/>
-          <p:cNvSpPr/>
-          <p:nvPr/>
-        </p:nvSpPr>
-        <p:spPr>
-          <a:xfrm>
-            <a:off x="7799832" y="4645152"/>
+          <p:cNvPr id="25" name="Text 23"/>
+          <p:cNvSpPr/>
+          <p:nvPr/>
+        </p:nvSpPr>
+        <p:spPr>
+          <a:xfrm>
+            <a:off x="7799832" y="4489704"/>
             <a:ext cx="3145536" cy="256032"/>
           </a:xfrm>
           <a:prstGeom prst="rect">
@@ -4527,14 +4743,14 @@
       </p:sp>
       <p:sp>
         <p:nvSpPr>
-          <p:cNvPr id="18" name="Text 16"/>
-          <p:cNvSpPr/>
-          <p:nvPr/>
-        </p:nvSpPr>
-        <p:spPr>
-          <a:xfrm>
-            <a:off x="7799832" y="4974336"/>
-            <a:ext cx="3145536" cy="576072"/>
+          <p:cNvPr id="26" name="Text 24"/>
+          <p:cNvSpPr/>
+          <p:nvPr/>
+        </p:nvSpPr>
+        <p:spPr>
+          <a:xfrm>
+            <a:off x="7799832" y="4818888"/>
+            <a:ext cx="3145536" cy="688543"/>
           </a:xfrm>
           <a:prstGeom prst="rect">
             <a:avLst/>
@@ -4560,7 +4776,7 @@
                 <a:ea typeface="Aptos" pitchFamily="34" charset="-122"/>
                 <a:cs typeface="Aptos" pitchFamily="34" charset="-120"/>
               </a:rPr>
-              <a:t>Identify what could go wrong, who could be affected, what safeguards are needed, and what evidence should be reviewed.</a:t>
+              <a:t>Identify what could go wrong, who could be affected, what safeguards are needed, and what evidence should be reviewed before use.</a:t>
             </a:r>
             <a:endParaRPr lang="en-US" sz="1320" dirty="0"/>
           </a:p>
@@ -4929,11 +5145,11 @@
         <p:spPr>
           <a:xfrm>
             <a:off x="7635240" y="1325880"/>
-            <a:ext cx="3474720" cy="1325880"/>
+            <a:ext cx="3474720" cy="1207008"/>
           </a:xfrm>
           <a:prstGeom prst="roundRect">
             <a:avLst>
-              <a:gd name="adj" fmla="val 8276"/>
+              <a:gd name="adj" fmla="val 9091"/>
             </a:avLst>
           </a:prstGeom>
           <a:solidFill>
@@ -4995,7 +5211,7 @@
         <p:spPr>
           <a:xfrm>
             <a:off x="7799832" y="1801368"/>
-            <a:ext cx="3145536" cy="758952"/>
+            <a:ext cx="3145536" cy="640080"/>
           </a:xfrm>
           <a:prstGeom prst="rect">
             <a:avLst/>
@@ -5035,7 +5251,7 @@
         </p:nvSpPr>
         <p:spPr>
           <a:xfrm>
-            <a:off x="7635240" y="2788920"/>
+            <a:off x="7635240" y="2670048"/>
             <a:ext cx="3474720" cy="1536192"/>
           </a:xfrm>
           <a:prstGeom prst="roundRect">
@@ -5062,8 +5278,8 @@
         </p:nvSpPr>
         <p:spPr>
           <a:xfrm>
-            <a:off x="7799832" y="2935224"/>
-            <a:ext cx="3145536" cy="256032"/>
+            <a:off x="7799832" y="2798064"/>
+            <a:ext cx="3145536" cy="237744"/>
           </a:xfrm>
           <a:prstGeom prst="rect">
             <a:avLst/>
@@ -5079,7 +5295,7 @@
               <a:buNone/>
             </a:pPr>
             <a:r>
-              <a:rPr lang="en-US" sz="1300" b="1" dirty="0">
+              <a:rPr lang="en-US" sz="1250" b="1" dirty="0">
                 <a:solidFill>
                   <a:srgbClr val="0068B7"/>
                 </a:solidFill>
@@ -5087,101 +5303,317 @@
                 <a:ea typeface="Aptos" pitchFamily="34" charset="-122"/>
                 <a:cs typeface="Aptos" pitchFamily="34" charset="-120"/>
               </a:rPr>
-              <a:t>Concept checkpoints</a:t>
-            </a:r>
-            <a:endParaRPr lang="en-US" sz="1300" dirty="0"/>
-          </a:p>
-        </p:txBody>
-      </p:sp>
-      <p:sp>
-        <p:nvSpPr>
-          <p:cNvPr id="15" name="Text 13"/>
-          <p:cNvSpPr/>
-          <p:nvPr/>
-        </p:nvSpPr>
-        <p:spPr>
-          <a:xfrm>
-            <a:off x="7818120" y="3300984"/>
-            <a:ext cx="3090672" cy="877824"/>
-          </a:xfrm>
-          <a:prstGeom prst="rect">
-            <a:avLst/>
-          </a:prstGeom>
-          <a:noFill/>
-          <a:ln/>
-        </p:spPr>
-        <p:txBody>
-          <a:bodyPr wrap="square" lIns="508" tIns="508" rIns="508" bIns="508" rtlCol="0" anchor="t">
+              <a:t>Risk control loop</a:t>
+            </a:r>
+            <a:endParaRPr lang="en-US" sz="1250" dirty="0"/>
+          </a:p>
+        </p:txBody>
+      </p:sp>
+      <p:sp>
+        <p:nvSpPr>
+          <p:cNvPr id="15" name="Shape 13"/>
+          <p:cNvSpPr/>
+          <p:nvPr/>
+        </p:nvSpPr>
+        <p:spPr>
+          <a:xfrm>
+            <a:off x="8763000" y="3351276"/>
+            <a:ext cx="164592" cy="0"/>
+          </a:xfrm>
+          <a:prstGeom prst="line">
+            <a:avLst/>
+          </a:prstGeom>
+          <a:noFill/>
+          <a:ln w="15240">
+            <a:solidFill>
+              <a:srgbClr val="8ABBD8"/>
+            </a:solidFill>
+            <a:prstDash val="solid"/>
+          </a:ln>
+        </p:spPr>
+      </p:sp>
+      <p:sp>
+        <p:nvSpPr>
+          <p:cNvPr id="16" name="Shape 14"/>
+          <p:cNvSpPr/>
+          <p:nvPr/>
+        </p:nvSpPr>
+        <p:spPr>
+          <a:xfrm>
+            <a:off x="7872984" y="3200400"/>
+            <a:ext cx="890016" cy="301752"/>
+          </a:xfrm>
+          <a:prstGeom prst="roundRect">
+            <a:avLst>
+              <a:gd name="adj" fmla="val 24242"/>
+            </a:avLst>
+          </a:prstGeom>
+          <a:solidFill>
+            <a:srgbClr val="0068B7"/>
+          </a:solidFill>
+          <a:ln w="12700">
+            <a:solidFill>
+              <a:srgbClr val="0068B7"/>
+            </a:solidFill>
+            <a:prstDash val="solid"/>
+          </a:ln>
+        </p:spPr>
+      </p:sp>
+      <p:sp>
+        <p:nvSpPr>
+          <p:cNvPr id="17" name="Text 15"/>
+          <p:cNvSpPr/>
+          <p:nvPr/>
+        </p:nvSpPr>
+        <p:spPr>
+          <a:xfrm>
+            <a:off x="7909560" y="3273552"/>
+            <a:ext cx="816864" cy="146304"/>
+          </a:xfrm>
+          <a:prstGeom prst="rect">
+            <a:avLst/>
+          </a:prstGeom>
+          <a:noFill/>
+          <a:ln/>
+        </p:spPr>
+        <p:txBody>
+          <a:bodyPr wrap="square" lIns="0" tIns="0" rIns="0" bIns="0" rtlCol="0" anchor="ctr">
             <a:normAutofit/>
           </a:bodyPr>
           <a:lstStyle/>
           <a:p>
-            <a:pPr indent="0" marL="0">
-              <a:buNone/>
-            </a:pPr>
-            <a:r>
-              <a:rPr lang="en-US" sz="1220" dirty="0">
-                <a:solidFill>
-                  <a:srgbClr val="17364A"/>
-                </a:solidFill>
-                <a:latin typeface="Aptos" pitchFamily="34" charset="0"/>
-                <a:ea typeface="Aptos" pitchFamily="34" charset="-122"/>
-                <a:cs typeface="Aptos" pitchFamily="34" charset="-120"/>
-              </a:rPr>
-              <a:t>Use cases moving forward without ownership, validation, or.</a:t>
-            </a:r>
-            <a:endParaRPr lang="en-US" sz="1220" dirty="0"/>
-          </a:p>
-          <a:p>
-            <a:pPr indent="0" marL="0">
-              <a:buNone/>
-            </a:pPr>
-            <a:r>
-              <a:rPr lang="en-US" sz="1220" dirty="0">
-                <a:solidFill>
-                  <a:srgbClr val="17364A"/>
-                </a:solidFill>
-                <a:latin typeface="Aptos" pitchFamily="34" charset="0"/>
-                <a:ea typeface="Aptos" pitchFamily="34" charset="-122"/>
-                <a:cs typeface="Aptos" pitchFamily="34" charset="-120"/>
-              </a:rPr>
-              <a:t>High-risk public-facing or decision-support uses being treated as.</a:t>
-            </a:r>
-            <a:endParaRPr lang="en-US" sz="1220" dirty="0"/>
-          </a:p>
-          <a:p>
-            <a:pPr indent="0" marL="0">
-              <a:buNone/>
-            </a:pPr>
-            <a:r>
-              <a:rPr lang="en-US" sz="1220" dirty="0">
-                <a:solidFill>
-                  <a:srgbClr val="17364A"/>
-                </a:solidFill>
-                <a:latin typeface="Aptos" pitchFamily="34" charset="0"/>
-                <a:ea typeface="Aptos" pitchFamily="34" charset="-122"/>
-                <a:cs typeface="Aptos" pitchFamily="34" charset="-120"/>
-              </a:rPr>
-              <a:t>Equity, accessibility, and community impacts being considered too.</a:t>
-            </a:r>
-            <a:endParaRPr lang="en-US" sz="1220" dirty="0"/>
-          </a:p>
-        </p:txBody>
-      </p:sp>
-      <p:sp>
-        <p:nvSpPr>
-          <p:cNvPr id="16" name="Shape 14"/>
-          <p:cNvSpPr/>
-          <p:nvPr/>
-        </p:nvSpPr>
-        <p:spPr>
-          <a:xfrm>
-            <a:off x="7635240" y="4498848"/>
-            <a:ext cx="3474720" cy="1143000"/>
+            <a:pPr algn="ctr" indent="0" marL="0">
+              <a:buNone/>
+            </a:pPr>
+            <a:r>
+              <a:rPr lang="en-US" sz="880" b="1" dirty="0">
+                <a:solidFill>
+                  <a:srgbClr val="FFFFFF"/>
+                </a:solidFill>
+                <a:latin typeface="Aptos" pitchFamily="34" charset="0"/>
+                <a:ea typeface="Aptos" pitchFamily="34" charset="-122"/>
+                <a:cs typeface="Aptos" pitchFamily="34" charset="-120"/>
+              </a:rPr>
+              <a:t>Identify</a:t>
+            </a:r>
+            <a:endParaRPr lang="en-US" sz="880" dirty="0"/>
+          </a:p>
+        </p:txBody>
+      </p:sp>
+      <p:sp>
+        <p:nvSpPr>
+          <p:cNvPr id="18" name="Shape 16"/>
+          <p:cNvSpPr/>
+          <p:nvPr/>
+        </p:nvSpPr>
+        <p:spPr>
+          <a:xfrm>
+            <a:off x="9817608" y="3351276"/>
+            <a:ext cx="164592" cy="0"/>
+          </a:xfrm>
+          <a:prstGeom prst="line">
+            <a:avLst/>
+          </a:prstGeom>
+          <a:noFill/>
+          <a:ln w="15240">
+            <a:solidFill>
+              <a:srgbClr val="8ABBD8"/>
+            </a:solidFill>
+            <a:prstDash val="solid"/>
+          </a:ln>
+        </p:spPr>
+      </p:sp>
+      <p:sp>
+        <p:nvSpPr>
+          <p:cNvPr id="19" name="Shape 17"/>
+          <p:cNvSpPr/>
+          <p:nvPr/>
+        </p:nvSpPr>
+        <p:spPr>
+          <a:xfrm>
+            <a:off x="8927592" y="3200400"/>
+            <a:ext cx="890016" cy="301752"/>
           </a:xfrm>
           <a:prstGeom prst="roundRect">
             <a:avLst>
-              <a:gd name="adj" fmla="val 9600"/>
+              <a:gd name="adj" fmla="val 24242"/>
+            </a:avLst>
+          </a:prstGeom>
+          <a:solidFill>
+            <a:srgbClr val="2F8A28"/>
+          </a:solidFill>
+          <a:ln w="12700">
+            <a:solidFill>
+              <a:srgbClr val="2F8A28"/>
+            </a:solidFill>
+            <a:prstDash val="solid"/>
+          </a:ln>
+        </p:spPr>
+      </p:sp>
+      <p:sp>
+        <p:nvSpPr>
+          <p:cNvPr id="20" name="Text 18"/>
+          <p:cNvSpPr/>
+          <p:nvPr/>
+        </p:nvSpPr>
+        <p:spPr>
+          <a:xfrm>
+            <a:off x="8964168" y="3273552"/>
+            <a:ext cx="816864" cy="146304"/>
+          </a:xfrm>
+          <a:prstGeom prst="rect">
+            <a:avLst/>
+          </a:prstGeom>
+          <a:noFill/>
+          <a:ln/>
+        </p:spPr>
+        <p:txBody>
+          <a:bodyPr wrap="square" lIns="0" tIns="0" rIns="0" bIns="0" rtlCol="0" anchor="ctr">
+            <a:normAutofit/>
+          </a:bodyPr>
+          <a:lstStyle/>
+          <a:p>
+            <a:pPr algn="ctr" indent="0" marL="0">
+              <a:buNone/>
+            </a:pPr>
+            <a:r>
+              <a:rPr lang="en-US" sz="880" b="1" dirty="0">
+                <a:solidFill>
+                  <a:srgbClr val="FFFFFF"/>
+                </a:solidFill>
+                <a:latin typeface="Aptos" pitchFamily="34" charset="0"/>
+                <a:ea typeface="Aptos" pitchFamily="34" charset="-122"/>
+                <a:cs typeface="Aptos" pitchFamily="34" charset="-120"/>
+              </a:rPr>
+              <a:t>Control</a:t>
+            </a:r>
+            <a:endParaRPr lang="en-US" sz="880" dirty="0"/>
+          </a:p>
+        </p:txBody>
+      </p:sp>
+      <p:sp>
+        <p:nvSpPr>
+          <p:cNvPr id="21" name="Shape 19"/>
+          <p:cNvSpPr/>
+          <p:nvPr/>
+        </p:nvSpPr>
+        <p:spPr>
+          <a:xfrm>
+            <a:off x="9982200" y="3200400"/>
+            <a:ext cx="890016" cy="301752"/>
+          </a:xfrm>
+          <a:prstGeom prst="roundRect">
+            <a:avLst>
+              <a:gd name="adj" fmla="val 24242"/>
+            </a:avLst>
+          </a:prstGeom>
+          <a:solidFill>
+            <a:srgbClr val="6A4CA3"/>
+          </a:solidFill>
+          <a:ln w="12700">
+            <a:solidFill>
+              <a:srgbClr val="6A4CA3"/>
+            </a:solidFill>
+            <a:prstDash val="solid"/>
+          </a:ln>
+        </p:spPr>
+      </p:sp>
+      <p:sp>
+        <p:nvSpPr>
+          <p:cNvPr id="22" name="Text 20"/>
+          <p:cNvSpPr/>
+          <p:nvPr/>
+        </p:nvSpPr>
+        <p:spPr>
+          <a:xfrm>
+            <a:off x="10018776" y="3273552"/>
+            <a:ext cx="816864" cy="146304"/>
+          </a:xfrm>
+          <a:prstGeom prst="rect">
+            <a:avLst/>
+          </a:prstGeom>
+          <a:noFill/>
+          <a:ln/>
+        </p:spPr>
+        <p:txBody>
+          <a:bodyPr wrap="square" lIns="0" tIns="0" rIns="0" bIns="0" rtlCol="0" anchor="ctr">
+            <a:normAutofit/>
+          </a:bodyPr>
+          <a:lstStyle/>
+          <a:p>
+            <a:pPr algn="ctr" indent="0" marL="0">
+              <a:buNone/>
+            </a:pPr>
+            <a:r>
+              <a:rPr lang="en-US" sz="880" b="1" dirty="0">
+                <a:solidFill>
+                  <a:srgbClr val="FFFFFF"/>
+                </a:solidFill>
+                <a:latin typeface="Aptos" pitchFamily="34" charset="0"/>
+                <a:ea typeface="Aptos" pitchFamily="34" charset="-122"/>
+                <a:cs typeface="Aptos" pitchFamily="34" charset="-120"/>
+              </a:rPr>
+              <a:t>Monitor</a:t>
+            </a:r>
+            <a:endParaRPr lang="en-US" sz="880" dirty="0"/>
+          </a:p>
+        </p:txBody>
+      </p:sp>
+      <p:sp>
+        <p:nvSpPr>
+          <p:cNvPr id="23" name="Text 21"/>
+          <p:cNvSpPr/>
+          <p:nvPr/>
+        </p:nvSpPr>
+        <p:spPr>
+          <a:xfrm>
+            <a:off x="7854696" y="3694176"/>
+            <a:ext cx="3035808" cy="365760"/>
+          </a:xfrm>
+          <a:prstGeom prst="rect">
+            <a:avLst/>
+          </a:prstGeom>
+          <a:noFill/>
+          <a:ln/>
+        </p:spPr>
+        <p:txBody>
+          <a:bodyPr wrap="square" lIns="254" tIns="254" rIns="254" bIns="254" rtlCol="0" anchor="t">
+            <a:normAutofit/>
+          </a:bodyPr>
+          <a:lstStyle/>
+          <a:p>
+            <a:pPr indent="0" marL="0">
+              <a:buNone/>
+            </a:pPr>
+            <a:r>
+              <a:rPr lang="en-US" sz="1120" dirty="0">
+                <a:solidFill>
+                  <a:srgbClr val="17364A"/>
+                </a:solidFill>
+                <a:latin typeface="Aptos" pitchFamily="34" charset="0"/>
+                <a:ea typeface="Aptos" pitchFamily="34" charset="-122"/>
+                <a:cs typeface="Aptos" pitchFamily="34" charset="-120"/>
+              </a:rPr>
+              <a:t>Responsible use depends on finding risks early, applying safeguards, and watching for drift or harm over time.</a:t>
+            </a:r>
+            <a:endParaRPr lang="en-US" sz="1120" dirty="0"/>
+          </a:p>
+        </p:txBody>
+      </p:sp>
+      <p:sp>
+        <p:nvSpPr>
+          <p:cNvPr id="24" name="Shape 22"/>
+          <p:cNvSpPr/>
+          <p:nvPr/>
+        </p:nvSpPr>
+        <p:spPr>
+          <a:xfrm>
+            <a:off x="7635240" y="4343400"/>
+            <a:ext cx="3474720" cy="1255471"/>
+          </a:xfrm>
+          <a:prstGeom prst="roundRect">
+            <a:avLst>
+              <a:gd name="adj" fmla="val 8740"/>
             </a:avLst>
           </a:prstGeom>
           <a:solidFill>
@@ -5197,13 +5629,13 @@
       </p:sp>
       <p:sp>
         <p:nvSpPr>
-          <p:cNvPr id="17" name="Text 15"/>
-          <p:cNvSpPr/>
-          <p:nvPr/>
-        </p:nvSpPr>
-        <p:spPr>
-          <a:xfrm>
-            <a:off x="7799832" y="4645152"/>
+          <p:cNvPr id="25" name="Text 23"/>
+          <p:cNvSpPr/>
+          <p:nvPr/>
+        </p:nvSpPr>
+        <p:spPr>
+          <a:xfrm>
+            <a:off x="7799832" y="4489704"/>
             <a:ext cx="3145536" cy="256032"/>
           </a:xfrm>
           <a:prstGeom prst="rect">
@@ -5236,14 +5668,14 @@
       </p:sp>
       <p:sp>
         <p:nvSpPr>
-          <p:cNvPr id="18" name="Text 16"/>
-          <p:cNvSpPr/>
-          <p:nvPr/>
-        </p:nvSpPr>
-        <p:spPr>
-          <a:xfrm>
-            <a:off x="7799832" y="4974336"/>
-            <a:ext cx="3145536" cy="576072"/>
+          <p:cNvPr id="26" name="Text 24"/>
+          <p:cNvSpPr/>
+          <p:nvPr/>
+        </p:nvSpPr>
+        <p:spPr>
+          <a:xfrm>
+            <a:off x="7799832" y="4818888"/>
+            <a:ext cx="3145536" cy="688543"/>
           </a:xfrm>
           <a:prstGeom prst="rect">
             <a:avLst/>
@@ -5269,7 +5701,7 @@
                 <a:ea typeface="Aptos" pitchFamily="34" charset="-122"/>
                 <a:cs typeface="Aptos" pitchFamily="34" charset="-120"/>
               </a:rPr>
-              <a:t>Identify what could go wrong, who could be affected, what safeguards are needed, and what evidence should be reviewed.</a:t>
+              <a:t>Identify what could go wrong, who could be affected, what safeguards are needed, and what evidence should be reviewed before use.</a:t>
             </a:r>
             <a:endParaRPr lang="en-US" sz="1320" dirty="0"/>
           </a:p>
@@ -5638,11 +6070,11 @@
         <p:spPr>
           <a:xfrm>
             <a:off x="7635240" y="1325880"/>
-            <a:ext cx="3474720" cy="1325880"/>
+            <a:ext cx="3474720" cy="1207008"/>
           </a:xfrm>
           <a:prstGeom prst="roundRect">
             <a:avLst>
-              <a:gd name="adj" fmla="val 8276"/>
+              <a:gd name="adj" fmla="val 9091"/>
             </a:avLst>
           </a:prstGeom>
           <a:solidFill>
@@ -5704,7 +6136,7 @@
         <p:spPr>
           <a:xfrm>
             <a:off x="7799832" y="1801368"/>
-            <a:ext cx="3145536" cy="758952"/>
+            <a:ext cx="3145536" cy="640080"/>
           </a:xfrm>
           <a:prstGeom prst="rect">
             <a:avLst/>
@@ -5744,7 +6176,7 @@
         </p:nvSpPr>
         <p:spPr>
           <a:xfrm>
-            <a:off x="7635240" y="2788920"/>
+            <a:off x="7635240" y="2670048"/>
             <a:ext cx="3474720" cy="1536192"/>
           </a:xfrm>
           <a:prstGeom prst="roundRect">
@@ -5771,7 +6203,7 @@
         </p:nvSpPr>
         <p:spPr>
           <a:xfrm>
-            <a:off x="7799832" y="2935224"/>
+            <a:off x="7799832" y="2816352"/>
             <a:ext cx="3145536" cy="256032"/>
           </a:xfrm>
           <a:prstGeom prst="rect">
@@ -5810,7 +6242,7 @@
         </p:nvSpPr>
         <p:spPr>
           <a:xfrm>
-            <a:off x="7818120" y="3300984"/>
+            <a:off x="7818120" y="3182112"/>
             <a:ext cx="3090672" cy="877824"/>
           </a:xfrm>
           <a:prstGeom prst="rect">
@@ -5885,12 +6317,12 @@
         </p:nvSpPr>
         <p:spPr>
           <a:xfrm>
-            <a:off x="7635240" y="4498848"/>
-            <a:ext cx="3474720" cy="1143000"/>
+            <a:off x="7635240" y="4343400"/>
+            <a:ext cx="3474720" cy="1255471"/>
           </a:xfrm>
           <a:prstGeom prst="roundRect">
             <a:avLst>
-              <a:gd name="adj" fmla="val 9600"/>
+              <a:gd name="adj" fmla="val 8740"/>
             </a:avLst>
           </a:prstGeom>
           <a:solidFill>
@@ -5912,7 +6344,7 @@
         </p:nvSpPr>
         <p:spPr>
           <a:xfrm>
-            <a:off x="7799832" y="4645152"/>
+            <a:off x="7799832" y="4489704"/>
             <a:ext cx="3145536" cy="256032"/>
           </a:xfrm>
           <a:prstGeom prst="rect">
@@ -5951,8 +6383,8 @@
         </p:nvSpPr>
         <p:spPr>
           <a:xfrm>
-            <a:off x="7799832" y="4974336"/>
-            <a:ext cx="3145536" cy="576072"/>
+            <a:off x="7799832" y="4818888"/>
+            <a:ext cx="3145536" cy="688543"/>
           </a:xfrm>
           <a:prstGeom prst="rect">
             <a:avLst/>
@@ -5978,7 +6410,7 @@
                 <a:ea typeface="Aptos" pitchFamily="34" charset="-122"/>
                 <a:cs typeface="Aptos" pitchFamily="34" charset="-120"/>
               </a:rPr>
-              <a:t>Identify what could go wrong, who could be affected, what safeguards are needed, and what evidence should be reviewed.</a:t>
+              <a:t>Identify what could go wrong, who could be affected, what safeguards are needed, and what evidence should be reviewed before use.</a:t>
             </a:r>
             <a:endParaRPr lang="en-US" sz="1320" dirty="0"/>
           </a:p>
@@ -6347,11 +6779,11 @@
         <p:spPr>
           <a:xfrm>
             <a:off x="7635240" y="1325880"/>
-            <a:ext cx="3474720" cy="1325880"/>
+            <a:ext cx="3474720" cy="1207008"/>
           </a:xfrm>
           <a:prstGeom prst="roundRect">
             <a:avLst>
-              <a:gd name="adj" fmla="val 8276"/>
+              <a:gd name="adj" fmla="val 9091"/>
             </a:avLst>
           </a:prstGeom>
           <a:solidFill>
@@ -6413,7 +6845,7 @@
         <p:spPr>
           <a:xfrm>
             <a:off x="7799832" y="1801368"/>
-            <a:ext cx="3145536" cy="758952"/>
+            <a:ext cx="3145536" cy="640080"/>
           </a:xfrm>
           <a:prstGeom prst="rect">
             <a:avLst/>
@@ -6453,7 +6885,7 @@
         </p:nvSpPr>
         <p:spPr>
           <a:xfrm>
-            <a:off x="7635240" y="2788920"/>
+            <a:off x="7635240" y="2670048"/>
             <a:ext cx="3474720" cy="1536192"/>
           </a:xfrm>
           <a:prstGeom prst="roundRect">
@@ -6480,7 +6912,7 @@
         </p:nvSpPr>
         <p:spPr>
           <a:xfrm>
-            <a:off x="7799832" y="2935224"/>
+            <a:off x="7799832" y="2816352"/>
             <a:ext cx="3145536" cy="256032"/>
           </a:xfrm>
           <a:prstGeom prst="rect">
@@ -6519,7 +6951,7 @@
         </p:nvSpPr>
         <p:spPr>
           <a:xfrm>
-            <a:off x="7818120" y="3300984"/>
+            <a:off x="7818120" y="3182112"/>
             <a:ext cx="3090672" cy="877824"/>
           </a:xfrm>
           <a:prstGeom prst="rect">
@@ -6594,12 +7026,12 @@
         </p:nvSpPr>
         <p:spPr>
           <a:xfrm>
-            <a:off x="7635240" y="4498848"/>
-            <a:ext cx="3474720" cy="1143000"/>
+            <a:off x="7635240" y="4343400"/>
+            <a:ext cx="3474720" cy="1255471"/>
           </a:xfrm>
           <a:prstGeom prst="roundRect">
             <a:avLst>
-              <a:gd name="adj" fmla="val 9600"/>
+              <a:gd name="adj" fmla="val 8740"/>
             </a:avLst>
           </a:prstGeom>
           <a:solidFill>
@@ -6621,7 +7053,7 @@
         </p:nvSpPr>
         <p:spPr>
           <a:xfrm>
-            <a:off x="7799832" y="4645152"/>
+            <a:off x="7799832" y="4489704"/>
             <a:ext cx="3145536" cy="256032"/>
           </a:xfrm>
           <a:prstGeom prst="rect">
@@ -6660,8 +7092,8 @@
         </p:nvSpPr>
         <p:spPr>
           <a:xfrm>
-            <a:off x="7799832" y="4974336"/>
-            <a:ext cx="3145536" cy="576072"/>
+            <a:off x="7799832" y="4818888"/>
+            <a:ext cx="3145536" cy="688543"/>
           </a:xfrm>
           <a:prstGeom prst="rect">
             <a:avLst/>
@@ -6687,7 +7119,7 @@
                 <a:ea typeface="Aptos" pitchFamily="34" charset="-122"/>
                 <a:cs typeface="Aptos" pitchFamily="34" charset="-120"/>
               </a:rPr>
-              <a:t>Identify what could go wrong, who could be affected, what safeguards are needed, and what evidence should be reviewed.</a:t>
+              <a:t>Identify what could go wrong, who could be affected, what safeguards are needed, and what evidence should be reviewed before use.</a:t>
             </a:r>
             <a:endParaRPr lang="en-US" sz="1320" dirty="0"/>
           </a:p>
@@ -7056,11 +7488,11 @@
         <p:spPr>
           <a:xfrm>
             <a:off x="7635240" y="1325880"/>
-            <a:ext cx="3474720" cy="1325880"/>
+            <a:ext cx="3474720" cy="1207008"/>
           </a:xfrm>
           <a:prstGeom prst="roundRect">
             <a:avLst>
-              <a:gd name="adj" fmla="val 8276"/>
+              <a:gd name="adj" fmla="val 9091"/>
             </a:avLst>
           </a:prstGeom>
           <a:solidFill>
@@ -7122,7 +7554,7 @@
         <p:spPr>
           <a:xfrm>
             <a:off x="7799832" y="1801368"/>
-            <a:ext cx="3145536" cy="758952"/>
+            <a:ext cx="3145536" cy="640080"/>
           </a:xfrm>
           <a:prstGeom prst="rect">
             <a:avLst/>
@@ -7162,12 +7594,12 @@
         </p:nvSpPr>
         <p:spPr>
           <a:xfrm>
-            <a:off x="7635240" y="2788920"/>
-            <a:ext cx="3474720" cy="1536192"/>
+            <a:off x="7635240" y="2670048"/>
+            <a:ext cx="3474720" cy="1377086"/>
           </a:xfrm>
           <a:prstGeom prst="roundRect">
             <a:avLst>
-              <a:gd name="adj" fmla="val 7143"/>
+              <a:gd name="adj" fmla="val 7968"/>
             </a:avLst>
           </a:prstGeom>
           <a:solidFill>
@@ -7189,7 +7621,7 @@
         </p:nvSpPr>
         <p:spPr>
           <a:xfrm>
-            <a:off x="7799832" y="2935224"/>
+            <a:off x="7799832" y="2816352"/>
             <a:ext cx="3145536" cy="256032"/>
           </a:xfrm>
           <a:prstGeom prst="rect">
@@ -7228,8 +7660,8 @@
         </p:nvSpPr>
         <p:spPr>
           <a:xfrm>
-            <a:off x="7818120" y="3300984"/>
-            <a:ext cx="3090672" cy="877824"/>
+            <a:off x="7818120" y="3182112"/>
+            <a:ext cx="3090672" cy="718718"/>
           </a:xfrm>
           <a:prstGeom prst="rect">
             <a:avLst/>
@@ -7303,12 +7735,12 @@
         </p:nvSpPr>
         <p:spPr>
           <a:xfrm>
-            <a:off x="7635240" y="4498848"/>
-            <a:ext cx="3474720" cy="1143000"/>
+            <a:off x="7635240" y="4184294"/>
+            <a:ext cx="3474720" cy="1466698"/>
           </a:xfrm>
           <a:prstGeom prst="roundRect">
             <a:avLst>
-              <a:gd name="adj" fmla="val 9600"/>
+              <a:gd name="adj" fmla="val 7481"/>
             </a:avLst>
           </a:prstGeom>
           <a:solidFill>
@@ -7330,7 +7762,7 @@
         </p:nvSpPr>
         <p:spPr>
           <a:xfrm>
-            <a:off x="7799832" y="4645152"/>
+            <a:off x="7799832" y="4330598"/>
             <a:ext cx="3145536" cy="256032"/>
           </a:xfrm>
           <a:prstGeom prst="rect">
@@ -7369,8 +7801,8 @@
         </p:nvSpPr>
         <p:spPr>
           <a:xfrm>
-            <a:off x="7799832" y="4974336"/>
-            <a:ext cx="3145536" cy="576072"/>
+            <a:off x="7799832" y="4659782"/>
+            <a:ext cx="3145536" cy="899770"/>
           </a:xfrm>
           <a:prstGeom prst="rect">
             <a:avLst/>
@@ -7396,7 +7828,7 @@
                 <a:ea typeface="Aptos" pitchFamily="34" charset="-122"/>
                 <a:cs typeface="Aptos" pitchFamily="34" charset="-120"/>
               </a:rPr>
-              <a:t>Connect the concept to public health purpose, responsible use, required safeguards, documentation, and the next action a.</a:t>
+              <a:t>Connect the concept to public health purpose, responsible use, required safeguards, documentation, and the next action a department should take.</a:t>
             </a:r>
             <a:endParaRPr lang="en-US" sz="1320" dirty="0"/>
           </a:p>
@@ -7748,11 +8180,11 @@
         <p:spPr>
           <a:xfrm>
             <a:off x="7635240" y="1325880"/>
-            <a:ext cx="3474720" cy="1325880"/>
+            <a:ext cx="3474720" cy="1207008"/>
           </a:xfrm>
           <a:prstGeom prst="roundRect">
             <a:avLst>
-              <a:gd name="adj" fmla="val 8276"/>
+              <a:gd name="adj" fmla="val 9091"/>
             </a:avLst>
           </a:prstGeom>
           <a:solidFill>
@@ -7814,7 +8246,7 @@
         <p:spPr>
           <a:xfrm>
             <a:off x="7799832" y="1801368"/>
-            <a:ext cx="3145536" cy="758952"/>
+            <a:ext cx="3145536" cy="640080"/>
           </a:xfrm>
           <a:prstGeom prst="rect">
             <a:avLst/>
@@ -7840,7 +8272,7 @@
                 <a:ea typeface="Aptos" pitchFamily="34" charset="-122"/>
                 <a:cs typeface="Aptos" pitchFamily="34" charset="-120"/>
               </a:rPr>
-              <a:t>What evidence would governance, leadership, or operations staff need before moving forward?</a:t>
+              <a:t>What evidence would governance, leadership, or operations staff need before moving.</a:t>
             </a:r>
             <a:endParaRPr lang="en-US" sz="1320" dirty="0"/>
           </a:p>
@@ -7854,12 +8286,12 @@
         </p:nvSpPr>
         <p:spPr>
           <a:xfrm>
-            <a:off x="7635240" y="2788920"/>
-            <a:ext cx="3474720" cy="1536192"/>
+            <a:off x="7635240" y="2670048"/>
+            <a:ext cx="3474720" cy="1377086"/>
           </a:xfrm>
           <a:prstGeom prst="roundRect">
             <a:avLst>
-              <a:gd name="adj" fmla="val 7143"/>
+              <a:gd name="adj" fmla="val 7968"/>
             </a:avLst>
           </a:prstGeom>
           <a:solidFill>
@@ -7881,7 +8313,7 @@
         </p:nvSpPr>
         <p:spPr>
           <a:xfrm>
-            <a:off x="7799832" y="2935224"/>
+            <a:off x="7799832" y="2816352"/>
             <a:ext cx="3145536" cy="256032"/>
           </a:xfrm>
           <a:prstGeom prst="rect">
@@ -7920,8 +8352,8 @@
         </p:nvSpPr>
         <p:spPr>
           <a:xfrm>
-            <a:off x="7818120" y="3300984"/>
-            <a:ext cx="3090672" cy="877824"/>
+            <a:off x="7818120" y="3182112"/>
+            <a:ext cx="3090672" cy="718718"/>
           </a:xfrm>
           <a:prstGeom prst="rect">
             <a:avLst/>
@@ -7978,12 +8410,12 @@
         </p:nvSpPr>
         <p:spPr>
           <a:xfrm>
-            <a:off x="7635240" y="4498848"/>
-            <a:ext cx="3474720" cy="1143000"/>
+            <a:off x="7635240" y="4184294"/>
+            <a:ext cx="3474720" cy="1466698"/>
           </a:xfrm>
           <a:prstGeom prst="roundRect">
             <a:avLst>
-              <a:gd name="adj" fmla="val 9600"/>
+              <a:gd name="adj" fmla="val 7481"/>
             </a:avLst>
           </a:prstGeom>
           <a:solidFill>
@@ -8005,7 +8437,7 @@
         </p:nvSpPr>
         <p:spPr>
           <a:xfrm>
-            <a:off x="7799832" y="4645152"/>
+            <a:off x="7799832" y="4330598"/>
             <a:ext cx="3145536" cy="256032"/>
           </a:xfrm>
           <a:prstGeom prst="rect">
@@ -8044,8 +8476,8 @@
         </p:nvSpPr>
         <p:spPr>
           <a:xfrm>
-            <a:off x="7799832" y="4974336"/>
-            <a:ext cx="3145536" cy="576072"/>
+            <a:off x="7799832" y="4659782"/>
+            <a:ext cx="3145536" cy="899770"/>
           </a:xfrm>
           <a:prstGeom prst="rect">
             <a:avLst/>
@@ -8071,7 +8503,7 @@
                 <a:ea typeface="Aptos" pitchFamily="34" charset="-122"/>
                 <a:cs typeface="Aptos" pitchFamily="34" charset="-120"/>
               </a:rPr>
-              <a:t>Connect the concept to public health purpose, responsible use, required safeguards, documentation, and the next action a.</a:t>
+              <a:t>Connect the concept to public health purpose, responsible use, required safeguards, documentation, and the next action a department should take.</a:t>
             </a:r>
             <a:endParaRPr lang="en-US" sz="1320" dirty="0"/>
           </a:p>
@@ -8423,11 +8855,11 @@
         <p:spPr>
           <a:xfrm>
             <a:off x="7635240" y="1325880"/>
-            <a:ext cx="3474720" cy="1325880"/>
+            <a:ext cx="3474720" cy="1255471"/>
           </a:xfrm>
           <a:prstGeom prst="roundRect">
             <a:avLst>
-              <a:gd name="adj" fmla="val 8276"/>
+              <a:gd name="adj" fmla="val 8740"/>
             </a:avLst>
           </a:prstGeom>
           <a:solidFill>
@@ -8489,7 +8921,7 @@
         <p:spPr>
           <a:xfrm>
             <a:off x="7799832" y="1801368"/>
-            <a:ext cx="3145536" cy="758952"/>
+            <a:ext cx="3145536" cy="688543"/>
           </a:xfrm>
           <a:prstGeom prst="rect">
             <a:avLst/>
@@ -8529,12 +8961,12 @@
         </p:nvSpPr>
         <p:spPr>
           <a:xfrm>
-            <a:off x="7635240" y="2788920"/>
-            <a:ext cx="3474720" cy="1536192"/>
+            <a:off x="7635240" y="2718511"/>
+            <a:ext cx="3474720" cy="1328623"/>
           </a:xfrm>
           <a:prstGeom prst="roundRect">
             <a:avLst>
-              <a:gd name="adj" fmla="val 7143"/>
+              <a:gd name="adj" fmla="val 8259"/>
             </a:avLst>
           </a:prstGeom>
           <a:solidFill>
@@ -8556,7 +8988,7 @@
         </p:nvSpPr>
         <p:spPr>
           <a:xfrm>
-            <a:off x="7799832" y="2935224"/>
+            <a:off x="7799832" y="2864815"/>
             <a:ext cx="3145536" cy="256032"/>
           </a:xfrm>
           <a:prstGeom prst="rect">
@@ -8595,8 +9027,8 @@
         </p:nvSpPr>
         <p:spPr>
           <a:xfrm>
-            <a:off x="7818120" y="3300984"/>
-            <a:ext cx="3090672" cy="877824"/>
+            <a:off x="7818120" y="3230575"/>
+            <a:ext cx="3090672" cy="670255"/>
           </a:xfrm>
           <a:prstGeom prst="rect">
             <a:avLst/>
@@ -8653,12 +9085,12 @@
         </p:nvSpPr>
         <p:spPr>
           <a:xfrm>
-            <a:off x="7635240" y="4498848"/>
-            <a:ext cx="3474720" cy="1143000"/>
+            <a:off x="7635240" y="4184294"/>
+            <a:ext cx="3474720" cy="1466698"/>
           </a:xfrm>
           <a:prstGeom prst="roundRect">
             <a:avLst>
-              <a:gd name="adj" fmla="val 9600"/>
+              <a:gd name="adj" fmla="val 7481"/>
             </a:avLst>
           </a:prstGeom>
           <a:solidFill>
@@ -8680,7 +9112,7 @@
         </p:nvSpPr>
         <p:spPr>
           <a:xfrm>
-            <a:off x="7799832" y="4645152"/>
+            <a:off x="7799832" y="4330598"/>
             <a:ext cx="3145536" cy="256032"/>
           </a:xfrm>
           <a:prstGeom prst="rect">
@@ -8719,8 +9151,8 @@
         </p:nvSpPr>
         <p:spPr>
           <a:xfrm>
-            <a:off x="7799832" y="4974336"/>
-            <a:ext cx="3145536" cy="576072"/>
+            <a:off x="7799832" y="4659782"/>
+            <a:ext cx="3145536" cy="899770"/>
           </a:xfrm>
           <a:prstGeom prst="rect">
             <a:avLst/>
@@ -8746,7 +9178,7 @@
                 <a:ea typeface="Aptos" pitchFamily="34" charset="-122"/>
                 <a:cs typeface="Aptos" pitchFamily="34" charset="-120"/>
               </a:rPr>
-              <a:t>Use the assignment to test whether you can explain the concept, apply it to a realistic public health situation, and.</a:t>
+              <a:t>Use the assignment to test whether you can explain the concept, apply it to a realistic public health situation, and identify what would need review before the work moves forward.</a:t>
             </a:r>
             <a:endParaRPr lang="en-US" sz="1320" dirty="0"/>
           </a:p>
@@ -9115,11 +9547,11 @@
         <p:spPr>
           <a:xfrm>
             <a:off x="7635240" y="1325880"/>
-            <a:ext cx="3474720" cy="1325880"/>
+            <a:ext cx="3474720" cy="1207008"/>
           </a:xfrm>
           <a:prstGeom prst="roundRect">
             <a:avLst>
-              <a:gd name="adj" fmla="val 8276"/>
+              <a:gd name="adj" fmla="val 9091"/>
             </a:avLst>
           </a:prstGeom>
           <a:solidFill>
@@ -9181,7 +9613,7 @@
         <p:spPr>
           <a:xfrm>
             <a:off x="7799832" y="1801368"/>
-            <a:ext cx="3145536" cy="758952"/>
+            <a:ext cx="3145536" cy="640080"/>
           </a:xfrm>
           <a:prstGeom prst="rect">
             <a:avLst/>
@@ -9221,12 +9653,12 @@
         </p:nvSpPr>
         <p:spPr>
           <a:xfrm>
-            <a:off x="7635240" y="2788920"/>
-            <a:ext cx="3474720" cy="1536192"/>
+            <a:off x="7635240" y="2670048"/>
+            <a:ext cx="3474720" cy="1377086"/>
           </a:xfrm>
           <a:prstGeom prst="roundRect">
             <a:avLst>
-              <a:gd name="adj" fmla="val 7143"/>
+              <a:gd name="adj" fmla="val 7968"/>
             </a:avLst>
           </a:prstGeom>
           <a:solidFill>
@@ -9248,7 +9680,7 @@
         </p:nvSpPr>
         <p:spPr>
           <a:xfrm>
-            <a:off x="7799832" y="2935224"/>
+            <a:off x="7799832" y="2816352"/>
             <a:ext cx="3145536" cy="256032"/>
           </a:xfrm>
           <a:prstGeom prst="rect">
@@ -9287,8 +9719,8 @@
         </p:nvSpPr>
         <p:spPr>
           <a:xfrm>
-            <a:off x="7818120" y="3300984"/>
-            <a:ext cx="3090672" cy="877824"/>
+            <a:off x="7818120" y="3182112"/>
+            <a:ext cx="3090672" cy="718718"/>
           </a:xfrm>
           <a:prstGeom prst="rect">
             <a:avLst/>
@@ -9362,12 +9794,12 @@
         </p:nvSpPr>
         <p:spPr>
           <a:xfrm>
-            <a:off x="7635240" y="4498848"/>
-            <a:ext cx="3474720" cy="1143000"/>
+            <a:off x="7635240" y="4184294"/>
+            <a:ext cx="3474720" cy="1466698"/>
           </a:xfrm>
           <a:prstGeom prst="roundRect">
             <a:avLst>
-              <a:gd name="adj" fmla="val 9600"/>
+              <a:gd name="adj" fmla="val 7481"/>
             </a:avLst>
           </a:prstGeom>
           <a:solidFill>
@@ -9389,7 +9821,7 @@
         </p:nvSpPr>
         <p:spPr>
           <a:xfrm>
-            <a:off x="7799832" y="4645152"/>
+            <a:off x="7799832" y="4330598"/>
             <a:ext cx="3145536" cy="256032"/>
           </a:xfrm>
           <a:prstGeom prst="rect">
@@ -9428,8 +9860,8 @@
         </p:nvSpPr>
         <p:spPr>
           <a:xfrm>
-            <a:off x="7799832" y="4974336"/>
-            <a:ext cx="3145536" cy="576072"/>
+            <a:off x="7799832" y="4659782"/>
+            <a:ext cx="3145536" cy="899770"/>
           </a:xfrm>
           <a:prstGeom prst="rect">
             <a:avLst/>
@@ -9455,7 +9887,7 @@
                 <a:ea typeface="Aptos" pitchFamily="34" charset="-122"/>
                 <a:cs typeface="Aptos" pitchFamily="34" charset="-120"/>
               </a:rPr>
-              <a:t>Connect the concept to public health purpose, responsible use, required safeguards, documentation, and the next action a.</a:t>
+              <a:t>Connect the concept to public health purpose, responsible use, required safeguards, documentation, and the next action a department should take.</a:t>
             </a:r>
             <a:endParaRPr lang="en-US" sz="1320" dirty="0"/>
           </a:p>
@@ -9790,11 +10222,11 @@
         <p:spPr>
           <a:xfrm>
             <a:off x="7635240" y="1325880"/>
-            <a:ext cx="3474720" cy="1325880"/>
+            <a:ext cx="3474720" cy="1207008"/>
           </a:xfrm>
           <a:prstGeom prst="roundRect">
             <a:avLst>
-              <a:gd name="adj" fmla="val 8276"/>
+              <a:gd name="adj" fmla="val 9091"/>
             </a:avLst>
           </a:prstGeom>
           <a:solidFill>
@@ -9856,7 +10288,7 @@
         <p:spPr>
           <a:xfrm>
             <a:off x="7799832" y="1801368"/>
-            <a:ext cx="3145536" cy="758952"/>
+            <a:ext cx="3145536" cy="640080"/>
           </a:xfrm>
           <a:prstGeom prst="rect">
             <a:avLst/>
@@ -9896,12 +10328,12 @@
         </p:nvSpPr>
         <p:spPr>
           <a:xfrm>
-            <a:off x="7635240" y="2788920"/>
-            <a:ext cx="3474720" cy="1536192"/>
+            <a:off x="7635240" y="2670048"/>
+            <a:ext cx="3474720" cy="1377086"/>
           </a:xfrm>
           <a:prstGeom prst="roundRect">
             <a:avLst>
-              <a:gd name="adj" fmla="val 7143"/>
+              <a:gd name="adj" fmla="val 7968"/>
             </a:avLst>
           </a:prstGeom>
           <a:solidFill>
@@ -9923,7 +10355,7 @@
         </p:nvSpPr>
         <p:spPr>
           <a:xfrm>
-            <a:off x="7799832" y="2935224"/>
+            <a:off x="7799832" y="2816352"/>
             <a:ext cx="3145536" cy="256032"/>
           </a:xfrm>
           <a:prstGeom prst="rect">
@@ -9962,8 +10394,8 @@
         </p:nvSpPr>
         <p:spPr>
           <a:xfrm>
-            <a:off x="7818120" y="3300984"/>
-            <a:ext cx="3090672" cy="877824"/>
+            <a:off x="7818120" y="3182112"/>
+            <a:ext cx="3090672" cy="718718"/>
           </a:xfrm>
           <a:prstGeom prst="rect">
             <a:avLst/>
@@ -10003,12 +10435,12 @@
         </p:nvSpPr>
         <p:spPr>
           <a:xfrm>
-            <a:off x="7635240" y="4498848"/>
-            <a:ext cx="3474720" cy="1143000"/>
+            <a:off x="7635240" y="4184294"/>
+            <a:ext cx="3474720" cy="1466698"/>
           </a:xfrm>
           <a:prstGeom prst="roundRect">
             <a:avLst>
-              <a:gd name="adj" fmla="val 9600"/>
+              <a:gd name="adj" fmla="val 7481"/>
             </a:avLst>
           </a:prstGeom>
           <a:solidFill>
@@ -10030,7 +10462,7 @@
         </p:nvSpPr>
         <p:spPr>
           <a:xfrm>
-            <a:off x="7799832" y="4645152"/>
+            <a:off x="7799832" y="4330598"/>
             <a:ext cx="3145536" cy="256032"/>
           </a:xfrm>
           <a:prstGeom prst="rect">
@@ -10069,8 +10501,8 @@
         </p:nvSpPr>
         <p:spPr>
           <a:xfrm>
-            <a:off x="7799832" y="4974336"/>
-            <a:ext cx="3145536" cy="576072"/>
+            <a:off x="7799832" y="4659782"/>
+            <a:ext cx="3145536" cy="899770"/>
           </a:xfrm>
           <a:prstGeom prst="rect">
             <a:avLst/>
@@ -10096,7 +10528,7 @@
                 <a:ea typeface="Aptos" pitchFamily="34" charset="-122"/>
                 <a:cs typeface="Aptos" pitchFamily="34" charset="-120"/>
               </a:rPr>
-              <a:t>Connect the concept to public health purpose, responsible use, required safeguards, documentation, and the next action a.</a:t>
+              <a:t>Connect the concept to public health purpose, responsible use, required safeguards, documentation, and the next action a department should take.</a:t>
             </a:r>
             <a:endParaRPr lang="en-US" sz="1320" dirty="0"/>
           </a:p>
@@ -10557,7 +10989,7 @@
                 <a:ea typeface="Aptos" pitchFamily="34" charset="-122"/>
                 <a:cs typeface="Aptos" pitchFamily="34" charset="-120"/>
               </a:rPr>
-              <a:t>Level: applied/foundational Primary track: Shared Foundational / Introductory Course Appears in tracks:.</a:t>
+              <a:t>Level: applied/foundational Primary track: Shared Foundational / Introductory Course Appears in tracks: shared-foundational, governance-and-security, program-management, public-health-executive-leadership</a:t>
             </a:r>
             <a:endParaRPr lang="en-US" sz="1320" dirty="0"/>
           </a:p>
@@ -11067,11 +11499,11 @@
         <p:spPr>
           <a:xfrm>
             <a:off x="7635240" y="1325880"/>
-            <a:ext cx="3474720" cy="1325880"/>
+            <a:ext cx="3474720" cy="1207008"/>
           </a:xfrm>
           <a:prstGeom prst="roundRect">
             <a:avLst>
-              <a:gd name="adj" fmla="val 8276"/>
+              <a:gd name="adj" fmla="val 9091"/>
             </a:avLst>
           </a:prstGeom>
           <a:solidFill>
@@ -11133,7 +11565,7 @@
         <p:spPr>
           <a:xfrm>
             <a:off x="7799832" y="1801368"/>
-            <a:ext cx="3145536" cy="758952"/>
+            <a:ext cx="3145536" cy="640080"/>
           </a:xfrm>
           <a:prstGeom prst="rect">
             <a:avLst/>
@@ -11173,12 +11605,12 @@
         </p:nvSpPr>
         <p:spPr>
           <a:xfrm>
-            <a:off x="7635240" y="2788920"/>
-            <a:ext cx="3474720" cy="1536192"/>
+            <a:off x="7635240" y="2670048"/>
+            <a:ext cx="3474720" cy="1377086"/>
           </a:xfrm>
           <a:prstGeom prst="roundRect">
             <a:avLst>
-              <a:gd name="adj" fmla="val 7143"/>
+              <a:gd name="adj" fmla="val 7968"/>
             </a:avLst>
           </a:prstGeom>
           <a:solidFill>
@@ -11200,7 +11632,7 @@
         </p:nvSpPr>
         <p:spPr>
           <a:xfrm>
-            <a:off x="7799832" y="2935224"/>
+            <a:off x="7799832" y="2816352"/>
             <a:ext cx="3145536" cy="256032"/>
           </a:xfrm>
           <a:prstGeom prst="rect">
@@ -11239,8 +11671,8 @@
         </p:nvSpPr>
         <p:spPr>
           <a:xfrm>
-            <a:off x="7818120" y="3300984"/>
-            <a:ext cx="3090672" cy="877824"/>
+            <a:off x="7818120" y="3182112"/>
+            <a:ext cx="3090672" cy="718718"/>
           </a:xfrm>
           <a:prstGeom prst="rect">
             <a:avLst/>
@@ -11314,12 +11746,12 @@
         </p:nvSpPr>
         <p:spPr>
           <a:xfrm>
-            <a:off x="7635240" y="4498848"/>
-            <a:ext cx="3474720" cy="1143000"/>
+            <a:off x="7635240" y="4184294"/>
+            <a:ext cx="3474720" cy="1466698"/>
           </a:xfrm>
           <a:prstGeom prst="roundRect">
             <a:avLst>
-              <a:gd name="adj" fmla="val 9600"/>
+              <a:gd name="adj" fmla="val 7481"/>
             </a:avLst>
           </a:prstGeom>
           <a:solidFill>
@@ -11341,7 +11773,7 @@
         </p:nvSpPr>
         <p:spPr>
           <a:xfrm>
-            <a:off x="7799832" y="4645152"/>
+            <a:off x="7799832" y="4330598"/>
             <a:ext cx="3145536" cy="256032"/>
           </a:xfrm>
           <a:prstGeom prst="rect">
@@ -11380,8 +11812,8 @@
         </p:nvSpPr>
         <p:spPr>
           <a:xfrm>
-            <a:off x="7799832" y="4974336"/>
-            <a:ext cx="3145536" cy="576072"/>
+            <a:off x="7799832" y="4659782"/>
+            <a:ext cx="3145536" cy="899770"/>
           </a:xfrm>
           <a:prstGeom prst="rect">
             <a:avLst/>
@@ -11407,7 +11839,7 @@
                 <a:ea typeface="Aptos" pitchFamily="34" charset="-122"/>
                 <a:cs typeface="Aptos" pitchFamily="34" charset="-120"/>
               </a:rPr>
-              <a:t>Use the assignment to test whether you can explain the concept, apply it to a realistic public health situation, and.</a:t>
+              <a:t>Use the assignment to test whether you can explain the concept, apply it to a realistic public health situation, and identify what would need review before the work moves forward.</a:t>
             </a:r>
             <a:endParaRPr lang="en-US" sz="1320" dirty="0"/>
           </a:p>
@@ -11776,11 +12208,11 @@
         <p:spPr>
           <a:xfrm>
             <a:off x="7635240" y="1325880"/>
-            <a:ext cx="3474720" cy="1325880"/>
+            <a:ext cx="3474720" cy="1207008"/>
           </a:xfrm>
           <a:prstGeom prst="roundRect">
             <a:avLst>
-              <a:gd name="adj" fmla="val 8276"/>
+              <a:gd name="adj" fmla="val 9091"/>
             </a:avLst>
           </a:prstGeom>
           <a:solidFill>
@@ -11842,7 +12274,7 @@
         <p:spPr>
           <a:xfrm>
             <a:off x="7799832" y="1801368"/>
-            <a:ext cx="3145536" cy="758952"/>
+            <a:ext cx="3145536" cy="640080"/>
           </a:xfrm>
           <a:prstGeom prst="rect">
             <a:avLst/>
@@ -11882,12 +12314,12 @@
         </p:nvSpPr>
         <p:spPr>
           <a:xfrm>
-            <a:off x="7635240" y="2788920"/>
-            <a:ext cx="3474720" cy="1536192"/>
+            <a:off x="7635240" y="2670048"/>
+            <a:ext cx="3474720" cy="1377086"/>
           </a:xfrm>
           <a:prstGeom prst="roundRect">
             <a:avLst>
-              <a:gd name="adj" fmla="val 7143"/>
+              <a:gd name="adj" fmla="val 7968"/>
             </a:avLst>
           </a:prstGeom>
           <a:solidFill>
@@ -11909,7 +12341,7 @@
         </p:nvSpPr>
         <p:spPr>
           <a:xfrm>
-            <a:off x="7799832" y="2935224"/>
+            <a:off x="7799832" y="2816352"/>
             <a:ext cx="3145536" cy="256032"/>
           </a:xfrm>
           <a:prstGeom prst="rect">
@@ -11948,8 +12380,8 @@
         </p:nvSpPr>
         <p:spPr>
           <a:xfrm>
-            <a:off x="7818120" y="3300984"/>
-            <a:ext cx="3090672" cy="877824"/>
+            <a:off x="7818120" y="3182112"/>
+            <a:ext cx="3090672" cy="718718"/>
           </a:xfrm>
           <a:prstGeom prst="rect">
             <a:avLst/>
@@ -12023,12 +12455,12 @@
         </p:nvSpPr>
         <p:spPr>
           <a:xfrm>
-            <a:off x="7635240" y="4498848"/>
-            <a:ext cx="3474720" cy="1143000"/>
+            <a:off x="7635240" y="4184294"/>
+            <a:ext cx="3474720" cy="1466698"/>
           </a:xfrm>
           <a:prstGeom prst="roundRect">
             <a:avLst>
-              <a:gd name="adj" fmla="val 9600"/>
+              <a:gd name="adj" fmla="val 7481"/>
             </a:avLst>
           </a:prstGeom>
           <a:solidFill>
@@ -12050,7 +12482,7 @@
         </p:nvSpPr>
         <p:spPr>
           <a:xfrm>
-            <a:off x="7799832" y="4645152"/>
+            <a:off x="7799832" y="4330598"/>
             <a:ext cx="3145536" cy="256032"/>
           </a:xfrm>
           <a:prstGeom prst="rect">
@@ -12089,8 +12521,8 @@
         </p:nvSpPr>
         <p:spPr>
           <a:xfrm>
-            <a:off x="7799832" y="4974336"/>
-            <a:ext cx="3145536" cy="576072"/>
+            <a:off x="7799832" y="4659782"/>
+            <a:ext cx="3145536" cy="899770"/>
           </a:xfrm>
           <a:prstGeom prst="rect">
             <a:avLst/>
@@ -12116,7 +12548,7 @@
                 <a:ea typeface="Aptos" pitchFamily="34" charset="-122"/>
                 <a:cs typeface="Aptos" pitchFamily="34" charset="-120"/>
               </a:rPr>
-              <a:t>Use the assignment to test whether you can explain the concept, apply it to a realistic public health situation, and.</a:t>
+              <a:t>Use the assignment to test whether you can explain the concept, apply it to a realistic public health situation, and identify what would need review before the work moves forward.</a:t>
             </a:r>
             <a:endParaRPr lang="en-US" sz="1320" dirty="0"/>
           </a:p>
@@ -12485,11 +12917,11 @@
         <p:spPr>
           <a:xfrm>
             <a:off x="7635240" y="1325880"/>
-            <a:ext cx="3474720" cy="1325880"/>
+            <a:ext cx="3474720" cy="1207008"/>
           </a:xfrm>
           <a:prstGeom prst="roundRect">
             <a:avLst>
-              <a:gd name="adj" fmla="val 8276"/>
+              <a:gd name="adj" fmla="val 9091"/>
             </a:avLst>
           </a:prstGeom>
           <a:solidFill>
@@ -12551,7 +12983,7 @@
         <p:spPr>
           <a:xfrm>
             <a:off x="7799832" y="1801368"/>
-            <a:ext cx="3145536" cy="758952"/>
+            <a:ext cx="3145536" cy="640080"/>
           </a:xfrm>
           <a:prstGeom prst="rect">
             <a:avLst/>
@@ -12591,12 +13023,12 @@
         </p:nvSpPr>
         <p:spPr>
           <a:xfrm>
-            <a:off x="7635240" y="2788920"/>
-            <a:ext cx="3474720" cy="1536192"/>
+            <a:off x="7635240" y="2670048"/>
+            <a:ext cx="3474720" cy="1377086"/>
           </a:xfrm>
           <a:prstGeom prst="roundRect">
             <a:avLst>
-              <a:gd name="adj" fmla="val 7143"/>
+              <a:gd name="adj" fmla="val 7968"/>
             </a:avLst>
           </a:prstGeom>
           <a:solidFill>
@@ -12618,7 +13050,7 @@
         </p:nvSpPr>
         <p:spPr>
           <a:xfrm>
-            <a:off x="7799832" y="2935224"/>
+            <a:off x="7799832" y="2816352"/>
             <a:ext cx="3145536" cy="256032"/>
           </a:xfrm>
           <a:prstGeom prst="rect">
@@ -12657,8 +13089,8 @@
         </p:nvSpPr>
         <p:spPr>
           <a:xfrm>
-            <a:off x="7818120" y="3300984"/>
-            <a:ext cx="3090672" cy="877824"/>
+            <a:off x="7818120" y="3182112"/>
+            <a:ext cx="3090672" cy="718718"/>
           </a:xfrm>
           <a:prstGeom prst="rect">
             <a:avLst/>
@@ -12732,12 +13164,12 @@
         </p:nvSpPr>
         <p:spPr>
           <a:xfrm>
-            <a:off x="7635240" y="4498848"/>
-            <a:ext cx="3474720" cy="1143000"/>
+            <a:off x="7635240" y="4184294"/>
+            <a:ext cx="3474720" cy="1466698"/>
           </a:xfrm>
           <a:prstGeom prst="roundRect">
             <a:avLst>
-              <a:gd name="adj" fmla="val 9600"/>
+              <a:gd name="adj" fmla="val 7481"/>
             </a:avLst>
           </a:prstGeom>
           <a:solidFill>
@@ -12759,7 +13191,7 @@
         </p:nvSpPr>
         <p:spPr>
           <a:xfrm>
-            <a:off x="7799832" y="4645152"/>
+            <a:off x="7799832" y="4330598"/>
             <a:ext cx="3145536" cy="256032"/>
           </a:xfrm>
           <a:prstGeom prst="rect">
@@ -12798,8 +13230,8 @@
         </p:nvSpPr>
         <p:spPr>
           <a:xfrm>
-            <a:off x="7799832" y="4974336"/>
-            <a:ext cx="3145536" cy="576072"/>
+            <a:off x="7799832" y="4659782"/>
+            <a:ext cx="3145536" cy="899770"/>
           </a:xfrm>
           <a:prstGeom prst="rect">
             <a:avLst/>
@@ -12825,7 +13257,7 @@
                 <a:ea typeface="Aptos" pitchFamily="34" charset="-122"/>
                 <a:cs typeface="Aptos" pitchFamily="34" charset="-120"/>
               </a:rPr>
-              <a:t>Connect the concept to public health purpose, responsible use, required safeguards, documentation, and the next action a.</a:t>
+              <a:t>Connect the concept to public health purpose, responsible use, required safeguards, documentation, and the next action a department should take.</a:t>
             </a:r>
             <a:endParaRPr lang="en-US" sz="1320" dirty="0"/>
           </a:p>
@@ -13160,11 +13592,11 @@
         <p:spPr>
           <a:xfrm>
             <a:off x="7635240" y="1325880"/>
-            <a:ext cx="3474720" cy="1325880"/>
+            <a:ext cx="3474720" cy="1207008"/>
           </a:xfrm>
           <a:prstGeom prst="roundRect">
             <a:avLst>
-              <a:gd name="adj" fmla="val 8276"/>
+              <a:gd name="adj" fmla="val 9091"/>
             </a:avLst>
           </a:prstGeom>
           <a:solidFill>
@@ -13226,7 +13658,7 @@
         <p:spPr>
           <a:xfrm>
             <a:off x="7799832" y="1801368"/>
-            <a:ext cx="3145536" cy="758952"/>
+            <a:ext cx="3145536" cy="640080"/>
           </a:xfrm>
           <a:prstGeom prst="rect">
             <a:avLst/>
@@ -13252,7 +13684,7 @@
                 <a:ea typeface="Aptos" pitchFamily="34" charset="-122"/>
                 <a:cs typeface="Aptos" pitchFamily="34" charset="-120"/>
               </a:rPr>
-              <a:t>Relevant public health program SOPs, data governance documentation, and implementation plans</a:t>
+              <a:t>Relevant public health program SOPs, data governance documentation, and implementation.</a:t>
             </a:r>
             <a:endParaRPr lang="en-US" sz="1320" dirty="0"/>
           </a:p>
@@ -13266,12 +13698,12 @@
         </p:nvSpPr>
         <p:spPr>
           <a:xfrm>
-            <a:off x="7635240" y="2788920"/>
-            <a:ext cx="3474720" cy="1536192"/>
+            <a:off x="7635240" y="2670048"/>
+            <a:ext cx="3474720" cy="1377086"/>
           </a:xfrm>
           <a:prstGeom prst="roundRect">
             <a:avLst>
-              <a:gd name="adj" fmla="val 7143"/>
+              <a:gd name="adj" fmla="val 7968"/>
             </a:avLst>
           </a:prstGeom>
           <a:solidFill>
@@ -13293,7 +13725,7 @@
         </p:nvSpPr>
         <p:spPr>
           <a:xfrm>
-            <a:off x="7799832" y="2935224"/>
+            <a:off x="7799832" y="2816352"/>
             <a:ext cx="3145536" cy="256032"/>
           </a:xfrm>
           <a:prstGeom prst="rect">
@@ -13332,8 +13764,8 @@
         </p:nvSpPr>
         <p:spPr>
           <a:xfrm>
-            <a:off x="7818120" y="3300984"/>
-            <a:ext cx="3090672" cy="877824"/>
+            <a:off x="7818120" y="3182112"/>
+            <a:ext cx="3090672" cy="718718"/>
           </a:xfrm>
           <a:prstGeom prst="rect">
             <a:avLst/>
@@ -13373,12 +13805,12 @@
         </p:nvSpPr>
         <p:spPr>
           <a:xfrm>
-            <a:off x="7635240" y="4498848"/>
-            <a:ext cx="3474720" cy="1143000"/>
+            <a:off x="7635240" y="4184294"/>
+            <a:ext cx="3474720" cy="1466698"/>
           </a:xfrm>
           <a:prstGeom prst="roundRect">
             <a:avLst>
-              <a:gd name="adj" fmla="val 9600"/>
+              <a:gd name="adj" fmla="val 7481"/>
             </a:avLst>
           </a:prstGeom>
           <a:solidFill>
@@ -13400,7 +13832,7 @@
         </p:nvSpPr>
         <p:spPr>
           <a:xfrm>
-            <a:off x="7799832" y="4645152"/>
+            <a:off x="7799832" y="4330598"/>
             <a:ext cx="3145536" cy="256032"/>
           </a:xfrm>
           <a:prstGeom prst="rect">
@@ -13439,8 +13871,8 @@
         </p:nvSpPr>
         <p:spPr>
           <a:xfrm>
-            <a:off x="7799832" y="4974336"/>
-            <a:ext cx="3145536" cy="576072"/>
+            <a:off x="7799832" y="4659782"/>
+            <a:ext cx="3145536" cy="899770"/>
           </a:xfrm>
           <a:prstGeom prst="rect">
             <a:avLst/>
@@ -13466,7 +13898,7 @@
                 <a:ea typeface="Aptos" pitchFamily="34" charset="-122"/>
                 <a:cs typeface="Aptos" pitchFamily="34" charset="-120"/>
               </a:rPr>
-              <a:t>Connect the concept to public health purpose, responsible use, required safeguards, documentation, and the next action a.</a:t>
+              <a:t>Connect the concept to public health purpose, responsible use, required safeguards, documentation, and the next action a department should take.</a:t>
             </a:r>
             <a:endParaRPr lang="en-US" sz="1320" dirty="0"/>
           </a:p>
@@ -13944,7 +14376,7 @@
                 <a:ea typeface="Aptos" pitchFamily="34" charset="-122"/>
                 <a:cs typeface="Aptos" pitchFamily="34" charset="-120"/>
               </a:rPr>
-              <a:t>Use the related plays to identify decisions, participants, timing, approvals, and documentation needed for responsible.</a:t>
+              <a:t>Use the related plays to identify decisions, participants, timing, approvals, and documentation needed for responsible implementation.</a:t>
             </a:r>
             <a:endParaRPr lang="en-US" sz="1320" dirty="0"/>
           </a:p>
@@ -14563,7 +14995,7 @@
                 <a:ea typeface="Aptos" pitchFamily="34" charset="-122"/>
                 <a:cs typeface="Aptos" pitchFamily="34" charset="-120"/>
               </a:rPr>
-              <a:t>Use linked tools when your department needs a structured worksheet, template, checklist, review process, or.</a:t>
+              <a:t>Use linked tools when your department needs a structured worksheet, template, checklist, review process, or documentation artifact.</a:t>
             </a:r>
             <a:endParaRPr lang="en-US" sz="1320" dirty="0"/>
           </a:p>
@@ -15073,11 +15505,11 @@
         <p:spPr>
           <a:xfrm>
             <a:off x="7635240" y="1325880"/>
-            <a:ext cx="3474720" cy="1325880"/>
+            <a:ext cx="3474720" cy="1255471"/>
           </a:xfrm>
           <a:prstGeom prst="roundRect">
             <a:avLst>
-              <a:gd name="adj" fmla="val 8276"/>
+              <a:gd name="adj" fmla="val 8740"/>
             </a:avLst>
           </a:prstGeom>
           <a:solidFill>
@@ -15139,7 +15571,7 @@
         <p:spPr>
           <a:xfrm>
             <a:off x="7799832" y="1801368"/>
-            <a:ext cx="3145536" cy="758952"/>
+            <a:ext cx="3145536" cy="688543"/>
           </a:xfrm>
           <a:prstGeom prst="rect">
             <a:avLst/>
@@ -15179,12 +15611,12 @@
         </p:nvSpPr>
         <p:spPr>
           <a:xfrm>
-            <a:off x="7635240" y="2788920"/>
-            <a:ext cx="3474720" cy="1536192"/>
+            <a:off x="7635240" y="2718511"/>
+            <a:ext cx="3474720" cy="1328623"/>
           </a:xfrm>
           <a:prstGeom prst="roundRect">
             <a:avLst>
-              <a:gd name="adj" fmla="val 7143"/>
+              <a:gd name="adj" fmla="val 8259"/>
             </a:avLst>
           </a:prstGeom>
           <a:solidFill>
@@ -15206,7 +15638,7 @@
         </p:nvSpPr>
         <p:spPr>
           <a:xfrm>
-            <a:off x="7799832" y="2935224"/>
+            <a:off x="7799832" y="2864815"/>
             <a:ext cx="3145536" cy="256032"/>
           </a:xfrm>
           <a:prstGeom prst="rect">
@@ -15245,8 +15677,8 @@
         </p:nvSpPr>
         <p:spPr>
           <a:xfrm>
-            <a:off x="7818120" y="3300984"/>
-            <a:ext cx="3090672" cy="877824"/>
+            <a:off x="7818120" y="3230575"/>
+            <a:ext cx="3090672" cy="670255"/>
           </a:xfrm>
           <a:prstGeom prst="rect">
             <a:avLst/>
@@ -15320,12 +15752,12 @@
         </p:nvSpPr>
         <p:spPr>
           <a:xfrm>
-            <a:off x="7635240" y="4498848"/>
-            <a:ext cx="3474720" cy="1143000"/>
+            <a:off x="7635240" y="4184294"/>
+            <a:ext cx="3474720" cy="1466698"/>
           </a:xfrm>
           <a:prstGeom prst="roundRect">
             <a:avLst>
-              <a:gd name="adj" fmla="val 9600"/>
+              <a:gd name="adj" fmla="val 7481"/>
             </a:avLst>
           </a:prstGeom>
           <a:solidFill>
@@ -15347,7 +15779,7 @@
         </p:nvSpPr>
         <p:spPr>
           <a:xfrm>
-            <a:off x="7799832" y="4645152"/>
+            <a:off x="7799832" y="4330598"/>
             <a:ext cx="3145536" cy="256032"/>
           </a:xfrm>
           <a:prstGeom prst="rect">
@@ -15386,8 +15818,8 @@
         </p:nvSpPr>
         <p:spPr>
           <a:xfrm>
-            <a:off x="7799832" y="4974336"/>
-            <a:ext cx="3145536" cy="576072"/>
+            <a:off x="7799832" y="4659782"/>
+            <a:ext cx="3145536" cy="899770"/>
           </a:xfrm>
           <a:prstGeom prst="rect">
             <a:avLst/>
@@ -15413,7 +15845,7 @@
                 <a:ea typeface="Aptos" pitchFamily="34" charset="-122"/>
                 <a:cs typeface="Aptos" pitchFamily="34" charset="-120"/>
               </a:rPr>
-              <a:t>Use the assignment to test whether you can explain the concept, apply it to a realistic public health situation, and.</a:t>
+              <a:t>Use the assignment to test whether you can explain the concept, apply it to a realistic public health situation, and identify what would need review before the work moves forward.</a:t>
             </a:r>
             <a:endParaRPr lang="en-US" sz="1320" dirty="0"/>
           </a:p>
@@ -15782,11 +16214,11 @@
         <p:spPr>
           <a:xfrm>
             <a:off x="7635240" y="1325880"/>
-            <a:ext cx="3474720" cy="1325880"/>
+            <a:ext cx="3474720" cy="1255471"/>
           </a:xfrm>
           <a:prstGeom prst="roundRect">
             <a:avLst>
-              <a:gd name="adj" fmla="val 8276"/>
+              <a:gd name="adj" fmla="val 8740"/>
             </a:avLst>
           </a:prstGeom>
           <a:solidFill>
@@ -15848,7 +16280,7 @@
         <p:spPr>
           <a:xfrm>
             <a:off x="7799832" y="1801368"/>
-            <a:ext cx="3145536" cy="758952"/>
+            <a:ext cx="3145536" cy="688543"/>
           </a:xfrm>
           <a:prstGeom prst="rect">
             <a:avLst/>
@@ -15888,12 +16320,12 @@
         </p:nvSpPr>
         <p:spPr>
           <a:xfrm>
-            <a:off x="7635240" y="2788920"/>
-            <a:ext cx="3474720" cy="1536192"/>
+            <a:off x="7635240" y="2718511"/>
+            <a:ext cx="3474720" cy="1328623"/>
           </a:xfrm>
           <a:prstGeom prst="roundRect">
             <a:avLst>
-              <a:gd name="adj" fmla="val 7143"/>
+              <a:gd name="adj" fmla="val 8259"/>
             </a:avLst>
           </a:prstGeom>
           <a:solidFill>
@@ -15915,7 +16347,7 @@
         </p:nvSpPr>
         <p:spPr>
           <a:xfrm>
-            <a:off x="7799832" y="2935224"/>
+            <a:off x="7799832" y="2864815"/>
             <a:ext cx="3145536" cy="256032"/>
           </a:xfrm>
           <a:prstGeom prst="rect">
@@ -15954,8 +16386,8 @@
         </p:nvSpPr>
         <p:spPr>
           <a:xfrm>
-            <a:off x="7818120" y="3300984"/>
-            <a:ext cx="3090672" cy="877824"/>
+            <a:off x="7818120" y="3230575"/>
+            <a:ext cx="3090672" cy="670255"/>
           </a:xfrm>
           <a:prstGeom prst="rect">
             <a:avLst/>
@@ -16029,12 +16461,12 @@
         </p:nvSpPr>
         <p:spPr>
           <a:xfrm>
-            <a:off x="7635240" y="4498848"/>
-            <a:ext cx="3474720" cy="1143000"/>
+            <a:off x="7635240" y="4184294"/>
+            <a:ext cx="3474720" cy="1466698"/>
           </a:xfrm>
           <a:prstGeom prst="roundRect">
             <a:avLst>
-              <a:gd name="adj" fmla="val 9600"/>
+              <a:gd name="adj" fmla="val 7481"/>
             </a:avLst>
           </a:prstGeom>
           <a:solidFill>
@@ -16056,7 +16488,7 @@
         </p:nvSpPr>
         <p:spPr>
           <a:xfrm>
-            <a:off x="7799832" y="4645152"/>
+            <a:off x="7799832" y="4330598"/>
             <a:ext cx="3145536" cy="256032"/>
           </a:xfrm>
           <a:prstGeom prst="rect">
@@ -16095,8 +16527,8 @@
         </p:nvSpPr>
         <p:spPr>
           <a:xfrm>
-            <a:off x="7799832" y="4974336"/>
-            <a:ext cx="3145536" cy="576072"/>
+            <a:off x="7799832" y="4659782"/>
+            <a:ext cx="3145536" cy="899770"/>
           </a:xfrm>
           <a:prstGeom prst="rect">
             <a:avLst/>
@@ -16122,7 +16554,7 @@
                 <a:ea typeface="Aptos" pitchFamily="34" charset="-122"/>
                 <a:cs typeface="Aptos" pitchFamily="34" charset="-120"/>
               </a:rPr>
-              <a:t>Connect the concept to public health purpose, responsible use, required safeguards, documentation, and the next action a.</a:t>
+              <a:t>Connect the concept to public health purpose, responsible use, required safeguards, documentation, and the next action a department should take.</a:t>
             </a:r>
             <a:endParaRPr lang="en-US" sz="1320" dirty="0"/>
           </a:p>
@@ -16491,11 +16923,11 @@
         <p:spPr>
           <a:xfrm>
             <a:off x="7635240" y="1325880"/>
-            <a:ext cx="3474720" cy="1325880"/>
+            <a:ext cx="3474720" cy="1207008"/>
           </a:xfrm>
           <a:prstGeom prst="roundRect">
             <a:avLst>
-              <a:gd name="adj" fmla="val 8276"/>
+              <a:gd name="adj" fmla="val 9091"/>
             </a:avLst>
           </a:prstGeom>
           <a:solidFill>
@@ -16557,7 +16989,7 @@
         <p:spPr>
           <a:xfrm>
             <a:off x="7799832" y="1801368"/>
-            <a:ext cx="3145536" cy="758952"/>
+            <a:ext cx="3145536" cy="640080"/>
           </a:xfrm>
           <a:prstGeom prst="rect">
             <a:avLst/>
@@ -16583,7 +17015,7 @@
                 <a:ea typeface="Aptos" pitchFamily="34" charset="-122"/>
                 <a:cs typeface="Aptos" pitchFamily="34" charset="-120"/>
               </a:rPr>
-              <a:t>This module provides national-level training guidance for public health agencies and partners.</a:t>
+              <a:t>This module provides national-level training guidance for public health agencies and.</a:t>
             </a:r>
             <a:endParaRPr lang="en-US" sz="1320" dirty="0"/>
           </a:p>
@@ -16597,12 +17029,12 @@
         </p:nvSpPr>
         <p:spPr>
           <a:xfrm>
-            <a:off x="7635240" y="2788920"/>
-            <a:ext cx="3474720" cy="1536192"/>
+            <a:off x="7635240" y="2670048"/>
+            <a:ext cx="3474720" cy="1377086"/>
           </a:xfrm>
           <a:prstGeom prst="roundRect">
             <a:avLst>
-              <a:gd name="adj" fmla="val 7143"/>
+              <a:gd name="adj" fmla="val 7968"/>
             </a:avLst>
           </a:prstGeom>
           <a:solidFill>
@@ -16624,8 +17056,8 @@
         </p:nvSpPr>
         <p:spPr>
           <a:xfrm>
-            <a:off x="7799832" y="2935224"/>
-            <a:ext cx="3145536" cy="256032"/>
+            <a:off x="7799832" y="2798064"/>
+            <a:ext cx="3145536" cy="237744"/>
           </a:xfrm>
           <a:prstGeom prst="rect">
             <a:avLst/>
@@ -16641,7 +17073,7 @@
               <a:buNone/>
             </a:pPr>
             <a:r>
-              <a:rPr lang="en-US" sz="1300" b="1" dirty="0">
+              <a:rPr lang="en-US" sz="1250" b="1" dirty="0">
                 <a:solidFill>
                   <a:srgbClr val="0068B7"/>
                 </a:solidFill>
@@ -16649,101 +17081,317 @@
                 <a:ea typeface="Aptos" pitchFamily="34" charset="-122"/>
                 <a:cs typeface="Aptos" pitchFamily="34" charset="-120"/>
               </a:rPr>
-              <a:t>Concept checkpoints</a:t>
-            </a:r>
-            <a:endParaRPr lang="en-US" sz="1300" dirty="0"/>
-          </a:p>
-        </p:txBody>
-      </p:sp>
-      <p:sp>
-        <p:nvSpPr>
-          <p:cNvPr id="15" name="Text 13"/>
-          <p:cNvSpPr/>
-          <p:nvPr/>
-        </p:nvSpPr>
-        <p:spPr>
-          <a:xfrm>
-            <a:off x="7818120" y="3300984"/>
-            <a:ext cx="3090672" cy="877824"/>
-          </a:xfrm>
-          <a:prstGeom prst="rect">
-            <a:avLst/>
-          </a:prstGeom>
-          <a:noFill/>
-          <a:ln/>
-        </p:spPr>
-        <p:txBody>
-          <a:bodyPr wrap="square" lIns="508" tIns="508" rIns="508" bIns="508" rtlCol="0" anchor="t">
+              <a:t>Governance pathway</a:t>
+            </a:r>
+            <a:endParaRPr lang="en-US" sz="1250" dirty="0"/>
+          </a:p>
+        </p:txBody>
+      </p:sp>
+      <p:sp>
+        <p:nvSpPr>
+          <p:cNvPr id="15" name="Shape 13"/>
+          <p:cNvSpPr/>
+          <p:nvPr/>
+        </p:nvSpPr>
+        <p:spPr>
+          <a:xfrm>
+            <a:off x="8763000" y="3351276"/>
+            <a:ext cx="164592" cy="0"/>
+          </a:xfrm>
+          <a:prstGeom prst="line">
+            <a:avLst/>
+          </a:prstGeom>
+          <a:noFill/>
+          <a:ln w="15240">
+            <a:solidFill>
+              <a:srgbClr val="8ABBD8"/>
+            </a:solidFill>
+            <a:prstDash val="solid"/>
+          </a:ln>
+        </p:spPr>
+      </p:sp>
+      <p:sp>
+        <p:nvSpPr>
+          <p:cNvPr id="16" name="Shape 14"/>
+          <p:cNvSpPr/>
+          <p:nvPr/>
+        </p:nvSpPr>
+        <p:spPr>
+          <a:xfrm>
+            <a:off x="7872984" y="3200400"/>
+            <a:ext cx="890016" cy="301752"/>
+          </a:xfrm>
+          <a:prstGeom prst="roundRect">
+            <a:avLst>
+              <a:gd name="adj" fmla="val 24242"/>
+            </a:avLst>
+          </a:prstGeom>
+          <a:solidFill>
+            <a:srgbClr val="0068B7"/>
+          </a:solidFill>
+          <a:ln w="12700">
+            <a:solidFill>
+              <a:srgbClr val="0068B7"/>
+            </a:solidFill>
+            <a:prstDash val="solid"/>
+          </a:ln>
+        </p:spPr>
+      </p:sp>
+      <p:sp>
+        <p:nvSpPr>
+          <p:cNvPr id="17" name="Text 15"/>
+          <p:cNvSpPr/>
+          <p:nvPr/>
+        </p:nvSpPr>
+        <p:spPr>
+          <a:xfrm>
+            <a:off x="7909560" y="3273552"/>
+            <a:ext cx="816864" cy="146304"/>
+          </a:xfrm>
+          <a:prstGeom prst="rect">
+            <a:avLst/>
+          </a:prstGeom>
+          <a:noFill/>
+          <a:ln/>
+        </p:spPr>
+        <p:txBody>
+          <a:bodyPr wrap="square" lIns="0" tIns="0" rIns="0" bIns="0" rtlCol="0" anchor="ctr">
             <a:normAutofit/>
           </a:bodyPr>
           <a:lstStyle/>
           <a:p>
-            <a:pPr indent="0" marL="0">
-              <a:buNone/>
-            </a:pPr>
-            <a:r>
-              <a:rPr lang="en-US" sz="1220" dirty="0">
-                <a:solidFill>
-                  <a:srgbClr val="17364A"/>
-                </a:solidFill>
-                <a:latin typeface="Aptos" pitchFamily="34" charset="0"/>
-                <a:ea typeface="Aptos" pitchFamily="34" charset="-122"/>
-                <a:cs typeface="Aptos" pitchFamily="34" charset="-120"/>
-              </a:rPr>
-              <a:t>It is not legal advice and does not replace review by agency legal.</a:t>
-            </a:r>
-            <a:endParaRPr lang="en-US" sz="1220" dirty="0"/>
-          </a:p>
-          <a:p>
-            <a:pPr indent="0" marL="0">
-              <a:buNone/>
-            </a:pPr>
-            <a:r>
-              <a:rPr lang="en-US" sz="1220" dirty="0">
-                <a:solidFill>
-                  <a:srgbClr val="17364A"/>
-                </a:solidFill>
-                <a:latin typeface="Aptos" pitchFamily="34" charset="0"/>
-                <a:ea typeface="Aptos" pitchFamily="34" charset="-122"/>
-                <a:cs typeface="Aptos" pitchFamily="34" charset="-120"/>
-              </a:rPr>
-              <a:t>Requirements may vary by state, locality, territory, Tribe,.</a:t>
-            </a:r>
-            <a:endParaRPr lang="en-US" sz="1220" dirty="0"/>
-          </a:p>
-          <a:p>
-            <a:pPr indent="0" marL="0">
-              <a:buNone/>
-            </a:pPr>
-            <a:r>
-              <a:rPr lang="en-US" sz="1220" dirty="0">
-                <a:solidFill>
-                  <a:srgbClr val="17364A"/>
-                </a:solidFill>
-                <a:latin typeface="Aptos" pitchFamily="34" charset="0"/>
-                <a:ea typeface="Aptos" pitchFamily="34" charset="-122"/>
-                <a:cs typeface="Aptos" pitchFamily="34" charset="-120"/>
-              </a:rPr>
-              <a:t>Learners should use this module to identify the issues that.</a:t>
-            </a:r>
-            <a:endParaRPr lang="en-US" sz="1220" dirty="0"/>
-          </a:p>
-        </p:txBody>
-      </p:sp>
-      <p:sp>
-        <p:nvSpPr>
-          <p:cNvPr id="16" name="Shape 14"/>
-          <p:cNvSpPr/>
-          <p:nvPr/>
-        </p:nvSpPr>
-        <p:spPr>
-          <a:xfrm>
-            <a:off x="7635240" y="4498848"/>
-            <a:ext cx="3474720" cy="1143000"/>
+            <a:pPr algn="ctr" indent="0" marL="0">
+              <a:buNone/>
+            </a:pPr>
+            <a:r>
+              <a:rPr lang="en-US" sz="880" b="1" dirty="0">
+                <a:solidFill>
+                  <a:srgbClr val="FFFFFF"/>
+                </a:solidFill>
+                <a:latin typeface="Aptos" pitchFamily="34" charset="0"/>
+                <a:ea typeface="Aptos" pitchFamily="34" charset="-122"/>
+                <a:cs typeface="Aptos" pitchFamily="34" charset="-120"/>
+              </a:rPr>
+              <a:t>Submit</a:t>
+            </a:r>
+            <a:endParaRPr lang="en-US" sz="880" dirty="0"/>
+          </a:p>
+        </p:txBody>
+      </p:sp>
+      <p:sp>
+        <p:nvSpPr>
+          <p:cNvPr id="18" name="Shape 16"/>
+          <p:cNvSpPr/>
+          <p:nvPr/>
+        </p:nvSpPr>
+        <p:spPr>
+          <a:xfrm>
+            <a:off x="9817608" y="3351276"/>
+            <a:ext cx="164592" cy="0"/>
+          </a:xfrm>
+          <a:prstGeom prst="line">
+            <a:avLst/>
+          </a:prstGeom>
+          <a:noFill/>
+          <a:ln w="15240">
+            <a:solidFill>
+              <a:srgbClr val="8ABBD8"/>
+            </a:solidFill>
+            <a:prstDash val="solid"/>
+          </a:ln>
+        </p:spPr>
+      </p:sp>
+      <p:sp>
+        <p:nvSpPr>
+          <p:cNvPr id="19" name="Shape 17"/>
+          <p:cNvSpPr/>
+          <p:nvPr/>
+        </p:nvSpPr>
+        <p:spPr>
+          <a:xfrm>
+            <a:off x="8927592" y="3200400"/>
+            <a:ext cx="890016" cy="301752"/>
           </a:xfrm>
           <a:prstGeom prst="roundRect">
             <a:avLst>
-              <a:gd name="adj" fmla="val 9600"/>
+              <a:gd name="adj" fmla="val 24242"/>
+            </a:avLst>
+          </a:prstGeom>
+          <a:solidFill>
+            <a:srgbClr val="2F8A28"/>
+          </a:solidFill>
+          <a:ln w="12700">
+            <a:solidFill>
+              <a:srgbClr val="2F8A28"/>
+            </a:solidFill>
+            <a:prstDash val="solid"/>
+          </a:ln>
+        </p:spPr>
+      </p:sp>
+      <p:sp>
+        <p:nvSpPr>
+          <p:cNvPr id="20" name="Text 18"/>
+          <p:cNvSpPr/>
+          <p:nvPr/>
+        </p:nvSpPr>
+        <p:spPr>
+          <a:xfrm>
+            <a:off x="8964168" y="3273552"/>
+            <a:ext cx="816864" cy="146304"/>
+          </a:xfrm>
+          <a:prstGeom prst="rect">
+            <a:avLst/>
+          </a:prstGeom>
+          <a:noFill/>
+          <a:ln/>
+        </p:spPr>
+        <p:txBody>
+          <a:bodyPr wrap="square" lIns="0" tIns="0" rIns="0" bIns="0" rtlCol="0" anchor="ctr">
+            <a:normAutofit/>
+          </a:bodyPr>
+          <a:lstStyle/>
+          <a:p>
+            <a:pPr algn="ctr" indent="0" marL="0">
+              <a:buNone/>
+            </a:pPr>
+            <a:r>
+              <a:rPr lang="en-US" sz="880" b="1" dirty="0">
+                <a:solidFill>
+                  <a:srgbClr val="FFFFFF"/>
+                </a:solidFill>
+                <a:latin typeface="Aptos" pitchFamily="34" charset="0"/>
+                <a:ea typeface="Aptos" pitchFamily="34" charset="-122"/>
+                <a:cs typeface="Aptos" pitchFamily="34" charset="-120"/>
+              </a:rPr>
+              <a:t>Review</a:t>
+            </a:r>
+            <a:endParaRPr lang="en-US" sz="880" dirty="0"/>
+          </a:p>
+        </p:txBody>
+      </p:sp>
+      <p:sp>
+        <p:nvSpPr>
+          <p:cNvPr id="21" name="Shape 19"/>
+          <p:cNvSpPr/>
+          <p:nvPr/>
+        </p:nvSpPr>
+        <p:spPr>
+          <a:xfrm>
+            <a:off x="9982200" y="3200400"/>
+            <a:ext cx="890016" cy="301752"/>
+          </a:xfrm>
+          <a:prstGeom prst="roundRect">
+            <a:avLst>
+              <a:gd name="adj" fmla="val 24242"/>
+            </a:avLst>
+          </a:prstGeom>
+          <a:solidFill>
+            <a:srgbClr val="6A4CA3"/>
+          </a:solidFill>
+          <a:ln w="12700">
+            <a:solidFill>
+              <a:srgbClr val="6A4CA3"/>
+            </a:solidFill>
+            <a:prstDash val="solid"/>
+          </a:ln>
+        </p:spPr>
+      </p:sp>
+      <p:sp>
+        <p:nvSpPr>
+          <p:cNvPr id="22" name="Text 20"/>
+          <p:cNvSpPr/>
+          <p:nvPr/>
+        </p:nvSpPr>
+        <p:spPr>
+          <a:xfrm>
+            <a:off x="10018776" y="3273552"/>
+            <a:ext cx="816864" cy="146304"/>
+          </a:xfrm>
+          <a:prstGeom prst="rect">
+            <a:avLst/>
+          </a:prstGeom>
+          <a:noFill/>
+          <a:ln/>
+        </p:spPr>
+        <p:txBody>
+          <a:bodyPr wrap="square" lIns="0" tIns="0" rIns="0" bIns="0" rtlCol="0" anchor="ctr">
+            <a:normAutofit/>
+          </a:bodyPr>
+          <a:lstStyle/>
+          <a:p>
+            <a:pPr algn="ctr" indent="0" marL="0">
+              <a:buNone/>
+            </a:pPr>
+            <a:r>
+              <a:rPr lang="en-US" sz="880" b="1" dirty="0">
+                <a:solidFill>
+                  <a:srgbClr val="FFFFFF"/>
+                </a:solidFill>
+                <a:latin typeface="Aptos" pitchFamily="34" charset="0"/>
+                <a:ea typeface="Aptos" pitchFamily="34" charset="-122"/>
+                <a:cs typeface="Aptos" pitchFamily="34" charset="-120"/>
+              </a:rPr>
+              <a:t>Oversee</a:t>
+            </a:r>
+            <a:endParaRPr lang="en-US" sz="880" dirty="0"/>
+          </a:p>
+        </p:txBody>
+      </p:sp>
+      <p:sp>
+        <p:nvSpPr>
+          <p:cNvPr id="23" name="Text 21"/>
+          <p:cNvSpPr/>
+          <p:nvPr/>
+        </p:nvSpPr>
+        <p:spPr>
+          <a:xfrm>
+            <a:off x="7854696" y="3694176"/>
+            <a:ext cx="3035808" cy="206654"/>
+          </a:xfrm>
+          <a:prstGeom prst="rect">
+            <a:avLst/>
+          </a:prstGeom>
+          <a:noFill/>
+          <a:ln/>
+        </p:spPr>
+        <p:txBody>
+          <a:bodyPr wrap="square" lIns="254" tIns="254" rIns="254" bIns="254" rtlCol="0" anchor="t">
+            <a:normAutofit/>
+          </a:bodyPr>
+          <a:lstStyle/>
+          <a:p>
+            <a:pPr indent="0" marL="0">
+              <a:buNone/>
+            </a:pPr>
+            <a:r>
+              <a:rPr lang="en-US" sz="1120" dirty="0">
+                <a:solidFill>
+                  <a:srgbClr val="17364A"/>
+                </a:solidFill>
+                <a:latin typeface="Aptos" pitchFamily="34" charset="0"/>
+                <a:ea typeface="Aptos" pitchFamily="34" charset="-122"/>
+                <a:cs typeface="Aptos" pitchFamily="34" charset="-120"/>
+              </a:rPr>
+              <a:t>A proposed AI use should move through documented review before it becomes an operational workflow.</a:t>
+            </a:r>
+            <a:endParaRPr lang="en-US" sz="1120" dirty="0"/>
+          </a:p>
+        </p:txBody>
+      </p:sp>
+      <p:sp>
+        <p:nvSpPr>
+          <p:cNvPr id="24" name="Shape 22"/>
+          <p:cNvSpPr/>
+          <p:nvPr/>
+        </p:nvSpPr>
+        <p:spPr>
+          <a:xfrm>
+            <a:off x="7635240" y="4184294"/>
+            <a:ext cx="3474720" cy="1466698"/>
+          </a:xfrm>
+          <a:prstGeom prst="roundRect">
+            <a:avLst>
+              <a:gd name="adj" fmla="val 7481"/>
             </a:avLst>
           </a:prstGeom>
           <a:solidFill>
@@ -16759,13 +17407,13 @@
       </p:sp>
       <p:sp>
         <p:nvSpPr>
-          <p:cNvPr id="17" name="Text 15"/>
-          <p:cNvSpPr/>
-          <p:nvPr/>
-        </p:nvSpPr>
-        <p:spPr>
-          <a:xfrm>
-            <a:off x="7799832" y="4645152"/>
+          <p:cNvPr id="25" name="Text 23"/>
+          <p:cNvSpPr/>
+          <p:nvPr/>
+        </p:nvSpPr>
+        <p:spPr>
+          <a:xfrm>
+            <a:off x="7799832" y="4330598"/>
             <a:ext cx="3145536" cy="256032"/>
           </a:xfrm>
           <a:prstGeom prst="rect">
@@ -16798,14 +17446,14 @@
       </p:sp>
       <p:sp>
         <p:nvSpPr>
-          <p:cNvPr id="18" name="Text 16"/>
-          <p:cNvSpPr/>
-          <p:nvPr/>
-        </p:nvSpPr>
-        <p:spPr>
-          <a:xfrm>
-            <a:off x="7799832" y="4974336"/>
-            <a:ext cx="3145536" cy="576072"/>
+          <p:cNvPr id="26" name="Text 24"/>
+          <p:cNvSpPr/>
+          <p:nvPr/>
+        </p:nvSpPr>
+        <p:spPr>
+          <a:xfrm>
+            <a:off x="7799832" y="4659782"/>
+            <a:ext cx="3145536" cy="899770"/>
           </a:xfrm>
           <a:prstGeom prst="rect">
             <a:avLst/>
@@ -16831,7 +17479,7 @@
                 <a:ea typeface="Aptos" pitchFamily="34" charset="-122"/>
                 <a:cs typeface="Aptos" pitchFamily="34" charset="-120"/>
               </a:rPr>
-              <a:t>Translate this concept into clear decision rights, review steps, documentation expectations, and escalation paths before.</a:t>
+              <a:t>Translate this concept into clear decision rights, review steps, documentation expectations, and escalation paths before an AI-supported workflow is approved.</a:t>
             </a:r>
             <a:endParaRPr lang="en-US" sz="1320" dirty="0"/>
           </a:p>
@@ -17200,11 +17848,11 @@
         <p:spPr>
           <a:xfrm>
             <a:off x="7635240" y="1325880"/>
-            <a:ext cx="3474720" cy="1325880"/>
+            <a:ext cx="3474720" cy="1255471"/>
           </a:xfrm>
           <a:prstGeom prst="roundRect">
             <a:avLst>
-              <a:gd name="adj" fmla="val 8276"/>
+              <a:gd name="adj" fmla="val 8740"/>
             </a:avLst>
           </a:prstGeom>
           <a:solidFill>
@@ -17266,7 +17914,7 @@
         <p:spPr>
           <a:xfrm>
             <a:off x="7799832" y="1801368"/>
-            <a:ext cx="3145536" cy="758952"/>
+            <a:ext cx="3145536" cy="688543"/>
           </a:xfrm>
           <a:prstGeom prst="rect">
             <a:avLst/>
@@ -17306,12 +17954,12 @@
         </p:nvSpPr>
         <p:spPr>
           <a:xfrm>
-            <a:off x="7635240" y="2788920"/>
-            <a:ext cx="3474720" cy="1536192"/>
+            <a:off x="7635240" y="2718511"/>
+            <a:ext cx="3474720" cy="1328623"/>
           </a:xfrm>
           <a:prstGeom prst="roundRect">
             <a:avLst>
-              <a:gd name="adj" fmla="val 7143"/>
+              <a:gd name="adj" fmla="val 8259"/>
             </a:avLst>
           </a:prstGeom>
           <a:solidFill>
@@ -17333,7 +17981,7 @@
         </p:nvSpPr>
         <p:spPr>
           <a:xfrm>
-            <a:off x="7799832" y="2935224"/>
+            <a:off x="7799832" y="2864815"/>
             <a:ext cx="3145536" cy="256032"/>
           </a:xfrm>
           <a:prstGeom prst="rect">
@@ -17372,8 +18020,8 @@
         </p:nvSpPr>
         <p:spPr>
           <a:xfrm>
-            <a:off x="7818120" y="3300984"/>
-            <a:ext cx="3090672" cy="877824"/>
+            <a:off x="7818120" y="3230575"/>
+            <a:ext cx="3090672" cy="670255"/>
           </a:xfrm>
           <a:prstGeom prst="rect">
             <a:avLst/>
@@ -17447,12 +18095,12 @@
         </p:nvSpPr>
         <p:spPr>
           <a:xfrm>
-            <a:off x="7635240" y="4498848"/>
-            <a:ext cx="3474720" cy="1143000"/>
+            <a:off x="7635240" y="4184294"/>
+            <a:ext cx="3474720" cy="1466698"/>
           </a:xfrm>
           <a:prstGeom prst="roundRect">
             <a:avLst>
-              <a:gd name="adj" fmla="val 9600"/>
+              <a:gd name="adj" fmla="val 7481"/>
             </a:avLst>
           </a:prstGeom>
           <a:solidFill>
@@ -17474,7 +18122,7 @@
         </p:nvSpPr>
         <p:spPr>
           <a:xfrm>
-            <a:off x="7799832" y="4645152"/>
+            <a:off x="7799832" y="4330598"/>
             <a:ext cx="3145536" cy="256032"/>
           </a:xfrm>
           <a:prstGeom prst="rect">
@@ -17513,8 +18161,8 @@
         </p:nvSpPr>
         <p:spPr>
           <a:xfrm>
-            <a:off x="7799832" y="4974336"/>
-            <a:ext cx="3145536" cy="576072"/>
+            <a:off x="7799832" y="4659782"/>
+            <a:ext cx="3145536" cy="899770"/>
           </a:xfrm>
           <a:prstGeom prst="rect">
             <a:avLst/>
@@ -17540,7 +18188,7 @@
                 <a:ea typeface="Aptos" pitchFamily="34" charset="-122"/>
                 <a:cs typeface="Aptos" pitchFamily="34" charset="-120"/>
               </a:rPr>
-              <a:t>Connect the concept to public health purpose, responsible use, required safeguards, documentation, and the next action a.</a:t>
+              <a:t>Connect the concept to public health purpose, responsible use, required safeguards, documentation, and the next action a department should take.</a:t>
             </a:r>
             <a:endParaRPr lang="en-US" sz="1320" dirty="0"/>
           </a:p>
@@ -17909,11 +18557,11 @@
         <p:spPr>
           <a:xfrm>
             <a:off x="7635240" y="1325880"/>
-            <a:ext cx="3474720" cy="1325880"/>
+            <a:ext cx="3474720" cy="1207008"/>
           </a:xfrm>
           <a:prstGeom prst="roundRect">
             <a:avLst>
-              <a:gd name="adj" fmla="val 8276"/>
+              <a:gd name="adj" fmla="val 9091"/>
             </a:avLst>
           </a:prstGeom>
           <a:solidFill>
@@ -17975,7 +18623,7 @@
         <p:spPr>
           <a:xfrm>
             <a:off x="7799832" y="1801368"/>
-            <a:ext cx="3145536" cy="758952"/>
+            <a:ext cx="3145536" cy="640080"/>
           </a:xfrm>
           <a:prstGeom prst="rect">
             <a:avLst/>
@@ -18001,7 +18649,7 @@
                 <a:ea typeface="Aptos" pitchFamily="34" charset="-122"/>
                 <a:cs typeface="Aptos" pitchFamily="34" charset="-120"/>
               </a:rPr>
-              <a:t>An effective intake process begins by defining the problem before selecting the technology.</a:t>
+              <a:t>An effective intake process begins by defining the problem before selecting the.</a:t>
             </a:r>
             <a:endParaRPr lang="en-US" sz="1320" dirty="0"/>
           </a:p>
@@ -18015,12 +18663,12 @@
         </p:nvSpPr>
         <p:spPr>
           <a:xfrm>
-            <a:off x="7635240" y="2788920"/>
-            <a:ext cx="3474720" cy="1536192"/>
+            <a:off x="7635240" y="2670048"/>
+            <a:ext cx="3474720" cy="1377086"/>
           </a:xfrm>
           <a:prstGeom prst="roundRect">
             <a:avLst>
-              <a:gd name="adj" fmla="val 7143"/>
+              <a:gd name="adj" fmla="val 7968"/>
             </a:avLst>
           </a:prstGeom>
           <a:solidFill>
@@ -18042,7 +18690,7 @@
         </p:nvSpPr>
         <p:spPr>
           <a:xfrm>
-            <a:off x="7799832" y="2935224"/>
+            <a:off x="7799832" y="2816352"/>
             <a:ext cx="3145536" cy="256032"/>
           </a:xfrm>
           <a:prstGeom prst="rect">
@@ -18081,8 +18729,8 @@
         </p:nvSpPr>
         <p:spPr>
           <a:xfrm>
-            <a:off x="7818120" y="3300984"/>
-            <a:ext cx="3090672" cy="877824"/>
+            <a:off x="7818120" y="3182112"/>
+            <a:ext cx="3090672" cy="718718"/>
           </a:xfrm>
           <a:prstGeom prst="rect">
             <a:avLst/>
@@ -18156,12 +18804,12 @@
         </p:nvSpPr>
         <p:spPr>
           <a:xfrm>
-            <a:off x="7635240" y="4498848"/>
-            <a:ext cx="3474720" cy="1143000"/>
+            <a:off x="7635240" y="4184294"/>
+            <a:ext cx="3474720" cy="1466698"/>
           </a:xfrm>
           <a:prstGeom prst="roundRect">
             <a:avLst>
-              <a:gd name="adj" fmla="val 9600"/>
+              <a:gd name="adj" fmla="val 7481"/>
             </a:avLst>
           </a:prstGeom>
           <a:solidFill>
@@ -18183,7 +18831,7 @@
         </p:nvSpPr>
         <p:spPr>
           <a:xfrm>
-            <a:off x="7799832" y="4645152"/>
+            <a:off x="7799832" y="4330598"/>
             <a:ext cx="3145536" cy="256032"/>
           </a:xfrm>
           <a:prstGeom prst="rect">
@@ -18222,8 +18870,8 @@
         </p:nvSpPr>
         <p:spPr>
           <a:xfrm>
-            <a:off x="7799832" y="4974336"/>
-            <a:ext cx="3145536" cy="576072"/>
+            <a:off x="7799832" y="4659782"/>
+            <a:ext cx="3145536" cy="899770"/>
           </a:xfrm>
           <a:prstGeom prst="rect">
             <a:avLst/>
@@ -18249,7 +18897,7 @@
                 <a:ea typeface="Aptos" pitchFamily="34" charset="-122"/>
                 <a:cs typeface="Aptos" pitchFamily="34" charset="-120"/>
               </a:rPr>
-              <a:t>Connect the concept to public health purpose, responsible use, required safeguards, documentation, and the next action a.</a:t>
+              <a:t>Connect the concept to public health purpose, responsible use, required safeguards, documentation, and the next action a department should take.</a:t>
             </a:r>
             <a:endParaRPr lang="en-US" sz="1320" dirty="0"/>
           </a:p>

--- a/downloads/presentations/modules/int-200.pptx
+++ b/downloads/presentations/modules/int-200.pptx
@@ -3435,8 +3435,8 @@
         </p:nvSpPr>
         <p:spPr>
           <a:xfrm>
-            <a:off x="868680" y="1508760"/>
-            <a:ext cx="6309360" cy="4160520"/>
+            <a:off x="822960" y="1463040"/>
+            <a:ext cx="6565392" cy="4343400"/>
           </a:xfrm>
           <a:prstGeom prst="rect">
             <a:avLst/>
@@ -3454,7 +3454,7 @@
               <a:buNone/>
             </a:pPr>
             <a:r>
-              <a:rPr lang="en-US" sz="2100" dirty="0">
+              <a:rPr lang="en-US" sz="1920" dirty="0">
                 <a:solidFill>
                   <a:srgbClr val="003A63"/>
                 </a:solidFill>
@@ -3464,14 +3464,14 @@
               </a:rPr>
               <a:t>• Use case intake also supports portfolio management.</a:t>
             </a:r>
-            <a:endParaRPr lang="en-US" sz="2100" dirty="0"/>
-          </a:p>
-          <a:p>
-            <a:pPr indent="0" marL="0">
-              <a:buNone/>
-            </a:pPr>
-            <a:r>
-              <a:rPr lang="en-US" sz="2100" dirty="0">
+            <a:endParaRPr lang="en-US" sz="1920" dirty="0"/>
+          </a:p>
+          <a:p>
+            <a:pPr indent="0" marL="0">
+              <a:buNone/>
+            </a:pPr>
+            <a:r>
+              <a:rPr lang="en-US" sz="1920" dirty="0">
                 <a:solidFill>
                   <a:srgbClr val="003A63"/>
                 </a:solidFill>
@@ -3479,16 +3479,16 @@
                 <a:ea typeface="Aptos" pitchFamily="34" charset="-122"/>
                 <a:cs typeface="Aptos" pitchFamily="34" charset="-120"/>
               </a:rPr>
-              <a:t>• When agencies collect use cases in a consistent format, leaders can compare proposals across.</a:t>
-            </a:r>
-            <a:endParaRPr lang="en-US" sz="2100" dirty="0"/>
-          </a:p>
-          <a:p>
-            <a:pPr indent="0" marL="0">
-              <a:buNone/>
-            </a:pPr>
-            <a:r>
-              <a:rPr lang="en-US" sz="2100" dirty="0">
+              <a:t>• When agencies collect use cases in a consistent format, leaders can compare.</a:t>
+            </a:r>
+            <a:endParaRPr lang="en-US" sz="1920" dirty="0"/>
+          </a:p>
+          <a:p>
+            <a:pPr indent="0" marL="0">
+              <a:buNone/>
+            </a:pPr>
+            <a:r>
+              <a:rPr lang="en-US" sz="1920" dirty="0">
                 <a:solidFill>
                   <a:srgbClr val="003A63"/>
                 </a:solidFill>
@@ -3498,7 +3498,7 @@
               </a:rPr>
               <a:t>• The intake record becomes the first governance artifact in the AI lifecycle.</a:t>
             </a:r>
-            <a:endParaRPr lang="en-US" sz="2100" dirty="0"/>
+            <a:endParaRPr lang="en-US" sz="1920" dirty="0"/>
           </a:p>
         </p:txBody>
       </p:sp>
@@ -3510,12 +3510,12 @@
         </p:nvSpPr>
         <p:spPr>
           <a:xfrm>
-            <a:off x="7635240" y="1325880"/>
-            <a:ext cx="3474720" cy="1207008"/>
+            <a:off x="7543800" y="1325880"/>
+            <a:ext cx="3611880" cy="1261872"/>
           </a:xfrm>
           <a:prstGeom prst="roundRect">
             <a:avLst>
-              <a:gd name="adj" fmla="val 9091"/>
+              <a:gd name="adj" fmla="val 8696"/>
             </a:avLst>
           </a:prstGeom>
           <a:solidFill>
@@ -3537,8 +3537,8 @@
         </p:nvSpPr>
         <p:spPr>
           <a:xfrm>
-            <a:off x="7799832" y="1472184"/>
-            <a:ext cx="3145536" cy="256032"/>
+            <a:off x="7708392" y="1453896"/>
+            <a:ext cx="3282696" cy="228600"/>
           </a:xfrm>
           <a:prstGeom prst="rect">
             <a:avLst/>
@@ -3554,7 +3554,7 @@
               <a:buNone/>
             </a:pPr>
             <a:r>
-              <a:rPr lang="en-US" sz="1300" b="1" dirty="0">
+              <a:rPr lang="en-US" sz="1220" b="1" dirty="0">
                 <a:solidFill>
                   <a:srgbClr val="0068B7"/>
                 </a:solidFill>
@@ -3564,7 +3564,7 @@
               </a:rPr>
               <a:t>Core concept</a:t>
             </a:r>
-            <a:endParaRPr lang="en-US" sz="1300" dirty="0"/>
+            <a:endParaRPr lang="en-US" sz="1220" dirty="0"/>
           </a:p>
         </p:txBody>
       </p:sp>
@@ -3576,8 +3576,8 @@
         </p:nvSpPr>
         <p:spPr>
           <a:xfrm>
-            <a:off x="7799832" y="1801368"/>
-            <a:ext cx="3145536" cy="640080"/>
+            <a:off x="7708392" y="1764792"/>
+            <a:ext cx="3282696" cy="749808"/>
           </a:xfrm>
           <a:prstGeom prst="rect">
             <a:avLst/>
@@ -3595,7 +3595,7 @@
               <a:buNone/>
             </a:pPr>
             <a:r>
-              <a:rPr lang="en-US" sz="1320" dirty="0">
+              <a:rPr lang="en-US" sz="1220" dirty="0">
                 <a:solidFill>
                   <a:srgbClr val="17364A"/>
                 </a:solidFill>
@@ -3605,7 +3605,7 @@
               </a:rPr>
               <a:t>Use case intake also supports portfolio management.</a:t>
             </a:r>
-            <a:endParaRPr lang="en-US" sz="1320" dirty="0"/>
+            <a:endParaRPr lang="en-US" sz="1220" dirty="0"/>
           </a:p>
         </p:txBody>
       </p:sp>
@@ -3617,12 +3617,12 @@
         </p:nvSpPr>
         <p:spPr>
           <a:xfrm>
-            <a:off x="7635240" y="2670048"/>
-            <a:ext cx="3474720" cy="1377086"/>
+            <a:off x="7543800" y="2724912"/>
+            <a:ext cx="3611880" cy="1527048"/>
           </a:xfrm>
           <a:prstGeom prst="roundRect">
             <a:avLst>
-              <a:gd name="adj" fmla="val 7968"/>
+              <a:gd name="adj" fmla="val 7186"/>
             </a:avLst>
           </a:prstGeom>
           <a:solidFill>
@@ -3644,8 +3644,8 @@
         </p:nvSpPr>
         <p:spPr>
           <a:xfrm>
-            <a:off x="7799832" y="2816352"/>
-            <a:ext cx="3145536" cy="256032"/>
+            <a:off x="7708392" y="2852928"/>
+            <a:ext cx="3282696" cy="228600"/>
           </a:xfrm>
           <a:prstGeom prst="rect">
             <a:avLst/>
@@ -3661,7 +3661,7 @@
               <a:buNone/>
             </a:pPr>
             <a:r>
-              <a:rPr lang="en-US" sz="1300" b="1" dirty="0">
+              <a:rPr lang="en-US" sz="1220" b="1" dirty="0">
                 <a:solidFill>
                   <a:srgbClr val="0068B7"/>
                 </a:solidFill>
@@ -3671,7 +3671,7 @@
               </a:rPr>
               <a:t>Concept checkpoints</a:t>
             </a:r>
-            <a:endParaRPr lang="en-US" sz="1300" dirty="0"/>
+            <a:endParaRPr lang="en-US" sz="1220" dirty="0"/>
           </a:p>
         </p:txBody>
       </p:sp>
@@ -3683,8 +3683,8 @@
         </p:nvSpPr>
         <p:spPr>
           <a:xfrm>
-            <a:off x="7818120" y="3182112"/>
-            <a:ext cx="3090672" cy="718718"/>
+            <a:off x="7726680" y="3182112"/>
+            <a:ext cx="3227832" cy="960120"/>
           </a:xfrm>
           <a:prstGeom prst="rect">
             <a:avLst/>
@@ -3702,7 +3702,7 @@
               <a:buNone/>
             </a:pPr>
             <a:r>
-              <a:rPr lang="en-US" sz="1220" dirty="0">
+              <a:rPr lang="en-US" sz="1140" dirty="0">
                 <a:solidFill>
                   <a:srgbClr val="17364A"/>
                 </a:solidFill>
@@ -3712,14 +3712,14 @@
               </a:rPr>
               <a:t>Use case intake also supports portfolio management.</a:t>
             </a:r>
-            <a:endParaRPr lang="en-US" sz="1220" dirty="0"/>
-          </a:p>
-          <a:p>
-            <a:pPr indent="0" marL="0">
-              <a:buNone/>
-            </a:pPr>
-            <a:r>
-              <a:rPr lang="en-US" sz="1220" dirty="0">
+            <a:endParaRPr lang="en-US" sz="1140" dirty="0"/>
+          </a:p>
+          <a:p>
+            <a:pPr indent="0" marL="0">
+              <a:buNone/>
+            </a:pPr>
+            <a:r>
+              <a:rPr lang="en-US" sz="1140" dirty="0">
                 <a:solidFill>
                   <a:srgbClr val="17364A"/>
                 </a:solidFill>
@@ -3727,16 +3727,16 @@
                 <a:ea typeface="Aptos" pitchFamily="34" charset="-122"/>
                 <a:cs typeface="Aptos" pitchFamily="34" charset="-120"/>
               </a:rPr>
-              <a:t>When agencies collect use cases in a consistent format, leaders.</a:t>
-            </a:r>
-            <a:endParaRPr lang="en-US" sz="1220" dirty="0"/>
-          </a:p>
-          <a:p>
-            <a:pPr indent="0" marL="0">
-              <a:buNone/>
-            </a:pPr>
-            <a:r>
-              <a:rPr lang="en-US" sz="1220" dirty="0">
+              <a:t>When agencies collect use cases in a consistent.</a:t>
+            </a:r>
+            <a:endParaRPr lang="en-US" sz="1140" dirty="0"/>
+          </a:p>
+          <a:p>
+            <a:pPr indent="0" marL="0">
+              <a:buNone/>
+            </a:pPr>
+            <a:r>
+              <a:rPr lang="en-US" sz="1140" dirty="0">
                 <a:solidFill>
                   <a:srgbClr val="17364A"/>
                 </a:solidFill>
@@ -3744,9 +3744,9 @@
                 <a:ea typeface="Aptos" pitchFamily="34" charset="-122"/>
                 <a:cs typeface="Aptos" pitchFamily="34" charset="-120"/>
               </a:rPr>
-              <a:t>The intake record becomes the first governance artifact in the AI.</a:t>
-            </a:r>
-            <a:endParaRPr lang="en-US" sz="1220" dirty="0"/>
+              <a:t>The intake record becomes the first governance.</a:t>
+            </a:r>
+            <a:endParaRPr lang="en-US" sz="1140" dirty="0"/>
           </a:p>
         </p:txBody>
       </p:sp>
@@ -3758,12 +3758,12 @@
         </p:nvSpPr>
         <p:spPr>
           <a:xfrm>
-            <a:off x="7635240" y="4184294"/>
-            <a:ext cx="3474720" cy="1466698"/>
+            <a:off x="7543800" y="4389120"/>
+            <a:ext cx="3611880" cy="1261872"/>
           </a:xfrm>
           <a:prstGeom prst="roundRect">
             <a:avLst>
-              <a:gd name="adj" fmla="val 7481"/>
+              <a:gd name="adj" fmla="val 8696"/>
             </a:avLst>
           </a:prstGeom>
           <a:solidFill>
@@ -3785,8 +3785,8 @@
         </p:nvSpPr>
         <p:spPr>
           <a:xfrm>
-            <a:off x="7799832" y="4330598"/>
-            <a:ext cx="3145536" cy="256032"/>
+            <a:off x="7708392" y="4517136"/>
+            <a:ext cx="3282696" cy="228600"/>
           </a:xfrm>
           <a:prstGeom prst="rect">
             <a:avLst/>
@@ -3802,7 +3802,7 @@
               <a:buNone/>
             </a:pPr>
             <a:r>
-              <a:rPr lang="en-US" sz="1300" b="1" dirty="0">
+              <a:rPr lang="en-US" sz="1220" b="1" dirty="0">
                 <a:solidFill>
                   <a:srgbClr val="0068B7"/>
                 </a:solidFill>
@@ -3812,7 +3812,7 @@
               </a:rPr>
               <a:t>Apply it</a:t>
             </a:r>
-            <a:endParaRPr lang="en-US" sz="1300" dirty="0"/>
+            <a:endParaRPr lang="en-US" sz="1220" dirty="0"/>
           </a:p>
         </p:txBody>
       </p:sp>
@@ -3824,8 +3824,8 @@
         </p:nvSpPr>
         <p:spPr>
           <a:xfrm>
-            <a:off x="7799832" y="4659782"/>
-            <a:ext cx="3145536" cy="899770"/>
+            <a:off x="7708392" y="4828032"/>
+            <a:ext cx="3282696" cy="749808"/>
           </a:xfrm>
           <a:prstGeom prst="rect">
             <a:avLst/>
@@ -3843,7 +3843,7 @@
               <a:buNone/>
             </a:pPr>
             <a:r>
-              <a:rPr lang="en-US" sz="1320" dirty="0">
+              <a:rPr lang="en-US" sz="1220" dirty="0">
                 <a:solidFill>
                   <a:srgbClr val="17364A"/>
                 </a:solidFill>
@@ -3851,9 +3851,9 @@
                 <a:ea typeface="Aptos" pitchFamily="34" charset="-122"/>
                 <a:cs typeface="Aptos" pitchFamily="34" charset="-120"/>
               </a:rPr>
-              <a:t>Connect the concept to public health purpose, responsible use, required safeguards, documentation, and the next action a department should take.</a:t>
-            </a:r>
-            <a:endParaRPr lang="en-US" sz="1320" dirty="0"/>
+              <a:t>Connect the concept to public health purpose, responsible use, required.</a:t>
+            </a:r>
+            <a:endParaRPr lang="en-US" sz="1220" dirty="0"/>
           </a:p>
         </p:txBody>
       </p:sp>
@@ -4144,8 +4144,8 @@
         </p:nvSpPr>
         <p:spPr>
           <a:xfrm>
-            <a:off x="868680" y="1508760"/>
-            <a:ext cx="6309360" cy="4160520"/>
+            <a:off x="822960" y="1463040"/>
+            <a:ext cx="6565392" cy="4343400"/>
           </a:xfrm>
           <a:prstGeom prst="rect">
             <a:avLst/>
@@ -4163,7 +4163,7 @@
               <a:buNone/>
             </a:pPr>
             <a:r>
-              <a:rPr lang="en-US" sz="2100" dirty="0">
+              <a:rPr lang="en-US" sz="1920" dirty="0">
                 <a:solidFill>
                   <a:srgbClr val="003A63"/>
                 </a:solidFill>
@@ -4173,14 +4173,14 @@
               </a:rPr>
               <a:t>• Risks and failure modes include the following:</a:t>
             </a:r>
-            <a:endParaRPr lang="en-US" sz="2100" dirty="0"/>
-          </a:p>
-          <a:p>
-            <a:pPr indent="0" marL="0">
-              <a:buNone/>
-            </a:pPr>
-            <a:r>
-              <a:rPr lang="en-US" sz="2100" dirty="0">
+            <a:endParaRPr lang="en-US" sz="1920" dirty="0"/>
+          </a:p>
+          <a:p>
+            <a:pPr indent="0" marL="0">
+              <a:buNone/>
+            </a:pPr>
+            <a:r>
+              <a:rPr lang="en-US" sz="1920" dirty="0">
                 <a:solidFill>
                   <a:srgbClr val="003A63"/>
                 </a:solidFill>
@@ -4190,14 +4190,14 @@
               </a:rPr>
               <a:t>• Informal AI experimentation with sensitive or confidential data before review.</a:t>
             </a:r>
-            <a:endParaRPr lang="en-US" sz="2100" dirty="0"/>
-          </a:p>
-          <a:p>
-            <a:pPr indent="0" marL="0">
-              <a:buNone/>
-            </a:pPr>
-            <a:r>
-              <a:rPr lang="en-US" sz="2100" dirty="0">
+            <a:endParaRPr lang="en-US" sz="1920" dirty="0"/>
+          </a:p>
+          <a:p>
+            <a:pPr indent="0" marL="0">
+              <a:buNone/>
+            </a:pPr>
+            <a:r>
+              <a:rPr lang="en-US" sz="1920" dirty="0">
                 <a:solidFill>
                   <a:srgbClr val="003A63"/>
                 </a:solidFill>
@@ -4207,7 +4207,7 @@
               </a:rPr>
               <a:t>• Tool-first proposals that do not solve a real workflow problem.</a:t>
             </a:r>
-            <a:endParaRPr lang="en-US" sz="2100" dirty="0"/>
+            <a:endParaRPr lang="en-US" sz="1920" dirty="0"/>
           </a:p>
         </p:txBody>
       </p:sp>
@@ -4219,12 +4219,12 @@
         </p:nvSpPr>
         <p:spPr>
           <a:xfrm>
-            <a:off x="7635240" y="1325880"/>
-            <a:ext cx="3474720" cy="1207008"/>
+            <a:off x="7543800" y="1325880"/>
+            <a:ext cx="3611880" cy="1261872"/>
           </a:xfrm>
           <a:prstGeom prst="roundRect">
             <a:avLst>
-              <a:gd name="adj" fmla="val 9091"/>
+              <a:gd name="adj" fmla="val 8696"/>
             </a:avLst>
           </a:prstGeom>
           <a:solidFill>
@@ -4246,8 +4246,8 @@
         </p:nvSpPr>
         <p:spPr>
           <a:xfrm>
-            <a:off x="7799832" y="1472184"/>
-            <a:ext cx="3145536" cy="256032"/>
+            <a:off x="7708392" y="1453896"/>
+            <a:ext cx="3282696" cy="228600"/>
           </a:xfrm>
           <a:prstGeom prst="rect">
             <a:avLst/>
@@ -4263,7 +4263,7 @@
               <a:buNone/>
             </a:pPr>
             <a:r>
-              <a:rPr lang="en-US" sz="1300" b="1" dirty="0">
+              <a:rPr lang="en-US" sz="1220" b="1" dirty="0">
                 <a:solidFill>
                   <a:srgbClr val="0068B7"/>
                 </a:solidFill>
@@ -4273,7 +4273,7 @@
               </a:rPr>
               <a:t>Risk check</a:t>
             </a:r>
-            <a:endParaRPr lang="en-US" sz="1300" dirty="0"/>
+            <a:endParaRPr lang="en-US" sz="1220" dirty="0"/>
           </a:p>
         </p:txBody>
       </p:sp>
@@ -4285,8 +4285,8 @@
         </p:nvSpPr>
         <p:spPr>
           <a:xfrm>
-            <a:off x="7799832" y="1801368"/>
-            <a:ext cx="3145536" cy="640080"/>
+            <a:off x="7708392" y="1764792"/>
+            <a:ext cx="3282696" cy="749808"/>
           </a:xfrm>
           <a:prstGeom prst="rect">
             <a:avLst/>
@@ -4304,7 +4304,7 @@
               <a:buNone/>
             </a:pPr>
             <a:r>
-              <a:rPr lang="en-US" sz="1320" dirty="0">
+              <a:rPr lang="en-US" sz="1220" dirty="0">
                 <a:solidFill>
                   <a:srgbClr val="17364A"/>
                 </a:solidFill>
@@ -4314,7 +4314,7 @@
               </a:rPr>
               <a:t>Risks and failure modes include the following:</a:t>
             </a:r>
-            <a:endParaRPr lang="en-US" sz="1320" dirty="0"/>
+            <a:endParaRPr lang="en-US" sz="1220" dirty="0"/>
           </a:p>
         </p:txBody>
       </p:sp>
@@ -4326,12 +4326,12 @@
         </p:nvSpPr>
         <p:spPr>
           <a:xfrm>
-            <a:off x="7635240" y="2670048"/>
-            <a:ext cx="3474720" cy="1536192"/>
+            <a:off x="7543800" y="2724912"/>
+            <a:ext cx="3611880" cy="1527048"/>
           </a:xfrm>
           <a:prstGeom prst="roundRect">
             <a:avLst>
-              <a:gd name="adj" fmla="val 7143"/>
+              <a:gd name="adj" fmla="val 7186"/>
             </a:avLst>
           </a:prstGeom>
           <a:solidFill>
@@ -4353,24 +4353,26 @@
         </p:nvSpPr>
         <p:spPr>
           <a:xfrm>
-            <a:off x="7799832" y="2798064"/>
-            <a:ext cx="3145536" cy="237744"/>
-          </a:xfrm>
-          <a:prstGeom prst="rect">
-            <a:avLst/>
-          </a:prstGeom>
-          <a:noFill/>
-          <a:ln/>
-        </p:spPr>
-        <p:txBody>
-          <a:bodyPr wrap="square" lIns="0" tIns="0" rIns="0" bIns="0" rtlCol="0" anchor="ctr"/>
-          <a:lstStyle/>
-          <a:p>
-            <a:pPr indent="0" marL="0">
-              <a:buNone/>
-            </a:pPr>
-            <a:r>
-              <a:rPr lang="en-US" sz="1250" b="1" dirty="0">
+            <a:off x="7708392" y="2852928"/>
+            <a:ext cx="3282696" cy="219456"/>
+          </a:xfrm>
+          <a:prstGeom prst="rect">
+            <a:avLst/>
+          </a:prstGeom>
+          <a:noFill/>
+          <a:ln/>
+        </p:spPr>
+        <p:txBody>
+          <a:bodyPr wrap="square" lIns="0" tIns="0" rIns="0" bIns="0" rtlCol="0" anchor="ctr">
+            <a:normAutofit/>
+          </a:bodyPr>
+          <a:lstStyle/>
+          <a:p>
+            <a:pPr indent="0" marL="0">
+              <a:buNone/>
+            </a:pPr>
+            <a:r>
+              <a:rPr lang="en-US" sz="1160" b="1" dirty="0">
                 <a:solidFill>
                   <a:srgbClr val="0068B7"/>
                 </a:solidFill>
@@ -4380,7 +4382,7 @@
               </a:rPr>
               <a:t>Risk control loop</a:t>
             </a:r>
-            <a:endParaRPr lang="en-US" sz="1250" dirty="0"/>
+            <a:endParaRPr lang="en-US" sz="1160" dirty="0"/>
           </a:p>
         </p:txBody>
       </p:sp>
@@ -4392,7 +4394,7 @@
         </p:nvSpPr>
         <p:spPr>
           <a:xfrm>
-            <a:off x="8763000" y="3351276"/>
+            <a:off x="8717280" y="3406140"/>
             <a:ext cx="164592" cy="0"/>
           </a:xfrm>
           <a:prstGeom prst="line">
@@ -4415,8 +4417,8 @@
         </p:nvSpPr>
         <p:spPr>
           <a:xfrm>
-            <a:off x="7872984" y="3200400"/>
-            <a:ext cx="890016" cy="301752"/>
+            <a:off x="7781544" y="3255264"/>
+            <a:ext cx="935736" cy="301752"/>
           </a:xfrm>
           <a:prstGeom prst="roundRect">
             <a:avLst>
@@ -4442,8 +4444,8 @@
         </p:nvSpPr>
         <p:spPr>
           <a:xfrm>
-            <a:off x="7909560" y="3273552"/>
-            <a:ext cx="816864" cy="146304"/>
+            <a:off x="7818120" y="3328416"/>
+            <a:ext cx="862584" cy="146304"/>
           </a:xfrm>
           <a:prstGeom prst="rect">
             <a:avLst/>
@@ -4483,7 +4485,7 @@
         </p:nvSpPr>
         <p:spPr>
           <a:xfrm>
-            <a:off x="9817608" y="3351276"/>
+            <a:off x="9817608" y="3406140"/>
             <a:ext cx="164592" cy="0"/>
           </a:xfrm>
           <a:prstGeom prst="line">
@@ -4506,8 +4508,8 @@
         </p:nvSpPr>
         <p:spPr>
           <a:xfrm>
-            <a:off x="8927592" y="3200400"/>
-            <a:ext cx="890016" cy="301752"/>
+            <a:off x="8881872" y="3255264"/>
+            <a:ext cx="935736" cy="301752"/>
           </a:xfrm>
           <a:prstGeom prst="roundRect">
             <a:avLst>
@@ -4533,8 +4535,8 @@
         </p:nvSpPr>
         <p:spPr>
           <a:xfrm>
-            <a:off x="8964168" y="3273552"/>
-            <a:ext cx="816864" cy="146304"/>
+            <a:off x="8918448" y="3328416"/>
+            <a:ext cx="862584" cy="146304"/>
           </a:xfrm>
           <a:prstGeom prst="rect">
             <a:avLst/>
@@ -4574,8 +4576,8 @@
         </p:nvSpPr>
         <p:spPr>
           <a:xfrm>
-            <a:off x="9982200" y="3200400"/>
-            <a:ext cx="890016" cy="301752"/>
+            <a:off x="9982200" y="3255264"/>
+            <a:ext cx="935736" cy="301752"/>
           </a:xfrm>
           <a:prstGeom prst="roundRect">
             <a:avLst>
@@ -4601,8 +4603,8 @@
         </p:nvSpPr>
         <p:spPr>
           <a:xfrm>
-            <a:off x="10018776" y="3273552"/>
-            <a:ext cx="816864" cy="146304"/>
+            <a:off x="10018776" y="3328416"/>
+            <a:ext cx="862584" cy="146304"/>
           </a:xfrm>
           <a:prstGeom prst="rect">
             <a:avLst/>
@@ -4642,8 +4644,8 @@
         </p:nvSpPr>
         <p:spPr>
           <a:xfrm>
-            <a:off x="7854696" y="3694176"/>
-            <a:ext cx="3035808" cy="365760"/>
+            <a:off x="7763256" y="3749040"/>
+            <a:ext cx="3172968" cy="356616"/>
           </a:xfrm>
           <a:prstGeom prst="rect">
             <a:avLst/>
@@ -4661,7 +4663,7 @@
               <a:buNone/>
             </a:pPr>
             <a:r>
-              <a:rPr lang="en-US" sz="1120" dirty="0">
+              <a:rPr lang="en-US" sz="1040" dirty="0">
                 <a:solidFill>
                   <a:srgbClr val="17364A"/>
                 </a:solidFill>
@@ -4669,9 +4671,9 @@
                 <a:ea typeface="Aptos" pitchFamily="34" charset="-122"/>
                 <a:cs typeface="Aptos" pitchFamily="34" charset="-120"/>
               </a:rPr>
-              <a:t>Responsible use depends on finding risks early, applying safeguards, and watching for drift or harm over time.</a:t>
-            </a:r>
-            <a:endParaRPr lang="en-US" sz="1120" dirty="0"/>
+              <a:t>Responsible use depends on finding risks early, applying safeguards,.</a:t>
+            </a:r>
+            <a:endParaRPr lang="en-US" sz="1040" dirty="0"/>
           </a:p>
         </p:txBody>
       </p:sp>
@@ -4683,12 +4685,12 @@
         </p:nvSpPr>
         <p:spPr>
           <a:xfrm>
-            <a:off x="7635240" y="4343400"/>
-            <a:ext cx="3474720" cy="1255471"/>
+            <a:off x="7543800" y="4389120"/>
+            <a:ext cx="3611880" cy="1261872"/>
           </a:xfrm>
           <a:prstGeom prst="roundRect">
             <a:avLst>
-              <a:gd name="adj" fmla="val 8740"/>
+              <a:gd name="adj" fmla="val 8696"/>
             </a:avLst>
           </a:prstGeom>
           <a:solidFill>
@@ -4710,8 +4712,8 @@
         </p:nvSpPr>
         <p:spPr>
           <a:xfrm>
-            <a:off x="7799832" y="4489704"/>
-            <a:ext cx="3145536" cy="256032"/>
+            <a:off x="7708392" y="4517136"/>
+            <a:ext cx="3282696" cy="228600"/>
           </a:xfrm>
           <a:prstGeom prst="rect">
             <a:avLst/>
@@ -4727,7 +4729,7 @@
               <a:buNone/>
             </a:pPr>
             <a:r>
-              <a:rPr lang="en-US" sz="1300" b="1" dirty="0">
+              <a:rPr lang="en-US" sz="1220" b="1" dirty="0">
                 <a:solidFill>
                   <a:srgbClr val="0068B7"/>
                 </a:solidFill>
@@ -4737,7 +4739,7 @@
               </a:rPr>
               <a:t>Safeguard to plan</a:t>
             </a:r>
-            <a:endParaRPr lang="en-US" sz="1300" dirty="0"/>
+            <a:endParaRPr lang="en-US" sz="1220" dirty="0"/>
           </a:p>
         </p:txBody>
       </p:sp>
@@ -4749,8 +4751,8 @@
         </p:nvSpPr>
         <p:spPr>
           <a:xfrm>
-            <a:off x="7799832" y="4818888"/>
-            <a:ext cx="3145536" cy="688543"/>
+            <a:off x="7708392" y="4828032"/>
+            <a:ext cx="3282696" cy="749808"/>
           </a:xfrm>
           <a:prstGeom prst="rect">
             <a:avLst/>
@@ -4768,7 +4770,7 @@
               <a:buNone/>
             </a:pPr>
             <a:r>
-              <a:rPr lang="en-US" sz="1320" dirty="0">
+              <a:rPr lang="en-US" sz="1220" dirty="0">
                 <a:solidFill>
                   <a:srgbClr val="17364A"/>
                 </a:solidFill>
@@ -4776,9 +4778,9 @@
                 <a:ea typeface="Aptos" pitchFamily="34" charset="-122"/>
                 <a:cs typeface="Aptos" pitchFamily="34" charset="-120"/>
               </a:rPr>
-              <a:t>Identify what could go wrong, who could be affected, what safeguards are needed, and what evidence should be reviewed before use.</a:t>
-            </a:r>
-            <a:endParaRPr lang="en-US" sz="1320" dirty="0"/>
+              <a:t>Identify what could go wrong, who could be affected, what safeguards are needed,.</a:t>
+            </a:r>
+            <a:endParaRPr lang="en-US" sz="1220" dirty="0"/>
           </a:p>
         </p:txBody>
       </p:sp>
@@ -5069,8 +5071,8 @@
         </p:nvSpPr>
         <p:spPr>
           <a:xfrm>
-            <a:off x="868680" y="1508760"/>
-            <a:ext cx="6309360" cy="4160520"/>
+            <a:off x="822960" y="1463040"/>
+            <a:ext cx="6565392" cy="4343400"/>
           </a:xfrm>
           <a:prstGeom prst="rect">
             <a:avLst/>
@@ -5088,7 +5090,7 @@
               <a:buNone/>
             </a:pPr>
             <a:r>
-              <a:rPr lang="en-US" sz="2100" dirty="0">
+              <a:rPr lang="en-US" sz="1920" dirty="0">
                 <a:solidFill>
                   <a:srgbClr val="003A63"/>
                 </a:solidFill>
@@ -5098,14 +5100,14 @@
               </a:rPr>
               <a:t>• Use cases moving forward without ownership, validation, or monitoring plans.</a:t>
             </a:r>
-            <a:endParaRPr lang="en-US" sz="2100" dirty="0"/>
-          </a:p>
-          <a:p>
-            <a:pPr indent="0" marL="0">
-              <a:buNone/>
-            </a:pPr>
-            <a:r>
-              <a:rPr lang="en-US" sz="2100" dirty="0">
+            <a:endParaRPr lang="en-US" sz="1920" dirty="0"/>
+          </a:p>
+          <a:p>
+            <a:pPr indent="0" marL="0">
+              <a:buNone/>
+            </a:pPr>
+            <a:r>
+              <a:rPr lang="en-US" sz="1920" dirty="0">
                 <a:solidFill>
                   <a:srgbClr val="003A63"/>
                 </a:solidFill>
@@ -5113,16 +5115,16 @@
                 <a:ea typeface="Aptos" pitchFamily="34" charset="-122"/>
                 <a:cs typeface="Aptos" pitchFamily="34" charset="-120"/>
               </a:rPr>
-              <a:t>• High-risk public-facing or decision-support uses being treated as low-risk productivity tools.</a:t>
-            </a:r>
-            <a:endParaRPr lang="en-US" sz="2100" dirty="0"/>
-          </a:p>
-          <a:p>
-            <a:pPr indent="0" marL="0">
-              <a:buNone/>
-            </a:pPr>
-            <a:r>
-              <a:rPr lang="en-US" sz="2100" dirty="0">
+              <a:t>• High-risk public-facing or decision-support uses being treated as low-risk.</a:t>
+            </a:r>
+            <a:endParaRPr lang="en-US" sz="1920" dirty="0"/>
+          </a:p>
+          <a:p>
+            <a:pPr indent="0" marL="0">
+              <a:buNone/>
+            </a:pPr>
+            <a:r>
+              <a:rPr lang="en-US" sz="1920" dirty="0">
                 <a:solidFill>
                   <a:srgbClr val="003A63"/>
                 </a:solidFill>
@@ -5132,7 +5134,7 @@
               </a:rPr>
               <a:t>• Equity, accessibility, and community impacts being considered too late.</a:t>
             </a:r>
-            <a:endParaRPr lang="en-US" sz="2100" dirty="0"/>
+            <a:endParaRPr lang="en-US" sz="1920" dirty="0"/>
           </a:p>
         </p:txBody>
       </p:sp>
@@ -5144,12 +5146,12 @@
         </p:nvSpPr>
         <p:spPr>
           <a:xfrm>
-            <a:off x="7635240" y="1325880"/>
-            <a:ext cx="3474720" cy="1207008"/>
+            <a:off x="7543800" y="1325880"/>
+            <a:ext cx="3611880" cy="1261872"/>
           </a:xfrm>
           <a:prstGeom prst="roundRect">
             <a:avLst>
-              <a:gd name="adj" fmla="val 9091"/>
+              <a:gd name="adj" fmla="val 8696"/>
             </a:avLst>
           </a:prstGeom>
           <a:solidFill>
@@ -5171,8 +5173,8 @@
         </p:nvSpPr>
         <p:spPr>
           <a:xfrm>
-            <a:off x="7799832" y="1472184"/>
-            <a:ext cx="3145536" cy="256032"/>
+            <a:off x="7708392" y="1453896"/>
+            <a:ext cx="3282696" cy="228600"/>
           </a:xfrm>
           <a:prstGeom prst="rect">
             <a:avLst/>
@@ -5188,7 +5190,7 @@
               <a:buNone/>
             </a:pPr>
             <a:r>
-              <a:rPr lang="en-US" sz="1300" b="1" dirty="0">
+              <a:rPr lang="en-US" sz="1220" b="1" dirty="0">
                 <a:solidFill>
                   <a:srgbClr val="0068B7"/>
                 </a:solidFill>
@@ -5198,7 +5200,7 @@
               </a:rPr>
               <a:t>Risk check</a:t>
             </a:r>
-            <a:endParaRPr lang="en-US" sz="1300" dirty="0"/>
+            <a:endParaRPr lang="en-US" sz="1220" dirty="0"/>
           </a:p>
         </p:txBody>
       </p:sp>
@@ -5210,8 +5212,8 @@
         </p:nvSpPr>
         <p:spPr>
           <a:xfrm>
-            <a:off x="7799832" y="1801368"/>
-            <a:ext cx="3145536" cy="640080"/>
+            <a:off x="7708392" y="1764792"/>
+            <a:ext cx="3282696" cy="749808"/>
           </a:xfrm>
           <a:prstGeom prst="rect">
             <a:avLst/>
@@ -5229,7 +5231,7 @@
               <a:buNone/>
             </a:pPr>
             <a:r>
-              <a:rPr lang="en-US" sz="1320" dirty="0">
+              <a:rPr lang="en-US" sz="1220" dirty="0">
                 <a:solidFill>
                   <a:srgbClr val="17364A"/>
                 </a:solidFill>
@@ -5239,7 +5241,7 @@
               </a:rPr>
               <a:t>Use cases moving forward without ownership, validation, or monitoring plans.</a:t>
             </a:r>
-            <a:endParaRPr lang="en-US" sz="1320" dirty="0"/>
+            <a:endParaRPr lang="en-US" sz="1220" dirty="0"/>
           </a:p>
         </p:txBody>
       </p:sp>
@@ -5251,12 +5253,12 @@
         </p:nvSpPr>
         <p:spPr>
           <a:xfrm>
-            <a:off x="7635240" y="2670048"/>
-            <a:ext cx="3474720" cy="1536192"/>
+            <a:off x="7543800" y="2724912"/>
+            <a:ext cx="3611880" cy="1527048"/>
           </a:xfrm>
           <a:prstGeom prst="roundRect">
             <a:avLst>
-              <a:gd name="adj" fmla="val 7143"/>
+              <a:gd name="adj" fmla="val 7186"/>
             </a:avLst>
           </a:prstGeom>
           <a:solidFill>
@@ -5278,24 +5280,26 @@
         </p:nvSpPr>
         <p:spPr>
           <a:xfrm>
-            <a:off x="7799832" y="2798064"/>
-            <a:ext cx="3145536" cy="237744"/>
-          </a:xfrm>
-          <a:prstGeom prst="rect">
-            <a:avLst/>
-          </a:prstGeom>
-          <a:noFill/>
-          <a:ln/>
-        </p:spPr>
-        <p:txBody>
-          <a:bodyPr wrap="square" lIns="0" tIns="0" rIns="0" bIns="0" rtlCol="0" anchor="ctr"/>
-          <a:lstStyle/>
-          <a:p>
-            <a:pPr indent="0" marL="0">
-              <a:buNone/>
-            </a:pPr>
-            <a:r>
-              <a:rPr lang="en-US" sz="1250" b="1" dirty="0">
+            <a:off x="7708392" y="2852928"/>
+            <a:ext cx="3282696" cy="219456"/>
+          </a:xfrm>
+          <a:prstGeom prst="rect">
+            <a:avLst/>
+          </a:prstGeom>
+          <a:noFill/>
+          <a:ln/>
+        </p:spPr>
+        <p:txBody>
+          <a:bodyPr wrap="square" lIns="0" tIns="0" rIns="0" bIns="0" rtlCol="0" anchor="ctr">
+            <a:normAutofit/>
+          </a:bodyPr>
+          <a:lstStyle/>
+          <a:p>
+            <a:pPr indent="0" marL="0">
+              <a:buNone/>
+            </a:pPr>
+            <a:r>
+              <a:rPr lang="en-US" sz="1160" b="1" dirty="0">
                 <a:solidFill>
                   <a:srgbClr val="0068B7"/>
                 </a:solidFill>
@@ -5305,7 +5309,7 @@
               </a:rPr>
               <a:t>Risk control loop</a:t>
             </a:r>
-            <a:endParaRPr lang="en-US" sz="1250" dirty="0"/>
+            <a:endParaRPr lang="en-US" sz="1160" dirty="0"/>
           </a:p>
         </p:txBody>
       </p:sp>
@@ -5317,7 +5321,7 @@
         </p:nvSpPr>
         <p:spPr>
           <a:xfrm>
-            <a:off x="8763000" y="3351276"/>
+            <a:off x="8717280" y="3406140"/>
             <a:ext cx="164592" cy="0"/>
           </a:xfrm>
           <a:prstGeom prst="line">
@@ -5340,8 +5344,8 @@
         </p:nvSpPr>
         <p:spPr>
           <a:xfrm>
-            <a:off x="7872984" y="3200400"/>
-            <a:ext cx="890016" cy="301752"/>
+            <a:off x="7781544" y="3255264"/>
+            <a:ext cx="935736" cy="301752"/>
           </a:xfrm>
           <a:prstGeom prst="roundRect">
             <a:avLst>
@@ -5367,8 +5371,8 @@
         </p:nvSpPr>
         <p:spPr>
           <a:xfrm>
-            <a:off x="7909560" y="3273552"/>
-            <a:ext cx="816864" cy="146304"/>
+            <a:off x="7818120" y="3328416"/>
+            <a:ext cx="862584" cy="146304"/>
           </a:xfrm>
           <a:prstGeom prst="rect">
             <a:avLst/>
@@ -5408,7 +5412,7 @@
         </p:nvSpPr>
         <p:spPr>
           <a:xfrm>
-            <a:off x="9817608" y="3351276"/>
+            <a:off x="9817608" y="3406140"/>
             <a:ext cx="164592" cy="0"/>
           </a:xfrm>
           <a:prstGeom prst="line">
@@ -5431,8 +5435,8 @@
         </p:nvSpPr>
         <p:spPr>
           <a:xfrm>
-            <a:off x="8927592" y="3200400"/>
-            <a:ext cx="890016" cy="301752"/>
+            <a:off x="8881872" y="3255264"/>
+            <a:ext cx="935736" cy="301752"/>
           </a:xfrm>
           <a:prstGeom prst="roundRect">
             <a:avLst>
@@ -5458,8 +5462,8 @@
         </p:nvSpPr>
         <p:spPr>
           <a:xfrm>
-            <a:off x="8964168" y="3273552"/>
-            <a:ext cx="816864" cy="146304"/>
+            <a:off x="8918448" y="3328416"/>
+            <a:ext cx="862584" cy="146304"/>
           </a:xfrm>
           <a:prstGeom prst="rect">
             <a:avLst/>
@@ -5499,8 +5503,8 @@
         </p:nvSpPr>
         <p:spPr>
           <a:xfrm>
-            <a:off x="9982200" y="3200400"/>
-            <a:ext cx="890016" cy="301752"/>
+            <a:off x="9982200" y="3255264"/>
+            <a:ext cx="935736" cy="301752"/>
           </a:xfrm>
           <a:prstGeom prst="roundRect">
             <a:avLst>
@@ -5526,8 +5530,8 @@
         </p:nvSpPr>
         <p:spPr>
           <a:xfrm>
-            <a:off x="10018776" y="3273552"/>
-            <a:ext cx="816864" cy="146304"/>
+            <a:off x="10018776" y="3328416"/>
+            <a:ext cx="862584" cy="146304"/>
           </a:xfrm>
           <a:prstGeom prst="rect">
             <a:avLst/>
@@ -5567,8 +5571,8 @@
         </p:nvSpPr>
         <p:spPr>
           <a:xfrm>
-            <a:off x="7854696" y="3694176"/>
-            <a:ext cx="3035808" cy="365760"/>
+            <a:off x="7763256" y="3749040"/>
+            <a:ext cx="3172968" cy="356616"/>
           </a:xfrm>
           <a:prstGeom prst="rect">
             <a:avLst/>
@@ -5586,7 +5590,7 @@
               <a:buNone/>
             </a:pPr>
             <a:r>
-              <a:rPr lang="en-US" sz="1120" dirty="0">
+              <a:rPr lang="en-US" sz="1040" dirty="0">
                 <a:solidFill>
                   <a:srgbClr val="17364A"/>
                 </a:solidFill>
@@ -5594,9 +5598,9 @@
                 <a:ea typeface="Aptos" pitchFamily="34" charset="-122"/>
                 <a:cs typeface="Aptos" pitchFamily="34" charset="-120"/>
               </a:rPr>
-              <a:t>Responsible use depends on finding risks early, applying safeguards, and watching for drift or harm over time.</a:t>
-            </a:r>
-            <a:endParaRPr lang="en-US" sz="1120" dirty="0"/>
+              <a:t>Responsible use depends on finding risks early, applying safeguards,.</a:t>
+            </a:r>
+            <a:endParaRPr lang="en-US" sz="1040" dirty="0"/>
           </a:p>
         </p:txBody>
       </p:sp>
@@ -5608,12 +5612,12 @@
         </p:nvSpPr>
         <p:spPr>
           <a:xfrm>
-            <a:off x="7635240" y="4343400"/>
-            <a:ext cx="3474720" cy="1255471"/>
+            <a:off x="7543800" y="4389120"/>
+            <a:ext cx="3611880" cy="1261872"/>
           </a:xfrm>
           <a:prstGeom prst="roundRect">
             <a:avLst>
-              <a:gd name="adj" fmla="val 8740"/>
+              <a:gd name="adj" fmla="val 8696"/>
             </a:avLst>
           </a:prstGeom>
           <a:solidFill>
@@ -5635,8 +5639,8 @@
         </p:nvSpPr>
         <p:spPr>
           <a:xfrm>
-            <a:off x="7799832" y="4489704"/>
-            <a:ext cx="3145536" cy="256032"/>
+            <a:off x="7708392" y="4517136"/>
+            <a:ext cx="3282696" cy="228600"/>
           </a:xfrm>
           <a:prstGeom prst="rect">
             <a:avLst/>
@@ -5652,7 +5656,7 @@
               <a:buNone/>
             </a:pPr>
             <a:r>
-              <a:rPr lang="en-US" sz="1300" b="1" dirty="0">
+              <a:rPr lang="en-US" sz="1220" b="1" dirty="0">
                 <a:solidFill>
                   <a:srgbClr val="0068B7"/>
                 </a:solidFill>
@@ -5662,7 +5666,7 @@
               </a:rPr>
               <a:t>Safeguard to plan</a:t>
             </a:r>
-            <a:endParaRPr lang="en-US" sz="1300" dirty="0"/>
+            <a:endParaRPr lang="en-US" sz="1220" dirty="0"/>
           </a:p>
         </p:txBody>
       </p:sp>
@@ -5674,8 +5678,8 @@
         </p:nvSpPr>
         <p:spPr>
           <a:xfrm>
-            <a:off x="7799832" y="4818888"/>
-            <a:ext cx="3145536" cy="688543"/>
+            <a:off x="7708392" y="4828032"/>
+            <a:ext cx="3282696" cy="749808"/>
           </a:xfrm>
           <a:prstGeom prst="rect">
             <a:avLst/>
@@ -5693,7 +5697,7 @@
               <a:buNone/>
             </a:pPr>
             <a:r>
-              <a:rPr lang="en-US" sz="1320" dirty="0">
+              <a:rPr lang="en-US" sz="1220" dirty="0">
                 <a:solidFill>
                   <a:srgbClr val="17364A"/>
                 </a:solidFill>
@@ -5701,9 +5705,9 @@
                 <a:ea typeface="Aptos" pitchFamily="34" charset="-122"/>
                 <a:cs typeface="Aptos" pitchFamily="34" charset="-120"/>
               </a:rPr>
-              <a:t>Identify what could go wrong, who could be affected, what safeguards are needed, and what evidence should be reviewed before use.</a:t>
-            </a:r>
-            <a:endParaRPr lang="en-US" sz="1320" dirty="0"/>
+              <a:t>Identify what could go wrong, who could be affected, what safeguards are needed,.</a:t>
+            </a:r>
+            <a:endParaRPr lang="en-US" sz="1220" dirty="0"/>
           </a:p>
         </p:txBody>
       </p:sp>
@@ -5994,8 +5998,8 @@
         </p:nvSpPr>
         <p:spPr>
           <a:xfrm>
-            <a:off x="868680" y="1508760"/>
-            <a:ext cx="6309360" cy="4160520"/>
+            <a:off x="822960" y="1463040"/>
+            <a:ext cx="6565392" cy="4343400"/>
           </a:xfrm>
           <a:prstGeom prst="rect">
             <a:avLst/>
@@ -6013,7 +6017,7 @@
               <a:buNone/>
             </a:pPr>
             <a:r>
-              <a:rPr lang="en-US" sz="2100" dirty="0">
+              <a:rPr lang="en-US" sz="1920" dirty="0">
                 <a:solidFill>
                   <a:srgbClr val="003A63"/>
                 </a:solidFill>
@@ -6023,14 +6027,14 @@
               </a:rPr>
               <a:t>• Recommended guardrails include the following:</a:t>
             </a:r>
-            <a:endParaRPr lang="en-US" sz="2100" dirty="0"/>
-          </a:p>
-          <a:p>
-            <a:pPr indent="0" marL="0">
-              <a:buNone/>
-            </a:pPr>
-            <a:r>
-              <a:rPr lang="en-US" sz="2100" dirty="0">
+            <a:endParaRPr lang="en-US" sz="1920" dirty="0"/>
+          </a:p>
+          <a:p>
+            <a:pPr indent="0" marL="0">
+              <a:buNone/>
+            </a:pPr>
+            <a:r>
+              <a:rPr lang="en-US" sz="1920" dirty="0">
                 <a:solidFill>
                   <a:srgbClr val="003A63"/>
                 </a:solidFill>
@@ -6040,14 +6044,14 @@
               </a:rPr>
               <a:t>• Require a standard intake worksheet before piloting or procuring AI tools.</a:t>
             </a:r>
-            <a:endParaRPr lang="en-US" sz="2100" dirty="0"/>
-          </a:p>
-          <a:p>
-            <a:pPr indent="0" marL="0">
-              <a:buNone/>
-            </a:pPr>
-            <a:r>
-              <a:rPr lang="en-US" sz="2100" dirty="0">
+            <a:endParaRPr lang="en-US" sz="1920" dirty="0"/>
+          </a:p>
+          <a:p>
+            <a:pPr indent="0" marL="0">
+              <a:buNone/>
+            </a:pPr>
+            <a:r>
+              <a:rPr lang="en-US" sz="1920" dirty="0">
                 <a:solidFill>
                   <a:srgbClr val="003A63"/>
                 </a:solidFill>
@@ -6055,9 +6059,9 @@
                 <a:ea typeface="Aptos" pitchFamily="34" charset="-122"/>
                 <a:cs typeface="Aptos" pitchFamily="34" charset="-120"/>
               </a:rPr>
-              <a:t>• Classify proposed uses by data sensitivity, automation level, public-facing impact, and.</a:t>
-            </a:r>
-            <a:endParaRPr lang="en-US" sz="2100" dirty="0"/>
+              <a:t>• Classify proposed uses by data sensitivity, automation level, public-facing.</a:t>
+            </a:r>
+            <a:endParaRPr lang="en-US" sz="1920" dirty="0"/>
           </a:p>
         </p:txBody>
       </p:sp>
@@ -6069,12 +6073,12 @@
         </p:nvSpPr>
         <p:spPr>
           <a:xfrm>
-            <a:off x="7635240" y="1325880"/>
-            <a:ext cx="3474720" cy="1207008"/>
+            <a:off x="7543800" y="1325880"/>
+            <a:ext cx="3611880" cy="1261872"/>
           </a:xfrm>
           <a:prstGeom prst="roundRect">
             <a:avLst>
-              <a:gd name="adj" fmla="val 9091"/>
+              <a:gd name="adj" fmla="val 8696"/>
             </a:avLst>
           </a:prstGeom>
           <a:solidFill>
@@ -6096,8 +6100,8 @@
         </p:nvSpPr>
         <p:spPr>
           <a:xfrm>
-            <a:off x="7799832" y="1472184"/>
-            <a:ext cx="3145536" cy="256032"/>
+            <a:off x="7708392" y="1453896"/>
+            <a:ext cx="3282696" cy="228600"/>
           </a:xfrm>
           <a:prstGeom prst="rect">
             <a:avLst/>
@@ -6113,7 +6117,7 @@
               <a:buNone/>
             </a:pPr>
             <a:r>
-              <a:rPr lang="en-US" sz="1300" b="1" dirty="0">
+              <a:rPr lang="en-US" sz="1220" b="1" dirty="0">
                 <a:solidFill>
                   <a:srgbClr val="0068B7"/>
                 </a:solidFill>
@@ -6123,7 +6127,7 @@
               </a:rPr>
               <a:t>Risk check</a:t>
             </a:r>
-            <a:endParaRPr lang="en-US" sz="1300" dirty="0"/>
+            <a:endParaRPr lang="en-US" sz="1220" dirty="0"/>
           </a:p>
         </p:txBody>
       </p:sp>
@@ -6135,8 +6139,8 @@
         </p:nvSpPr>
         <p:spPr>
           <a:xfrm>
-            <a:off x="7799832" y="1801368"/>
-            <a:ext cx="3145536" cy="640080"/>
+            <a:off x="7708392" y="1764792"/>
+            <a:ext cx="3282696" cy="749808"/>
           </a:xfrm>
           <a:prstGeom prst="rect">
             <a:avLst/>
@@ -6154,7 +6158,7 @@
               <a:buNone/>
             </a:pPr>
             <a:r>
-              <a:rPr lang="en-US" sz="1320" dirty="0">
+              <a:rPr lang="en-US" sz="1220" dirty="0">
                 <a:solidFill>
                   <a:srgbClr val="17364A"/>
                 </a:solidFill>
@@ -6164,7 +6168,7 @@
               </a:rPr>
               <a:t>Recommended guardrails include the following:</a:t>
             </a:r>
-            <a:endParaRPr lang="en-US" sz="1320" dirty="0"/>
+            <a:endParaRPr lang="en-US" sz="1220" dirty="0"/>
           </a:p>
         </p:txBody>
       </p:sp>
@@ -6176,12 +6180,12 @@
         </p:nvSpPr>
         <p:spPr>
           <a:xfrm>
-            <a:off x="7635240" y="2670048"/>
-            <a:ext cx="3474720" cy="1536192"/>
+            <a:off x="7543800" y="2724912"/>
+            <a:ext cx="3611880" cy="1527048"/>
           </a:xfrm>
           <a:prstGeom prst="roundRect">
             <a:avLst>
-              <a:gd name="adj" fmla="val 7143"/>
+              <a:gd name="adj" fmla="val 7186"/>
             </a:avLst>
           </a:prstGeom>
           <a:solidFill>
@@ -6203,8 +6207,8 @@
         </p:nvSpPr>
         <p:spPr>
           <a:xfrm>
-            <a:off x="7799832" y="2816352"/>
-            <a:ext cx="3145536" cy="256032"/>
+            <a:off x="7708392" y="2852928"/>
+            <a:ext cx="3282696" cy="228600"/>
           </a:xfrm>
           <a:prstGeom prst="rect">
             <a:avLst/>
@@ -6220,7 +6224,7 @@
               <a:buNone/>
             </a:pPr>
             <a:r>
-              <a:rPr lang="en-US" sz="1300" b="1" dirty="0">
+              <a:rPr lang="en-US" sz="1220" b="1" dirty="0">
                 <a:solidFill>
                   <a:srgbClr val="0068B7"/>
                 </a:solidFill>
@@ -6230,7 +6234,7 @@
               </a:rPr>
               <a:t>Concept checkpoints</a:t>
             </a:r>
-            <a:endParaRPr lang="en-US" sz="1300" dirty="0"/>
+            <a:endParaRPr lang="en-US" sz="1220" dirty="0"/>
           </a:p>
         </p:txBody>
       </p:sp>
@@ -6242,8 +6246,8 @@
         </p:nvSpPr>
         <p:spPr>
           <a:xfrm>
-            <a:off x="7818120" y="3182112"/>
-            <a:ext cx="3090672" cy="877824"/>
+            <a:off x="7726680" y="3182112"/>
+            <a:ext cx="3227832" cy="960120"/>
           </a:xfrm>
           <a:prstGeom prst="rect">
             <a:avLst/>
@@ -6261,7 +6265,7 @@
               <a:buNone/>
             </a:pPr>
             <a:r>
-              <a:rPr lang="en-US" sz="1220" dirty="0">
+              <a:rPr lang="en-US" sz="1140" dirty="0">
                 <a:solidFill>
                   <a:srgbClr val="17364A"/>
                 </a:solidFill>
@@ -6271,14 +6275,14 @@
               </a:rPr>
               <a:t>Recommended guardrails include the following:</a:t>
             </a:r>
-            <a:endParaRPr lang="en-US" sz="1220" dirty="0"/>
-          </a:p>
-          <a:p>
-            <a:pPr indent="0" marL="0">
-              <a:buNone/>
-            </a:pPr>
-            <a:r>
-              <a:rPr lang="en-US" sz="1220" dirty="0">
+            <a:endParaRPr lang="en-US" sz="1140" dirty="0"/>
+          </a:p>
+          <a:p>
+            <a:pPr indent="0" marL="0">
+              <a:buNone/>
+            </a:pPr>
+            <a:r>
+              <a:rPr lang="en-US" sz="1140" dirty="0">
                 <a:solidFill>
                   <a:srgbClr val="17364A"/>
                 </a:solidFill>
@@ -6286,16 +6290,16 @@
                 <a:ea typeface="Aptos" pitchFamily="34" charset="-122"/>
                 <a:cs typeface="Aptos" pitchFamily="34" charset="-120"/>
               </a:rPr>
-              <a:t>Require a standard intake worksheet before piloting or procuring.</a:t>
-            </a:r>
-            <a:endParaRPr lang="en-US" sz="1220" dirty="0"/>
-          </a:p>
-          <a:p>
-            <a:pPr indent="0" marL="0">
-              <a:buNone/>
-            </a:pPr>
-            <a:r>
-              <a:rPr lang="en-US" sz="1220" dirty="0">
+              <a:t>Require a standard intake worksheet before.</a:t>
+            </a:r>
+            <a:endParaRPr lang="en-US" sz="1140" dirty="0"/>
+          </a:p>
+          <a:p>
+            <a:pPr indent="0" marL="0">
+              <a:buNone/>
+            </a:pPr>
+            <a:r>
+              <a:rPr lang="en-US" sz="1140" dirty="0">
                 <a:solidFill>
                   <a:srgbClr val="17364A"/>
                 </a:solidFill>
@@ -6303,9 +6307,9 @@
                 <a:ea typeface="Aptos" pitchFamily="34" charset="-122"/>
                 <a:cs typeface="Aptos" pitchFamily="34" charset="-120"/>
               </a:rPr>
-              <a:t>Classify proposed uses by data sensitivity, automation level,.</a:t>
-            </a:r>
-            <a:endParaRPr lang="en-US" sz="1220" dirty="0"/>
+              <a:t>Classify proposed uses by data sensitivity,.</a:t>
+            </a:r>
+            <a:endParaRPr lang="en-US" sz="1140" dirty="0"/>
           </a:p>
         </p:txBody>
       </p:sp>
@@ -6317,12 +6321,12 @@
         </p:nvSpPr>
         <p:spPr>
           <a:xfrm>
-            <a:off x="7635240" y="4343400"/>
-            <a:ext cx="3474720" cy="1255471"/>
+            <a:off x="7543800" y="4389120"/>
+            <a:ext cx="3611880" cy="1261872"/>
           </a:xfrm>
           <a:prstGeom prst="roundRect">
             <a:avLst>
-              <a:gd name="adj" fmla="val 8740"/>
+              <a:gd name="adj" fmla="val 8696"/>
             </a:avLst>
           </a:prstGeom>
           <a:solidFill>
@@ -6344,8 +6348,8 @@
         </p:nvSpPr>
         <p:spPr>
           <a:xfrm>
-            <a:off x="7799832" y="4489704"/>
-            <a:ext cx="3145536" cy="256032"/>
+            <a:off x="7708392" y="4517136"/>
+            <a:ext cx="3282696" cy="228600"/>
           </a:xfrm>
           <a:prstGeom prst="rect">
             <a:avLst/>
@@ -6361,7 +6365,7 @@
               <a:buNone/>
             </a:pPr>
             <a:r>
-              <a:rPr lang="en-US" sz="1300" b="1" dirty="0">
+              <a:rPr lang="en-US" sz="1220" b="1" dirty="0">
                 <a:solidFill>
                   <a:srgbClr val="0068B7"/>
                 </a:solidFill>
@@ -6371,7 +6375,7 @@
               </a:rPr>
               <a:t>Safeguard to plan</a:t>
             </a:r>
-            <a:endParaRPr lang="en-US" sz="1300" dirty="0"/>
+            <a:endParaRPr lang="en-US" sz="1220" dirty="0"/>
           </a:p>
         </p:txBody>
       </p:sp>
@@ -6383,8 +6387,8 @@
         </p:nvSpPr>
         <p:spPr>
           <a:xfrm>
-            <a:off x="7799832" y="4818888"/>
-            <a:ext cx="3145536" cy="688543"/>
+            <a:off x="7708392" y="4828032"/>
+            <a:ext cx="3282696" cy="749808"/>
           </a:xfrm>
           <a:prstGeom prst="rect">
             <a:avLst/>
@@ -6402,7 +6406,7 @@
               <a:buNone/>
             </a:pPr>
             <a:r>
-              <a:rPr lang="en-US" sz="1320" dirty="0">
+              <a:rPr lang="en-US" sz="1220" dirty="0">
                 <a:solidFill>
                   <a:srgbClr val="17364A"/>
                 </a:solidFill>
@@ -6410,9 +6414,9 @@
                 <a:ea typeface="Aptos" pitchFamily="34" charset="-122"/>
                 <a:cs typeface="Aptos" pitchFamily="34" charset="-120"/>
               </a:rPr>
-              <a:t>Identify what could go wrong, who could be affected, what safeguards are needed, and what evidence should be reviewed before use.</a:t>
-            </a:r>
-            <a:endParaRPr lang="en-US" sz="1320" dirty="0"/>
+              <a:t>Identify what could go wrong, who could be affected, what safeguards are needed,.</a:t>
+            </a:r>
+            <a:endParaRPr lang="en-US" sz="1220" dirty="0"/>
           </a:p>
         </p:txBody>
       </p:sp>
@@ -6703,8 +6707,8 @@
         </p:nvSpPr>
         <p:spPr>
           <a:xfrm>
-            <a:off x="868680" y="1508760"/>
-            <a:ext cx="6309360" cy="4160520"/>
+            <a:off x="822960" y="1463040"/>
+            <a:ext cx="6565392" cy="4343400"/>
           </a:xfrm>
           <a:prstGeom prst="rect">
             <a:avLst/>
@@ -6722,7 +6726,7 @@
               <a:buNone/>
             </a:pPr>
             <a:r>
-              <a:rPr lang="en-US" sz="2100" dirty="0">
+              <a:rPr lang="en-US" sz="1920" dirty="0">
                 <a:solidFill>
                   <a:srgbClr val="003A63"/>
                 </a:solidFill>
@@ -6732,14 +6736,14 @@
               </a:rPr>
               <a:t>• Route use cases to required reviewers before implementation begins.</a:t>
             </a:r>
-            <a:endParaRPr lang="en-US" sz="2100" dirty="0"/>
-          </a:p>
-          <a:p>
-            <a:pPr indent="0" marL="0">
-              <a:buNone/>
-            </a:pPr>
-            <a:r>
-              <a:rPr lang="en-US" sz="2100" dirty="0">
+            <a:endParaRPr lang="en-US" sz="1920" dirty="0"/>
+          </a:p>
+          <a:p>
+            <a:pPr indent="0" marL="0">
+              <a:buNone/>
+            </a:pPr>
+            <a:r>
+              <a:rPr lang="en-US" sz="1920" dirty="0">
                 <a:solidFill>
                   <a:srgbClr val="003A63"/>
                 </a:solidFill>
@@ -6749,14 +6753,14 @@
               </a:rPr>
               <a:t>• Document use cases that are rejected, deferred, or approved with conditions.</a:t>
             </a:r>
-            <a:endParaRPr lang="en-US" sz="2100" dirty="0"/>
-          </a:p>
-          <a:p>
-            <a:pPr indent="0" marL="0">
-              <a:buNone/>
-            </a:pPr>
-            <a:r>
-              <a:rPr lang="en-US" sz="2100" dirty="0">
+            <a:endParaRPr lang="en-US" sz="1920" dirty="0"/>
+          </a:p>
+          <a:p>
+            <a:pPr indent="0" marL="0">
+              <a:buNone/>
+            </a:pPr>
+            <a:r>
+              <a:rPr lang="en-US" sz="1920" dirty="0">
                 <a:solidFill>
                   <a:srgbClr val="003A63"/>
                 </a:solidFill>
@@ -6766,7 +6770,7 @@
               </a:rPr>
               <a:t>• Maintain a portfolio view of approved, active, paused, and retired AI uses.</a:t>
             </a:r>
-            <a:endParaRPr lang="en-US" sz="2100" dirty="0"/>
+            <a:endParaRPr lang="en-US" sz="1920" dirty="0"/>
           </a:p>
         </p:txBody>
       </p:sp>
@@ -6778,12 +6782,12 @@
         </p:nvSpPr>
         <p:spPr>
           <a:xfrm>
-            <a:off x="7635240" y="1325880"/>
-            <a:ext cx="3474720" cy="1207008"/>
+            <a:off x="7543800" y="1325880"/>
+            <a:ext cx="3611880" cy="1261872"/>
           </a:xfrm>
           <a:prstGeom prst="roundRect">
             <a:avLst>
-              <a:gd name="adj" fmla="val 9091"/>
+              <a:gd name="adj" fmla="val 8696"/>
             </a:avLst>
           </a:prstGeom>
           <a:solidFill>
@@ -6805,8 +6809,8 @@
         </p:nvSpPr>
         <p:spPr>
           <a:xfrm>
-            <a:off x="7799832" y="1472184"/>
-            <a:ext cx="3145536" cy="256032"/>
+            <a:off x="7708392" y="1453896"/>
+            <a:ext cx="3282696" cy="228600"/>
           </a:xfrm>
           <a:prstGeom prst="rect">
             <a:avLst/>
@@ -6822,7 +6826,7 @@
               <a:buNone/>
             </a:pPr>
             <a:r>
-              <a:rPr lang="en-US" sz="1300" b="1" dirty="0">
+              <a:rPr lang="en-US" sz="1220" b="1" dirty="0">
                 <a:solidFill>
                   <a:srgbClr val="0068B7"/>
                 </a:solidFill>
@@ -6832,7 +6836,7 @@
               </a:rPr>
               <a:t>Risk check</a:t>
             </a:r>
-            <a:endParaRPr lang="en-US" sz="1300" dirty="0"/>
+            <a:endParaRPr lang="en-US" sz="1220" dirty="0"/>
           </a:p>
         </p:txBody>
       </p:sp>
@@ -6844,8 +6848,8 @@
         </p:nvSpPr>
         <p:spPr>
           <a:xfrm>
-            <a:off x="7799832" y="1801368"/>
-            <a:ext cx="3145536" cy="640080"/>
+            <a:off x="7708392" y="1764792"/>
+            <a:ext cx="3282696" cy="749808"/>
           </a:xfrm>
           <a:prstGeom prst="rect">
             <a:avLst/>
@@ -6863,7 +6867,7 @@
               <a:buNone/>
             </a:pPr>
             <a:r>
-              <a:rPr lang="en-US" sz="1320" dirty="0">
+              <a:rPr lang="en-US" sz="1220" dirty="0">
                 <a:solidFill>
                   <a:srgbClr val="17364A"/>
                 </a:solidFill>
@@ -6873,7 +6877,7 @@
               </a:rPr>
               <a:t>Route use cases to required reviewers before implementation begins.</a:t>
             </a:r>
-            <a:endParaRPr lang="en-US" sz="1320" dirty="0"/>
+            <a:endParaRPr lang="en-US" sz="1220" dirty="0"/>
           </a:p>
         </p:txBody>
       </p:sp>
@@ -6885,12 +6889,12 @@
         </p:nvSpPr>
         <p:spPr>
           <a:xfrm>
-            <a:off x="7635240" y="2670048"/>
-            <a:ext cx="3474720" cy="1536192"/>
+            <a:off x="7543800" y="2724912"/>
+            <a:ext cx="3611880" cy="1527048"/>
           </a:xfrm>
           <a:prstGeom prst="roundRect">
             <a:avLst>
-              <a:gd name="adj" fmla="val 7143"/>
+              <a:gd name="adj" fmla="val 7186"/>
             </a:avLst>
           </a:prstGeom>
           <a:solidFill>
@@ -6912,8 +6916,8 @@
         </p:nvSpPr>
         <p:spPr>
           <a:xfrm>
-            <a:off x="7799832" y="2816352"/>
-            <a:ext cx="3145536" cy="256032"/>
+            <a:off x="7708392" y="2852928"/>
+            <a:ext cx="3282696" cy="228600"/>
           </a:xfrm>
           <a:prstGeom prst="rect">
             <a:avLst/>
@@ -6929,7 +6933,7 @@
               <a:buNone/>
             </a:pPr>
             <a:r>
-              <a:rPr lang="en-US" sz="1300" b="1" dirty="0">
+              <a:rPr lang="en-US" sz="1220" b="1" dirty="0">
                 <a:solidFill>
                   <a:srgbClr val="0068B7"/>
                 </a:solidFill>
@@ -6939,7 +6943,7 @@
               </a:rPr>
               <a:t>Concept checkpoints</a:t>
             </a:r>
-            <a:endParaRPr lang="en-US" sz="1300" dirty="0"/>
+            <a:endParaRPr lang="en-US" sz="1220" dirty="0"/>
           </a:p>
         </p:txBody>
       </p:sp>
@@ -6951,8 +6955,8 @@
         </p:nvSpPr>
         <p:spPr>
           <a:xfrm>
-            <a:off x="7818120" y="3182112"/>
-            <a:ext cx="3090672" cy="877824"/>
+            <a:off x="7726680" y="3182112"/>
+            <a:ext cx="3227832" cy="960120"/>
           </a:xfrm>
           <a:prstGeom prst="rect">
             <a:avLst/>
@@ -6970,7 +6974,7 @@
               <a:buNone/>
             </a:pPr>
             <a:r>
-              <a:rPr lang="en-US" sz="1220" dirty="0">
+              <a:rPr lang="en-US" sz="1140" dirty="0">
                 <a:solidFill>
                   <a:srgbClr val="17364A"/>
                 </a:solidFill>
@@ -6978,16 +6982,16 @@
                 <a:ea typeface="Aptos" pitchFamily="34" charset="-122"/>
                 <a:cs typeface="Aptos" pitchFamily="34" charset="-120"/>
               </a:rPr>
-              <a:t>Route use cases to required reviewers before implementation begins.</a:t>
-            </a:r>
-            <a:endParaRPr lang="en-US" sz="1220" dirty="0"/>
-          </a:p>
-          <a:p>
-            <a:pPr indent="0" marL="0">
-              <a:buNone/>
-            </a:pPr>
-            <a:r>
-              <a:rPr lang="en-US" sz="1220" dirty="0">
+              <a:t>Route use cases to required reviewers before.</a:t>
+            </a:r>
+            <a:endParaRPr lang="en-US" sz="1140" dirty="0"/>
+          </a:p>
+          <a:p>
+            <a:pPr indent="0" marL="0">
+              <a:buNone/>
+            </a:pPr>
+            <a:r>
+              <a:rPr lang="en-US" sz="1140" dirty="0">
                 <a:solidFill>
                   <a:srgbClr val="17364A"/>
                 </a:solidFill>
@@ -6995,16 +6999,16 @@
                 <a:ea typeface="Aptos" pitchFamily="34" charset="-122"/>
                 <a:cs typeface="Aptos" pitchFamily="34" charset="-120"/>
               </a:rPr>
-              <a:t>Document use cases that are rejected, deferred, or approved with.</a:t>
-            </a:r>
-            <a:endParaRPr lang="en-US" sz="1220" dirty="0"/>
-          </a:p>
-          <a:p>
-            <a:pPr indent="0" marL="0">
-              <a:buNone/>
-            </a:pPr>
-            <a:r>
-              <a:rPr lang="en-US" sz="1220" dirty="0">
+              <a:t>Document use cases that are rejected, deferred, or.</a:t>
+            </a:r>
+            <a:endParaRPr lang="en-US" sz="1140" dirty="0"/>
+          </a:p>
+          <a:p>
+            <a:pPr indent="0" marL="0">
+              <a:buNone/>
+            </a:pPr>
+            <a:r>
+              <a:rPr lang="en-US" sz="1140" dirty="0">
                 <a:solidFill>
                   <a:srgbClr val="17364A"/>
                 </a:solidFill>
@@ -7012,9 +7016,9 @@
                 <a:ea typeface="Aptos" pitchFamily="34" charset="-122"/>
                 <a:cs typeface="Aptos" pitchFamily="34" charset="-120"/>
               </a:rPr>
-              <a:t>Maintain a portfolio view of approved, active, paused, and retired.</a:t>
-            </a:r>
-            <a:endParaRPr lang="en-US" sz="1220" dirty="0"/>
+              <a:t>Maintain a portfolio view of approved, active,.</a:t>
+            </a:r>
+            <a:endParaRPr lang="en-US" sz="1140" dirty="0"/>
           </a:p>
         </p:txBody>
       </p:sp>
@@ -7026,12 +7030,12 @@
         </p:nvSpPr>
         <p:spPr>
           <a:xfrm>
-            <a:off x="7635240" y="4343400"/>
-            <a:ext cx="3474720" cy="1255471"/>
+            <a:off x="7543800" y="4389120"/>
+            <a:ext cx="3611880" cy="1261872"/>
           </a:xfrm>
           <a:prstGeom prst="roundRect">
             <a:avLst>
-              <a:gd name="adj" fmla="val 8740"/>
+              <a:gd name="adj" fmla="val 8696"/>
             </a:avLst>
           </a:prstGeom>
           <a:solidFill>
@@ -7053,8 +7057,8 @@
         </p:nvSpPr>
         <p:spPr>
           <a:xfrm>
-            <a:off x="7799832" y="4489704"/>
-            <a:ext cx="3145536" cy="256032"/>
+            <a:off x="7708392" y="4517136"/>
+            <a:ext cx="3282696" cy="228600"/>
           </a:xfrm>
           <a:prstGeom prst="rect">
             <a:avLst/>
@@ -7070,7 +7074,7 @@
               <a:buNone/>
             </a:pPr>
             <a:r>
-              <a:rPr lang="en-US" sz="1300" b="1" dirty="0">
+              <a:rPr lang="en-US" sz="1220" b="1" dirty="0">
                 <a:solidFill>
                   <a:srgbClr val="0068B7"/>
                 </a:solidFill>
@@ -7080,7 +7084,7 @@
               </a:rPr>
               <a:t>Safeguard to plan</a:t>
             </a:r>
-            <a:endParaRPr lang="en-US" sz="1300" dirty="0"/>
+            <a:endParaRPr lang="en-US" sz="1220" dirty="0"/>
           </a:p>
         </p:txBody>
       </p:sp>
@@ -7092,8 +7096,8 @@
         </p:nvSpPr>
         <p:spPr>
           <a:xfrm>
-            <a:off x="7799832" y="4818888"/>
-            <a:ext cx="3145536" cy="688543"/>
+            <a:off x="7708392" y="4828032"/>
+            <a:ext cx="3282696" cy="749808"/>
           </a:xfrm>
           <a:prstGeom prst="rect">
             <a:avLst/>
@@ -7111,7 +7115,7 @@
               <a:buNone/>
             </a:pPr>
             <a:r>
-              <a:rPr lang="en-US" sz="1320" dirty="0">
+              <a:rPr lang="en-US" sz="1220" dirty="0">
                 <a:solidFill>
                   <a:srgbClr val="17364A"/>
                 </a:solidFill>
@@ -7119,9 +7123,9 @@
                 <a:ea typeface="Aptos" pitchFamily="34" charset="-122"/>
                 <a:cs typeface="Aptos" pitchFamily="34" charset="-120"/>
               </a:rPr>
-              <a:t>Identify what could go wrong, who could be affected, what safeguards are needed, and what evidence should be reviewed before use.</a:t>
-            </a:r>
-            <a:endParaRPr lang="en-US" sz="1320" dirty="0"/>
+              <a:t>Identify what could go wrong, who could be affected, what safeguards are needed,.</a:t>
+            </a:r>
+            <a:endParaRPr lang="en-US" sz="1220" dirty="0"/>
           </a:p>
         </p:txBody>
       </p:sp>
@@ -7412,8 +7416,8 @@
         </p:nvSpPr>
         <p:spPr>
           <a:xfrm>
-            <a:off x="868680" y="1508760"/>
-            <a:ext cx="6309360" cy="4160520"/>
+            <a:off x="822960" y="1463040"/>
+            <a:ext cx="6565392" cy="4343400"/>
           </a:xfrm>
           <a:prstGeom prst="rect">
             <a:avLst/>
@@ -7431,7 +7435,7 @@
               <a:buNone/>
             </a:pPr>
             <a:r>
-              <a:rPr lang="en-US" sz="2100" dirty="0">
+              <a:rPr lang="en-US" sz="1920" dirty="0">
                 <a:solidFill>
                   <a:srgbClr val="003A63"/>
                 </a:solidFill>
@@ -7441,14 +7445,14 @@
               </a:rPr>
               <a:t>• Where does this topic appear in your agency, program, or workflow?</a:t>
             </a:r>
-            <a:endParaRPr lang="en-US" sz="2100" dirty="0"/>
-          </a:p>
-          <a:p>
-            <a:pPr indent="0" marL="0">
-              <a:buNone/>
-            </a:pPr>
-            <a:r>
-              <a:rPr lang="en-US" sz="2100" dirty="0">
+            <a:endParaRPr lang="en-US" sz="1920" dirty="0"/>
+          </a:p>
+          <a:p>
+            <a:pPr indent="0" marL="0">
+              <a:buNone/>
+            </a:pPr>
+            <a:r>
+              <a:rPr lang="en-US" sz="1920" dirty="0">
                 <a:solidFill>
                   <a:srgbClr val="003A63"/>
                 </a:solidFill>
@@ -7456,16 +7460,16 @@
                 <a:ea typeface="Aptos" pitchFamily="34" charset="-122"/>
                 <a:cs typeface="Aptos" pitchFamily="34" charset="-120"/>
               </a:rPr>
-              <a:t>• Which staff roles would need to understand or apply this concept before AI use is approved?</a:t>
-            </a:r>
-            <a:endParaRPr lang="en-US" sz="2100" dirty="0"/>
-          </a:p>
-          <a:p>
-            <a:pPr indent="0" marL="0">
-              <a:buNone/>
-            </a:pPr>
-            <a:r>
-              <a:rPr lang="en-US" sz="2100" dirty="0">
+              <a:t>• Which staff roles would need to understand or apply this concept before AI.</a:t>
+            </a:r>
+            <a:endParaRPr lang="en-US" sz="1920" dirty="0"/>
+          </a:p>
+          <a:p>
+            <a:pPr indent="0" marL="0">
+              <a:buNone/>
+            </a:pPr>
+            <a:r>
+              <a:rPr lang="en-US" sz="1920" dirty="0">
                 <a:solidFill>
                   <a:srgbClr val="003A63"/>
                 </a:solidFill>
@@ -7475,7 +7479,7 @@
               </a:rPr>
               <a:t>• What could go wrong if this topic is not addressed before implementation?</a:t>
             </a:r>
-            <a:endParaRPr lang="en-US" sz="2100" dirty="0"/>
+            <a:endParaRPr lang="en-US" sz="1920" dirty="0"/>
           </a:p>
         </p:txBody>
       </p:sp>
@@ -7487,12 +7491,12 @@
         </p:nvSpPr>
         <p:spPr>
           <a:xfrm>
-            <a:off x="7635240" y="1325880"/>
-            <a:ext cx="3474720" cy="1207008"/>
+            <a:off x="7543800" y="1325880"/>
+            <a:ext cx="3611880" cy="1261872"/>
           </a:xfrm>
           <a:prstGeom prst="roundRect">
             <a:avLst>
-              <a:gd name="adj" fmla="val 9091"/>
+              <a:gd name="adj" fmla="val 8696"/>
             </a:avLst>
           </a:prstGeom>
           <a:solidFill>
@@ -7514,8 +7518,8 @@
         </p:nvSpPr>
         <p:spPr>
           <a:xfrm>
-            <a:off x="7799832" y="1472184"/>
-            <a:ext cx="3145536" cy="256032"/>
+            <a:off x="7708392" y="1453896"/>
+            <a:ext cx="3282696" cy="228600"/>
           </a:xfrm>
           <a:prstGeom prst="rect">
             <a:avLst/>
@@ -7531,7 +7535,7 @@
               <a:buNone/>
             </a:pPr>
             <a:r>
-              <a:rPr lang="en-US" sz="1300" b="1" dirty="0">
+              <a:rPr lang="en-US" sz="1220" b="1" dirty="0">
                 <a:solidFill>
                   <a:srgbClr val="0068B7"/>
                 </a:solidFill>
@@ -7541,7 +7545,7 @@
               </a:rPr>
               <a:t>Core concept</a:t>
             </a:r>
-            <a:endParaRPr lang="en-US" sz="1300" dirty="0"/>
+            <a:endParaRPr lang="en-US" sz="1220" dirty="0"/>
           </a:p>
         </p:txBody>
       </p:sp>
@@ -7553,8 +7557,8 @@
         </p:nvSpPr>
         <p:spPr>
           <a:xfrm>
-            <a:off x="7799832" y="1801368"/>
-            <a:ext cx="3145536" cy="640080"/>
+            <a:off x="7708392" y="1764792"/>
+            <a:ext cx="3282696" cy="749808"/>
           </a:xfrm>
           <a:prstGeom prst="rect">
             <a:avLst/>
@@ -7572,7 +7576,7 @@
               <a:buNone/>
             </a:pPr>
             <a:r>
-              <a:rPr lang="en-US" sz="1320" dirty="0">
+              <a:rPr lang="en-US" sz="1220" dirty="0">
                 <a:solidFill>
                   <a:srgbClr val="17364A"/>
                 </a:solidFill>
@@ -7582,7 +7586,7 @@
               </a:rPr>
               <a:t>Where does this topic appear in your agency, program, or workflow?</a:t>
             </a:r>
-            <a:endParaRPr lang="en-US" sz="1320" dirty="0"/>
+            <a:endParaRPr lang="en-US" sz="1220" dirty="0"/>
           </a:p>
         </p:txBody>
       </p:sp>
@@ -7594,12 +7598,12 @@
         </p:nvSpPr>
         <p:spPr>
           <a:xfrm>
-            <a:off x="7635240" y="2670048"/>
-            <a:ext cx="3474720" cy="1377086"/>
+            <a:off x="7543800" y="2724912"/>
+            <a:ext cx="3611880" cy="1527048"/>
           </a:xfrm>
           <a:prstGeom prst="roundRect">
             <a:avLst>
-              <a:gd name="adj" fmla="val 7968"/>
+              <a:gd name="adj" fmla="val 7186"/>
             </a:avLst>
           </a:prstGeom>
           <a:solidFill>
@@ -7621,8 +7625,8 @@
         </p:nvSpPr>
         <p:spPr>
           <a:xfrm>
-            <a:off x="7799832" y="2816352"/>
-            <a:ext cx="3145536" cy="256032"/>
+            <a:off x="7708392" y="2852928"/>
+            <a:ext cx="3282696" cy="228600"/>
           </a:xfrm>
           <a:prstGeom prst="rect">
             <a:avLst/>
@@ -7638,7 +7642,7 @@
               <a:buNone/>
             </a:pPr>
             <a:r>
-              <a:rPr lang="en-US" sz="1300" b="1" dirty="0">
+              <a:rPr lang="en-US" sz="1220" b="1" dirty="0">
                 <a:solidFill>
                   <a:srgbClr val="0068B7"/>
                 </a:solidFill>
@@ -7648,7 +7652,7 @@
               </a:rPr>
               <a:t>Concept checkpoints</a:t>
             </a:r>
-            <a:endParaRPr lang="en-US" sz="1300" dirty="0"/>
+            <a:endParaRPr lang="en-US" sz="1220" dirty="0"/>
           </a:p>
         </p:txBody>
       </p:sp>
@@ -7660,8 +7664,8 @@
         </p:nvSpPr>
         <p:spPr>
           <a:xfrm>
-            <a:off x="7818120" y="3182112"/>
-            <a:ext cx="3090672" cy="718718"/>
+            <a:off x="7726680" y="3182112"/>
+            <a:ext cx="3227832" cy="960120"/>
           </a:xfrm>
           <a:prstGeom prst="rect">
             <a:avLst/>
@@ -7679,7 +7683,7 @@
               <a:buNone/>
             </a:pPr>
             <a:r>
-              <a:rPr lang="en-US" sz="1220" dirty="0">
+              <a:rPr lang="en-US" sz="1140" dirty="0">
                 <a:solidFill>
                   <a:srgbClr val="17364A"/>
                 </a:solidFill>
@@ -7687,16 +7691,16 @@
                 <a:ea typeface="Aptos" pitchFamily="34" charset="-122"/>
                 <a:cs typeface="Aptos" pitchFamily="34" charset="-120"/>
               </a:rPr>
-              <a:t>Where does this topic appear in your agency, program, or workflow?</a:t>
-            </a:r>
-            <a:endParaRPr lang="en-US" sz="1220" dirty="0"/>
-          </a:p>
-          <a:p>
-            <a:pPr indent="0" marL="0">
-              <a:buNone/>
-            </a:pPr>
-            <a:r>
-              <a:rPr lang="en-US" sz="1220" dirty="0">
+              <a:t>Where does this topic appear in your agency,.</a:t>
+            </a:r>
+            <a:endParaRPr lang="en-US" sz="1140" dirty="0"/>
+          </a:p>
+          <a:p>
+            <a:pPr indent="0" marL="0">
+              <a:buNone/>
+            </a:pPr>
+            <a:r>
+              <a:rPr lang="en-US" sz="1140" dirty="0">
                 <a:solidFill>
                   <a:srgbClr val="17364A"/>
                 </a:solidFill>
@@ -7704,16 +7708,16 @@
                 <a:ea typeface="Aptos" pitchFamily="34" charset="-122"/>
                 <a:cs typeface="Aptos" pitchFamily="34" charset="-120"/>
               </a:rPr>
-              <a:t>Which staff roles would need to understand or apply this concept.</a:t>
-            </a:r>
-            <a:endParaRPr lang="en-US" sz="1220" dirty="0"/>
-          </a:p>
-          <a:p>
-            <a:pPr indent="0" marL="0">
-              <a:buNone/>
-            </a:pPr>
-            <a:r>
-              <a:rPr lang="en-US" sz="1220" dirty="0">
+              <a:t>Which staff roles would need to understand or.</a:t>
+            </a:r>
+            <a:endParaRPr lang="en-US" sz="1140" dirty="0"/>
+          </a:p>
+          <a:p>
+            <a:pPr indent="0" marL="0">
+              <a:buNone/>
+            </a:pPr>
+            <a:r>
+              <a:rPr lang="en-US" sz="1140" dirty="0">
                 <a:solidFill>
                   <a:srgbClr val="17364A"/>
                 </a:solidFill>
@@ -7721,9 +7725,9 @@
                 <a:ea typeface="Aptos" pitchFamily="34" charset="-122"/>
                 <a:cs typeface="Aptos" pitchFamily="34" charset="-120"/>
               </a:rPr>
-              <a:t>What could go wrong if this topic is not addressed before.</a:t>
-            </a:r>
-            <a:endParaRPr lang="en-US" sz="1220" dirty="0"/>
+              <a:t>What could go wrong if this topic is not addressed.</a:t>
+            </a:r>
+            <a:endParaRPr lang="en-US" sz="1140" dirty="0"/>
           </a:p>
         </p:txBody>
       </p:sp>
@@ -7735,12 +7739,12 @@
         </p:nvSpPr>
         <p:spPr>
           <a:xfrm>
-            <a:off x="7635240" y="4184294"/>
-            <a:ext cx="3474720" cy="1466698"/>
+            <a:off x="7543800" y="4389120"/>
+            <a:ext cx="3611880" cy="1261872"/>
           </a:xfrm>
           <a:prstGeom prst="roundRect">
             <a:avLst>
-              <a:gd name="adj" fmla="val 7481"/>
+              <a:gd name="adj" fmla="val 8696"/>
             </a:avLst>
           </a:prstGeom>
           <a:solidFill>
@@ -7762,8 +7766,8 @@
         </p:nvSpPr>
         <p:spPr>
           <a:xfrm>
-            <a:off x="7799832" y="4330598"/>
-            <a:ext cx="3145536" cy="256032"/>
+            <a:off x="7708392" y="4517136"/>
+            <a:ext cx="3282696" cy="228600"/>
           </a:xfrm>
           <a:prstGeom prst="rect">
             <a:avLst/>
@@ -7779,7 +7783,7 @@
               <a:buNone/>
             </a:pPr>
             <a:r>
-              <a:rPr lang="en-US" sz="1300" b="1" dirty="0">
+              <a:rPr lang="en-US" sz="1220" b="1" dirty="0">
                 <a:solidFill>
                   <a:srgbClr val="0068B7"/>
                 </a:solidFill>
@@ -7789,7 +7793,7 @@
               </a:rPr>
               <a:t>Apply it</a:t>
             </a:r>
-            <a:endParaRPr lang="en-US" sz="1300" dirty="0"/>
+            <a:endParaRPr lang="en-US" sz="1220" dirty="0"/>
           </a:p>
         </p:txBody>
       </p:sp>
@@ -7801,8 +7805,8 @@
         </p:nvSpPr>
         <p:spPr>
           <a:xfrm>
-            <a:off x="7799832" y="4659782"/>
-            <a:ext cx="3145536" cy="899770"/>
+            <a:off x="7708392" y="4828032"/>
+            <a:ext cx="3282696" cy="749808"/>
           </a:xfrm>
           <a:prstGeom prst="rect">
             <a:avLst/>
@@ -7820,7 +7824,7 @@
               <a:buNone/>
             </a:pPr>
             <a:r>
-              <a:rPr lang="en-US" sz="1320" dirty="0">
+              <a:rPr lang="en-US" sz="1220" dirty="0">
                 <a:solidFill>
                   <a:srgbClr val="17364A"/>
                 </a:solidFill>
@@ -7828,9 +7832,9 @@
                 <a:ea typeface="Aptos" pitchFamily="34" charset="-122"/>
                 <a:cs typeface="Aptos" pitchFamily="34" charset="-120"/>
               </a:rPr>
-              <a:t>Connect the concept to public health purpose, responsible use, required safeguards, documentation, and the next action a department should take.</a:t>
-            </a:r>
-            <a:endParaRPr lang="en-US" sz="1320" dirty="0"/>
+              <a:t>Connect the concept to public health purpose, responsible use, required.</a:t>
+            </a:r>
+            <a:endParaRPr lang="en-US" sz="1220" dirty="0"/>
           </a:p>
         </p:txBody>
       </p:sp>
@@ -8121,8 +8125,8 @@
         </p:nvSpPr>
         <p:spPr>
           <a:xfrm>
-            <a:off x="868680" y="1508760"/>
-            <a:ext cx="6309360" cy="4160520"/>
+            <a:off x="822960" y="1463040"/>
+            <a:ext cx="6565392" cy="4343400"/>
           </a:xfrm>
           <a:prstGeom prst="rect">
             <a:avLst/>
@@ -8140,7 +8144,7 @@
               <a:buNone/>
             </a:pPr>
             <a:r>
-              <a:rPr lang="en-US" sz="2100" dirty="0">
+              <a:rPr lang="en-US" sz="1920" dirty="0">
                 <a:solidFill>
                   <a:srgbClr val="003A63"/>
                 </a:solidFill>
@@ -8148,16 +8152,16 @@
                 <a:ea typeface="Aptos" pitchFamily="34" charset="-122"/>
                 <a:cs typeface="Aptos" pitchFamily="34" charset="-120"/>
               </a:rPr>
-              <a:t>• What evidence would governance, leadership, or operations staff need before moving forward?</a:t>
-            </a:r>
-            <a:endParaRPr lang="en-US" sz="2100" dirty="0"/>
-          </a:p>
-          <a:p>
-            <a:pPr indent="0" marL="0">
-              <a:buNone/>
-            </a:pPr>
-            <a:r>
-              <a:rPr lang="en-US" sz="2100" dirty="0">
+              <a:t>• What evidence would governance, leadership, or operations staff need before.</a:t>
+            </a:r>
+            <a:endParaRPr lang="en-US" sz="1920" dirty="0"/>
+          </a:p>
+          <a:p>
+            <a:pPr indent="0" marL="0">
+              <a:buNone/>
+            </a:pPr>
+            <a:r>
+              <a:rPr lang="en-US" sz="1920" dirty="0">
                 <a:solidFill>
                   <a:srgbClr val="003A63"/>
                 </a:solidFill>
@@ -8165,9 +8169,9 @@
                 <a:ea typeface="Aptos" pitchFamily="34" charset="-122"/>
                 <a:cs typeface="Aptos" pitchFamily="34" charset="-120"/>
               </a:rPr>
-              <a:t>• Which policy, data, equity, privacy, security, or workflow questions remain unresolved?</a:t>
-            </a:r>
-            <a:endParaRPr lang="en-US" sz="2100" dirty="0"/>
+              <a:t>• Which policy, data, equity, privacy, security, or workflow questions remain.</a:t>
+            </a:r>
+            <a:endParaRPr lang="en-US" sz="1920" dirty="0"/>
           </a:p>
         </p:txBody>
       </p:sp>
@@ -8179,12 +8183,12 @@
         </p:nvSpPr>
         <p:spPr>
           <a:xfrm>
-            <a:off x="7635240" y="1325880"/>
-            <a:ext cx="3474720" cy="1207008"/>
+            <a:off x="7543800" y="1325880"/>
+            <a:ext cx="3611880" cy="1261872"/>
           </a:xfrm>
           <a:prstGeom prst="roundRect">
             <a:avLst>
-              <a:gd name="adj" fmla="val 9091"/>
+              <a:gd name="adj" fmla="val 8696"/>
             </a:avLst>
           </a:prstGeom>
           <a:solidFill>
@@ -8206,8 +8210,8 @@
         </p:nvSpPr>
         <p:spPr>
           <a:xfrm>
-            <a:off x="7799832" y="1472184"/>
-            <a:ext cx="3145536" cy="256032"/>
+            <a:off x="7708392" y="1453896"/>
+            <a:ext cx="3282696" cy="228600"/>
           </a:xfrm>
           <a:prstGeom prst="rect">
             <a:avLst/>
@@ -8223,7 +8227,7 @@
               <a:buNone/>
             </a:pPr>
             <a:r>
-              <a:rPr lang="en-US" sz="1300" b="1" dirty="0">
+              <a:rPr lang="en-US" sz="1220" b="1" dirty="0">
                 <a:solidFill>
                   <a:srgbClr val="0068B7"/>
                 </a:solidFill>
@@ -8233,7 +8237,7 @@
               </a:rPr>
               <a:t>Core concept</a:t>
             </a:r>
-            <a:endParaRPr lang="en-US" sz="1300" dirty="0"/>
+            <a:endParaRPr lang="en-US" sz="1220" dirty="0"/>
           </a:p>
         </p:txBody>
       </p:sp>
@@ -8245,8 +8249,8 @@
         </p:nvSpPr>
         <p:spPr>
           <a:xfrm>
-            <a:off x="7799832" y="1801368"/>
-            <a:ext cx="3145536" cy="640080"/>
+            <a:off x="7708392" y="1764792"/>
+            <a:ext cx="3282696" cy="749808"/>
           </a:xfrm>
           <a:prstGeom prst="rect">
             <a:avLst/>
@@ -8264,7 +8268,7 @@
               <a:buNone/>
             </a:pPr>
             <a:r>
-              <a:rPr lang="en-US" sz="1320" dirty="0">
+              <a:rPr lang="en-US" sz="1220" dirty="0">
                 <a:solidFill>
                   <a:srgbClr val="17364A"/>
                 </a:solidFill>
@@ -8272,9 +8276,9 @@
                 <a:ea typeface="Aptos" pitchFamily="34" charset="-122"/>
                 <a:cs typeface="Aptos" pitchFamily="34" charset="-120"/>
               </a:rPr>
-              <a:t>What evidence would governance, leadership, or operations staff need before moving.</a:t>
-            </a:r>
-            <a:endParaRPr lang="en-US" sz="1320" dirty="0"/>
+              <a:t>What evidence would governance, leadership, or operations staff need before.</a:t>
+            </a:r>
+            <a:endParaRPr lang="en-US" sz="1220" dirty="0"/>
           </a:p>
         </p:txBody>
       </p:sp>
@@ -8286,12 +8290,12 @@
         </p:nvSpPr>
         <p:spPr>
           <a:xfrm>
-            <a:off x="7635240" y="2670048"/>
-            <a:ext cx="3474720" cy="1377086"/>
+            <a:off x="7543800" y="2724912"/>
+            <a:ext cx="3611880" cy="1527048"/>
           </a:xfrm>
           <a:prstGeom prst="roundRect">
             <a:avLst>
-              <a:gd name="adj" fmla="val 7968"/>
+              <a:gd name="adj" fmla="val 7186"/>
             </a:avLst>
           </a:prstGeom>
           <a:solidFill>
@@ -8313,8 +8317,8 @@
         </p:nvSpPr>
         <p:spPr>
           <a:xfrm>
-            <a:off x="7799832" y="2816352"/>
-            <a:ext cx="3145536" cy="256032"/>
+            <a:off x="7708392" y="2852928"/>
+            <a:ext cx="3282696" cy="228600"/>
           </a:xfrm>
           <a:prstGeom prst="rect">
             <a:avLst/>
@@ -8330,7 +8334,7 @@
               <a:buNone/>
             </a:pPr>
             <a:r>
-              <a:rPr lang="en-US" sz="1300" b="1" dirty="0">
+              <a:rPr lang="en-US" sz="1220" b="1" dirty="0">
                 <a:solidFill>
                   <a:srgbClr val="0068B7"/>
                 </a:solidFill>
@@ -8340,7 +8344,7 @@
               </a:rPr>
               <a:t>Concept checkpoints</a:t>
             </a:r>
-            <a:endParaRPr lang="en-US" sz="1300" dirty="0"/>
+            <a:endParaRPr lang="en-US" sz="1220" dirty="0"/>
           </a:p>
         </p:txBody>
       </p:sp>
@@ -8352,8 +8356,8 @@
         </p:nvSpPr>
         <p:spPr>
           <a:xfrm>
-            <a:off x="7818120" y="3182112"/>
-            <a:ext cx="3090672" cy="718718"/>
+            <a:off x="7726680" y="3182112"/>
+            <a:ext cx="3227832" cy="960120"/>
           </a:xfrm>
           <a:prstGeom prst="rect">
             <a:avLst/>
@@ -8371,7 +8375,7 @@
               <a:buNone/>
             </a:pPr>
             <a:r>
-              <a:rPr lang="en-US" sz="1220" dirty="0">
+              <a:rPr lang="en-US" sz="1140" dirty="0">
                 <a:solidFill>
                   <a:srgbClr val="17364A"/>
                 </a:solidFill>
@@ -8379,16 +8383,16 @@
                 <a:ea typeface="Aptos" pitchFamily="34" charset="-122"/>
                 <a:cs typeface="Aptos" pitchFamily="34" charset="-120"/>
               </a:rPr>
-              <a:t>What evidence would governance, leadership, or operations staff.</a:t>
-            </a:r>
-            <a:endParaRPr lang="en-US" sz="1220" dirty="0"/>
-          </a:p>
-          <a:p>
-            <a:pPr indent="0" marL="0">
-              <a:buNone/>
-            </a:pPr>
-            <a:r>
-              <a:rPr lang="en-US" sz="1220" dirty="0">
+              <a:t>What evidence would governance, leadership, or.</a:t>
+            </a:r>
+            <a:endParaRPr lang="en-US" sz="1140" dirty="0"/>
+          </a:p>
+          <a:p>
+            <a:pPr indent="0" marL="0">
+              <a:buNone/>
+            </a:pPr>
+            <a:r>
+              <a:rPr lang="en-US" sz="1140" dirty="0">
                 <a:solidFill>
                   <a:srgbClr val="17364A"/>
                 </a:solidFill>
@@ -8396,9 +8400,9 @@
                 <a:ea typeface="Aptos" pitchFamily="34" charset="-122"/>
                 <a:cs typeface="Aptos" pitchFamily="34" charset="-120"/>
               </a:rPr>
-              <a:t>Which policy, data, equity, privacy, security, or workflow.</a:t>
-            </a:r>
-            <a:endParaRPr lang="en-US" sz="1220" dirty="0"/>
+              <a:t>Which policy, data, equity, privacy, security, or.</a:t>
+            </a:r>
+            <a:endParaRPr lang="en-US" sz="1140" dirty="0"/>
           </a:p>
         </p:txBody>
       </p:sp>
@@ -8410,12 +8414,12 @@
         </p:nvSpPr>
         <p:spPr>
           <a:xfrm>
-            <a:off x="7635240" y="4184294"/>
-            <a:ext cx="3474720" cy="1466698"/>
+            <a:off x="7543800" y="4389120"/>
+            <a:ext cx="3611880" cy="1261872"/>
           </a:xfrm>
           <a:prstGeom prst="roundRect">
             <a:avLst>
-              <a:gd name="adj" fmla="val 7481"/>
+              <a:gd name="adj" fmla="val 8696"/>
             </a:avLst>
           </a:prstGeom>
           <a:solidFill>
@@ -8437,8 +8441,8 @@
         </p:nvSpPr>
         <p:spPr>
           <a:xfrm>
-            <a:off x="7799832" y="4330598"/>
-            <a:ext cx="3145536" cy="256032"/>
+            <a:off x="7708392" y="4517136"/>
+            <a:ext cx="3282696" cy="228600"/>
           </a:xfrm>
           <a:prstGeom prst="rect">
             <a:avLst/>
@@ -8454,7 +8458,7 @@
               <a:buNone/>
             </a:pPr>
             <a:r>
-              <a:rPr lang="en-US" sz="1300" b="1" dirty="0">
+              <a:rPr lang="en-US" sz="1220" b="1" dirty="0">
                 <a:solidFill>
                   <a:srgbClr val="0068B7"/>
                 </a:solidFill>
@@ -8464,7 +8468,7 @@
               </a:rPr>
               <a:t>Apply it</a:t>
             </a:r>
-            <a:endParaRPr lang="en-US" sz="1300" dirty="0"/>
+            <a:endParaRPr lang="en-US" sz="1220" dirty="0"/>
           </a:p>
         </p:txBody>
       </p:sp>
@@ -8476,8 +8480,8 @@
         </p:nvSpPr>
         <p:spPr>
           <a:xfrm>
-            <a:off x="7799832" y="4659782"/>
-            <a:ext cx="3145536" cy="899770"/>
+            <a:off x="7708392" y="4828032"/>
+            <a:ext cx="3282696" cy="749808"/>
           </a:xfrm>
           <a:prstGeom prst="rect">
             <a:avLst/>
@@ -8495,7 +8499,7 @@
               <a:buNone/>
             </a:pPr>
             <a:r>
-              <a:rPr lang="en-US" sz="1320" dirty="0">
+              <a:rPr lang="en-US" sz="1220" dirty="0">
                 <a:solidFill>
                   <a:srgbClr val="17364A"/>
                 </a:solidFill>
@@ -8503,9 +8507,9 @@
                 <a:ea typeface="Aptos" pitchFamily="34" charset="-122"/>
                 <a:cs typeface="Aptos" pitchFamily="34" charset="-120"/>
               </a:rPr>
-              <a:t>Connect the concept to public health purpose, responsible use, required safeguards, documentation, and the next action a department should take.</a:t>
-            </a:r>
-            <a:endParaRPr lang="en-US" sz="1320" dirty="0"/>
+              <a:t>Connect the concept to public health purpose, responsible use, required.</a:t>
+            </a:r>
+            <a:endParaRPr lang="en-US" sz="1220" dirty="0"/>
           </a:p>
         </p:txBody>
       </p:sp>
@@ -8796,8 +8800,8 @@
         </p:nvSpPr>
         <p:spPr>
           <a:xfrm>
-            <a:off x="868680" y="1508760"/>
-            <a:ext cx="6309360" cy="4160520"/>
+            <a:off x="822960" y="1463040"/>
+            <a:ext cx="6565392" cy="4343400"/>
           </a:xfrm>
           <a:prstGeom prst="rect">
             <a:avLst/>
@@ -8815,7 +8819,7 @@
               <a:buNone/>
             </a:pPr>
             <a:r>
-              <a:rPr lang="en-US" sz="2100" dirty="0">
+              <a:rPr lang="en-US" sz="1920" dirty="0">
                 <a:solidFill>
                   <a:srgbClr val="003A63"/>
                 </a:solidFill>
@@ -8823,16 +8827,16 @@
                 <a:ea typeface="Aptos" pitchFamily="34" charset="-122"/>
                 <a:cs typeface="Aptos" pitchFamily="34" charset="-120"/>
               </a:rPr>
-              <a:t>• Complete a use case intake and triage worksheet for one real or realistic public health.</a:t>
-            </a:r>
-            <a:endParaRPr lang="en-US" sz="2100" dirty="0"/>
-          </a:p>
-          <a:p>
-            <a:pPr indent="0" marL="0">
-              <a:buNone/>
-            </a:pPr>
-            <a:r>
-              <a:rPr lang="en-US" sz="2100" dirty="0">
+              <a:t>• Complete a use case intake and triage worksheet for one real or realistic.</a:t>
+            </a:r>
+            <a:endParaRPr lang="en-US" sz="1920" dirty="0"/>
+          </a:p>
+          <a:p>
+            <a:pPr indent="0" marL="0">
+              <a:buNone/>
+            </a:pPr>
+            <a:r>
+              <a:rPr lang="en-US" sz="1920" dirty="0">
                 <a:solidFill>
                   <a:srgbClr val="003A63"/>
                 </a:solidFill>
@@ -8840,9 +8844,9 @@
                 <a:ea typeface="Aptos" pitchFamily="34" charset="-122"/>
                 <a:cs typeface="Aptos" pitchFamily="34" charset="-120"/>
               </a:rPr>
-              <a:t>• Include the problem statement, workflow, intended users, data sources, AI-supported task,.</a:t>
-            </a:r>
-            <a:endParaRPr lang="en-US" sz="2100" dirty="0"/>
+              <a:t>• Include the problem statement, workflow, intended users, data sources,.</a:t>
+            </a:r>
+            <a:endParaRPr lang="en-US" sz="1920" dirty="0"/>
           </a:p>
         </p:txBody>
       </p:sp>
@@ -8854,12 +8858,12 @@
         </p:nvSpPr>
         <p:spPr>
           <a:xfrm>
-            <a:off x="7635240" y="1325880"/>
-            <a:ext cx="3474720" cy="1255471"/>
+            <a:off x="7543800" y="1325880"/>
+            <a:ext cx="3611880" cy="1261872"/>
           </a:xfrm>
           <a:prstGeom prst="roundRect">
             <a:avLst>
-              <a:gd name="adj" fmla="val 8740"/>
+              <a:gd name="adj" fmla="val 8696"/>
             </a:avLst>
           </a:prstGeom>
           <a:solidFill>
@@ -8881,8 +8885,8 @@
         </p:nvSpPr>
         <p:spPr>
           <a:xfrm>
-            <a:off x="7799832" y="1472184"/>
-            <a:ext cx="3145536" cy="256032"/>
+            <a:off x="7708392" y="1453896"/>
+            <a:ext cx="3282696" cy="228600"/>
           </a:xfrm>
           <a:prstGeom prst="rect">
             <a:avLst/>
@@ -8898,7 +8902,7 @@
               <a:buNone/>
             </a:pPr>
             <a:r>
-              <a:rPr lang="en-US" sz="1300" b="1" dirty="0">
+              <a:rPr lang="en-US" sz="1220" b="1" dirty="0">
                 <a:solidFill>
                   <a:srgbClr val="0068B7"/>
                 </a:solidFill>
@@ -8908,7 +8912,7 @@
               </a:rPr>
               <a:t>Practice focus</a:t>
             </a:r>
-            <a:endParaRPr lang="en-US" sz="1300" dirty="0"/>
+            <a:endParaRPr lang="en-US" sz="1220" dirty="0"/>
           </a:p>
         </p:txBody>
       </p:sp>
@@ -8920,8 +8924,8 @@
         </p:nvSpPr>
         <p:spPr>
           <a:xfrm>
-            <a:off x="7799832" y="1801368"/>
-            <a:ext cx="3145536" cy="688543"/>
+            <a:off x="7708392" y="1764792"/>
+            <a:ext cx="3282696" cy="749808"/>
           </a:xfrm>
           <a:prstGeom prst="rect">
             <a:avLst/>
@@ -8939,7 +8943,7 @@
               <a:buNone/>
             </a:pPr>
             <a:r>
-              <a:rPr lang="en-US" sz="1320" dirty="0">
+              <a:rPr lang="en-US" sz="1220" dirty="0">
                 <a:solidFill>
                   <a:srgbClr val="17364A"/>
                 </a:solidFill>
@@ -8947,9 +8951,9 @@
                 <a:ea typeface="Aptos" pitchFamily="34" charset="-122"/>
                 <a:cs typeface="Aptos" pitchFamily="34" charset="-120"/>
               </a:rPr>
-              <a:t>Complete a use case intake and triage worksheet for one real or realistic public health workflow.</a:t>
-            </a:r>
-            <a:endParaRPr lang="en-US" sz="1320" dirty="0"/>
+              <a:t>Complete a use case intake and triage worksheet for one real or realistic public.</a:t>
+            </a:r>
+            <a:endParaRPr lang="en-US" sz="1220" dirty="0"/>
           </a:p>
         </p:txBody>
       </p:sp>
@@ -8961,12 +8965,12 @@
         </p:nvSpPr>
         <p:spPr>
           <a:xfrm>
-            <a:off x="7635240" y="2718511"/>
-            <a:ext cx="3474720" cy="1328623"/>
+            <a:off x="7543800" y="2724912"/>
+            <a:ext cx="3611880" cy="1527048"/>
           </a:xfrm>
           <a:prstGeom prst="roundRect">
             <a:avLst>
-              <a:gd name="adj" fmla="val 8259"/>
+              <a:gd name="adj" fmla="val 7186"/>
             </a:avLst>
           </a:prstGeom>
           <a:solidFill>
@@ -8988,8 +8992,8 @@
         </p:nvSpPr>
         <p:spPr>
           <a:xfrm>
-            <a:off x="7799832" y="2864815"/>
-            <a:ext cx="3145536" cy="256032"/>
+            <a:off x="7708392" y="2852928"/>
+            <a:ext cx="3282696" cy="228600"/>
           </a:xfrm>
           <a:prstGeom prst="rect">
             <a:avLst/>
@@ -9005,7 +9009,7 @@
               <a:buNone/>
             </a:pPr>
             <a:r>
-              <a:rPr lang="en-US" sz="1300" b="1" dirty="0">
+              <a:rPr lang="en-US" sz="1220" b="1" dirty="0">
                 <a:solidFill>
                   <a:srgbClr val="0068B7"/>
                 </a:solidFill>
@@ -9015,7 +9019,7 @@
               </a:rPr>
               <a:t>Concept checkpoints</a:t>
             </a:r>
-            <a:endParaRPr lang="en-US" sz="1300" dirty="0"/>
+            <a:endParaRPr lang="en-US" sz="1220" dirty="0"/>
           </a:p>
         </p:txBody>
       </p:sp>
@@ -9027,8 +9031,8 @@
         </p:nvSpPr>
         <p:spPr>
           <a:xfrm>
-            <a:off x="7818120" y="3230575"/>
-            <a:ext cx="3090672" cy="670255"/>
+            <a:off x="7726680" y="3182112"/>
+            <a:ext cx="3227832" cy="960120"/>
           </a:xfrm>
           <a:prstGeom prst="rect">
             <a:avLst/>
@@ -9046,7 +9050,7 @@
               <a:buNone/>
             </a:pPr>
             <a:r>
-              <a:rPr lang="en-US" sz="1220" dirty="0">
+              <a:rPr lang="en-US" sz="1140" dirty="0">
                 <a:solidFill>
                   <a:srgbClr val="17364A"/>
                 </a:solidFill>
@@ -9054,16 +9058,16 @@
                 <a:ea typeface="Aptos" pitchFamily="34" charset="-122"/>
                 <a:cs typeface="Aptos" pitchFamily="34" charset="-120"/>
               </a:rPr>
-              <a:t>Complete a use case intake and triage worksheet for one real or.</a:t>
-            </a:r>
-            <a:endParaRPr lang="en-US" sz="1220" dirty="0"/>
-          </a:p>
-          <a:p>
-            <a:pPr indent="0" marL="0">
-              <a:buNone/>
-            </a:pPr>
-            <a:r>
-              <a:rPr lang="en-US" sz="1220" dirty="0">
+              <a:t>Complete a use case intake and triage worksheet.</a:t>
+            </a:r>
+            <a:endParaRPr lang="en-US" sz="1140" dirty="0"/>
+          </a:p>
+          <a:p>
+            <a:pPr indent="0" marL="0">
+              <a:buNone/>
+            </a:pPr>
+            <a:r>
+              <a:rPr lang="en-US" sz="1140" dirty="0">
                 <a:solidFill>
                   <a:srgbClr val="17364A"/>
                 </a:solidFill>
@@ -9071,9 +9075,9 @@
                 <a:ea typeface="Aptos" pitchFamily="34" charset="-122"/>
                 <a:cs typeface="Aptos" pitchFamily="34" charset="-120"/>
               </a:rPr>
-              <a:t>Include the problem statement, workflow, intended users, data.</a:t>
-            </a:r>
-            <a:endParaRPr lang="en-US" sz="1220" dirty="0"/>
+              <a:t>Include the problem statement, workflow, intended.</a:t>
+            </a:r>
+            <a:endParaRPr lang="en-US" sz="1140" dirty="0"/>
           </a:p>
         </p:txBody>
       </p:sp>
@@ -9085,12 +9089,12 @@
         </p:nvSpPr>
         <p:spPr>
           <a:xfrm>
-            <a:off x="7635240" y="4184294"/>
-            <a:ext cx="3474720" cy="1466698"/>
+            <a:off x="7543800" y="4389120"/>
+            <a:ext cx="3611880" cy="1261872"/>
           </a:xfrm>
           <a:prstGeom prst="roundRect">
             <a:avLst>
-              <a:gd name="adj" fmla="val 7481"/>
+              <a:gd name="adj" fmla="val 8696"/>
             </a:avLst>
           </a:prstGeom>
           <a:solidFill>
@@ -9112,8 +9116,8 @@
         </p:nvSpPr>
         <p:spPr>
           <a:xfrm>
-            <a:off x="7799832" y="4330598"/>
-            <a:ext cx="3145536" cy="256032"/>
+            <a:off x="7708392" y="4517136"/>
+            <a:ext cx="3282696" cy="228600"/>
           </a:xfrm>
           <a:prstGeom prst="rect">
             <a:avLst/>
@@ -9129,7 +9133,7 @@
               <a:buNone/>
             </a:pPr>
             <a:r>
-              <a:rPr lang="en-US" sz="1300" b="1" dirty="0">
+              <a:rPr lang="en-US" sz="1220" b="1" dirty="0">
                 <a:solidFill>
                   <a:srgbClr val="0068B7"/>
                 </a:solidFill>
@@ -9139,7 +9143,7 @@
               </a:rPr>
               <a:t>What to produce</a:t>
             </a:r>
-            <a:endParaRPr lang="en-US" sz="1300" dirty="0"/>
+            <a:endParaRPr lang="en-US" sz="1220" dirty="0"/>
           </a:p>
         </p:txBody>
       </p:sp>
@@ -9151,8 +9155,8 @@
         </p:nvSpPr>
         <p:spPr>
           <a:xfrm>
-            <a:off x="7799832" y="4659782"/>
-            <a:ext cx="3145536" cy="899770"/>
+            <a:off x="7708392" y="4828032"/>
+            <a:ext cx="3282696" cy="749808"/>
           </a:xfrm>
           <a:prstGeom prst="rect">
             <a:avLst/>
@@ -9170,7 +9174,7 @@
               <a:buNone/>
             </a:pPr>
             <a:r>
-              <a:rPr lang="en-US" sz="1320" dirty="0">
+              <a:rPr lang="en-US" sz="1220" dirty="0">
                 <a:solidFill>
                   <a:srgbClr val="17364A"/>
                 </a:solidFill>
@@ -9178,9 +9182,9 @@
                 <a:ea typeface="Aptos" pitchFamily="34" charset="-122"/>
                 <a:cs typeface="Aptos" pitchFamily="34" charset="-120"/>
               </a:rPr>
-              <a:t>Use the assignment to test whether you can explain the concept, apply it to a realistic public health situation, and identify what would need review before the work moves forward.</a:t>
-            </a:r>
-            <a:endParaRPr lang="en-US" sz="1320" dirty="0"/>
+              <a:t>Use the assignment to test whether you can explain the concept, apply it to a.</a:t>
+            </a:r>
+            <a:endParaRPr lang="en-US" sz="1220" dirty="0"/>
           </a:p>
         </p:txBody>
       </p:sp>
@@ -9471,8 +9475,8 @@
         </p:nvSpPr>
         <p:spPr>
           <a:xfrm>
-            <a:off x="868680" y="1508760"/>
-            <a:ext cx="6309360" cy="4160520"/>
+            <a:off x="822960" y="1463040"/>
+            <a:ext cx="6565392" cy="4343400"/>
           </a:xfrm>
           <a:prstGeom prst="rect">
             <a:avLst/>
@@ -9490,7 +9494,7 @@
               <a:buNone/>
             </a:pPr>
             <a:r>
-              <a:rPr lang="en-US" sz="2100" dirty="0">
+              <a:rPr lang="en-US" sz="1920" dirty="0">
                 <a:solidFill>
                   <a:srgbClr val="003A63"/>
                 </a:solidFill>
@@ -9500,14 +9504,14 @@
               </a:rPr>
               <a:t>• Completed AI use case intake worksheet</a:t>
             </a:r>
-            <a:endParaRPr lang="en-US" sz="2100" dirty="0"/>
-          </a:p>
-          <a:p>
-            <a:pPr indent="0" marL="0">
-              <a:buNone/>
-            </a:pPr>
-            <a:r>
-              <a:rPr lang="en-US" sz="2100" dirty="0">
+            <a:endParaRPr lang="en-US" sz="1920" dirty="0"/>
+          </a:p>
+          <a:p>
+            <a:pPr indent="0" marL="0">
+              <a:buNone/>
+            </a:pPr>
+            <a:r>
+              <a:rPr lang="en-US" sz="1920" dirty="0">
                 <a:solidFill>
                   <a:srgbClr val="003A63"/>
                 </a:solidFill>
@@ -9517,14 +9521,14 @@
               </a:rPr>
               <a:t>• Risk and readiness triage decision</a:t>
             </a:r>
-            <a:endParaRPr lang="en-US" sz="2100" dirty="0"/>
-          </a:p>
-          <a:p>
-            <a:pPr indent="0" marL="0">
-              <a:buNone/>
-            </a:pPr>
-            <a:r>
-              <a:rPr lang="en-US" sz="2100" dirty="0">
+            <a:endParaRPr lang="en-US" sz="1920" dirty="0"/>
+          </a:p>
+          <a:p>
+            <a:pPr indent="0" marL="0">
+              <a:buNone/>
+            </a:pPr>
+            <a:r>
+              <a:rPr lang="en-US" sz="1920" dirty="0">
                 <a:solidFill>
                   <a:srgbClr val="003A63"/>
                 </a:solidFill>
@@ -9534,7 +9538,7 @@
               </a:rPr>
               <a:t>• List of required reviewers and next steps</a:t>
             </a:r>
-            <a:endParaRPr lang="en-US" sz="2100" dirty="0"/>
+            <a:endParaRPr lang="en-US" sz="1920" dirty="0"/>
           </a:p>
         </p:txBody>
       </p:sp>
@@ -9546,12 +9550,12 @@
         </p:nvSpPr>
         <p:spPr>
           <a:xfrm>
-            <a:off x="7635240" y="1325880"/>
-            <a:ext cx="3474720" cy="1207008"/>
+            <a:off x="7543800" y="1325880"/>
+            <a:ext cx="3611880" cy="1261872"/>
           </a:xfrm>
           <a:prstGeom prst="roundRect">
             <a:avLst>
-              <a:gd name="adj" fmla="val 9091"/>
+              <a:gd name="adj" fmla="val 8696"/>
             </a:avLst>
           </a:prstGeom>
           <a:solidFill>
@@ -9573,8 +9577,8 @@
         </p:nvSpPr>
         <p:spPr>
           <a:xfrm>
-            <a:off x="7799832" y="1472184"/>
-            <a:ext cx="3145536" cy="256032"/>
+            <a:off x="7708392" y="1453896"/>
+            <a:ext cx="3282696" cy="228600"/>
           </a:xfrm>
           <a:prstGeom prst="rect">
             <a:avLst/>
@@ -9590,7 +9594,7 @@
               <a:buNone/>
             </a:pPr>
             <a:r>
-              <a:rPr lang="en-US" sz="1300" b="1" dirty="0">
+              <a:rPr lang="en-US" sz="1220" b="1" dirty="0">
                 <a:solidFill>
                   <a:srgbClr val="0068B7"/>
                 </a:solidFill>
@@ -9600,7 +9604,7 @@
               </a:rPr>
               <a:t>Core concept</a:t>
             </a:r>
-            <a:endParaRPr lang="en-US" sz="1300" dirty="0"/>
+            <a:endParaRPr lang="en-US" sz="1220" dirty="0"/>
           </a:p>
         </p:txBody>
       </p:sp>
@@ -9612,8 +9616,8 @@
         </p:nvSpPr>
         <p:spPr>
           <a:xfrm>
-            <a:off x="7799832" y="1801368"/>
-            <a:ext cx="3145536" cy="640080"/>
+            <a:off x="7708392" y="1764792"/>
+            <a:ext cx="3282696" cy="749808"/>
           </a:xfrm>
           <a:prstGeom prst="rect">
             <a:avLst/>
@@ -9631,7 +9635,7 @@
               <a:buNone/>
             </a:pPr>
             <a:r>
-              <a:rPr lang="en-US" sz="1320" dirty="0">
+              <a:rPr lang="en-US" sz="1220" dirty="0">
                 <a:solidFill>
                   <a:srgbClr val="17364A"/>
                 </a:solidFill>
@@ -9641,7 +9645,7 @@
               </a:rPr>
               <a:t>Completed AI use case intake worksheet</a:t>
             </a:r>
-            <a:endParaRPr lang="en-US" sz="1320" dirty="0"/>
+            <a:endParaRPr lang="en-US" sz="1220" dirty="0"/>
           </a:p>
         </p:txBody>
       </p:sp>
@@ -9653,12 +9657,12 @@
         </p:nvSpPr>
         <p:spPr>
           <a:xfrm>
-            <a:off x="7635240" y="2670048"/>
-            <a:ext cx="3474720" cy="1377086"/>
+            <a:off x="7543800" y="2724912"/>
+            <a:ext cx="3611880" cy="1527048"/>
           </a:xfrm>
           <a:prstGeom prst="roundRect">
             <a:avLst>
-              <a:gd name="adj" fmla="val 7968"/>
+              <a:gd name="adj" fmla="val 7186"/>
             </a:avLst>
           </a:prstGeom>
           <a:solidFill>
@@ -9680,8 +9684,8 @@
         </p:nvSpPr>
         <p:spPr>
           <a:xfrm>
-            <a:off x="7799832" y="2816352"/>
-            <a:ext cx="3145536" cy="256032"/>
+            <a:off x="7708392" y="2852928"/>
+            <a:ext cx="3282696" cy="228600"/>
           </a:xfrm>
           <a:prstGeom prst="rect">
             <a:avLst/>
@@ -9697,7 +9701,7 @@
               <a:buNone/>
             </a:pPr>
             <a:r>
-              <a:rPr lang="en-US" sz="1300" b="1" dirty="0">
+              <a:rPr lang="en-US" sz="1220" b="1" dirty="0">
                 <a:solidFill>
                   <a:srgbClr val="0068B7"/>
                 </a:solidFill>
@@ -9707,7 +9711,7 @@
               </a:rPr>
               <a:t>Concept checkpoints</a:t>
             </a:r>
-            <a:endParaRPr lang="en-US" sz="1300" dirty="0"/>
+            <a:endParaRPr lang="en-US" sz="1220" dirty="0"/>
           </a:p>
         </p:txBody>
       </p:sp>
@@ -9719,8 +9723,8 @@
         </p:nvSpPr>
         <p:spPr>
           <a:xfrm>
-            <a:off x="7818120" y="3182112"/>
-            <a:ext cx="3090672" cy="718718"/>
+            <a:off x="7726680" y="3182112"/>
+            <a:ext cx="3227832" cy="960120"/>
           </a:xfrm>
           <a:prstGeom prst="rect">
             <a:avLst/>
@@ -9738,7 +9742,7 @@
               <a:buNone/>
             </a:pPr>
             <a:r>
-              <a:rPr lang="en-US" sz="1220" dirty="0">
+              <a:rPr lang="en-US" sz="1140" dirty="0">
                 <a:solidFill>
                   <a:srgbClr val="17364A"/>
                 </a:solidFill>
@@ -9748,14 +9752,14 @@
               </a:rPr>
               <a:t>Completed AI use case intake worksheet</a:t>
             </a:r>
-            <a:endParaRPr lang="en-US" sz="1220" dirty="0"/>
-          </a:p>
-          <a:p>
-            <a:pPr indent="0" marL="0">
-              <a:buNone/>
-            </a:pPr>
-            <a:r>
-              <a:rPr lang="en-US" sz="1220" dirty="0">
+            <a:endParaRPr lang="en-US" sz="1140" dirty="0"/>
+          </a:p>
+          <a:p>
+            <a:pPr indent="0" marL="0">
+              <a:buNone/>
+            </a:pPr>
+            <a:r>
+              <a:rPr lang="en-US" sz="1140" dirty="0">
                 <a:solidFill>
                   <a:srgbClr val="17364A"/>
                 </a:solidFill>
@@ -9765,14 +9769,14 @@
               </a:rPr>
               <a:t>Risk and readiness triage decision</a:t>
             </a:r>
-            <a:endParaRPr lang="en-US" sz="1220" dirty="0"/>
-          </a:p>
-          <a:p>
-            <a:pPr indent="0" marL="0">
-              <a:buNone/>
-            </a:pPr>
-            <a:r>
-              <a:rPr lang="en-US" sz="1220" dirty="0">
+            <a:endParaRPr lang="en-US" sz="1140" dirty="0"/>
+          </a:p>
+          <a:p>
+            <a:pPr indent="0" marL="0">
+              <a:buNone/>
+            </a:pPr>
+            <a:r>
+              <a:rPr lang="en-US" sz="1140" dirty="0">
                 <a:solidFill>
                   <a:srgbClr val="17364A"/>
                 </a:solidFill>
@@ -9782,7 +9786,7 @@
               </a:rPr>
               <a:t>List of required reviewers and next steps</a:t>
             </a:r>
-            <a:endParaRPr lang="en-US" sz="1220" dirty="0"/>
+            <a:endParaRPr lang="en-US" sz="1140" dirty="0"/>
           </a:p>
         </p:txBody>
       </p:sp>
@@ -9794,12 +9798,12 @@
         </p:nvSpPr>
         <p:spPr>
           <a:xfrm>
-            <a:off x="7635240" y="4184294"/>
-            <a:ext cx="3474720" cy="1466698"/>
+            <a:off x="7543800" y="4389120"/>
+            <a:ext cx="3611880" cy="1261872"/>
           </a:xfrm>
           <a:prstGeom prst="roundRect">
             <a:avLst>
-              <a:gd name="adj" fmla="val 7481"/>
+              <a:gd name="adj" fmla="val 8696"/>
             </a:avLst>
           </a:prstGeom>
           <a:solidFill>
@@ -9821,8 +9825,8 @@
         </p:nvSpPr>
         <p:spPr>
           <a:xfrm>
-            <a:off x="7799832" y="4330598"/>
-            <a:ext cx="3145536" cy="256032"/>
+            <a:off x="7708392" y="4517136"/>
+            <a:ext cx="3282696" cy="228600"/>
           </a:xfrm>
           <a:prstGeom prst="rect">
             <a:avLst/>
@@ -9838,7 +9842,7 @@
               <a:buNone/>
             </a:pPr>
             <a:r>
-              <a:rPr lang="en-US" sz="1300" b="1" dirty="0">
+              <a:rPr lang="en-US" sz="1220" b="1" dirty="0">
                 <a:solidFill>
                   <a:srgbClr val="0068B7"/>
                 </a:solidFill>
@@ -9848,7 +9852,7 @@
               </a:rPr>
               <a:t>Apply it</a:t>
             </a:r>
-            <a:endParaRPr lang="en-US" sz="1300" dirty="0"/>
+            <a:endParaRPr lang="en-US" sz="1220" dirty="0"/>
           </a:p>
         </p:txBody>
       </p:sp>
@@ -9860,8 +9864,8 @@
         </p:nvSpPr>
         <p:spPr>
           <a:xfrm>
-            <a:off x="7799832" y="4659782"/>
-            <a:ext cx="3145536" cy="899770"/>
+            <a:off x="7708392" y="4828032"/>
+            <a:ext cx="3282696" cy="749808"/>
           </a:xfrm>
           <a:prstGeom prst="rect">
             <a:avLst/>
@@ -9879,7 +9883,7 @@
               <a:buNone/>
             </a:pPr>
             <a:r>
-              <a:rPr lang="en-US" sz="1320" dirty="0">
+              <a:rPr lang="en-US" sz="1220" dirty="0">
                 <a:solidFill>
                   <a:srgbClr val="17364A"/>
                 </a:solidFill>
@@ -9887,9 +9891,9 @@
                 <a:ea typeface="Aptos" pitchFamily="34" charset="-122"/>
                 <a:cs typeface="Aptos" pitchFamily="34" charset="-120"/>
               </a:rPr>
-              <a:t>Connect the concept to public health purpose, responsible use, required safeguards, documentation, and the next action a department should take.</a:t>
-            </a:r>
-            <a:endParaRPr lang="en-US" sz="1320" dirty="0"/>
+              <a:t>Connect the concept to public health purpose, responsible use, required.</a:t>
+            </a:r>
+            <a:endParaRPr lang="en-US" sz="1220" dirty="0"/>
           </a:p>
         </p:txBody>
       </p:sp>
@@ -10180,8 +10184,8 @@
         </p:nvSpPr>
         <p:spPr>
           <a:xfrm>
-            <a:off x="868680" y="1508760"/>
-            <a:ext cx="6309360" cy="4160520"/>
+            <a:off x="822960" y="1463040"/>
+            <a:ext cx="6565392" cy="4343400"/>
           </a:xfrm>
           <a:prstGeom prst="rect">
             <a:avLst/>
@@ -10199,7 +10203,7 @@
               <a:buNone/>
             </a:pPr>
             <a:r>
-              <a:rPr lang="en-US" sz="2100" dirty="0">
+              <a:rPr lang="en-US" sz="1920" dirty="0">
                 <a:solidFill>
                   <a:srgbClr val="003A63"/>
                 </a:solidFill>
@@ -10207,9 +10211,9 @@
                 <a:ea typeface="Aptos" pitchFamily="34" charset="-122"/>
                 <a:cs typeface="Aptos" pitchFamily="34" charset="-120"/>
               </a:rPr>
-              <a:t>• Documented rationale for proceeding, deferring, redesigning, or rejecting the use case</a:t>
-            </a:r>
-            <a:endParaRPr lang="en-US" sz="2100" dirty="0"/>
+              <a:t>• Documented rationale for proceeding, deferring, redesigning, or rejecting.</a:t>
+            </a:r>
+            <a:endParaRPr lang="en-US" sz="1920" dirty="0"/>
           </a:p>
         </p:txBody>
       </p:sp>
@@ -10221,12 +10225,12 @@
         </p:nvSpPr>
         <p:spPr>
           <a:xfrm>
-            <a:off x="7635240" y="1325880"/>
-            <a:ext cx="3474720" cy="1207008"/>
+            <a:off x="7543800" y="1325880"/>
+            <a:ext cx="3611880" cy="1261872"/>
           </a:xfrm>
           <a:prstGeom prst="roundRect">
             <a:avLst>
-              <a:gd name="adj" fmla="val 9091"/>
+              <a:gd name="adj" fmla="val 8696"/>
             </a:avLst>
           </a:prstGeom>
           <a:solidFill>
@@ -10248,8 +10252,8 @@
         </p:nvSpPr>
         <p:spPr>
           <a:xfrm>
-            <a:off x="7799832" y="1472184"/>
-            <a:ext cx="3145536" cy="256032"/>
+            <a:off x="7708392" y="1453896"/>
+            <a:ext cx="3282696" cy="228600"/>
           </a:xfrm>
           <a:prstGeom prst="rect">
             <a:avLst/>
@@ -10265,7 +10269,7 @@
               <a:buNone/>
             </a:pPr>
             <a:r>
-              <a:rPr lang="en-US" sz="1300" b="1" dirty="0">
+              <a:rPr lang="en-US" sz="1220" b="1" dirty="0">
                 <a:solidFill>
                   <a:srgbClr val="0068B7"/>
                 </a:solidFill>
@@ -10275,7 +10279,7 @@
               </a:rPr>
               <a:t>Core concept</a:t>
             </a:r>
-            <a:endParaRPr lang="en-US" sz="1300" dirty="0"/>
+            <a:endParaRPr lang="en-US" sz="1220" dirty="0"/>
           </a:p>
         </p:txBody>
       </p:sp>
@@ -10287,8 +10291,8 @@
         </p:nvSpPr>
         <p:spPr>
           <a:xfrm>
-            <a:off x="7799832" y="1801368"/>
-            <a:ext cx="3145536" cy="640080"/>
+            <a:off x="7708392" y="1764792"/>
+            <a:ext cx="3282696" cy="749808"/>
           </a:xfrm>
           <a:prstGeom prst="rect">
             <a:avLst/>
@@ -10306,7 +10310,7 @@
               <a:buNone/>
             </a:pPr>
             <a:r>
-              <a:rPr lang="en-US" sz="1320" dirty="0">
+              <a:rPr lang="en-US" sz="1220" dirty="0">
                 <a:solidFill>
                   <a:srgbClr val="17364A"/>
                 </a:solidFill>
@@ -10314,9 +10318,9 @@
                 <a:ea typeface="Aptos" pitchFamily="34" charset="-122"/>
                 <a:cs typeface="Aptos" pitchFamily="34" charset="-120"/>
               </a:rPr>
-              <a:t>Documented rationale for proceeding, deferring, redesigning, or rejecting the use case</a:t>
-            </a:r>
-            <a:endParaRPr lang="en-US" sz="1320" dirty="0"/>
+              <a:t>Documented rationale for proceeding, deferring, redesigning, or rejecting the.</a:t>
+            </a:r>
+            <a:endParaRPr lang="en-US" sz="1220" dirty="0"/>
           </a:p>
         </p:txBody>
       </p:sp>
@@ -10328,12 +10332,12 @@
         </p:nvSpPr>
         <p:spPr>
           <a:xfrm>
-            <a:off x="7635240" y="2670048"/>
-            <a:ext cx="3474720" cy="1377086"/>
+            <a:off x="7543800" y="2724912"/>
+            <a:ext cx="3611880" cy="1527048"/>
           </a:xfrm>
           <a:prstGeom prst="roundRect">
             <a:avLst>
-              <a:gd name="adj" fmla="val 7968"/>
+              <a:gd name="adj" fmla="val 7186"/>
             </a:avLst>
           </a:prstGeom>
           <a:solidFill>
@@ -10355,8 +10359,8 @@
         </p:nvSpPr>
         <p:spPr>
           <a:xfrm>
-            <a:off x="7799832" y="2816352"/>
-            <a:ext cx="3145536" cy="256032"/>
+            <a:off x="7708392" y="2852928"/>
+            <a:ext cx="3282696" cy="228600"/>
           </a:xfrm>
           <a:prstGeom prst="rect">
             <a:avLst/>
@@ -10372,7 +10376,7 @@
               <a:buNone/>
             </a:pPr>
             <a:r>
-              <a:rPr lang="en-US" sz="1300" b="1" dirty="0">
+              <a:rPr lang="en-US" sz="1220" b="1" dirty="0">
                 <a:solidFill>
                   <a:srgbClr val="0068B7"/>
                 </a:solidFill>
@@ -10382,7 +10386,7 @@
               </a:rPr>
               <a:t>Concept checkpoints</a:t>
             </a:r>
-            <a:endParaRPr lang="en-US" sz="1300" dirty="0"/>
+            <a:endParaRPr lang="en-US" sz="1220" dirty="0"/>
           </a:p>
         </p:txBody>
       </p:sp>
@@ -10394,8 +10398,8 @@
         </p:nvSpPr>
         <p:spPr>
           <a:xfrm>
-            <a:off x="7818120" y="3182112"/>
-            <a:ext cx="3090672" cy="718718"/>
+            <a:off x="7726680" y="3182112"/>
+            <a:ext cx="3227832" cy="960120"/>
           </a:xfrm>
           <a:prstGeom prst="rect">
             <a:avLst/>
@@ -10413,7 +10417,7 @@
               <a:buNone/>
             </a:pPr>
             <a:r>
-              <a:rPr lang="en-US" sz="1220" dirty="0">
+              <a:rPr lang="en-US" sz="1140" dirty="0">
                 <a:solidFill>
                   <a:srgbClr val="17364A"/>
                 </a:solidFill>
@@ -10421,9 +10425,9 @@
                 <a:ea typeface="Aptos" pitchFamily="34" charset="-122"/>
                 <a:cs typeface="Aptos" pitchFamily="34" charset="-120"/>
               </a:rPr>
-              <a:t>Documented rationale for proceeding, deferring, redesigning, or.</a:t>
-            </a:r>
-            <a:endParaRPr lang="en-US" sz="1220" dirty="0"/>
+              <a:t>Documented rationale for proceeding, deferring,.</a:t>
+            </a:r>
+            <a:endParaRPr lang="en-US" sz="1140" dirty="0"/>
           </a:p>
         </p:txBody>
       </p:sp>
@@ -10435,12 +10439,12 @@
         </p:nvSpPr>
         <p:spPr>
           <a:xfrm>
-            <a:off x="7635240" y="4184294"/>
-            <a:ext cx="3474720" cy="1466698"/>
+            <a:off x="7543800" y="4389120"/>
+            <a:ext cx="3611880" cy="1261872"/>
           </a:xfrm>
           <a:prstGeom prst="roundRect">
             <a:avLst>
-              <a:gd name="adj" fmla="val 7481"/>
+              <a:gd name="adj" fmla="val 8696"/>
             </a:avLst>
           </a:prstGeom>
           <a:solidFill>
@@ -10462,8 +10466,8 @@
         </p:nvSpPr>
         <p:spPr>
           <a:xfrm>
-            <a:off x="7799832" y="4330598"/>
-            <a:ext cx="3145536" cy="256032"/>
+            <a:off x="7708392" y="4517136"/>
+            <a:ext cx="3282696" cy="228600"/>
           </a:xfrm>
           <a:prstGeom prst="rect">
             <a:avLst/>
@@ -10479,7 +10483,7 @@
               <a:buNone/>
             </a:pPr>
             <a:r>
-              <a:rPr lang="en-US" sz="1300" b="1" dirty="0">
+              <a:rPr lang="en-US" sz="1220" b="1" dirty="0">
                 <a:solidFill>
                   <a:srgbClr val="0068B7"/>
                 </a:solidFill>
@@ -10489,7 +10493,7 @@
               </a:rPr>
               <a:t>Apply it</a:t>
             </a:r>
-            <a:endParaRPr lang="en-US" sz="1300" dirty="0"/>
+            <a:endParaRPr lang="en-US" sz="1220" dirty="0"/>
           </a:p>
         </p:txBody>
       </p:sp>
@@ -10501,8 +10505,8 @@
         </p:nvSpPr>
         <p:spPr>
           <a:xfrm>
-            <a:off x="7799832" y="4659782"/>
-            <a:ext cx="3145536" cy="899770"/>
+            <a:off x="7708392" y="4828032"/>
+            <a:ext cx="3282696" cy="749808"/>
           </a:xfrm>
           <a:prstGeom prst="rect">
             <a:avLst/>
@@ -10520,7 +10524,7 @@
               <a:buNone/>
             </a:pPr>
             <a:r>
-              <a:rPr lang="en-US" sz="1320" dirty="0">
+              <a:rPr lang="en-US" sz="1220" dirty="0">
                 <a:solidFill>
                   <a:srgbClr val="17364A"/>
                 </a:solidFill>
@@ -10528,9 +10532,9 @@
                 <a:ea typeface="Aptos" pitchFamily="34" charset="-122"/>
                 <a:cs typeface="Aptos" pitchFamily="34" charset="-120"/>
               </a:rPr>
-              <a:t>Connect the concept to public health purpose, responsible use, required safeguards, documentation, and the next action a department should take.</a:t>
-            </a:r>
-            <a:endParaRPr lang="en-US" sz="1320" dirty="0"/>
+              <a:t>Connect the concept to public health purpose, responsible use, required.</a:t>
+            </a:r>
+            <a:endParaRPr lang="en-US" sz="1220" dirty="0"/>
           </a:p>
         </p:txBody>
       </p:sp>
@@ -10848,7 +10852,7 @@
                 <a:ea typeface="Aptos" pitchFamily="34" charset="-122"/>
                 <a:cs typeface="Aptos" pitchFamily="34" charset="-120"/>
               </a:rPr>
-              <a:t>• AI use case intake is the structured process of receiving, describing, screening, and routing.</a:t>
+              <a:t>• AI use case intake is the structured process of receiving, describing,.</a:t>
             </a:r>
             <a:endParaRPr lang="en-US" sz="2100" dirty="0"/>
           </a:p>
@@ -10865,7 +10869,7 @@
                 <a:ea typeface="Aptos" pitchFamily="34" charset="-122"/>
                 <a:cs typeface="Aptos" pitchFamily="34" charset="-120"/>
               </a:rPr>
-              <a:t>• In public health, this step is essential because AI ideas often begin as informal suggestions.</a:t>
+              <a:t>• In public health, this step is essential because AI ideas often begin as.</a:t>
             </a:r>
             <a:endParaRPr lang="en-US" sz="2100" dirty="0"/>
           </a:p>
@@ -10882,7 +10886,7 @@
                 <a:ea typeface="Aptos" pitchFamily="34" charset="-122"/>
                 <a:cs typeface="Aptos" pitchFamily="34" charset="-120"/>
               </a:rPr>
-              <a:t>• Without a common intake process, agencies may approve low-value or high-risk ideas too quickly.</a:t>
+              <a:t>• Without a common intake process, agencies may approve low-value or high-risk.</a:t>
             </a:r>
             <a:endParaRPr lang="en-US" sz="2100" dirty="0"/>
           </a:p>
@@ -10923,8 +10927,8 @@
         </p:nvSpPr>
         <p:spPr>
           <a:xfrm>
-            <a:off x="8074152" y="1563624"/>
-            <a:ext cx="2825496" cy="256032"/>
+            <a:off x="8074152" y="1545336"/>
+            <a:ext cx="2825496" cy="228600"/>
           </a:xfrm>
           <a:prstGeom prst="rect">
             <a:avLst/>
@@ -10940,7 +10944,7 @@
               <a:buNone/>
             </a:pPr>
             <a:r>
-              <a:rPr lang="en-US" sz="1300" b="1" dirty="0">
+              <a:rPr lang="en-US" sz="1220" b="1" dirty="0">
                 <a:solidFill>
                   <a:srgbClr val="0068B7"/>
                 </a:solidFill>
@@ -10950,7 +10954,7 @@
               </a:rPr>
               <a:t>Module details</a:t>
             </a:r>
-            <a:endParaRPr lang="en-US" sz="1300" dirty="0"/>
+            <a:endParaRPr lang="en-US" sz="1220" dirty="0"/>
           </a:p>
         </p:txBody>
       </p:sp>
@@ -10962,8 +10966,8 @@
         </p:nvSpPr>
         <p:spPr>
           <a:xfrm>
-            <a:off x="8074152" y="1892808"/>
-            <a:ext cx="2825496" cy="1353312"/>
+            <a:off x="8074152" y="1856232"/>
+            <a:ext cx="2825496" cy="1408176"/>
           </a:xfrm>
           <a:prstGeom prst="rect">
             <a:avLst/>
@@ -10981,7 +10985,7 @@
               <a:buNone/>
             </a:pPr>
             <a:r>
-              <a:rPr lang="en-US" sz="1320" dirty="0">
+              <a:rPr lang="en-US" sz="1220" dirty="0">
                 <a:solidFill>
                   <a:srgbClr val="17364A"/>
                 </a:solidFill>
@@ -10989,9 +10993,9 @@
                 <a:ea typeface="Aptos" pitchFamily="34" charset="-122"/>
                 <a:cs typeface="Aptos" pitchFamily="34" charset="-120"/>
               </a:rPr>
-              <a:t>Level: applied/foundational Primary track: Shared Foundational / Introductory Course Appears in tracks: shared-foundational, governance-and-security, program-management, public-health-executive-leadership</a:t>
-            </a:r>
-            <a:endParaRPr lang="en-US" sz="1320" dirty="0"/>
+              <a:t>Level: applied/foundational Primary track: Shared Foundational / Introductory.</a:t>
+            </a:r>
+            <a:endParaRPr lang="en-US" sz="1220" dirty="0"/>
           </a:p>
         </p:txBody>
       </p:sp>
@@ -11030,8 +11034,8 @@
         </p:nvSpPr>
         <p:spPr>
           <a:xfrm>
-            <a:off x="8074152" y="3822192"/>
-            <a:ext cx="2825496" cy="256032"/>
+            <a:off x="8074152" y="3803904"/>
+            <a:ext cx="2825496" cy="228600"/>
           </a:xfrm>
           <a:prstGeom prst="rect">
             <a:avLst/>
@@ -11047,7 +11051,7 @@
               <a:buNone/>
             </a:pPr>
             <a:r>
-              <a:rPr lang="en-US" sz="1300" b="1" dirty="0">
+              <a:rPr lang="en-US" sz="1220" b="1" dirty="0">
                 <a:solidFill>
                   <a:srgbClr val="0068B7"/>
                 </a:solidFill>
@@ -11057,7 +11061,7 @@
               </a:rPr>
               <a:t>Learning sequence</a:t>
             </a:r>
-            <a:endParaRPr lang="en-US" sz="1300" dirty="0"/>
+            <a:endParaRPr lang="en-US" sz="1220" dirty="0"/>
           </a:p>
         </p:txBody>
       </p:sp>
@@ -11069,8 +11073,8 @@
         </p:nvSpPr>
         <p:spPr>
           <a:xfrm>
-            <a:off x="8092440" y="4187952"/>
-            <a:ext cx="2770632" cy="1033272"/>
+            <a:off x="8092440" y="4133088"/>
+            <a:ext cx="2770632" cy="1124712"/>
           </a:xfrm>
           <a:prstGeom prst="rect">
             <a:avLst/>
@@ -11088,7 +11092,7 @@
               <a:buNone/>
             </a:pPr>
             <a:r>
-              <a:rPr lang="en-US" sz="1220" dirty="0">
+              <a:rPr lang="en-US" sz="1140" dirty="0">
                 <a:solidFill>
                   <a:srgbClr val="17364A"/>
                 </a:solidFill>
@@ -11098,14 +11102,14 @@
               </a:rPr>
               <a:t>Read the module for shared vocabulary and context.</a:t>
             </a:r>
-            <a:endParaRPr lang="en-US" sz="1220" dirty="0"/>
-          </a:p>
-          <a:p>
-            <a:pPr indent="0" marL="0">
-              <a:buNone/>
-            </a:pPr>
-            <a:r>
-              <a:rPr lang="en-US" sz="1220" dirty="0">
+            <a:endParaRPr lang="en-US" sz="1140" dirty="0"/>
+          </a:p>
+          <a:p>
+            <a:pPr indent="0" marL="0">
+              <a:buNone/>
+            </a:pPr>
+            <a:r>
+              <a:rPr lang="en-US" sz="1140" dirty="0">
                 <a:solidFill>
                   <a:srgbClr val="17364A"/>
                 </a:solidFill>
@@ -11113,16 +11117,16 @@
                 <a:ea typeface="Aptos" pitchFamily="34" charset="-122"/>
                 <a:cs typeface="Aptos" pitchFamily="34" charset="-120"/>
               </a:rPr>
-              <a:t>Complete the practical exercise to apply the concept.</a:t>
-            </a:r>
-            <a:endParaRPr lang="en-US" sz="1220" dirty="0"/>
-          </a:p>
-          <a:p>
-            <a:pPr indent="0" marL="0">
-              <a:buNone/>
-            </a:pPr>
-            <a:r>
-              <a:rPr lang="en-US" sz="1220" dirty="0">
+              <a:t>Complete the practical exercise to apply the.</a:t>
+            </a:r>
+            <a:endParaRPr lang="en-US" sz="1140" dirty="0"/>
+          </a:p>
+          <a:p>
+            <a:pPr indent="0" marL="0">
+              <a:buNone/>
+            </a:pPr>
+            <a:r>
+              <a:rPr lang="en-US" sz="1140" dirty="0">
                 <a:solidFill>
                   <a:srgbClr val="17364A"/>
                 </a:solidFill>
@@ -11132,7 +11136,7 @@
               </a:rPr>
               <a:t>Use the notes and references for deeper review.</a:t>
             </a:r>
-            <a:endParaRPr lang="en-US" sz="1220" dirty="0"/>
+            <a:endParaRPr lang="en-US" sz="1140" dirty="0"/>
           </a:p>
         </p:txBody>
       </p:sp>
@@ -11423,8 +11427,8 @@
         </p:nvSpPr>
         <p:spPr>
           <a:xfrm>
-            <a:off x="868680" y="1508760"/>
-            <a:ext cx="6309360" cy="4160520"/>
+            <a:off x="822960" y="1463040"/>
+            <a:ext cx="6565392" cy="4343400"/>
           </a:xfrm>
           <a:prstGeom prst="rect">
             <a:avLst/>
@@ -11442,7 +11446,7 @@
               <a:buNone/>
             </a:pPr>
             <a:r>
-              <a:rPr lang="en-US" sz="2100" dirty="0">
+              <a:rPr lang="en-US" sz="1920" dirty="0">
                 <a:solidFill>
                   <a:srgbClr val="003A63"/>
                 </a:solidFill>
@@ -11452,14 +11456,14 @@
               </a:rPr>
               <a:t>• Completed AI use case intake worksheet</a:t>
             </a:r>
-            <a:endParaRPr lang="en-US" sz="2100" dirty="0"/>
-          </a:p>
-          <a:p>
-            <a:pPr indent="0" marL="0">
-              <a:buNone/>
-            </a:pPr>
-            <a:r>
-              <a:rPr lang="en-US" sz="2100" dirty="0">
+            <a:endParaRPr lang="en-US" sz="1920" dirty="0"/>
+          </a:p>
+          <a:p>
+            <a:pPr indent="0" marL="0">
+              <a:buNone/>
+            </a:pPr>
+            <a:r>
+              <a:rPr lang="en-US" sz="1920" dirty="0">
                 <a:solidFill>
                   <a:srgbClr val="003A63"/>
                 </a:solidFill>
@@ -11469,14 +11473,14 @@
               </a:rPr>
               <a:t>• Risk and readiness triage decision</a:t>
             </a:r>
-            <a:endParaRPr lang="en-US" sz="2100" dirty="0"/>
-          </a:p>
-          <a:p>
-            <a:pPr indent="0" marL="0">
-              <a:buNone/>
-            </a:pPr>
-            <a:r>
-              <a:rPr lang="en-US" sz="2100" dirty="0">
+            <a:endParaRPr lang="en-US" sz="1920" dirty="0"/>
+          </a:p>
+          <a:p>
+            <a:pPr indent="0" marL="0">
+              <a:buNone/>
+            </a:pPr>
+            <a:r>
+              <a:rPr lang="en-US" sz="1920" dirty="0">
                 <a:solidFill>
                   <a:srgbClr val="003A63"/>
                 </a:solidFill>
@@ -11486,7 +11490,7 @@
               </a:rPr>
               <a:t>• List of required reviewers and next steps</a:t>
             </a:r>
-            <a:endParaRPr lang="en-US" sz="2100" dirty="0"/>
+            <a:endParaRPr lang="en-US" sz="1920" dirty="0"/>
           </a:p>
         </p:txBody>
       </p:sp>
@@ -11498,12 +11502,12 @@
         </p:nvSpPr>
         <p:spPr>
           <a:xfrm>
-            <a:off x="7635240" y="1325880"/>
-            <a:ext cx="3474720" cy="1207008"/>
+            <a:off x="7543800" y="1325880"/>
+            <a:ext cx="3611880" cy="1261872"/>
           </a:xfrm>
           <a:prstGeom prst="roundRect">
             <a:avLst>
-              <a:gd name="adj" fmla="val 9091"/>
+              <a:gd name="adj" fmla="val 8696"/>
             </a:avLst>
           </a:prstGeom>
           <a:solidFill>
@@ -11525,8 +11529,8 @@
         </p:nvSpPr>
         <p:spPr>
           <a:xfrm>
-            <a:off x="7799832" y="1472184"/>
-            <a:ext cx="3145536" cy="256032"/>
+            <a:off x="7708392" y="1453896"/>
+            <a:ext cx="3282696" cy="228600"/>
           </a:xfrm>
           <a:prstGeom prst="rect">
             <a:avLst/>
@@ -11542,7 +11546,7 @@
               <a:buNone/>
             </a:pPr>
             <a:r>
-              <a:rPr lang="en-US" sz="1300" b="1" dirty="0">
+              <a:rPr lang="en-US" sz="1220" b="1" dirty="0">
                 <a:solidFill>
                   <a:srgbClr val="0068B7"/>
                 </a:solidFill>
@@ -11552,7 +11556,7 @@
               </a:rPr>
               <a:t>Practice focus</a:t>
             </a:r>
-            <a:endParaRPr lang="en-US" sz="1300" dirty="0"/>
+            <a:endParaRPr lang="en-US" sz="1220" dirty="0"/>
           </a:p>
         </p:txBody>
       </p:sp>
@@ -11564,8 +11568,8 @@
         </p:nvSpPr>
         <p:spPr>
           <a:xfrm>
-            <a:off x="7799832" y="1801368"/>
-            <a:ext cx="3145536" cy="640080"/>
+            <a:off x="7708392" y="1764792"/>
+            <a:ext cx="3282696" cy="749808"/>
           </a:xfrm>
           <a:prstGeom prst="rect">
             <a:avLst/>
@@ -11583,7 +11587,7 @@
               <a:buNone/>
             </a:pPr>
             <a:r>
-              <a:rPr lang="en-US" sz="1320" dirty="0">
+              <a:rPr lang="en-US" sz="1220" dirty="0">
                 <a:solidFill>
                   <a:srgbClr val="17364A"/>
                 </a:solidFill>
@@ -11593,7 +11597,7 @@
               </a:rPr>
               <a:t>Completed AI use case intake worksheet</a:t>
             </a:r>
-            <a:endParaRPr lang="en-US" sz="1320" dirty="0"/>
+            <a:endParaRPr lang="en-US" sz="1220" dirty="0"/>
           </a:p>
         </p:txBody>
       </p:sp>
@@ -11605,12 +11609,12 @@
         </p:nvSpPr>
         <p:spPr>
           <a:xfrm>
-            <a:off x="7635240" y="2670048"/>
-            <a:ext cx="3474720" cy="1377086"/>
+            <a:off x="7543800" y="2724912"/>
+            <a:ext cx="3611880" cy="1527048"/>
           </a:xfrm>
           <a:prstGeom prst="roundRect">
             <a:avLst>
-              <a:gd name="adj" fmla="val 7968"/>
+              <a:gd name="adj" fmla="val 7186"/>
             </a:avLst>
           </a:prstGeom>
           <a:solidFill>
@@ -11632,8 +11636,8 @@
         </p:nvSpPr>
         <p:spPr>
           <a:xfrm>
-            <a:off x="7799832" y="2816352"/>
-            <a:ext cx="3145536" cy="256032"/>
+            <a:off x="7708392" y="2852928"/>
+            <a:ext cx="3282696" cy="228600"/>
           </a:xfrm>
           <a:prstGeom prst="rect">
             <a:avLst/>
@@ -11649,7 +11653,7 @@
               <a:buNone/>
             </a:pPr>
             <a:r>
-              <a:rPr lang="en-US" sz="1300" b="1" dirty="0">
+              <a:rPr lang="en-US" sz="1220" b="1" dirty="0">
                 <a:solidFill>
                   <a:srgbClr val="0068B7"/>
                 </a:solidFill>
@@ -11659,7 +11663,7 @@
               </a:rPr>
               <a:t>Concept checkpoints</a:t>
             </a:r>
-            <a:endParaRPr lang="en-US" sz="1300" dirty="0"/>
+            <a:endParaRPr lang="en-US" sz="1220" dirty="0"/>
           </a:p>
         </p:txBody>
       </p:sp>
@@ -11671,8 +11675,8 @@
         </p:nvSpPr>
         <p:spPr>
           <a:xfrm>
-            <a:off x="7818120" y="3182112"/>
-            <a:ext cx="3090672" cy="718718"/>
+            <a:off x="7726680" y="3182112"/>
+            <a:ext cx="3227832" cy="960120"/>
           </a:xfrm>
           <a:prstGeom prst="rect">
             <a:avLst/>
@@ -11690,7 +11694,7 @@
               <a:buNone/>
             </a:pPr>
             <a:r>
-              <a:rPr lang="en-US" sz="1220" dirty="0">
+              <a:rPr lang="en-US" sz="1140" dirty="0">
                 <a:solidFill>
                   <a:srgbClr val="17364A"/>
                 </a:solidFill>
@@ -11700,14 +11704,14 @@
               </a:rPr>
               <a:t>Completed AI use case intake worksheet</a:t>
             </a:r>
-            <a:endParaRPr lang="en-US" sz="1220" dirty="0"/>
-          </a:p>
-          <a:p>
-            <a:pPr indent="0" marL="0">
-              <a:buNone/>
-            </a:pPr>
-            <a:r>
-              <a:rPr lang="en-US" sz="1220" dirty="0">
+            <a:endParaRPr lang="en-US" sz="1140" dirty="0"/>
+          </a:p>
+          <a:p>
+            <a:pPr indent="0" marL="0">
+              <a:buNone/>
+            </a:pPr>
+            <a:r>
+              <a:rPr lang="en-US" sz="1140" dirty="0">
                 <a:solidFill>
                   <a:srgbClr val="17364A"/>
                 </a:solidFill>
@@ -11717,14 +11721,14 @@
               </a:rPr>
               <a:t>Risk and readiness triage decision</a:t>
             </a:r>
-            <a:endParaRPr lang="en-US" sz="1220" dirty="0"/>
-          </a:p>
-          <a:p>
-            <a:pPr indent="0" marL="0">
-              <a:buNone/>
-            </a:pPr>
-            <a:r>
-              <a:rPr lang="en-US" sz="1220" dirty="0">
+            <a:endParaRPr lang="en-US" sz="1140" dirty="0"/>
+          </a:p>
+          <a:p>
+            <a:pPr indent="0" marL="0">
+              <a:buNone/>
+            </a:pPr>
+            <a:r>
+              <a:rPr lang="en-US" sz="1140" dirty="0">
                 <a:solidFill>
                   <a:srgbClr val="17364A"/>
                 </a:solidFill>
@@ -11734,7 +11738,7 @@
               </a:rPr>
               <a:t>List of required reviewers and next steps</a:t>
             </a:r>
-            <a:endParaRPr lang="en-US" sz="1220" dirty="0"/>
+            <a:endParaRPr lang="en-US" sz="1140" dirty="0"/>
           </a:p>
         </p:txBody>
       </p:sp>
@@ -11746,12 +11750,12 @@
         </p:nvSpPr>
         <p:spPr>
           <a:xfrm>
-            <a:off x="7635240" y="4184294"/>
-            <a:ext cx="3474720" cy="1466698"/>
+            <a:off x="7543800" y="4389120"/>
+            <a:ext cx="3611880" cy="1261872"/>
           </a:xfrm>
           <a:prstGeom prst="roundRect">
             <a:avLst>
-              <a:gd name="adj" fmla="val 7481"/>
+              <a:gd name="adj" fmla="val 8696"/>
             </a:avLst>
           </a:prstGeom>
           <a:solidFill>
@@ -11773,8 +11777,8 @@
         </p:nvSpPr>
         <p:spPr>
           <a:xfrm>
-            <a:off x="7799832" y="4330598"/>
-            <a:ext cx="3145536" cy="256032"/>
+            <a:off x="7708392" y="4517136"/>
+            <a:ext cx="3282696" cy="228600"/>
           </a:xfrm>
           <a:prstGeom prst="rect">
             <a:avLst/>
@@ -11790,7 +11794,7 @@
               <a:buNone/>
             </a:pPr>
             <a:r>
-              <a:rPr lang="en-US" sz="1300" b="1" dirty="0">
+              <a:rPr lang="en-US" sz="1220" b="1" dirty="0">
                 <a:solidFill>
                   <a:srgbClr val="0068B7"/>
                 </a:solidFill>
@@ -11800,7 +11804,7 @@
               </a:rPr>
               <a:t>What to produce</a:t>
             </a:r>
-            <a:endParaRPr lang="en-US" sz="1300" dirty="0"/>
+            <a:endParaRPr lang="en-US" sz="1220" dirty="0"/>
           </a:p>
         </p:txBody>
       </p:sp>
@@ -11812,8 +11816,8 @@
         </p:nvSpPr>
         <p:spPr>
           <a:xfrm>
-            <a:off x="7799832" y="4659782"/>
-            <a:ext cx="3145536" cy="899770"/>
+            <a:off x="7708392" y="4828032"/>
+            <a:ext cx="3282696" cy="749808"/>
           </a:xfrm>
           <a:prstGeom prst="rect">
             <a:avLst/>
@@ -11831,7 +11835,7 @@
               <a:buNone/>
             </a:pPr>
             <a:r>
-              <a:rPr lang="en-US" sz="1320" dirty="0">
+              <a:rPr lang="en-US" sz="1220" dirty="0">
                 <a:solidFill>
                   <a:srgbClr val="17364A"/>
                 </a:solidFill>
@@ -11839,9 +11843,9 @@
                 <a:ea typeface="Aptos" pitchFamily="34" charset="-122"/>
                 <a:cs typeface="Aptos" pitchFamily="34" charset="-120"/>
               </a:rPr>
-              <a:t>Use the assignment to test whether you can explain the concept, apply it to a realistic public health situation, and identify what would need review before the work moves forward.</a:t>
-            </a:r>
-            <a:endParaRPr lang="en-US" sz="1320" dirty="0"/>
+              <a:t>Use the assignment to test whether you can explain the concept, apply it to a.</a:t>
+            </a:r>
+            <a:endParaRPr lang="en-US" sz="1220" dirty="0"/>
           </a:p>
         </p:txBody>
       </p:sp>
@@ -12132,8 +12136,8 @@
         </p:nvSpPr>
         <p:spPr>
           <a:xfrm>
-            <a:off x="868680" y="1508760"/>
-            <a:ext cx="6309360" cy="4160520"/>
+            <a:off x="822960" y="1463040"/>
+            <a:ext cx="6565392" cy="4343400"/>
           </a:xfrm>
           <a:prstGeom prst="rect">
             <a:avLst/>
@@ -12151,7 +12155,7 @@
               <a:buNone/>
             </a:pPr>
             <a:r>
-              <a:rPr lang="en-US" sz="2100" dirty="0">
+              <a:rPr lang="en-US" sz="1920" dirty="0">
                 <a:solidFill>
                   <a:srgbClr val="003A63"/>
                 </a:solidFill>
@@ -12161,14 +12165,14 @@
               </a:rPr>
               <a:t>• 1. What is the main purpose of AI use case intake?</a:t>
             </a:r>
-            <a:endParaRPr lang="en-US" sz="2100" dirty="0"/>
-          </a:p>
-          <a:p>
-            <a:pPr indent="0" marL="0">
-              <a:buNone/>
-            </a:pPr>
-            <a:r>
-              <a:rPr lang="en-US" sz="2100" dirty="0">
+            <a:endParaRPr lang="en-US" sz="1920" dirty="0"/>
+          </a:p>
+          <a:p>
+            <a:pPr indent="0" marL="0">
+              <a:buNone/>
+            </a:pPr>
+            <a:r>
+              <a:rPr lang="en-US" sz="1920" dirty="0">
                 <a:solidFill>
                   <a:srgbClr val="003A63"/>
                 </a:solidFill>
@@ -12178,14 +12182,14 @@
               </a:rPr>
               <a:t>• 2. Which proposal should usually receive higher-risk triage?</a:t>
             </a:r>
-            <a:endParaRPr lang="en-US" sz="2100" dirty="0"/>
-          </a:p>
-          <a:p>
-            <a:pPr indent="0" marL="0">
-              <a:buNone/>
-            </a:pPr>
-            <a:r>
-              <a:rPr lang="en-US" sz="2100" dirty="0">
+            <a:endParaRPr lang="en-US" sz="1920" dirty="0"/>
+          </a:p>
+          <a:p>
+            <a:pPr indent="0" marL="0">
+              <a:buNone/>
+            </a:pPr>
+            <a:r>
+              <a:rPr lang="en-US" sz="1920" dirty="0">
                 <a:solidFill>
                   <a:srgbClr val="003A63"/>
                 </a:solidFill>
@@ -12193,9 +12197,9 @@
                 <a:ea typeface="Aptos" pitchFamily="34" charset="-122"/>
                 <a:cs typeface="Aptos" pitchFamily="34" charset="-120"/>
               </a:rPr>
-              <a:t>• 3. What should happen when a proposed workflow problem can be solved without AI?</a:t>
-            </a:r>
-            <a:endParaRPr lang="en-US" sz="2100" dirty="0"/>
+              <a:t>• 3. What should happen when a proposed workflow problem can be solved without.</a:t>
+            </a:r>
+            <a:endParaRPr lang="en-US" sz="1920" dirty="0"/>
           </a:p>
         </p:txBody>
       </p:sp>
@@ -12207,12 +12211,12 @@
         </p:nvSpPr>
         <p:spPr>
           <a:xfrm>
-            <a:off x="7635240" y="1325880"/>
-            <a:ext cx="3474720" cy="1207008"/>
+            <a:off x="7543800" y="1325880"/>
+            <a:ext cx="3611880" cy="1261872"/>
           </a:xfrm>
           <a:prstGeom prst="roundRect">
             <a:avLst>
-              <a:gd name="adj" fmla="val 9091"/>
+              <a:gd name="adj" fmla="val 8696"/>
             </a:avLst>
           </a:prstGeom>
           <a:solidFill>
@@ -12234,8 +12238,8 @@
         </p:nvSpPr>
         <p:spPr>
           <a:xfrm>
-            <a:off x="7799832" y="1472184"/>
-            <a:ext cx="3145536" cy="256032"/>
+            <a:off x="7708392" y="1453896"/>
+            <a:ext cx="3282696" cy="228600"/>
           </a:xfrm>
           <a:prstGeom prst="rect">
             <a:avLst/>
@@ -12251,7 +12255,7 @@
               <a:buNone/>
             </a:pPr>
             <a:r>
-              <a:rPr lang="en-US" sz="1300" b="1" dirty="0">
+              <a:rPr lang="en-US" sz="1220" b="1" dirty="0">
                 <a:solidFill>
                   <a:srgbClr val="0068B7"/>
                 </a:solidFill>
@@ -12261,7 +12265,7 @@
               </a:rPr>
               <a:t>Practice focus</a:t>
             </a:r>
-            <a:endParaRPr lang="en-US" sz="1300" dirty="0"/>
+            <a:endParaRPr lang="en-US" sz="1220" dirty="0"/>
           </a:p>
         </p:txBody>
       </p:sp>
@@ -12273,8 +12277,8 @@
         </p:nvSpPr>
         <p:spPr>
           <a:xfrm>
-            <a:off x="7799832" y="1801368"/>
-            <a:ext cx="3145536" cy="640080"/>
+            <a:off x="7708392" y="1764792"/>
+            <a:ext cx="3282696" cy="749808"/>
           </a:xfrm>
           <a:prstGeom prst="rect">
             <a:avLst/>
@@ -12292,7 +12296,7 @@
               <a:buNone/>
             </a:pPr>
             <a:r>
-              <a:rPr lang="en-US" sz="1320" dirty="0">
+              <a:rPr lang="en-US" sz="1220" dirty="0">
                 <a:solidFill>
                   <a:srgbClr val="17364A"/>
                 </a:solidFill>
@@ -12302,7 +12306,7 @@
               </a:rPr>
               <a:t>1. What is the main purpose of AI use case intake?</a:t>
             </a:r>
-            <a:endParaRPr lang="en-US" sz="1320" dirty="0"/>
+            <a:endParaRPr lang="en-US" sz="1220" dirty="0"/>
           </a:p>
         </p:txBody>
       </p:sp>
@@ -12314,12 +12318,12 @@
         </p:nvSpPr>
         <p:spPr>
           <a:xfrm>
-            <a:off x="7635240" y="2670048"/>
-            <a:ext cx="3474720" cy="1377086"/>
+            <a:off x="7543800" y="2724912"/>
+            <a:ext cx="3611880" cy="1527048"/>
           </a:xfrm>
           <a:prstGeom prst="roundRect">
             <a:avLst>
-              <a:gd name="adj" fmla="val 7968"/>
+              <a:gd name="adj" fmla="val 7186"/>
             </a:avLst>
           </a:prstGeom>
           <a:solidFill>
@@ -12341,8 +12345,8 @@
         </p:nvSpPr>
         <p:spPr>
           <a:xfrm>
-            <a:off x="7799832" y="2816352"/>
-            <a:ext cx="3145536" cy="256032"/>
+            <a:off x="7708392" y="2852928"/>
+            <a:ext cx="3282696" cy="228600"/>
           </a:xfrm>
           <a:prstGeom prst="rect">
             <a:avLst/>
@@ -12358,7 +12362,7 @@
               <a:buNone/>
             </a:pPr>
             <a:r>
-              <a:rPr lang="en-US" sz="1300" b="1" dirty="0">
+              <a:rPr lang="en-US" sz="1220" b="1" dirty="0">
                 <a:solidFill>
                   <a:srgbClr val="0068B7"/>
                 </a:solidFill>
@@ -12368,7 +12372,7 @@
               </a:rPr>
               <a:t>Concept checkpoints</a:t>
             </a:r>
-            <a:endParaRPr lang="en-US" sz="1300" dirty="0"/>
+            <a:endParaRPr lang="en-US" sz="1220" dirty="0"/>
           </a:p>
         </p:txBody>
       </p:sp>
@@ -12380,8 +12384,8 @@
         </p:nvSpPr>
         <p:spPr>
           <a:xfrm>
-            <a:off x="7818120" y="3182112"/>
-            <a:ext cx="3090672" cy="718718"/>
+            <a:off x="7726680" y="3182112"/>
+            <a:ext cx="3227832" cy="960120"/>
           </a:xfrm>
           <a:prstGeom prst="rect">
             <a:avLst/>
@@ -12399,7 +12403,7 @@
               <a:buNone/>
             </a:pPr>
             <a:r>
-              <a:rPr lang="en-US" sz="1220" dirty="0">
+              <a:rPr lang="en-US" sz="1140" dirty="0">
                 <a:solidFill>
                   <a:srgbClr val="17364A"/>
                 </a:solidFill>
@@ -12409,14 +12413,14 @@
               </a:rPr>
               <a:t>1.</a:t>
             </a:r>
-            <a:endParaRPr lang="en-US" sz="1220" dirty="0"/>
-          </a:p>
-          <a:p>
-            <a:pPr indent="0" marL="0">
-              <a:buNone/>
-            </a:pPr>
-            <a:r>
-              <a:rPr lang="en-US" sz="1220" dirty="0">
+            <a:endParaRPr lang="en-US" sz="1140" dirty="0"/>
+          </a:p>
+          <a:p>
+            <a:pPr indent="0" marL="0">
+              <a:buNone/>
+            </a:pPr>
+            <a:r>
+              <a:rPr lang="en-US" sz="1140" dirty="0">
                 <a:solidFill>
                   <a:srgbClr val="17364A"/>
                 </a:solidFill>
@@ -12426,14 +12430,14 @@
               </a:rPr>
               <a:t>What is the main purpose of AI use case intake?</a:t>
             </a:r>
-            <a:endParaRPr lang="en-US" sz="1220" dirty="0"/>
-          </a:p>
-          <a:p>
-            <a:pPr indent="0" marL="0">
-              <a:buNone/>
-            </a:pPr>
-            <a:r>
-              <a:rPr lang="en-US" sz="1220" dirty="0">
+            <a:endParaRPr lang="en-US" sz="1140" dirty="0"/>
+          </a:p>
+          <a:p>
+            <a:pPr indent="0" marL="0">
+              <a:buNone/>
+            </a:pPr>
+            <a:r>
+              <a:rPr lang="en-US" sz="1140" dirty="0">
                 <a:solidFill>
                   <a:srgbClr val="17364A"/>
                 </a:solidFill>
@@ -12443,7 +12447,7 @@
               </a:rPr>
               <a:t>2.</a:t>
             </a:r>
-            <a:endParaRPr lang="en-US" sz="1220" dirty="0"/>
+            <a:endParaRPr lang="en-US" sz="1140" dirty="0"/>
           </a:p>
         </p:txBody>
       </p:sp>
@@ -12455,12 +12459,12 @@
         </p:nvSpPr>
         <p:spPr>
           <a:xfrm>
-            <a:off x="7635240" y="4184294"/>
-            <a:ext cx="3474720" cy="1466698"/>
+            <a:off x="7543800" y="4389120"/>
+            <a:ext cx="3611880" cy="1261872"/>
           </a:xfrm>
           <a:prstGeom prst="roundRect">
             <a:avLst>
-              <a:gd name="adj" fmla="val 7481"/>
+              <a:gd name="adj" fmla="val 8696"/>
             </a:avLst>
           </a:prstGeom>
           <a:solidFill>
@@ -12482,8 +12486,8 @@
         </p:nvSpPr>
         <p:spPr>
           <a:xfrm>
-            <a:off x="7799832" y="4330598"/>
-            <a:ext cx="3145536" cy="256032"/>
+            <a:off x="7708392" y="4517136"/>
+            <a:ext cx="3282696" cy="228600"/>
           </a:xfrm>
           <a:prstGeom prst="rect">
             <a:avLst/>
@@ -12499,7 +12503,7 @@
               <a:buNone/>
             </a:pPr>
             <a:r>
-              <a:rPr lang="en-US" sz="1300" b="1" dirty="0">
+              <a:rPr lang="en-US" sz="1220" b="1" dirty="0">
                 <a:solidFill>
                   <a:srgbClr val="0068B7"/>
                 </a:solidFill>
@@ -12509,7 +12513,7 @@
               </a:rPr>
               <a:t>What to produce</a:t>
             </a:r>
-            <a:endParaRPr lang="en-US" sz="1300" dirty="0"/>
+            <a:endParaRPr lang="en-US" sz="1220" dirty="0"/>
           </a:p>
         </p:txBody>
       </p:sp>
@@ -12521,8 +12525,8 @@
         </p:nvSpPr>
         <p:spPr>
           <a:xfrm>
-            <a:off x="7799832" y="4659782"/>
-            <a:ext cx="3145536" cy="899770"/>
+            <a:off x="7708392" y="4828032"/>
+            <a:ext cx="3282696" cy="749808"/>
           </a:xfrm>
           <a:prstGeom prst="rect">
             <a:avLst/>
@@ -12540,7 +12544,7 @@
               <a:buNone/>
             </a:pPr>
             <a:r>
-              <a:rPr lang="en-US" sz="1320" dirty="0">
+              <a:rPr lang="en-US" sz="1220" dirty="0">
                 <a:solidFill>
                   <a:srgbClr val="17364A"/>
                 </a:solidFill>
@@ -12548,9 +12552,9 @@
                 <a:ea typeface="Aptos" pitchFamily="34" charset="-122"/>
                 <a:cs typeface="Aptos" pitchFamily="34" charset="-120"/>
               </a:rPr>
-              <a:t>Use the assignment to test whether you can explain the concept, apply it to a realistic public health situation, and identify what would need review before the work moves forward.</a:t>
-            </a:r>
-            <a:endParaRPr lang="en-US" sz="1320" dirty="0"/>
+              <a:t>Use the assignment to test whether you can explain the concept, apply it to a.</a:t>
+            </a:r>
+            <a:endParaRPr lang="en-US" sz="1220" dirty="0"/>
           </a:p>
         </p:txBody>
       </p:sp>
@@ -12841,8 +12845,8 @@
         </p:nvSpPr>
         <p:spPr>
           <a:xfrm>
-            <a:off x="868680" y="1508760"/>
-            <a:ext cx="6309360" cy="4160520"/>
+            <a:off x="822960" y="1463040"/>
+            <a:ext cx="6565392" cy="4343400"/>
           </a:xfrm>
           <a:prstGeom prst="rect">
             <a:avLst/>
@@ -12860,7 +12864,7 @@
               <a:buNone/>
             </a:pPr>
             <a:r>
-              <a:rPr lang="en-US" sz="2100" dirty="0">
+              <a:rPr lang="en-US" sz="1920" dirty="0">
                 <a:solidFill>
                   <a:srgbClr val="003A63"/>
                 </a:solidFill>
@@ -12870,14 +12874,14 @@
               </a:rPr>
               <a:t>• NIST Artificial Intelligence Risk Management Framework:.</a:t>
             </a:r>
-            <a:endParaRPr lang="en-US" sz="2100" dirty="0"/>
-          </a:p>
-          <a:p>
-            <a:pPr indent="0" marL="0">
-              <a:buNone/>
-            </a:pPr>
-            <a:r>
-              <a:rPr lang="en-US" sz="2100" dirty="0">
+            <a:endParaRPr lang="en-US" sz="1920" dirty="0"/>
+          </a:p>
+          <a:p>
+            <a:pPr indent="0" marL="0">
+              <a:buNone/>
+            </a:pPr>
+            <a:r>
+              <a:rPr lang="en-US" sz="1920" dirty="0">
                 <a:solidFill>
                   <a:srgbClr val="003A63"/>
                 </a:solidFill>
@@ -12887,14 +12891,14 @@
               </a:rPr>
               <a:t>• NIST Generative AI Profile:.</a:t>
             </a:r>
-            <a:endParaRPr lang="en-US" sz="2100" dirty="0"/>
-          </a:p>
-          <a:p>
-            <a:pPr indent="0" marL="0">
-              <a:buNone/>
-            </a:pPr>
-            <a:r>
-              <a:rPr lang="en-US" sz="2100" dirty="0">
+            <a:endParaRPr lang="en-US" sz="1920" dirty="0"/>
+          </a:p>
+          <a:p>
+            <a:pPr indent="0" marL="0">
+              <a:buNone/>
+            </a:pPr>
+            <a:r>
+              <a:rPr lang="en-US" sz="1920" dirty="0">
                 <a:solidFill>
                   <a:srgbClr val="003A63"/>
                 </a:solidFill>
@@ -12904,7 +12908,7 @@
               </a:rPr>
               <a:t>• CDC Public Health Data Strategy and Data Modernization resources:.</a:t>
             </a:r>
-            <a:endParaRPr lang="en-US" sz="2100" dirty="0"/>
+            <a:endParaRPr lang="en-US" sz="1920" dirty="0"/>
           </a:p>
         </p:txBody>
       </p:sp>
@@ -12916,12 +12920,12 @@
         </p:nvSpPr>
         <p:spPr>
           <a:xfrm>
-            <a:off x="7635240" y="1325880"/>
-            <a:ext cx="3474720" cy="1207008"/>
+            <a:off x="7543800" y="1325880"/>
+            <a:ext cx="3611880" cy="1261872"/>
           </a:xfrm>
           <a:prstGeom prst="roundRect">
             <a:avLst>
-              <a:gd name="adj" fmla="val 9091"/>
+              <a:gd name="adj" fmla="val 8696"/>
             </a:avLst>
           </a:prstGeom>
           <a:solidFill>
@@ -12943,8 +12947,8 @@
         </p:nvSpPr>
         <p:spPr>
           <a:xfrm>
-            <a:off x="7799832" y="1472184"/>
-            <a:ext cx="3145536" cy="256032"/>
+            <a:off x="7708392" y="1453896"/>
+            <a:ext cx="3282696" cy="228600"/>
           </a:xfrm>
           <a:prstGeom prst="rect">
             <a:avLst/>
@@ -12960,7 +12964,7 @@
               <a:buNone/>
             </a:pPr>
             <a:r>
-              <a:rPr lang="en-US" sz="1300" b="1" dirty="0">
+              <a:rPr lang="en-US" sz="1220" b="1" dirty="0">
                 <a:solidFill>
                   <a:srgbClr val="0068B7"/>
                 </a:solidFill>
@@ -12970,7 +12974,7 @@
               </a:rPr>
               <a:t>Core concept</a:t>
             </a:r>
-            <a:endParaRPr lang="en-US" sz="1300" dirty="0"/>
+            <a:endParaRPr lang="en-US" sz="1220" dirty="0"/>
           </a:p>
         </p:txBody>
       </p:sp>
@@ -12982,8 +12986,8 @@
         </p:nvSpPr>
         <p:spPr>
           <a:xfrm>
-            <a:off x="7799832" y="1801368"/>
-            <a:ext cx="3145536" cy="640080"/>
+            <a:off x="7708392" y="1764792"/>
+            <a:ext cx="3282696" cy="749808"/>
           </a:xfrm>
           <a:prstGeom prst="rect">
             <a:avLst/>
@@ -13001,7 +13005,7 @@
               <a:buNone/>
             </a:pPr>
             <a:r>
-              <a:rPr lang="en-US" sz="1320" dirty="0">
+              <a:rPr lang="en-US" sz="1220" dirty="0">
                 <a:solidFill>
                   <a:srgbClr val="17364A"/>
                 </a:solidFill>
@@ -13011,7 +13015,7 @@
               </a:rPr>
               <a:t>NIST Artificial Intelligence Risk Management Framework:.</a:t>
             </a:r>
-            <a:endParaRPr lang="en-US" sz="1320" dirty="0"/>
+            <a:endParaRPr lang="en-US" sz="1220" dirty="0"/>
           </a:p>
         </p:txBody>
       </p:sp>
@@ -13023,12 +13027,12 @@
         </p:nvSpPr>
         <p:spPr>
           <a:xfrm>
-            <a:off x="7635240" y="2670048"/>
-            <a:ext cx="3474720" cy="1377086"/>
+            <a:off x="7543800" y="2724912"/>
+            <a:ext cx="3611880" cy="1527048"/>
           </a:xfrm>
           <a:prstGeom prst="roundRect">
             <a:avLst>
-              <a:gd name="adj" fmla="val 7968"/>
+              <a:gd name="adj" fmla="val 7186"/>
             </a:avLst>
           </a:prstGeom>
           <a:solidFill>
@@ -13050,8 +13054,8 @@
         </p:nvSpPr>
         <p:spPr>
           <a:xfrm>
-            <a:off x="7799832" y="2816352"/>
-            <a:ext cx="3145536" cy="256032"/>
+            <a:off x="7708392" y="2852928"/>
+            <a:ext cx="3282696" cy="228600"/>
           </a:xfrm>
           <a:prstGeom prst="rect">
             <a:avLst/>
@@ -13067,7 +13071,7 @@
               <a:buNone/>
             </a:pPr>
             <a:r>
-              <a:rPr lang="en-US" sz="1300" b="1" dirty="0">
+              <a:rPr lang="en-US" sz="1220" b="1" dirty="0">
                 <a:solidFill>
                   <a:srgbClr val="0068B7"/>
                 </a:solidFill>
@@ -13077,7 +13081,7 @@
               </a:rPr>
               <a:t>Concept checkpoints</a:t>
             </a:r>
-            <a:endParaRPr lang="en-US" sz="1300" dirty="0"/>
+            <a:endParaRPr lang="en-US" sz="1220" dirty="0"/>
           </a:p>
         </p:txBody>
       </p:sp>
@@ -13089,8 +13093,8 @@
         </p:nvSpPr>
         <p:spPr>
           <a:xfrm>
-            <a:off x="7818120" y="3182112"/>
-            <a:ext cx="3090672" cy="718718"/>
+            <a:off x="7726680" y="3182112"/>
+            <a:ext cx="3227832" cy="960120"/>
           </a:xfrm>
           <a:prstGeom prst="rect">
             <a:avLst/>
@@ -13108,7 +13112,7 @@
               <a:buNone/>
             </a:pPr>
             <a:r>
-              <a:rPr lang="en-US" sz="1220" dirty="0">
+              <a:rPr lang="en-US" sz="1140" dirty="0">
                 <a:solidFill>
                   <a:srgbClr val="17364A"/>
                 </a:solidFill>
@@ -13116,16 +13120,16 @@
                 <a:ea typeface="Aptos" pitchFamily="34" charset="-122"/>
                 <a:cs typeface="Aptos" pitchFamily="34" charset="-120"/>
               </a:rPr>
-              <a:t>NIST Artificial Intelligence Risk Management Framework:.</a:t>
-            </a:r>
-            <a:endParaRPr lang="en-US" sz="1220" dirty="0"/>
-          </a:p>
-          <a:p>
-            <a:pPr indent="0" marL="0">
-              <a:buNone/>
-            </a:pPr>
-            <a:r>
-              <a:rPr lang="en-US" sz="1220" dirty="0">
+              <a:t>NIST Artificial Intelligence Risk Management.</a:t>
+            </a:r>
+            <a:endParaRPr lang="en-US" sz="1140" dirty="0"/>
+          </a:p>
+          <a:p>
+            <a:pPr indent="0" marL="0">
+              <a:buNone/>
+            </a:pPr>
+            <a:r>
+              <a:rPr lang="en-US" sz="1140" dirty="0">
                 <a:solidFill>
                   <a:srgbClr val="17364A"/>
                 </a:solidFill>
@@ -13135,14 +13139,14 @@
               </a:rPr>
               <a:t>OWASP guidance for LLM application security</a:t>
             </a:r>
-            <a:endParaRPr lang="en-US" sz="1220" dirty="0"/>
-          </a:p>
-          <a:p>
-            <a:pPr indent="0" marL="0">
-              <a:buNone/>
-            </a:pPr>
-            <a:r>
-              <a:rPr lang="en-US" sz="1220" dirty="0">
+            <a:endParaRPr lang="en-US" sz="1140" dirty="0"/>
+          </a:p>
+          <a:p>
+            <a:pPr indent="0" marL="0">
+              <a:buNone/>
+            </a:pPr>
+            <a:r>
+              <a:rPr lang="en-US" sz="1140" dirty="0">
                 <a:solidFill>
                   <a:srgbClr val="17364A"/>
                 </a:solidFill>
@@ -13150,9 +13154,9 @@
                 <a:ea typeface="Aptos" pitchFamily="34" charset="-122"/>
                 <a:cs typeface="Aptos" pitchFamily="34" charset="-120"/>
               </a:rPr>
-              <a:t>Agency policies for privacy, cybersecurity, records, procurement,.</a:t>
-            </a:r>
-            <a:endParaRPr lang="en-US" sz="1220" dirty="0"/>
+              <a:t>Agency policies for privacy, cybersecurity,.</a:t>
+            </a:r>
+            <a:endParaRPr lang="en-US" sz="1140" dirty="0"/>
           </a:p>
         </p:txBody>
       </p:sp>
@@ -13164,12 +13168,12 @@
         </p:nvSpPr>
         <p:spPr>
           <a:xfrm>
-            <a:off x="7635240" y="4184294"/>
-            <a:ext cx="3474720" cy="1466698"/>
+            <a:off x="7543800" y="4389120"/>
+            <a:ext cx="3611880" cy="1261872"/>
           </a:xfrm>
           <a:prstGeom prst="roundRect">
             <a:avLst>
-              <a:gd name="adj" fmla="val 7481"/>
+              <a:gd name="adj" fmla="val 8696"/>
             </a:avLst>
           </a:prstGeom>
           <a:solidFill>
@@ -13191,8 +13195,8 @@
         </p:nvSpPr>
         <p:spPr>
           <a:xfrm>
-            <a:off x="7799832" y="4330598"/>
-            <a:ext cx="3145536" cy="256032"/>
+            <a:off x="7708392" y="4517136"/>
+            <a:ext cx="3282696" cy="228600"/>
           </a:xfrm>
           <a:prstGeom prst="rect">
             <a:avLst/>
@@ -13208,7 +13212,7 @@
               <a:buNone/>
             </a:pPr>
             <a:r>
-              <a:rPr lang="en-US" sz="1300" b="1" dirty="0">
+              <a:rPr lang="en-US" sz="1220" b="1" dirty="0">
                 <a:solidFill>
                   <a:srgbClr val="0068B7"/>
                 </a:solidFill>
@@ -13218,7 +13222,7 @@
               </a:rPr>
               <a:t>Apply it</a:t>
             </a:r>
-            <a:endParaRPr lang="en-US" sz="1300" dirty="0"/>
+            <a:endParaRPr lang="en-US" sz="1220" dirty="0"/>
           </a:p>
         </p:txBody>
       </p:sp>
@@ -13230,8 +13234,8 @@
         </p:nvSpPr>
         <p:spPr>
           <a:xfrm>
-            <a:off x="7799832" y="4659782"/>
-            <a:ext cx="3145536" cy="899770"/>
+            <a:off x="7708392" y="4828032"/>
+            <a:ext cx="3282696" cy="749808"/>
           </a:xfrm>
           <a:prstGeom prst="rect">
             <a:avLst/>
@@ -13249,7 +13253,7 @@
               <a:buNone/>
             </a:pPr>
             <a:r>
-              <a:rPr lang="en-US" sz="1320" dirty="0">
+              <a:rPr lang="en-US" sz="1220" dirty="0">
                 <a:solidFill>
                   <a:srgbClr val="17364A"/>
                 </a:solidFill>
@@ -13257,9 +13261,9 @@
                 <a:ea typeface="Aptos" pitchFamily="34" charset="-122"/>
                 <a:cs typeface="Aptos" pitchFamily="34" charset="-120"/>
               </a:rPr>
-              <a:t>Connect the concept to public health purpose, responsible use, required safeguards, documentation, and the next action a department should take.</a:t>
-            </a:r>
-            <a:endParaRPr lang="en-US" sz="1320" dirty="0"/>
+              <a:t>Connect the concept to public health purpose, responsible use, required.</a:t>
+            </a:r>
+            <a:endParaRPr lang="en-US" sz="1220" dirty="0"/>
           </a:p>
         </p:txBody>
       </p:sp>
@@ -13550,8 +13554,8 @@
         </p:nvSpPr>
         <p:spPr>
           <a:xfrm>
-            <a:off x="868680" y="1508760"/>
-            <a:ext cx="6309360" cy="4160520"/>
+            <a:off x="822960" y="1463040"/>
+            <a:ext cx="6565392" cy="4343400"/>
           </a:xfrm>
           <a:prstGeom prst="rect">
             <a:avLst/>
@@ -13569,7 +13573,7 @@
               <a:buNone/>
             </a:pPr>
             <a:r>
-              <a:rPr lang="en-US" sz="2100" dirty="0">
+              <a:rPr lang="en-US" sz="1920" dirty="0">
                 <a:solidFill>
                   <a:srgbClr val="003A63"/>
                 </a:solidFill>
@@ -13577,9 +13581,9 @@
                 <a:ea typeface="Aptos" pitchFamily="34" charset="-122"/>
                 <a:cs typeface="Aptos" pitchFamily="34" charset="-120"/>
               </a:rPr>
-              <a:t>• Relevant public health program SOPs, data governance documentation, and implementation plans</a:t>
-            </a:r>
-            <a:endParaRPr lang="en-US" sz="2100" dirty="0"/>
+              <a:t>• Relevant public health program SOPs, data governance documentation, and.</a:t>
+            </a:r>
+            <a:endParaRPr lang="en-US" sz="1920" dirty="0"/>
           </a:p>
         </p:txBody>
       </p:sp>
@@ -13591,12 +13595,12 @@
         </p:nvSpPr>
         <p:spPr>
           <a:xfrm>
-            <a:off x="7635240" y="1325880"/>
-            <a:ext cx="3474720" cy="1207008"/>
+            <a:off x="7543800" y="1325880"/>
+            <a:ext cx="3611880" cy="1261872"/>
           </a:xfrm>
           <a:prstGeom prst="roundRect">
             <a:avLst>
-              <a:gd name="adj" fmla="val 9091"/>
+              <a:gd name="adj" fmla="val 8696"/>
             </a:avLst>
           </a:prstGeom>
           <a:solidFill>
@@ -13618,8 +13622,8 @@
         </p:nvSpPr>
         <p:spPr>
           <a:xfrm>
-            <a:off x="7799832" y="1472184"/>
-            <a:ext cx="3145536" cy="256032"/>
+            <a:off x="7708392" y="1453896"/>
+            <a:ext cx="3282696" cy="228600"/>
           </a:xfrm>
           <a:prstGeom prst="rect">
             <a:avLst/>
@@ -13635,7 +13639,7 @@
               <a:buNone/>
             </a:pPr>
             <a:r>
-              <a:rPr lang="en-US" sz="1300" b="1" dirty="0">
+              <a:rPr lang="en-US" sz="1220" b="1" dirty="0">
                 <a:solidFill>
                   <a:srgbClr val="0068B7"/>
                 </a:solidFill>
@@ -13645,7 +13649,7 @@
               </a:rPr>
               <a:t>Core concept</a:t>
             </a:r>
-            <a:endParaRPr lang="en-US" sz="1300" dirty="0"/>
+            <a:endParaRPr lang="en-US" sz="1220" dirty="0"/>
           </a:p>
         </p:txBody>
       </p:sp>
@@ -13657,8 +13661,8 @@
         </p:nvSpPr>
         <p:spPr>
           <a:xfrm>
-            <a:off x="7799832" y="1801368"/>
-            <a:ext cx="3145536" cy="640080"/>
+            <a:off x="7708392" y="1764792"/>
+            <a:ext cx="3282696" cy="749808"/>
           </a:xfrm>
           <a:prstGeom prst="rect">
             <a:avLst/>
@@ -13676,7 +13680,7 @@
               <a:buNone/>
             </a:pPr>
             <a:r>
-              <a:rPr lang="en-US" sz="1320" dirty="0">
+              <a:rPr lang="en-US" sz="1220" dirty="0">
                 <a:solidFill>
                   <a:srgbClr val="17364A"/>
                 </a:solidFill>
@@ -13684,9 +13688,9 @@
                 <a:ea typeface="Aptos" pitchFamily="34" charset="-122"/>
                 <a:cs typeface="Aptos" pitchFamily="34" charset="-120"/>
               </a:rPr>
-              <a:t>Relevant public health program SOPs, data governance documentation, and implementation.</a:t>
-            </a:r>
-            <a:endParaRPr lang="en-US" sz="1320" dirty="0"/>
+              <a:t>Relevant public health program SOPs, data governance documentation, and.</a:t>
+            </a:r>
+            <a:endParaRPr lang="en-US" sz="1220" dirty="0"/>
           </a:p>
         </p:txBody>
       </p:sp>
@@ -13698,12 +13702,12 @@
         </p:nvSpPr>
         <p:spPr>
           <a:xfrm>
-            <a:off x="7635240" y="2670048"/>
-            <a:ext cx="3474720" cy="1377086"/>
+            <a:off x="7543800" y="2724912"/>
+            <a:ext cx="3611880" cy="1527048"/>
           </a:xfrm>
           <a:prstGeom prst="roundRect">
             <a:avLst>
-              <a:gd name="adj" fmla="val 7968"/>
+              <a:gd name="adj" fmla="val 7186"/>
             </a:avLst>
           </a:prstGeom>
           <a:solidFill>
@@ -13725,8 +13729,8 @@
         </p:nvSpPr>
         <p:spPr>
           <a:xfrm>
-            <a:off x="7799832" y="2816352"/>
-            <a:ext cx="3145536" cy="256032"/>
+            <a:off x="7708392" y="2852928"/>
+            <a:ext cx="3282696" cy="228600"/>
           </a:xfrm>
           <a:prstGeom prst="rect">
             <a:avLst/>
@@ -13742,7 +13746,7 @@
               <a:buNone/>
             </a:pPr>
             <a:r>
-              <a:rPr lang="en-US" sz="1300" b="1" dirty="0">
+              <a:rPr lang="en-US" sz="1220" b="1" dirty="0">
                 <a:solidFill>
                   <a:srgbClr val="0068B7"/>
                 </a:solidFill>
@@ -13752,7 +13756,7 @@
               </a:rPr>
               <a:t>Concept checkpoints</a:t>
             </a:r>
-            <a:endParaRPr lang="en-US" sz="1300" dirty="0"/>
+            <a:endParaRPr lang="en-US" sz="1220" dirty="0"/>
           </a:p>
         </p:txBody>
       </p:sp>
@@ -13764,8 +13768,8 @@
         </p:nvSpPr>
         <p:spPr>
           <a:xfrm>
-            <a:off x="7818120" y="3182112"/>
-            <a:ext cx="3090672" cy="718718"/>
+            <a:off x="7726680" y="3182112"/>
+            <a:ext cx="3227832" cy="960120"/>
           </a:xfrm>
           <a:prstGeom prst="rect">
             <a:avLst/>
@@ -13783,7 +13787,7 @@
               <a:buNone/>
             </a:pPr>
             <a:r>
-              <a:rPr lang="en-US" sz="1220" dirty="0">
+              <a:rPr lang="en-US" sz="1140" dirty="0">
                 <a:solidFill>
                   <a:srgbClr val="17364A"/>
                 </a:solidFill>
@@ -13791,9 +13795,9 @@
                 <a:ea typeface="Aptos" pitchFamily="34" charset="-122"/>
                 <a:cs typeface="Aptos" pitchFamily="34" charset="-120"/>
               </a:rPr>
-              <a:t>Relevant public health program SOPs, data governance.</a:t>
-            </a:r>
-            <a:endParaRPr lang="en-US" sz="1220" dirty="0"/>
+              <a:t>Relevant public health program SOPs, data.</a:t>
+            </a:r>
+            <a:endParaRPr lang="en-US" sz="1140" dirty="0"/>
           </a:p>
         </p:txBody>
       </p:sp>
@@ -13805,12 +13809,12 @@
         </p:nvSpPr>
         <p:spPr>
           <a:xfrm>
-            <a:off x="7635240" y="4184294"/>
-            <a:ext cx="3474720" cy="1466698"/>
+            <a:off x="7543800" y="4389120"/>
+            <a:ext cx="3611880" cy="1261872"/>
           </a:xfrm>
           <a:prstGeom prst="roundRect">
             <a:avLst>
-              <a:gd name="adj" fmla="val 7481"/>
+              <a:gd name="adj" fmla="val 8696"/>
             </a:avLst>
           </a:prstGeom>
           <a:solidFill>
@@ -13832,8 +13836,8 @@
         </p:nvSpPr>
         <p:spPr>
           <a:xfrm>
-            <a:off x="7799832" y="4330598"/>
-            <a:ext cx="3145536" cy="256032"/>
+            <a:off x="7708392" y="4517136"/>
+            <a:ext cx="3282696" cy="228600"/>
           </a:xfrm>
           <a:prstGeom prst="rect">
             <a:avLst/>
@@ -13849,7 +13853,7 @@
               <a:buNone/>
             </a:pPr>
             <a:r>
-              <a:rPr lang="en-US" sz="1300" b="1" dirty="0">
+              <a:rPr lang="en-US" sz="1220" b="1" dirty="0">
                 <a:solidFill>
                   <a:srgbClr val="0068B7"/>
                 </a:solidFill>
@@ -13859,7 +13863,7 @@
               </a:rPr>
               <a:t>Apply it</a:t>
             </a:r>
-            <a:endParaRPr lang="en-US" sz="1300" dirty="0"/>
+            <a:endParaRPr lang="en-US" sz="1220" dirty="0"/>
           </a:p>
         </p:txBody>
       </p:sp>
@@ -13871,8 +13875,8 @@
         </p:nvSpPr>
         <p:spPr>
           <a:xfrm>
-            <a:off x="7799832" y="4659782"/>
-            <a:ext cx="3145536" cy="899770"/>
+            <a:off x="7708392" y="4828032"/>
+            <a:ext cx="3282696" cy="749808"/>
           </a:xfrm>
           <a:prstGeom prst="rect">
             <a:avLst/>
@@ -13890,7 +13894,7 @@
               <a:buNone/>
             </a:pPr>
             <a:r>
-              <a:rPr lang="en-US" sz="1320" dirty="0">
+              <a:rPr lang="en-US" sz="1220" dirty="0">
                 <a:solidFill>
                   <a:srgbClr val="17364A"/>
                 </a:solidFill>
@@ -13898,9 +13902,9 @@
                 <a:ea typeface="Aptos" pitchFamily="34" charset="-122"/>
                 <a:cs typeface="Aptos" pitchFamily="34" charset="-120"/>
               </a:rPr>
-              <a:t>Connect the concept to public health purpose, responsible use, required safeguards, documentation, and the next action a department should take.</a:t>
-            </a:r>
-            <a:endParaRPr lang="en-US" sz="1320" dirty="0"/>
+              <a:t>Connect the concept to public health purpose, responsible use, required.</a:t>
+            </a:r>
+            <a:endParaRPr lang="en-US" sz="1220" dirty="0"/>
           </a:p>
         </p:txBody>
       </p:sp>
@@ -14218,7 +14222,7 @@
                 <a:ea typeface="Aptos" pitchFamily="34" charset="-122"/>
                 <a:cs typeface="Aptos" pitchFamily="34" charset="-120"/>
               </a:rPr>
-              <a:t>• Play 7: Prioritize Use Cases - This lesson informs Play 7 by helping learners connect the.</a:t>
+              <a:t>• Play 7: Prioritize Use Cases - This lesson informs Play 7 by helping.</a:t>
             </a:r>
             <a:endParaRPr lang="en-US" sz="1900" dirty="0"/>
           </a:p>
@@ -14235,7 +14239,7 @@
                 <a:ea typeface="Aptos" pitchFamily="34" charset="-122"/>
                 <a:cs typeface="Aptos" pitchFamily="34" charset="-120"/>
               </a:rPr>
-              <a:t>• Play 11: Build and Deploy AI Solutions - This lesson informs Play 11 by helping learners.</a:t>
+              <a:t>• Play 11: Build and Deploy AI Solutions - This lesson informs Play 11 by.</a:t>
             </a:r>
             <a:endParaRPr lang="en-US" sz="1900" dirty="0"/>
           </a:p>
@@ -14252,7 +14256,7 @@
                 <a:ea typeface="Aptos" pitchFamily="34" charset="-122"/>
                 <a:cs typeface="Aptos" pitchFamily="34" charset="-120"/>
               </a:rPr>
-              <a:t>• Play 3: Establish AI Governance - This lesson informs Play 3 by helping learners connect the.</a:t>
+              <a:t>• Play 3: Establish AI Governance - This lesson informs Play 3 by helping.</a:t>
             </a:r>
             <a:endParaRPr lang="en-US" sz="1900" dirty="0"/>
           </a:p>
@@ -14269,7 +14273,7 @@
                 <a:ea typeface="Aptos" pitchFamily="34" charset="-122"/>
                 <a:cs typeface="Aptos" pitchFamily="34" charset="-120"/>
               </a:rPr>
-              <a:t>• Play 1: Vision &amp; Guardrails - This lesson informs Play 1 by helping learners connect the.</a:t>
+              <a:t>• Play 1: Vision &amp; Guardrails - This lesson informs Play 1 by helping learners.</a:t>
             </a:r>
             <a:endParaRPr lang="en-US" sz="1900" dirty="0"/>
           </a:p>
@@ -14310,8 +14314,8 @@
         </p:nvSpPr>
         <p:spPr>
           <a:xfrm>
-            <a:off x="8211312" y="1563624"/>
-            <a:ext cx="2734056" cy="256032"/>
+            <a:off x="8211312" y="1545336"/>
+            <a:ext cx="2734056" cy="228600"/>
           </a:xfrm>
           <a:prstGeom prst="rect">
             <a:avLst/>
@@ -14327,7 +14331,7 @@
               <a:buNone/>
             </a:pPr>
             <a:r>
-              <a:rPr lang="en-US" sz="1300" b="1" dirty="0">
+              <a:rPr lang="en-US" sz="1220" b="1" dirty="0">
                 <a:solidFill>
                   <a:srgbClr val="0068B7"/>
                 </a:solidFill>
@@ -14337,7 +14341,7 @@
               </a:rPr>
               <a:t>Apply the lesson</a:t>
             </a:r>
-            <a:endParaRPr lang="en-US" sz="1300" dirty="0"/>
+            <a:endParaRPr lang="en-US" sz="1220" dirty="0"/>
           </a:p>
         </p:txBody>
       </p:sp>
@@ -14349,8 +14353,8 @@
         </p:nvSpPr>
         <p:spPr>
           <a:xfrm>
-            <a:off x="8211312" y="1892808"/>
-            <a:ext cx="2734056" cy="1536192"/>
+            <a:off x="8211312" y="1856232"/>
+            <a:ext cx="2734056" cy="1591056"/>
           </a:xfrm>
           <a:prstGeom prst="rect">
             <a:avLst/>
@@ -14368,7 +14372,7 @@
               <a:buNone/>
             </a:pPr>
             <a:r>
-              <a:rPr lang="en-US" sz="1320" dirty="0">
+              <a:rPr lang="en-US" sz="1220" dirty="0">
                 <a:solidFill>
                   <a:srgbClr val="17364A"/>
                 </a:solidFill>
@@ -14376,9 +14380,9 @@
                 <a:ea typeface="Aptos" pitchFamily="34" charset="-122"/>
                 <a:cs typeface="Aptos" pitchFamily="34" charset="-120"/>
               </a:rPr>
-              <a:t>Use the related plays to identify decisions, participants, timing, approvals, and documentation needed for responsible implementation.</a:t>
-            </a:r>
-            <a:endParaRPr lang="en-US" sz="1320" dirty="0"/>
+              <a:t>Use the related plays to identify decisions, participants, timing, approvals,.</a:t>
+            </a:r>
+            <a:endParaRPr lang="en-US" sz="1220" dirty="0"/>
           </a:p>
         </p:txBody>
       </p:sp>
@@ -14417,8 +14421,8 @@
         </p:nvSpPr>
         <p:spPr>
           <a:xfrm>
-            <a:off x="8211312" y="3941064"/>
-            <a:ext cx="2734056" cy="256032"/>
+            <a:off x="8211312" y="3922776"/>
+            <a:ext cx="2734056" cy="228600"/>
           </a:xfrm>
           <a:prstGeom prst="rect">
             <a:avLst/>
@@ -14434,7 +14438,7 @@
               <a:buNone/>
             </a:pPr>
             <a:r>
-              <a:rPr lang="en-US" sz="1300" b="1" dirty="0">
+              <a:rPr lang="en-US" sz="1220" b="1" dirty="0">
                 <a:solidFill>
                   <a:srgbClr val="0068B7"/>
                 </a:solidFill>
@@ -14444,7 +14448,7 @@
               </a:rPr>
               <a:t>Use the play links to</a:t>
             </a:r>
-            <a:endParaRPr lang="en-US" sz="1300" dirty="0"/>
+            <a:endParaRPr lang="en-US" sz="1220" dirty="0"/>
           </a:p>
         </p:txBody>
       </p:sp>
@@ -14456,8 +14460,8 @@
         </p:nvSpPr>
         <p:spPr>
           <a:xfrm>
-            <a:off x="8229600" y="4306824"/>
-            <a:ext cx="2679192" cy="941832"/>
+            <a:off x="8229600" y="4251960"/>
+            <a:ext cx="2679192" cy="1033272"/>
           </a:xfrm>
           <a:prstGeom prst="rect">
             <a:avLst/>
@@ -14475,7 +14479,7 @@
               <a:buNone/>
             </a:pPr>
             <a:r>
-              <a:rPr lang="en-US" sz="1220" dirty="0">
+              <a:rPr lang="en-US" sz="1140" dirty="0">
                 <a:solidFill>
                   <a:srgbClr val="17364A"/>
                 </a:solidFill>
@@ -14485,14 +14489,14 @@
               </a:rPr>
               <a:t>Locate the decision point in the playbook sequence.</a:t>
             </a:r>
-            <a:endParaRPr lang="en-US" sz="1220" dirty="0"/>
-          </a:p>
-          <a:p>
-            <a:pPr indent="0" marL="0">
-              <a:buNone/>
-            </a:pPr>
-            <a:r>
-              <a:rPr lang="en-US" sz="1220" dirty="0">
+            <a:endParaRPr lang="en-US" sz="1140" dirty="0"/>
+          </a:p>
+          <a:p>
+            <a:pPr indent="0" marL="0">
+              <a:buNone/>
+            </a:pPr>
+            <a:r>
+              <a:rPr lang="en-US" sz="1140" dirty="0">
                 <a:solidFill>
                   <a:srgbClr val="17364A"/>
                 </a:solidFill>
@@ -14502,14 +14506,14 @@
               </a:rPr>
               <a:t>Identify who should participate in the work.</a:t>
             </a:r>
-            <a:endParaRPr lang="en-US" sz="1220" dirty="0"/>
-          </a:p>
-          <a:p>
-            <a:pPr indent="0" marL="0">
-              <a:buNone/>
-            </a:pPr>
-            <a:r>
-              <a:rPr lang="en-US" sz="1220" dirty="0">
+            <a:endParaRPr lang="en-US" sz="1140" dirty="0"/>
+          </a:p>
+          <a:p>
+            <a:pPr indent="0" marL="0">
+              <a:buNone/>
+            </a:pPr>
+            <a:r>
+              <a:rPr lang="en-US" sz="1140" dirty="0">
                 <a:solidFill>
                   <a:srgbClr val="17364A"/>
                 </a:solidFill>
@@ -14517,9 +14521,9 @@
                 <a:ea typeface="Aptos" pitchFamily="34" charset="-122"/>
                 <a:cs typeface="Aptos" pitchFamily="34" charset="-120"/>
               </a:rPr>
-              <a:t>Document the review, approval, or implementation step.</a:t>
-            </a:r>
-            <a:endParaRPr lang="en-US" sz="1220" dirty="0"/>
+              <a:t>Document the review, approval, or implementation.</a:t>
+            </a:r>
+            <a:endParaRPr lang="en-US" sz="1140" dirty="0"/>
           </a:p>
         </p:txBody>
       </p:sp>
@@ -14837,7 +14841,7 @@
                 <a:ea typeface="Aptos" pitchFamily="34" charset="-122"/>
                 <a:cs typeface="Aptos" pitchFamily="34" charset="-120"/>
               </a:rPr>
-              <a:t>• Tool 3: Equity Impact Assessment Checklist (Checklist) - Use this tool to complete or.</a:t>
+              <a:t>• Tool 3: Equity Impact Assessment Checklist (Checklist) - Use this tool to.</a:t>
             </a:r>
             <a:endParaRPr lang="en-US" sz="1850" dirty="0"/>
           </a:p>
@@ -14854,7 +14858,7 @@
                 <a:ea typeface="Aptos" pitchFamily="34" charset="-122"/>
                 <a:cs typeface="Aptos" pitchFamily="34" charset="-120"/>
               </a:rPr>
-              <a:t>• Tool 31: Use Case Scoring &amp; Prioritization Matrix (Matrix) - Use this tool to complete or.</a:t>
+              <a:t>• Tool 31: Use Case Scoring &amp; Prioritization Matrix (Matrix) - Use this tool.</a:t>
             </a:r>
             <a:endParaRPr lang="en-US" sz="1850" dirty="0"/>
           </a:p>
@@ -14871,7 +14875,7 @@
                 <a:ea typeface="Aptos" pitchFamily="34" charset="-122"/>
                 <a:cs typeface="Aptos" pitchFamily="34" charset="-120"/>
               </a:rPr>
-              <a:t>• Tool 49: AI Use Case Intake and Triage Worksheet (Worksheet) - Use this tool to complete or.</a:t>
+              <a:t>• Tool 49: AI Use Case Intake and Triage Worksheet (Worksheet) - Use this tool.</a:t>
             </a:r>
             <a:endParaRPr lang="en-US" sz="1850" dirty="0"/>
           </a:p>
@@ -14888,7 +14892,7 @@
                 <a:ea typeface="Aptos" pitchFamily="34" charset="-122"/>
                 <a:cs typeface="Aptos" pitchFamily="34" charset="-120"/>
               </a:rPr>
-              <a:t>• Tool 4: AI Policy Landscape Scan (Worksheet) - Use AI Policy Landscape Scan to translate this.</a:t>
+              <a:t>• Tool 4: AI Policy Landscape Scan (Worksheet) - Use AI Policy Landscape Scan.</a:t>
             </a:r>
             <a:endParaRPr lang="en-US" sz="1850" dirty="0"/>
           </a:p>
@@ -14929,8 +14933,8 @@
         </p:nvSpPr>
         <p:spPr>
           <a:xfrm>
-            <a:off x="8211312" y="1563624"/>
-            <a:ext cx="2734056" cy="256032"/>
+            <a:off x="8211312" y="1545336"/>
+            <a:ext cx="2734056" cy="228600"/>
           </a:xfrm>
           <a:prstGeom prst="rect">
             <a:avLst/>
@@ -14946,7 +14950,7 @@
               <a:buNone/>
             </a:pPr>
             <a:r>
-              <a:rPr lang="en-US" sz="1300" b="1" dirty="0">
+              <a:rPr lang="en-US" sz="1220" b="1" dirty="0">
                 <a:solidFill>
                   <a:srgbClr val="0068B7"/>
                 </a:solidFill>
@@ -14956,7 +14960,7 @@
               </a:rPr>
               <a:t>Use the tools</a:t>
             </a:r>
-            <a:endParaRPr lang="en-US" sz="1300" dirty="0"/>
+            <a:endParaRPr lang="en-US" sz="1220" dirty="0"/>
           </a:p>
         </p:txBody>
       </p:sp>
@@ -14968,8 +14972,8 @@
         </p:nvSpPr>
         <p:spPr>
           <a:xfrm>
-            <a:off x="8211312" y="1892808"/>
-            <a:ext cx="2734056" cy="1536192"/>
+            <a:off x="8211312" y="1856232"/>
+            <a:ext cx="2734056" cy="1591056"/>
           </a:xfrm>
           <a:prstGeom prst="rect">
             <a:avLst/>
@@ -14987,7 +14991,7 @@
               <a:buNone/>
             </a:pPr>
             <a:r>
-              <a:rPr lang="en-US" sz="1320" dirty="0">
+              <a:rPr lang="en-US" sz="1220" dirty="0">
                 <a:solidFill>
                   <a:srgbClr val="17364A"/>
                 </a:solidFill>
@@ -14995,9 +14999,9 @@
                 <a:ea typeface="Aptos" pitchFamily="34" charset="-122"/>
                 <a:cs typeface="Aptos" pitchFamily="34" charset="-120"/>
               </a:rPr>
-              <a:t>Use linked tools when your department needs a structured worksheet, template, checklist, review process, or documentation artifact.</a:t>
-            </a:r>
-            <a:endParaRPr lang="en-US" sz="1320" dirty="0"/>
+              <a:t>Use linked tools when your department needs a structured worksheet, template,.</a:t>
+            </a:r>
+            <a:endParaRPr lang="en-US" sz="1220" dirty="0"/>
           </a:p>
         </p:txBody>
       </p:sp>
@@ -15036,8 +15040,8 @@
         </p:nvSpPr>
         <p:spPr>
           <a:xfrm>
-            <a:off x="8211312" y="3941064"/>
-            <a:ext cx="2734056" cy="256032"/>
+            <a:off x="8211312" y="3922776"/>
+            <a:ext cx="2734056" cy="228600"/>
           </a:xfrm>
           <a:prstGeom prst="rect">
             <a:avLst/>
@@ -15053,7 +15057,7 @@
               <a:buNone/>
             </a:pPr>
             <a:r>
-              <a:rPr lang="en-US" sz="1300" b="1" dirty="0">
+              <a:rPr lang="en-US" sz="1220" b="1" dirty="0">
                 <a:solidFill>
                   <a:srgbClr val="0068B7"/>
                 </a:solidFill>
@@ -15063,7 +15067,7 @@
               </a:rPr>
               <a:t>Tool selection cues</a:t>
             </a:r>
-            <a:endParaRPr lang="en-US" sz="1300" dirty="0"/>
+            <a:endParaRPr lang="en-US" sz="1220" dirty="0"/>
           </a:p>
         </p:txBody>
       </p:sp>
@@ -15075,8 +15079,8 @@
         </p:nvSpPr>
         <p:spPr>
           <a:xfrm>
-            <a:off x="8229600" y="4306824"/>
-            <a:ext cx="2679192" cy="941832"/>
+            <a:off x="8229600" y="4251960"/>
+            <a:ext cx="2679192" cy="1033272"/>
           </a:xfrm>
           <a:prstGeom prst="rect">
             <a:avLst/>
@@ -15094,7 +15098,7 @@
               <a:buNone/>
             </a:pPr>
             <a:r>
-              <a:rPr lang="en-US" sz="1220" dirty="0">
+              <a:rPr lang="en-US" sz="1140" dirty="0">
                 <a:solidFill>
                   <a:srgbClr val="17364A"/>
                 </a:solidFill>
@@ -15104,14 +15108,14 @@
               </a:rPr>
               <a:t>Use a tool when no comparable local process exists.</a:t>
             </a:r>
-            <a:endParaRPr lang="en-US" sz="1220" dirty="0"/>
-          </a:p>
-          <a:p>
-            <a:pPr indent="0" marL="0">
-              <a:buNone/>
-            </a:pPr>
-            <a:r>
-              <a:rPr lang="en-US" sz="1220" dirty="0">
+            <a:endParaRPr lang="en-US" sz="1140" dirty="0"/>
+          </a:p>
+          <a:p>
+            <a:pPr indent="0" marL="0">
+              <a:buNone/>
+            </a:pPr>
+            <a:r>
+              <a:rPr lang="en-US" sz="1140" dirty="0">
                 <a:solidFill>
                   <a:srgbClr val="17364A"/>
                 </a:solidFill>
@@ -15119,16 +15123,16 @@
                 <a:ea typeface="Aptos" pitchFamily="34" charset="-122"/>
                 <a:cs typeface="Aptos" pitchFamily="34" charset="-120"/>
               </a:rPr>
-              <a:t>Adapt existing department templates when they already fit the.</a:t>
-            </a:r>
-            <a:endParaRPr lang="en-US" sz="1220" dirty="0"/>
-          </a:p>
-          <a:p>
-            <a:pPr indent="0" marL="0">
-              <a:buNone/>
-            </a:pPr>
-            <a:r>
-              <a:rPr lang="en-US" sz="1220" dirty="0">
+              <a:t>Adapt existing department templates when they.</a:t>
+            </a:r>
+            <a:endParaRPr lang="en-US" sz="1140" dirty="0"/>
+          </a:p>
+          <a:p>
+            <a:pPr indent="0" marL="0">
+              <a:buNone/>
+            </a:pPr>
+            <a:r>
+              <a:rPr lang="en-US" sz="1140" dirty="0">
                 <a:solidFill>
                   <a:srgbClr val="17364A"/>
                 </a:solidFill>
@@ -15136,9 +15140,9 @@
                 <a:ea typeface="Aptos" pitchFamily="34" charset="-122"/>
                 <a:cs typeface="Aptos" pitchFamily="34" charset="-120"/>
               </a:rPr>
-              <a:t>Save the completed artifact as evidence of the decision.</a:t>
-            </a:r>
-            <a:endParaRPr lang="en-US" sz="1220" dirty="0"/>
+              <a:t>Save the completed artifact as evidence of the.</a:t>
+            </a:r>
+            <a:endParaRPr lang="en-US" sz="1140" dirty="0"/>
           </a:p>
         </p:txBody>
       </p:sp>
@@ -15429,8 +15433,8 @@
         </p:nvSpPr>
         <p:spPr>
           <a:xfrm>
-            <a:off x="868680" y="1508760"/>
-            <a:ext cx="6309360" cy="4160520"/>
+            <a:off x="822960" y="1463040"/>
+            <a:ext cx="6565392" cy="4343400"/>
           </a:xfrm>
           <a:prstGeom prst="rect">
             <a:avLst/>
@@ -15448,7 +15452,7 @@
               <a:buNone/>
             </a:pPr>
             <a:r>
-              <a:rPr lang="en-US" sz="2100" dirty="0">
+              <a:rPr lang="en-US" sz="1920" dirty="0">
                 <a:solidFill>
                   <a:srgbClr val="003A63"/>
                 </a:solidFill>
@@ -15456,16 +15460,16 @@
                 <a:ea typeface="Aptos" pitchFamily="34" charset="-122"/>
                 <a:cs typeface="Aptos" pitchFamily="34" charset="-120"/>
               </a:rPr>
-              <a:t>• Describe an AI use case in plain language using the public health workflow, users, data,.</a:t>
-            </a:r>
-            <a:endParaRPr lang="en-US" sz="2100" dirty="0"/>
-          </a:p>
-          <a:p>
-            <a:pPr indent="0" marL="0">
-              <a:buNone/>
-            </a:pPr>
-            <a:r>
-              <a:rPr lang="en-US" sz="2100" dirty="0">
+              <a:t>• Describe an AI use case in plain language using the public health workflow,.</a:t>
+            </a:r>
+            <a:endParaRPr lang="en-US" sz="1920" dirty="0"/>
+          </a:p>
+          <a:p>
+            <a:pPr indent="0" marL="0">
+              <a:buNone/>
+            </a:pPr>
+            <a:r>
+              <a:rPr lang="en-US" sz="1920" dirty="0">
                 <a:solidFill>
                   <a:srgbClr val="003A63"/>
                 </a:solidFill>
@@ -15473,16 +15477,16 @@
                 <a:ea typeface="Aptos" pitchFamily="34" charset="-122"/>
                 <a:cs typeface="Aptos" pitchFamily="34" charset="-120"/>
               </a:rPr>
-              <a:t>• Distinguish between low-risk, moderate-risk, and high-risk AI use cases based on data.</a:t>
-            </a:r>
-            <a:endParaRPr lang="en-US" sz="2100" dirty="0"/>
-          </a:p>
-          <a:p>
-            <a:pPr indent="0" marL="0">
-              <a:buNone/>
-            </a:pPr>
-            <a:r>
-              <a:rPr lang="en-US" sz="2100" dirty="0">
+              <a:t>• Distinguish between low-risk, moderate-risk, and high-risk AI use cases.</a:t>
+            </a:r>
+            <a:endParaRPr lang="en-US" sz="1920" dirty="0"/>
+          </a:p>
+          <a:p>
+            <a:pPr indent="0" marL="0">
+              <a:buNone/>
+            </a:pPr>
+            <a:r>
+              <a:rPr lang="en-US" sz="1920" dirty="0">
                 <a:solidFill>
                   <a:srgbClr val="003A63"/>
                 </a:solidFill>
@@ -15490,9 +15494,9 @@
                 <a:ea typeface="Aptos" pitchFamily="34" charset="-122"/>
                 <a:cs typeface="Aptos" pitchFamily="34" charset="-120"/>
               </a:rPr>
-              <a:t>• Identify when a use case should be routed to privacy, legal, IT, cybersecurity, equity,.</a:t>
-            </a:r>
-            <a:endParaRPr lang="en-US" sz="2100" dirty="0"/>
+              <a:t>• Identify when a use case should be routed to privacy, legal, IT,.</a:t>
+            </a:r>
+            <a:endParaRPr lang="en-US" sz="1920" dirty="0"/>
           </a:p>
         </p:txBody>
       </p:sp>
@@ -15504,12 +15508,12 @@
         </p:nvSpPr>
         <p:spPr>
           <a:xfrm>
-            <a:off x="7635240" y="1325880"/>
-            <a:ext cx="3474720" cy="1255471"/>
+            <a:off x="7543800" y="1325880"/>
+            <a:ext cx="3611880" cy="1261872"/>
           </a:xfrm>
           <a:prstGeom prst="roundRect">
             <a:avLst>
-              <a:gd name="adj" fmla="val 8740"/>
+              <a:gd name="adj" fmla="val 8696"/>
             </a:avLst>
           </a:prstGeom>
           <a:solidFill>
@@ -15531,8 +15535,8 @@
         </p:nvSpPr>
         <p:spPr>
           <a:xfrm>
-            <a:off x="7799832" y="1472184"/>
-            <a:ext cx="3145536" cy="256032"/>
+            <a:off x="7708392" y="1453896"/>
+            <a:ext cx="3282696" cy="228600"/>
           </a:xfrm>
           <a:prstGeom prst="rect">
             <a:avLst/>
@@ -15548,7 +15552,7 @@
               <a:buNone/>
             </a:pPr>
             <a:r>
-              <a:rPr lang="en-US" sz="1300" b="1" dirty="0">
+              <a:rPr lang="en-US" sz="1220" b="1" dirty="0">
                 <a:solidFill>
                   <a:srgbClr val="0068B7"/>
                 </a:solidFill>
@@ -15558,7 +15562,7 @@
               </a:rPr>
               <a:t>Practice focus</a:t>
             </a:r>
-            <a:endParaRPr lang="en-US" sz="1300" dirty="0"/>
+            <a:endParaRPr lang="en-US" sz="1220" dirty="0"/>
           </a:p>
         </p:txBody>
       </p:sp>
@@ -15570,8 +15574,8 @@
         </p:nvSpPr>
         <p:spPr>
           <a:xfrm>
-            <a:off x="7799832" y="1801368"/>
-            <a:ext cx="3145536" cy="688543"/>
+            <a:off x="7708392" y="1764792"/>
+            <a:ext cx="3282696" cy="749808"/>
           </a:xfrm>
           <a:prstGeom prst="rect">
             <a:avLst/>
@@ -15589,7 +15593,7 @@
               <a:buNone/>
             </a:pPr>
             <a:r>
-              <a:rPr lang="en-US" sz="1320" dirty="0">
+              <a:rPr lang="en-US" sz="1220" dirty="0">
                 <a:solidFill>
                   <a:srgbClr val="17364A"/>
                 </a:solidFill>
@@ -15597,9 +15601,9 @@
                 <a:ea typeface="Aptos" pitchFamily="34" charset="-122"/>
                 <a:cs typeface="Aptos" pitchFamily="34" charset="-120"/>
               </a:rPr>
-              <a:t>Describe an AI use case in plain language using the public health workflow, users, data, intended.</a:t>
-            </a:r>
-            <a:endParaRPr lang="en-US" sz="1320" dirty="0"/>
+              <a:t>Describe an AI use case in plain language using the public health workflow,.</a:t>
+            </a:r>
+            <a:endParaRPr lang="en-US" sz="1220" dirty="0"/>
           </a:p>
         </p:txBody>
       </p:sp>
@@ -15611,12 +15615,12 @@
         </p:nvSpPr>
         <p:spPr>
           <a:xfrm>
-            <a:off x="7635240" y="2718511"/>
-            <a:ext cx="3474720" cy="1328623"/>
+            <a:off x="7543800" y="2724912"/>
+            <a:ext cx="3611880" cy="1527048"/>
           </a:xfrm>
           <a:prstGeom prst="roundRect">
             <a:avLst>
-              <a:gd name="adj" fmla="val 8259"/>
+              <a:gd name="adj" fmla="val 7186"/>
             </a:avLst>
           </a:prstGeom>
           <a:solidFill>
@@ -15638,8 +15642,8 @@
         </p:nvSpPr>
         <p:spPr>
           <a:xfrm>
-            <a:off x="7799832" y="2864815"/>
-            <a:ext cx="3145536" cy="256032"/>
+            <a:off x="7708392" y="2852928"/>
+            <a:ext cx="3282696" cy="228600"/>
           </a:xfrm>
           <a:prstGeom prst="rect">
             <a:avLst/>
@@ -15655,7 +15659,7 @@
               <a:buNone/>
             </a:pPr>
             <a:r>
-              <a:rPr lang="en-US" sz="1300" b="1" dirty="0">
+              <a:rPr lang="en-US" sz="1220" b="1" dirty="0">
                 <a:solidFill>
                   <a:srgbClr val="0068B7"/>
                 </a:solidFill>
@@ -15665,7 +15669,7 @@
               </a:rPr>
               <a:t>Concept checkpoints</a:t>
             </a:r>
-            <a:endParaRPr lang="en-US" sz="1300" dirty="0"/>
+            <a:endParaRPr lang="en-US" sz="1220" dirty="0"/>
           </a:p>
         </p:txBody>
       </p:sp>
@@ -15677,8 +15681,8 @@
         </p:nvSpPr>
         <p:spPr>
           <a:xfrm>
-            <a:off x="7818120" y="3230575"/>
-            <a:ext cx="3090672" cy="670255"/>
+            <a:off x="7726680" y="3182112"/>
+            <a:ext cx="3227832" cy="960120"/>
           </a:xfrm>
           <a:prstGeom prst="rect">
             <a:avLst/>
@@ -15696,7 +15700,7 @@
               <a:buNone/>
             </a:pPr>
             <a:r>
-              <a:rPr lang="en-US" sz="1220" dirty="0">
+              <a:rPr lang="en-US" sz="1140" dirty="0">
                 <a:solidFill>
                   <a:srgbClr val="17364A"/>
                 </a:solidFill>
@@ -15704,16 +15708,16 @@
                 <a:ea typeface="Aptos" pitchFamily="34" charset="-122"/>
                 <a:cs typeface="Aptos" pitchFamily="34" charset="-120"/>
               </a:rPr>
-              <a:t>Describe an AI use case in plain language using the public health.</a:t>
-            </a:r>
-            <a:endParaRPr lang="en-US" sz="1220" dirty="0"/>
-          </a:p>
-          <a:p>
-            <a:pPr indent="0" marL="0">
-              <a:buNone/>
-            </a:pPr>
-            <a:r>
-              <a:rPr lang="en-US" sz="1220" dirty="0">
+              <a:t>Describe an AI use case in plain language using.</a:t>
+            </a:r>
+            <a:endParaRPr lang="en-US" sz="1140" dirty="0"/>
+          </a:p>
+          <a:p>
+            <a:pPr indent="0" marL="0">
+              <a:buNone/>
+            </a:pPr>
+            <a:r>
+              <a:rPr lang="en-US" sz="1140" dirty="0">
                 <a:solidFill>
                   <a:srgbClr val="17364A"/>
                 </a:solidFill>
@@ -15721,16 +15725,16 @@
                 <a:ea typeface="Aptos" pitchFamily="34" charset="-122"/>
                 <a:cs typeface="Aptos" pitchFamily="34" charset="-120"/>
               </a:rPr>
-              <a:t>Distinguish between low-risk, moderate-risk, and high-risk AI use.</a:t>
-            </a:r>
-            <a:endParaRPr lang="en-US" sz="1220" dirty="0"/>
-          </a:p>
-          <a:p>
-            <a:pPr indent="0" marL="0">
-              <a:buNone/>
-            </a:pPr>
-            <a:r>
-              <a:rPr lang="en-US" sz="1220" dirty="0">
+              <a:t>Distinguish between low-risk, moderate-risk, and.</a:t>
+            </a:r>
+            <a:endParaRPr lang="en-US" sz="1140" dirty="0"/>
+          </a:p>
+          <a:p>
+            <a:pPr indent="0" marL="0">
+              <a:buNone/>
+            </a:pPr>
+            <a:r>
+              <a:rPr lang="en-US" sz="1140" dirty="0">
                 <a:solidFill>
                   <a:srgbClr val="17364A"/>
                 </a:solidFill>
@@ -15738,9 +15742,9 @@
                 <a:ea typeface="Aptos" pitchFamily="34" charset="-122"/>
                 <a:cs typeface="Aptos" pitchFamily="34" charset="-120"/>
               </a:rPr>
-              <a:t>Identify when a use case should be routed to privacy, legal, IT,.</a:t>
-            </a:r>
-            <a:endParaRPr lang="en-US" sz="1220" dirty="0"/>
+              <a:t>Identify when a use case should be routed to.</a:t>
+            </a:r>
+            <a:endParaRPr lang="en-US" sz="1140" dirty="0"/>
           </a:p>
         </p:txBody>
       </p:sp>
@@ -15752,12 +15756,12 @@
         </p:nvSpPr>
         <p:spPr>
           <a:xfrm>
-            <a:off x="7635240" y="4184294"/>
-            <a:ext cx="3474720" cy="1466698"/>
+            <a:off x="7543800" y="4389120"/>
+            <a:ext cx="3611880" cy="1261872"/>
           </a:xfrm>
           <a:prstGeom prst="roundRect">
             <a:avLst>
-              <a:gd name="adj" fmla="val 7481"/>
+              <a:gd name="adj" fmla="val 8696"/>
             </a:avLst>
           </a:prstGeom>
           <a:solidFill>
@@ -15779,8 +15783,8 @@
         </p:nvSpPr>
         <p:spPr>
           <a:xfrm>
-            <a:off x="7799832" y="4330598"/>
-            <a:ext cx="3145536" cy="256032"/>
+            <a:off x="7708392" y="4517136"/>
+            <a:ext cx="3282696" cy="228600"/>
           </a:xfrm>
           <a:prstGeom prst="rect">
             <a:avLst/>
@@ -15796,7 +15800,7 @@
               <a:buNone/>
             </a:pPr>
             <a:r>
-              <a:rPr lang="en-US" sz="1300" b="1" dirty="0">
+              <a:rPr lang="en-US" sz="1220" b="1" dirty="0">
                 <a:solidFill>
                   <a:srgbClr val="0068B7"/>
                 </a:solidFill>
@@ -15806,7 +15810,7 @@
               </a:rPr>
               <a:t>What to produce</a:t>
             </a:r>
-            <a:endParaRPr lang="en-US" sz="1300" dirty="0"/>
+            <a:endParaRPr lang="en-US" sz="1220" dirty="0"/>
           </a:p>
         </p:txBody>
       </p:sp>
@@ -15818,8 +15822,8 @@
         </p:nvSpPr>
         <p:spPr>
           <a:xfrm>
-            <a:off x="7799832" y="4659782"/>
-            <a:ext cx="3145536" cy="899770"/>
+            <a:off x="7708392" y="4828032"/>
+            <a:ext cx="3282696" cy="749808"/>
           </a:xfrm>
           <a:prstGeom prst="rect">
             <a:avLst/>
@@ -15837,7 +15841,7 @@
               <a:buNone/>
             </a:pPr>
             <a:r>
-              <a:rPr lang="en-US" sz="1320" dirty="0">
+              <a:rPr lang="en-US" sz="1220" dirty="0">
                 <a:solidFill>
                   <a:srgbClr val="17364A"/>
                 </a:solidFill>
@@ -15845,9 +15849,9 @@
                 <a:ea typeface="Aptos" pitchFamily="34" charset="-122"/>
                 <a:cs typeface="Aptos" pitchFamily="34" charset="-120"/>
               </a:rPr>
-              <a:t>Use the assignment to test whether you can explain the concept, apply it to a realistic public health situation, and identify what would need review before the work moves forward.</a:t>
-            </a:r>
-            <a:endParaRPr lang="en-US" sz="1320" dirty="0"/>
+              <a:t>Use the assignment to test whether you can explain the concept, apply it to a.</a:t>
+            </a:r>
+            <a:endParaRPr lang="en-US" sz="1220" dirty="0"/>
           </a:p>
         </p:txBody>
       </p:sp>
@@ -16138,8 +16142,8 @@
         </p:nvSpPr>
         <p:spPr>
           <a:xfrm>
-            <a:off x="868680" y="1508760"/>
-            <a:ext cx="6309360" cy="4160520"/>
+            <a:off x="822960" y="1463040"/>
+            <a:ext cx="6565392" cy="4343400"/>
           </a:xfrm>
           <a:prstGeom prst="rect">
             <a:avLst/>
@@ -16157,7 +16161,7 @@
               <a:buNone/>
             </a:pPr>
             <a:r>
-              <a:rPr lang="en-US" sz="2100" dirty="0">
+              <a:rPr lang="en-US" sz="1920" dirty="0">
                 <a:solidFill>
                   <a:srgbClr val="003A63"/>
                 </a:solidFill>
@@ -16165,16 +16169,16 @@
                 <a:ea typeface="Aptos" pitchFamily="34" charset="-122"/>
                 <a:cs typeface="Aptos" pitchFamily="34" charset="-120"/>
               </a:rPr>
-              <a:t>• AI use case intake is the structured process of receiving, describing, screening, and routing.</a:t>
-            </a:r>
-            <a:endParaRPr lang="en-US" sz="2100" dirty="0"/>
-          </a:p>
-          <a:p>
-            <a:pPr indent="0" marL="0">
-              <a:buNone/>
-            </a:pPr>
-            <a:r>
-              <a:rPr lang="en-US" sz="2100" dirty="0">
+              <a:t>• AI use case intake is the structured process of receiving, describing,.</a:t>
+            </a:r>
+            <a:endParaRPr lang="en-US" sz="1920" dirty="0"/>
+          </a:p>
+          <a:p>
+            <a:pPr indent="0" marL="0">
+              <a:buNone/>
+            </a:pPr>
+            <a:r>
+              <a:rPr lang="en-US" sz="1920" dirty="0">
                 <a:solidFill>
                   <a:srgbClr val="003A63"/>
                 </a:solidFill>
@@ -16182,16 +16186,16 @@
                 <a:ea typeface="Aptos" pitchFamily="34" charset="-122"/>
                 <a:cs typeface="Aptos" pitchFamily="34" charset="-120"/>
               </a:rPr>
-              <a:t>• In public health, this step is essential because AI ideas often begin as informal suggestions.</a:t>
-            </a:r>
-            <a:endParaRPr lang="en-US" sz="2100" dirty="0"/>
-          </a:p>
-          <a:p>
-            <a:pPr indent="0" marL="0">
-              <a:buNone/>
-            </a:pPr>
-            <a:r>
-              <a:rPr lang="en-US" sz="2100" dirty="0">
+              <a:t>• In public health, this step is essential because AI ideas often begin as.</a:t>
+            </a:r>
+            <a:endParaRPr lang="en-US" sz="1920" dirty="0"/>
+          </a:p>
+          <a:p>
+            <a:pPr indent="0" marL="0">
+              <a:buNone/>
+            </a:pPr>
+            <a:r>
+              <a:rPr lang="en-US" sz="1920" dirty="0">
                 <a:solidFill>
                   <a:srgbClr val="003A63"/>
                 </a:solidFill>
@@ -16199,9 +16203,9 @@
                 <a:ea typeface="Aptos" pitchFamily="34" charset="-122"/>
                 <a:cs typeface="Aptos" pitchFamily="34" charset="-120"/>
               </a:rPr>
-              <a:t>• Without a common intake process, agencies may approve low-value or high-risk ideas too quickly.</a:t>
-            </a:r>
-            <a:endParaRPr lang="en-US" sz="2100" dirty="0"/>
+              <a:t>• Without a common intake process, agencies may approve low-value or high-risk.</a:t>
+            </a:r>
+            <a:endParaRPr lang="en-US" sz="1920" dirty="0"/>
           </a:p>
         </p:txBody>
       </p:sp>
@@ -16213,12 +16217,12 @@
         </p:nvSpPr>
         <p:spPr>
           <a:xfrm>
-            <a:off x="7635240" y="1325880"/>
-            <a:ext cx="3474720" cy="1255471"/>
+            <a:off x="7543800" y="1325880"/>
+            <a:ext cx="3611880" cy="1261872"/>
           </a:xfrm>
           <a:prstGeom prst="roundRect">
             <a:avLst>
-              <a:gd name="adj" fmla="val 8740"/>
+              <a:gd name="adj" fmla="val 8696"/>
             </a:avLst>
           </a:prstGeom>
           <a:solidFill>
@@ -16240,8 +16244,8 @@
         </p:nvSpPr>
         <p:spPr>
           <a:xfrm>
-            <a:off x="7799832" y="1472184"/>
-            <a:ext cx="3145536" cy="256032"/>
+            <a:off x="7708392" y="1453896"/>
+            <a:ext cx="3282696" cy="228600"/>
           </a:xfrm>
           <a:prstGeom prst="rect">
             <a:avLst/>
@@ -16257,7 +16261,7 @@
               <a:buNone/>
             </a:pPr>
             <a:r>
-              <a:rPr lang="en-US" sz="1300" b="1" dirty="0">
+              <a:rPr lang="en-US" sz="1220" b="1" dirty="0">
                 <a:solidFill>
                   <a:srgbClr val="0068B7"/>
                 </a:solidFill>
@@ -16267,7 +16271,7 @@
               </a:rPr>
               <a:t>Core concept</a:t>
             </a:r>
-            <a:endParaRPr lang="en-US" sz="1300" dirty="0"/>
+            <a:endParaRPr lang="en-US" sz="1220" dirty="0"/>
           </a:p>
         </p:txBody>
       </p:sp>
@@ -16279,8 +16283,8 @@
         </p:nvSpPr>
         <p:spPr>
           <a:xfrm>
-            <a:off x="7799832" y="1801368"/>
-            <a:ext cx="3145536" cy="688543"/>
+            <a:off x="7708392" y="1764792"/>
+            <a:ext cx="3282696" cy="749808"/>
           </a:xfrm>
           <a:prstGeom prst="rect">
             <a:avLst/>
@@ -16298,7 +16302,7 @@
               <a:buNone/>
             </a:pPr>
             <a:r>
-              <a:rPr lang="en-US" sz="1320" dirty="0">
+              <a:rPr lang="en-US" sz="1220" dirty="0">
                 <a:solidFill>
                   <a:srgbClr val="17364A"/>
                 </a:solidFill>
@@ -16306,9 +16310,9 @@
                 <a:ea typeface="Aptos" pitchFamily="34" charset="-122"/>
                 <a:cs typeface="Aptos" pitchFamily="34" charset="-120"/>
               </a:rPr>
-              <a:t>AI use case intake is the structured process of receiving, describing, screening, and routing ideas for.</a:t>
-            </a:r>
-            <a:endParaRPr lang="en-US" sz="1320" dirty="0"/>
+              <a:t>AI use case intake is the structured process of receiving, describing,.</a:t>
+            </a:r>
+            <a:endParaRPr lang="en-US" sz="1220" dirty="0"/>
           </a:p>
         </p:txBody>
       </p:sp>
@@ -16320,12 +16324,12 @@
         </p:nvSpPr>
         <p:spPr>
           <a:xfrm>
-            <a:off x="7635240" y="2718511"/>
-            <a:ext cx="3474720" cy="1328623"/>
+            <a:off x="7543800" y="2724912"/>
+            <a:ext cx="3611880" cy="1527048"/>
           </a:xfrm>
           <a:prstGeom prst="roundRect">
             <a:avLst>
-              <a:gd name="adj" fmla="val 8259"/>
+              <a:gd name="adj" fmla="val 7186"/>
             </a:avLst>
           </a:prstGeom>
           <a:solidFill>
@@ -16347,8 +16351,8 @@
         </p:nvSpPr>
         <p:spPr>
           <a:xfrm>
-            <a:off x="7799832" y="2864815"/>
-            <a:ext cx="3145536" cy="256032"/>
+            <a:off x="7708392" y="2852928"/>
+            <a:ext cx="3282696" cy="228600"/>
           </a:xfrm>
           <a:prstGeom prst="rect">
             <a:avLst/>
@@ -16364,7 +16368,7 @@
               <a:buNone/>
             </a:pPr>
             <a:r>
-              <a:rPr lang="en-US" sz="1300" b="1" dirty="0">
+              <a:rPr lang="en-US" sz="1220" b="1" dirty="0">
                 <a:solidFill>
                   <a:srgbClr val="0068B7"/>
                 </a:solidFill>
@@ -16374,7 +16378,7 @@
               </a:rPr>
               <a:t>Concept checkpoints</a:t>
             </a:r>
-            <a:endParaRPr lang="en-US" sz="1300" dirty="0"/>
+            <a:endParaRPr lang="en-US" sz="1220" dirty="0"/>
           </a:p>
         </p:txBody>
       </p:sp>
@@ -16386,8 +16390,8 @@
         </p:nvSpPr>
         <p:spPr>
           <a:xfrm>
-            <a:off x="7818120" y="3230575"/>
-            <a:ext cx="3090672" cy="670255"/>
+            <a:off x="7726680" y="3182112"/>
+            <a:ext cx="3227832" cy="960120"/>
           </a:xfrm>
           <a:prstGeom prst="rect">
             <a:avLst/>
@@ -16405,7 +16409,7 @@
               <a:buNone/>
             </a:pPr>
             <a:r>
-              <a:rPr lang="en-US" sz="1220" dirty="0">
+              <a:rPr lang="en-US" sz="1140" dirty="0">
                 <a:solidFill>
                   <a:srgbClr val="17364A"/>
                 </a:solidFill>
@@ -16413,16 +16417,16 @@
                 <a:ea typeface="Aptos" pitchFamily="34" charset="-122"/>
                 <a:cs typeface="Aptos" pitchFamily="34" charset="-120"/>
               </a:rPr>
-              <a:t>AI use case intake is the structured process of receiving,.</a:t>
-            </a:r>
-            <a:endParaRPr lang="en-US" sz="1220" dirty="0"/>
-          </a:p>
-          <a:p>
-            <a:pPr indent="0" marL="0">
-              <a:buNone/>
-            </a:pPr>
-            <a:r>
-              <a:rPr lang="en-US" sz="1220" dirty="0">
+              <a:t>AI use case intake is the structured process of.</a:t>
+            </a:r>
+            <a:endParaRPr lang="en-US" sz="1140" dirty="0"/>
+          </a:p>
+          <a:p>
+            <a:pPr indent="0" marL="0">
+              <a:buNone/>
+            </a:pPr>
+            <a:r>
+              <a:rPr lang="en-US" sz="1140" dirty="0">
                 <a:solidFill>
                   <a:srgbClr val="17364A"/>
                 </a:solidFill>
@@ -16430,16 +16434,16 @@
                 <a:ea typeface="Aptos" pitchFamily="34" charset="-122"/>
                 <a:cs typeface="Aptos" pitchFamily="34" charset="-120"/>
               </a:rPr>
-              <a:t>In public health, this step is essential because AI ideas often.</a:t>
-            </a:r>
-            <a:endParaRPr lang="en-US" sz="1220" dirty="0"/>
-          </a:p>
-          <a:p>
-            <a:pPr indent="0" marL="0">
-              <a:buNone/>
-            </a:pPr>
-            <a:r>
-              <a:rPr lang="en-US" sz="1220" dirty="0">
+              <a:t>In public health, this step is essential because.</a:t>
+            </a:r>
+            <a:endParaRPr lang="en-US" sz="1140" dirty="0"/>
+          </a:p>
+          <a:p>
+            <a:pPr indent="0" marL="0">
+              <a:buNone/>
+            </a:pPr>
+            <a:r>
+              <a:rPr lang="en-US" sz="1140" dirty="0">
                 <a:solidFill>
                   <a:srgbClr val="17364A"/>
                 </a:solidFill>
@@ -16447,9 +16451,9 @@
                 <a:ea typeface="Aptos" pitchFamily="34" charset="-122"/>
                 <a:cs typeface="Aptos" pitchFamily="34" charset="-120"/>
               </a:rPr>
-              <a:t>Without a common intake process, agencies may approve low-value or.</a:t>
-            </a:r>
-            <a:endParaRPr lang="en-US" sz="1220" dirty="0"/>
+              <a:t>Without a common intake process, agencies may.</a:t>
+            </a:r>
+            <a:endParaRPr lang="en-US" sz="1140" dirty="0"/>
           </a:p>
         </p:txBody>
       </p:sp>
@@ -16461,12 +16465,12 @@
         </p:nvSpPr>
         <p:spPr>
           <a:xfrm>
-            <a:off x="7635240" y="4184294"/>
-            <a:ext cx="3474720" cy="1466698"/>
+            <a:off x="7543800" y="4389120"/>
+            <a:ext cx="3611880" cy="1261872"/>
           </a:xfrm>
           <a:prstGeom prst="roundRect">
             <a:avLst>
-              <a:gd name="adj" fmla="val 7481"/>
+              <a:gd name="adj" fmla="val 8696"/>
             </a:avLst>
           </a:prstGeom>
           <a:solidFill>
@@ -16488,8 +16492,8 @@
         </p:nvSpPr>
         <p:spPr>
           <a:xfrm>
-            <a:off x="7799832" y="4330598"/>
-            <a:ext cx="3145536" cy="256032"/>
+            <a:off x="7708392" y="4517136"/>
+            <a:ext cx="3282696" cy="228600"/>
           </a:xfrm>
           <a:prstGeom prst="rect">
             <a:avLst/>
@@ -16505,7 +16509,7 @@
               <a:buNone/>
             </a:pPr>
             <a:r>
-              <a:rPr lang="en-US" sz="1300" b="1" dirty="0">
+              <a:rPr lang="en-US" sz="1220" b="1" dirty="0">
                 <a:solidFill>
                   <a:srgbClr val="0068B7"/>
                 </a:solidFill>
@@ -16515,7 +16519,7 @@
               </a:rPr>
               <a:t>Apply it</a:t>
             </a:r>
-            <a:endParaRPr lang="en-US" sz="1300" dirty="0"/>
+            <a:endParaRPr lang="en-US" sz="1220" dirty="0"/>
           </a:p>
         </p:txBody>
       </p:sp>
@@ -16527,8 +16531,8 @@
         </p:nvSpPr>
         <p:spPr>
           <a:xfrm>
-            <a:off x="7799832" y="4659782"/>
-            <a:ext cx="3145536" cy="899770"/>
+            <a:off x="7708392" y="4828032"/>
+            <a:ext cx="3282696" cy="749808"/>
           </a:xfrm>
           <a:prstGeom prst="rect">
             <a:avLst/>
@@ -16546,7 +16550,7 @@
               <a:buNone/>
             </a:pPr>
             <a:r>
-              <a:rPr lang="en-US" sz="1320" dirty="0">
+              <a:rPr lang="en-US" sz="1220" dirty="0">
                 <a:solidFill>
                   <a:srgbClr val="17364A"/>
                 </a:solidFill>
@@ -16554,9 +16558,9 @@
                 <a:ea typeface="Aptos" pitchFamily="34" charset="-122"/>
                 <a:cs typeface="Aptos" pitchFamily="34" charset="-120"/>
               </a:rPr>
-              <a:t>Connect the concept to public health purpose, responsible use, required safeguards, documentation, and the next action a department should take.</a:t>
-            </a:r>
-            <a:endParaRPr lang="en-US" sz="1320" dirty="0"/>
+              <a:t>Connect the concept to public health purpose, responsible use, required.</a:t>
+            </a:r>
+            <a:endParaRPr lang="en-US" sz="1220" dirty="0"/>
           </a:p>
         </p:txBody>
       </p:sp>
@@ -16847,8 +16851,8 @@
         </p:nvSpPr>
         <p:spPr>
           <a:xfrm>
-            <a:off x="868680" y="1508760"/>
-            <a:ext cx="6309360" cy="4160520"/>
+            <a:off x="822960" y="1463040"/>
+            <a:ext cx="6565392" cy="4343400"/>
           </a:xfrm>
           <a:prstGeom prst="rect">
             <a:avLst/>
@@ -16866,7 +16870,7 @@
               <a:buNone/>
             </a:pPr>
             <a:r>
-              <a:rPr lang="en-US" sz="2100" dirty="0">
+              <a:rPr lang="en-US" sz="1920" dirty="0">
                 <a:solidFill>
                   <a:srgbClr val="003A63"/>
                 </a:solidFill>
@@ -16874,16 +16878,16 @@
                 <a:ea typeface="Aptos" pitchFamily="34" charset="-122"/>
                 <a:cs typeface="Aptos" pitchFamily="34" charset="-120"/>
               </a:rPr>
-              <a:t>• This module provides national-level training guidance for public health agencies and partners.</a:t>
-            </a:r>
-            <a:endParaRPr lang="en-US" sz="2100" dirty="0"/>
-          </a:p>
-          <a:p>
-            <a:pPr indent="0" marL="0">
-              <a:buNone/>
-            </a:pPr>
-            <a:r>
-              <a:rPr lang="en-US" sz="2100" dirty="0">
+              <a:t>• This module provides national-level training guidance for public health.</a:t>
+            </a:r>
+            <a:endParaRPr lang="en-US" sz="1920" dirty="0"/>
+          </a:p>
+          <a:p>
+            <a:pPr indent="0" marL="0">
+              <a:buNone/>
+            </a:pPr>
+            <a:r>
+              <a:rPr lang="en-US" sz="1920" dirty="0">
                 <a:solidFill>
                   <a:srgbClr val="003A63"/>
                 </a:solidFill>
@@ -16891,16 +16895,16 @@
                 <a:ea typeface="Aptos" pitchFamily="34" charset="-122"/>
                 <a:cs typeface="Aptos" pitchFamily="34" charset="-120"/>
               </a:rPr>
-              <a:t>• It is not legal advice and does not replace review by agency legal counsel, privacy officers,.</a:t>
-            </a:r>
-            <a:endParaRPr lang="en-US" sz="2100" dirty="0"/>
-          </a:p>
-          <a:p>
-            <a:pPr indent="0" marL="0">
-              <a:buNone/>
-            </a:pPr>
-            <a:r>
-              <a:rPr lang="en-US" sz="2100" dirty="0">
+              <a:t>• It is not legal advice and does not replace review by agency legal counsel,.</a:t>
+            </a:r>
+            <a:endParaRPr lang="en-US" sz="1920" dirty="0"/>
+          </a:p>
+          <a:p>
+            <a:pPr indent="0" marL="0">
+              <a:buNone/>
+            </a:pPr>
+            <a:r>
+              <a:rPr lang="en-US" sz="1920" dirty="0">
                 <a:solidFill>
                   <a:srgbClr val="003A63"/>
                 </a:solidFill>
@@ -16908,9 +16912,9 @@
                 <a:ea typeface="Aptos" pitchFamily="34" charset="-122"/>
                 <a:cs typeface="Aptos" pitchFamily="34" charset="-120"/>
               </a:rPr>
-              <a:t>• Requirements may vary by state, locality, territory, Tribe, agency, funding source,.</a:t>
-            </a:r>
-            <a:endParaRPr lang="en-US" sz="2100" dirty="0"/>
+              <a:t>• Requirements may vary by state, locality, territory, Tribe, agency, funding.</a:t>
+            </a:r>
+            <a:endParaRPr lang="en-US" sz="1920" dirty="0"/>
           </a:p>
         </p:txBody>
       </p:sp>
@@ -16922,12 +16926,12 @@
         </p:nvSpPr>
         <p:spPr>
           <a:xfrm>
-            <a:off x="7635240" y="1325880"/>
-            <a:ext cx="3474720" cy="1207008"/>
+            <a:off x="7543800" y="1325880"/>
+            <a:ext cx="3611880" cy="1261872"/>
           </a:xfrm>
           <a:prstGeom prst="roundRect">
             <a:avLst>
-              <a:gd name="adj" fmla="val 9091"/>
+              <a:gd name="adj" fmla="val 8696"/>
             </a:avLst>
           </a:prstGeom>
           <a:solidFill>
@@ -16949,8 +16953,8 @@
         </p:nvSpPr>
         <p:spPr>
           <a:xfrm>
-            <a:off x="7799832" y="1472184"/>
-            <a:ext cx="3145536" cy="256032"/>
+            <a:off x="7708392" y="1453896"/>
+            <a:ext cx="3282696" cy="228600"/>
           </a:xfrm>
           <a:prstGeom prst="rect">
             <a:avLst/>
@@ -16966,7 +16970,7 @@
               <a:buNone/>
             </a:pPr>
             <a:r>
-              <a:rPr lang="en-US" sz="1300" b="1" dirty="0">
+              <a:rPr lang="en-US" sz="1220" b="1" dirty="0">
                 <a:solidFill>
                   <a:srgbClr val="0068B7"/>
                 </a:solidFill>
@@ -16976,7 +16980,7 @@
               </a:rPr>
               <a:t>Governance lens</a:t>
             </a:r>
-            <a:endParaRPr lang="en-US" sz="1300" dirty="0"/>
+            <a:endParaRPr lang="en-US" sz="1220" dirty="0"/>
           </a:p>
         </p:txBody>
       </p:sp>
@@ -16988,8 +16992,8 @@
         </p:nvSpPr>
         <p:spPr>
           <a:xfrm>
-            <a:off x="7799832" y="1801368"/>
-            <a:ext cx="3145536" cy="640080"/>
+            <a:off x="7708392" y="1764792"/>
+            <a:ext cx="3282696" cy="749808"/>
           </a:xfrm>
           <a:prstGeom prst="rect">
             <a:avLst/>
@@ -17007,7 +17011,7 @@
               <a:buNone/>
             </a:pPr>
             <a:r>
-              <a:rPr lang="en-US" sz="1320" dirty="0">
+              <a:rPr lang="en-US" sz="1220" dirty="0">
                 <a:solidFill>
                   <a:srgbClr val="17364A"/>
                 </a:solidFill>
@@ -17015,9 +17019,9 @@
                 <a:ea typeface="Aptos" pitchFamily="34" charset="-122"/>
                 <a:cs typeface="Aptos" pitchFamily="34" charset="-120"/>
               </a:rPr>
-              <a:t>This module provides national-level training guidance for public health agencies and.</a:t>
-            </a:r>
-            <a:endParaRPr lang="en-US" sz="1320" dirty="0"/>
+              <a:t>This module provides national-level training guidance for public health agencies.</a:t>
+            </a:r>
+            <a:endParaRPr lang="en-US" sz="1220" dirty="0"/>
           </a:p>
         </p:txBody>
       </p:sp>
@@ -17029,12 +17033,12 @@
         </p:nvSpPr>
         <p:spPr>
           <a:xfrm>
-            <a:off x="7635240" y="2670048"/>
-            <a:ext cx="3474720" cy="1377086"/>
+            <a:off x="7543800" y="2724912"/>
+            <a:ext cx="3611880" cy="1527048"/>
           </a:xfrm>
           <a:prstGeom prst="roundRect">
             <a:avLst>
-              <a:gd name="adj" fmla="val 7968"/>
+              <a:gd name="adj" fmla="val 7186"/>
             </a:avLst>
           </a:prstGeom>
           <a:solidFill>
@@ -17056,24 +17060,26 @@
         </p:nvSpPr>
         <p:spPr>
           <a:xfrm>
-            <a:off x="7799832" y="2798064"/>
-            <a:ext cx="3145536" cy="237744"/>
-          </a:xfrm>
-          <a:prstGeom prst="rect">
-            <a:avLst/>
-          </a:prstGeom>
-          <a:noFill/>
-          <a:ln/>
-        </p:spPr>
-        <p:txBody>
-          <a:bodyPr wrap="square" lIns="0" tIns="0" rIns="0" bIns="0" rtlCol="0" anchor="ctr"/>
-          <a:lstStyle/>
-          <a:p>
-            <a:pPr indent="0" marL="0">
-              <a:buNone/>
-            </a:pPr>
-            <a:r>
-              <a:rPr lang="en-US" sz="1250" b="1" dirty="0">
+            <a:off x="7708392" y="2852928"/>
+            <a:ext cx="3282696" cy="219456"/>
+          </a:xfrm>
+          <a:prstGeom prst="rect">
+            <a:avLst/>
+          </a:prstGeom>
+          <a:noFill/>
+          <a:ln/>
+        </p:spPr>
+        <p:txBody>
+          <a:bodyPr wrap="square" lIns="0" tIns="0" rIns="0" bIns="0" rtlCol="0" anchor="ctr">
+            <a:normAutofit/>
+          </a:bodyPr>
+          <a:lstStyle/>
+          <a:p>
+            <a:pPr indent="0" marL="0">
+              <a:buNone/>
+            </a:pPr>
+            <a:r>
+              <a:rPr lang="en-US" sz="1160" b="1" dirty="0">
                 <a:solidFill>
                   <a:srgbClr val="0068B7"/>
                 </a:solidFill>
@@ -17083,7 +17089,7 @@
               </a:rPr>
               <a:t>Governance pathway</a:t>
             </a:r>
-            <a:endParaRPr lang="en-US" sz="1250" dirty="0"/>
+            <a:endParaRPr lang="en-US" sz="1160" dirty="0"/>
           </a:p>
         </p:txBody>
       </p:sp>
@@ -17095,7 +17101,7 @@
         </p:nvSpPr>
         <p:spPr>
           <a:xfrm>
-            <a:off x="8763000" y="3351276"/>
+            <a:off x="8717280" y="3406140"/>
             <a:ext cx="164592" cy="0"/>
           </a:xfrm>
           <a:prstGeom prst="line">
@@ -17118,8 +17124,8 @@
         </p:nvSpPr>
         <p:spPr>
           <a:xfrm>
-            <a:off x="7872984" y="3200400"/>
-            <a:ext cx="890016" cy="301752"/>
+            <a:off x="7781544" y="3255264"/>
+            <a:ext cx="935736" cy="301752"/>
           </a:xfrm>
           <a:prstGeom prst="roundRect">
             <a:avLst>
@@ -17145,8 +17151,8 @@
         </p:nvSpPr>
         <p:spPr>
           <a:xfrm>
-            <a:off x="7909560" y="3273552"/>
-            <a:ext cx="816864" cy="146304"/>
+            <a:off x="7818120" y="3328416"/>
+            <a:ext cx="862584" cy="146304"/>
           </a:xfrm>
           <a:prstGeom prst="rect">
             <a:avLst/>
@@ -17186,7 +17192,7 @@
         </p:nvSpPr>
         <p:spPr>
           <a:xfrm>
-            <a:off x="9817608" y="3351276"/>
+            <a:off x="9817608" y="3406140"/>
             <a:ext cx="164592" cy="0"/>
           </a:xfrm>
           <a:prstGeom prst="line">
@@ -17209,8 +17215,8 @@
         </p:nvSpPr>
         <p:spPr>
           <a:xfrm>
-            <a:off x="8927592" y="3200400"/>
-            <a:ext cx="890016" cy="301752"/>
+            <a:off x="8881872" y="3255264"/>
+            <a:ext cx="935736" cy="301752"/>
           </a:xfrm>
           <a:prstGeom prst="roundRect">
             <a:avLst>
@@ -17236,8 +17242,8 @@
         </p:nvSpPr>
         <p:spPr>
           <a:xfrm>
-            <a:off x="8964168" y="3273552"/>
-            <a:ext cx="816864" cy="146304"/>
+            <a:off x="8918448" y="3328416"/>
+            <a:ext cx="862584" cy="146304"/>
           </a:xfrm>
           <a:prstGeom prst="rect">
             <a:avLst/>
@@ -17277,8 +17283,8 @@
         </p:nvSpPr>
         <p:spPr>
           <a:xfrm>
-            <a:off x="9982200" y="3200400"/>
-            <a:ext cx="890016" cy="301752"/>
+            <a:off x="9982200" y="3255264"/>
+            <a:ext cx="935736" cy="301752"/>
           </a:xfrm>
           <a:prstGeom prst="roundRect">
             <a:avLst>
@@ -17304,8 +17310,8 @@
         </p:nvSpPr>
         <p:spPr>
           <a:xfrm>
-            <a:off x="10018776" y="3273552"/>
-            <a:ext cx="816864" cy="146304"/>
+            <a:off x="10018776" y="3328416"/>
+            <a:ext cx="862584" cy="146304"/>
           </a:xfrm>
           <a:prstGeom prst="rect">
             <a:avLst/>
@@ -17345,8 +17351,8 @@
         </p:nvSpPr>
         <p:spPr>
           <a:xfrm>
-            <a:off x="7854696" y="3694176"/>
-            <a:ext cx="3035808" cy="206654"/>
+            <a:off x="7763256" y="3749040"/>
+            <a:ext cx="3172968" cy="356616"/>
           </a:xfrm>
           <a:prstGeom prst="rect">
             <a:avLst/>
@@ -17364,7 +17370,7 @@
               <a:buNone/>
             </a:pPr>
             <a:r>
-              <a:rPr lang="en-US" sz="1120" dirty="0">
+              <a:rPr lang="en-US" sz="1040" dirty="0">
                 <a:solidFill>
                   <a:srgbClr val="17364A"/>
                 </a:solidFill>
@@ -17372,9 +17378,9 @@
                 <a:ea typeface="Aptos" pitchFamily="34" charset="-122"/>
                 <a:cs typeface="Aptos" pitchFamily="34" charset="-120"/>
               </a:rPr>
-              <a:t>A proposed AI use should move through documented review before it becomes an operational workflow.</a:t>
-            </a:r>
-            <a:endParaRPr lang="en-US" sz="1120" dirty="0"/>
+              <a:t>A proposed AI use should move through documented review before it.</a:t>
+            </a:r>
+            <a:endParaRPr lang="en-US" sz="1040" dirty="0"/>
           </a:p>
         </p:txBody>
       </p:sp>
@@ -17386,12 +17392,12 @@
         </p:nvSpPr>
         <p:spPr>
           <a:xfrm>
-            <a:off x="7635240" y="4184294"/>
-            <a:ext cx="3474720" cy="1466698"/>
+            <a:off x="7543800" y="4389120"/>
+            <a:ext cx="3611880" cy="1261872"/>
           </a:xfrm>
           <a:prstGeom prst="roundRect">
             <a:avLst>
-              <a:gd name="adj" fmla="val 7481"/>
+              <a:gd name="adj" fmla="val 8696"/>
             </a:avLst>
           </a:prstGeom>
           <a:solidFill>
@@ -17413,8 +17419,8 @@
         </p:nvSpPr>
         <p:spPr>
           <a:xfrm>
-            <a:off x="7799832" y="4330598"/>
-            <a:ext cx="3145536" cy="256032"/>
+            <a:off x="7708392" y="4517136"/>
+            <a:ext cx="3282696" cy="228600"/>
           </a:xfrm>
           <a:prstGeom prst="rect">
             <a:avLst/>
@@ -17430,7 +17436,7 @@
               <a:buNone/>
             </a:pPr>
             <a:r>
-              <a:rPr lang="en-US" sz="1300" b="1" dirty="0">
+              <a:rPr lang="en-US" sz="1220" b="1" dirty="0">
                 <a:solidFill>
                   <a:srgbClr val="0068B7"/>
                 </a:solidFill>
@@ -17440,7 +17446,7 @@
               </a:rPr>
               <a:t>What to document</a:t>
             </a:r>
-            <a:endParaRPr lang="en-US" sz="1300" dirty="0"/>
+            <a:endParaRPr lang="en-US" sz="1220" dirty="0"/>
           </a:p>
         </p:txBody>
       </p:sp>
@@ -17452,8 +17458,8 @@
         </p:nvSpPr>
         <p:spPr>
           <a:xfrm>
-            <a:off x="7799832" y="4659782"/>
-            <a:ext cx="3145536" cy="899770"/>
+            <a:off x="7708392" y="4828032"/>
+            <a:ext cx="3282696" cy="749808"/>
           </a:xfrm>
           <a:prstGeom prst="rect">
             <a:avLst/>
@@ -17471,7 +17477,7 @@
               <a:buNone/>
             </a:pPr>
             <a:r>
-              <a:rPr lang="en-US" sz="1320" dirty="0">
+              <a:rPr lang="en-US" sz="1220" dirty="0">
                 <a:solidFill>
                   <a:srgbClr val="17364A"/>
                 </a:solidFill>
@@ -17479,9 +17485,9 @@
                 <a:ea typeface="Aptos" pitchFamily="34" charset="-122"/>
                 <a:cs typeface="Aptos" pitchFamily="34" charset="-120"/>
               </a:rPr>
-              <a:t>Translate this concept into clear decision rights, review steps, documentation expectations, and escalation paths before an AI-supported workflow is approved.</a:t>
-            </a:r>
-            <a:endParaRPr lang="en-US" sz="1320" dirty="0"/>
+              <a:t>Translate this concept into clear decision rights, review steps, documentation.</a:t>
+            </a:r>
+            <a:endParaRPr lang="en-US" sz="1220" dirty="0"/>
           </a:p>
         </p:txBody>
       </p:sp>
@@ -17772,8 +17778,8 @@
         </p:nvSpPr>
         <p:spPr>
           <a:xfrm>
-            <a:off x="868680" y="1508760"/>
-            <a:ext cx="6309360" cy="4160520"/>
+            <a:off x="822960" y="1463040"/>
+            <a:ext cx="6565392" cy="4343400"/>
           </a:xfrm>
           <a:prstGeom prst="rect">
             <a:avLst/>
@@ -17791,7 +17797,7 @@
               <a:buNone/>
             </a:pPr>
             <a:r>
-              <a:rPr lang="en-US" sz="2100" dirty="0">
+              <a:rPr lang="en-US" sz="1920" dirty="0">
                 <a:solidFill>
                   <a:srgbClr val="003A63"/>
                 </a:solidFill>
@@ -17799,16 +17805,16 @@
                 <a:ea typeface="Aptos" pitchFamily="34" charset="-122"/>
                 <a:cs typeface="Aptos" pitchFamily="34" charset="-120"/>
               </a:rPr>
-              <a:t>• A communicable disease program wants to use generative AI to summarize case investigation.</a:t>
-            </a:r>
-            <a:endParaRPr lang="en-US" sz="2100" dirty="0"/>
-          </a:p>
-          <a:p>
-            <a:pPr indent="0" marL="0">
-              <a:buNone/>
-            </a:pPr>
-            <a:r>
-              <a:rPr lang="en-US" sz="2100" dirty="0">
+              <a:t>• A communicable disease program wants to use generative AI to summarize case.</a:t>
+            </a:r>
+            <a:endParaRPr lang="en-US" sz="1920" dirty="0"/>
+          </a:p>
+          <a:p>
+            <a:pPr indent="0" marL="0">
+              <a:buNone/>
+            </a:pPr>
+            <a:r>
+              <a:rPr lang="en-US" sz="1920" dirty="0">
                 <a:solidFill>
                   <a:srgbClr val="003A63"/>
                 </a:solidFill>
@@ -17816,16 +17822,16 @@
                 <a:ea typeface="Aptos" pitchFamily="34" charset="-122"/>
                 <a:cs typeface="Aptos" pitchFamily="34" charset="-120"/>
               </a:rPr>
-              <a:t>• Intake would document the workflow, the staff who would use the output, the source data,.</a:t>
-            </a:r>
-            <a:endParaRPr lang="en-US" sz="2100" dirty="0"/>
-          </a:p>
-          <a:p>
-            <a:pPr indent="0" marL="0">
-              <a:buNone/>
-            </a:pPr>
-            <a:r>
-              <a:rPr lang="en-US" sz="2100" dirty="0">
+              <a:t>• Intake would document the workflow, the staff who would use the output, the.</a:t>
+            </a:r>
+            <a:endParaRPr lang="en-US" sz="1920" dirty="0"/>
+          </a:p>
+          <a:p>
+            <a:pPr indent="0" marL="0">
+              <a:buNone/>
+            </a:pPr>
+            <a:r>
+              <a:rPr lang="en-US" sz="1920" dirty="0">
                 <a:solidFill>
                   <a:srgbClr val="003A63"/>
                 </a:solidFill>
@@ -17833,9 +17839,9 @@
                 <a:ea typeface="Aptos" pitchFamily="34" charset="-122"/>
                 <a:cs typeface="Aptos" pitchFamily="34" charset="-120"/>
               </a:rPr>
-              <a:t>• Triage would likely route the use case to privacy, legal, IT, epidemiology, equity, and.</a:t>
-            </a:r>
-            <a:endParaRPr lang="en-US" sz="2100" dirty="0"/>
+              <a:t>• Triage would likely route the use case to privacy, legal, IT, epidemiology,.</a:t>
+            </a:r>
+            <a:endParaRPr lang="en-US" sz="1920" dirty="0"/>
           </a:p>
         </p:txBody>
       </p:sp>
@@ -17847,12 +17853,12 @@
         </p:nvSpPr>
         <p:spPr>
           <a:xfrm>
-            <a:off x="7635240" y="1325880"/>
-            <a:ext cx="3474720" cy="1255471"/>
+            <a:off x="7543800" y="1325880"/>
+            <a:ext cx="3611880" cy="1261872"/>
           </a:xfrm>
           <a:prstGeom prst="roundRect">
             <a:avLst>
-              <a:gd name="adj" fmla="val 8740"/>
+              <a:gd name="adj" fmla="val 8696"/>
             </a:avLst>
           </a:prstGeom>
           <a:solidFill>
@@ -17874,8 +17880,8 @@
         </p:nvSpPr>
         <p:spPr>
           <a:xfrm>
-            <a:off x="7799832" y="1472184"/>
-            <a:ext cx="3145536" cy="256032"/>
+            <a:off x="7708392" y="1453896"/>
+            <a:ext cx="3282696" cy="228600"/>
           </a:xfrm>
           <a:prstGeom prst="rect">
             <a:avLst/>
@@ -17891,7 +17897,7 @@
               <a:buNone/>
             </a:pPr>
             <a:r>
-              <a:rPr lang="en-US" sz="1300" b="1" dirty="0">
+              <a:rPr lang="en-US" sz="1220" b="1" dirty="0">
                 <a:solidFill>
                   <a:srgbClr val="0068B7"/>
                 </a:solidFill>
@@ -17901,7 +17907,7 @@
               </a:rPr>
               <a:t>Core concept</a:t>
             </a:r>
-            <a:endParaRPr lang="en-US" sz="1300" dirty="0"/>
+            <a:endParaRPr lang="en-US" sz="1220" dirty="0"/>
           </a:p>
         </p:txBody>
       </p:sp>
@@ -17913,8 +17919,8 @@
         </p:nvSpPr>
         <p:spPr>
           <a:xfrm>
-            <a:off x="7799832" y="1801368"/>
-            <a:ext cx="3145536" cy="688543"/>
+            <a:off x="7708392" y="1764792"/>
+            <a:ext cx="3282696" cy="749808"/>
           </a:xfrm>
           <a:prstGeom prst="rect">
             <a:avLst/>
@@ -17932,7 +17938,7 @@
               <a:buNone/>
             </a:pPr>
             <a:r>
-              <a:rPr lang="en-US" sz="1320" dirty="0">
+              <a:rPr lang="en-US" sz="1220" dirty="0">
                 <a:solidFill>
                   <a:srgbClr val="17364A"/>
                 </a:solidFill>
@@ -17940,9 +17946,9 @@
                 <a:ea typeface="Aptos" pitchFamily="34" charset="-122"/>
                 <a:cs typeface="Aptos" pitchFamily="34" charset="-120"/>
               </a:rPr>
-              <a:t>A communicable disease program wants to use generative AI to summarize case investigation notes and.</a:t>
-            </a:r>
-            <a:endParaRPr lang="en-US" sz="1320" dirty="0"/>
+              <a:t>A communicable disease program wants to use generative AI to summarize case.</a:t>
+            </a:r>
+            <a:endParaRPr lang="en-US" sz="1220" dirty="0"/>
           </a:p>
         </p:txBody>
       </p:sp>
@@ -17954,12 +17960,12 @@
         </p:nvSpPr>
         <p:spPr>
           <a:xfrm>
-            <a:off x="7635240" y="2718511"/>
-            <a:ext cx="3474720" cy="1328623"/>
+            <a:off x="7543800" y="2724912"/>
+            <a:ext cx="3611880" cy="1527048"/>
           </a:xfrm>
           <a:prstGeom prst="roundRect">
             <a:avLst>
-              <a:gd name="adj" fmla="val 8259"/>
+              <a:gd name="adj" fmla="val 7186"/>
             </a:avLst>
           </a:prstGeom>
           <a:solidFill>
@@ -17981,8 +17987,8 @@
         </p:nvSpPr>
         <p:spPr>
           <a:xfrm>
-            <a:off x="7799832" y="2864815"/>
-            <a:ext cx="3145536" cy="256032"/>
+            <a:off x="7708392" y="2852928"/>
+            <a:ext cx="3282696" cy="228600"/>
           </a:xfrm>
           <a:prstGeom prst="rect">
             <a:avLst/>
@@ -17998,7 +18004,7 @@
               <a:buNone/>
             </a:pPr>
             <a:r>
-              <a:rPr lang="en-US" sz="1300" b="1" dirty="0">
+              <a:rPr lang="en-US" sz="1220" b="1" dirty="0">
                 <a:solidFill>
                   <a:srgbClr val="0068B7"/>
                 </a:solidFill>
@@ -18008,7 +18014,7 @@
               </a:rPr>
               <a:t>Concept checkpoints</a:t>
             </a:r>
-            <a:endParaRPr lang="en-US" sz="1300" dirty="0"/>
+            <a:endParaRPr lang="en-US" sz="1220" dirty="0"/>
           </a:p>
         </p:txBody>
       </p:sp>
@@ -18020,8 +18026,8 @@
         </p:nvSpPr>
         <p:spPr>
           <a:xfrm>
-            <a:off x="7818120" y="3230575"/>
-            <a:ext cx="3090672" cy="670255"/>
+            <a:off x="7726680" y="3182112"/>
+            <a:ext cx="3227832" cy="960120"/>
           </a:xfrm>
           <a:prstGeom prst="rect">
             <a:avLst/>
@@ -18039,7 +18045,7 @@
               <a:buNone/>
             </a:pPr>
             <a:r>
-              <a:rPr lang="en-US" sz="1220" dirty="0">
+              <a:rPr lang="en-US" sz="1140" dirty="0">
                 <a:solidFill>
                   <a:srgbClr val="17364A"/>
                 </a:solidFill>
@@ -18047,16 +18053,16 @@
                 <a:ea typeface="Aptos" pitchFamily="34" charset="-122"/>
                 <a:cs typeface="Aptos" pitchFamily="34" charset="-120"/>
               </a:rPr>
-              <a:t>A communicable disease program wants to use generative AI to.</a:t>
-            </a:r>
-            <a:endParaRPr lang="en-US" sz="1220" dirty="0"/>
-          </a:p>
-          <a:p>
-            <a:pPr indent="0" marL="0">
-              <a:buNone/>
-            </a:pPr>
-            <a:r>
-              <a:rPr lang="en-US" sz="1220" dirty="0">
+              <a:t>A communicable disease program wants to use.</a:t>
+            </a:r>
+            <a:endParaRPr lang="en-US" sz="1140" dirty="0"/>
+          </a:p>
+          <a:p>
+            <a:pPr indent="0" marL="0">
+              <a:buNone/>
+            </a:pPr>
+            <a:r>
+              <a:rPr lang="en-US" sz="1140" dirty="0">
                 <a:solidFill>
                   <a:srgbClr val="17364A"/>
                 </a:solidFill>
@@ -18064,16 +18070,16 @@
                 <a:ea typeface="Aptos" pitchFamily="34" charset="-122"/>
                 <a:cs typeface="Aptos" pitchFamily="34" charset="-120"/>
               </a:rPr>
-              <a:t>Intake would document the workflow, the staff who would use the.</a:t>
-            </a:r>
-            <a:endParaRPr lang="en-US" sz="1220" dirty="0"/>
-          </a:p>
-          <a:p>
-            <a:pPr indent="0" marL="0">
-              <a:buNone/>
-            </a:pPr>
-            <a:r>
-              <a:rPr lang="en-US" sz="1220" dirty="0">
+              <a:t>Intake would document the workflow, the staff who.</a:t>
+            </a:r>
+            <a:endParaRPr lang="en-US" sz="1140" dirty="0"/>
+          </a:p>
+          <a:p>
+            <a:pPr indent="0" marL="0">
+              <a:buNone/>
+            </a:pPr>
+            <a:r>
+              <a:rPr lang="en-US" sz="1140" dirty="0">
                 <a:solidFill>
                   <a:srgbClr val="17364A"/>
                 </a:solidFill>
@@ -18081,9 +18087,9 @@
                 <a:ea typeface="Aptos" pitchFamily="34" charset="-122"/>
                 <a:cs typeface="Aptos" pitchFamily="34" charset="-120"/>
               </a:rPr>
-              <a:t>Triage would likely route the use case to privacy, legal, IT,.</a:t>
-            </a:r>
-            <a:endParaRPr lang="en-US" sz="1220" dirty="0"/>
+              <a:t>Triage would likely route the use case to privacy,.</a:t>
+            </a:r>
+            <a:endParaRPr lang="en-US" sz="1140" dirty="0"/>
           </a:p>
         </p:txBody>
       </p:sp>
@@ -18095,12 +18101,12 @@
         </p:nvSpPr>
         <p:spPr>
           <a:xfrm>
-            <a:off x="7635240" y="4184294"/>
-            <a:ext cx="3474720" cy="1466698"/>
+            <a:off x="7543800" y="4389120"/>
+            <a:ext cx="3611880" cy="1261872"/>
           </a:xfrm>
           <a:prstGeom prst="roundRect">
             <a:avLst>
-              <a:gd name="adj" fmla="val 7481"/>
+              <a:gd name="adj" fmla="val 8696"/>
             </a:avLst>
           </a:prstGeom>
           <a:solidFill>
@@ -18122,8 +18128,8 @@
         </p:nvSpPr>
         <p:spPr>
           <a:xfrm>
-            <a:off x="7799832" y="4330598"/>
-            <a:ext cx="3145536" cy="256032"/>
+            <a:off x="7708392" y="4517136"/>
+            <a:ext cx="3282696" cy="228600"/>
           </a:xfrm>
           <a:prstGeom prst="rect">
             <a:avLst/>
@@ -18139,7 +18145,7 @@
               <a:buNone/>
             </a:pPr>
             <a:r>
-              <a:rPr lang="en-US" sz="1300" b="1" dirty="0">
+              <a:rPr lang="en-US" sz="1220" b="1" dirty="0">
                 <a:solidFill>
                   <a:srgbClr val="0068B7"/>
                 </a:solidFill>
@@ -18149,7 +18155,7 @@
               </a:rPr>
               <a:t>Apply it</a:t>
             </a:r>
-            <a:endParaRPr lang="en-US" sz="1300" dirty="0"/>
+            <a:endParaRPr lang="en-US" sz="1220" dirty="0"/>
           </a:p>
         </p:txBody>
       </p:sp>
@@ -18161,8 +18167,8 @@
         </p:nvSpPr>
         <p:spPr>
           <a:xfrm>
-            <a:off x="7799832" y="4659782"/>
-            <a:ext cx="3145536" cy="899770"/>
+            <a:off x="7708392" y="4828032"/>
+            <a:ext cx="3282696" cy="749808"/>
           </a:xfrm>
           <a:prstGeom prst="rect">
             <a:avLst/>
@@ -18180,7 +18186,7 @@
               <a:buNone/>
             </a:pPr>
             <a:r>
-              <a:rPr lang="en-US" sz="1320" dirty="0">
+              <a:rPr lang="en-US" sz="1220" dirty="0">
                 <a:solidFill>
                   <a:srgbClr val="17364A"/>
                 </a:solidFill>
@@ -18188,9 +18194,9 @@
                 <a:ea typeface="Aptos" pitchFamily="34" charset="-122"/>
                 <a:cs typeface="Aptos" pitchFamily="34" charset="-120"/>
               </a:rPr>
-              <a:t>Connect the concept to public health purpose, responsible use, required safeguards, documentation, and the next action a department should take.</a:t>
-            </a:r>
-            <a:endParaRPr lang="en-US" sz="1320" dirty="0"/>
+              <a:t>Connect the concept to public health purpose, responsible use, required.</a:t>
+            </a:r>
+            <a:endParaRPr lang="en-US" sz="1220" dirty="0"/>
           </a:p>
         </p:txBody>
       </p:sp>
@@ -18481,8 +18487,8 @@
         </p:nvSpPr>
         <p:spPr>
           <a:xfrm>
-            <a:off x="868680" y="1508760"/>
-            <a:ext cx="6309360" cy="4160520"/>
+            <a:off x="822960" y="1463040"/>
+            <a:ext cx="6565392" cy="4343400"/>
           </a:xfrm>
           <a:prstGeom prst="rect">
             <a:avLst/>
@@ -18500,7 +18506,7 @@
               <a:buNone/>
             </a:pPr>
             <a:r>
-              <a:rPr lang="en-US" sz="2100" dirty="0">
+              <a:rPr lang="en-US" sz="1920" dirty="0">
                 <a:solidFill>
                   <a:srgbClr val="003A63"/>
                 </a:solidFill>
@@ -18508,16 +18514,16 @@
                 <a:ea typeface="Aptos" pitchFamily="34" charset="-122"/>
                 <a:cs typeface="Aptos" pitchFamily="34" charset="-120"/>
               </a:rPr>
-              <a:t>• An effective intake process begins by defining the problem before selecting the technology.</a:t>
-            </a:r>
-            <a:endParaRPr lang="en-US" sz="2100" dirty="0"/>
-          </a:p>
-          <a:p>
-            <a:pPr indent="0" marL="0">
-              <a:buNone/>
-            </a:pPr>
-            <a:r>
-              <a:rPr lang="en-US" sz="2100" dirty="0">
+              <a:t>• An effective intake process begins by defining the problem before selecting.</a:t>
+            </a:r>
+            <a:endParaRPr lang="en-US" sz="1920" dirty="0"/>
+          </a:p>
+          <a:p>
+            <a:pPr indent="0" marL="0">
+              <a:buNone/>
+            </a:pPr>
+            <a:r>
+              <a:rPr lang="en-US" sz="1920" dirty="0">
                 <a:solidFill>
                   <a:srgbClr val="003A63"/>
                 </a:solidFill>
@@ -18525,16 +18531,16 @@
                 <a:ea typeface="Aptos" pitchFamily="34" charset="-122"/>
                 <a:cs typeface="Aptos" pitchFamily="34" charset="-120"/>
               </a:rPr>
-              <a:t>• Staff should describe the current workflow, the pain point, the people affected, the desired.</a:t>
-            </a:r>
-            <a:endParaRPr lang="en-US" sz="2100" dirty="0"/>
-          </a:p>
-          <a:p>
-            <a:pPr indent="0" marL="0">
-              <a:buNone/>
-            </a:pPr>
-            <a:r>
-              <a:rPr lang="en-US" sz="2100" dirty="0">
+              <a:t>• Staff should describe the current workflow, the pain point, the people.</a:t>
+            </a:r>
+            <a:endParaRPr lang="en-US" sz="1920" dirty="0"/>
+          </a:p>
+          <a:p>
+            <a:pPr indent="0" marL="0">
+              <a:buNone/>
+            </a:pPr>
+            <a:r>
+              <a:rPr lang="en-US" sz="1920" dirty="0">
                 <a:solidFill>
                   <a:srgbClr val="003A63"/>
                 </a:solidFill>
@@ -18542,9 +18548,9 @@
                 <a:ea typeface="Aptos" pitchFamily="34" charset="-122"/>
                 <a:cs typeface="Aptos" pitchFamily="34" charset="-120"/>
               </a:rPr>
-              <a:t>• This prevents technology-first proposals that begin with a tool and then search for a public.</a:t>
-            </a:r>
-            <a:endParaRPr lang="en-US" sz="2100" dirty="0"/>
+              <a:t>• This prevents technology-first proposals that begin with a tool and then.</a:t>
+            </a:r>
+            <a:endParaRPr lang="en-US" sz="1920" dirty="0"/>
           </a:p>
         </p:txBody>
       </p:sp>
@@ -18556,12 +18562,12 @@
         </p:nvSpPr>
         <p:spPr>
           <a:xfrm>
-            <a:off x="7635240" y="1325880"/>
-            <a:ext cx="3474720" cy="1207008"/>
+            <a:off x="7543800" y="1325880"/>
+            <a:ext cx="3611880" cy="1261872"/>
           </a:xfrm>
           <a:prstGeom prst="roundRect">
             <a:avLst>
-              <a:gd name="adj" fmla="val 9091"/>
+              <a:gd name="adj" fmla="val 8696"/>
             </a:avLst>
           </a:prstGeom>
           <a:solidFill>
@@ -18583,8 +18589,8 @@
         </p:nvSpPr>
         <p:spPr>
           <a:xfrm>
-            <a:off x="7799832" y="1472184"/>
-            <a:ext cx="3145536" cy="256032"/>
+            <a:off x="7708392" y="1453896"/>
+            <a:ext cx="3282696" cy="228600"/>
           </a:xfrm>
           <a:prstGeom prst="rect">
             <a:avLst/>
@@ -18600,7 +18606,7 @@
               <a:buNone/>
             </a:pPr>
             <a:r>
-              <a:rPr lang="en-US" sz="1300" b="1" dirty="0">
+              <a:rPr lang="en-US" sz="1220" b="1" dirty="0">
                 <a:solidFill>
                   <a:srgbClr val="0068B7"/>
                 </a:solidFill>
@@ -18610,7 +18616,7 @@
               </a:rPr>
               <a:t>Core concept</a:t>
             </a:r>
-            <a:endParaRPr lang="en-US" sz="1300" dirty="0"/>
+            <a:endParaRPr lang="en-US" sz="1220" dirty="0"/>
           </a:p>
         </p:txBody>
       </p:sp>
@@ -18622,8 +18628,8 @@
         </p:nvSpPr>
         <p:spPr>
           <a:xfrm>
-            <a:off x="7799832" y="1801368"/>
-            <a:ext cx="3145536" cy="640080"/>
+            <a:off x="7708392" y="1764792"/>
+            <a:ext cx="3282696" cy="749808"/>
           </a:xfrm>
           <a:prstGeom prst="rect">
             <a:avLst/>
@@ -18641,7 +18647,7 @@
               <a:buNone/>
             </a:pPr>
             <a:r>
-              <a:rPr lang="en-US" sz="1320" dirty="0">
+              <a:rPr lang="en-US" sz="1220" dirty="0">
                 <a:solidFill>
                   <a:srgbClr val="17364A"/>
                 </a:solidFill>
@@ -18651,7 +18657,7 @@
               </a:rPr>
               <a:t>An effective intake process begins by defining the problem before selecting the.</a:t>
             </a:r>
-            <a:endParaRPr lang="en-US" sz="1320" dirty="0"/>
+            <a:endParaRPr lang="en-US" sz="1220" dirty="0"/>
           </a:p>
         </p:txBody>
       </p:sp>
@@ -18663,12 +18669,12 @@
         </p:nvSpPr>
         <p:spPr>
           <a:xfrm>
-            <a:off x="7635240" y="2670048"/>
-            <a:ext cx="3474720" cy="1377086"/>
+            <a:off x="7543800" y="2724912"/>
+            <a:ext cx="3611880" cy="1527048"/>
           </a:xfrm>
           <a:prstGeom prst="roundRect">
             <a:avLst>
-              <a:gd name="adj" fmla="val 7968"/>
+              <a:gd name="adj" fmla="val 7186"/>
             </a:avLst>
           </a:prstGeom>
           <a:solidFill>
@@ -18690,8 +18696,8 @@
         </p:nvSpPr>
         <p:spPr>
           <a:xfrm>
-            <a:off x="7799832" y="2816352"/>
-            <a:ext cx="3145536" cy="256032"/>
+            <a:off x="7708392" y="2852928"/>
+            <a:ext cx="3282696" cy="228600"/>
           </a:xfrm>
           <a:prstGeom prst="rect">
             <a:avLst/>
@@ -18707,7 +18713,7 @@
               <a:buNone/>
             </a:pPr>
             <a:r>
-              <a:rPr lang="en-US" sz="1300" b="1" dirty="0">
+              <a:rPr lang="en-US" sz="1220" b="1" dirty="0">
                 <a:solidFill>
                   <a:srgbClr val="0068B7"/>
                 </a:solidFill>
@@ -18717,7 +18723,7 @@
               </a:rPr>
               <a:t>Concept checkpoints</a:t>
             </a:r>
-            <a:endParaRPr lang="en-US" sz="1300" dirty="0"/>
+            <a:endParaRPr lang="en-US" sz="1220" dirty="0"/>
           </a:p>
         </p:txBody>
       </p:sp>
@@ -18729,8 +18735,8 @@
         </p:nvSpPr>
         <p:spPr>
           <a:xfrm>
-            <a:off x="7818120" y="3182112"/>
-            <a:ext cx="3090672" cy="718718"/>
+            <a:off x="7726680" y="3182112"/>
+            <a:ext cx="3227832" cy="960120"/>
           </a:xfrm>
           <a:prstGeom prst="rect">
             <a:avLst/>
@@ -18748,7 +18754,7 @@
               <a:buNone/>
             </a:pPr>
             <a:r>
-              <a:rPr lang="en-US" sz="1220" dirty="0">
+              <a:rPr lang="en-US" sz="1140" dirty="0">
                 <a:solidFill>
                   <a:srgbClr val="17364A"/>
                 </a:solidFill>
@@ -18756,16 +18762,16 @@
                 <a:ea typeface="Aptos" pitchFamily="34" charset="-122"/>
                 <a:cs typeface="Aptos" pitchFamily="34" charset="-120"/>
               </a:rPr>
-              <a:t>Staff should describe the current workflow, the pain point, the.</a:t>
-            </a:r>
-            <a:endParaRPr lang="en-US" sz="1220" dirty="0"/>
-          </a:p>
-          <a:p>
-            <a:pPr indent="0" marL="0">
-              <a:buNone/>
-            </a:pPr>
-            <a:r>
-              <a:rPr lang="en-US" sz="1220" dirty="0">
+              <a:t>Staff should describe the current workflow, the.</a:t>
+            </a:r>
+            <a:endParaRPr lang="en-US" sz="1140" dirty="0"/>
+          </a:p>
+          <a:p>
+            <a:pPr indent="0" marL="0">
+              <a:buNone/>
+            </a:pPr>
+            <a:r>
+              <a:rPr lang="en-US" sz="1140" dirty="0">
                 <a:solidFill>
                   <a:srgbClr val="17364A"/>
                 </a:solidFill>
@@ -18773,16 +18779,16 @@
                 <a:ea typeface="Aptos" pitchFamily="34" charset="-122"/>
                 <a:cs typeface="Aptos" pitchFamily="34" charset="-120"/>
               </a:rPr>
-              <a:t>This prevents technology-first proposals that begin with a tool.</a:t>
-            </a:r>
-            <a:endParaRPr lang="en-US" sz="1220" dirty="0"/>
-          </a:p>
-          <a:p>
-            <a:pPr indent="0" marL="0">
-              <a:buNone/>
-            </a:pPr>
-            <a:r>
-              <a:rPr lang="en-US" sz="1220" dirty="0">
+              <a:t>This prevents technology-first proposals that.</a:t>
+            </a:r>
+            <a:endParaRPr lang="en-US" sz="1140" dirty="0"/>
+          </a:p>
+          <a:p>
+            <a:pPr indent="0" marL="0">
+              <a:buNone/>
+            </a:pPr>
+            <a:r>
+              <a:rPr lang="en-US" sz="1140" dirty="0">
                 <a:solidFill>
                   <a:srgbClr val="17364A"/>
                 </a:solidFill>
@@ -18790,9 +18796,9 @@
                 <a:ea typeface="Aptos" pitchFamily="34" charset="-122"/>
                 <a:cs typeface="Aptos" pitchFamily="34" charset="-120"/>
               </a:rPr>
-              <a:t>A clear problem statement also helps reviewers decide whether AI.</a:t>
-            </a:r>
-            <a:endParaRPr lang="en-US" sz="1220" dirty="0"/>
+              <a:t>A clear problem statement also helps reviewers.</a:t>
+            </a:r>
+            <a:endParaRPr lang="en-US" sz="1140" dirty="0"/>
           </a:p>
         </p:txBody>
       </p:sp>
@@ -18804,12 +18810,12 @@
         </p:nvSpPr>
         <p:spPr>
           <a:xfrm>
-            <a:off x="7635240" y="4184294"/>
-            <a:ext cx="3474720" cy="1466698"/>
+            <a:off x="7543800" y="4389120"/>
+            <a:ext cx="3611880" cy="1261872"/>
           </a:xfrm>
           <a:prstGeom prst="roundRect">
             <a:avLst>
-              <a:gd name="adj" fmla="val 7481"/>
+              <a:gd name="adj" fmla="val 8696"/>
             </a:avLst>
           </a:prstGeom>
           <a:solidFill>
@@ -18831,8 +18837,8 @@
         </p:nvSpPr>
         <p:spPr>
           <a:xfrm>
-            <a:off x="7799832" y="4330598"/>
-            <a:ext cx="3145536" cy="256032"/>
+            <a:off x="7708392" y="4517136"/>
+            <a:ext cx="3282696" cy="228600"/>
           </a:xfrm>
           <a:prstGeom prst="rect">
             <a:avLst/>
@@ -18848,7 +18854,7 @@
               <a:buNone/>
             </a:pPr>
             <a:r>
-              <a:rPr lang="en-US" sz="1300" b="1" dirty="0">
+              <a:rPr lang="en-US" sz="1220" b="1" dirty="0">
                 <a:solidFill>
                   <a:srgbClr val="0068B7"/>
                 </a:solidFill>
@@ -18858,7 +18864,7 @@
               </a:rPr>
               <a:t>Apply it</a:t>
             </a:r>
-            <a:endParaRPr lang="en-US" sz="1300" dirty="0"/>
+            <a:endParaRPr lang="en-US" sz="1220" dirty="0"/>
           </a:p>
         </p:txBody>
       </p:sp>
@@ -18870,8 +18876,8 @@
         </p:nvSpPr>
         <p:spPr>
           <a:xfrm>
-            <a:off x="7799832" y="4659782"/>
-            <a:ext cx="3145536" cy="899770"/>
+            <a:off x="7708392" y="4828032"/>
+            <a:ext cx="3282696" cy="749808"/>
           </a:xfrm>
           <a:prstGeom prst="rect">
             <a:avLst/>
@@ -18889,7 +18895,7 @@
               <a:buNone/>
             </a:pPr>
             <a:r>
-              <a:rPr lang="en-US" sz="1320" dirty="0">
+              <a:rPr lang="en-US" sz="1220" dirty="0">
                 <a:solidFill>
                   <a:srgbClr val="17364A"/>
                 </a:solidFill>
@@ -18897,9 +18903,9 @@
                 <a:ea typeface="Aptos" pitchFamily="34" charset="-122"/>
                 <a:cs typeface="Aptos" pitchFamily="34" charset="-120"/>
               </a:rPr>
-              <a:t>Connect the concept to public health purpose, responsible use, required safeguards, documentation, and the next action a department should take.</a:t>
-            </a:r>
-            <a:endParaRPr lang="en-US" sz="1320" dirty="0"/>
+              <a:t>Connect the concept to public health purpose, responsible use, required.</a:t>
+            </a:r>
+            <a:endParaRPr lang="en-US" sz="1220" dirty="0"/>
           </a:p>
         </p:txBody>
       </p:sp>

--- a/downloads/presentations/modules/int-200.pptx
+++ b/downloads/presentations/modules/int-200.pptx
@@ -12163,7 +12163,7 @@
                 <a:ea typeface="Aptos" pitchFamily="34" charset="-122"/>
                 <a:cs typeface="Aptos" pitchFamily="34" charset="-120"/>
               </a:rPr>
-              <a:t>• 1. What is the main purpose of AI use case intake?</a:t>
+              <a:t>1. What is the main purpose of AI use case intake?</a:t>
             </a:r>
             <a:endParaRPr lang="en-US" sz="1920" dirty="0"/>
           </a:p>
@@ -12180,7 +12180,7 @@
                 <a:ea typeface="Aptos" pitchFamily="34" charset="-122"/>
                 <a:cs typeface="Aptos" pitchFamily="34" charset="-120"/>
               </a:rPr>
-              <a:t>• 2. Which proposal should usually receive higher-risk triage?</a:t>
+              <a:t>2. Which proposal should usually receive higher-risk triage?</a:t>
             </a:r>
             <a:endParaRPr lang="en-US" sz="1920" dirty="0"/>
           </a:p>
@@ -12197,7 +12197,7 @@
                 <a:ea typeface="Aptos" pitchFamily="34" charset="-122"/>
                 <a:cs typeface="Aptos" pitchFamily="34" charset="-120"/>
               </a:rPr>
-              <a:t>• 3. What should happen when a proposed workflow problem can be solved without.</a:t>
+              <a:t>3. What should happen when a proposed workflow problem can be solved without.</a:t>
             </a:r>
             <a:endParaRPr lang="en-US" sz="1920" dirty="0"/>
           </a:p>
@@ -12304,7 +12304,7 @@
                 <a:ea typeface="Aptos" pitchFamily="34" charset="-122"/>
                 <a:cs typeface="Aptos" pitchFamily="34" charset="-120"/>
               </a:rPr>
-              <a:t>1. What is the main purpose of AI use case intake?</a:t>
+              <a:t>What is the main purpose of AI use case intake?</a:t>
             </a:r>
             <a:endParaRPr lang="en-US" sz="1220" dirty="0"/>
           </a:p>
@@ -12411,41 +12411,7 @@
                 <a:ea typeface="Aptos" pitchFamily="34" charset="-122"/>
                 <a:cs typeface="Aptos" pitchFamily="34" charset="-120"/>
               </a:rPr>
-              <a:t>1.</a:t>
-            </a:r>
-            <a:endParaRPr lang="en-US" sz="1140" dirty="0"/>
-          </a:p>
-          <a:p>
-            <a:pPr indent="0" marL="0">
-              <a:buNone/>
-            </a:pPr>
-            <a:r>
-              <a:rPr lang="en-US" sz="1140" dirty="0">
-                <a:solidFill>
-                  <a:srgbClr val="17364A"/>
-                </a:solidFill>
-                <a:latin typeface="Aptos" pitchFamily="34" charset="0"/>
-                <a:ea typeface="Aptos" pitchFamily="34" charset="-122"/>
-                <a:cs typeface="Aptos" pitchFamily="34" charset="-120"/>
-              </a:rPr>
               <a:t>What is the main purpose of AI use case intake?</a:t>
-            </a:r>
-            <a:endParaRPr lang="en-US" sz="1140" dirty="0"/>
-          </a:p>
-          <a:p>
-            <a:pPr indent="0" marL="0">
-              <a:buNone/>
-            </a:pPr>
-            <a:r>
-              <a:rPr lang="en-US" sz="1140" dirty="0">
-                <a:solidFill>
-                  <a:srgbClr val="17364A"/>
-                </a:solidFill>
-                <a:latin typeface="Aptos" pitchFamily="34" charset="0"/>
-                <a:ea typeface="Aptos" pitchFamily="34" charset="-122"/>
-                <a:cs typeface="Aptos" pitchFamily="34" charset="-120"/>
-              </a:rPr>
-              <a:t>2.</a:t>
             </a:r>
             <a:endParaRPr lang="en-US" sz="1140" dirty="0"/>
           </a:p>
